--- a/ppt/ring2-write-fairness.pptx
+++ b/ppt/ring2-write-fairness.pptx
@@ -28897,8 +28897,8 @@
         </p:blipFill>
         <p:spPr>
           <a:xfrm>
-            <a:off x="3328416" y="1145536"/>
-            <a:ext cx="8296351" cy="2468810"/>
+            <a:off x="3528031" y="1024128"/>
+            <a:ext cx="7897119" cy="2350007"/>
           </a:xfrm>
           <a:prstGeom prst="rect">
             <a:avLst/>
@@ -28913,7 +28913,7 @@
         </p:nvSpPr>
         <p:spPr>
           <a:xfrm>
-            <a:off x="3328416" y="3705787"/>
+            <a:off x="3328416" y="3465575"/>
             <a:ext cx="8296351" cy="292608"/>
           </a:xfrm>
           <a:prstGeom prst="rect">
@@ -28952,8 +28952,8 @@
         </p:nvSpPr>
         <p:spPr>
           <a:xfrm>
-            <a:off x="566928" y="4448987"/>
-            <a:ext cx="3527450" cy="1878660"/>
+            <a:off x="566928" y="4087368"/>
+            <a:ext cx="3527450" cy="2240280"/>
           </a:xfrm>
           <a:prstGeom prst="rect">
             <a:avLst/>
@@ -28998,7 +28998,7 @@
         </p:nvSpPr>
         <p:spPr>
           <a:xfrm>
-            <a:off x="768096" y="4792276"/>
+            <a:off x="768096" y="4611466"/>
             <a:ext cx="3125114" cy="277622"/>
           </a:xfrm>
           <a:prstGeom prst="rect">
@@ -29037,7 +29037,7 @@
         </p:nvSpPr>
         <p:spPr>
           <a:xfrm>
-            <a:off x="768096" y="5152194"/>
+            <a:off x="768096" y="4971384"/>
             <a:ext cx="3125114" cy="868740"/>
           </a:xfrm>
           <a:prstGeom prst="rect">
@@ -29094,8 +29094,8 @@
         </p:nvSpPr>
         <p:spPr>
           <a:xfrm>
-            <a:off x="4332122" y="4448987"/>
-            <a:ext cx="3527450" cy="1878660"/>
+            <a:off x="4332122" y="4087368"/>
+            <a:ext cx="3527450" cy="2240280"/>
           </a:xfrm>
           <a:prstGeom prst="rect">
             <a:avLst/>
@@ -29140,7 +29140,7 @@
         </p:nvSpPr>
         <p:spPr>
           <a:xfrm>
-            <a:off x="4533290" y="4792276"/>
+            <a:off x="4533290" y="4611466"/>
             <a:ext cx="3125114" cy="277622"/>
           </a:xfrm>
           <a:prstGeom prst="rect">
@@ -29179,7 +29179,7 @@
         </p:nvSpPr>
         <p:spPr>
           <a:xfrm>
-            <a:off x="4533290" y="5152194"/>
+            <a:off x="4533290" y="4971384"/>
             <a:ext cx="3125114" cy="868740"/>
           </a:xfrm>
           <a:prstGeom prst="rect">
@@ -29236,8 +29236,8 @@
         </p:nvSpPr>
         <p:spPr>
           <a:xfrm>
-            <a:off x="8097316" y="4448987"/>
-            <a:ext cx="3527450" cy="1878660"/>
+            <a:off x="8097316" y="4087368"/>
+            <a:ext cx="3527450" cy="2240280"/>
           </a:xfrm>
           <a:prstGeom prst="rect">
             <a:avLst/>
@@ -29282,7 +29282,7 @@
         </p:nvSpPr>
         <p:spPr>
           <a:xfrm>
-            <a:off x="8298484" y="4650155"/>
+            <a:off x="8298484" y="4294402"/>
             <a:ext cx="3125114" cy="277622"/>
           </a:xfrm>
           <a:prstGeom prst="rect">
@@ -29308,7 +29308,7 @@
                 </a:solidFill>
                 <a:latin typeface="Microsoft YaHei"/>
               </a:rPr>
-              <a:t>空转为什么消不掉</a:t>
+              <a:t>空转是什么组成的</a:t>
             </a:r>
           </a:p>
         </p:txBody>
@@ -29321,8 +29321,8 @@
         </p:nvSpPr>
         <p:spPr>
           <a:xfrm>
-            <a:off x="8298484" y="5010073"/>
-            <a:ext cx="3125114" cy="1152982"/>
+            <a:off x="8298484" y="4654320"/>
+            <a:ext cx="3125114" cy="1502869"/>
           </a:xfrm>
           <a:prstGeom prst="rect">
             <a:avLst/>
@@ -29341,31 +29341,49 @@
               </a:lnSpc>
             </a:pPr>
             <a:r>
-              <a:rPr sz="1100" b="0">
+              <a:rPr sz="1050" b="0">
                 <a:solidFill>
                   <a:srgbClr val="20242C"/>
                 </a:solidFill>
                 <a:latin typeface="Microsoft YaHei"/>
               </a:rPr>
-              <a:t>在环绝对优先：注入只能挤 transit 留下的空隙，而空隙的</a:t>
-            </a:r>
-            <a:r>
-              <a:rPr sz="1100" b="1">
+              <a:t>逐拍归因、无残项：</a:t>
+            </a:r>
+            <a:r>
+              <a:rPr sz="1050" b="1">
                 <a:solidFill>
                   <a:srgbClr val="20242C"/>
                 </a:solidFill>
                 <a:latin typeface="Microsoft YaHei"/>
               </a:rPr>
-              <a:t>分布</a:t>
-            </a:r>
-            <a:r>
-              <a:rPr sz="1100" b="0">
+              <a:t>I-tag 主动让位 49.1%</a:t>
+            </a:r>
+            <a:r>
+              <a:rPr sz="1050" b="0">
                 <a:solidFill>
                   <a:srgbClr val="20242C"/>
                 </a:solidFill>
                 <a:latin typeface="Microsoft YaHei"/>
               </a:rPr>
-              <a:t>不由总量决定。加深队列、加宽端口都不改这一条。</a:t>
+              <a:t>（槽被留给上游预约）、</a:t>
+            </a:r>
+            <a:r>
+              <a:rPr sz="1050" b="1">
+                <a:solidFill>
+                  <a:srgbClr val="20242C"/>
+                </a:solidFill>
+                <a:latin typeface="Microsoft YaHei"/>
+              </a:rPr>
+              <a:t>dry 42.0%</a:t>
+            </a:r>
+            <a:r>
+              <a:rPr sz="1050" b="0">
+                <a:solidFill>
+                  <a:srgbClr val="20242C"/>
+                </a:solidFill>
+                <a:latin typeface="Microsoft YaHei"/>
+              </a:rPr>
+              <a:t>（四段握手串行，HA 手里还没有 RSP 可发）、在环 flit 同拍抢走 8.6%、队头阻塞 0.2%。</a:t>
             </a:r>
           </a:p>
           <a:p>
@@ -29378,13 +29396,13 @@
               </a:spcBef>
             </a:pPr>
             <a:r>
-              <a:rPr sz="1100" b="1">
+              <a:rPr sz="1050" b="1">
                 <a:solidFill>
                   <a:srgbClr val="D20A2E"/>
                 </a:solidFill>
                 <a:latin typeface="Microsoft YaHei"/>
               </a:rPr>
-              <a:t>结论：带宽目标应当是「不弄丢」，不是「抬上去」。</a:t>
+              <a:t>能回收的不到 1 个点，且要拿公平性换：I-tag 调强可到 97.59% R*，但 Jain 掉 0.029；加深下环队列、加大在飞上限都是净亏。</a:t>
             </a:r>
           </a:p>
         </p:txBody>

--- a/ppt/ring2-write-fairness.pptx
+++ b/ppt/ring2-write-fairness.pptx
@@ -17121,7 +17121,7 @@
                 </a:solidFill>
                 <a:latin typeface="Microsoft YaHei"/>
               </a:rPr>
-              <a:t>左 = 写路径：把协议本来就要发的 DBIDResp 当授权用；右 = 读路径：同一套状态，改的是 CompData 的发出顺序。</a:t>
+              <a:t>上 = 写路径：把协议本来就要发的 DBIDResp 当授权用；下 = 读路径：同一套状态可以照搬，但实测不需要（见下页）。</a:t>
             </a:r>
           </a:p>
         </p:txBody>
@@ -17174,7 +17174,7 @@
         <p:spPr>
           <a:xfrm>
             <a:off x="8951976" y="1408176"/>
-            <a:ext cx="2672791" cy="2355494"/>
+            <a:ext cx="2672791" cy="2204564"/>
           </a:xfrm>
           <a:prstGeom prst="rect">
             <a:avLst/>
@@ -17219,7 +17219,7 @@
         </p:nvSpPr>
         <p:spPr>
           <a:xfrm>
-            <a:off x="9134855" y="1657898"/>
+            <a:off x="9134855" y="1620259"/>
             <a:ext cx="2307031" cy="259080"/>
           </a:xfrm>
           <a:prstGeom prst="rect">
@@ -17258,8 +17258,8 @@
         </p:nvSpPr>
         <p:spPr>
           <a:xfrm>
-            <a:off x="9134855" y="1999274"/>
-            <a:ext cx="2307031" cy="1551249"/>
+            <a:off x="9134855" y="1961635"/>
+            <a:ext cx="2307031" cy="1475597"/>
           </a:xfrm>
           <a:prstGeom prst="rect">
             <a:avLst/>
@@ -17278,7 +17278,7 @@
               </a:lnSpc>
             </a:pPr>
             <a:r>
-              <a:rPr sz="850" b="1">
+              <a:rPr sz="800" b="1">
                 <a:solidFill>
                   <a:srgbClr val="20242C"/>
                 </a:solidFill>
@@ -17287,7 +17287,7 @@
               <a:t>① 检测</a:t>
             </a:r>
             <a:r>
-              <a:rPr sz="850" b="0">
+              <a:rPr sz="800" b="0">
                 <a:solidFill>
                   <a:srgbClr val="20242C"/>
                 </a:solidFill>
@@ -17306,7 +17306,7 @@
               </a:spcBef>
             </a:pPr>
             <a:r>
-              <a:rPr sz="850" b="1">
+              <a:rPr sz="800" b="1">
                 <a:solidFill>
                   <a:srgbClr val="20242C"/>
                 </a:solidFill>
@@ -17315,7 +17315,7 @@
               <a:t>② 传递</a:t>
             </a:r>
             <a:r>
-              <a:rPr sz="850" b="0">
+              <a:rPr sz="800" b="0">
                 <a:solidFill>
                   <a:srgbClr val="20242C"/>
                 </a:solidFill>
@@ -17334,7 +17334,7 @@
               </a:spcBef>
             </a:pPr>
             <a:r>
-              <a:rPr sz="850" b="1">
+              <a:rPr sz="800" b="1">
                 <a:solidFill>
                   <a:srgbClr val="20242C"/>
                 </a:solidFill>
@@ -17343,7 +17343,7 @@
               <a:t>③ 反馈</a:t>
             </a:r>
             <a:r>
-              <a:rPr sz="850" b="0">
+              <a:rPr sz="800" b="0">
                 <a:solidFill>
                   <a:srgbClr val="20242C"/>
                 </a:solidFill>
@@ -17362,7 +17362,7 @@
               </a:spcBef>
             </a:pPr>
             <a:r>
-              <a:rPr sz="850" b="1">
+              <a:rPr sz="800" b="1">
                 <a:solidFill>
                   <a:srgbClr val="20242C"/>
                 </a:solidFill>
@@ -17371,7 +17371,7 @@
               <a:t>④ 执行</a:t>
             </a:r>
             <a:r>
-              <a:rPr sz="850" b="0">
+              <a:rPr sz="800" b="0">
                 <a:solidFill>
                   <a:srgbClr val="20242C"/>
                 </a:solidFill>
@@ -17380,7 +17380,7 @@
               <a:t>：在排队者里把授权给</a:t>
             </a:r>
             <a:r>
-              <a:rPr sz="850" b="1">
+              <a:rPr sz="800" b="1">
                 <a:solidFill>
                   <a:srgbClr val="20242C"/>
                 </a:solidFill>
@@ -17389,7 +17389,7 @@
               <a:t>迄今被服务最少</a:t>
             </a:r>
             <a:r>
-              <a:rPr sz="850" b="0">
+              <a:rPr sz="800" b="0">
                 <a:solidFill>
                   <a:srgbClr val="20242C"/>
                 </a:solidFill>
@@ -17408,8 +17408,8 @@
         </p:nvSpPr>
         <p:spPr>
           <a:xfrm>
-            <a:off x="8951976" y="3909974"/>
-            <a:ext cx="2672791" cy="1402080"/>
+            <a:off x="8951976" y="3759044"/>
+            <a:ext cx="2672791" cy="1442492"/>
           </a:xfrm>
           <a:prstGeom prst="rect">
             <a:avLst/>
@@ -17454,7 +17454,7 @@
         </p:nvSpPr>
         <p:spPr>
           <a:xfrm>
-            <a:off x="9134855" y="4099895"/>
+            <a:off x="9134855" y="3950259"/>
             <a:ext cx="2307031" cy="259080"/>
           </a:xfrm>
           <a:prstGeom prst="rect">
@@ -17480,7 +17480,7 @@
                 </a:solidFill>
                 <a:latin typeface="Microsoft YaHei"/>
               </a:rPr>
-              <a:t>overcommit 跟着在飞上限走</a:t>
+              <a:t>改的是事务层，不是链路层</a:t>
             </a:r>
           </a:p>
         </p:txBody>
@@ -17493,8 +17493,8 @@
         </p:nvSpPr>
         <p:spPr>
           <a:xfrm>
-            <a:off x="9134855" y="4441271"/>
-            <a:ext cx="2307031" cy="717438"/>
+            <a:off x="9134855" y="4291635"/>
+            <a:ext cx="2307031" cy="755263"/>
           </a:xfrm>
           <a:prstGeom prst="rect">
             <a:avLst/>
@@ -17513,31 +17513,49 @@
               </a:lnSpc>
             </a:pPr>
             <a:r>
-              <a:rPr sz="900" b="0">
-                <a:solidFill>
-                  <a:srgbClr val="20242C"/>
-                </a:solidFill>
-                <a:latin typeface="Microsoft YaHei"/>
-              </a:rPr>
-              <a:t>在飞上限 128 时该取 64；收到 32 之后十个核总共只递上约 40 笔，64 永远扣不住任何东西，S16 会退化成 S0。重扫后取 </a:t>
-            </a:r>
-            <a:r>
-              <a:rPr sz="900" b="1">
-                <a:solidFill>
-                  <a:srgbClr val="20242C"/>
-                </a:solidFill>
-                <a:latin typeface="Microsoft YaHei"/>
-              </a:rPr>
-              <a:t>16</a:t>
-            </a:r>
-            <a:r>
-              <a:rPr sz="900" b="0">
-                <a:solidFill>
-                  <a:srgbClr val="20242C"/>
-                </a:solidFill>
-                <a:latin typeface="Microsoft YaHei"/>
-              </a:rPr>
-              <a:t>（上限的一半），12–16 是一段平台。</a:t>
+              <a:rPr sz="950" b="0">
+                <a:solidFill>
+                  <a:srgbClr val="20242C"/>
+                </a:solidFill>
+                <a:latin typeface="Microsoft YaHei"/>
+              </a:rPr>
+              <a:t>四段全部落在 completer 内部：它决定</a:t>
+            </a:r>
+            <a:r>
+              <a:rPr sz="950" b="1">
+                <a:solidFill>
+                  <a:srgbClr val="20242C"/>
+                </a:solidFill>
+                <a:latin typeface="Microsoft YaHei"/>
+              </a:rPr>
+              <a:t>什么时候、先给谁</a:t>
+            </a:r>
+            <a:r>
+              <a:rPr sz="950" b="0">
+                <a:solidFill>
+                  <a:srgbClr val="20242C"/>
+                </a:solidFill>
+                <a:latin typeface="Microsoft YaHei"/>
+              </a:rPr>
+              <a:t>发 DBIDResp。线格式、协议状态机都不动，但</a:t>
+            </a:r>
+            <a:r>
+              <a:rPr sz="950" b="1">
+                <a:solidFill>
+                  <a:srgbClr val="20242C"/>
+                </a:solidFill>
+                <a:latin typeface="Microsoft YaHei"/>
+              </a:rPr>
+              <a:t>动了 HA 的事务调度</a:t>
+            </a:r>
+            <a:r>
+              <a:rPr sz="950" b="0">
+                <a:solidFill>
+                  <a:srgbClr val="20242C"/>
+                </a:solidFill>
+                <a:latin typeface="Microsoft YaHei"/>
+              </a:rPr>
+              <a:t> —— 这一条决定它能不能落地，见结论页。</a:t>
             </a:r>
           </a:p>
         </p:txBody>
@@ -17550,8 +17568,8 @@
         </p:nvSpPr>
         <p:spPr>
           <a:xfrm>
-            <a:off x="8951976" y="5458358"/>
-            <a:ext cx="2672791" cy="869289"/>
+            <a:off x="8951976" y="5347841"/>
+            <a:ext cx="2672791" cy="979806"/>
           </a:xfrm>
           <a:prstGeom prst="rect">
             <a:avLst/>
@@ -17594,8 +17612,8 @@
         </p:nvSpPr>
         <p:spPr>
           <a:xfrm>
-            <a:off x="9262872" y="5549798"/>
-            <a:ext cx="2050999" cy="686409"/>
+            <a:off x="9262872" y="5439281"/>
+            <a:ext cx="2050999" cy="796926"/>
           </a:xfrm>
           <a:prstGeom prst="rect">
             <a:avLst/>
@@ -17614,13 +17632,13 @@
               </a:lnSpc>
             </a:pPr>
             <a:r>
-              <a:rPr sz="1150" b="0">
+              <a:rPr sz="1000" b="0">
                 <a:solidFill>
                   <a:srgbClr val="FFFFFF"/>
                 </a:solidFill>
                 <a:latin typeface="Microsoft YaHei"/>
               </a:rPr>
-              <a:t>扣授权不会制造气泡：占优核只是暂时没数据要发，这一拍的 slot 谁能用谁拿走。</a:t>
+              <a:t>overcommit 要跟着在飞上限走：上限 32 时取 16（12–16 是一段平台）。取 64 就永远扣不住任何东西，S16 会退化成 S0。</a:t>
             </a:r>
           </a:p>
         </p:txBody>
@@ -17804,7 +17822,7 @@
                 </a:solidFill>
                 <a:latin typeface="Microsoft YaHei"/>
               </a:rPr>
-              <a:t>S16 实测：写侧与读侧</a:t>
+              <a:t>S16 实测：写侧要做，读侧不用做</a:t>
             </a:r>
           </a:p>
         </p:txBody>
@@ -18132,7 +18150,7 @@
         </p:blipFill>
         <p:spPr>
           <a:xfrm>
-            <a:off x="3328416" y="1243515"/>
+            <a:off x="3328416" y="1101394"/>
             <a:ext cx="8296351" cy="2557094"/>
           </a:xfrm>
           <a:prstGeom prst="rect">
@@ -18148,7 +18166,7 @@
         </p:nvSpPr>
         <p:spPr>
           <a:xfrm>
-            <a:off x="3328416" y="3892049"/>
+            <a:off x="3328416" y="3749929"/>
             <a:ext cx="8296351" cy="292608"/>
           </a:xfrm>
           <a:prstGeom prst="rect">
@@ -18168,13 +18186,13 @@
               </a:lnSpc>
             </a:pPr>
             <a:r>
-              <a:rPr sz="1000" b="0">
+              <a:rPr sz="850" b="0">
                 <a:solidFill>
                   <a:srgbClr val="667080"/>
                 </a:solidFill>
                 <a:latin typeface="Microsoft YaHei"/>
               </a:rPr>
-              <a:t>左两幅 = 写（K = 20000），右两幅 = 读（K = 5000）；每幅内三根柱依次 S0 / S1 / S16，橙虚线 = 理论上限 R*。</a:t>
+              <a:t>左两幅 = 写（K = 20000），右两幅 = 读（K = 5000）；每幅内三根柱依次 S0 / S1 / S16，橙虚线 = 理论上限 R*。注意读侧 S0 与 S16-R 两根柱几乎一样高。</a:t>
             </a:r>
           </a:p>
         </p:txBody>
@@ -18187,8 +18205,8 @@
         </p:nvSpPr>
         <p:spPr>
           <a:xfrm>
-            <a:off x="566928" y="4733229"/>
-            <a:ext cx="3527450" cy="1594418"/>
+            <a:off x="566928" y="4448987"/>
+            <a:ext cx="3527450" cy="1878660"/>
           </a:xfrm>
           <a:prstGeom prst="rect">
             <a:avLst/>
@@ -18233,7 +18251,7 @@
         </p:nvSpPr>
         <p:spPr>
           <a:xfrm>
-            <a:off x="768096" y="5038417"/>
+            <a:off x="768096" y="4896297"/>
             <a:ext cx="3125114" cy="277622"/>
           </a:xfrm>
           <a:prstGeom prst="rect">
@@ -18272,7 +18290,7 @@
         </p:nvSpPr>
         <p:spPr>
           <a:xfrm>
-            <a:off x="768096" y="5398335"/>
+            <a:off x="768096" y="5256215"/>
             <a:ext cx="3125114" cy="660699"/>
           </a:xfrm>
           <a:prstGeom prst="rect">
@@ -18347,8 +18365,8 @@
         </p:nvSpPr>
         <p:spPr>
           <a:xfrm>
-            <a:off x="4332122" y="4733229"/>
-            <a:ext cx="3527450" cy="1594418"/>
+            <a:off x="4332122" y="4448987"/>
+            <a:ext cx="3527450" cy="1878660"/>
           </a:xfrm>
           <a:prstGeom prst="rect">
             <a:avLst/>
@@ -18393,7 +18411,7 @@
         </p:nvSpPr>
         <p:spPr>
           <a:xfrm>
-            <a:off x="4533290" y="4934397"/>
+            <a:off x="4533290" y="4896297"/>
             <a:ext cx="3125114" cy="277622"/>
           </a:xfrm>
           <a:prstGeom prst="rect">
@@ -18419,7 +18437,7 @@
                 </a:solidFill>
                 <a:latin typeface="Microsoft YaHei"/>
               </a:rPr>
-              <a:t>读：带宽还是正的</a:t>
+              <a:t>读：S0 本来就是齐的</a:t>
             </a:r>
           </a:p>
         </p:txBody>
@@ -18432,8 +18450,8 @@
         </p:nvSpPr>
         <p:spPr>
           <a:xfrm>
-            <a:off x="4533290" y="5294315"/>
-            <a:ext cx="3125114" cy="868740"/>
+            <a:off x="4533290" y="5256215"/>
+            <a:ext cx="3125114" cy="660699"/>
           </a:xfrm>
           <a:prstGeom prst="rect">
             <a:avLst/>
@@ -18458,7 +18476,7 @@
                 </a:solidFill>
                 <a:latin typeface="Microsoft YaHei"/>
               </a:rPr>
-              <a:t>S16-R 拿到 R* 的 </a:t>
+              <a:t>十个核的读带宽只差 </a:t>
             </a:r>
             <a:r>
               <a:rPr sz="1100" b="1">
@@ -18467,7 +18485,7 @@
                 </a:solidFill>
                 <a:latin typeface="Microsoft YaHei"/>
               </a:rPr>
-              <a:t>98.41%</a:t>
+              <a:t>0.36%</a:t>
             </a:r>
             <a:r>
               <a:rPr sz="1100" b="0">
@@ -18476,7 +18494,7 @@
                 </a:solidFill>
                 <a:latin typeface="Microsoft YaHei"/>
               </a:rPr>
-              <a:t>，比 S0 还高 0.47%，Jain 0.99449。把控制放在请求端的 S1-R 则掉 </a:t>
+              <a:t>（0.5603–0.5623），Jain 0.99067、max/min 1.0035，带宽已到 R* 的 97.96%。</a:t>
             </a:r>
             <a:r>
               <a:rPr sz="1100" b="1">
@@ -18485,16 +18503,7 @@
                 </a:solidFill>
                 <a:latin typeface="Microsoft YaHei"/>
               </a:rPr>
-              <a:t>20.5%</a:t>
-            </a:r>
-            <a:r>
-              <a:rPr sz="1100" b="0">
-                <a:solidFill>
-                  <a:srgbClr val="20242C"/>
-                </a:solidFill>
-                <a:latin typeface="Microsoft YaHei"/>
-              </a:rPr>
-              <a:t> 带宽、Jain 反而更低（0.97474）—— 读侧管错了对象。</a:t>
+              <a:t>读侧没有待解决的问题。</a:t>
             </a:r>
           </a:p>
         </p:txBody>
@@ -18507,8 +18516,8 @@
         </p:nvSpPr>
         <p:spPr>
           <a:xfrm>
-            <a:off x="8097316" y="4733229"/>
-            <a:ext cx="3527450" cy="1594418"/>
+            <a:off x="8097316" y="4448987"/>
+            <a:ext cx="3527450" cy="1878660"/>
           </a:xfrm>
           <a:prstGeom prst="rect">
             <a:avLst/>
@@ -18553,7 +18562,7 @@
         </p:nvSpPr>
         <p:spPr>
           <a:xfrm>
-            <a:off x="8298484" y="4934397"/>
+            <a:off x="8298484" y="4650155"/>
             <a:ext cx="3125114" cy="277622"/>
           </a:xfrm>
           <a:prstGeom prst="rect">
@@ -18579,7 +18588,7 @@
                 </a:solidFill>
                 <a:latin typeface="Microsoft YaHei"/>
               </a:rPr>
-              <a:t>读侧本来就不太不公平</a:t>
+              <a:t>所以读侧建议不做</a:t>
             </a:r>
           </a:p>
         </p:txBody>
@@ -18592,8 +18601,8 @@
         </p:nvSpPr>
         <p:spPr>
           <a:xfrm>
-            <a:off x="8298484" y="5294315"/>
-            <a:ext cx="3125114" cy="868740"/>
+            <a:off x="8298484" y="5010073"/>
+            <a:ext cx="3125114" cy="1152982"/>
           </a:xfrm>
           <a:prstGeom prst="rect">
             <a:avLst/>
@@ -18618,7 +18627,35 @@
                 </a:solidFill>
                 <a:latin typeface="Microsoft YaHei"/>
               </a:rPr>
-              <a:t>S0 读的 Jain 已有 0.99067、max/min 1.0035。因为读的大流量是 HA 发出的 CompData，注入点在 HA 而不是核，十个核不争同一个入环口。S16 的读侧价值主要在带宽与鲁棒性。</a:t>
+              <a:t>S16-R 把带宽推到 98.41%（+0.47%）、Jain 到 0.99449，</a:t>
+            </a:r>
+            <a:r>
+              <a:rPr sz="1100" b="1">
+                <a:solidFill>
+                  <a:srgbClr val="D20A2E"/>
+                </a:solidFill>
+                <a:latin typeface="Microsoft YaHei"/>
+              </a:rPr>
+              <a:t>收益在噪声量级，不值一次事务层改动。</a:t>
+            </a:r>
+          </a:p>
+          <a:p>
+            <a:pPr algn="l">
+              <a:lnSpc>
+                <a:spcPct val="102000"/>
+              </a:lnSpc>
+              <a:spcBef>
+                <a:spcPts val="600"/>
+              </a:spcBef>
+            </a:pPr>
+            <a:r>
+              <a:rPr sz="1100" b="0">
+                <a:solidFill>
+                  <a:srgbClr val="20242C"/>
+                </a:solidFill>
+                <a:latin typeface="Microsoft YaHei"/>
+              </a:rPr>
+              <a:t>顺带一条反证：同样管读、但把控制放在请求端的 S1-R 掉 20.5% 带宽、Jain 反而更低（0.97474）。控制点必须在 HA 侧。</a:t>
             </a:r>
           </a:p>
         </p:txBody>
@@ -19944,8 +19981,8 @@
         </p:blipFill>
         <p:spPr>
           <a:xfrm>
-            <a:off x="3328416" y="1207499"/>
-            <a:ext cx="8296351" cy="2629125"/>
+            <a:off x="3768801" y="1024128"/>
+            <a:ext cx="7415580" cy="2350007"/>
           </a:xfrm>
           <a:prstGeom prst="rect">
             <a:avLst/>
@@ -19960,7 +19997,7 @@
         </p:nvSpPr>
         <p:spPr>
           <a:xfrm>
-            <a:off x="3328416" y="3928065"/>
+            <a:off x="3328416" y="3465575"/>
             <a:ext cx="8296351" cy="292608"/>
           </a:xfrm>
           <a:prstGeom prst="rect">
@@ -19986,7 +20023,7 @@
                 </a:solidFill>
                 <a:latin typeface="Microsoft YaHei"/>
               </a:rPr>
-              <a:t>四根柱依次 S0 / S1 / S16 / S22，橙虚线 = 理论上限 R*；写侧 K = 20000。第三幅的 MAX / MIN 越接近 1 越齐。</a:t>
+              <a:t>四根柱依次 S0 / S1 / S16 / S22，橙虚线 = 理论上限 R*；写侧 K = 20000。后两幅是公平性的两个不同问题，见右侧第三张卡。</a:t>
             </a:r>
           </a:p>
         </p:txBody>
@@ -19999,8 +20036,8 @@
         </p:nvSpPr>
         <p:spPr>
           <a:xfrm>
-            <a:off x="566928" y="4733229"/>
-            <a:ext cx="3527450" cy="1594418"/>
+            <a:off x="566928" y="4087368"/>
+            <a:ext cx="3527450" cy="2240280"/>
           </a:xfrm>
           <a:prstGeom prst="rect">
             <a:avLst/>
@@ -20045,7 +20082,7 @@
         </p:nvSpPr>
         <p:spPr>
           <a:xfrm>
-            <a:off x="768096" y="4934397"/>
+            <a:off x="768096" y="4611466"/>
             <a:ext cx="3125114" cy="277622"/>
           </a:xfrm>
           <a:prstGeom prst="rect">
@@ -20084,7 +20121,7 @@
         </p:nvSpPr>
         <p:spPr>
           <a:xfrm>
-            <a:off x="768096" y="5294315"/>
+            <a:off x="768096" y="4971384"/>
             <a:ext cx="3125114" cy="868740"/>
           </a:xfrm>
           <a:prstGeom prst="rect">
@@ -20159,8 +20196,8 @@
         </p:nvSpPr>
         <p:spPr>
           <a:xfrm>
-            <a:off x="4332122" y="4733229"/>
-            <a:ext cx="3527450" cy="1594418"/>
+            <a:off x="4332122" y="4087368"/>
+            <a:ext cx="3527450" cy="2240280"/>
           </a:xfrm>
           <a:prstGeom prst="rect">
             <a:avLst/>
@@ -20205,7 +20242,7 @@
         </p:nvSpPr>
         <p:spPr>
           <a:xfrm>
-            <a:off x="4533290" y="5038417"/>
+            <a:off x="4533290" y="4611466"/>
             <a:ext cx="3125114" cy="277622"/>
           </a:xfrm>
           <a:prstGeom prst="rect">
@@ -20231,7 +20268,7 @@
                 </a:solidFill>
                 <a:latin typeface="Microsoft YaHei"/>
               </a:rPr>
-              <a:t>但被 S16 支配</a:t>
+              <a:t>数字上被 S16 支配，但层次不同</a:t>
             </a:r>
           </a:p>
         </p:txBody>
@@ -20244,8 +20281,8 @@
         </p:nvSpPr>
         <p:spPr>
           <a:xfrm>
-            <a:off x="4533290" y="5398335"/>
-            <a:ext cx="3125114" cy="660699"/>
+            <a:off x="4533290" y="4971384"/>
+            <a:ext cx="3125114" cy="868740"/>
           </a:xfrm>
           <a:prstGeom prst="rect">
             <a:avLst/>
@@ -20288,25 +20325,16 @@
                 </a:solidFill>
                 <a:latin typeface="Microsoft YaHei"/>
               </a:rPr>
-              <a:t>拿到更高的 Jain（0.98466）和更小的带宽代价（0.39%）。S22 的价值在于它是</a:t>
+              <a:t>拿到更高的 Jain（0.98466）和更小的带宽代价（0.39%）。S22 唯一的、也是决定性的优势：</a:t>
             </a:r>
             <a:r>
               <a:rPr sz="1100" b="1">
                 <a:solidFill>
-                  <a:srgbClr val="20242C"/>
-                </a:solidFill>
-                <a:latin typeface="Microsoft YaHei"/>
-              </a:rPr>
-              <a:t>纯环上仲裁</a:t>
-            </a:r>
-            <a:r>
-              <a:rPr sz="1100" b="0">
-                <a:solidFill>
-                  <a:srgbClr val="20242C"/>
-                </a:solidFill>
-                <a:latin typeface="Microsoft YaHei"/>
-              </a:rPr>
-              <a:t>，不依赖 completer 侧的授权语义。</a:t>
+                  <a:srgbClr val="D20A2E"/>
+                </a:solidFill>
+                <a:latin typeface="Microsoft YaHei"/>
+              </a:rPr>
+              <a:t>它只改环上仲裁，一点事务层都不碰。</a:t>
             </a:r>
           </a:p>
         </p:txBody>
@@ -20319,8 +20347,8 @@
         </p:nvSpPr>
         <p:spPr>
           <a:xfrm>
-            <a:off x="8097316" y="4733229"/>
-            <a:ext cx="3527450" cy="1594418"/>
+            <a:off x="8097316" y="4087368"/>
+            <a:ext cx="3527450" cy="2240280"/>
           </a:xfrm>
           <a:prstGeom prst="rect">
             <a:avLst/>
@@ -20365,7 +20393,7 @@
         </p:nvSpPr>
         <p:spPr>
           <a:xfrm>
-            <a:off x="8298484" y="5038417"/>
+            <a:off x="8298484" y="4294402"/>
             <a:ext cx="3125114" cy="277622"/>
           </a:xfrm>
           <a:prstGeom prst="rect">
@@ -20391,7 +20419,7 @@
                 </a:solidFill>
                 <a:latin typeface="Microsoft YaHei"/>
               </a:rPr>
-              <a:t>不要买深队列变体</a:t>
+              <a:t>两个公平性指标分别在问什么</a:t>
             </a:r>
           </a:p>
         </p:txBody>
@@ -20404,8 +20432,8 @@
         </p:nvSpPr>
         <p:spPr>
           <a:xfrm>
-            <a:off x="8298484" y="5398335"/>
-            <a:ext cx="3125114" cy="660699"/>
+            <a:off x="8298484" y="4654320"/>
+            <a:ext cx="3125114" cy="1502869"/>
           </a:xfrm>
           <a:prstGeom prst="rect">
             <a:avLst/>
@@ -20424,31 +20452,50 @@
               </a:lnSpc>
             </a:pPr>
             <a:r>
-              <a:rPr sz="1100" b="0">
-                <a:solidFill>
-                  <a:srgbClr val="20242C"/>
-                </a:solidFill>
-                <a:latin typeface="Microsoft YaHei"/>
-              </a:rPr>
-              <a:t>把下环队列从 12/8 加到 32/32，η 只从 0.8883 涨到 0.9210，硬件贵 </a:t>
-            </a:r>
-            <a:r>
-              <a:rPr sz="1100" b="1">
-                <a:solidFill>
-                  <a:srgbClr val="20242C"/>
-                </a:solidFill>
-                <a:latin typeface="Microsoft YaHei"/>
-              </a:rPr>
-              <a:t>86 倍</a:t>
-            </a:r>
-            <a:r>
-              <a:rPr sz="1100" b="0">
-                <a:solidFill>
-                  <a:srgbClr val="20242C"/>
-                </a:solidFill>
-                <a:latin typeface="Microsoft YaHei"/>
-              </a:rPr>
-              <a:t>（1,198,560 FF‑eq）—— 花在队列上不如花在决策上。</a:t>
+              <a:rPr sz="1050" b="1">
+                <a:solidFill>
+                  <a:srgbClr val="20242C"/>
+                </a:solidFill>
+                <a:latin typeface="Microsoft YaHei"/>
+              </a:rPr>
+              <a:t>瞬时均衡度</a:t>
+            </a:r>
+            <a:r>
+              <a:rPr sz="1050" b="0">
+                <a:solidFill>
+                  <a:srgbClr val="20242C"/>
+                </a:solidFill>
+                <a:latin typeface="Microsoft YaHei"/>
+              </a:rPr>
+              <a:t>（每 100 拍算一次 Jain 再平均）问的是：在任意一小段时间里，十个核是不是同时都在被服务。</a:t>
+            </a:r>
+          </a:p>
+          <a:p>
+            <a:pPr algn="l">
+              <a:lnSpc>
+                <a:spcPct val="102000"/>
+              </a:lnSpc>
+              <a:spcBef>
+                <a:spcPts val="600"/>
+              </a:spcBef>
+            </a:pPr>
+            <a:r>
+              <a:rPr sz="1050" b="1">
+                <a:solidFill>
+                  <a:srgbClr val="20242C"/>
+                </a:solidFill>
+                <a:latin typeface="Microsoft YaHei"/>
+              </a:rPr>
+              <a:t>长期速率差</a:t>
+            </a:r>
+            <a:r>
+              <a:rPr sz="1050" b="0">
+                <a:solidFill>
+                  <a:srgbClr val="20242C"/>
+                </a:solidFill>
+                <a:latin typeface="Microsoft YaHei"/>
+              </a:rPr>
+              <a:t>（整窗最快核带宽 ÷ 最慢核带宽）问的是：把整个争用窗平均下来，有没有哪个核被系统性地拖慢。S0 = 1.5663 意味着最快的核长期比最慢的核快 57%。</a:t>
             </a:r>
           </a:p>
         </p:txBody>
@@ -20954,7 +21001,7 @@
                 </a:solidFill>
                 <a:latin typeface="Microsoft YaHei"/>
               </a:rPr>
-              <a:t>带宽线已基本关死；公平缺陷是真实的，但它不必用带宽去换 —— 900 FF‑eq 的 S16 已经把两头都拿住了。</a:t>
+              <a:t>带宽线已基本关死；公平缺陷是真实的，但它不必用带宽去换。真正要拍板的不是数字，而是层次 —— 动得了事务层就选 S16，动不了就选 S22。</a:t>
             </a:r>
           </a:p>
         </p:txBody>
@@ -21356,8 +21403,8 @@
         </p:nvSpPr>
         <p:spPr>
           <a:xfrm>
-            <a:off x="566928" y="2498643"/>
-            <a:ext cx="2599867" cy="2464216"/>
+            <a:off x="566928" y="2231136"/>
+            <a:ext cx="2599867" cy="2999231"/>
           </a:xfrm>
           <a:prstGeom prst="rect">
             <a:avLst/>
@@ -21499,8 +21546,8 @@
         </p:nvSpPr>
         <p:spPr>
           <a:xfrm>
-            <a:off x="3386251" y="2498643"/>
-            <a:ext cx="2599867" cy="2464216"/>
+            <a:off x="3386251" y="2231136"/>
+            <a:ext cx="2599867" cy="2999231"/>
           </a:xfrm>
           <a:prstGeom prst="rect">
             <a:avLst/>
@@ -21642,8 +21689,8 @@
         </p:nvSpPr>
         <p:spPr>
           <a:xfrm>
-            <a:off x="6205575" y="2498643"/>
-            <a:ext cx="2599867" cy="2464216"/>
+            <a:off x="6205575" y="2231136"/>
+            <a:ext cx="2599867" cy="2999231"/>
           </a:xfrm>
           <a:prstGeom prst="rect">
             <a:avLst/>
@@ -21785,8 +21832,8 @@
         </p:nvSpPr>
         <p:spPr>
           <a:xfrm>
-            <a:off x="9024899" y="2498643"/>
-            <a:ext cx="2599867" cy="2464216"/>
+            <a:off x="9024899" y="2231136"/>
+            <a:ext cx="2599867" cy="2999231"/>
           </a:xfrm>
           <a:prstGeom prst="rect">
             <a:avLst/>
@@ -21831,8 +21878,8 @@
         </p:nvSpPr>
         <p:spPr>
           <a:xfrm>
-            <a:off x="9226067" y="2813288"/>
-            <a:ext cx="2197531" cy="314705"/>
+            <a:off x="9226067" y="2598298"/>
+            <a:ext cx="2197531" cy="592836"/>
           </a:xfrm>
           <a:prstGeom prst="rect">
             <a:avLst/>
@@ -21857,7 +21904,7 @@
                 </a:solidFill>
                 <a:latin typeface="Microsoft YaHei"/>
               </a:rPr>
-              <a:t>④ 两头可以同时拿住</a:t>
+              <a:t>④ 两头能同时拿住，但要动事务层</a:t>
             </a:r>
           </a:p>
         </p:txBody>
@@ -21870,8 +21917,8 @@
         </p:nvSpPr>
         <p:spPr>
           <a:xfrm>
-            <a:off x="9226067" y="3210290"/>
-            <a:ext cx="2197531" cy="1474500"/>
+            <a:off x="9226067" y="3273430"/>
+            <a:ext cx="2197531" cy="1626351"/>
           </a:xfrm>
           <a:prstGeom prst="rect">
             <a:avLst/>
@@ -21890,7 +21937,7 @@
               </a:lnSpc>
             </a:pPr>
             <a:r>
-              <a:rPr sz="1200" b="0">
+              <a:rPr sz="950" b="0">
                 <a:solidFill>
                   <a:srgbClr val="20242C"/>
                 </a:solidFill>
@@ -21909,13 +21956,50 @@
               </a:spcBef>
             </a:pPr>
             <a:r>
-              <a:rPr sz="1200" b="1">
+              <a:rPr sz="950" b="0">
+                <a:solidFill>
+                  <a:srgbClr val="20242C"/>
+                </a:solidFill>
+                <a:latin typeface="Microsoft YaHei"/>
+              </a:rPr>
+              <a:t>代价是它改的是 </a:t>
+            </a:r>
+            <a:r>
+              <a:rPr sz="950" b="1">
+                <a:solidFill>
+                  <a:srgbClr val="20242C"/>
+                </a:solidFill>
+                <a:latin typeface="Microsoft YaHei"/>
+              </a:rPr>
+              <a:t>HA 何时给谁发 DBIDResp</a:t>
+            </a:r>
+            <a:r>
+              <a:rPr sz="950" b="0">
+                <a:solidFill>
+                  <a:srgbClr val="20242C"/>
+                </a:solidFill>
+                <a:latin typeface="Microsoft YaHei"/>
+              </a:rPr>
+              <a:t>，属事务层调度。只改环上仲裁的 S22 完全不碰这一层，但要贵 15 倍、多让 1.8 个点带宽。</a:t>
+            </a:r>
+          </a:p>
+          <a:p>
+            <a:pPr algn="l">
+              <a:lnSpc>
+                <a:spcPct val="102000"/>
+              </a:lnSpc>
+              <a:spcBef>
+                <a:spcPts val="600"/>
+              </a:spcBef>
+            </a:pPr>
+            <a:r>
+              <a:rPr sz="950" b="1">
                 <a:solidFill>
                   <a:srgbClr val="D20A2E"/>
                 </a:solidFill>
                 <a:latin typeface="Microsoft YaHei"/>
               </a:rPr>
-              <a:t>读侧同样成立，且带宽还是正的（+0.47%）。</a:t>
+              <a:t>所以这是一道层次题，不是一道数字题。</a:t>
             </a:r>
           </a:p>
         </p:txBody>
@@ -22387,7 +22471,7 @@
                 </a:solidFill>
                 <a:latin typeface="Microsoft YaHei"/>
               </a:rPr>
-              <a:t>按成本递增的三步，外加一份不建议清单</a:t>
+              <a:t>一步无条件先做，一步二选一，外加一份不建议清单</a:t>
             </a:r>
           </a:p>
         </p:txBody>
@@ -22529,8 +22613,8 @@
         </p:nvSpPr>
         <p:spPr>
           <a:xfrm>
-            <a:off x="786384" y="3079402"/>
-            <a:ext cx="2160955" cy="314705"/>
+            <a:off x="786384" y="2968706"/>
+            <a:ext cx="2160955" cy="592836"/>
           </a:xfrm>
           <a:prstGeom prst="rect">
             <a:avLst/>
@@ -22555,7 +22639,7 @@
                 </a:solidFill>
                 <a:latin typeface="Microsoft YaHei"/>
               </a:rPr>
-              <a:t>立刻做 · 0 FF‑eq</a:t>
+              <a:t>第一步 · 0 FF‑eq · 无条件</a:t>
             </a:r>
           </a:p>
         </p:txBody>
@@ -22568,8 +22652,8 @@
         </p:nvSpPr>
         <p:spPr>
           <a:xfrm>
-            <a:off x="786384" y="3476404"/>
-            <a:ext cx="2160955" cy="1417761"/>
+            <a:off x="786384" y="3643838"/>
+            <a:ext cx="2160955" cy="1361023"/>
           </a:xfrm>
           <a:prstGeom prst="rect">
             <a:avLst/>
@@ -22588,7 +22672,7 @@
               </a:lnSpc>
             </a:pPr>
             <a:r>
-              <a:rPr sz="1150" b="1">
+              <a:rPr sz="1100" b="1">
                 <a:solidFill>
                   <a:srgbClr val="20242C"/>
                 </a:solidFill>
@@ -22597,7 +22681,7 @@
               <a:t>每核在飞上限收到 32。</a:t>
             </a:r>
             <a:r>
-              <a:rPr sz="1150" b="0">
+              <a:rPr sz="1100" b="0">
                 <a:solidFill>
                   <a:srgbClr val="20242C"/>
                 </a:solidFill>
@@ -22616,7 +22700,7 @@
               </a:spcBef>
             </a:pPr>
             <a:r>
-              <a:rPr sz="1150" b="1">
+              <a:rPr sz="1100" b="1">
                 <a:solidFill>
                   <a:srgbClr val="D20A2E"/>
                 </a:solidFill>
@@ -22764,8 +22848,8 @@
         </p:nvSpPr>
         <p:spPr>
           <a:xfrm>
-            <a:off x="3605707" y="2975381"/>
-            <a:ext cx="2160955" cy="314705"/>
+            <a:off x="3605707" y="3110552"/>
+            <a:ext cx="2160955" cy="592836"/>
           </a:xfrm>
           <a:prstGeom prst="rect">
             <a:avLst/>
@@ -22790,7 +22874,7 @@
                 </a:solidFill>
                 <a:latin typeface="Microsoft YaHei"/>
               </a:rPr>
-              <a:t>主推 · 900 FF‑eq</a:t>
+              <a:t>二选一 A · 900 FF‑eq · 需动事务层</a:t>
             </a:r>
           </a:p>
         </p:txBody>
@@ -22803,8 +22887,8 @@
         </p:nvSpPr>
         <p:spPr>
           <a:xfrm>
-            <a:off x="3605707" y="3372383"/>
-            <a:ext cx="2160955" cy="1625803"/>
+            <a:off x="3605707" y="3785684"/>
+            <a:ext cx="2160955" cy="1077330"/>
           </a:xfrm>
           <a:prstGeom prst="rect">
             <a:avLst/>
@@ -22823,22 +22907,22 @@
               </a:lnSpc>
             </a:pPr>
             <a:r>
-              <a:rPr sz="1000" b="1">
-                <a:solidFill>
-                  <a:srgbClr val="20242C"/>
-                </a:solidFill>
-                <a:latin typeface="Microsoft YaHei"/>
-              </a:rPr>
-              <a:t>投 S16 授权保留。</a:t>
-            </a:r>
-            <a:r>
-              <a:rPr sz="1000" b="0">
-                <a:solidFill>
-                  <a:srgbClr val="20242C"/>
-                </a:solidFill>
-                <a:latin typeface="Microsoft YaHei"/>
-              </a:rPr>
-              <a:t>写侧 Jain 0.92818 → 0.98466、带宽 −0.39%；读侧带宽 +0.47%、Jain 0.99449；非均匀流量拿到 R* 的 99.74%。</a:t>
+              <a:rPr sz="850" b="1">
+                <a:solidFill>
+                  <a:srgbClr val="20242C"/>
+                </a:solidFill>
+                <a:latin typeface="Microsoft YaHei"/>
+              </a:rPr>
+              <a:t>S16 授权保留。</a:t>
+            </a:r>
+            <a:r>
+              <a:rPr sz="850" b="0">
+                <a:solidFill>
+                  <a:srgbClr val="20242C"/>
+                </a:solidFill>
+                <a:latin typeface="Microsoft YaHei"/>
+              </a:rPr>
+              <a:t>写侧 Jain 0.92818 → 0.98466、带宽只让 0.39%、非均匀流量拿到 R* 的 99.74% —— 四个方案里唯一两头都不亏的。</a:t>
             </a:r>
           </a:p>
           <a:p>
@@ -22851,13 +22935,22 @@
               </a:spcBef>
             </a:pPr>
             <a:r>
-              <a:rPr sz="1000" b="0">
-                <a:solidFill>
-                  <a:srgbClr val="20242C"/>
-                </a:solidFill>
-                <a:latin typeface="Microsoft YaHei"/>
-              </a:rPr>
-              <a:t>不加总线、不加表，只改 completer 何时发 DBIDResp / CompData。唯一要定的参数是 overcommit = 在飞上限的一半。</a:t>
+              <a:rPr sz="850" b="1">
+                <a:solidFill>
+                  <a:srgbClr val="20242C"/>
+                </a:solidFill>
+                <a:latin typeface="Microsoft YaHei"/>
+              </a:rPr>
+              <a:t>前提</a:t>
+            </a:r>
+            <a:r>
+              <a:rPr sz="850" b="0">
+                <a:solidFill>
+                  <a:srgbClr val="20242C"/>
+                </a:solidFill>
+                <a:latin typeface="Microsoft YaHei"/>
+              </a:rPr>
+              <a:t>：completer 的授权调度可改。线格式与协议状态机不动，但要改 HA 何时给谁发 DBIDResp，须 IP 可改并过一次合规复核。</a:t>
             </a:r>
           </a:p>
         </p:txBody>
@@ -22999,8 +23092,8 @@
         </p:nvSpPr>
         <p:spPr>
           <a:xfrm>
-            <a:off x="6425031" y="2970653"/>
-            <a:ext cx="2160955" cy="314705"/>
+            <a:off x="6425031" y="2963978"/>
+            <a:ext cx="2160955" cy="592836"/>
           </a:xfrm>
           <a:prstGeom prst="rect">
             <a:avLst/>
@@ -23025,7 +23118,7 @@
                 </a:solidFill>
                 <a:latin typeface="Microsoft YaHei"/>
               </a:rPr>
-              <a:t>备选 · 13,920 FF‑eq</a:t>
+              <a:t>二选一 B · 13,920 FF‑eq · 不碰事务层</a:t>
             </a:r>
           </a:p>
         </p:txBody>
@@ -23038,8 +23131,8 @@
         </p:nvSpPr>
         <p:spPr>
           <a:xfrm>
-            <a:off x="6425031" y="3367655"/>
-            <a:ext cx="2160955" cy="1635259"/>
+            <a:off x="6425031" y="3639110"/>
+            <a:ext cx="2160955" cy="1370479"/>
           </a:xfrm>
           <a:prstGeom prst="rect">
             <a:avLst/>
@@ -23058,22 +23151,22 @@
               </a:lnSpc>
             </a:pPr>
             <a:r>
-              <a:rPr sz="1150" b="1">
-                <a:solidFill>
-                  <a:srgbClr val="20242C"/>
-                </a:solidFill>
-                <a:latin typeface="Microsoft YaHei"/>
-              </a:rPr>
-              <a:t>S22-stock</a:t>
-            </a:r>
-            <a:r>
-              <a:rPr sz="1150" b="0">
-                <a:solidFill>
-                  <a:srgbClr val="20242C"/>
-                </a:solidFill>
-                <a:latin typeface="Microsoft YaHei"/>
-              </a:rPr>
-              <a:t>：复用 S1 那条 6 bit 总线，去掉乘法器和令牌桶换成加法树。Jain 0.94799、带宽 −2.21%，全面优于 S1 且更便宜。</a:t>
+              <a:rPr sz="950" b="1">
+                <a:solidFill>
+                  <a:srgbClr val="20242C"/>
+                </a:solidFill>
+                <a:latin typeface="Microsoft YaHei"/>
+              </a:rPr>
+              <a:t>S22-stock。</a:t>
+            </a:r>
+            <a:r>
+              <a:rPr sz="950" b="0">
+                <a:solidFill>
+                  <a:srgbClr val="20242C"/>
+                </a:solidFill>
+                <a:latin typeface="Microsoft YaHei"/>
+              </a:rPr>
+              <a:t>当 HA 是不可改的硬 IP 时的落点：只改环上仲裁 —— 这一拍谁让出哪个位置。协议、事务层、线格式零改动。</a:t>
             </a:r>
           </a:p>
           <a:p>
@@ -23086,13 +23179,22 @@
               </a:spcBef>
             </a:pPr>
             <a:r>
-              <a:rPr sz="1150" b="1">
+              <a:rPr sz="950" b="0">
+                <a:solidFill>
+                  <a:srgbClr val="20242C"/>
+                </a:solidFill>
+                <a:latin typeface="Microsoft YaHei"/>
+              </a:rPr>
+              <a:t>Jain 0.94799、带宽 −2.21%，全面优于 S1 且便宜 34%。</a:t>
+            </a:r>
+            <a:r>
+              <a:rPr sz="950" b="1">
                 <a:solidFill>
                   <a:srgbClr val="D20A2E"/>
                 </a:solidFill>
                 <a:latin typeface="Microsoft YaHei"/>
               </a:rPr>
-              <a:t>它不依赖 completer 的授权语义，可作为 S16 不适用时的纯环上方案。</a:t>
+              <a:t>代价是比 A 贵 15 倍、多让 1.8 个点带宽。</a:t>
             </a:r>
           </a:p>
         </p:txBody>
@@ -23234,7 +23336,7 @@
         </p:nvSpPr>
         <p:spPr>
           <a:xfrm>
-            <a:off x="9244355" y="3041302"/>
+            <a:off x="9244355" y="2965650"/>
             <a:ext cx="2160955" cy="314705"/>
           </a:xfrm>
           <a:prstGeom prst="rect">
@@ -23273,8 +23375,8 @@
         </p:nvSpPr>
         <p:spPr>
           <a:xfrm>
-            <a:off x="9244355" y="3438304"/>
-            <a:ext cx="2160955" cy="1493961"/>
+            <a:off x="9244355" y="3362652"/>
+            <a:ext cx="2160955" cy="1645264"/>
           </a:xfrm>
           <a:prstGeom prst="rect">
             <a:avLst/>
@@ -23293,7 +23395,7 @@
               </a:lnSpc>
             </a:pPr>
             <a:r>
-              <a:rPr sz="1150" b="1">
+              <a:rPr sz="1100" b="1">
                 <a:solidFill>
                   <a:srgbClr val="20242C"/>
                 </a:solidFill>
@@ -23302,7 +23404,7 @@
               <a:t>S1 现状</a:t>
             </a:r>
             <a:r>
-              <a:rPr sz="1150" b="0">
+              <a:rPr sz="1100" b="0">
                 <a:solidFill>
                   <a:srgbClr val="20242C"/>
                 </a:solidFill>
@@ -23321,22 +23423,22 @@
               </a:spcBef>
             </a:pPr>
             <a:r>
-              <a:rPr sz="1150" b="1">
-                <a:solidFill>
-                  <a:srgbClr val="20242C"/>
-                </a:solidFill>
-                <a:latin typeface="Microsoft YaHei"/>
-              </a:rPr>
-              <a:t>S22 深队列</a:t>
-            </a:r>
-            <a:r>
-              <a:rPr sz="1150" b="0">
-                <a:solidFill>
-                  <a:srgbClr val="20242C"/>
-                </a:solidFill>
-                <a:latin typeface="Microsoft YaHei"/>
-              </a:rPr>
-              <a:t>：η 只多 0.033，硬件贵 86 倍。</a:t>
+              <a:rPr sz="1100" b="1">
+                <a:solidFill>
+                  <a:srgbClr val="20242C"/>
+                </a:solidFill>
+                <a:latin typeface="Microsoft YaHei"/>
+              </a:rPr>
+              <a:t>S19 / S20</a:t>
+            </a:r>
+            <a:r>
+              <a:rPr sz="1100" b="0">
+                <a:solidFill>
+                  <a:srgbClr val="20242C"/>
+                </a:solidFill>
+                <a:latin typeface="Microsoft YaHei"/>
+              </a:rPr>
+              <a:t>：中价位，但在非均匀流量下控制回路一次都没触发。</a:t>
             </a:r>
           </a:p>
           <a:p>
@@ -23349,22 +23451,22 @@
               </a:spcBef>
             </a:pPr>
             <a:r>
-              <a:rPr sz="1150" b="1">
-                <a:solidFill>
-                  <a:srgbClr val="20242C"/>
-                </a:solidFill>
-                <a:latin typeface="Microsoft YaHei"/>
-              </a:rPr>
-              <a:t>S19 / S20</a:t>
-            </a:r>
-            <a:r>
-              <a:rPr sz="1150" b="0">
-                <a:solidFill>
-                  <a:srgbClr val="20242C"/>
-                </a:solidFill>
-                <a:latin typeface="Microsoft YaHei"/>
-              </a:rPr>
-              <a:t>：中价位，但在非均匀流量下控制回路一次都没触发。</a:t>
+              <a:rPr sz="1100" b="1">
+                <a:solidFill>
+                  <a:srgbClr val="20242C"/>
+                </a:solidFill>
+                <a:latin typeface="Microsoft YaHei"/>
+              </a:rPr>
+              <a:t>S16 读侧</a:t>
+            </a:r>
+            <a:r>
+              <a:rPr sz="1100" b="0">
+                <a:solidFill>
+                  <a:srgbClr val="20242C"/>
+                </a:solidFill>
+                <a:latin typeface="Microsoft YaHei"/>
+              </a:rPr>
+              <a:t>：S0 读的十核带宽只差 0.36%，本来就没有问题 —— 不值得为 +0.47% 带宽再动一次事务层。</a:t>
             </a:r>
           </a:p>
         </p:txBody>
@@ -23447,7 +23549,7 @@
                 </a:solidFill>
                 <a:latin typeface="Microsoft YaHei"/>
               </a:rPr>
-              <a:t>三步之间没有依赖：第 1 步可以单独上线，第 2、3 步可并行评估。第 2 步是本次汇报建议的落点。</a:t>
+              <a:t>第 1 步可以立刻单独上线。第 2、3 步二选一，判据不是数字，而是一个工程事实：completer 的授权调度能不能改 —— 能改选 A，不能改选 B。</a:t>
             </a:r>
           </a:p>
         </p:txBody>
@@ -24361,7 +24463,7 @@
                 </a:solidFill>
                 <a:latin typeface="Microsoft YaHei"/>
               </a:rPr>
-              <a:t>需要拍板的一件事：是否投 900 FF‑eq 做 S16 授权保留。</a:t>
+              <a:t>需要拍板的一件事：HA / 内存控制器的授权调度能不能改？</a:t>
             </a:r>
           </a:p>
           <a:p>
@@ -24380,7 +24482,7 @@
                 </a:solidFill>
                 <a:latin typeface="Microsoft YaHei"/>
               </a:rPr>
-              <a:t>它让 completer 按「谁被服务得最少」来发授权，写读两侧都不亏带宽。</a:t>
+              <a:t>能改 → S16，900 FF‑eq、Jain 0.98466、带宽 −0.39%；不能改 → S22，13,920 FF‑eq、Jain 0.94799、带宽 −2.21%。</a:t>
             </a:r>
           </a:p>
         </p:txBody>

--- a/ppt/ring2-write-fairness.pptx
+++ b/ppt/ring2-write-fairness.pptx
@@ -35,6 +35,10 @@
     <p:sldId id="283" r:id="rId34"/>
     <p:sldId id="284" r:id="rId35"/>
     <p:sldId id="285" r:id="rId36"/>
+    <p:sldId id="286" r:id="rId37"/>
+    <p:sldId id="287" r:id="rId38"/>
+    <p:sldId id="288" r:id="rId39"/>
+    <p:sldId id="289" r:id="rId40"/>
   </p:sldIdLst>
   <p:sldSz cx="12191695" cy="6858000" type="screen4x3"/>
   <p:notesSz cx="6858000" cy="9144000"/>
@@ -4688,7 +4692,7 @@
                 </a:solidFill>
                 <a:latin typeface="Arial"/>
               </a:rPr>
-              <a:t>10 / 30</a:t>
+              <a:t>10 / 34</a:t>
             </a:r>
           </a:p>
         </p:txBody>
@@ -5791,7 +5795,7 @@
                 </a:solidFill>
                 <a:latin typeface="Arial"/>
               </a:rPr>
-              <a:t>11 / 30</a:t>
+              <a:t>11 / 34</a:t>
             </a:r>
           </a:p>
         </p:txBody>
@@ -6297,7 +6301,7 @@
                 </a:solidFill>
                 <a:latin typeface="Arial"/>
               </a:rPr>
-              <a:t>12 / 30</a:t>
+              <a:t>12 / 34</a:t>
             </a:r>
           </a:p>
         </p:txBody>
@@ -7799,7 +7803,7 @@
                 </a:solidFill>
                 <a:latin typeface="Arial"/>
               </a:rPr>
-              <a:t>13 / 30</a:t>
+              <a:t>13 / 34</a:t>
             </a:r>
           </a:p>
         </p:txBody>
@@ -8797,7 +8801,7 @@
                 </a:solidFill>
                 <a:latin typeface="Arial"/>
               </a:rPr>
-              <a:t>14 / 30</a:t>
+              <a:t>14 / 34</a:t>
             </a:r>
           </a:p>
         </p:txBody>
@@ -9975,7 +9979,7 @@
                 </a:solidFill>
                 <a:latin typeface="Arial"/>
               </a:rPr>
-              <a:t>15 / 30</a:t>
+              <a:t>15 / 34</a:t>
             </a:r>
           </a:p>
         </p:txBody>
@@ -10500,7 +10504,7 @@
                 </a:solidFill>
                 <a:latin typeface="Arial"/>
               </a:rPr>
-              <a:t>16 / 30</a:t>
+              <a:t>16 / 34</a:t>
             </a:r>
           </a:p>
         </p:txBody>
@@ -11415,7 +11419,7 @@
                 </a:solidFill>
                 <a:latin typeface="Arial"/>
               </a:rPr>
-              <a:t>17 / 30</a:t>
+              <a:t>17 / 34</a:t>
             </a:r>
           </a:p>
         </p:txBody>
@@ -11940,7 +11944,7 @@
                 </a:solidFill>
                 <a:latin typeface="Arial"/>
               </a:rPr>
-              <a:t>18 / 30</a:t>
+              <a:t>18 / 34</a:t>
             </a:r>
           </a:p>
         </p:txBody>
@@ -13058,7 +13062,7 @@
                 </a:solidFill>
                 <a:latin typeface="Arial"/>
               </a:rPr>
-              <a:t>19 / 30</a:t>
+              <a:t>19 / 34</a:t>
             </a:r>
           </a:p>
         </p:txBody>
@@ -14565,7 +14569,7 @@
                 </a:solidFill>
                 <a:latin typeface="Arial"/>
               </a:rPr>
-              <a:t>02 / 30</a:t>
+              <a:t>02 / 34</a:t>
             </a:r>
           </a:p>
         </p:txBody>
@@ -15131,7 +15135,7 @@
         </p:nvSpPr>
         <p:spPr>
           <a:xfrm>
-            <a:off x="8951976" y="3162247"/>
+            <a:off x="8951976" y="3143334"/>
             <a:ext cx="2489911" cy="259080"/>
           </a:xfrm>
           <a:prstGeom prst="rect">
@@ -15157,7 +15161,7 @@
                 </a:solidFill>
                 <a:latin typeface="Microsoft YaHei"/>
               </a:rPr>
-              <a:t>前沿只剩两个点</a:t>
+              <a:t>严格前沿只剩两个点</a:t>
             </a:r>
           </a:p>
         </p:txBody>
@@ -15170,8 +15174,8 @@
         </p:nvSpPr>
         <p:spPr>
           <a:xfrm>
-            <a:off x="8951976" y="3503623"/>
-            <a:ext cx="2489911" cy="1134069"/>
+            <a:off x="8951976" y="3484710"/>
+            <a:ext cx="2489911" cy="1171895"/>
           </a:xfrm>
           <a:prstGeom prst="rect">
             <a:avLst/>
@@ -15190,7 +15194,7 @@
               </a:lnSpc>
             </a:pPr>
             <a:r>
-              <a:rPr sz="900" b="0">
+              <a:rPr sz="800" b="0">
                 <a:solidFill>
                   <a:srgbClr val="20242C"/>
                 </a:solidFill>
@@ -15199,7 +15203,7 @@
               <a:t>S0（0 FF‑eq，η 0.8894）→ </a:t>
             </a:r>
             <a:r>
-              <a:rPr sz="900" b="1">
+              <a:rPr sz="800" b="1">
                 <a:solidFill>
                   <a:srgbClr val="D20A2E"/>
                 </a:solidFill>
@@ -15208,7 +15212,7 @@
               <a:t>S16</a:t>
             </a:r>
             <a:r>
-              <a:rPr sz="900" b="0">
+              <a:rPr sz="800" b="0">
                 <a:solidFill>
                   <a:srgbClr val="20242C"/>
                 </a:solidFill>
@@ -15217,7 +15221,7 @@
               <a:t>（900 FF‑eq，η </a:t>
             </a:r>
             <a:r>
-              <a:rPr sz="900" b="1">
+              <a:rPr sz="800" b="1">
                 <a:solidFill>
                   <a:srgbClr val="20242C"/>
                 </a:solidFill>
@@ -15226,7 +15230,7 @@
               <a:t>0.9395</a:t>
             </a:r>
             <a:r>
-              <a:rPr sz="900" b="0">
+              <a:rPr sz="800" b="0">
                 <a:solidFill>
                   <a:srgbClr val="20242C"/>
                 </a:solidFill>
@@ -15235,7 +15239,7 @@
               <a:t>）。900 FF‑eq 买到离理想控制器最近的位置，</a:t>
             </a:r>
             <a:r>
-              <a:rPr sz="900" b="1">
+              <a:rPr sz="800" b="1">
                 <a:solidFill>
                   <a:srgbClr val="20242C"/>
                 </a:solidFill>
@@ -15244,7 +15248,7 @@
               <a:t>比 S1 便宜 24 倍、η 高 0.174</a:t>
             </a:r>
             <a:r>
-              <a:rPr sz="900" b="0">
+              <a:rPr sz="800" b="0">
                 <a:solidFill>
                   <a:srgbClr val="20242C"/>
                 </a:solidFill>
@@ -15263,13 +15267,13 @@
               </a:spcBef>
             </a:pPr>
             <a:r>
-              <a:rPr sz="900" b="0">
-                <a:solidFill>
-                  <a:srgbClr val="20242C"/>
-                </a:solidFill>
-                <a:latin typeface="Microsoft YaHei"/>
-              </a:rPr>
-              <a:t>S22-stock（13,920，0.8883）、S19 / S20（5,840，0.8992）、S22 深队列（1,198,560，0.9210）全部被 S16 支配或性价比远低。</a:t>
+              <a:rPr sz="800" b="0">
+                <a:solidFill>
+                  <a:srgbClr val="20242C"/>
+                </a:solidFill>
+                <a:latin typeface="Microsoft YaHei"/>
+              </a:rPr>
+              <a:t>I-tag（3,120，η 0.9124）与 S19 / S20（5,840，η 0.8992）在成本—收益平面上被 S16 支配，但改动层次不同，仍是有意义的工程备选；本节补充它们的机制和正式 K = 20000 对比。</a:t>
             </a:r>
           </a:p>
         </p:txBody>
@@ -15391,7 +15395,7 @@
                 </a:solidFill>
                 <a:latin typeface="Arial"/>
               </a:rPr>
-              <a:t>20 / 30</a:t>
+              <a:t>20 / 34</a:t>
             </a:r>
           </a:p>
         </p:txBody>
@@ -16280,7 +16284,7 @@
                 </a:solidFill>
                 <a:latin typeface="Arial"/>
               </a:rPr>
-              <a:t>21 / 30</a:t>
+              <a:t>21 / 34</a:t>
             </a:r>
           </a:p>
         </p:txBody>
@@ -16625,7 +16629,7 @@
                 </a:solidFill>
                 <a:latin typeface="Microsoft YaHei"/>
               </a:rPr>
-              <a:t>两个方案，各两页：机制示意 + 与 S0 / S1 的实测对比。</a:t>
+              <a:t>五个方案、三种控制层次：机制示意 + 与 S0 / S1 的同口径实测对比。</a:t>
             </a:r>
           </a:p>
         </p:txBody>
@@ -16747,7 +16751,7 @@
                 </a:solidFill>
                 <a:latin typeface="Microsoft YaHei"/>
               </a:rPr>
-              <a:t>入选标准：在可实现 Pareto 前沿上或紧邻前沿，且目标值全部来自测量、不含任何流量 pattern 先验。定速钉死的 S24 / S25 因此被撤下。</a:t>
+              <a:t>S16 是严格成本—收益前沿；I-tag、S19、S20 与 S22 是改动层次不同的近前沿工程备选。五者都可实现、数据来自测量，且不含流量 pattern 先验。</a:t>
             </a:r>
           </a:p>
         </p:txBody>
@@ -16786,7 +16790,7 @@
                 </a:solidFill>
                 <a:latin typeface="Arial"/>
               </a:rPr>
-              <a:t>22 / 30</a:t>
+              <a:t>22 / 34</a:t>
             </a:r>
           </a:p>
         </p:txBody>
@@ -17677,7 +17681,7 @@
                 </a:solidFill>
                 <a:latin typeface="Arial"/>
               </a:rPr>
-              <a:t>23 / 30</a:t>
+              <a:t>23 / 34</a:t>
             </a:r>
           </a:p>
         </p:txBody>
@@ -18694,7 +18698,7 @@
                 </a:solidFill>
                 <a:latin typeface="Arial"/>
               </a:rPr>
-              <a:t>24 / 30</a:t>
+              <a:t>24 / 34</a:t>
             </a:r>
           </a:p>
         </p:txBody>
@@ -18839,7 +18843,7 @@
                 </a:solidFill>
                 <a:latin typeface="Microsoft YaHei"/>
               </a:rPr>
-              <a:t>S22 赤字触发的限域让路（13,920 FF‑eq） · 仲裁型 / 总线触发</a:t>
+              <a:t>I-tag t_inj=2 / hold=2（3,120 FF‑eq） · 本地触发 / 仲裁让位</a:t>
             </a:r>
           </a:p>
         </p:txBody>
@@ -18973,7 +18977,7 @@
       </p:sp>
       <p:pic>
         <p:nvPicPr>
-          <p:cNvPr id="8" name="Picture 7" descr="24-s22-diagram.png"/>
+          <p:cNvPr id="8" name="Picture 7" descr="26-itag-diagram.png"/>
           <p:cNvPicPr>
             <a:picLocks noChangeAspect="1"/>
           </p:cNvPicPr>
@@ -19029,7 +19033,7 @@
                 </a:solidFill>
                 <a:latin typeface="Microsoft YaHei"/>
               </a:rPr>
-              <a:t>复用 S1 那条 6 bit 广播总线，位宽完全相同，只换了线上放什么：从「我有多堵」换成「我这窗发成了多少」。</a:t>
+              <a:t>上 = 连续两拍抢不到本地出向 hop 就举 I-tag；下 = 最近的上游 donor 只让一个 slot，空 slot 沿环到达请求者。</a:t>
             </a:r>
           </a:p>
         </p:txBody>
@@ -19062,13 +19066,13 @@
               </a:lnSpc>
             </a:pPr>
             <a:r>
-              <a:rPr sz="850" b="1">
+              <a:rPr sz="750" b="1">
                 <a:solidFill>
                   <a:srgbClr val="D20A2E"/>
                 </a:solidFill>
                 <a:latin typeface="Arial"/>
               </a:rPr>
-              <a:t>S C H E M E   2   /   2   ·   M E C H A N I S M</a:t>
+              <a:t>N E A R - F R O N T I E R   ·   I - T A G   M E C H A N I S M</a:t>
             </a:r>
           </a:p>
         </p:txBody>
@@ -19082,7 +19086,7 @@
         <p:spPr>
           <a:xfrm>
             <a:off x="8951976" y="1408176"/>
-            <a:ext cx="2672791" cy="2540763"/>
+            <a:ext cx="2672791" cy="2278903"/>
           </a:xfrm>
           <a:prstGeom prst="rect">
             <a:avLst/>
@@ -19127,7 +19131,7 @@
         </p:nvSpPr>
         <p:spPr>
           <a:xfrm>
-            <a:off x="9134855" y="1591056"/>
+            <a:off x="9134855" y="1657428"/>
             <a:ext cx="2307031" cy="259080"/>
           </a:xfrm>
           <a:prstGeom prst="rect">
@@ -19166,8 +19170,8 @@
         </p:nvSpPr>
         <p:spPr>
           <a:xfrm>
-            <a:off x="9134855" y="1932432"/>
-            <a:ext cx="2307031" cy="1929505"/>
+            <a:off x="9134855" y="1998804"/>
+            <a:ext cx="2307031" cy="1475597"/>
           </a:xfrm>
           <a:prstGeom prst="rect">
             <a:avLst/>
@@ -19201,7 +19205,7 @@
                 </a:solidFill>
                 <a:latin typeface="Microsoft YaHei"/>
               </a:rPr>
-              <a:t>：每节点只数自己本窗成功上环的 flit 数，饱和到 6 bit。播的是进度，不是拥塞等级。</a:t>
+              <a:t>：同 plane / 方向 / VC 的注入队列非空，但连续 t_inj = 2 拍没上环。</a:t>
             </a:r>
           </a:p>
           <a:p>
@@ -19229,7 +19233,7 @@
                 </a:solidFill>
                 <a:latin typeface="Microsoft YaHei"/>
               </a:rPr>
-              <a:t>：复用 S1 的 6 bit 广播总线（30 拍）。自己的进度也从总线读回，两边过同一个量化器、同一段延迟。</a:t>
+              <a:t>：举 I-tag，带出饥饿请求者的位置；向上游寻找最近一个会跨过其瓶颈 hop 的 donor。</a:t>
             </a:r>
           </a:p>
           <a:p>
@@ -19257,25 +19261,7 @@
                 </a:solidFill>
                 <a:latin typeface="Microsoft YaHei"/>
               </a:rPr>
-              <a:t>：赤字 = 总线上 10 项的均值 − 自己那一项，越过 0.5 就举请求。让路是</a:t>
-            </a:r>
-            <a:r>
-              <a:rPr sz="800" b="1">
-                <a:solidFill>
-                  <a:srgbClr val="20242C"/>
-                </a:solidFill>
-                <a:latin typeface="Microsoft YaHei"/>
-              </a:rPr>
-              <a:t>单向</a:t>
-            </a:r>
-            <a:r>
-              <a:rPr sz="800" b="0">
-                <a:solidFill>
-                  <a:srgbClr val="20242C"/>
-                </a:solidFill>
-                <a:latin typeface="Microsoft YaHei"/>
-              </a:rPr>
-              <a:t>的：落后的节点永不让路。</a:t>
+              <a:t>：donor 只在一拍内暂停，制造一个可追踪的空 slot。</a:t>
             </a:r>
           </a:p>
           <a:p>
@@ -19294,7 +19280,7 @@
                 </a:solidFill>
                 <a:latin typeface="Microsoft YaHei"/>
               </a:rPr>
-              <a:t>④ 执行：让位，不是门控</a:t>
+              <a:t>④ 执行</a:t>
             </a:r>
             <a:r>
               <a:rPr sz="800" b="0">
@@ -19303,7 +19289,7 @@
                 </a:solidFill>
                 <a:latin typeface="Microsoft YaHei"/>
               </a:rPr>
-              <a:t>。只对「会从请求者出向 hop 骑过去」的 flit 让路，同时前瞻改发一个会先下环的 flit，让自己的 hop 不空转。</a:t>
+              <a:t>：空 slot 到达请求者后立即被它使用；hold = 2 让标记两拍后自动失效。</a:t>
             </a:r>
           </a:p>
         </p:txBody>
@@ -19316,8 +19302,150 @@
         </p:nvSpPr>
         <p:spPr>
           <a:xfrm>
-            <a:off x="8951976" y="4095243"/>
-            <a:ext cx="2672791" cy="1150029"/>
+            <a:off x="8951976" y="3833383"/>
+            <a:ext cx="2672791" cy="1353530"/>
+          </a:xfrm>
+          <a:prstGeom prst="rect">
+            <a:avLst/>
+          </a:prstGeom>
+          <a:solidFill>
+            <a:srgbClr val="EDF2F7"/>
+          </a:solidFill>
+          <a:ln w="19050">
+            <a:solidFill>
+              <a:srgbClr val="D20A2E"/>
+            </a:solidFill>
+          </a:ln>
+          <a:effectLst/>
+        </p:spPr>
+        <p:style>
+          <a:lnRef idx="1">
+            <a:schemeClr val="accent1"/>
+          </a:lnRef>
+          <a:fillRef idx="3">
+            <a:schemeClr val="accent1"/>
+          </a:fillRef>
+          <a:effectRef idx="2">
+            <a:schemeClr val="accent1"/>
+          </a:effectRef>
+          <a:fontRef idx="minor">
+            <a:schemeClr val="lt1"/>
+          </a:fontRef>
+        </p:style>
+        <p:txBody>
+          <a:bodyPr rtlCol="0" anchor="ctr" wrap="square"/>
+          <a:lstStyle/>
+          <a:p>
+            <a:pPr algn="ctr"/>
+          </a:p>
+        </p:txBody>
+      </p:sp>
+      <p:sp>
+        <p:nvSpPr>
+          <p:cNvPr id="15" name="TextBox 14"/>
+          <p:cNvSpPr txBox="1"/>
+          <p:nvPr/>
+        </p:nvSpPr>
+        <p:spPr>
+          <a:xfrm>
+            <a:off x="9134855" y="4098321"/>
+            <a:ext cx="2307031" cy="259080"/>
+          </a:xfrm>
+          <a:prstGeom prst="rect">
+            <a:avLst/>
+          </a:prstGeom>
+          <a:noFill/>
+        </p:spPr>
+        <p:txBody>
+          <a:bodyPr wrap="square" anchor="t" lIns="0" rIns="0" tIns="0" bIns="0">
+            <a:spAutoFit/>
+          </a:bodyPr>
+          <a:lstStyle/>
+          <a:p>
+            <a:pPr algn="l">
+              <a:lnSpc>
+                <a:spcPct val="100000"/>
+              </a:lnSpc>
+            </a:pPr>
+            <a:r>
+              <a:rPr sz="1200" b="1">
+                <a:solidFill>
+                  <a:srgbClr val="D20A2E"/>
+                </a:solidFill>
+                <a:latin typeface="Microsoft YaHei"/>
+              </a:rPr>
+              <a:t>它改的是环上仲裁</a:t>
+            </a:r>
+          </a:p>
+        </p:txBody>
+      </p:sp>
+      <p:sp>
+        <p:nvSpPr>
+          <p:cNvPr id="16" name="TextBox 15"/>
+          <p:cNvSpPr txBox="1"/>
+          <p:nvPr/>
+        </p:nvSpPr>
+        <p:spPr>
+          <a:xfrm>
+            <a:off x="9134855" y="4439697"/>
+            <a:ext cx="2307031" cy="518853"/>
+          </a:xfrm>
+          <a:prstGeom prst="rect">
+            <a:avLst/>
+          </a:prstGeom>
+          <a:noFill/>
+        </p:spPr>
+        <p:txBody>
+          <a:bodyPr wrap="square" anchor="t" lIns="0" rIns="0" tIns="0" bIns="0">
+            <a:spAutoFit/>
+          </a:bodyPr>
+          <a:lstStyle/>
+          <a:p>
+            <a:pPr algn="l">
+              <a:lnSpc>
+                <a:spcPct val="102000"/>
+              </a:lnSpc>
+            </a:pPr>
+            <a:r>
+              <a:rPr sz="850" b="0">
+                <a:solidFill>
+                  <a:srgbClr val="20242C"/>
+                </a:solidFill>
+                <a:latin typeface="Microsoft YaHei"/>
+              </a:rPr>
+              <a:t>不动 requester / completer 的事务状态，不增加广播总线。新增的是每方向 / VC 的饥饿计数与 slot 预约状态，硬件估算 </a:t>
+            </a:r>
+            <a:r>
+              <a:rPr sz="850" b="1">
+                <a:solidFill>
+                  <a:srgbClr val="20242C"/>
+                </a:solidFill>
+                <a:latin typeface="Microsoft YaHei"/>
+              </a:rPr>
+              <a:t>3,120 FF-eq</a:t>
+            </a:r>
+            <a:r>
+              <a:rPr sz="850" b="0">
+                <a:solidFill>
+                  <a:srgbClr val="20242C"/>
+                </a:solidFill>
+                <a:latin typeface="Microsoft YaHei"/>
+              </a:rPr>
+              <a:t>。</a:t>
+            </a:r>
+          </a:p>
+        </p:txBody>
+      </p:sp>
+      <p:sp>
+        <p:nvSpPr>
+          <p:cNvPr id="17" name="Rectangle 16"/>
+          <p:cNvSpPr/>
+          <p:nvPr/>
+        </p:nvSpPr>
+        <p:spPr>
+          <a:xfrm>
+            <a:off x="8951976" y="5333217"/>
+            <a:ext cx="2672791" cy="994430"/>
           </a:xfrm>
           <a:prstGeom prst="rect">
             <a:avLst/>
@@ -19354,14 +19482,14 @@
       </p:sp>
       <p:sp>
         <p:nvSpPr>
-          <p:cNvPr id="15" name="TextBox 14"/>
-          <p:cNvSpPr txBox="1"/>
-          <p:nvPr/>
-        </p:nvSpPr>
-        <p:spPr>
-          <a:xfrm>
-            <a:off x="9262872" y="4186683"/>
-            <a:ext cx="2050999" cy="967149"/>
+          <p:cNvPr id="18" name="TextBox 17"/>
+          <p:cNvSpPr txBox="1"/>
+          <p:nvPr/>
+        </p:nvSpPr>
+        <p:spPr>
+          <a:xfrm>
+            <a:off x="9262872" y="5424657"/>
+            <a:ext cx="2050999" cy="811550"/>
           </a:xfrm>
           <a:prstGeom prst="rect">
             <a:avLst/>
@@ -19386,97 +19514,14 @@
                 </a:solidFill>
                 <a:latin typeface="Microsoft YaHei"/>
               </a:rPr>
-              <a:t>与 S1 的关键差别：S1 的执行器是令牌桶闸门（没额度就不上环，让出的槽被沿途吃掉）；S22 只在具体某一拍上让出具体某个位置。</a:t>
-            </a:r>
-          </a:p>
-        </p:txBody>
-      </p:sp>
-      <p:sp>
-        <p:nvSpPr>
-          <p:cNvPr id="16" name="Rectangle 15"/>
-          <p:cNvSpPr/>
-          <p:nvPr/>
-        </p:nvSpPr>
-        <p:spPr>
-          <a:xfrm>
-            <a:off x="8951976" y="5391577"/>
-            <a:ext cx="2672791" cy="936070"/>
-          </a:xfrm>
-          <a:prstGeom prst="rect">
-            <a:avLst/>
-          </a:prstGeom>
-          <a:solidFill>
-            <a:srgbClr val="D20A2E"/>
-          </a:solidFill>
-          <a:ln>
-            <a:noFill/>
-          </a:ln>
-          <a:effectLst/>
-        </p:spPr>
-        <p:style>
-          <a:lnRef idx="1">
-            <a:schemeClr val="accent1"/>
-          </a:lnRef>
-          <a:fillRef idx="3">
-            <a:schemeClr val="accent1"/>
-          </a:fillRef>
-          <a:effectRef idx="2">
-            <a:schemeClr val="accent1"/>
-          </a:effectRef>
-          <a:fontRef idx="minor">
-            <a:schemeClr val="lt1"/>
-          </a:fontRef>
-        </p:style>
-        <p:txBody>
-          <a:bodyPr rtlCol="0" anchor="ctr" wrap="square"/>
-          <a:lstStyle/>
-          <a:p>
-            <a:pPr algn="ctr"/>
-          </a:p>
-        </p:txBody>
-      </p:sp>
-      <p:sp>
-        <p:nvSpPr>
-          <p:cNvPr id="17" name="TextBox 16"/>
-          <p:cNvSpPr txBox="1"/>
-          <p:nvPr/>
-        </p:nvSpPr>
-        <p:spPr>
-          <a:xfrm>
-            <a:off x="9262872" y="5483017"/>
-            <a:ext cx="2050999" cy="753190"/>
-          </a:xfrm>
-          <a:prstGeom prst="rect">
-            <a:avLst/>
-          </a:prstGeom>
-          <a:noFill/>
-        </p:spPr>
-        <p:txBody>
-          <a:bodyPr wrap="square" anchor="ctr" lIns="0" rIns="0" tIns="0" bIns="0">
-            <a:spAutoFit/>
-          </a:bodyPr>
-          <a:lstStyle/>
-          <a:p>
-            <a:pPr algn="l">
-              <a:lnSpc>
-                <a:spcPct val="104000"/>
-              </a:lnSpc>
-            </a:pPr>
-            <a:r>
-              <a:rPr sz="1000" b="0">
-                <a:solidFill>
-                  <a:srgbClr val="FFFFFF"/>
-                </a:solidFill>
-                <a:latin typeface="Microsoft YaHei"/>
-              </a:rPr>
-              <a:t>同等公平度下让位比门控省 10 倍带宽：S23 门控付 1.50%，S22 让位只付 0.15%（K = 2000 同轮对比）。</a:t>
-            </a:r>
-          </a:p>
-        </p:txBody>
-      </p:sp>
-      <p:sp>
-        <p:nvSpPr>
-          <p:cNvPr id="18" name="TextBox 17"/>
+              <a:t>核心边界：I-tag 只把「一个具体 slot」送给一个具体饥饿点；它不估计全局公平度，也不保证长期速率完全拉齐。</a:t>
+            </a:r>
+          </a:p>
+        </p:txBody>
+      </p:sp>
+      <p:sp>
+        <p:nvSpPr>
+          <p:cNvPr id="19" name="TextBox 18"/>
           <p:cNvSpPr txBox="1"/>
           <p:nvPr/>
         </p:nvSpPr>
@@ -19508,7 +19553,7 @@
                 </a:solidFill>
                 <a:latin typeface="Arial"/>
               </a:rPr>
-              <a:t>25 / 30</a:t>
+              <a:t>25 / 34</a:t>
             </a:r>
           </a:p>
         </p:txBody>
@@ -19653,7 +19698,7 @@
                 </a:solidFill>
                 <a:latin typeface="Microsoft YaHei"/>
               </a:rPr>
-              <a:t>S22 实测：均匀流量</a:t>
+              <a:t>I-tag 实测：均匀写</a:t>
             </a:r>
           </a:p>
         </p:txBody>
@@ -19858,7 +19903,7 @@
                 </a:solidFill>
                 <a:latin typeface="Arial"/>
               </a:rPr>
-              <a:t>0.94799</a:t>
+              <a:t>0.97495</a:t>
             </a:r>
           </a:p>
         </p:txBody>
@@ -19897,7 +19942,7 @@
                 </a:solidFill>
                 <a:latin typeface="Microsoft YaHei"/>
               </a:rPr>
-              <a:t>S22 写侧 100 拍 Jain（S0 = 0.92818）</a:t>
+              <a:t>I-tag 的 100 拍 Jain（S0 = 0.92818）</a:t>
             </a:r>
           </a:p>
           <a:p>
@@ -19916,7 +19961,7 @@
                 </a:solidFill>
                 <a:latin typeface="Microsoft YaHei"/>
               </a:rPr>
-              <a:t>总写带宽 −2.21%</a:t>
+              <a:t>总带宽 −2.71%，整窗 max/min = 1.2526</a:t>
             </a:r>
           </a:p>
         </p:txBody>
@@ -19967,7 +20012,7 @@
       </p:sp>
       <p:pic>
         <p:nvPicPr>
-          <p:cNvPr id="12" name="Picture 11" descr="25-s22-compare.png"/>
+          <p:cNvPr id="12" name="Picture 11" descr="27-itag-compare.png"/>
           <p:cNvPicPr>
             <a:picLocks noChangeAspect="1"/>
           </p:cNvPicPr>
@@ -19981,8 +20026,8 @@
         </p:blipFill>
         <p:spPr>
           <a:xfrm>
-            <a:off x="3768801" y="1024128"/>
-            <a:ext cx="7415580" cy="2350007"/>
+            <a:off x="3328416" y="1207499"/>
+            <a:ext cx="8296351" cy="2629125"/>
           </a:xfrm>
           <a:prstGeom prst="rect">
             <a:avLst/>
@@ -19997,7 +20042,7 @@
         </p:nvSpPr>
         <p:spPr>
           <a:xfrm>
-            <a:off x="3328416" y="3465575"/>
+            <a:off x="3328416" y="3928065"/>
             <a:ext cx="8296351" cy="292608"/>
           </a:xfrm>
           <a:prstGeom prst="rect">
@@ -20023,7 +20068,7 @@
                 </a:solidFill>
                 <a:latin typeface="Microsoft YaHei"/>
               </a:rPr>
-              <a:t>四根柱依次 S0 / S1 / S16 / S22，橙虚线 = 理论上限 R*；写侧 K = 20000。后两幅是公平性的两个不同问题，见右侧第三张卡。</a:t>
+              <a:t>三幅依次比较总带宽、100 拍瞬时 Jain、整窗最快 / 最慢核带宽比；每幅内三根柱都是 S0 / S1 / I-tag。</a:t>
             </a:r>
           </a:p>
         </p:txBody>
@@ -20036,8 +20081,8 @@
         </p:nvSpPr>
         <p:spPr>
           <a:xfrm>
-            <a:off x="566928" y="4087368"/>
-            <a:ext cx="3527450" cy="2240280"/>
+            <a:off x="566928" y="4733229"/>
+            <a:ext cx="3527450" cy="1594418"/>
           </a:xfrm>
           <a:prstGeom prst="rect">
             <a:avLst/>
@@ -20082,7 +20127,7 @@
         </p:nvSpPr>
         <p:spPr>
           <a:xfrm>
-            <a:off x="768096" y="4611466"/>
+            <a:off x="768096" y="5038417"/>
             <a:ext cx="3125114" cy="277622"/>
           </a:xfrm>
           <a:prstGeom prst="rect">
@@ -20108,7 +20153,7 @@
                 </a:solidFill>
                 <a:latin typeface="Microsoft YaHei"/>
               </a:rPr>
-              <a:t>比 S1 全面更好</a:t>
+              <a:t>作用是局部补 slot</a:t>
             </a:r>
           </a:p>
         </p:txBody>
@@ -20121,8 +20166,8 @@
         </p:nvSpPr>
         <p:spPr>
           <a:xfrm>
-            <a:off x="768096" y="4971384"/>
-            <a:ext cx="3125114" cy="868740"/>
+            <a:off x="768096" y="5398335"/>
+            <a:ext cx="3125114" cy="660699"/>
           </a:xfrm>
           <a:prstGeom prst="rect">
             <a:avLst/>
@@ -20147,43 +20192,7 @@
                 </a:solidFill>
                 <a:latin typeface="Microsoft YaHei"/>
               </a:rPr>
-              <a:t>Jain 0.94799 vs S1 的 0.95675 基本持平，但带宽只让 </a:t>
-            </a:r>
-            <a:r>
-              <a:rPr sz="1100" b="1">
-                <a:solidFill>
-                  <a:srgbClr val="20242C"/>
-                </a:solidFill>
-                <a:latin typeface="Microsoft YaHei"/>
-              </a:rPr>
-              <a:t>2.21%</a:t>
-            </a:r>
-            <a:r>
-              <a:rPr sz="1100" b="0">
-                <a:solidFill>
-                  <a:srgbClr val="20242C"/>
-                </a:solidFill>
-                <a:latin typeface="Microsoft YaHei"/>
-              </a:rPr>
-              <a:t>，S1 要让 </a:t>
-            </a:r>
-            <a:r>
-              <a:rPr sz="1100" b="1">
-                <a:solidFill>
-                  <a:srgbClr val="20242C"/>
-                </a:solidFill>
-                <a:latin typeface="Microsoft YaHei"/>
-              </a:rPr>
-              <a:t>16.3%</a:t>
-            </a:r>
-            <a:r>
-              <a:rPr sz="1100" b="0">
-                <a:solidFill>
-                  <a:srgbClr val="20242C"/>
-                </a:solidFill>
-                <a:latin typeface="Microsoft YaHei"/>
-              </a:rPr>
-              <a:t>；max/min 1.2230 vs 1.3586。硬件还便宜 34%（13,920 vs 21,220 FF‑eq）。</a:t>
+              <a:t>t_inj=2 让 I-tag 及早发现连续抢不到 hop 的节点；hold=2 又限制单次让位只持续两拍，避免把上游长期封住。</a:t>
             </a:r>
           </a:p>
         </p:txBody>
@@ -20196,8 +20205,8 @@
         </p:nvSpPr>
         <p:spPr>
           <a:xfrm>
-            <a:off x="4332122" y="4087368"/>
-            <a:ext cx="3527450" cy="2240280"/>
+            <a:off x="4332122" y="4733229"/>
+            <a:ext cx="3527450" cy="1594418"/>
           </a:xfrm>
           <a:prstGeom prst="rect">
             <a:avLst/>
@@ -20242,7 +20251,7 @@
         </p:nvSpPr>
         <p:spPr>
           <a:xfrm>
-            <a:off x="4533290" y="4611466"/>
+            <a:off x="4533290" y="4934397"/>
             <a:ext cx="3125114" cy="277622"/>
           </a:xfrm>
           <a:prstGeom prst="rect">
@@ -20268,7 +20277,7 @@
                 </a:solidFill>
                 <a:latin typeface="Microsoft YaHei"/>
               </a:rPr>
-              <a:t>数字上被 S16 支配，但层次不同</a:t>
+              <a:t>三项指标一起看</a:t>
             </a:r>
           </a:p>
         </p:txBody>
@@ -20281,7 +20290,7 @@
         </p:nvSpPr>
         <p:spPr>
           <a:xfrm>
-            <a:off x="4533290" y="4971384"/>
+            <a:off x="4533290" y="5294315"/>
             <a:ext cx="3125114" cy="868740"/>
           </a:xfrm>
           <a:prstGeom prst="rect">
@@ -20307,7 +20316,7 @@
                 </a:solidFill>
                 <a:latin typeface="Microsoft YaHei"/>
               </a:rPr>
-              <a:t>S16 用 </a:t>
+              <a:t>总带宽 </a:t>
             </a:r>
             <a:r>
               <a:rPr sz="1100" b="1">
@@ -20316,7 +20325,7 @@
                 </a:solidFill>
                 <a:latin typeface="Microsoft YaHei"/>
               </a:rPr>
-              <a:t>1/15 的硬件</a:t>
+              <a:t>5.3908</a:t>
             </a:r>
             <a:r>
               <a:rPr sz="1100" b="0">
@@ -20325,16 +20334,43 @@
                 </a:solidFill>
                 <a:latin typeface="Microsoft YaHei"/>
               </a:rPr>
-              <a:t>拿到更高的 Jain（0.98466）和更小的带宽代价（0.39%）。S22 唯一的、也是决定性的优势：</a:t>
+              <a:t>（比 S0 低 2.71%）；Jain </a:t>
             </a:r>
             <a:r>
               <a:rPr sz="1100" b="1">
                 <a:solidFill>
-                  <a:srgbClr val="D20A2E"/>
-                </a:solidFill>
-                <a:latin typeface="Microsoft YaHei"/>
-              </a:rPr>
-              <a:t>它只改环上仲裁，一点事务层都不碰。</a:t>
+                  <a:srgbClr val="20242C"/>
+                </a:solidFill>
+                <a:latin typeface="Microsoft YaHei"/>
+              </a:rPr>
+              <a:t>0.97495</a:t>
+            </a:r>
+            <a:r>
+              <a:rPr sz="1100" b="0">
+                <a:solidFill>
+                  <a:srgbClr val="20242C"/>
+                </a:solidFill>
+                <a:latin typeface="Microsoft YaHei"/>
+              </a:rPr>
+              <a:t>；max/min </a:t>
+            </a:r>
+            <a:r>
+              <a:rPr sz="1100" b="1">
+                <a:solidFill>
+                  <a:srgbClr val="20242C"/>
+                </a:solidFill>
+                <a:latin typeface="Microsoft YaHei"/>
+              </a:rPr>
+              <a:t>1.2526</a:t>
+            </a:r>
+            <a:r>
+              <a:rPr sz="1100" b="0">
+                <a:solidFill>
+                  <a:srgbClr val="20242C"/>
+                </a:solidFill>
+                <a:latin typeface="Microsoft YaHei"/>
+              </a:rPr>
+              <a:t>。与 S0 相比，两项公平性都明显改善；与 S1 相比，Jain 更高、长期速率差更小，带宽也更高。</a:t>
             </a:r>
           </a:p>
         </p:txBody>
@@ -20347,8 +20383,8 @@
         </p:nvSpPr>
         <p:spPr>
           <a:xfrm>
-            <a:off x="8097316" y="4087368"/>
-            <a:ext cx="3527450" cy="2240280"/>
+            <a:off x="8097316" y="4733229"/>
+            <a:ext cx="3527450" cy="1594418"/>
           </a:xfrm>
           <a:prstGeom prst="rect">
             <a:avLst/>
@@ -20393,7 +20429,7 @@
         </p:nvSpPr>
         <p:spPr>
           <a:xfrm>
-            <a:off x="8298484" y="4294402"/>
+            <a:off x="8298484" y="5038417"/>
             <a:ext cx="3125114" cy="277622"/>
           </a:xfrm>
           <a:prstGeom prst="rect">
@@ -20419,7 +20455,7 @@
                 </a:solidFill>
                 <a:latin typeface="Microsoft YaHei"/>
               </a:rPr>
-              <a:t>两个公平性指标分别在问什么</a:t>
+              <a:t>适用边界</a:t>
             </a:r>
           </a:p>
         </p:txBody>
@@ -20432,8 +20468,8 @@
         </p:nvSpPr>
         <p:spPr>
           <a:xfrm>
-            <a:off x="8298484" y="4654320"/>
-            <a:ext cx="3125114" cy="1502869"/>
+            <a:off x="8298484" y="5398335"/>
+            <a:ext cx="3125114" cy="660699"/>
           </a:xfrm>
           <a:prstGeom prst="rect">
             <a:avLst/>
@@ -20452,50 +20488,31 @@
               </a:lnSpc>
             </a:pPr>
             <a:r>
-              <a:rPr sz="1050" b="1">
-                <a:solidFill>
-                  <a:srgbClr val="20242C"/>
-                </a:solidFill>
-                <a:latin typeface="Microsoft YaHei"/>
-              </a:rPr>
-              <a:t>瞬时均衡度</a:t>
-            </a:r>
-            <a:r>
-              <a:rPr sz="1050" b="0">
-                <a:solidFill>
-                  <a:srgbClr val="20242C"/>
-                </a:solidFill>
-                <a:latin typeface="Microsoft YaHei"/>
-              </a:rPr>
-              <a:t>（每 100 拍算一次 Jain 再平均）问的是：在任意一小段时间里，十个核是不是同时都在被服务。</a:t>
-            </a:r>
-          </a:p>
-          <a:p>
-            <a:pPr algn="l">
-              <a:lnSpc>
-                <a:spcPct val="102000"/>
-              </a:lnSpc>
-              <a:spcBef>
-                <a:spcPts val="600"/>
-              </a:spcBef>
-            </a:pPr>
-            <a:r>
-              <a:rPr sz="1050" b="1">
-                <a:solidFill>
-                  <a:srgbClr val="20242C"/>
-                </a:solidFill>
-                <a:latin typeface="Microsoft YaHei"/>
-              </a:rPr>
-              <a:t>长期速率差</a:t>
-            </a:r>
-            <a:r>
-              <a:rPr sz="1050" b="0">
-                <a:solidFill>
-                  <a:srgbClr val="20242C"/>
-                </a:solidFill>
-                <a:latin typeface="Microsoft YaHei"/>
-              </a:rPr>
-              <a:t>（整窗最快核带宽 ÷ 最慢核带宽）问的是：把整个争用窗平均下来，有没有哪个核被系统性地拖慢。S0 = 1.5663 意味着最快的核长期比最慢的核快 57%。</a:t>
+              <a:rPr sz="1100" b="0">
+                <a:solidFill>
+                  <a:srgbClr val="20242C"/>
+                </a:solidFill>
+                <a:latin typeface="Microsoft YaHei"/>
+              </a:rPr>
+              <a:t>适合</a:t>
+            </a:r>
+            <a:r>
+              <a:rPr sz="1100" b="1">
+                <a:solidFill>
+                  <a:srgbClr val="20242C"/>
+                </a:solidFill>
+                <a:latin typeface="Microsoft YaHei"/>
+              </a:rPr>
+              <a:t>只允许改环上仲裁、又不希望新增总线</a:t>
+            </a:r>
+            <a:r>
+              <a:rPr sz="1100" b="0">
+                <a:solidFill>
+                  <a:srgbClr val="20242C"/>
+                </a:solidFill>
+                <a:latin typeface="Microsoft YaHei"/>
+              </a:rPr>
+              <a:t>的实现条件。若目标是把长期速率差压到接近 1，仍需更强的跨核进度信息。</a:t>
             </a:r>
           </a:p>
         </p:txBody>
@@ -20534,7 +20551,7 @@
                 </a:solidFill>
                 <a:latin typeface="Arial"/>
               </a:rPr>
-              <a:t>26 / 30</a:t>
+              <a:t>26 / 34</a:t>
             </a:r>
           </a:p>
         </p:txBody>
@@ -20609,8 +20626,8 @@
         </p:nvSpPr>
         <p:spPr>
           <a:xfrm>
-            <a:off x="10143439" y="274320"/>
-            <a:ext cx="182880" cy="182880"/>
+            <a:off x="566928" y="301752"/>
+            <a:ext cx="137160" cy="137160"/>
           </a:xfrm>
           <a:prstGeom prst="rect">
             <a:avLst/>
@@ -20653,8 +20670,8 @@
         </p:nvSpPr>
         <p:spPr>
           <a:xfrm>
-            <a:off x="10399471" y="246888"/>
-            <a:ext cx="1225296" cy="256032"/>
+            <a:off x="804672" y="265176"/>
+            <a:ext cx="9229039" cy="237744"/>
           </a:xfrm>
           <a:prstGeom prst="rect">
             <a:avLst/>
@@ -20673,36 +20690,36 @@
               </a:lnSpc>
             </a:pPr>
             <a:r>
-              <a:rPr sz="1300" b="1">
-                <a:solidFill>
-                  <a:srgbClr val="20242C"/>
-                </a:solidFill>
-                <a:latin typeface="Arial"/>
-              </a:rPr>
-              <a:t>HUAWEI</a:t>
-            </a:r>
-          </a:p>
-        </p:txBody>
-      </p:sp>
-      <p:sp>
-        <p:nvSpPr>
-          <p:cNvPr id="5" name="Oval 4"/>
+              <a:rPr sz="1150" b="1">
+                <a:solidFill>
+                  <a:srgbClr val="667080"/>
+                </a:solidFill>
+                <a:latin typeface="Microsoft YaHei"/>
+              </a:rPr>
+              <a:t>S19 Swift / S20 DCTCP（各 5,840 FF‑eq） · requester 动态窗口</a:t>
+            </a:r>
+          </a:p>
+        </p:txBody>
+      </p:sp>
+      <p:sp>
+        <p:nvSpPr>
+          <p:cNvPr id="5" name="Rectangle 4"/>
           <p:cNvSpPr/>
           <p:nvPr/>
         </p:nvSpPr>
         <p:spPr>
           <a:xfrm>
-            <a:off x="566928" y="1883664"/>
-            <a:ext cx="896112" cy="896112"/>
-          </a:xfrm>
-          <a:prstGeom prst="ellipse">
-            <a:avLst/>
-          </a:prstGeom>
-          <a:noFill/>
-          <a:ln w="17780">
-            <a:solidFill>
-              <a:srgbClr val="DCE3EA"/>
-            </a:solidFill>
+            <a:off x="566928" y="640080"/>
+            <a:ext cx="11057839" cy="10058"/>
+          </a:xfrm>
+          <a:prstGeom prst="rect">
+            <a:avLst/>
+          </a:prstGeom>
+          <a:solidFill>
+            <a:srgbClr val="DCE3EA"/>
+          </a:solidFill>
+          <a:ln>
+            <a:noFill/>
           </a:ln>
           <a:effectLst/>
         </p:spPr>
@@ -20730,170 +20747,14 @@
       </p:sp>
       <p:sp>
         <p:nvSpPr>
-          <p:cNvPr id="6" name="TextBox 5"/>
-          <p:cNvSpPr txBox="1"/>
-          <p:nvPr/>
-        </p:nvSpPr>
-        <p:spPr>
-          <a:xfrm>
-            <a:off x="566928" y="2176272"/>
-            <a:ext cx="896112" cy="365760"/>
-          </a:xfrm>
-          <a:prstGeom prst="rect">
-            <a:avLst/>
-          </a:prstGeom>
-          <a:noFill/>
-        </p:spPr>
-        <p:txBody>
-          <a:bodyPr wrap="square" anchor="t" lIns="0" rIns="0" tIns="0" bIns="0">
-            <a:spAutoFit/>
-          </a:bodyPr>
-          <a:lstStyle/>
-          <a:p>
-            <a:pPr algn="ctr">
-              <a:lnSpc>
-                <a:spcPct val="100000"/>
-              </a:lnSpc>
-            </a:pPr>
-            <a:r>
-              <a:rPr sz="2100" b="1">
-                <a:solidFill>
-                  <a:srgbClr val="D20A2E"/>
-                </a:solidFill>
-                <a:latin typeface="Arial"/>
-              </a:rPr>
-              <a:t>07</a:t>
-            </a:r>
-          </a:p>
-        </p:txBody>
-      </p:sp>
-      <p:sp>
-        <p:nvSpPr>
-          <p:cNvPr id="7" name="TextBox 6"/>
-          <p:cNvSpPr txBox="1"/>
-          <p:nvPr/>
-        </p:nvSpPr>
-        <p:spPr>
-          <a:xfrm>
-            <a:off x="566928" y="2980944"/>
-            <a:ext cx="4023360" cy="237744"/>
-          </a:xfrm>
-          <a:prstGeom prst="rect">
-            <a:avLst/>
-          </a:prstGeom>
-          <a:noFill/>
-        </p:spPr>
-        <p:txBody>
-          <a:bodyPr wrap="square" anchor="t" lIns="0" rIns="0" tIns="0" bIns="0">
-            <a:spAutoFit/>
-          </a:bodyPr>
-          <a:lstStyle/>
-          <a:p>
-            <a:pPr algn="l">
-              <a:lnSpc>
-                <a:spcPct val="100000"/>
-              </a:lnSpc>
-            </a:pPr>
-            <a:r>
-              <a:rPr sz="1100" b="1">
-                <a:solidFill>
-                  <a:srgbClr val="D20A2E"/>
-                </a:solidFill>
-                <a:latin typeface="Arial"/>
-              </a:rPr>
-              <a:t>S E C T I O N   S E V E N</a:t>
-            </a:r>
-          </a:p>
-        </p:txBody>
-      </p:sp>
-      <p:sp>
-        <p:nvSpPr>
-          <p:cNvPr id="8" name="TextBox 7"/>
-          <p:cNvSpPr txBox="1"/>
-          <p:nvPr/>
-        </p:nvSpPr>
-        <p:spPr>
-          <a:xfrm>
-            <a:off x="566928" y="3291840"/>
-            <a:ext cx="4937760" cy="1426464"/>
-          </a:xfrm>
-          <a:prstGeom prst="rect">
-            <a:avLst/>
-          </a:prstGeom>
-          <a:noFill/>
-        </p:spPr>
-        <p:txBody>
-          <a:bodyPr wrap="square" anchor="t" lIns="0" rIns="0" tIns="0" bIns="0">
-            <a:spAutoFit/>
-          </a:bodyPr>
-          <a:lstStyle/>
-          <a:p>
-            <a:pPr algn="l">
-              <a:lnSpc>
-                <a:spcPct val="98000"/>
-              </a:lnSpc>
-            </a:pPr>
-            <a:r>
-              <a:rPr sz="3800" b="1">
-                <a:solidFill>
-                  <a:srgbClr val="20242C"/>
-                </a:solidFill>
-                <a:latin typeface="Microsoft YaHei"/>
-              </a:rPr>
-              <a:t>结论与建议</a:t>
-            </a:r>
-          </a:p>
-        </p:txBody>
-      </p:sp>
-      <p:sp>
-        <p:nvSpPr>
-          <p:cNvPr id="9" name="TextBox 8"/>
-          <p:cNvSpPr txBox="1"/>
-          <p:nvPr/>
-        </p:nvSpPr>
-        <p:spPr>
-          <a:xfrm>
-            <a:off x="566928" y="4846320"/>
-            <a:ext cx="4572000" cy="786384"/>
-          </a:xfrm>
-          <a:prstGeom prst="rect">
-            <a:avLst/>
-          </a:prstGeom>
-          <a:noFill/>
-        </p:spPr>
-        <p:txBody>
-          <a:bodyPr wrap="square" anchor="t" lIns="0" rIns="0" tIns="0" bIns="0">
-            <a:spAutoFit/>
-          </a:bodyPr>
-          <a:lstStyle/>
-          <a:p>
-            <a:pPr algn="l">
-              <a:lnSpc>
-                <a:spcPct val="106000"/>
-              </a:lnSpc>
-            </a:pPr>
-            <a:r>
-              <a:rPr sz="1400" b="0">
-                <a:solidFill>
-                  <a:srgbClr val="667080"/>
-                </a:solidFill>
-                <a:latin typeface="Microsoft YaHei"/>
-              </a:rPr>
-              <a:t>哪些已经关死，哪些还开着，以及下一步该由谁拍板。</a:t>
-            </a:r>
-          </a:p>
-        </p:txBody>
-      </p:sp>
-      <p:sp>
-        <p:nvSpPr>
-          <p:cNvPr id="10" name="Rectangle 9"/>
+          <p:cNvPr id="6" name="Rectangle 5"/>
           <p:cNvSpPr/>
           <p:nvPr/>
         </p:nvSpPr>
         <p:spPr>
           <a:xfrm>
-            <a:off x="5989320" y="2011680"/>
-            <a:ext cx="5635447" cy="2834640"/>
+            <a:off x="10143439" y="274320"/>
+            <a:ext cx="182880" cy="182880"/>
           </a:xfrm>
           <a:prstGeom prst="rect">
             <a:avLst/>
@@ -20930,14 +20791,14 @@
       </p:sp>
       <p:sp>
         <p:nvSpPr>
-          <p:cNvPr id="11" name="TextBox 10"/>
-          <p:cNvSpPr txBox="1"/>
-          <p:nvPr/>
-        </p:nvSpPr>
-        <p:spPr>
-          <a:xfrm>
-            <a:off x="6355080" y="2395728"/>
-            <a:ext cx="3657600" cy="237744"/>
+          <p:cNvPr id="7" name="TextBox 6"/>
+          <p:cNvSpPr txBox="1"/>
+          <p:nvPr/>
+        </p:nvSpPr>
+        <p:spPr>
+          <a:xfrm>
+            <a:off x="10399471" y="246888"/>
+            <a:ext cx="1225296" cy="256032"/>
           </a:xfrm>
           <a:prstGeom prst="rect">
             <a:avLst/>
@@ -20956,14 +20817,162 @@
               </a:lnSpc>
             </a:pPr>
             <a:r>
-              <a:rPr sz="1100" b="1">
-                <a:solidFill>
-                  <a:srgbClr val="FFFFFF"/>
+              <a:rPr sz="1300" b="1">
+                <a:solidFill>
+                  <a:srgbClr val="20242C"/>
                 </a:solidFill>
                 <a:latin typeface="Arial"/>
               </a:rPr>
-              <a:t>B O T T O M   L I N E</a:t>
-            </a:r>
+              <a:t>HUAWEI</a:t>
+            </a:r>
+          </a:p>
+        </p:txBody>
+      </p:sp>
+      <p:pic>
+        <p:nvPicPr>
+          <p:cNvPr id="8" name="Picture 7" descr="28-window-diagram.png"/>
+          <p:cNvPicPr>
+            <a:picLocks noChangeAspect="1"/>
+          </p:cNvPicPr>
+          <p:nvPr/>
+        </p:nvPicPr>
+        <p:blipFill>
+          <a:blip r:embed="rId2"/>
+          <a:stretch>
+            <a:fillRect/>
+          </a:stretch>
+        </p:blipFill>
+        <p:spPr>
+          <a:xfrm>
+            <a:off x="595436" y="1060704"/>
+            <a:ext cx="7943983" cy="4791456"/>
+          </a:xfrm>
+          <a:prstGeom prst="rect">
+            <a:avLst/>
+          </a:prstGeom>
+        </p:spPr>
+      </p:pic>
+      <p:sp>
+        <p:nvSpPr>
+          <p:cNvPr id="9" name="TextBox 8"/>
+          <p:cNvSpPr txBox="1"/>
+          <p:nvPr/>
+        </p:nvSpPr>
+        <p:spPr>
+          <a:xfrm>
+            <a:off x="566928" y="5961888"/>
+            <a:ext cx="8001000" cy="384048"/>
+          </a:xfrm>
+          <a:prstGeom prst="rect">
+            <a:avLst/>
+          </a:prstGeom>
+          <a:noFill/>
+        </p:spPr>
+        <p:txBody>
+          <a:bodyPr wrap="square" anchor="t" lIns="0" rIns="0" tIns="0" bIns="0">
+            <a:spAutoFit/>
+          </a:bodyPr>
+          <a:lstStyle/>
+          <a:p>
+            <a:pPr algn="l">
+              <a:lnSpc>
+                <a:spcPct val="100000"/>
+              </a:lnSpc>
+            </a:pPr>
+            <a:r>
+              <a:rPr sz="1000" b="0">
+                <a:solidFill>
+                  <a:srgbClr val="667080"/>
+                </a:solidFill>
+                <a:latin typeface="Microsoft YaHei"/>
+              </a:rPr>
+              <a:t>两者共用每核动态 outstanding 窗口；S19 用协议天然 RTT，S20 用 HA tracker 产生的 1 bit ECN 标记。</a:t>
+            </a:r>
+          </a:p>
+        </p:txBody>
+      </p:sp>
+      <p:sp>
+        <p:nvSpPr>
+          <p:cNvPr id="10" name="TextBox 9"/>
+          <p:cNvSpPr txBox="1"/>
+          <p:nvPr/>
+        </p:nvSpPr>
+        <p:spPr>
+          <a:xfrm>
+            <a:off x="8951976" y="1060704"/>
+            <a:ext cx="2672791" cy="237744"/>
+          </a:xfrm>
+          <a:prstGeom prst="rect">
+            <a:avLst/>
+          </a:prstGeom>
+          <a:noFill/>
+        </p:spPr>
+        <p:txBody>
+          <a:bodyPr wrap="square" anchor="t" lIns="0" rIns="0" tIns="0" bIns="0">
+            <a:spAutoFit/>
+          </a:bodyPr>
+          <a:lstStyle/>
+          <a:p>
+            <a:pPr algn="l">
+              <a:lnSpc>
+                <a:spcPct val="100000"/>
+              </a:lnSpc>
+            </a:pPr>
+            <a:r>
+              <a:rPr sz="800" b="1">
+                <a:solidFill>
+                  <a:srgbClr val="D20A2E"/>
+                </a:solidFill>
+                <a:latin typeface="Arial"/>
+              </a:rPr>
+              <a:t>N E A R - F R O N T I E R   ·   W I N D O W   C C</a:t>
+            </a:r>
+          </a:p>
+        </p:txBody>
+      </p:sp>
+      <p:sp>
+        <p:nvSpPr>
+          <p:cNvPr id="11" name="Rectangle 10"/>
+          <p:cNvSpPr/>
+          <p:nvPr/>
+        </p:nvSpPr>
+        <p:spPr>
+          <a:xfrm>
+            <a:off x="8951976" y="1408176"/>
+            <a:ext cx="2672791" cy="1779563"/>
+          </a:xfrm>
+          <a:prstGeom prst="rect">
+            <a:avLst/>
+          </a:prstGeom>
+          <a:solidFill>
+            <a:srgbClr val="EDF2F7"/>
+          </a:solidFill>
+          <a:ln w="12700">
+            <a:solidFill>
+              <a:srgbClr val="DCE3EA"/>
+            </a:solidFill>
+          </a:ln>
+          <a:effectLst/>
+        </p:spPr>
+        <p:style>
+          <a:lnRef idx="1">
+            <a:schemeClr val="accent1"/>
+          </a:lnRef>
+          <a:fillRef idx="3">
+            <a:schemeClr val="accent1"/>
+          </a:fillRef>
+          <a:effectRef idx="2">
+            <a:schemeClr val="accent1"/>
+          </a:effectRef>
+          <a:fontRef idx="minor">
+            <a:schemeClr val="lt1"/>
+          </a:fontRef>
+        </p:style>
+        <p:txBody>
+          <a:bodyPr rtlCol="0" anchor="ctr" wrap="square"/>
+          <a:lstStyle/>
+          <a:p>
+            <a:pPr algn="ctr"/>
           </a:p>
         </p:txBody>
       </p:sp>
@@ -20975,33 +20984,33 @@
         </p:nvSpPr>
         <p:spPr>
           <a:xfrm>
-            <a:off x="6355080" y="2761488"/>
-            <a:ext cx="4903927" cy="1737360"/>
-          </a:xfrm>
-          <a:prstGeom prst="rect">
-            <a:avLst/>
-          </a:prstGeom>
-          <a:noFill/>
-        </p:spPr>
-        <p:txBody>
-          <a:bodyPr wrap="square" anchor="t" lIns="0" rIns="0" tIns="0" bIns="0">
-            <a:spAutoFit/>
-          </a:bodyPr>
-          <a:lstStyle/>
-          <a:p>
-            <a:pPr algn="l">
-              <a:lnSpc>
-                <a:spcPct val="104000"/>
-              </a:lnSpc>
-            </a:pPr>
-            <a:r>
-              <a:rPr sz="2000" b="1">
-                <a:solidFill>
-                  <a:srgbClr val="FFFFFF"/>
-                </a:solidFill>
-                <a:latin typeface="Microsoft YaHei"/>
-              </a:rPr>
-              <a:t>带宽线已基本关死；公平缺陷是真实的，但它不必用带宽去换。真正要拍板的不是数字，而是层次 —— 动得了事务层就选 S16，动不了就选 S22。</a:t>
+            <a:off x="9134855" y="1606892"/>
+            <a:ext cx="2307031" cy="259080"/>
+          </a:xfrm>
+          <a:prstGeom prst="rect">
+            <a:avLst/>
+          </a:prstGeom>
+          <a:noFill/>
+        </p:spPr>
+        <p:txBody>
+          <a:bodyPr wrap="square" anchor="t" lIns="0" rIns="0" tIns="0" bIns="0">
+            <a:spAutoFit/>
+          </a:bodyPr>
+          <a:lstStyle/>
+          <a:p>
+            <a:pPr algn="l">
+              <a:lnSpc>
+                <a:spcPct val="100000"/>
+              </a:lnSpc>
+            </a:pPr>
+            <a:r>
+              <a:rPr sz="1200" b="1">
+                <a:solidFill>
+                  <a:srgbClr val="20242C"/>
+                </a:solidFill>
+                <a:latin typeface="Microsoft YaHei"/>
+              </a:rPr>
+              <a:t>共同执行器：动态 outstanding</a:t>
             </a:r>
           </a:p>
         </p:txBody>
@@ -21009,6 +21018,321 @@
       <p:sp>
         <p:nvSpPr>
           <p:cNvPr id="13" name="TextBox 12"/>
+          <p:cNvSpPr txBox="1"/>
+          <p:nvPr/>
+        </p:nvSpPr>
+        <p:spPr>
+          <a:xfrm>
+            <a:off x="9134855" y="1948268"/>
+            <a:ext cx="2307031" cy="1077330"/>
+          </a:xfrm>
+          <a:prstGeom prst="rect">
+            <a:avLst/>
+          </a:prstGeom>
+          <a:noFill/>
+        </p:spPr>
+        <p:txBody>
+          <a:bodyPr wrap="square" anchor="t" lIns="0" rIns="0" tIns="0" bIns="0">
+            <a:spAutoFit/>
+          </a:bodyPr>
+          <a:lstStyle/>
+          <a:p>
+            <a:pPr algn="l">
+              <a:lnSpc>
+                <a:spcPct val="102000"/>
+              </a:lnSpc>
+            </a:pPr>
+            <a:r>
+              <a:rPr sz="850" b="0">
+                <a:solidFill>
+                  <a:srgbClr val="20242C"/>
+                </a:solidFill>
+                <a:latin typeface="Microsoft YaHei"/>
+              </a:rPr>
+              <a:t>每个 core 维护窗口 Wc：只有当前在飞事务数 &lt; Wc，才允许发新的 REQ。初值 16、下限 8、硬上限仍是 core_outstanding = 32。</a:t>
+            </a:r>
+          </a:p>
+          <a:p>
+            <a:pPr algn="l">
+              <a:lnSpc>
+                <a:spcPct val="102000"/>
+              </a:lnSpc>
+              <a:spcBef>
+                <a:spcPts val="600"/>
+              </a:spcBef>
+            </a:pPr>
+            <a:r>
+              <a:rPr sz="850" b="0">
+                <a:solidFill>
+                  <a:srgbClr val="20242C"/>
+                </a:solidFill>
+                <a:latin typeface="Microsoft YaHei"/>
+              </a:rPr>
+              <a:t>事务完成归还名额；Retry 重发不受窗口限制。窗口有名额时允许突发，因此比逐拍 rate pacer 更贴近 CHI 的事务模型。</a:t>
+            </a:r>
+          </a:p>
+        </p:txBody>
+      </p:sp>
+      <p:sp>
+        <p:nvSpPr>
+          <p:cNvPr id="14" name="Rectangle 13"/>
+          <p:cNvSpPr/>
+          <p:nvPr/>
+        </p:nvSpPr>
+        <p:spPr>
+          <a:xfrm>
+            <a:off x="8951976" y="3334043"/>
+            <a:ext cx="2672791" cy="1423650"/>
+          </a:xfrm>
+          <a:prstGeom prst="rect">
+            <a:avLst/>
+          </a:prstGeom>
+          <a:solidFill>
+            <a:srgbClr val="EDF2F7"/>
+          </a:solidFill>
+          <a:ln w="19050">
+            <a:solidFill>
+              <a:srgbClr val="D20A2E"/>
+            </a:solidFill>
+          </a:ln>
+          <a:effectLst/>
+        </p:spPr>
+        <p:style>
+          <a:lnRef idx="1">
+            <a:schemeClr val="accent1"/>
+          </a:lnRef>
+          <a:fillRef idx="3">
+            <a:schemeClr val="accent1"/>
+          </a:fillRef>
+          <a:effectRef idx="2">
+            <a:schemeClr val="accent1"/>
+          </a:effectRef>
+          <a:fontRef idx="minor">
+            <a:schemeClr val="lt1"/>
+          </a:fontRef>
+        </p:style>
+        <p:txBody>
+          <a:bodyPr rtlCol="0" anchor="ctr" wrap="square"/>
+          <a:lstStyle/>
+          <a:p>
+            <a:pPr algn="ctr"/>
+          </a:p>
+        </p:txBody>
+      </p:sp>
+      <p:sp>
+        <p:nvSpPr>
+          <p:cNvPr id="15" name="TextBox 14"/>
+          <p:cNvSpPr txBox="1"/>
+          <p:nvPr/>
+        </p:nvSpPr>
+        <p:spPr>
+          <a:xfrm>
+            <a:off x="9134855" y="3534749"/>
+            <a:ext cx="2307031" cy="259080"/>
+          </a:xfrm>
+          <a:prstGeom prst="rect">
+            <a:avLst/>
+          </a:prstGeom>
+          <a:noFill/>
+        </p:spPr>
+        <p:txBody>
+          <a:bodyPr wrap="square" anchor="t" lIns="0" rIns="0" tIns="0" bIns="0">
+            <a:spAutoFit/>
+          </a:bodyPr>
+          <a:lstStyle/>
+          <a:p>
+            <a:pPr algn="l">
+              <a:lnSpc>
+                <a:spcPct val="100000"/>
+              </a:lnSpc>
+            </a:pPr>
+            <a:r>
+              <a:rPr sz="1200" b="1">
+                <a:solidFill>
+                  <a:srgbClr val="D20A2E"/>
+                </a:solidFill>
+                <a:latin typeface="Microsoft YaHei"/>
+              </a:rPr>
+              <a:t>S19：RTT 驱动</a:t>
+            </a:r>
+          </a:p>
+        </p:txBody>
+      </p:sp>
+      <p:sp>
+        <p:nvSpPr>
+          <p:cNvPr id="16" name="TextBox 15"/>
+          <p:cNvSpPr txBox="1"/>
+          <p:nvPr/>
+        </p:nvSpPr>
+        <p:spPr>
+          <a:xfrm>
+            <a:off x="9134855" y="3876125"/>
+            <a:ext cx="2307031" cy="717438"/>
+          </a:xfrm>
+          <a:prstGeom prst="rect">
+            <a:avLst/>
+          </a:prstGeom>
+          <a:noFill/>
+        </p:spPr>
+        <p:txBody>
+          <a:bodyPr wrap="square" anchor="t" lIns="0" rIns="0" tIns="0" bIns="0">
+            <a:spAutoFit/>
+          </a:bodyPr>
+          <a:lstStyle/>
+          <a:p>
+            <a:pPr algn="l">
+              <a:lnSpc>
+                <a:spcPct val="102000"/>
+              </a:lnSpc>
+            </a:pPr>
+            <a:r>
+              <a:rPr sz="900" b="0">
+                <a:solidFill>
+                  <a:srgbClr val="20242C"/>
+                </a:solidFill>
+                <a:latin typeface="Microsoft YaHei"/>
+              </a:rPr>
+              <a:t>REQ 上环到 DBIDResp 回到 core 就是一份现成 RTT 样本，Retry 往返也被计入。RTT 低于 target 就加窗，高于 target 就按超额比例缩窗。</a:t>
+            </a:r>
+            <a:r>
+              <a:rPr sz="900" b="1">
+                <a:solidFill>
+                  <a:srgbClr val="20242C"/>
+                </a:solidFill>
+                <a:latin typeface="Microsoft YaHei"/>
+              </a:rPr>
+              <a:t>不加报文、不加标记位。</a:t>
+            </a:r>
+          </a:p>
+        </p:txBody>
+      </p:sp>
+      <p:sp>
+        <p:nvSpPr>
+          <p:cNvPr id="17" name="Rectangle 16"/>
+          <p:cNvSpPr/>
+          <p:nvPr/>
+        </p:nvSpPr>
+        <p:spPr>
+          <a:xfrm>
+            <a:off x="8951976" y="4903997"/>
+            <a:ext cx="2672791" cy="1423650"/>
+          </a:xfrm>
+          <a:prstGeom prst="rect">
+            <a:avLst/>
+          </a:prstGeom>
+          <a:solidFill>
+            <a:srgbClr val="EDF2F7"/>
+          </a:solidFill>
+          <a:ln w="12700">
+            <a:solidFill>
+              <a:srgbClr val="DCE3EA"/>
+            </a:solidFill>
+          </a:ln>
+          <a:effectLst/>
+        </p:spPr>
+        <p:style>
+          <a:lnRef idx="1">
+            <a:schemeClr val="accent1"/>
+          </a:lnRef>
+          <a:fillRef idx="3">
+            <a:schemeClr val="accent1"/>
+          </a:fillRef>
+          <a:effectRef idx="2">
+            <a:schemeClr val="accent1"/>
+          </a:effectRef>
+          <a:fontRef idx="minor">
+            <a:schemeClr val="lt1"/>
+          </a:fontRef>
+        </p:style>
+        <p:txBody>
+          <a:bodyPr rtlCol="0" anchor="ctr" wrap="square"/>
+          <a:lstStyle/>
+          <a:p>
+            <a:pPr algn="ctr"/>
+          </a:p>
+        </p:txBody>
+      </p:sp>
+      <p:sp>
+        <p:nvSpPr>
+          <p:cNvPr id="18" name="TextBox 17"/>
+          <p:cNvSpPr txBox="1"/>
+          <p:nvPr/>
+        </p:nvSpPr>
+        <p:spPr>
+          <a:xfrm>
+            <a:off x="9134855" y="5104703"/>
+            <a:ext cx="2307031" cy="259080"/>
+          </a:xfrm>
+          <a:prstGeom prst="rect">
+            <a:avLst/>
+          </a:prstGeom>
+          <a:noFill/>
+        </p:spPr>
+        <p:txBody>
+          <a:bodyPr wrap="square" anchor="t" lIns="0" rIns="0" tIns="0" bIns="0">
+            <a:spAutoFit/>
+          </a:bodyPr>
+          <a:lstStyle/>
+          <a:p>
+            <a:pPr algn="l">
+              <a:lnSpc>
+                <a:spcPct val="100000"/>
+              </a:lnSpc>
+            </a:pPr>
+            <a:r>
+              <a:rPr sz="1200" b="1">
+                <a:solidFill>
+                  <a:srgbClr val="20242C"/>
+                </a:solidFill>
+                <a:latin typeface="Microsoft YaHei"/>
+              </a:rPr>
+              <a:t>S20：ECN 驱动</a:t>
+            </a:r>
+          </a:p>
+        </p:txBody>
+      </p:sp>
+      <p:sp>
+        <p:nvSpPr>
+          <p:cNvPr id="19" name="TextBox 18"/>
+          <p:cNvSpPr txBox="1"/>
+          <p:nvPr/>
+        </p:nvSpPr>
+        <p:spPr>
+          <a:xfrm>
+            <a:off x="9134855" y="5446079"/>
+            <a:ext cx="2307031" cy="717438"/>
+          </a:xfrm>
+          <a:prstGeom prst="rect">
+            <a:avLst/>
+          </a:prstGeom>
+          <a:noFill/>
+        </p:spPr>
+        <p:txBody>
+          <a:bodyPr wrap="square" anchor="t" lIns="0" rIns="0" tIns="0" bIns="0">
+            <a:spAutoFit/>
+          </a:bodyPr>
+          <a:lstStyle/>
+          <a:p>
+            <a:pPr algn="l">
+              <a:lnSpc>
+                <a:spcPct val="102000"/>
+              </a:lnSpc>
+            </a:pPr>
+            <a:r>
+              <a:rPr sz="900" b="0">
+                <a:solidFill>
+                  <a:srgbClr val="20242C"/>
+                </a:solidFill>
+                <a:latin typeface="Microsoft YaHei"/>
+              </a:rPr>
+              <a:t>HA 根据 request tracker 占用率在 DBIDResp 上附 1 bit mark，RetryAck 直接视为 mark。core 对标记比例做 EWMA；有标记按 α/2 缩窗，无标记按 1/W 加窗。</a:t>
+            </a:r>
+          </a:p>
+        </p:txBody>
+      </p:sp>
+      <p:sp>
+        <p:nvSpPr>
+          <p:cNvPr id="20" name="TextBox 19"/>
           <p:cNvSpPr txBox="1"/>
           <p:nvPr/>
         </p:nvSpPr>
@@ -21040,7 +21364,7 @@
                 </a:solidFill>
                 <a:latin typeface="Arial"/>
               </a:rPr>
-              <a:t>27 / 30</a:t>
+              <a:t>27 / 34</a:t>
             </a:r>
           </a:p>
         </p:txBody>
@@ -21185,7 +21509,7 @@
                 </a:solidFill>
                 <a:latin typeface="Microsoft YaHei"/>
               </a:rPr>
-              <a:t>结论</a:t>
+              <a:t>S19 / S20 实测：均匀写</a:t>
             </a:r>
           </a:p>
         </p:txBody>
@@ -21325,8 +21649,8 @@
         </p:nvSpPr>
         <p:spPr>
           <a:xfrm>
-            <a:off x="566928" y="1060704"/>
-            <a:ext cx="11057839" cy="237744"/>
+            <a:off x="566928" y="1024128"/>
+            <a:ext cx="2377440" cy="237744"/>
           </a:xfrm>
           <a:prstGeom prst="rect">
             <a:avLst/>
@@ -21345,13 +21669,13 @@
               </a:lnSpc>
             </a:pPr>
             <a:r>
-              <a:rPr sz="1050" b="1">
+              <a:rPr sz="1000" b="1">
                 <a:solidFill>
                   <a:srgbClr val="D20A2E"/>
                 </a:solidFill>
                 <a:latin typeface="Arial"/>
               </a:rPr>
-              <a:t>C O N C L U S I O N S</a:t>
+              <a:t>M E A S U R E D   ·   U N I F O R M</a:t>
             </a:r>
           </a:p>
         </p:txBody>
@@ -21364,8 +21688,8 @@
         </p:nvSpPr>
         <p:spPr>
           <a:xfrm>
-            <a:off x="566928" y="1353312"/>
-            <a:ext cx="11057839" cy="658368"/>
+            <a:off x="566928" y="1335024"/>
+            <a:ext cx="2377440" cy="713232"/>
           </a:xfrm>
           <a:prstGeom prst="rect">
             <a:avLst/>
@@ -21384,33 +21708,322 @@
               </a:lnSpc>
             </a:pPr>
             <a:r>
-              <a:rPr sz="3000" b="1">
-                <a:solidFill>
-                  <a:srgbClr val="20242C"/>
-                </a:solidFill>
-                <a:latin typeface="Microsoft YaHei"/>
-              </a:rPr>
-              <a:t>四条</a:t>
-            </a:r>
-          </a:p>
-        </p:txBody>
-      </p:sp>
-      <p:sp>
-        <p:nvSpPr>
-          <p:cNvPr id="10" name="Rectangle 9"/>
+              <a:rPr sz="4000" b="1">
+                <a:solidFill>
+                  <a:srgbClr val="D20A2E"/>
+                </a:solidFill>
+                <a:latin typeface="Arial"/>
+              </a:rPr>
+              <a:t>≤0.28%</a:t>
+            </a:r>
+          </a:p>
+        </p:txBody>
+      </p:sp>
+      <p:sp>
+        <p:nvSpPr>
+          <p:cNvPr id="10" name="TextBox 9"/>
+          <p:cNvSpPr txBox="1"/>
+          <p:nvPr/>
+        </p:nvSpPr>
+        <p:spPr>
+          <a:xfrm>
+            <a:off x="566928" y="2121408"/>
+            <a:ext cx="2377440" cy="658368"/>
+          </a:xfrm>
+          <a:prstGeom prst="rect">
+            <a:avLst/>
+          </a:prstGeom>
+          <a:noFill/>
+        </p:spPr>
+        <p:txBody>
+          <a:bodyPr wrap="square" anchor="t" lIns="0" rIns="0" tIns="0" bIns="0">
+            <a:spAutoFit/>
+          </a:bodyPr>
+          <a:lstStyle/>
+          <a:p>
+            <a:pPr algn="l">
+              <a:lnSpc>
+                <a:spcPct val="106000"/>
+              </a:lnSpc>
+            </a:pPr>
+            <a:r>
+              <a:rPr sz="1000" b="0">
+                <a:solidFill>
+                  <a:srgbClr val="667080"/>
+                </a:solidFill>
+                <a:latin typeface="Microsoft YaHei"/>
+              </a:rPr>
+              <a:t>S19 / S20 的总带宽与 S0 的最大差异</a:t>
+            </a:r>
+          </a:p>
+          <a:p>
+            <a:pPr algn="l">
+              <a:lnSpc>
+                <a:spcPct val="106000"/>
+              </a:lnSpc>
+              <a:spcBef>
+                <a:spcPts val="500"/>
+              </a:spcBef>
+            </a:pPr>
+            <a:r>
+              <a:rPr sz="1000" b="0">
+                <a:solidFill>
+                  <a:srgbClr val="667080"/>
+                </a:solidFill>
+                <a:latin typeface="Microsoft YaHei"/>
+              </a:rPr>
+              <a:t>两者各 5,840 FF-eq · requester 动态窗口</a:t>
+            </a:r>
+          </a:p>
+        </p:txBody>
+      </p:sp>
+      <p:sp>
+        <p:nvSpPr>
+          <p:cNvPr id="11" name="Rectangle 10"/>
           <p:cNvSpPr/>
           <p:nvPr/>
         </p:nvSpPr>
         <p:spPr>
           <a:xfrm>
-            <a:off x="566928" y="2231136"/>
-            <a:ext cx="2599867" cy="2999231"/>
+            <a:off x="566928" y="2889504"/>
+            <a:ext cx="822960" cy="41148"/>
           </a:xfrm>
           <a:prstGeom prst="rect">
             <a:avLst/>
           </a:prstGeom>
           <a:solidFill>
-            <a:srgbClr val="FFFFFF"/>
+            <a:srgbClr val="D20A2E"/>
+          </a:solidFill>
+          <a:ln>
+            <a:noFill/>
+          </a:ln>
+          <a:effectLst/>
+        </p:spPr>
+        <p:style>
+          <a:lnRef idx="1">
+            <a:schemeClr val="accent1"/>
+          </a:lnRef>
+          <a:fillRef idx="3">
+            <a:schemeClr val="accent1"/>
+          </a:fillRef>
+          <a:effectRef idx="2">
+            <a:schemeClr val="accent1"/>
+          </a:effectRef>
+          <a:fontRef idx="minor">
+            <a:schemeClr val="lt1"/>
+          </a:fontRef>
+        </p:style>
+        <p:txBody>
+          <a:bodyPr rtlCol="0" anchor="ctr" wrap="square"/>
+          <a:lstStyle/>
+          <a:p>
+            <a:pPr algn="ctr"/>
+          </a:p>
+        </p:txBody>
+      </p:sp>
+      <p:pic>
+        <p:nvPicPr>
+          <p:cNvPr id="12" name="Picture 11" descr="29-window-compare.png"/>
+          <p:cNvPicPr>
+            <a:picLocks noChangeAspect="1"/>
+          </p:cNvPicPr>
+          <p:nvPr/>
+        </p:nvPicPr>
+        <p:blipFill>
+          <a:blip r:embed="rId2"/>
+          <a:stretch>
+            <a:fillRect/>
+          </a:stretch>
+        </p:blipFill>
+        <p:spPr>
+          <a:xfrm>
+            <a:off x="3328416" y="1169399"/>
+            <a:ext cx="8296351" cy="2629125"/>
+          </a:xfrm>
+          <a:prstGeom prst="rect">
+            <a:avLst/>
+          </a:prstGeom>
+        </p:spPr>
+      </p:pic>
+      <p:sp>
+        <p:nvSpPr>
+          <p:cNvPr id="13" name="TextBox 12"/>
+          <p:cNvSpPr txBox="1"/>
+          <p:nvPr/>
+        </p:nvSpPr>
+        <p:spPr>
+          <a:xfrm>
+            <a:off x="3328416" y="3889965"/>
+            <a:ext cx="8296351" cy="292608"/>
+          </a:xfrm>
+          <a:prstGeom prst="rect">
+            <a:avLst/>
+          </a:prstGeom>
+          <a:noFill/>
+        </p:spPr>
+        <p:txBody>
+          <a:bodyPr wrap="square" anchor="t" lIns="0" rIns="0" tIns="0" bIns="0">
+            <a:spAutoFit/>
+          </a:bodyPr>
+          <a:lstStyle/>
+          <a:p>
+            <a:pPr algn="l">
+              <a:lnSpc>
+                <a:spcPct val="100000"/>
+              </a:lnSpc>
+            </a:pPr>
+            <a:r>
+              <a:rPr sz="1000" b="0">
+                <a:solidFill>
+                  <a:srgbClr val="667080"/>
+                </a:solidFill>
+                <a:latin typeface="Microsoft YaHei"/>
+              </a:rPr>
+              <a:t>三幅依次比较总带宽、100 拍瞬时 Jain、整窗最快 / 最慢核带宽比；每幅内四根柱都是 S0 / S1 / S19 / S20。</a:t>
+            </a:r>
+          </a:p>
+        </p:txBody>
+      </p:sp>
+      <p:sp>
+        <p:nvSpPr>
+          <p:cNvPr id="14" name="Rectangle 13"/>
+          <p:cNvSpPr/>
+          <p:nvPr/>
+        </p:nvSpPr>
+        <p:spPr>
+          <a:xfrm>
+            <a:off x="566928" y="4657029"/>
+            <a:ext cx="3527450" cy="1670618"/>
+          </a:xfrm>
+          <a:prstGeom prst="rect">
+            <a:avLst/>
+          </a:prstGeom>
+          <a:solidFill>
+            <a:srgbClr val="EDF2F7"/>
+          </a:solidFill>
+          <a:ln w="19050">
+            <a:solidFill>
+              <a:srgbClr val="D20A2E"/>
+            </a:solidFill>
+          </a:ln>
+          <a:effectLst/>
+        </p:spPr>
+        <p:style>
+          <a:lnRef idx="1">
+            <a:schemeClr val="accent1"/>
+          </a:lnRef>
+          <a:fillRef idx="3">
+            <a:schemeClr val="accent1"/>
+          </a:fillRef>
+          <a:effectRef idx="2">
+            <a:schemeClr val="accent1"/>
+          </a:effectRef>
+          <a:fontRef idx="minor">
+            <a:schemeClr val="lt1"/>
+          </a:fontRef>
+        </p:style>
+        <p:txBody>
+          <a:bodyPr rtlCol="0" anchor="ctr" wrap="square"/>
+          <a:lstStyle/>
+          <a:p>
+            <a:pPr algn="ctr"/>
+          </a:p>
+        </p:txBody>
+      </p:sp>
+      <p:sp>
+        <p:nvSpPr>
+          <p:cNvPr id="15" name="TextBox 14"/>
+          <p:cNvSpPr txBox="1"/>
+          <p:nvPr/>
+        </p:nvSpPr>
+        <p:spPr>
+          <a:xfrm>
+            <a:off x="768096" y="5000317"/>
+            <a:ext cx="3125114" cy="277622"/>
+          </a:xfrm>
+          <a:prstGeom prst="rect">
+            <a:avLst/>
+          </a:prstGeom>
+          <a:noFill/>
+        </p:spPr>
+        <p:txBody>
+          <a:bodyPr wrap="square" anchor="t" lIns="0" rIns="0" tIns="0" bIns="0">
+            <a:spAutoFit/>
+          </a:bodyPr>
+          <a:lstStyle/>
+          <a:p>
+            <a:pPr algn="l">
+              <a:lnSpc>
+                <a:spcPct val="100000"/>
+              </a:lnSpc>
+            </a:pPr>
+            <a:r>
+              <a:rPr sz="1300" b="1">
+                <a:solidFill>
+                  <a:srgbClr val="D20A2E"/>
+                </a:solidFill>
+                <a:latin typeface="Microsoft YaHei"/>
+              </a:rPr>
+              <a:t>信号不同，执行器相同</a:t>
+            </a:r>
+          </a:p>
+        </p:txBody>
+      </p:sp>
+      <p:sp>
+        <p:nvSpPr>
+          <p:cNvPr id="16" name="TextBox 15"/>
+          <p:cNvSpPr txBox="1"/>
+          <p:nvPr/>
+        </p:nvSpPr>
+        <p:spPr>
+          <a:xfrm>
+            <a:off x="768096" y="5360235"/>
+            <a:ext cx="3125114" cy="660699"/>
+          </a:xfrm>
+          <a:prstGeom prst="rect">
+            <a:avLst/>
+          </a:prstGeom>
+          <a:noFill/>
+        </p:spPr>
+        <p:txBody>
+          <a:bodyPr wrap="square" anchor="t" lIns="0" rIns="0" tIns="0" bIns="0">
+            <a:spAutoFit/>
+          </a:bodyPr>
+          <a:lstStyle/>
+          <a:p>
+            <a:pPr algn="l">
+              <a:lnSpc>
+                <a:spcPct val="102000"/>
+              </a:lnSpc>
+            </a:pPr>
+            <a:r>
+              <a:rPr sz="1100" b="0">
+                <a:solidFill>
+                  <a:srgbClr val="20242C"/>
+                </a:solidFill>
+                <a:latin typeface="Microsoft YaHei"/>
+              </a:rPr>
+              <a:t>S19 看端到端 RTT，能覆盖 ring 与 completer 等待；S20 只看 HA tracker 压力，信号更直接但需要 DBIDResp 的 1 bit mark。</a:t>
+            </a:r>
+          </a:p>
+        </p:txBody>
+      </p:sp>
+      <p:sp>
+        <p:nvSpPr>
+          <p:cNvPr id="17" name="Rectangle 16"/>
+          <p:cNvSpPr/>
+          <p:nvPr/>
+        </p:nvSpPr>
+        <p:spPr>
+          <a:xfrm>
+            <a:off x="4332122" y="4657029"/>
+            <a:ext cx="3527450" cy="1670618"/>
+          </a:xfrm>
+          <a:prstGeom prst="rect">
+            <a:avLst/>
+          </a:prstGeom>
+          <a:solidFill>
+            <a:srgbClr val="EDF2F7"/>
           </a:solidFill>
           <a:ln w="12700">
             <a:solidFill>
@@ -21443,14 +22056,14 @@
       </p:sp>
       <p:sp>
         <p:nvSpPr>
-          <p:cNvPr id="11" name="TextBox 10"/>
-          <p:cNvSpPr txBox="1"/>
-          <p:nvPr/>
-        </p:nvSpPr>
-        <p:spPr>
-          <a:xfrm>
-            <a:off x="768096" y="2813288"/>
-            <a:ext cx="2197531" cy="314705"/>
+          <p:cNvPr id="18" name="TextBox 17"/>
+          <p:cNvSpPr txBox="1"/>
+          <p:nvPr/>
+        </p:nvSpPr>
+        <p:spPr>
+          <a:xfrm>
+            <a:off x="4533290" y="4858197"/>
+            <a:ext cx="3125114" cy="277622"/>
           </a:xfrm>
           <a:prstGeom prst="rect">
             <a:avLst/>
@@ -21469,27 +22082,27 @@
               </a:lnSpc>
             </a:pPr>
             <a:r>
-              <a:rPr sz="1500" b="1">
-                <a:solidFill>
-                  <a:srgbClr val="20242C"/>
-                </a:solidFill>
-                <a:latin typeface="Microsoft YaHei"/>
-              </a:rPr>
-              <a:t>① 带宽线已基本关死</a:t>
-            </a:r>
-          </a:p>
-        </p:txBody>
-      </p:sp>
-      <p:sp>
-        <p:nvSpPr>
-          <p:cNvPr id="12" name="TextBox 11"/>
-          <p:cNvSpPr txBox="1"/>
-          <p:nvPr/>
-        </p:nvSpPr>
-        <p:spPr>
-          <a:xfrm>
-            <a:off x="768096" y="3210290"/>
-            <a:ext cx="2197531" cy="1474500"/>
+              <a:rPr sz="1300" b="1">
+                <a:solidFill>
+                  <a:srgbClr val="20242C"/>
+                </a:solidFill>
+                <a:latin typeface="Microsoft YaHei"/>
+              </a:rPr>
+              <a:t>当前工作点结果接近</a:t>
+            </a:r>
+          </a:p>
+        </p:txBody>
+      </p:sp>
+      <p:sp>
+        <p:nvSpPr>
+          <p:cNvPr id="19" name="TextBox 18"/>
+          <p:cNvSpPr txBox="1"/>
+          <p:nvPr/>
+        </p:nvSpPr>
+        <p:spPr>
+          <a:xfrm>
+            <a:off x="4533290" y="5218115"/>
+            <a:ext cx="3125114" cy="944940"/>
           </a:xfrm>
           <a:prstGeom prst="rect">
             <a:avLst/>
@@ -21508,13 +22121,22 @@
               </a:lnSpc>
             </a:pPr>
             <a:r>
-              <a:rPr sz="1200" b="0">
-                <a:solidFill>
-                  <a:srgbClr val="20242C"/>
-                </a:solidFill>
-                <a:latin typeface="Microsoft YaHei"/>
-              </a:rPr>
-              <a:t>S0 = 96.97% R*，最忙的链路 96.98% 满；3.03% 的缺口已逐拍闭合（5 拍绕环 + 2,181 拍空转）。</a:t>
+              <a:rPr sz="1100" b="1">
+                <a:solidFill>
+                  <a:srgbClr val="20242C"/>
+                </a:solidFill>
+                <a:latin typeface="Microsoft YaHei"/>
+              </a:rPr>
+              <a:t>S19</a:t>
+            </a:r>
+            <a:r>
+              <a:rPr sz="1100" b="0">
+                <a:solidFill>
+                  <a:srgbClr val="20242C"/>
+                </a:solidFill>
+                <a:latin typeface="Microsoft YaHei"/>
+              </a:rPr>
+              <a:t>：带宽 5.5255（vs S0 −0.28%）、Jain 0.93324、max/min 1.5515。</a:t>
             </a:r>
           </a:p>
           <a:p>
@@ -21527,33 +22149,42 @@
               </a:spcBef>
             </a:pPr>
             <a:r>
-              <a:rPr sz="1200" b="1">
-                <a:solidFill>
-                  <a:srgbClr val="D20A2E"/>
-                </a:solidFill>
-                <a:latin typeface="Microsoft YaHei"/>
-              </a:rPr>
-              <a:t>拥塞控制的带宽目标应是「不弄丢」，不是「抬上去」。</a:t>
-            </a:r>
-          </a:p>
-        </p:txBody>
-      </p:sp>
-      <p:sp>
-        <p:nvSpPr>
-          <p:cNvPr id="13" name="Rectangle 12"/>
+              <a:rPr sz="1100" b="1">
+                <a:solidFill>
+                  <a:srgbClr val="20242C"/>
+                </a:solidFill>
+                <a:latin typeface="Microsoft YaHei"/>
+              </a:rPr>
+              <a:t>S20</a:t>
+            </a:r>
+            <a:r>
+              <a:rPr sz="1100" b="0">
+                <a:solidFill>
+                  <a:srgbClr val="20242C"/>
+                </a:solidFill>
+                <a:latin typeface="Microsoft YaHei"/>
+              </a:rPr>
+              <a:t>：带宽 5.5478（vs S0 +0.12%）、Jain 0.93017、max/min 1.5514。</a:t>
+            </a:r>
+          </a:p>
+        </p:txBody>
+      </p:sp>
+      <p:sp>
+        <p:nvSpPr>
+          <p:cNvPr id="20" name="Rectangle 19"/>
           <p:cNvSpPr/>
           <p:nvPr/>
         </p:nvSpPr>
         <p:spPr>
           <a:xfrm>
-            <a:off x="3386251" y="2231136"/>
-            <a:ext cx="2599867" cy="2999231"/>
+            <a:off x="8097316" y="4657029"/>
+            <a:ext cx="3527450" cy="1670618"/>
           </a:xfrm>
           <a:prstGeom prst="rect">
             <a:avLst/>
           </a:prstGeom>
           <a:solidFill>
-            <a:srgbClr val="FFFFFF"/>
+            <a:srgbClr val="EDF2F7"/>
           </a:solidFill>
           <a:ln w="12700">
             <a:solidFill>
@@ -21586,14 +22217,14 @@
       </p:sp>
       <p:sp>
         <p:nvSpPr>
-          <p:cNvPr id="14" name="TextBox 13"/>
-          <p:cNvSpPr txBox="1"/>
-          <p:nvPr/>
-        </p:nvSpPr>
-        <p:spPr>
-          <a:xfrm>
-            <a:off x="3587419" y="2813288"/>
-            <a:ext cx="2197531" cy="314705"/>
+          <p:cNvPr id="21" name="TextBox 20"/>
+          <p:cNvSpPr txBox="1"/>
+          <p:nvPr/>
+        </p:nvSpPr>
+        <p:spPr>
+          <a:xfrm>
+            <a:off x="8298484" y="5000317"/>
+            <a:ext cx="3125114" cy="277622"/>
           </a:xfrm>
           <a:prstGeom prst="rect">
             <a:avLst/>
@@ -21612,27 +22243,27 @@
               </a:lnSpc>
             </a:pPr>
             <a:r>
-              <a:rPr sz="1500" b="1">
-                <a:solidFill>
-                  <a:srgbClr val="20242C"/>
-                </a:solidFill>
-                <a:latin typeface="Microsoft YaHei"/>
-              </a:rPr>
-              <a:t>② 公平缺陷是真实的</a:t>
-            </a:r>
-          </a:p>
-        </p:txBody>
-      </p:sp>
-      <p:sp>
-        <p:nvSpPr>
-          <p:cNvPr id="15" name="TextBox 14"/>
-          <p:cNvSpPr txBox="1"/>
-          <p:nvPr/>
-        </p:nvSpPr>
-        <p:spPr>
-          <a:xfrm>
-            <a:off x="3587419" y="3210290"/>
-            <a:ext cx="2197531" cy="1474500"/>
+              <a:rPr sz="1300" b="1">
+                <a:solidFill>
+                  <a:srgbClr val="20242C"/>
+                </a:solidFill>
+                <a:latin typeface="Microsoft YaHei"/>
+              </a:rPr>
+              <a:t>工程选择</a:t>
+            </a:r>
+          </a:p>
+        </p:txBody>
+      </p:sp>
+      <p:sp>
+        <p:nvSpPr>
+          <p:cNvPr id="22" name="TextBox 21"/>
+          <p:cNvSpPr txBox="1"/>
+          <p:nvPr/>
+        </p:nvSpPr>
+        <p:spPr>
+          <a:xfrm>
+            <a:off x="8298484" y="5360235"/>
+            <a:ext cx="3125114" cy="660699"/>
           </a:xfrm>
           <a:prstGeom prst="rect">
             <a:avLst/>
@@ -21651,445 +22282,20 @@
               </a:lnSpc>
             </a:pPr>
             <a:r>
-              <a:rPr sz="1200" b="0">
-                <a:solidFill>
-                  <a:srgbClr val="20242C"/>
-                </a:solidFill>
-                <a:latin typeface="Microsoft YaHei"/>
-              </a:rPr>
-              <a:t>不是采样噪声：把抖动完全抹平后的 Jain 上限只有 0.96458，六快四慢是几何决定的固定分组（核间速率比 1.5673）。</a:t>
-            </a:r>
-          </a:p>
-          <a:p>
-            <a:pPr algn="l">
-              <a:lnSpc>
-                <a:spcPct val="102000"/>
-              </a:lnSpc>
-              <a:spcBef>
-                <a:spcPts val="600"/>
-              </a:spcBef>
-            </a:pPr>
-            <a:r>
-              <a:rPr sz="1200" b="1">
-                <a:solidFill>
-                  <a:srgbClr val="D20A2E"/>
-                </a:solidFill>
-                <a:latin typeface="Microsoft YaHei"/>
-              </a:rPr>
-              <a:t>要提高均衡度就必须真的搬速率，只整时机不够。</a:t>
-            </a:r>
-          </a:p>
-        </p:txBody>
-      </p:sp>
-      <p:sp>
-        <p:nvSpPr>
-          <p:cNvPr id="16" name="Rectangle 15"/>
-          <p:cNvSpPr/>
-          <p:nvPr/>
-        </p:nvSpPr>
-        <p:spPr>
-          <a:xfrm>
-            <a:off x="6205575" y="2231136"/>
-            <a:ext cx="2599867" cy="2999231"/>
-          </a:xfrm>
-          <a:prstGeom prst="rect">
-            <a:avLst/>
-          </a:prstGeom>
-          <a:solidFill>
-            <a:srgbClr val="FFFFFF"/>
-          </a:solidFill>
-          <a:ln w="12700">
-            <a:solidFill>
-              <a:srgbClr val="DCE3EA"/>
-            </a:solidFill>
-          </a:ln>
-          <a:effectLst/>
-        </p:spPr>
-        <p:style>
-          <a:lnRef idx="1">
-            <a:schemeClr val="accent1"/>
-          </a:lnRef>
-          <a:fillRef idx="3">
-            <a:schemeClr val="accent1"/>
-          </a:fillRef>
-          <a:effectRef idx="2">
-            <a:schemeClr val="accent1"/>
-          </a:effectRef>
-          <a:fontRef idx="minor">
-            <a:schemeClr val="lt1"/>
-          </a:fontRef>
-        </p:style>
-        <p:txBody>
-          <a:bodyPr rtlCol="0" anchor="ctr" wrap="square"/>
-          <a:lstStyle/>
-          <a:p>
-            <a:pPr algn="ctr"/>
-          </a:p>
-        </p:txBody>
-      </p:sp>
-      <p:sp>
-        <p:nvSpPr>
-          <p:cNvPr id="17" name="TextBox 16"/>
-          <p:cNvSpPr txBox="1"/>
-          <p:nvPr/>
-        </p:nvSpPr>
-        <p:spPr>
-          <a:xfrm>
-            <a:off x="6406743" y="2699811"/>
-            <a:ext cx="2197531" cy="314705"/>
-          </a:xfrm>
-          <a:prstGeom prst="rect">
-            <a:avLst/>
-          </a:prstGeom>
-          <a:noFill/>
-        </p:spPr>
-        <p:txBody>
-          <a:bodyPr wrap="square" anchor="t" lIns="0" rIns="0" tIns="0" bIns="0">
-            <a:spAutoFit/>
-          </a:bodyPr>
-          <a:lstStyle/>
-          <a:p>
-            <a:pPr algn="l">
-              <a:lnSpc>
-                <a:spcPct val="100000"/>
-              </a:lnSpc>
-            </a:pPr>
-            <a:r>
-              <a:rPr sz="1500" b="1">
-                <a:solidFill>
-                  <a:srgbClr val="20242C"/>
-                </a:solidFill>
-                <a:latin typeface="Microsoft YaHei"/>
-              </a:rPr>
-              <a:t>③ S1 的路子方向错了</a:t>
-            </a:r>
-          </a:p>
-        </p:txBody>
-      </p:sp>
-      <p:sp>
-        <p:nvSpPr>
-          <p:cNvPr id="18" name="TextBox 17"/>
-          <p:cNvSpPr txBox="1"/>
-          <p:nvPr/>
-        </p:nvSpPr>
-        <p:spPr>
-          <a:xfrm>
-            <a:off x="6406743" y="3096813"/>
-            <a:ext cx="2197531" cy="1701454"/>
-          </a:xfrm>
-          <a:prstGeom prst="rect">
-            <a:avLst/>
-          </a:prstGeom>
-          <a:noFill/>
-        </p:spPr>
-        <p:txBody>
-          <a:bodyPr wrap="square" anchor="t" lIns="0" rIns="0" tIns="0" bIns="0">
-            <a:spAutoFit/>
-          </a:bodyPr>
-          <a:lstStyle/>
-          <a:p>
-            <a:pPr algn="l">
-              <a:lnSpc>
-                <a:spcPct val="102000"/>
-              </a:lnSpc>
-            </a:pPr>
-            <a:r>
-              <a:rPr sz="1200" b="0">
-                <a:solidFill>
-                  <a:srgbClr val="20242C"/>
-                </a:solidFill>
-                <a:latin typeface="Microsoft YaHei"/>
-              </a:rPr>
-              <a:t>它用「自己上环失败」当拥塞信号，在无缓存环上这多半是别人的 transit 造成的 —— 等于惩罚受害者；执行器又是闸门，让出的槽被沿途吃掉。</a:t>
-            </a:r>
-          </a:p>
-          <a:p>
-            <a:pPr algn="l">
-              <a:lnSpc>
-                <a:spcPct val="102000"/>
-              </a:lnSpc>
-              <a:spcBef>
-                <a:spcPts val="600"/>
-              </a:spcBef>
-            </a:pPr>
-            <a:r>
-              <a:rPr sz="1200" b="1">
-                <a:solidFill>
-                  <a:srgbClr val="D20A2E"/>
-                </a:solidFill>
-                <a:latin typeface="Microsoft YaHei"/>
-              </a:rPr>
-              <a:t>结果是 −16.3% 带宽只换来 +0.029 Jain。</a:t>
-            </a:r>
-          </a:p>
-        </p:txBody>
-      </p:sp>
-      <p:sp>
-        <p:nvSpPr>
-          <p:cNvPr id="19" name="Rectangle 18"/>
-          <p:cNvSpPr/>
-          <p:nvPr/>
-        </p:nvSpPr>
-        <p:spPr>
-          <a:xfrm>
-            <a:off x="9024899" y="2231136"/>
-            <a:ext cx="2599867" cy="2999231"/>
-          </a:xfrm>
-          <a:prstGeom prst="rect">
-            <a:avLst/>
-          </a:prstGeom>
-          <a:solidFill>
-            <a:srgbClr val="FFFFFF"/>
-          </a:solidFill>
-          <a:ln w="19050">
-            <a:solidFill>
-              <a:srgbClr val="D20A2E"/>
-            </a:solidFill>
-          </a:ln>
-          <a:effectLst/>
-        </p:spPr>
-        <p:style>
-          <a:lnRef idx="1">
-            <a:schemeClr val="accent1"/>
-          </a:lnRef>
-          <a:fillRef idx="3">
-            <a:schemeClr val="accent1"/>
-          </a:fillRef>
-          <a:effectRef idx="2">
-            <a:schemeClr val="accent1"/>
-          </a:effectRef>
-          <a:fontRef idx="minor">
-            <a:schemeClr val="lt1"/>
-          </a:fontRef>
-        </p:style>
-        <p:txBody>
-          <a:bodyPr rtlCol="0" anchor="ctr" wrap="square"/>
-          <a:lstStyle/>
-          <a:p>
-            <a:pPr algn="ctr"/>
-          </a:p>
-        </p:txBody>
-      </p:sp>
-      <p:sp>
-        <p:nvSpPr>
-          <p:cNvPr id="20" name="TextBox 19"/>
-          <p:cNvSpPr txBox="1"/>
-          <p:nvPr/>
-        </p:nvSpPr>
-        <p:spPr>
-          <a:xfrm>
-            <a:off x="9226067" y="2598298"/>
-            <a:ext cx="2197531" cy="592836"/>
-          </a:xfrm>
-          <a:prstGeom prst="rect">
-            <a:avLst/>
-          </a:prstGeom>
-          <a:noFill/>
-        </p:spPr>
-        <p:txBody>
-          <a:bodyPr wrap="square" anchor="t" lIns="0" rIns="0" tIns="0" bIns="0">
-            <a:spAutoFit/>
-          </a:bodyPr>
-          <a:lstStyle/>
-          <a:p>
-            <a:pPr algn="l">
-              <a:lnSpc>
-                <a:spcPct val="100000"/>
-              </a:lnSpc>
-            </a:pPr>
-            <a:r>
-              <a:rPr sz="1500" b="1">
-                <a:solidFill>
-                  <a:srgbClr val="D20A2E"/>
-                </a:solidFill>
-                <a:latin typeface="Microsoft YaHei"/>
-              </a:rPr>
-              <a:t>④ 两头能同时拿住，但要动事务层</a:t>
-            </a:r>
-          </a:p>
-        </p:txBody>
-      </p:sp>
-      <p:sp>
-        <p:nvSpPr>
-          <p:cNvPr id="21" name="TextBox 20"/>
-          <p:cNvSpPr txBox="1"/>
-          <p:nvPr/>
-        </p:nvSpPr>
-        <p:spPr>
-          <a:xfrm>
-            <a:off x="9226067" y="3273430"/>
-            <a:ext cx="2197531" cy="1626351"/>
-          </a:xfrm>
-          <a:prstGeom prst="rect">
-            <a:avLst/>
-          </a:prstGeom>
-          <a:noFill/>
-        </p:spPr>
-        <p:txBody>
-          <a:bodyPr wrap="square" anchor="t" lIns="0" rIns="0" tIns="0" bIns="0">
-            <a:spAutoFit/>
-          </a:bodyPr>
-          <a:lstStyle/>
-          <a:p>
-            <a:pPr algn="l">
-              <a:lnSpc>
-                <a:spcPct val="102000"/>
-              </a:lnSpc>
-            </a:pPr>
-            <a:r>
-              <a:rPr sz="950" b="0">
-                <a:solidFill>
-                  <a:srgbClr val="20242C"/>
-                </a:solidFill>
-                <a:latin typeface="Microsoft YaHei"/>
-              </a:rPr>
-              <a:t>S16 把决策点放回 completer：Jain 0.92818 → 0.98466，max/min → 1.0001，带宽只让 0.39%，硬件 900 FF‑eq。</a:t>
-            </a:r>
-          </a:p>
-          <a:p>
-            <a:pPr algn="l">
-              <a:lnSpc>
-                <a:spcPct val="102000"/>
-              </a:lnSpc>
-              <a:spcBef>
-                <a:spcPts val="600"/>
-              </a:spcBef>
-            </a:pPr>
-            <a:r>
-              <a:rPr sz="950" b="0">
-                <a:solidFill>
-                  <a:srgbClr val="20242C"/>
-                </a:solidFill>
-                <a:latin typeface="Microsoft YaHei"/>
-              </a:rPr>
-              <a:t>代价是它改的是 </a:t>
-            </a:r>
-            <a:r>
-              <a:rPr sz="950" b="1">
-                <a:solidFill>
-                  <a:srgbClr val="20242C"/>
-                </a:solidFill>
-                <a:latin typeface="Microsoft YaHei"/>
-              </a:rPr>
-              <a:t>HA 何时给谁发 DBIDResp</a:t>
-            </a:r>
-            <a:r>
-              <a:rPr sz="950" b="0">
-                <a:solidFill>
-                  <a:srgbClr val="20242C"/>
-                </a:solidFill>
-                <a:latin typeface="Microsoft YaHei"/>
-              </a:rPr>
-              <a:t>，属事务层调度。只改环上仲裁的 S22 完全不碰这一层，但要贵 15 倍、多让 1.8 个点带宽。</a:t>
-            </a:r>
-          </a:p>
-          <a:p>
-            <a:pPr algn="l">
-              <a:lnSpc>
-                <a:spcPct val="102000"/>
-              </a:lnSpc>
-              <a:spcBef>
-                <a:spcPts val="600"/>
-              </a:spcBef>
-            </a:pPr>
-            <a:r>
-              <a:rPr sz="950" b="1">
-                <a:solidFill>
-                  <a:srgbClr val="D20A2E"/>
-                </a:solidFill>
-                <a:latin typeface="Microsoft YaHei"/>
-              </a:rPr>
-              <a:t>所以这是一道层次题，不是一道数字题。</a:t>
-            </a:r>
-          </a:p>
-        </p:txBody>
-      </p:sp>
-      <p:sp>
-        <p:nvSpPr>
-          <p:cNvPr id="22" name="Rectangle 21"/>
-          <p:cNvSpPr/>
-          <p:nvPr/>
-        </p:nvSpPr>
-        <p:spPr>
-          <a:xfrm>
-            <a:off x="566928" y="5468112"/>
-            <a:ext cx="11057839" cy="859536"/>
-          </a:xfrm>
-          <a:prstGeom prst="rect">
-            <a:avLst/>
-          </a:prstGeom>
-          <a:solidFill>
-            <a:srgbClr val="D20A2E"/>
-          </a:solidFill>
-          <a:ln>
-            <a:noFill/>
-          </a:ln>
-          <a:effectLst/>
-        </p:spPr>
-        <p:style>
-          <a:lnRef idx="1">
-            <a:schemeClr val="accent1"/>
-          </a:lnRef>
-          <a:fillRef idx="3">
-            <a:schemeClr val="accent1"/>
-          </a:fillRef>
-          <a:effectRef idx="2">
-            <a:schemeClr val="accent1"/>
-          </a:effectRef>
-          <a:fontRef idx="minor">
-            <a:schemeClr val="lt1"/>
-          </a:fontRef>
-        </p:style>
-        <p:txBody>
-          <a:bodyPr rtlCol="0" anchor="ctr" wrap="square"/>
-          <a:lstStyle/>
-          <a:p>
-            <a:pPr algn="ctr"/>
+              <a:rPr sz="1100" b="0">
+                <a:solidFill>
+                  <a:srgbClr val="20242C"/>
+                </a:solidFill>
+                <a:latin typeface="Microsoft YaHei"/>
+              </a:rPr>
+              <a:t>已经有 RTT 计时器时，S19 集成最轻；已经有 tracker 水位与可用标记位时，S20 的拥塞含义更明确。两者都涉及 requester 的事务发起窗口。</a:t>
+            </a:r>
           </a:p>
         </p:txBody>
       </p:sp>
       <p:sp>
         <p:nvSpPr>
           <p:cNvPr id="23" name="TextBox 22"/>
-          <p:cNvSpPr txBox="1"/>
-          <p:nvPr/>
-        </p:nvSpPr>
-        <p:spPr>
-          <a:xfrm>
-            <a:off x="877824" y="5559552"/>
-            <a:ext cx="10436047" cy="676656"/>
-          </a:xfrm>
-          <a:prstGeom prst="rect">
-            <a:avLst/>
-          </a:prstGeom>
-          <a:noFill/>
-        </p:spPr>
-        <p:txBody>
-          <a:bodyPr wrap="square" anchor="ctr" lIns="0" rIns="0" tIns="0" bIns="0">
-            <a:spAutoFit/>
-          </a:bodyPr>
-          <a:lstStyle/>
-          <a:p>
-            <a:pPr algn="l">
-              <a:lnSpc>
-                <a:spcPct val="104000"/>
-              </a:lnSpc>
-            </a:pPr>
-            <a:r>
-              <a:rPr sz="1300" b="0">
-                <a:solidFill>
-                  <a:srgbClr val="FFFFFF"/>
-                </a:solidFill>
-                <a:latin typeface="Microsoft YaHei"/>
-              </a:rPr>
-              <a:t>贯穿全篇的机制结论：在无缓存环上「把速率从快核转移给慢核」本身是有损的 —— 让出的气泡只能向下游传递、沿途会被吃掉。所以执行器要么选让位（S22），要么干脆别产生气泡（S16 扣授权）。</a:t>
-            </a:r>
-          </a:p>
-        </p:txBody>
-      </p:sp>
-      <p:sp>
-        <p:nvSpPr>
-          <p:cNvPr id="24" name="TextBox 23"/>
           <p:cNvSpPr txBox="1"/>
           <p:nvPr/>
         </p:nvSpPr>
@@ -22121,7 +22327,7 @@
                 </a:solidFill>
                 <a:latin typeface="Arial"/>
               </a:rPr>
-              <a:t>28 / 30</a:t>
+              <a:t>28 / 34</a:t>
             </a:r>
           </a:p>
         </p:txBody>
@@ -22266,7 +22472,7 @@
                 </a:solidFill>
                 <a:latin typeface="Microsoft YaHei"/>
               </a:rPr>
-              <a:t>建议</a:t>
+              <a:t>S22 赤字触发的限域让路（13,920 FF‑eq） · 仲裁型 / 总线触发</a:t>
             </a:r>
           </a:p>
         </p:txBody>
@@ -22398,16 +22604,40 @@
           </a:p>
         </p:txBody>
       </p:sp>
-      <p:sp>
-        <p:nvSpPr>
-          <p:cNvPr id="8" name="TextBox 7"/>
-          <p:cNvSpPr txBox="1"/>
-          <p:nvPr/>
-        </p:nvSpPr>
-        <p:spPr>
-          <a:xfrm>
-            <a:off x="566928" y="1060704"/>
-            <a:ext cx="11057839" cy="237744"/>
+      <p:pic>
+        <p:nvPicPr>
+          <p:cNvPr id="8" name="Picture 7" descr="24-s22-diagram.png"/>
+          <p:cNvPicPr>
+            <a:picLocks noChangeAspect="1"/>
+          </p:cNvPicPr>
+          <p:nvPr/>
+        </p:nvPicPr>
+        <p:blipFill>
+          <a:blip r:embed="rId2"/>
+          <a:stretch>
+            <a:fillRect/>
+          </a:stretch>
+        </p:blipFill>
+        <p:spPr>
+          <a:xfrm>
+            <a:off x="595436" y="1060704"/>
+            <a:ext cx="7943983" cy="4791456"/>
+          </a:xfrm>
+          <a:prstGeom prst="rect">
+            <a:avLst/>
+          </a:prstGeom>
+        </p:spPr>
+      </p:pic>
+      <p:sp>
+        <p:nvSpPr>
+          <p:cNvPr id="9" name="TextBox 8"/>
+          <p:cNvSpPr txBox="1"/>
+          <p:nvPr/>
+        </p:nvSpPr>
+        <p:spPr>
+          <a:xfrm>
+            <a:off x="566928" y="5961888"/>
+            <a:ext cx="8001000" cy="384048"/>
           </a:xfrm>
           <a:prstGeom prst="rect">
             <a:avLst/>
@@ -22426,72 +22656,72 @@
               </a:lnSpc>
             </a:pPr>
             <a:r>
-              <a:rPr sz="1050" b="1">
+              <a:rPr sz="1000" b="0">
+                <a:solidFill>
+                  <a:srgbClr val="667080"/>
+                </a:solidFill>
+                <a:latin typeface="Microsoft YaHei"/>
+              </a:rPr>
+              <a:t>复用 S1 那条 6 bit 广播总线，位宽完全相同，只换了线上放什么：从「我有多堵」换成「我这窗发成了多少」。</a:t>
+            </a:r>
+          </a:p>
+        </p:txBody>
+      </p:sp>
+      <p:sp>
+        <p:nvSpPr>
+          <p:cNvPr id="10" name="TextBox 9"/>
+          <p:cNvSpPr txBox="1"/>
+          <p:nvPr/>
+        </p:nvSpPr>
+        <p:spPr>
+          <a:xfrm>
+            <a:off x="8951976" y="1060704"/>
+            <a:ext cx="2672791" cy="237744"/>
+          </a:xfrm>
+          <a:prstGeom prst="rect">
+            <a:avLst/>
+          </a:prstGeom>
+          <a:noFill/>
+        </p:spPr>
+        <p:txBody>
+          <a:bodyPr wrap="square" anchor="t" lIns="0" rIns="0" tIns="0" bIns="0">
+            <a:spAutoFit/>
+          </a:bodyPr>
+          <a:lstStyle/>
+          <a:p>
+            <a:pPr algn="l">
+              <a:lnSpc>
+                <a:spcPct val="100000"/>
+              </a:lnSpc>
+            </a:pPr>
+            <a:r>
+              <a:rPr sz="850" b="1">
                 <a:solidFill>
                   <a:srgbClr val="D20A2E"/>
                 </a:solidFill>
                 <a:latin typeface="Arial"/>
               </a:rPr>
-              <a:t>R E C O M M E N D A T I O N</a:t>
-            </a:r>
-          </a:p>
-        </p:txBody>
-      </p:sp>
-      <p:sp>
-        <p:nvSpPr>
-          <p:cNvPr id="9" name="TextBox 8"/>
-          <p:cNvSpPr txBox="1"/>
-          <p:nvPr/>
-        </p:nvSpPr>
-        <p:spPr>
-          <a:xfrm>
-            <a:off x="566928" y="1353312"/>
-            <a:ext cx="11057839" cy="658368"/>
-          </a:xfrm>
-          <a:prstGeom prst="rect">
-            <a:avLst/>
-          </a:prstGeom>
-          <a:noFill/>
-        </p:spPr>
-        <p:txBody>
-          <a:bodyPr wrap="square" anchor="t" lIns="0" rIns="0" tIns="0" bIns="0">
-            <a:spAutoFit/>
-          </a:bodyPr>
-          <a:lstStyle/>
-          <a:p>
-            <a:pPr algn="l">
-              <a:lnSpc>
-                <a:spcPct val="100000"/>
-              </a:lnSpc>
-            </a:pPr>
-            <a:r>
-              <a:rPr sz="3000" b="1">
-                <a:solidFill>
-                  <a:srgbClr val="20242C"/>
-                </a:solidFill>
-                <a:latin typeface="Microsoft YaHei"/>
-              </a:rPr>
-              <a:t>一步无条件先做，一步二选一，外加一份不建议清单</a:t>
-            </a:r>
-          </a:p>
-        </p:txBody>
-      </p:sp>
-      <p:sp>
-        <p:nvSpPr>
-          <p:cNvPr id="10" name="Rectangle 9"/>
+              <a:t>S C H E M E   2   /   2   ·   M E C H A N I S M</a:t>
+            </a:r>
+          </a:p>
+        </p:txBody>
+      </p:sp>
+      <p:sp>
+        <p:nvSpPr>
+          <p:cNvPr id="11" name="Rectangle 10"/>
           <p:cNvSpPr/>
           <p:nvPr/>
         </p:nvSpPr>
         <p:spPr>
           <a:xfrm>
-            <a:off x="566928" y="2194560"/>
-            <a:ext cx="2599867" cy="3017520"/>
+            <a:off x="8951976" y="1408176"/>
+            <a:ext cx="2672791" cy="2540763"/>
           </a:xfrm>
           <a:prstGeom prst="rect">
             <a:avLst/>
           </a:prstGeom>
           <a:solidFill>
-            <a:srgbClr val="FFFFFF"/>
+            <a:srgbClr val="EDF2F7"/>
           </a:solidFill>
           <a:ln w="12700">
             <a:solidFill>
@@ -22524,16 +22754,205 @@
       </p:sp>
       <p:sp>
         <p:nvSpPr>
-          <p:cNvPr id="11" name="Oval 10"/>
+          <p:cNvPr id="12" name="TextBox 11"/>
+          <p:cNvSpPr txBox="1"/>
+          <p:nvPr/>
+        </p:nvSpPr>
+        <p:spPr>
+          <a:xfrm>
+            <a:off x="9134855" y="1591056"/>
+            <a:ext cx="2307031" cy="259080"/>
+          </a:xfrm>
+          <a:prstGeom prst="rect">
+            <a:avLst/>
+          </a:prstGeom>
+          <a:noFill/>
+        </p:spPr>
+        <p:txBody>
+          <a:bodyPr wrap="square" anchor="t" lIns="0" rIns="0" tIns="0" bIns="0">
+            <a:spAutoFit/>
+          </a:bodyPr>
+          <a:lstStyle/>
+          <a:p>
+            <a:pPr algn="l">
+              <a:lnSpc>
+                <a:spcPct val="100000"/>
+              </a:lnSpc>
+            </a:pPr>
+            <a:r>
+              <a:rPr sz="1200" b="1">
+                <a:solidFill>
+                  <a:srgbClr val="20242C"/>
+                </a:solidFill>
+                <a:latin typeface="Microsoft YaHei"/>
+              </a:rPr>
+              <a:t>四段机制</a:t>
+            </a:r>
+          </a:p>
+        </p:txBody>
+      </p:sp>
+      <p:sp>
+        <p:nvSpPr>
+          <p:cNvPr id="13" name="TextBox 12"/>
+          <p:cNvSpPr txBox="1"/>
+          <p:nvPr/>
+        </p:nvSpPr>
+        <p:spPr>
+          <a:xfrm>
+            <a:off x="9134855" y="1932432"/>
+            <a:ext cx="2307031" cy="1929505"/>
+          </a:xfrm>
+          <a:prstGeom prst="rect">
+            <a:avLst/>
+          </a:prstGeom>
+          <a:noFill/>
+        </p:spPr>
+        <p:txBody>
+          <a:bodyPr wrap="square" anchor="t" lIns="0" rIns="0" tIns="0" bIns="0">
+            <a:spAutoFit/>
+          </a:bodyPr>
+          <a:lstStyle/>
+          <a:p>
+            <a:pPr algn="l">
+              <a:lnSpc>
+                <a:spcPct val="102000"/>
+              </a:lnSpc>
+            </a:pPr>
+            <a:r>
+              <a:rPr sz="800" b="1">
+                <a:solidFill>
+                  <a:srgbClr val="20242C"/>
+                </a:solidFill>
+                <a:latin typeface="Microsoft YaHei"/>
+              </a:rPr>
+              <a:t>① 检测</a:t>
+            </a:r>
+            <a:r>
+              <a:rPr sz="800" b="0">
+                <a:solidFill>
+                  <a:srgbClr val="20242C"/>
+                </a:solidFill>
+                <a:latin typeface="Microsoft YaHei"/>
+              </a:rPr>
+              <a:t>：每节点只数自己本窗成功上环的 flit 数，饱和到 6 bit。播的是进度，不是拥塞等级。</a:t>
+            </a:r>
+          </a:p>
+          <a:p>
+            <a:pPr algn="l">
+              <a:lnSpc>
+                <a:spcPct val="102000"/>
+              </a:lnSpc>
+              <a:spcBef>
+                <a:spcPts val="600"/>
+              </a:spcBef>
+            </a:pPr>
+            <a:r>
+              <a:rPr sz="800" b="1">
+                <a:solidFill>
+                  <a:srgbClr val="20242C"/>
+                </a:solidFill>
+                <a:latin typeface="Microsoft YaHei"/>
+              </a:rPr>
+              <a:t>② 传递</a:t>
+            </a:r>
+            <a:r>
+              <a:rPr sz="800" b="0">
+                <a:solidFill>
+                  <a:srgbClr val="20242C"/>
+                </a:solidFill>
+                <a:latin typeface="Microsoft YaHei"/>
+              </a:rPr>
+              <a:t>：复用 S1 的 6 bit 广播总线（30 拍）。自己的进度也从总线读回，两边过同一个量化器、同一段延迟。</a:t>
+            </a:r>
+          </a:p>
+          <a:p>
+            <a:pPr algn="l">
+              <a:lnSpc>
+                <a:spcPct val="102000"/>
+              </a:lnSpc>
+              <a:spcBef>
+                <a:spcPts val="600"/>
+              </a:spcBef>
+            </a:pPr>
+            <a:r>
+              <a:rPr sz="800" b="1">
+                <a:solidFill>
+                  <a:srgbClr val="20242C"/>
+                </a:solidFill>
+                <a:latin typeface="Microsoft YaHei"/>
+              </a:rPr>
+              <a:t>③ 反馈</a:t>
+            </a:r>
+            <a:r>
+              <a:rPr sz="800" b="0">
+                <a:solidFill>
+                  <a:srgbClr val="20242C"/>
+                </a:solidFill>
+                <a:latin typeface="Microsoft YaHei"/>
+              </a:rPr>
+              <a:t>：赤字 = 总线上 10 项的均值 − 自己那一项，越过 0.5 就举请求。让路是</a:t>
+            </a:r>
+            <a:r>
+              <a:rPr sz="800" b="1">
+                <a:solidFill>
+                  <a:srgbClr val="20242C"/>
+                </a:solidFill>
+                <a:latin typeface="Microsoft YaHei"/>
+              </a:rPr>
+              <a:t>单向</a:t>
+            </a:r>
+            <a:r>
+              <a:rPr sz="800" b="0">
+                <a:solidFill>
+                  <a:srgbClr val="20242C"/>
+                </a:solidFill>
+                <a:latin typeface="Microsoft YaHei"/>
+              </a:rPr>
+              <a:t>的：落后的节点永不让路。</a:t>
+            </a:r>
+          </a:p>
+          <a:p>
+            <a:pPr algn="l">
+              <a:lnSpc>
+                <a:spcPct val="102000"/>
+              </a:lnSpc>
+              <a:spcBef>
+                <a:spcPts val="600"/>
+              </a:spcBef>
+            </a:pPr>
+            <a:r>
+              <a:rPr sz="800" b="1">
+                <a:solidFill>
+                  <a:srgbClr val="20242C"/>
+                </a:solidFill>
+                <a:latin typeface="Microsoft YaHei"/>
+              </a:rPr>
+              <a:t>④ 执行：让位，不是门控</a:t>
+            </a:r>
+            <a:r>
+              <a:rPr sz="800" b="0">
+                <a:solidFill>
+                  <a:srgbClr val="20242C"/>
+                </a:solidFill>
+                <a:latin typeface="Microsoft YaHei"/>
+              </a:rPr>
+              <a:t>。只对「会从请求者出向 hop 骑过去」的 flit 让路，同时前瞻改发一个会先下环的 flit，让自己的 hop 不空转。</a:t>
+            </a:r>
+          </a:p>
+        </p:txBody>
+      </p:sp>
+      <p:sp>
+        <p:nvSpPr>
+          <p:cNvPr id="14" name="Rectangle 13"/>
           <p:cNvSpPr/>
           <p:nvPr/>
         </p:nvSpPr>
         <p:spPr>
           <a:xfrm>
-            <a:off x="786384" y="2414016"/>
-            <a:ext cx="384048" cy="384048"/>
-          </a:xfrm>
-          <a:prstGeom prst="ellipse">
+            <a:off x="8951976" y="4095243"/>
+            <a:ext cx="2672791" cy="1150029"/>
+          </a:xfrm>
+          <a:prstGeom prst="rect">
             <a:avLst/>
           </a:prstGeom>
           <a:solidFill>
@@ -22568,207 +22987,55 @@
       </p:sp>
       <p:sp>
         <p:nvSpPr>
-          <p:cNvPr id="12" name="TextBox 11"/>
-          <p:cNvSpPr txBox="1"/>
-          <p:nvPr/>
-        </p:nvSpPr>
-        <p:spPr>
-          <a:xfrm>
-            <a:off x="786384" y="2496312"/>
-            <a:ext cx="384048" cy="237744"/>
-          </a:xfrm>
-          <a:prstGeom prst="rect">
-            <a:avLst/>
-          </a:prstGeom>
-          <a:noFill/>
-        </p:spPr>
-        <p:txBody>
-          <a:bodyPr wrap="square" anchor="t" lIns="0" rIns="0" tIns="0" bIns="0">
-            <a:spAutoFit/>
-          </a:bodyPr>
-          <a:lstStyle/>
-          <a:p>
-            <a:pPr algn="ctr">
-              <a:lnSpc>
-                <a:spcPct val="100000"/>
-              </a:lnSpc>
-            </a:pPr>
-            <a:r>
-              <a:rPr sz="1150" b="1">
+          <p:cNvPr id="15" name="TextBox 14"/>
+          <p:cNvSpPr txBox="1"/>
+          <p:nvPr/>
+        </p:nvSpPr>
+        <p:spPr>
+          <a:xfrm>
+            <a:off x="9262872" y="4186683"/>
+            <a:ext cx="2050999" cy="967149"/>
+          </a:xfrm>
+          <a:prstGeom prst="rect">
+            <a:avLst/>
+          </a:prstGeom>
+          <a:noFill/>
+        </p:spPr>
+        <p:txBody>
+          <a:bodyPr wrap="square" anchor="ctr" lIns="0" rIns="0" tIns="0" bIns="0">
+            <a:spAutoFit/>
+          </a:bodyPr>
+          <a:lstStyle/>
+          <a:p>
+            <a:pPr algn="l">
+              <a:lnSpc>
+                <a:spcPct val="104000"/>
+              </a:lnSpc>
+            </a:pPr>
+            <a:r>
+              <a:rPr sz="1050" b="0">
                 <a:solidFill>
                   <a:srgbClr val="FFFFFF"/>
                 </a:solidFill>
-                <a:latin typeface="Arial"/>
-              </a:rPr>
-              <a:t>01</a:t>
-            </a:r>
-          </a:p>
-        </p:txBody>
-      </p:sp>
-      <p:sp>
-        <p:nvSpPr>
-          <p:cNvPr id="13" name="TextBox 12"/>
-          <p:cNvSpPr txBox="1"/>
-          <p:nvPr/>
-        </p:nvSpPr>
-        <p:spPr>
-          <a:xfrm>
-            <a:off x="786384" y="2968706"/>
-            <a:ext cx="2160955" cy="592836"/>
-          </a:xfrm>
-          <a:prstGeom prst="rect">
-            <a:avLst/>
-          </a:prstGeom>
-          <a:noFill/>
-        </p:spPr>
-        <p:txBody>
-          <a:bodyPr wrap="square" anchor="t" lIns="0" rIns="0" tIns="0" bIns="0">
-            <a:spAutoFit/>
-          </a:bodyPr>
-          <a:lstStyle/>
-          <a:p>
-            <a:pPr algn="l">
-              <a:lnSpc>
-                <a:spcPct val="100000"/>
-              </a:lnSpc>
-            </a:pPr>
-            <a:r>
-              <a:rPr sz="1500" b="1">
-                <a:solidFill>
-                  <a:srgbClr val="20242C"/>
-                </a:solidFill>
-                <a:latin typeface="Microsoft YaHei"/>
-              </a:rPr>
-              <a:t>第一步 · 0 FF‑eq · 无条件</a:t>
-            </a:r>
-          </a:p>
-        </p:txBody>
-      </p:sp>
-      <p:sp>
-        <p:nvSpPr>
-          <p:cNvPr id="14" name="TextBox 13"/>
-          <p:cNvSpPr txBox="1"/>
-          <p:nvPr/>
-        </p:nvSpPr>
-        <p:spPr>
-          <a:xfrm>
-            <a:off x="786384" y="3643838"/>
-            <a:ext cx="2160955" cy="1361023"/>
-          </a:xfrm>
-          <a:prstGeom prst="rect">
-            <a:avLst/>
-          </a:prstGeom>
-          <a:noFill/>
-        </p:spPr>
-        <p:txBody>
-          <a:bodyPr wrap="square" anchor="t" lIns="0" rIns="0" tIns="0" bIns="0">
-            <a:spAutoFit/>
-          </a:bodyPr>
-          <a:lstStyle/>
-          <a:p>
-            <a:pPr algn="l">
-              <a:lnSpc>
-                <a:spcPct val="102000"/>
-              </a:lnSpc>
-            </a:pPr>
-            <a:r>
-              <a:rPr sz="1100" b="1">
-                <a:solidFill>
-                  <a:srgbClr val="20242C"/>
-                </a:solidFill>
-                <a:latin typeface="Microsoft YaHei"/>
-              </a:rPr>
-              <a:t>每核在飞上限收到 32。</a:t>
-            </a:r>
-            <a:r>
-              <a:rPr sz="1100" b="0">
-                <a:solidFill>
-                  <a:srgbClr val="20242C"/>
-                </a:solidFill>
-                <a:latin typeface="Microsoft YaHei"/>
-              </a:rPr>
-              <a:t>零硬件、无流量先验：覆盖最坏 89 拍 RTT 只需约 26 笔，再多就只是在已经饱和的环上排队。</a:t>
-            </a:r>
-          </a:p>
-          <a:p>
-            <a:pPr algn="l">
-              <a:lnSpc>
-                <a:spcPct val="102000"/>
-              </a:lnSpc>
-              <a:spcBef>
-                <a:spcPts val="600"/>
-              </a:spcBef>
-            </a:pPr>
-            <a:r>
-              <a:rPr sz="1100" b="1">
-                <a:solidFill>
-                  <a:srgbClr val="D20A2E"/>
-                </a:solidFill>
-                <a:latin typeface="Microsoft YaHei"/>
-              </a:rPr>
-              <a:t>uniform 绕环重发从上千拍降到 5 拍；非均匀流量带宽 +33%。</a:t>
-            </a:r>
-          </a:p>
-        </p:txBody>
-      </p:sp>
-      <p:sp>
-        <p:nvSpPr>
-          <p:cNvPr id="15" name="Rectangle 14"/>
+                <a:latin typeface="Microsoft YaHei"/>
+              </a:rPr>
+              <a:t>与 S1 的关键差别：S1 的执行器是令牌桶闸门（没额度就不上环，让出的槽被沿途吃掉）；S22 只在具体某一拍上让出具体某个位置。</a:t>
+            </a:r>
+          </a:p>
+        </p:txBody>
+      </p:sp>
+      <p:sp>
+        <p:nvSpPr>
+          <p:cNvPr id="16" name="Rectangle 15"/>
           <p:cNvSpPr/>
           <p:nvPr/>
         </p:nvSpPr>
         <p:spPr>
           <a:xfrm>
-            <a:off x="3386251" y="2194560"/>
-            <a:ext cx="2599867" cy="3017520"/>
-          </a:xfrm>
-          <a:prstGeom prst="rect">
-            <a:avLst/>
-          </a:prstGeom>
-          <a:solidFill>
-            <a:srgbClr val="FFFFFF"/>
-          </a:solidFill>
-          <a:ln w="19050">
-            <a:solidFill>
-              <a:srgbClr val="D20A2E"/>
-            </a:solidFill>
-          </a:ln>
-          <a:effectLst/>
-        </p:spPr>
-        <p:style>
-          <a:lnRef idx="1">
-            <a:schemeClr val="accent1"/>
-          </a:lnRef>
-          <a:fillRef idx="3">
-            <a:schemeClr val="accent1"/>
-          </a:fillRef>
-          <a:effectRef idx="2">
-            <a:schemeClr val="accent1"/>
-          </a:effectRef>
-          <a:fontRef idx="minor">
-            <a:schemeClr val="lt1"/>
-          </a:fontRef>
-        </p:style>
-        <p:txBody>
-          <a:bodyPr rtlCol="0" anchor="ctr" wrap="square"/>
-          <a:lstStyle/>
-          <a:p>
-            <a:pPr algn="ctr"/>
-          </a:p>
-        </p:txBody>
-      </p:sp>
-      <p:sp>
-        <p:nvSpPr>
-          <p:cNvPr id="16" name="Oval 15"/>
-          <p:cNvSpPr/>
-          <p:nvPr/>
-        </p:nvSpPr>
-        <p:spPr>
-          <a:xfrm>
-            <a:off x="3605707" y="2414016"/>
-            <a:ext cx="384048" cy="384048"/>
-          </a:xfrm>
-          <a:prstGeom prst="ellipse">
+            <a:off x="8951976" y="5391577"/>
+            <a:ext cx="2672791" cy="936070"/>
+          </a:xfrm>
+          <a:prstGeom prst="rect">
             <a:avLst/>
           </a:prstGeom>
           <a:solidFill>
@@ -22809,33 +23076,33 @@
         </p:nvSpPr>
         <p:spPr>
           <a:xfrm>
-            <a:off x="3605707" y="2496312"/>
-            <a:ext cx="384048" cy="237744"/>
-          </a:xfrm>
-          <a:prstGeom prst="rect">
-            <a:avLst/>
-          </a:prstGeom>
-          <a:noFill/>
-        </p:spPr>
-        <p:txBody>
-          <a:bodyPr wrap="square" anchor="t" lIns="0" rIns="0" tIns="0" bIns="0">
-            <a:spAutoFit/>
-          </a:bodyPr>
-          <a:lstStyle/>
-          <a:p>
-            <a:pPr algn="ctr">
-              <a:lnSpc>
-                <a:spcPct val="100000"/>
-              </a:lnSpc>
-            </a:pPr>
-            <a:r>
-              <a:rPr sz="1150" b="1">
+            <a:off x="9262872" y="5483017"/>
+            <a:ext cx="2050999" cy="753190"/>
+          </a:xfrm>
+          <a:prstGeom prst="rect">
+            <a:avLst/>
+          </a:prstGeom>
+          <a:noFill/>
+        </p:spPr>
+        <p:txBody>
+          <a:bodyPr wrap="square" anchor="ctr" lIns="0" rIns="0" tIns="0" bIns="0">
+            <a:spAutoFit/>
+          </a:bodyPr>
+          <a:lstStyle/>
+          <a:p>
+            <a:pPr algn="l">
+              <a:lnSpc>
+                <a:spcPct val="104000"/>
+              </a:lnSpc>
+            </a:pPr>
+            <a:r>
+              <a:rPr sz="1000" b="0">
                 <a:solidFill>
                   <a:srgbClr val="FFFFFF"/>
                 </a:solidFill>
-                <a:latin typeface="Arial"/>
-              </a:rPr>
-              <a:t>02</a:t>
+                <a:latin typeface="Microsoft YaHei"/>
+              </a:rPr>
+              <a:t>同等公平度下让位比门控省 10 倍带宽：S23 门控付 1.50%，S22 让位只付 0.15%（K = 2000 同轮对比）。</a:t>
             </a:r>
           </a:p>
         </p:txBody>
@@ -22843,720 +23110,6 @@
       <p:sp>
         <p:nvSpPr>
           <p:cNvPr id="18" name="TextBox 17"/>
-          <p:cNvSpPr txBox="1"/>
-          <p:nvPr/>
-        </p:nvSpPr>
-        <p:spPr>
-          <a:xfrm>
-            <a:off x="3605707" y="3110552"/>
-            <a:ext cx="2160955" cy="592836"/>
-          </a:xfrm>
-          <a:prstGeom prst="rect">
-            <a:avLst/>
-          </a:prstGeom>
-          <a:noFill/>
-        </p:spPr>
-        <p:txBody>
-          <a:bodyPr wrap="square" anchor="t" lIns="0" rIns="0" tIns="0" bIns="0">
-            <a:spAutoFit/>
-          </a:bodyPr>
-          <a:lstStyle/>
-          <a:p>
-            <a:pPr algn="l">
-              <a:lnSpc>
-                <a:spcPct val="100000"/>
-              </a:lnSpc>
-            </a:pPr>
-            <a:r>
-              <a:rPr sz="1500" b="1">
-                <a:solidFill>
-                  <a:srgbClr val="D20A2E"/>
-                </a:solidFill>
-                <a:latin typeface="Microsoft YaHei"/>
-              </a:rPr>
-              <a:t>二选一 A · 900 FF‑eq · 需动事务层</a:t>
-            </a:r>
-          </a:p>
-        </p:txBody>
-      </p:sp>
-      <p:sp>
-        <p:nvSpPr>
-          <p:cNvPr id="19" name="TextBox 18"/>
-          <p:cNvSpPr txBox="1"/>
-          <p:nvPr/>
-        </p:nvSpPr>
-        <p:spPr>
-          <a:xfrm>
-            <a:off x="3605707" y="3785684"/>
-            <a:ext cx="2160955" cy="1077330"/>
-          </a:xfrm>
-          <a:prstGeom prst="rect">
-            <a:avLst/>
-          </a:prstGeom>
-          <a:noFill/>
-        </p:spPr>
-        <p:txBody>
-          <a:bodyPr wrap="square" anchor="t" lIns="0" rIns="0" tIns="0" bIns="0">
-            <a:spAutoFit/>
-          </a:bodyPr>
-          <a:lstStyle/>
-          <a:p>
-            <a:pPr algn="l">
-              <a:lnSpc>
-                <a:spcPct val="102000"/>
-              </a:lnSpc>
-            </a:pPr>
-            <a:r>
-              <a:rPr sz="850" b="1">
-                <a:solidFill>
-                  <a:srgbClr val="20242C"/>
-                </a:solidFill>
-                <a:latin typeface="Microsoft YaHei"/>
-              </a:rPr>
-              <a:t>S16 授权保留。</a:t>
-            </a:r>
-            <a:r>
-              <a:rPr sz="850" b="0">
-                <a:solidFill>
-                  <a:srgbClr val="20242C"/>
-                </a:solidFill>
-                <a:latin typeface="Microsoft YaHei"/>
-              </a:rPr>
-              <a:t>写侧 Jain 0.92818 → 0.98466、带宽只让 0.39%、非均匀流量拿到 R* 的 99.74% —— 四个方案里唯一两头都不亏的。</a:t>
-            </a:r>
-          </a:p>
-          <a:p>
-            <a:pPr algn="l">
-              <a:lnSpc>
-                <a:spcPct val="102000"/>
-              </a:lnSpc>
-              <a:spcBef>
-                <a:spcPts val="600"/>
-              </a:spcBef>
-            </a:pPr>
-            <a:r>
-              <a:rPr sz="850" b="1">
-                <a:solidFill>
-                  <a:srgbClr val="20242C"/>
-                </a:solidFill>
-                <a:latin typeface="Microsoft YaHei"/>
-              </a:rPr>
-              <a:t>前提</a:t>
-            </a:r>
-            <a:r>
-              <a:rPr sz="850" b="0">
-                <a:solidFill>
-                  <a:srgbClr val="20242C"/>
-                </a:solidFill>
-                <a:latin typeface="Microsoft YaHei"/>
-              </a:rPr>
-              <a:t>：completer 的授权调度可改。线格式与协议状态机不动，但要改 HA 何时给谁发 DBIDResp，须 IP 可改并过一次合规复核。</a:t>
-            </a:r>
-          </a:p>
-        </p:txBody>
-      </p:sp>
-      <p:sp>
-        <p:nvSpPr>
-          <p:cNvPr id="20" name="Rectangle 19"/>
-          <p:cNvSpPr/>
-          <p:nvPr/>
-        </p:nvSpPr>
-        <p:spPr>
-          <a:xfrm>
-            <a:off x="6205575" y="2194560"/>
-            <a:ext cx="2599867" cy="3017520"/>
-          </a:xfrm>
-          <a:prstGeom prst="rect">
-            <a:avLst/>
-          </a:prstGeom>
-          <a:solidFill>
-            <a:srgbClr val="FFFFFF"/>
-          </a:solidFill>
-          <a:ln w="12700">
-            <a:solidFill>
-              <a:srgbClr val="DCE3EA"/>
-            </a:solidFill>
-          </a:ln>
-          <a:effectLst/>
-        </p:spPr>
-        <p:style>
-          <a:lnRef idx="1">
-            <a:schemeClr val="accent1"/>
-          </a:lnRef>
-          <a:fillRef idx="3">
-            <a:schemeClr val="accent1"/>
-          </a:fillRef>
-          <a:effectRef idx="2">
-            <a:schemeClr val="accent1"/>
-          </a:effectRef>
-          <a:fontRef idx="minor">
-            <a:schemeClr val="lt1"/>
-          </a:fontRef>
-        </p:style>
-        <p:txBody>
-          <a:bodyPr rtlCol="0" anchor="ctr" wrap="square"/>
-          <a:lstStyle/>
-          <a:p>
-            <a:pPr algn="ctr"/>
-          </a:p>
-        </p:txBody>
-      </p:sp>
-      <p:sp>
-        <p:nvSpPr>
-          <p:cNvPr id="21" name="Oval 20"/>
-          <p:cNvSpPr/>
-          <p:nvPr/>
-        </p:nvSpPr>
-        <p:spPr>
-          <a:xfrm>
-            <a:off x="6425031" y="2414016"/>
-            <a:ext cx="384048" cy="384048"/>
-          </a:xfrm>
-          <a:prstGeom prst="ellipse">
-            <a:avLst/>
-          </a:prstGeom>
-          <a:solidFill>
-            <a:srgbClr val="D20A2E"/>
-          </a:solidFill>
-          <a:ln>
-            <a:noFill/>
-          </a:ln>
-          <a:effectLst/>
-        </p:spPr>
-        <p:style>
-          <a:lnRef idx="1">
-            <a:schemeClr val="accent1"/>
-          </a:lnRef>
-          <a:fillRef idx="3">
-            <a:schemeClr val="accent1"/>
-          </a:fillRef>
-          <a:effectRef idx="2">
-            <a:schemeClr val="accent1"/>
-          </a:effectRef>
-          <a:fontRef idx="minor">
-            <a:schemeClr val="lt1"/>
-          </a:fontRef>
-        </p:style>
-        <p:txBody>
-          <a:bodyPr rtlCol="0" anchor="ctr" wrap="square"/>
-          <a:lstStyle/>
-          <a:p>
-            <a:pPr algn="ctr"/>
-          </a:p>
-        </p:txBody>
-      </p:sp>
-      <p:sp>
-        <p:nvSpPr>
-          <p:cNvPr id="22" name="TextBox 21"/>
-          <p:cNvSpPr txBox="1"/>
-          <p:nvPr/>
-        </p:nvSpPr>
-        <p:spPr>
-          <a:xfrm>
-            <a:off x="6425031" y="2496312"/>
-            <a:ext cx="384048" cy="237744"/>
-          </a:xfrm>
-          <a:prstGeom prst="rect">
-            <a:avLst/>
-          </a:prstGeom>
-          <a:noFill/>
-        </p:spPr>
-        <p:txBody>
-          <a:bodyPr wrap="square" anchor="t" lIns="0" rIns="0" tIns="0" bIns="0">
-            <a:spAutoFit/>
-          </a:bodyPr>
-          <a:lstStyle/>
-          <a:p>
-            <a:pPr algn="ctr">
-              <a:lnSpc>
-                <a:spcPct val="100000"/>
-              </a:lnSpc>
-            </a:pPr>
-            <a:r>
-              <a:rPr sz="1150" b="1">
-                <a:solidFill>
-                  <a:srgbClr val="FFFFFF"/>
-                </a:solidFill>
-                <a:latin typeface="Arial"/>
-              </a:rPr>
-              <a:t>03</a:t>
-            </a:r>
-          </a:p>
-        </p:txBody>
-      </p:sp>
-      <p:sp>
-        <p:nvSpPr>
-          <p:cNvPr id="23" name="TextBox 22"/>
-          <p:cNvSpPr txBox="1"/>
-          <p:nvPr/>
-        </p:nvSpPr>
-        <p:spPr>
-          <a:xfrm>
-            <a:off x="6425031" y="2963978"/>
-            <a:ext cx="2160955" cy="592836"/>
-          </a:xfrm>
-          <a:prstGeom prst="rect">
-            <a:avLst/>
-          </a:prstGeom>
-          <a:noFill/>
-        </p:spPr>
-        <p:txBody>
-          <a:bodyPr wrap="square" anchor="t" lIns="0" rIns="0" tIns="0" bIns="0">
-            <a:spAutoFit/>
-          </a:bodyPr>
-          <a:lstStyle/>
-          <a:p>
-            <a:pPr algn="l">
-              <a:lnSpc>
-                <a:spcPct val="100000"/>
-              </a:lnSpc>
-            </a:pPr>
-            <a:r>
-              <a:rPr sz="1500" b="1">
-                <a:solidFill>
-                  <a:srgbClr val="20242C"/>
-                </a:solidFill>
-                <a:latin typeface="Microsoft YaHei"/>
-              </a:rPr>
-              <a:t>二选一 B · 13,920 FF‑eq · 不碰事务层</a:t>
-            </a:r>
-          </a:p>
-        </p:txBody>
-      </p:sp>
-      <p:sp>
-        <p:nvSpPr>
-          <p:cNvPr id="24" name="TextBox 23"/>
-          <p:cNvSpPr txBox="1"/>
-          <p:nvPr/>
-        </p:nvSpPr>
-        <p:spPr>
-          <a:xfrm>
-            <a:off x="6425031" y="3639110"/>
-            <a:ext cx="2160955" cy="1370479"/>
-          </a:xfrm>
-          <a:prstGeom prst="rect">
-            <a:avLst/>
-          </a:prstGeom>
-          <a:noFill/>
-        </p:spPr>
-        <p:txBody>
-          <a:bodyPr wrap="square" anchor="t" lIns="0" rIns="0" tIns="0" bIns="0">
-            <a:spAutoFit/>
-          </a:bodyPr>
-          <a:lstStyle/>
-          <a:p>
-            <a:pPr algn="l">
-              <a:lnSpc>
-                <a:spcPct val="102000"/>
-              </a:lnSpc>
-            </a:pPr>
-            <a:r>
-              <a:rPr sz="950" b="1">
-                <a:solidFill>
-                  <a:srgbClr val="20242C"/>
-                </a:solidFill>
-                <a:latin typeface="Microsoft YaHei"/>
-              </a:rPr>
-              <a:t>S22-stock。</a:t>
-            </a:r>
-            <a:r>
-              <a:rPr sz="950" b="0">
-                <a:solidFill>
-                  <a:srgbClr val="20242C"/>
-                </a:solidFill>
-                <a:latin typeface="Microsoft YaHei"/>
-              </a:rPr>
-              <a:t>当 HA 是不可改的硬 IP 时的落点：只改环上仲裁 —— 这一拍谁让出哪个位置。协议、事务层、线格式零改动。</a:t>
-            </a:r>
-          </a:p>
-          <a:p>
-            <a:pPr algn="l">
-              <a:lnSpc>
-                <a:spcPct val="102000"/>
-              </a:lnSpc>
-              <a:spcBef>
-                <a:spcPts val="600"/>
-              </a:spcBef>
-            </a:pPr>
-            <a:r>
-              <a:rPr sz="950" b="0">
-                <a:solidFill>
-                  <a:srgbClr val="20242C"/>
-                </a:solidFill>
-                <a:latin typeface="Microsoft YaHei"/>
-              </a:rPr>
-              <a:t>Jain 0.94799、带宽 −2.21%，全面优于 S1 且便宜 34%。</a:t>
-            </a:r>
-            <a:r>
-              <a:rPr sz="950" b="1">
-                <a:solidFill>
-                  <a:srgbClr val="D20A2E"/>
-                </a:solidFill>
-                <a:latin typeface="Microsoft YaHei"/>
-              </a:rPr>
-              <a:t>代价是比 A 贵 15 倍、多让 1.8 个点带宽。</a:t>
-            </a:r>
-          </a:p>
-        </p:txBody>
-      </p:sp>
-      <p:sp>
-        <p:nvSpPr>
-          <p:cNvPr id="25" name="Rectangle 24"/>
-          <p:cNvSpPr/>
-          <p:nvPr/>
-        </p:nvSpPr>
-        <p:spPr>
-          <a:xfrm>
-            <a:off x="9024899" y="2194560"/>
-            <a:ext cx="2599867" cy="3017520"/>
-          </a:xfrm>
-          <a:prstGeom prst="rect">
-            <a:avLst/>
-          </a:prstGeom>
-          <a:solidFill>
-            <a:srgbClr val="FFFFFF"/>
-          </a:solidFill>
-          <a:ln w="12700">
-            <a:solidFill>
-              <a:srgbClr val="DCE3EA"/>
-            </a:solidFill>
-          </a:ln>
-          <a:effectLst/>
-        </p:spPr>
-        <p:style>
-          <a:lnRef idx="1">
-            <a:schemeClr val="accent1"/>
-          </a:lnRef>
-          <a:fillRef idx="3">
-            <a:schemeClr val="accent1"/>
-          </a:fillRef>
-          <a:effectRef idx="2">
-            <a:schemeClr val="accent1"/>
-          </a:effectRef>
-          <a:fontRef idx="minor">
-            <a:schemeClr val="lt1"/>
-          </a:fontRef>
-        </p:style>
-        <p:txBody>
-          <a:bodyPr rtlCol="0" anchor="ctr" wrap="square"/>
-          <a:lstStyle/>
-          <a:p>
-            <a:pPr algn="ctr"/>
-          </a:p>
-        </p:txBody>
-      </p:sp>
-      <p:sp>
-        <p:nvSpPr>
-          <p:cNvPr id="26" name="Oval 25"/>
-          <p:cNvSpPr/>
-          <p:nvPr/>
-        </p:nvSpPr>
-        <p:spPr>
-          <a:xfrm>
-            <a:off x="9244355" y="2414016"/>
-            <a:ext cx="384048" cy="384048"/>
-          </a:xfrm>
-          <a:prstGeom prst="ellipse">
-            <a:avLst/>
-          </a:prstGeom>
-          <a:solidFill>
-            <a:srgbClr val="D20A2E"/>
-          </a:solidFill>
-          <a:ln>
-            <a:noFill/>
-          </a:ln>
-          <a:effectLst/>
-        </p:spPr>
-        <p:style>
-          <a:lnRef idx="1">
-            <a:schemeClr val="accent1"/>
-          </a:lnRef>
-          <a:fillRef idx="3">
-            <a:schemeClr val="accent1"/>
-          </a:fillRef>
-          <a:effectRef idx="2">
-            <a:schemeClr val="accent1"/>
-          </a:effectRef>
-          <a:fontRef idx="minor">
-            <a:schemeClr val="lt1"/>
-          </a:fontRef>
-        </p:style>
-        <p:txBody>
-          <a:bodyPr rtlCol="0" anchor="ctr" wrap="square"/>
-          <a:lstStyle/>
-          <a:p>
-            <a:pPr algn="ctr"/>
-          </a:p>
-        </p:txBody>
-      </p:sp>
-      <p:sp>
-        <p:nvSpPr>
-          <p:cNvPr id="27" name="TextBox 26"/>
-          <p:cNvSpPr txBox="1"/>
-          <p:nvPr/>
-        </p:nvSpPr>
-        <p:spPr>
-          <a:xfrm>
-            <a:off x="9244355" y="2496312"/>
-            <a:ext cx="384048" cy="237744"/>
-          </a:xfrm>
-          <a:prstGeom prst="rect">
-            <a:avLst/>
-          </a:prstGeom>
-          <a:noFill/>
-        </p:spPr>
-        <p:txBody>
-          <a:bodyPr wrap="square" anchor="t" lIns="0" rIns="0" tIns="0" bIns="0">
-            <a:spAutoFit/>
-          </a:bodyPr>
-          <a:lstStyle/>
-          <a:p>
-            <a:pPr algn="ctr">
-              <a:lnSpc>
-                <a:spcPct val="100000"/>
-              </a:lnSpc>
-            </a:pPr>
-            <a:r>
-              <a:rPr sz="1150" b="1">
-                <a:solidFill>
-                  <a:srgbClr val="FFFFFF"/>
-                </a:solidFill>
-                <a:latin typeface="Arial"/>
-              </a:rPr>
-              <a:t>04</a:t>
-            </a:r>
-          </a:p>
-        </p:txBody>
-      </p:sp>
-      <p:sp>
-        <p:nvSpPr>
-          <p:cNvPr id="28" name="TextBox 27"/>
-          <p:cNvSpPr txBox="1"/>
-          <p:nvPr/>
-        </p:nvSpPr>
-        <p:spPr>
-          <a:xfrm>
-            <a:off x="9244355" y="2965650"/>
-            <a:ext cx="2160955" cy="314705"/>
-          </a:xfrm>
-          <a:prstGeom prst="rect">
-            <a:avLst/>
-          </a:prstGeom>
-          <a:noFill/>
-        </p:spPr>
-        <p:txBody>
-          <a:bodyPr wrap="square" anchor="t" lIns="0" rIns="0" tIns="0" bIns="0">
-            <a:spAutoFit/>
-          </a:bodyPr>
-          <a:lstStyle/>
-          <a:p>
-            <a:pPr algn="l">
-              <a:lnSpc>
-                <a:spcPct val="100000"/>
-              </a:lnSpc>
-            </a:pPr>
-            <a:r>
-              <a:rPr sz="1500" b="1">
-                <a:solidFill>
-                  <a:srgbClr val="20242C"/>
-                </a:solidFill>
-                <a:latin typeface="Microsoft YaHei"/>
-              </a:rPr>
-              <a:t>不建议</a:t>
-            </a:r>
-          </a:p>
-        </p:txBody>
-      </p:sp>
-      <p:sp>
-        <p:nvSpPr>
-          <p:cNvPr id="29" name="TextBox 28"/>
-          <p:cNvSpPr txBox="1"/>
-          <p:nvPr/>
-        </p:nvSpPr>
-        <p:spPr>
-          <a:xfrm>
-            <a:off x="9244355" y="3362652"/>
-            <a:ext cx="2160955" cy="1645264"/>
-          </a:xfrm>
-          <a:prstGeom prst="rect">
-            <a:avLst/>
-          </a:prstGeom>
-          <a:noFill/>
-        </p:spPr>
-        <p:txBody>
-          <a:bodyPr wrap="square" anchor="t" lIns="0" rIns="0" tIns="0" bIns="0">
-            <a:spAutoFit/>
-          </a:bodyPr>
-          <a:lstStyle/>
-          <a:p>
-            <a:pPr algn="l">
-              <a:lnSpc>
-                <a:spcPct val="102000"/>
-              </a:lnSpc>
-            </a:pPr>
-            <a:r>
-              <a:rPr sz="1100" b="1">
-                <a:solidFill>
-                  <a:srgbClr val="20242C"/>
-                </a:solidFill>
-                <a:latin typeface="Microsoft YaHei"/>
-              </a:rPr>
-              <a:t>S1 现状</a:t>
-            </a:r>
-            <a:r>
-              <a:rPr sz="1100" b="0">
-                <a:solidFill>
-                  <a:srgbClr val="20242C"/>
-                </a:solidFill>
-                <a:latin typeface="Microsoft YaHei"/>
-              </a:rPr>
-              <a:t>：−16.3% 带宽换 +0.029 Jain，62 组参数扫描无解。</a:t>
-            </a:r>
-          </a:p>
-          <a:p>
-            <a:pPr algn="l">
-              <a:lnSpc>
-                <a:spcPct val="102000"/>
-              </a:lnSpc>
-              <a:spcBef>
-                <a:spcPts val="600"/>
-              </a:spcBef>
-            </a:pPr>
-            <a:r>
-              <a:rPr sz="1100" b="1">
-                <a:solidFill>
-                  <a:srgbClr val="20242C"/>
-                </a:solidFill>
-                <a:latin typeface="Microsoft YaHei"/>
-              </a:rPr>
-              <a:t>S19 / S20</a:t>
-            </a:r>
-            <a:r>
-              <a:rPr sz="1100" b="0">
-                <a:solidFill>
-                  <a:srgbClr val="20242C"/>
-                </a:solidFill>
-                <a:latin typeface="Microsoft YaHei"/>
-              </a:rPr>
-              <a:t>：中价位，但在非均匀流量下控制回路一次都没触发。</a:t>
-            </a:r>
-          </a:p>
-          <a:p>
-            <a:pPr algn="l">
-              <a:lnSpc>
-                <a:spcPct val="102000"/>
-              </a:lnSpc>
-              <a:spcBef>
-                <a:spcPts val="600"/>
-              </a:spcBef>
-            </a:pPr>
-            <a:r>
-              <a:rPr sz="1100" b="1">
-                <a:solidFill>
-                  <a:srgbClr val="20242C"/>
-                </a:solidFill>
-                <a:latin typeface="Microsoft YaHei"/>
-              </a:rPr>
-              <a:t>S16 读侧</a:t>
-            </a:r>
-            <a:r>
-              <a:rPr sz="1100" b="0">
-                <a:solidFill>
-                  <a:srgbClr val="20242C"/>
-                </a:solidFill>
-                <a:latin typeface="Microsoft YaHei"/>
-              </a:rPr>
-              <a:t>：S0 读的十核带宽只差 0.36%，本来就没有问题 —— 不值得为 +0.47% 带宽再动一次事务层。</a:t>
-            </a:r>
-          </a:p>
-        </p:txBody>
-      </p:sp>
-      <p:sp>
-        <p:nvSpPr>
-          <p:cNvPr id="30" name="Rectangle 29"/>
-          <p:cNvSpPr/>
-          <p:nvPr/>
-        </p:nvSpPr>
-        <p:spPr>
-          <a:xfrm>
-            <a:off x="566928" y="5486400"/>
-            <a:ext cx="11057839" cy="841248"/>
-          </a:xfrm>
-          <a:prstGeom prst="rect">
-            <a:avLst/>
-          </a:prstGeom>
-          <a:solidFill>
-            <a:srgbClr val="D20A2E"/>
-          </a:solidFill>
-          <a:ln>
-            <a:noFill/>
-          </a:ln>
-          <a:effectLst/>
-        </p:spPr>
-        <p:style>
-          <a:lnRef idx="1">
-            <a:schemeClr val="accent1"/>
-          </a:lnRef>
-          <a:fillRef idx="3">
-            <a:schemeClr val="accent1"/>
-          </a:fillRef>
-          <a:effectRef idx="2">
-            <a:schemeClr val="accent1"/>
-          </a:effectRef>
-          <a:fontRef idx="minor">
-            <a:schemeClr val="lt1"/>
-          </a:fontRef>
-        </p:style>
-        <p:txBody>
-          <a:bodyPr rtlCol="0" anchor="ctr" wrap="square"/>
-          <a:lstStyle/>
-          <a:p>
-            <a:pPr algn="ctr"/>
-          </a:p>
-        </p:txBody>
-      </p:sp>
-      <p:sp>
-        <p:nvSpPr>
-          <p:cNvPr id="31" name="TextBox 30"/>
-          <p:cNvSpPr txBox="1"/>
-          <p:nvPr/>
-        </p:nvSpPr>
-        <p:spPr>
-          <a:xfrm>
-            <a:off x="877824" y="5577840"/>
-            <a:ext cx="10436047" cy="658368"/>
-          </a:xfrm>
-          <a:prstGeom prst="rect">
-            <a:avLst/>
-          </a:prstGeom>
-          <a:noFill/>
-        </p:spPr>
-        <p:txBody>
-          <a:bodyPr wrap="square" anchor="ctr" lIns="0" rIns="0" tIns="0" bIns="0">
-            <a:spAutoFit/>
-          </a:bodyPr>
-          <a:lstStyle/>
-          <a:p>
-            <a:pPr algn="l">
-              <a:lnSpc>
-                <a:spcPct val="104000"/>
-              </a:lnSpc>
-            </a:pPr>
-            <a:r>
-              <a:rPr sz="1400" b="0">
-                <a:solidFill>
-                  <a:srgbClr val="FFFFFF"/>
-                </a:solidFill>
-                <a:latin typeface="Microsoft YaHei"/>
-              </a:rPr>
-              <a:t>第 1 步可以立刻单独上线。第 2、3 步二选一，判据不是数字，而是一个工程事实：completer 的授权调度能不能改 —— 能改选 A，不能改选 B。</a:t>
-            </a:r>
-          </a:p>
-        </p:txBody>
-      </p:sp>
-      <p:sp>
-        <p:nvSpPr>
-          <p:cNvPr id="32" name="TextBox 31"/>
           <p:cNvSpPr txBox="1"/>
           <p:nvPr/>
         </p:nvSpPr>
@@ -23588,7 +23141,7 @@
                 </a:solidFill>
                 <a:latin typeface="Arial"/>
               </a:rPr>
-              <a:t>29 / 30</a:t>
+              <a:t>29 / 34</a:t>
             </a:r>
           </a:p>
         </p:txBody>
@@ -24094,7 +23647,7 @@
                 </a:solidFill>
                 <a:latin typeface="Arial"/>
               </a:rPr>
-              <a:t>03 / 30</a:t>
+              <a:t>03 / 34</a:t>
             </a:r>
           </a:p>
         </p:txBody>
@@ -24132,7 +23685,7 @@
             <a:avLst/>
           </a:prstGeom>
           <a:solidFill>
-            <a:srgbClr val="14171C"/>
+            <a:srgbClr val="F4F7FB"/>
           </a:solidFill>
           <a:ln>
             <a:noFill/>
@@ -24169,8 +23722,8 @@
         </p:nvSpPr>
         <p:spPr>
           <a:xfrm>
-            <a:off x="10143439" y="274320"/>
-            <a:ext cx="182880" cy="182880"/>
+            <a:off x="566928" y="301752"/>
+            <a:ext cx="137160" cy="137160"/>
           </a:xfrm>
           <a:prstGeom prst="rect">
             <a:avLst/>
@@ -24213,6 +23766,4031 @@
         </p:nvSpPr>
         <p:spPr>
           <a:xfrm>
+            <a:off x="804672" y="265176"/>
+            <a:ext cx="9229039" cy="237744"/>
+          </a:xfrm>
+          <a:prstGeom prst="rect">
+            <a:avLst/>
+          </a:prstGeom>
+          <a:noFill/>
+        </p:spPr>
+        <p:txBody>
+          <a:bodyPr wrap="square" anchor="t" lIns="0" rIns="0" tIns="0" bIns="0">
+            <a:spAutoFit/>
+          </a:bodyPr>
+          <a:lstStyle/>
+          <a:p>
+            <a:pPr algn="l">
+              <a:lnSpc>
+                <a:spcPct val="100000"/>
+              </a:lnSpc>
+            </a:pPr>
+            <a:r>
+              <a:rPr sz="1150" b="1">
+                <a:solidFill>
+                  <a:srgbClr val="667080"/>
+                </a:solidFill>
+                <a:latin typeface="Microsoft YaHei"/>
+              </a:rPr>
+              <a:t>S22 实测：均匀流量</a:t>
+            </a:r>
+          </a:p>
+        </p:txBody>
+      </p:sp>
+      <p:sp>
+        <p:nvSpPr>
+          <p:cNvPr id="5" name="Rectangle 4"/>
+          <p:cNvSpPr/>
+          <p:nvPr/>
+        </p:nvSpPr>
+        <p:spPr>
+          <a:xfrm>
+            <a:off x="566928" y="640080"/>
+            <a:ext cx="11057839" cy="10058"/>
+          </a:xfrm>
+          <a:prstGeom prst="rect">
+            <a:avLst/>
+          </a:prstGeom>
+          <a:solidFill>
+            <a:srgbClr val="DCE3EA"/>
+          </a:solidFill>
+          <a:ln>
+            <a:noFill/>
+          </a:ln>
+          <a:effectLst/>
+        </p:spPr>
+        <p:style>
+          <a:lnRef idx="1">
+            <a:schemeClr val="accent1"/>
+          </a:lnRef>
+          <a:fillRef idx="3">
+            <a:schemeClr val="accent1"/>
+          </a:fillRef>
+          <a:effectRef idx="2">
+            <a:schemeClr val="accent1"/>
+          </a:effectRef>
+          <a:fontRef idx="minor">
+            <a:schemeClr val="lt1"/>
+          </a:fontRef>
+        </p:style>
+        <p:txBody>
+          <a:bodyPr rtlCol="0" anchor="ctr" wrap="square"/>
+          <a:lstStyle/>
+          <a:p>
+            <a:pPr algn="ctr"/>
+          </a:p>
+        </p:txBody>
+      </p:sp>
+      <p:sp>
+        <p:nvSpPr>
+          <p:cNvPr id="6" name="Rectangle 5"/>
+          <p:cNvSpPr/>
+          <p:nvPr/>
+        </p:nvSpPr>
+        <p:spPr>
+          <a:xfrm>
+            <a:off x="10143439" y="274320"/>
+            <a:ext cx="182880" cy="182880"/>
+          </a:xfrm>
+          <a:prstGeom prst="rect">
+            <a:avLst/>
+          </a:prstGeom>
+          <a:solidFill>
+            <a:srgbClr val="D20A2E"/>
+          </a:solidFill>
+          <a:ln>
+            <a:noFill/>
+          </a:ln>
+          <a:effectLst/>
+        </p:spPr>
+        <p:style>
+          <a:lnRef idx="1">
+            <a:schemeClr val="accent1"/>
+          </a:lnRef>
+          <a:fillRef idx="3">
+            <a:schemeClr val="accent1"/>
+          </a:fillRef>
+          <a:effectRef idx="2">
+            <a:schemeClr val="accent1"/>
+          </a:effectRef>
+          <a:fontRef idx="minor">
+            <a:schemeClr val="lt1"/>
+          </a:fontRef>
+        </p:style>
+        <p:txBody>
+          <a:bodyPr rtlCol="0" anchor="ctr" wrap="square"/>
+          <a:lstStyle/>
+          <a:p>
+            <a:pPr algn="ctr"/>
+          </a:p>
+        </p:txBody>
+      </p:sp>
+      <p:sp>
+        <p:nvSpPr>
+          <p:cNvPr id="7" name="TextBox 6"/>
+          <p:cNvSpPr txBox="1"/>
+          <p:nvPr/>
+        </p:nvSpPr>
+        <p:spPr>
+          <a:xfrm>
+            <a:off x="10399471" y="246888"/>
+            <a:ext cx="1225296" cy="256032"/>
+          </a:xfrm>
+          <a:prstGeom prst="rect">
+            <a:avLst/>
+          </a:prstGeom>
+          <a:noFill/>
+        </p:spPr>
+        <p:txBody>
+          <a:bodyPr wrap="square" anchor="t" lIns="0" rIns="0" tIns="0" bIns="0">
+            <a:spAutoFit/>
+          </a:bodyPr>
+          <a:lstStyle/>
+          <a:p>
+            <a:pPr algn="l">
+              <a:lnSpc>
+                <a:spcPct val="100000"/>
+              </a:lnSpc>
+            </a:pPr>
+            <a:r>
+              <a:rPr sz="1300" b="1">
+                <a:solidFill>
+                  <a:srgbClr val="20242C"/>
+                </a:solidFill>
+                <a:latin typeface="Arial"/>
+              </a:rPr>
+              <a:t>HUAWEI</a:t>
+            </a:r>
+          </a:p>
+        </p:txBody>
+      </p:sp>
+      <p:sp>
+        <p:nvSpPr>
+          <p:cNvPr id="8" name="TextBox 7"/>
+          <p:cNvSpPr txBox="1"/>
+          <p:nvPr/>
+        </p:nvSpPr>
+        <p:spPr>
+          <a:xfrm>
+            <a:off x="566928" y="1024128"/>
+            <a:ext cx="2377440" cy="237744"/>
+          </a:xfrm>
+          <a:prstGeom prst="rect">
+            <a:avLst/>
+          </a:prstGeom>
+          <a:noFill/>
+        </p:spPr>
+        <p:txBody>
+          <a:bodyPr wrap="square" anchor="t" lIns="0" rIns="0" tIns="0" bIns="0">
+            <a:spAutoFit/>
+          </a:bodyPr>
+          <a:lstStyle/>
+          <a:p>
+            <a:pPr algn="l">
+              <a:lnSpc>
+                <a:spcPct val="100000"/>
+              </a:lnSpc>
+            </a:pPr>
+            <a:r>
+              <a:rPr sz="1000" b="1">
+                <a:solidFill>
+                  <a:srgbClr val="D20A2E"/>
+                </a:solidFill>
+                <a:latin typeface="Arial"/>
+              </a:rPr>
+              <a:t>M E A S U R E D   ·   U N I F O R M</a:t>
+            </a:r>
+          </a:p>
+        </p:txBody>
+      </p:sp>
+      <p:sp>
+        <p:nvSpPr>
+          <p:cNvPr id="9" name="TextBox 8"/>
+          <p:cNvSpPr txBox="1"/>
+          <p:nvPr/>
+        </p:nvSpPr>
+        <p:spPr>
+          <a:xfrm>
+            <a:off x="566928" y="1335024"/>
+            <a:ext cx="2377440" cy="713232"/>
+          </a:xfrm>
+          <a:prstGeom prst="rect">
+            <a:avLst/>
+          </a:prstGeom>
+          <a:noFill/>
+        </p:spPr>
+        <p:txBody>
+          <a:bodyPr wrap="square" anchor="t" lIns="0" rIns="0" tIns="0" bIns="0">
+            <a:spAutoFit/>
+          </a:bodyPr>
+          <a:lstStyle/>
+          <a:p>
+            <a:pPr algn="l">
+              <a:lnSpc>
+                <a:spcPct val="100000"/>
+              </a:lnSpc>
+            </a:pPr>
+            <a:r>
+              <a:rPr sz="4000" b="1">
+                <a:solidFill>
+                  <a:srgbClr val="D20A2E"/>
+                </a:solidFill>
+                <a:latin typeface="Arial"/>
+              </a:rPr>
+              <a:t>0.94799</a:t>
+            </a:r>
+          </a:p>
+        </p:txBody>
+      </p:sp>
+      <p:sp>
+        <p:nvSpPr>
+          <p:cNvPr id="10" name="TextBox 9"/>
+          <p:cNvSpPr txBox="1"/>
+          <p:nvPr/>
+        </p:nvSpPr>
+        <p:spPr>
+          <a:xfrm>
+            <a:off x="566928" y="2121408"/>
+            <a:ext cx="2377440" cy="658368"/>
+          </a:xfrm>
+          <a:prstGeom prst="rect">
+            <a:avLst/>
+          </a:prstGeom>
+          <a:noFill/>
+        </p:spPr>
+        <p:txBody>
+          <a:bodyPr wrap="square" anchor="t" lIns="0" rIns="0" tIns="0" bIns="0">
+            <a:spAutoFit/>
+          </a:bodyPr>
+          <a:lstStyle/>
+          <a:p>
+            <a:pPr algn="l">
+              <a:lnSpc>
+                <a:spcPct val="106000"/>
+              </a:lnSpc>
+            </a:pPr>
+            <a:r>
+              <a:rPr sz="1000" b="0">
+                <a:solidFill>
+                  <a:srgbClr val="667080"/>
+                </a:solidFill>
+                <a:latin typeface="Microsoft YaHei"/>
+              </a:rPr>
+              <a:t>S22 写侧 100 拍 Jain（S0 = 0.92818）</a:t>
+            </a:r>
+          </a:p>
+          <a:p>
+            <a:pPr algn="l">
+              <a:lnSpc>
+                <a:spcPct val="106000"/>
+              </a:lnSpc>
+              <a:spcBef>
+                <a:spcPts val="500"/>
+              </a:spcBef>
+            </a:pPr>
+            <a:r>
+              <a:rPr sz="1000" b="0">
+                <a:solidFill>
+                  <a:srgbClr val="667080"/>
+                </a:solidFill>
+                <a:latin typeface="Microsoft YaHei"/>
+              </a:rPr>
+              <a:t>总写带宽 −2.21%</a:t>
+            </a:r>
+          </a:p>
+        </p:txBody>
+      </p:sp>
+      <p:sp>
+        <p:nvSpPr>
+          <p:cNvPr id="11" name="Rectangle 10"/>
+          <p:cNvSpPr/>
+          <p:nvPr/>
+        </p:nvSpPr>
+        <p:spPr>
+          <a:xfrm>
+            <a:off x="566928" y="2889504"/>
+            <a:ext cx="822960" cy="41148"/>
+          </a:xfrm>
+          <a:prstGeom prst="rect">
+            <a:avLst/>
+          </a:prstGeom>
+          <a:solidFill>
+            <a:srgbClr val="D20A2E"/>
+          </a:solidFill>
+          <a:ln>
+            <a:noFill/>
+          </a:ln>
+          <a:effectLst/>
+        </p:spPr>
+        <p:style>
+          <a:lnRef idx="1">
+            <a:schemeClr val="accent1"/>
+          </a:lnRef>
+          <a:fillRef idx="3">
+            <a:schemeClr val="accent1"/>
+          </a:fillRef>
+          <a:effectRef idx="2">
+            <a:schemeClr val="accent1"/>
+          </a:effectRef>
+          <a:fontRef idx="minor">
+            <a:schemeClr val="lt1"/>
+          </a:fontRef>
+        </p:style>
+        <p:txBody>
+          <a:bodyPr rtlCol="0" anchor="ctr" wrap="square"/>
+          <a:lstStyle/>
+          <a:p>
+            <a:pPr algn="ctr"/>
+          </a:p>
+        </p:txBody>
+      </p:sp>
+      <p:pic>
+        <p:nvPicPr>
+          <p:cNvPr id="12" name="Picture 11" descr="25-s22-compare.png"/>
+          <p:cNvPicPr>
+            <a:picLocks noChangeAspect="1"/>
+          </p:cNvPicPr>
+          <p:nvPr/>
+        </p:nvPicPr>
+        <p:blipFill>
+          <a:blip r:embed="rId2"/>
+          <a:stretch>
+            <a:fillRect/>
+          </a:stretch>
+        </p:blipFill>
+        <p:spPr>
+          <a:xfrm>
+            <a:off x="3768801" y="1024128"/>
+            <a:ext cx="7415580" cy="2350007"/>
+          </a:xfrm>
+          <a:prstGeom prst="rect">
+            <a:avLst/>
+          </a:prstGeom>
+        </p:spPr>
+      </p:pic>
+      <p:sp>
+        <p:nvSpPr>
+          <p:cNvPr id="13" name="TextBox 12"/>
+          <p:cNvSpPr txBox="1"/>
+          <p:nvPr/>
+        </p:nvSpPr>
+        <p:spPr>
+          <a:xfrm>
+            <a:off x="3328416" y="3465575"/>
+            <a:ext cx="8296351" cy="292608"/>
+          </a:xfrm>
+          <a:prstGeom prst="rect">
+            <a:avLst/>
+          </a:prstGeom>
+          <a:noFill/>
+        </p:spPr>
+        <p:txBody>
+          <a:bodyPr wrap="square" anchor="t" lIns="0" rIns="0" tIns="0" bIns="0">
+            <a:spAutoFit/>
+          </a:bodyPr>
+          <a:lstStyle/>
+          <a:p>
+            <a:pPr algn="l">
+              <a:lnSpc>
+                <a:spcPct val="100000"/>
+              </a:lnSpc>
+            </a:pPr>
+            <a:r>
+              <a:rPr sz="1000" b="0">
+                <a:solidFill>
+                  <a:srgbClr val="667080"/>
+                </a:solidFill>
+                <a:latin typeface="Microsoft YaHei"/>
+              </a:rPr>
+              <a:t>四根柱依次 S0 / S1 / S16 / S22，橙虚线 = 理论上限 R*；写侧 K = 20000。后两幅是公平性的两个不同问题，见右侧第三张卡。</a:t>
+            </a:r>
+          </a:p>
+        </p:txBody>
+      </p:sp>
+      <p:sp>
+        <p:nvSpPr>
+          <p:cNvPr id="14" name="Rectangle 13"/>
+          <p:cNvSpPr/>
+          <p:nvPr/>
+        </p:nvSpPr>
+        <p:spPr>
+          <a:xfrm>
+            <a:off x="566928" y="4087368"/>
+            <a:ext cx="3527450" cy="2240280"/>
+          </a:xfrm>
+          <a:prstGeom prst="rect">
+            <a:avLst/>
+          </a:prstGeom>
+          <a:solidFill>
+            <a:srgbClr val="EDF2F7"/>
+          </a:solidFill>
+          <a:ln w="19050">
+            <a:solidFill>
+              <a:srgbClr val="D20A2E"/>
+            </a:solidFill>
+          </a:ln>
+          <a:effectLst/>
+        </p:spPr>
+        <p:style>
+          <a:lnRef idx="1">
+            <a:schemeClr val="accent1"/>
+          </a:lnRef>
+          <a:fillRef idx="3">
+            <a:schemeClr val="accent1"/>
+          </a:fillRef>
+          <a:effectRef idx="2">
+            <a:schemeClr val="accent1"/>
+          </a:effectRef>
+          <a:fontRef idx="minor">
+            <a:schemeClr val="lt1"/>
+          </a:fontRef>
+        </p:style>
+        <p:txBody>
+          <a:bodyPr rtlCol="0" anchor="ctr" wrap="square"/>
+          <a:lstStyle/>
+          <a:p>
+            <a:pPr algn="ctr"/>
+          </a:p>
+        </p:txBody>
+      </p:sp>
+      <p:sp>
+        <p:nvSpPr>
+          <p:cNvPr id="15" name="TextBox 14"/>
+          <p:cNvSpPr txBox="1"/>
+          <p:nvPr/>
+        </p:nvSpPr>
+        <p:spPr>
+          <a:xfrm>
+            <a:off x="768096" y="4611466"/>
+            <a:ext cx="3125114" cy="277622"/>
+          </a:xfrm>
+          <a:prstGeom prst="rect">
+            <a:avLst/>
+          </a:prstGeom>
+          <a:noFill/>
+        </p:spPr>
+        <p:txBody>
+          <a:bodyPr wrap="square" anchor="t" lIns="0" rIns="0" tIns="0" bIns="0">
+            <a:spAutoFit/>
+          </a:bodyPr>
+          <a:lstStyle/>
+          <a:p>
+            <a:pPr algn="l">
+              <a:lnSpc>
+                <a:spcPct val="100000"/>
+              </a:lnSpc>
+            </a:pPr>
+            <a:r>
+              <a:rPr sz="1300" b="1">
+                <a:solidFill>
+                  <a:srgbClr val="D20A2E"/>
+                </a:solidFill>
+                <a:latin typeface="Microsoft YaHei"/>
+              </a:rPr>
+              <a:t>比 S1 全面更好</a:t>
+            </a:r>
+          </a:p>
+        </p:txBody>
+      </p:sp>
+      <p:sp>
+        <p:nvSpPr>
+          <p:cNvPr id="16" name="TextBox 15"/>
+          <p:cNvSpPr txBox="1"/>
+          <p:nvPr/>
+        </p:nvSpPr>
+        <p:spPr>
+          <a:xfrm>
+            <a:off x="768096" y="4971384"/>
+            <a:ext cx="3125114" cy="868740"/>
+          </a:xfrm>
+          <a:prstGeom prst="rect">
+            <a:avLst/>
+          </a:prstGeom>
+          <a:noFill/>
+        </p:spPr>
+        <p:txBody>
+          <a:bodyPr wrap="square" anchor="t" lIns="0" rIns="0" tIns="0" bIns="0">
+            <a:spAutoFit/>
+          </a:bodyPr>
+          <a:lstStyle/>
+          <a:p>
+            <a:pPr algn="l">
+              <a:lnSpc>
+                <a:spcPct val="102000"/>
+              </a:lnSpc>
+            </a:pPr>
+            <a:r>
+              <a:rPr sz="1100" b="0">
+                <a:solidFill>
+                  <a:srgbClr val="20242C"/>
+                </a:solidFill>
+                <a:latin typeface="Microsoft YaHei"/>
+              </a:rPr>
+              <a:t>Jain 0.94799 vs S1 的 0.95675 基本持平，但带宽只让 </a:t>
+            </a:r>
+            <a:r>
+              <a:rPr sz="1100" b="1">
+                <a:solidFill>
+                  <a:srgbClr val="20242C"/>
+                </a:solidFill>
+                <a:latin typeface="Microsoft YaHei"/>
+              </a:rPr>
+              <a:t>2.21%</a:t>
+            </a:r>
+            <a:r>
+              <a:rPr sz="1100" b="0">
+                <a:solidFill>
+                  <a:srgbClr val="20242C"/>
+                </a:solidFill>
+                <a:latin typeface="Microsoft YaHei"/>
+              </a:rPr>
+              <a:t>，S1 要让 </a:t>
+            </a:r>
+            <a:r>
+              <a:rPr sz="1100" b="1">
+                <a:solidFill>
+                  <a:srgbClr val="20242C"/>
+                </a:solidFill>
+                <a:latin typeface="Microsoft YaHei"/>
+              </a:rPr>
+              <a:t>16.3%</a:t>
+            </a:r>
+            <a:r>
+              <a:rPr sz="1100" b="0">
+                <a:solidFill>
+                  <a:srgbClr val="20242C"/>
+                </a:solidFill>
+                <a:latin typeface="Microsoft YaHei"/>
+              </a:rPr>
+              <a:t>；max/min 1.2230 vs 1.3586。硬件还便宜 34%（13,920 vs 21,220 FF‑eq）。</a:t>
+            </a:r>
+          </a:p>
+        </p:txBody>
+      </p:sp>
+      <p:sp>
+        <p:nvSpPr>
+          <p:cNvPr id="17" name="Rectangle 16"/>
+          <p:cNvSpPr/>
+          <p:nvPr/>
+        </p:nvSpPr>
+        <p:spPr>
+          <a:xfrm>
+            <a:off x="4332122" y="4087368"/>
+            <a:ext cx="3527450" cy="2240280"/>
+          </a:xfrm>
+          <a:prstGeom prst="rect">
+            <a:avLst/>
+          </a:prstGeom>
+          <a:solidFill>
+            <a:srgbClr val="EDF2F7"/>
+          </a:solidFill>
+          <a:ln w="12700">
+            <a:solidFill>
+              <a:srgbClr val="DCE3EA"/>
+            </a:solidFill>
+          </a:ln>
+          <a:effectLst/>
+        </p:spPr>
+        <p:style>
+          <a:lnRef idx="1">
+            <a:schemeClr val="accent1"/>
+          </a:lnRef>
+          <a:fillRef idx="3">
+            <a:schemeClr val="accent1"/>
+          </a:fillRef>
+          <a:effectRef idx="2">
+            <a:schemeClr val="accent1"/>
+          </a:effectRef>
+          <a:fontRef idx="minor">
+            <a:schemeClr val="lt1"/>
+          </a:fontRef>
+        </p:style>
+        <p:txBody>
+          <a:bodyPr rtlCol="0" anchor="ctr" wrap="square"/>
+          <a:lstStyle/>
+          <a:p>
+            <a:pPr algn="ctr"/>
+          </a:p>
+        </p:txBody>
+      </p:sp>
+      <p:sp>
+        <p:nvSpPr>
+          <p:cNvPr id="18" name="TextBox 17"/>
+          <p:cNvSpPr txBox="1"/>
+          <p:nvPr/>
+        </p:nvSpPr>
+        <p:spPr>
+          <a:xfrm>
+            <a:off x="4533290" y="4611466"/>
+            <a:ext cx="3125114" cy="277622"/>
+          </a:xfrm>
+          <a:prstGeom prst="rect">
+            <a:avLst/>
+          </a:prstGeom>
+          <a:noFill/>
+        </p:spPr>
+        <p:txBody>
+          <a:bodyPr wrap="square" anchor="t" lIns="0" rIns="0" tIns="0" bIns="0">
+            <a:spAutoFit/>
+          </a:bodyPr>
+          <a:lstStyle/>
+          <a:p>
+            <a:pPr algn="l">
+              <a:lnSpc>
+                <a:spcPct val="100000"/>
+              </a:lnSpc>
+            </a:pPr>
+            <a:r>
+              <a:rPr sz="1300" b="1">
+                <a:solidFill>
+                  <a:srgbClr val="20242C"/>
+                </a:solidFill>
+                <a:latin typeface="Microsoft YaHei"/>
+              </a:rPr>
+              <a:t>数字上被 S16 支配，但层次不同</a:t>
+            </a:r>
+          </a:p>
+        </p:txBody>
+      </p:sp>
+      <p:sp>
+        <p:nvSpPr>
+          <p:cNvPr id="19" name="TextBox 18"/>
+          <p:cNvSpPr txBox="1"/>
+          <p:nvPr/>
+        </p:nvSpPr>
+        <p:spPr>
+          <a:xfrm>
+            <a:off x="4533290" y="4971384"/>
+            <a:ext cx="3125114" cy="868740"/>
+          </a:xfrm>
+          <a:prstGeom prst="rect">
+            <a:avLst/>
+          </a:prstGeom>
+          <a:noFill/>
+        </p:spPr>
+        <p:txBody>
+          <a:bodyPr wrap="square" anchor="t" lIns="0" rIns="0" tIns="0" bIns="0">
+            <a:spAutoFit/>
+          </a:bodyPr>
+          <a:lstStyle/>
+          <a:p>
+            <a:pPr algn="l">
+              <a:lnSpc>
+                <a:spcPct val="102000"/>
+              </a:lnSpc>
+            </a:pPr>
+            <a:r>
+              <a:rPr sz="1100" b="0">
+                <a:solidFill>
+                  <a:srgbClr val="20242C"/>
+                </a:solidFill>
+                <a:latin typeface="Microsoft YaHei"/>
+              </a:rPr>
+              <a:t>S16 用 </a:t>
+            </a:r>
+            <a:r>
+              <a:rPr sz="1100" b="1">
+                <a:solidFill>
+                  <a:srgbClr val="20242C"/>
+                </a:solidFill>
+                <a:latin typeface="Microsoft YaHei"/>
+              </a:rPr>
+              <a:t>1/15 的硬件</a:t>
+            </a:r>
+            <a:r>
+              <a:rPr sz="1100" b="0">
+                <a:solidFill>
+                  <a:srgbClr val="20242C"/>
+                </a:solidFill>
+                <a:latin typeface="Microsoft YaHei"/>
+              </a:rPr>
+              <a:t>拿到更高的 Jain（0.98466）和更小的带宽代价（0.39%）。S22 唯一的、也是决定性的优势：</a:t>
+            </a:r>
+            <a:r>
+              <a:rPr sz="1100" b="1">
+                <a:solidFill>
+                  <a:srgbClr val="D20A2E"/>
+                </a:solidFill>
+                <a:latin typeface="Microsoft YaHei"/>
+              </a:rPr>
+              <a:t>它只改环上仲裁，一点事务层都不碰。</a:t>
+            </a:r>
+          </a:p>
+        </p:txBody>
+      </p:sp>
+      <p:sp>
+        <p:nvSpPr>
+          <p:cNvPr id="20" name="Rectangle 19"/>
+          <p:cNvSpPr/>
+          <p:nvPr/>
+        </p:nvSpPr>
+        <p:spPr>
+          <a:xfrm>
+            <a:off x="8097316" y="4087368"/>
+            <a:ext cx="3527450" cy="2240280"/>
+          </a:xfrm>
+          <a:prstGeom prst="rect">
+            <a:avLst/>
+          </a:prstGeom>
+          <a:solidFill>
+            <a:srgbClr val="EDF2F7"/>
+          </a:solidFill>
+          <a:ln w="12700">
+            <a:solidFill>
+              <a:srgbClr val="DCE3EA"/>
+            </a:solidFill>
+          </a:ln>
+          <a:effectLst/>
+        </p:spPr>
+        <p:style>
+          <a:lnRef idx="1">
+            <a:schemeClr val="accent1"/>
+          </a:lnRef>
+          <a:fillRef idx="3">
+            <a:schemeClr val="accent1"/>
+          </a:fillRef>
+          <a:effectRef idx="2">
+            <a:schemeClr val="accent1"/>
+          </a:effectRef>
+          <a:fontRef idx="minor">
+            <a:schemeClr val="lt1"/>
+          </a:fontRef>
+        </p:style>
+        <p:txBody>
+          <a:bodyPr rtlCol="0" anchor="ctr" wrap="square"/>
+          <a:lstStyle/>
+          <a:p>
+            <a:pPr algn="ctr"/>
+          </a:p>
+        </p:txBody>
+      </p:sp>
+      <p:sp>
+        <p:nvSpPr>
+          <p:cNvPr id="21" name="TextBox 20"/>
+          <p:cNvSpPr txBox="1"/>
+          <p:nvPr/>
+        </p:nvSpPr>
+        <p:spPr>
+          <a:xfrm>
+            <a:off x="8298484" y="4294402"/>
+            <a:ext cx="3125114" cy="277622"/>
+          </a:xfrm>
+          <a:prstGeom prst="rect">
+            <a:avLst/>
+          </a:prstGeom>
+          <a:noFill/>
+        </p:spPr>
+        <p:txBody>
+          <a:bodyPr wrap="square" anchor="t" lIns="0" rIns="0" tIns="0" bIns="0">
+            <a:spAutoFit/>
+          </a:bodyPr>
+          <a:lstStyle/>
+          <a:p>
+            <a:pPr algn="l">
+              <a:lnSpc>
+                <a:spcPct val="100000"/>
+              </a:lnSpc>
+            </a:pPr>
+            <a:r>
+              <a:rPr sz="1300" b="1">
+                <a:solidFill>
+                  <a:srgbClr val="20242C"/>
+                </a:solidFill>
+                <a:latin typeface="Microsoft YaHei"/>
+              </a:rPr>
+              <a:t>两个公平性指标分别在问什么</a:t>
+            </a:r>
+          </a:p>
+        </p:txBody>
+      </p:sp>
+      <p:sp>
+        <p:nvSpPr>
+          <p:cNvPr id="22" name="TextBox 21"/>
+          <p:cNvSpPr txBox="1"/>
+          <p:nvPr/>
+        </p:nvSpPr>
+        <p:spPr>
+          <a:xfrm>
+            <a:off x="8298484" y="4654320"/>
+            <a:ext cx="3125114" cy="1502869"/>
+          </a:xfrm>
+          <a:prstGeom prst="rect">
+            <a:avLst/>
+          </a:prstGeom>
+          <a:noFill/>
+        </p:spPr>
+        <p:txBody>
+          <a:bodyPr wrap="square" anchor="t" lIns="0" rIns="0" tIns="0" bIns="0">
+            <a:spAutoFit/>
+          </a:bodyPr>
+          <a:lstStyle/>
+          <a:p>
+            <a:pPr algn="l">
+              <a:lnSpc>
+                <a:spcPct val="102000"/>
+              </a:lnSpc>
+            </a:pPr>
+            <a:r>
+              <a:rPr sz="1050" b="1">
+                <a:solidFill>
+                  <a:srgbClr val="20242C"/>
+                </a:solidFill>
+                <a:latin typeface="Microsoft YaHei"/>
+              </a:rPr>
+              <a:t>瞬时均衡度</a:t>
+            </a:r>
+            <a:r>
+              <a:rPr sz="1050" b="0">
+                <a:solidFill>
+                  <a:srgbClr val="20242C"/>
+                </a:solidFill>
+                <a:latin typeface="Microsoft YaHei"/>
+              </a:rPr>
+              <a:t>（每 100 拍算一次 Jain 再平均）问的是：在任意一小段时间里，十个核是不是同时都在被服务。</a:t>
+            </a:r>
+          </a:p>
+          <a:p>
+            <a:pPr algn="l">
+              <a:lnSpc>
+                <a:spcPct val="102000"/>
+              </a:lnSpc>
+              <a:spcBef>
+                <a:spcPts val="600"/>
+              </a:spcBef>
+            </a:pPr>
+            <a:r>
+              <a:rPr sz="1050" b="1">
+                <a:solidFill>
+                  <a:srgbClr val="20242C"/>
+                </a:solidFill>
+                <a:latin typeface="Microsoft YaHei"/>
+              </a:rPr>
+              <a:t>长期速率差</a:t>
+            </a:r>
+            <a:r>
+              <a:rPr sz="1050" b="0">
+                <a:solidFill>
+                  <a:srgbClr val="20242C"/>
+                </a:solidFill>
+                <a:latin typeface="Microsoft YaHei"/>
+              </a:rPr>
+              <a:t>（整窗最快核带宽 ÷ 最慢核带宽）问的是：把整个争用窗平均下来，有没有哪个核被系统性地拖慢。S0 = 1.5663 意味着最快的核长期比最慢的核快 57%。</a:t>
+            </a:r>
+          </a:p>
+        </p:txBody>
+      </p:sp>
+      <p:sp>
+        <p:nvSpPr>
+          <p:cNvPr id="23" name="TextBox 22"/>
+          <p:cNvSpPr txBox="1"/>
+          <p:nvPr/>
+        </p:nvSpPr>
+        <p:spPr>
+          <a:xfrm>
+            <a:off x="566928" y="6455664"/>
+            <a:ext cx="1463040" cy="219456"/>
+          </a:xfrm>
+          <a:prstGeom prst="rect">
+            <a:avLst/>
+          </a:prstGeom>
+          <a:noFill/>
+        </p:spPr>
+        <p:txBody>
+          <a:bodyPr wrap="square" anchor="t" lIns="0" rIns="0" tIns="0" bIns="0">
+            <a:spAutoFit/>
+          </a:bodyPr>
+          <a:lstStyle/>
+          <a:p>
+            <a:pPr algn="l">
+              <a:lnSpc>
+                <a:spcPct val="100000"/>
+              </a:lnSpc>
+            </a:pPr>
+            <a:r>
+              <a:rPr sz="1000" b="0">
+                <a:solidFill>
+                  <a:srgbClr val="A8B0BA"/>
+                </a:solidFill>
+                <a:latin typeface="Arial"/>
+              </a:rPr>
+              <a:t>30 / 34</a:t>
+            </a:r>
+          </a:p>
+        </p:txBody>
+      </p:sp>
+    </p:spTree>
+  </p:cSld>
+  <p:clrMapOvr>
+    <a:masterClrMapping/>
+  </p:clrMapOvr>
+</p:sld>
+</file>
+
+<file path=ppt/slides/slide31.xml><?xml version="1.0" encoding="utf-8"?>
+<p:sld xmlns:a="http://schemas.openxmlformats.org/drawingml/2006/main" xmlns:p="http://schemas.openxmlformats.org/presentationml/2006/main" xmlns:r="http://schemas.openxmlformats.org/officeDocument/2006/relationships">
+  <p:cSld>
+    <p:spTree>
+      <p:nvGrpSpPr>
+        <p:cNvPr id="1" name=""/>
+        <p:cNvGrpSpPr/>
+        <p:nvPr/>
+      </p:nvGrpSpPr>
+      <p:grpSpPr/>
+      <p:sp>
+        <p:nvSpPr>
+          <p:cNvPr id="2" name="Rectangle 1"/>
+          <p:cNvSpPr/>
+          <p:nvPr/>
+        </p:nvSpPr>
+        <p:spPr>
+          <a:xfrm>
+            <a:off x="0" y="0"/>
+            <a:ext cx="12191695" cy="6858000"/>
+          </a:xfrm>
+          <a:prstGeom prst="rect">
+            <a:avLst/>
+          </a:prstGeom>
+          <a:solidFill>
+            <a:srgbClr val="F4F7FB"/>
+          </a:solidFill>
+          <a:ln>
+            <a:noFill/>
+          </a:ln>
+          <a:effectLst/>
+        </p:spPr>
+        <p:style>
+          <a:lnRef idx="1">
+            <a:schemeClr val="accent1"/>
+          </a:lnRef>
+          <a:fillRef idx="3">
+            <a:schemeClr val="accent1"/>
+          </a:fillRef>
+          <a:effectRef idx="2">
+            <a:schemeClr val="accent1"/>
+          </a:effectRef>
+          <a:fontRef idx="minor">
+            <a:schemeClr val="lt1"/>
+          </a:fontRef>
+        </p:style>
+        <p:txBody>
+          <a:bodyPr rtlCol="0" anchor="ctr" wrap="square"/>
+          <a:lstStyle/>
+          <a:p>
+            <a:pPr algn="ctr"/>
+          </a:p>
+        </p:txBody>
+      </p:sp>
+      <p:sp>
+        <p:nvSpPr>
+          <p:cNvPr id="3" name="Rectangle 2"/>
+          <p:cNvSpPr/>
+          <p:nvPr/>
+        </p:nvSpPr>
+        <p:spPr>
+          <a:xfrm>
+            <a:off x="10143439" y="274320"/>
+            <a:ext cx="182880" cy="182880"/>
+          </a:xfrm>
+          <a:prstGeom prst="rect">
+            <a:avLst/>
+          </a:prstGeom>
+          <a:solidFill>
+            <a:srgbClr val="D20A2E"/>
+          </a:solidFill>
+          <a:ln>
+            <a:noFill/>
+          </a:ln>
+          <a:effectLst/>
+        </p:spPr>
+        <p:style>
+          <a:lnRef idx="1">
+            <a:schemeClr val="accent1"/>
+          </a:lnRef>
+          <a:fillRef idx="3">
+            <a:schemeClr val="accent1"/>
+          </a:fillRef>
+          <a:effectRef idx="2">
+            <a:schemeClr val="accent1"/>
+          </a:effectRef>
+          <a:fontRef idx="minor">
+            <a:schemeClr val="lt1"/>
+          </a:fontRef>
+        </p:style>
+        <p:txBody>
+          <a:bodyPr rtlCol="0" anchor="ctr" wrap="square"/>
+          <a:lstStyle/>
+          <a:p>
+            <a:pPr algn="ctr"/>
+          </a:p>
+        </p:txBody>
+      </p:sp>
+      <p:sp>
+        <p:nvSpPr>
+          <p:cNvPr id="4" name="TextBox 3"/>
+          <p:cNvSpPr txBox="1"/>
+          <p:nvPr/>
+        </p:nvSpPr>
+        <p:spPr>
+          <a:xfrm>
+            <a:off x="10399471" y="246888"/>
+            <a:ext cx="1225296" cy="256032"/>
+          </a:xfrm>
+          <a:prstGeom prst="rect">
+            <a:avLst/>
+          </a:prstGeom>
+          <a:noFill/>
+        </p:spPr>
+        <p:txBody>
+          <a:bodyPr wrap="square" anchor="t" lIns="0" rIns="0" tIns="0" bIns="0">
+            <a:spAutoFit/>
+          </a:bodyPr>
+          <a:lstStyle/>
+          <a:p>
+            <a:pPr algn="l">
+              <a:lnSpc>
+                <a:spcPct val="100000"/>
+              </a:lnSpc>
+            </a:pPr>
+            <a:r>
+              <a:rPr sz="1300" b="1">
+                <a:solidFill>
+                  <a:srgbClr val="20242C"/>
+                </a:solidFill>
+                <a:latin typeface="Arial"/>
+              </a:rPr>
+              <a:t>HUAWEI</a:t>
+            </a:r>
+          </a:p>
+        </p:txBody>
+      </p:sp>
+      <p:sp>
+        <p:nvSpPr>
+          <p:cNvPr id="5" name="Oval 4"/>
+          <p:cNvSpPr/>
+          <p:nvPr/>
+        </p:nvSpPr>
+        <p:spPr>
+          <a:xfrm>
+            <a:off x="566928" y="1883664"/>
+            <a:ext cx="896112" cy="896112"/>
+          </a:xfrm>
+          <a:prstGeom prst="ellipse">
+            <a:avLst/>
+          </a:prstGeom>
+          <a:noFill/>
+          <a:ln w="17780">
+            <a:solidFill>
+              <a:srgbClr val="DCE3EA"/>
+            </a:solidFill>
+          </a:ln>
+          <a:effectLst/>
+        </p:spPr>
+        <p:style>
+          <a:lnRef idx="1">
+            <a:schemeClr val="accent1"/>
+          </a:lnRef>
+          <a:fillRef idx="3">
+            <a:schemeClr val="accent1"/>
+          </a:fillRef>
+          <a:effectRef idx="2">
+            <a:schemeClr val="accent1"/>
+          </a:effectRef>
+          <a:fontRef idx="minor">
+            <a:schemeClr val="lt1"/>
+          </a:fontRef>
+        </p:style>
+        <p:txBody>
+          <a:bodyPr rtlCol="0" anchor="ctr" wrap="square"/>
+          <a:lstStyle/>
+          <a:p>
+            <a:pPr algn="ctr"/>
+          </a:p>
+        </p:txBody>
+      </p:sp>
+      <p:sp>
+        <p:nvSpPr>
+          <p:cNvPr id="6" name="TextBox 5"/>
+          <p:cNvSpPr txBox="1"/>
+          <p:nvPr/>
+        </p:nvSpPr>
+        <p:spPr>
+          <a:xfrm>
+            <a:off x="566928" y="2176272"/>
+            <a:ext cx="896112" cy="365760"/>
+          </a:xfrm>
+          <a:prstGeom prst="rect">
+            <a:avLst/>
+          </a:prstGeom>
+          <a:noFill/>
+        </p:spPr>
+        <p:txBody>
+          <a:bodyPr wrap="square" anchor="t" lIns="0" rIns="0" tIns="0" bIns="0">
+            <a:spAutoFit/>
+          </a:bodyPr>
+          <a:lstStyle/>
+          <a:p>
+            <a:pPr algn="ctr">
+              <a:lnSpc>
+                <a:spcPct val="100000"/>
+              </a:lnSpc>
+            </a:pPr>
+            <a:r>
+              <a:rPr sz="2100" b="1">
+                <a:solidFill>
+                  <a:srgbClr val="D20A2E"/>
+                </a:solidFill>
+                <a:latin typeface="Arial"/>
+              </a:rPr>
+              <a:t>07</a:t>
+            </a:r>
+          </a:p>
+        </p:txBody>
+      </p:sp>
+      <p:sp>
+        <p:nvSpPr>
+          <p:cNvPr id="7" name="TextBox 6"/>
+          <p:cNvSpPr txBox="1"/>
+          <p:nvPr/>
+        </p:nvSpPr>
+        <p:spPr>
+          <a:xfrm>
+            <a:off x="566928" y="2980944"/>
+            <a:ext cx="4023360" cy="237744"/>
+          </a:xfrm>
+          <a:prstGeom prst="rect">
+            <a:avLst/>
+          </a:prstGeom>
+          <a:noFill/>
+        </p:spPr>
+        <p:txBody>
+          <a:bodyPr wrap="square" anchor="t" lIns="0" rIns="0" tIns="0" bIns="0">
+            <a:spAutoFit/>
+          </a:bodyPr>
+          <a:lstStyle/>
+          <a:p>
+            <a:pPr algn="l">
+              <a:lnSpc>
+                <a:spcPct val="100000"/>
+              </a:lnSpc>
+            </a:pPr>
+            <a:r>
+              <a:rPr sz="1100" b="1">
+                <a:solidFill>
+                  <a:srgbClr val="D20A2E"/>
+                </a:solidFill>
+                <a:latin typeface="Arial"/>
+              </a:rPr>
+              <a:t>S E C T I O N   S E V E N</a:t>
+            </a:r>
+          </a:p>
+        </p:txBody>
+      </p:sp>
+      <p:sp>
+        <p:nvSpPr>
+          <p:cNvPr id="8" name="TextBox 7"/>
+          <p:cNvSpPr txBox="1"/>
+          <p:nvPr/>
+        </p:nvSpPr>
+        <p:spPr>
+          <a:xfrm>
+            <a:off x="566928" y="3291840"/>
+            <a:ext cx="4937760" cy="1426464"/>
+          </a:xfrm>
+          <a:prstGeom prst="rect">
+            <a:avLst/>
+          </a:prstGeom>
+          <a:noFill/>
+        </p:spPr>
+        <p:txBody>
+          <a:bodyPr wrap="square" anchor="t" lIns="0" rIns="0" tIns="0" bIns="0">
+            <a:spAutoFit/>
+          </a:bodyPr>
+          <a:lstStyle/>
+          <a:p>
+            <a:pPr algn="l">
+              <a:lnSpc>
+                <a:spcPct val="98000"/>
+              </a:lnSpc>
+            </a:pPr>
+            <a:r>
+              <a:rPr sz="3800" b="1">
+                <a:solidFill>
+                  <a:srgbClr val="20242C"/>
+                </a:solidFill>
+                <a:latin typeface="Microsoft YaHei"/>
+              </a:rPr>
+              <a:t>结论与建议</a:t>
+            </a:r>
+          </a:p>
+        </p:txBody>
+      </p:sp>
+      <p:sp>
+        <p:nvSpPr>
+          <p:cNvPr id="9" name="TextBox 8"/>
+          <p:cNvSpPr txBox="1"/>
+          <p:nvPr/>
+        </p:nvSpPr>
+        <p:spPr>
+          <a:xfrm>
+            <a:off x="566928" y="4846320"/>
+            <a:ext cx="4572000" cy="786384"/>
+          </a:xfrm>
+          <a:prstGeom prst="rect">
+            <a:avLst/>
+          </a:prstGeom>
+          <a:noFill/>
+        </p:spPr>
+        <p:txBody>
+          <a:bodyPr wrap="square" anchor="t" lIns="0" rIns="0" tIns="0" bIns="0">
+            <a:spAutoFit/>
+          </a:bodyPr>
+          <a:lstStyle/>
+          <a:p>
+            <a:pPr algn="l">
+              <a:lnSpc>
+                <a:spcPct val="106000"/>
+              </a:lnSpc>
+            </a:pPr>
+            <a:r>
+              <a:rPr sz="1400" b="0">
+                <a:solidFill>
+                  <a:srgbClr val="667080"/>
+                </a:solidFill>
+                <a:latin typeface="Microsoft YaHei"/>
+              </a:rPr>
+              <a:t>哪些已经关死，哪些还开着，以及下一步该由谁拍板。</a:t>
+            </a:r>
+          </a:p>
+        </p:txBody>
+      </p:sp>
+      <p:sp>
+        <p:nvSpPr>
+          <p:cNvPr id="10" name="Rectangle 9"/>
+          <p:cNvSpPr/>
+          <p:nvPr/>
+        </p:nvSpPr>
+        <p:spPr>
+          <a:xfrm>
+            <a:off x="5989320" y="2011680"/>
+            <a:ext cx="5635447" cy="2834640"/>
+          </a:xfrm>
+          <a:prstGeom prst="rect">
+            <a:avLst/>
+          </a:prstGeom>
+          <a:solidFill>
+            <a:srgbClr val="D20A2E"/>
+          </a:solidFill>
+          <a:ln>
+            <a:noFill/>
+          </a:ln>
+          <a:effectLst/>
+        </p:spPr>
+        <p:style>
+          <a:lnRef idx="1">
+            <a:schemeClr val="accent1"/>
+          </a:lnRef>
+          <a:fillRef idx="3">
+            <a:schemeClr val="accent1"/>
+          </a:fillRef>
+          <a:effectRef idx="2">
+            <a:schemeClr val="accent1"/>
+          </a:effectRef>
+          <a:fontRef idx="minor">
+            <a:schemeClr val="lt1"/>
+          </a:fontRef>
+        </p:style>
+        <p:txBody>
+          <a:bodyPr rtlCol="0" anchor="ctr" wrap="square"/>
+          <a:lstStyle/>
+          <a:p>
+            <a:pPr algn="ctr"/>
+          </a:p>
+        </p:txBody>
+      </p:sp>
+      <p:sp>
+        <p:nvSpPr>
+          <p:cNvPr id="11" name="TextBox 10"/>
+          <p:cNvSpPr txBox="1"/>
+          <p:nvPr/>
+        </p:nvSpPr>
+        <p:spPr>
+          <a:xfrm>
+            <a:off x="6355080" y="2395728"/>
+            <a:ext cx="3657600" cy="237744"/>
+          </a:xfrm>
+          <a:prstGeom prst="rect">
+            <a:avLst/>
+          </a:prstGeom>
+          <a:noFill/>
+        </p:spPr>
+        <p:txBody>
+          <a:bodyPr wrap="square" anchor="t" lIns="0" rIns="0" tIns="0" bIns="0">
+            <a:spAutoFit/>
+          </a:bodyPr>
+          <a:lstStyle/>
+          <a:p>
+            <a:pPr algn="l">
+              <a:lnSpc>
+                <a:spcPct val="100000"/>
+              </a:lnSpc>
+            </a:pPr>
+            <a:r>
+              <a:rPr sz="1100" b="1">
+                <a:solidFill>
+                  <a:srgbClr val="FFFFFF"/>
+                </a:solidFill>
+                <a:latin typeface="Arial"/>
+              </a:rPr>
+              <a:t>B O T T O M   L I N E</a:t>
+            </a:r>
+          </a:p>
+        </p:txBody>
+      </p:sp>
+      <p:sp>
+        <p:nvSpPr>
+          <p:cNvPr id="12" name="TextBox 11"/>
+          <p:cNvSpPr txBox="1"/>
+          <p:nvPr/>
+        </p:nvSpPr>
+        <p:spPr>
+          <a:xfrm>
+            <a:off x="6355080" y="2761488"/>
+            <a:ext cx="4903927" cy="1737360"/>
+          </a:xfrm>
+          <a:prstGeom prst="rect">
+            <a:avLst/>
+          </a:prstGeom>
+          <a:noFill/>
+        </p:spPr>
+        <p:txBody>
+          <a:bodyPr wrap="square" anchor="t" lIns="0" rIns="0" tIns="0" bIns="0">
+            <a:spAutoFit/>
+          </a:bodyPr>
+          <a:lstStyle/>
+          <a:p>
+            <a:pPr algn="l">
+              <a:lnSpc>
+                <a:spcPct val="104000"/>
+              </a:lnSpc>
+            </a:pPr>
+            <a:r>
+              <a:rPr sz="2000" b="1">
+                <a:solidFill>
+                  <a:srgbClr val="FFFFFF"/>
+                </a:solidFill>
+                <a:latin typeface="Microsoft YaHei"/>
+              </a:rPr>
+              <a:t>带宽线已基本关死；公平缺陷是真实的，但它不必用带宽去换。真正要拍板的不是单一排名，而是哪一层能改：completer、requester，还是只允许动环上仲裁。</a:t>
+            </a:r>
+          </a:p>
+        </p:txBody>
+      </p:sp>
+      <p:sp>
+        <p:nvSpPr>
+          <p:cNvPr id="13" name="TextBox 12"/>
+          <p:cNvSpPr txBox="1"/>
+          <p:nvPr/>
+        </p:nvSpPr>
+        <p:spPr>
+          <a:xfrm>
+            <a:off x="566928" y="6455664"/>
+            <a:ext cx="1463040" cy="219456"/>
+          </a:xfrm>
+          <a:prstGeom prst="rect">
+            <a:avLst/>
+          </a:prstGeom>
+          <a:noFill/>
+        </p:spPr>
+        <p:txBody>
+          <a:bodyPr wrap="square" anchor="t" lIns="0" rIns="0" tIns="0" bIns="0">
+            <a:spAutoFit/>
+          </a:bodyPr>
+          <a:lstStyle/>
+          <a:p>
+            <a:pPr algn="l">
+              <a:lnSpc>
+                <a:spcPct val="100000"/>
+              </a:lnSpc>
+            </a:pPr>
+            <a:r>
+              <a:rPr sz="1000" b="0">
+                <a:solidFill>
+                  <a:srgbClr val="A8B0BA"/>
+                </a:solidFill>
+                <a:latin typeface="Arial"/>
+              </a:rPr>
+              <a:t>31 / 34</a:t>
+            </a:r>
+          </a:p>
+        </p:txBody>
+      </p:sp>
+    </p:spTree>
+  </p:cSld>
+  <p:clrMapOvr>
+    <a:masterClrMapping/>
+  </p:clrMapOvr>
+</p:sld>
+</file>
+
+<file path=ppt/slides/slide32.xml><?xml version="1.0" encoding="utf-8"?>
+<p:sld xmlns:a="http://schemas.openxmlformats.org/drawingml/2006/main" xmlns:p="http://schemas.openxmlformats.org/presentationml/2006/main" xmlns:r="http://schemas.openxmlformats.org/officeDocument/2006/relationships">
+  <p:cSld>
+    <p:spTree>
+      <p:nvGrpSpPr>
+        <p:cNvPr id="1" name=""/>
+        <p:cNvGrpSpPr/>
+        <p:nvPr/>
+      </p:nvGrpSpPr>
+      <p:grpSpPr/>
+      <p:sp>
+        <p:nvSpPr>
+          <p:cNvPr id="2" name="Rectangle 1"/>
+          <p:cNvSpPr/>
+          <p:nvPr/>
+        </p:nvSpPr>
+        <p:spPr>
+          <a:xfrm>
+            <a:off x="0" y="0"/>
+            <a:ext cx="12191695" cy="6858000"/>
+          </a:xfrm>
+          <a:prstGeom prst="rect">
+            <a:avLst/>
+          </a:prstGeom>
+          <a:solidFill>
+            <a:srgbClr val="F4F7FB"/>
+          </a:solidFill>
+          <a:ln>
+            <a:noFill/>
+          </a:ln>
+          <a:effectLst/>
+        </p:spPr>
+        <p:style>
+          <a:lnRef idx="1">
+            <a:schemeClr val="accent1"/>
+          </a:lnRef>
+          <a:fillRef idx="3">
+            <a:schemeClr val="accent1"/>
+          </a:fillRef>
+          <a:effectRef idx="2">
+            <a:schemeClr val="accent1"/>
+          </a:effectRef>
+          <a:fontRef idx="minor">
+            <a:schemeClr val="lt1"/>
+          </a:fontRef>
+        </p:style>
+        <p:txBody>
+          <a:bodyPr rtlCol="0" anchor="ctr" wrap="square"/>
+          <a:lstStyle/>
+          <a:p>
+            <a:pPr algn="ctr"/>
+          </a:p>
+        </p:txBody>
+      </p:sp>
+      <p:sp>
+        <p:nvSpPr>
+          <p:cNvPr id="3" name="Rectangle 2"/>
+          <p:cNvSpPr/>
+          <p:nvPr/>
+        </p:nvSpPr>
+        <p:spPr>
+          <a:xfrm>
+            <a:off x="566928" y="301752"/>
+            <a:ext cx="137160" cy="137160"/>
+          </a:xfrm>
+          <a:prstGeom prst="rect">
+            <a:avLst/>
+          </a:prstGeom>
+          <a:solidFill>
+            <a:srgbClr val="D20A2E"/>
+          </a:solidFill>
+          <a:ln>
+            <a:noFill/>
+          </a:ln>
+          <a:effectLst/>
+        </p:spPr>
+        <p:style>
+          <a:lnRef idx="1">
+            <a:schemeClr val="accent1"/>
+          </a:lnRef>
+          <a:fillRef idx="3">
+            <a:schemeClr val="accent1"/>
+          </a:fillRef>
+          <a:effectRef idx="2">
+            <a:schemeClr val="accent1"/>
+          </a:effectRef>
+          <a:fontRef idx="minor">
+            <a:schemeClr val="lt1"/>
+          </a:fontRef>
+        </p:style>
+        <p:txBody>
+          <a:bodyPr rtlCol="0" anchor="ctr" wrap="square"/>
+          <a:lstStyle/>
+          <a:p>
+            <a:pPr algn="ctr"/>
+          </a:p>
+        </p:txBody>
+      </p:sp>
+      <p:sp>
+        <p:nvSpPr>
+          <p:cNvPr id="4" name="TextBox 3"/>
+          <p:cNvSpPr txBox="1"/>
+          <p:nvPr/>
+        </p:nvSpPr>
+        <p:spPr>
+          <a:xfrm>
+            <a:off x="804672" y="265176"/>
+            <a:ext cx="9229039" cy="237744"/>
+          </a:xfrm>
+          <a:prstGeom prst="rect">
+            <a:avLst/>
+          </a:prstGeom>
+          <a:noFill/>
+        </p:spPr>
+        <p:txBody>
+          <a:bodyPr wrap="square" anchor="t" lIns="0" rIns="0" tIns="0" bIns="0">
+            <a:spAutoFit/>
+          </a:bodyPr>
+          <a:lstStyle/>
+          <a:p>
+            <a:pPr algn="l">
+              <a:lnSpc>
+                <a:spcPct val="100000"/>
+              </a:lnSpc>
+            </a:pPr>
+            <a:r>
+              <a:rPr sz="1150" b="1">
+                <a:solidFill>
+                  <a:srgbClr val="667080"/>
+                </a:solidFill>
+                <a:latin typeface="Microsoft YaHei"/>
+              </a:rPr>
+              <a:t>结论</a:t>
+            </a:r>
+          </a:p>
+        </p:txBody>
+      </p:sp>
+      <p:sp>
+        <p:nvSpPr>
+          <p:cNvPr id="5" name="Rectangle 4"/>
+          <p:cNvSpPr/>
+          <p:nvPr/>
+        </p:nvSpPr>
+        <p:spPr>
+          <a:xfrm>
+            <a:off x="566928" y="640080"/>
+            <a:ext cx="11057839" cy="10058"/>
+          </a:xfrm>
+          <a:prstGeom prst="rect">
+            <a:avLst/>
+          </a:prstGeom>
+          <a:solidFill>
+            <a:srgbClr val="DCE3EA"/>
+          </a:solidFill>
+          <a:ln>
+            <a:noFill/>
+          </a:ln>
+          <a:effectLst/>
+        </p:spPr>
+        <p:style>
+          <a:lnRef idx="1">
+            <a:schemeClr val="accent1"/>
+          </a:lnRef>
+          <a:fillRef idx="3">
+            <a:schemeClr val="accent1"/>
+          </a:fillRef>
+          <a:effectRef idx="2">
+            <a:schemeClr val="accent1"/>
+          </a:effectRef>
+          <a:fontRef idx="minor">
+            <a:schemeClr val="lt1"/>
+          </a:fontRef>
+        </p:style>
+        <p:txBody>
+          <a:bodyPr rtlCol="0" anchor="ctr" wrap="square"/>
+          <a:lstStyle/>
+          <a:p>
+            <a:pPr algn="ctr"/>
+          </a:p>
+        </p:txBody>
+      </p:sp>
+      <p:sp>
+        <p:nvSpPr>
+          <p:cNvPr id="6" name="Rectangle 5"/>
+          <p:cNvSpPr/>
+          <p:nvPr/>
+        </p:nvSpPr>
+        <p:spPr>
+          <a:xfrm>
+            <a:off x="10143439" y="274320"/>
+            <a:ext cx="182880" cy="182880"/>
+          </a:xfrm>
+          <a:prstGeom prst="rect">
+            <a:avLst/>
+          </a:prstGeom>
+          <a:solidFill>
+            <a:srgbClr val="D20A2E"/>
+          </a:solidFill>
+          <a:ln>
+            <a:noFill/>
+          </a:ln>
+          <a:effectLst/>
+        </p:spPr>
+        <p:style>
+          <a:lnRef idx="1">
+            <a:schemeClr val="accent1"/>
+          </a:lnRef>
+          <a:fillRef idx="3">
+            <a:schemeClr val="accent1"/>
+          </a:fillRef>
+          <a:effectRef idx="2">
+            <a:schemeClr val="accent1"/>
+          </a:effectRef>
+          <a:fontRef idx="minor">
+            <a:schemeClr val="lt1"/>
+          </a:fontRef>
+        </p:style>
+        <p:txBody>
+          <a:bodyPr rtlCol="0" anchor="ctr" wrap="square"/>
+          <a:lstStyle/>
+          <a:p>
+            <a:pPr algn="ctr"/>
+          </a:p>
+        </p:txBody>
+      </p:sp>
+      <p:sp>
+        <p:nvSpPr>
+          <p:cNvPr id="7" name="TextBox 6"/>
+          <p:cNvSpPr txBox="1"/>
+          <p:nvPr/>
+        </p:nvSpPr>
+        <p:spPr>
+          <a:xfrm>
+            <a:off x="10399471" y="246888"/>
+            <a:ext cx="1225296" cy="256032"/>
+          </a:xfrm>
+          <a:prstGeom prst="rect">
+            <a:avLst/>
+          </a:prstGeom>
+          <a:noFill/>
+        </p:spPr>
+        <p:txBody>
+          <a:bodyPr wrap="square" anchor="t" lIns="0" rIns="0" tIns="0" bIns="0">
+            <a:spAutoFit/>
+          </a:bodyPr>
+          <a:lstStyle/>
+          <a:p>
+            <a:pPr algn="l">
+              <a:lnSpc>
+                <a:spcPct val="100000"/>
+              </a:lnSpc>
+            </a:pPr>
+            <a:r>
+              <a:rPr sz="1300" b="1">
+                <a:solidFill>
+                  <a:srgbClr val="20242C"/>
+                </a:solidFill>
+                <a:latin typeface="Arial"/>
+              </a:rPr>
+              <a:t>HUAWEI</a:t>
+            </a:r>
+          </a:p>
+        </p:txBody>
+      </p:sp>
+      <p:sp>
+        <p:nvSpPr>
+          <p:cNvPr id="8" name="TextBox 7"/>
+          <p:cNvSpPr txBox="1"/>
+          <p:nvPr/>
+        </p:nvSpPr>
+        <p:spPr>
+          <a:xfrm>
+            <a:off x="566928" y="1060704"/>
+            <a:ext cx="11057839" cy="237744"/>
+          </a:xfrm>
+          <a:prstGeom prst="rect">
+            <a:avLst/>
+          </a:prstGeom>
+          <a:noFill/>
+        </p:spPr>
+        <p:txBody>
+          <a:bodyPr wrap="square" anchor="t" lIns="0" rIns="0" tIns="0" bIns="0">
+            <a:spAutoFit/>
+          </a:bodyPr>
+          <a:lstStyle/>
+          <a:p>
+            <a:pPr algn="l">
+              <a:lnSpc>
+                <a:spcPct val="100000"/>
+              </a:lnSpc>
+            </a:pPr>
+            <a:r>
+              <a:rPr sz="1050" b="1">
+                <a:solidFill>
+                  <a:srgbClr val="D20A2E"/>
+                </a:solidFill>
+                <a:latin typeface="Arial"/>
+              </a:rPr>
+              <a:t>C O N C L U S I O N S</a:t>
+            </a:r>
+          </a:p>
+        </p:txBody>
+      </p:sp>
+      <p:sp>
+        <p:nvSpPr>
+          <p:cNvPr id="9" name="TextBox 8"/>
+          <p:cNvSpPr txBox="1"/>
+          <p:nvPr/>
+        </p:nvSpPr>
+        <p:spPr>
+          <a:xfrm>
+            <a:off x="566928" y="1353312"/>
+            <a:ext cx="11057839" cy="658368"/>
+          </a:xfrm>
+          <a:prstGeom prst="rect">
+            <a:avLst/>
+          </a:prstGeom>
+          <a:noFill/>
+        </p:spPr>
+        <p:txBody>
+          <a:bodyPr wrap="square" anchor="t" lIns="0" rIns="0" tIns="0" bIns="0">
+            <a:spAutoFit/>
+          </a:bodyPr>
+          <a:lstStyle/>
+          <a:p>
+            <a:pPr algn="l">
+              <a:lnSpc>
+                <a:spcPct val="100000"/>
+              </a:lnSpc>
+            </a:pPr>
+            <a:r>
+              <a:rPr sz="3000" b="1">
+                <a:solidFill>
+                  <a:srgbClr val="20242C"/>
+                </a:solidFill>
+                <a:latin typeface="Microsoft YaHei"/>
+              </a:rPr>
+              <a:t>四条</a:t>
+            </a:r>
+          </a:p>
+        </p:txBody>
+      </p:sp>
+      <p:sp>
+        <p:nvSpPr>
+          <p:cNvPr id="10" name="Rectangle 9"/>
+          <p:cNvSpPr/>
+          <p:nvPr/>
+        </p:nvSpPr>
+        <p:spPr>
+          <a:xfrm>
+            <a:off x="566928" y="2231136"/>
+            <a:ext cx="2599867" cy="2999231"/>
+          </a:xfrm>
+          <a:prstGeom prst="rect">
+            <a:avLst/>
+          </a:prstGeom>
+          <a:solidFill>
+            <a:srgbClr val="FFFFFF"/>
+          </a:solidFill>
+          <a:ln w="12700">
+            <a:solidFill>
+              <a:srgbClr val="DCE3EA"/>
+            </a:solidFill>
+          </a:ln>
+          <a:effectLst/>
+        </p:spPr>
+        <p:style>
+          <a:lnRef idx="1">
+            <a:schemeClr val="accent1"/>
+          </a:lnRef>
+          <a:fillRef idx="3">
+            <a:schemeClr val="accent1"/>
+          </a:fillRef>
+          <a:effectRef idx="2">
+            <a:schemeClr val="accent1"/>
+          </a:effectRef>
+          <a:fontRef idx="minor">
+            <a:schemeClr val="lt1"/>
+          </a:fontRef>
+        </p:style>
+        <p:txBody>
+          <a:bodyPr rtlCol="0" anchor="ctr" wrap="square"/>
+          <a:lstStyle/>
+          <a:p>
+            <a:pPr algn="ctr"/>
+          </a:p>
+        </p:txBody>
+      </p:sp>
+      <p:sp>
+        <p:nvSpPr>
+          <p:cNvPr id="11" name="TextBox 10"/>
+          <p:cNvSpPr txBox="1"/>
+          <p:nvPr/>
+        </p:nvSpPr>
+        <p:spPr>
+          <a:xfrm>
+            <a:off x="768096" y="2813288"/>
+            <a:ext cx="2197531" cy="314705"/>
+          </a:xfrm>
+          <a:prstGeom prst="rect">
+            <a:avLst/>
+          </a:prstGeom>
+          <a:noFill/>
+        </p:spPr>
+        <p:txBody>
+          <a:bodyPr wrap="square" anchor="t" lIns="0" rIns="0" tIns="0" bIns="0">
+            <a:spAutoFit/>
+          </a:bodyPr>
+          <a:lstStyle/>
+          <a:p>
+            <a:pPr algn="l">
+              <a:lnSpc>
+                <a:spcPct val="100000"/>
+              </a:lnSpc>
+            </a:pPr>
+            <a:r>
+              <a:rPr sz="1500" b="1">
+                <a:solidFill>
+                  <a:srgbClr val="20242C"/>
+                </a:solidFill>
+                <a:latin typeface="Microsoft YaHei"/>
+              </a:rPr>
+              <a:t>① 带宽线已基本关死</a:t>
+            </a:r>
+          </a:p>
+        </p:txBody>
+      </p:sp>
+      <p:sp>
+        <p:nvSpPr>
+          <p:cNvPr id="12" name="TextBox 11"/>
+          <p:cNvSpPr txBox="1"/>
+          <p:nvPr/>
+        </p:nvSpPr>
+        <p:spPr>
+          <a:xfrm>
+            <a:off x="768096" y="3210290"/>
+            <a:ext cx="2197531" cy="1474500"/>
+          </a:xfrm>
+          <a:prstGeom prst="rect">
+            <a:avLst/>
+          </a:prstGeom>
+          <a:noFill/>
+        </p:spPr>
+        <p:txBody>
+          <a:bodyPr wrap="square" anchor="t" lIns="0" rIns="0" tIns="0" bIns="0">
+            <a:spAutoFit/>
+          </a:bodyPr>
+          <a:lstStyle/>
+          <a:p>
+            <a:pPr algn="l">
+              <a:lnSpc>
+                <a:spcPct val="102000"/>
+              </a:lnSpc>
+            </a:pPr>
+            <a:r>
+              <a:rPr sz="1200" b="0">
+                <a:solidFill>
+                  <a:srgbClr val="20242C"/>
+                </a:solidFill>
+                <a:latin typeface="Microsoft YaHei"/>
+              </a:rPr>
+              <a:t>S0 = 96.97% R*，最忙的链路 96.98% 满；3.03% 的缺口已逐拍闭合（5 拍绕环 + 2,181 拍空转）。</a:t>
+            </a:r>
+          </a:p>
+          <a:p>
+            <a:pPr algn="l">
+              <a:lnSpc>
+                <a:spcPct val="102000"/>
+              </a:lnSpc>
+              <a:spcBef>
+                <a:spcPts val="600"/>
+              </a:spcBef>
+            </a:pPr>
+            <a:r>
+              <a:rPr sz="1200" b="1">
+                <a:solidFill>
+                  <a:srgbClr val="D20A2E"/>
+                </a:solidFill>
+                <a:latin typeface="Microsoft YaHei"/>
+              </a:rPr>
+              <a:t>拥塞控制的带宽目标应是「不弄丢」，不是「抬上去」。</a:t>
+            </a:r>
+          </a:p>
+        </p:txBody>
+      </p:sp>
+      <p:sp>
+        <p:nvSpPr>
+          <p:cNvPr id="13" name="Rectangle 12"/>
+          <p:cNvSpPr/>
+          <p:nvPr/>
+        </p:nvSpPr>
+        <p:spPr>
+          <a:xfrm>
+            <a:off x="3386251" y="2231136"/>
+            <a:ext cx="2599867" cy="2999231"/>
+          </a:xfrm>
+          <a:prstGeom prst="rect">
+            <a:avLst/>
+          </a:prstGeom>
+          <a:solidFill>
+            <a:srgbClr val="FFFFFF"/>
+          </a:solidFill>
+          <a:ln w="12700">
+            <a:solidFill>
+              <a:srgbClr val="DCE3EA"/>
+            </a:solidFill>
+          </a:ln>
+          <a:effectLst/>
+        </p:spPr>
+        <p:style>
+          <a:lnRef idx="1">
+            <a:schemeClr val="accent1"/>
+          </a:lnRef>
+          <a:fillRef idx="3">
+            <a:schemeClr val="accent1"/>
+          </a:fillRef>
+          <a:effectRef idx="2">
+            <a:schemeClr val="accent1"/>
+          </a:effectRef>
+          <a:fontRef idx="minor">
+            <a:schemeClr val="lt1"/>
+          </a:fontRef>
+        </p:style>
+        <p:txBody>
+          <a:bodyPr rtlCol="0" anchor="ctr" wrap="square"/>
+          <a:lstStyle/>
+          <a:p>
+            <a:pPr algn="ctr"/>
+          </a:p>
+        </p:txBody>
+      </p:sp>
+      <p:sp>
+        <p:nvSpPr>
+          <p:cNvPr id="14" name="TextBox 13"/>
+          <p:cNvSpPr txBox="1"/>
+          <p:nvPr/>
+        </p:nvSpPr>
+        <p:spPr>
+          <a:xfrm>
+            <a:off x="3587419" y="2813288"/>
+            <a:ext cx="2197531" cy="314705"/>
+          </a:xfrm>
+          <a:prstGeom prst="rect">
+            <a:avLst/>
+          </a:prstGeom>
+          <a:noFill/>
+        </p:spPr>
+        <p:txBody>
+          <a:bodyPr wrap="square" anchor="t" lIns="0" rIns="0" tIns="0" bIns="0">
+            <a:spAutoFit/>
+          </a:bodyPr>
+          <a:lstStyle/>
+          <a:p>
+            <a:pPr algn="l">
+              <a:lnSpc>
+                <a:spcPct val="100000"/>
+              </a:lnSpc>
+            </a:pPr>
+            <a:r>
+              <a:rPr sz="1500" b="1">
+                <a:solidFill>
+                  <a:srgbClr val="20242C"/>
+                </a:solidFill>
+                <a:latin typeface="Microsoft YaHei"/>
+              </a:rPr>
+              <a:t>② 公平缺陷是真实的</a:t>
+            </a:r>
+          </a:p>
+        </p:txBody>
+      </p:sp>
+      <p:sp>
+        <p:nvSpPr>
+          <p:cNvPr id="15" name="TextBox 14"/>
+          <p:cNvSpPr txBox="1"/>
+          <p:nvPr/>
+        </p:nvSpPr>
+        <p:spPr>
+          <a:xfrm>
+            <a:off x="3587419" y="3210290"/>
+            <a:ext cx="2197531" cy="1474500"/>
+          </a:xfrm>
+          <a:prstGeom prst="rect">
+            <a:avLst/>
+          </a:prstGeom>
+          <a:noFill/>
+        </p:spPr>
+        <p:txBody>
+          <a:bodyPr wrap="square" anchor="t" lIns="0" rIns="0" tIns="0" bIns="0">
+            <a:spAutoFit/>
+          </a:bodyPr>
+          <a:lstStyle/>
+          <a:p>
+            <a:pPr algn="l">
+              <a:lnSpc>
+                <a:spcPct val="102000"/>
+              </a:lnSpc>
+            </a:pPr>
+            <a:r>
+              <a:rPr sz="1200" b="0">
+                <a:solidFill>
+                  <a:srgbClr val="20242C"/>
+                </a:solidFill>
+                <a:latin typeface="Microsoft YaHei"/>
+              </a:rPr>
+              <a:t>不是采样噪声：把抖动完全抹平后的 Jain 上限只有 0.96458，六快四慢是几何决定的固定分组（核间速率比 1.5673）。</a:t>
+            </a:r>
+          </a:p>
+          <a:p>
+            <a:pPr algn="l">
+              <a:lnSpc>
+                <a:spcPct val="102000"/>
+              </a:lnSpc>
+              <a:spcBef>
+                <a:spcPts val="600"/>
+              </a:spcBef>
+            </a:pPr>
+            <a:r>
+              <a:rPr sz="1200" b="1">
+                <a:solidFill>
+                  <a:srgbClr val="D20A2E"/>
+                </a:solidFill>
+                <a:latin typeface="Microsoft YaHei"/>
+              </a:rPr>
+              <a:t>要提高均衡度就必须真的搬速率，只整时机不够。</a:t>
+            </a:r>
+          </a:p>
+        </p:txBody>
+      </p:sp>
+      <p:sp>
+        <p:nvSpPr>
+          <p:cNvPr id="16" name="Rectangle 15"/>
+          <p:cNvSpPr/>
+          <p:nvPr/>
+        </p:nvSpPr>
+        <p:spPr>
+          <a:xfrm>
+            <a:off x="6205575" y="2231136"/>
+            <a:ext cx="2599867" cy="2999231"/>
+          </a:xfrm>
+          <a:prstGeom prst="rect">
+            <a:avLst/>
+          </a:prstGeom>
+          <a:solidFill>
+            <a:srgbClr val="FFFFFF"/>
+          </a:solidFill>
+          <a:ln w="12700">
+            <a:solidFill>
+              <a:srgbClr val="DCE3EA"/>
+            </a:solidFill>
+          </a:ln>
+          <a:effectLst/>
+        </p:spPr>
+        <p:style>
+          <a:lnRef idx="1">
+            <a:schemeClr val="accent1"/>
+          </a:lnRef>
+          <a:fillRef idx="3">
+            <a:schemeClr val="accent1"/>
+          </a:fillRef>
+          <a:effectRef idx="2">
+            <a:schemeClr val="accent1"/>
+          </a:effectRef>
+          <a:fontRef idx="minor">
+            <a:schemeClr val="lt1"/>
+          </a:fontRef>
+        </p:style>
+        <p:txBody>
+          <a:bodyPr rtlCol="0" anchor="ctr" wrap="square"/>
+          <a:lstStyle/>
+          <a:p>
+            <a:pPr algn="ctr"/>
+          </a:p>
+        </p:txBody>
+      </p:sp>
+      <p:sp>
+        <p:nvSpPr>
+          <p:cNvPr id="17" name="TextBox 16"/>
+          <p:cNvSpPr txBox="1"/>
+          <p:nvPr/>
+        </p:nvSpPr>
+        <p:spPr>
+          <a:xfrm>
+            <a:off x="6406743" y="2447269"/>
+            <a:ext cx="2197531" cy="592836"/>
+          </a:xfrm>
+          <a:prstGeom prst="rect">
+            <a:avLst/>
+          </a:prstGeom>
+          <a:noFill/>
+        </p:spPr>
+        <p:txBody>
+          <a:bodyPr wrap="square" anchor="t" lIns="0" rIns="0" tIns="0" bIns="0">
+            <a:spAutoFit/>
+          </a:bodyPr>
+          <a:lstStyle/>
+          <a:p>
+            <a:pPr algn="l">
+              <a:lnSpc>
+                <a:spcPct val="100000"/>
+              </a:lnSpc>
+            </a:pPr>
+            <a:r>
+              <a:rPr sz="1500" b="1">
+                <a:solidFill>
+                  <a:srgbClr val="20242C"/>
+                </a:solidFill>
+                <a:latin typeface="Microsoft YaHei"/>
+              </a:rPr>
+              <a:t>③ 严格前沿与工程备选要分开看</a:t>
+            </a:r>
+          </a:p>
+        </p:txBody>
+      </p:sp>
+      <p:sp>
+        <p:nvSpPr>
+          <p:cNvPr id="18" name="TextBox 17"/>
+          <p:cNvSpPr txBox="1"/>
+          <p:nvPr/>
+        </p:nvSpPr>
+        <p:spPr>
+          <a:xfrm>
+            <a:off x="6406743" y="3122401"/>
+            <a:ext cx="2197531" cy="1928408"/>
+          </a:xfrm>
+          <a:prstGeom prst="rect">
+            <a:avLst/>
+          </a:prstGeom>
+          <a:noFill/>
+        </p:spPr>
+        <p:txBody>
+          <a:bodyPr wrap="square" anchor="t" lIns="0" rIns="0" tIns="0" bIns="0">
+            <a:spAutoFit/>
+          </a:bodyPr>
+          <a:lstStyle/>
+          <a:p>
+            <a:pPr algn="l">
+              <a:lnSpc>
+                <a:spcPct val="102000"/>
+              </a:lnSpc>
+            </a:pPr>
+            <a:r>
+              <a:rPr sz="1200" b="0">
+                <a:solidFill>
+                  <a:srgbClr val="20242C"/>
+                </a:solidFill>
+                <a:latin typeface="Microsoft YaHei"/>
+              </a:rPr>
+              <a:t>按「带宽 × 公平性 / 硬件」计算，严格前沿是 S16。I-tag、S19 / S20、S22 虽不在严格前沿上，但分别落在环上本地仲裁、requester 动态窗口和跨节点进度仲裁三个不同改动层。</a:t>
+            </a:r>
+          </a:p>
+          <a:p>
+            <a:pPr algn="l">
+              <a:lnSpc>
+                <a:spcPct val="102000"/>
+              </a:lnSpc>
+              <a:spcBef>
+                <a:spcPts val="600"/>
+              </a:spcBef>
+            </a:pPr>
+            <a:r>
+              <a:rPr sz="1200" b="1">
+                <a:solidFill>
+                  <a:srgbClr val="D20A2E"/>
+                </a:solidFill>
+                <a:latin typeface="Microsoft YaHei"/>
+              </a:rPr>
+              <a:t>被数值支配，不等于在工程约束下没有选择价值。</a:t>
+            </a:r>
+          </a:p>
+        </p:txBody>
+      </p:sp>
+      <p:sp>
+        <p:nvSpPr>
+          <p:cNvPr id="19" name="Rectangle 18"/>
+          <p:cNvSpPr/>
+          <p:nvPr/>
+        </p:nvSpPr>
+        <p:spPr>
+          <a:xfrm>
+            <a:off x="9024899" y="2231136"/>
+            <a:ext cx="2599867" cy="2999231"/>
+          </a:xfrm>
+          <a:prstGeom prst="rect">
+            <a:avLst/>
+          </a:prstGeom>
+          <a:solidFill>
+            <a:srgbClr val="FFFFFF"/>
+          </a:solidFill>
+          <a:ln w="19050">
+            <a:solidFill>
+              <a:srgbClr val="D20A2E"/>
+            </a:solidFill>
+          </a:ln>
+          <a:effectLst/>
+        </p:spPr>
+        <p:style>
+          <a:lnRef idx="1">
+            <a:schemeClr val="accent1"/>
+          </a:lnRef>
+          <a:fillRef idx="3">
+            <a:schemeClr val="accent1"/>
+          </a:fillRef>
+          <a:effectRef idx="2">
+            <a:schemeClr val="accent1"/>
+          </a:effectRef>
+          <a:fontRef idx="minor">
+            <a:schemeClr val="lt1"/>
+          </a:fontRef>
+        </p:style>
+        <p:txBody>
+          <a:bodyPr rtlCol="0" anchor="ctr" wrap="square"/>
+          <a:lstStyle/>
+          <a:p>
+            <a:pPr algn="ctr"/>
+          </a:p>
+        </p:txBody>
+      </p:sp>
+      <p:sp>
+        <p:nvSpPr>
+          <p:cNvPr id="20" name="TextBox 19"/>
+          <p:cNvSpPr txBox="1"/>
+          <p:nvPr/>
+        </p:nvSpPr>
+        <p:spPr>
+          <a:xfrm>
+            <a:off x="9226067" y="2508462"/>
+            <a:ext cx="2197531" cy="592836"/>
+          </a:xfrm>
+          <a:prstGeom prst="rect">
+            <a:avLst/>
+          </a:prstGeom>
+          <a:noFill/>
+        </p:spPr>
+        <p:txBody>
+          <a:bodyPr wrap="square" anchor="t" lIns="0" rIns="0" tIns="0" bIns="0">
+            <a:spAutoFit/>
+          </a:bodyPr>
+          <a:lstStyle/>
+          <a:p>
+            <a:pPr algn="l">
+              <a:lnSpc>
+                <a:spcPct val="100000"/>
+              </a:lnSpc>
+            </a:pPr>
+            <a:r>
+              <a:rPr sz="1500" b="1">
+                <a:solidFill>
+                  <a:srgbClr val="D20A2E"/>
+                </a:solidFill>
+                <a:latin typeface="Microsoft YaHei"/>
+              </a:rPr>
+              <a:t>④ 两头能同时拿住，但层次决定落点</a:t>
+            </a:r>
+          </a:p>
+        </p:txBody>
+      </p:sp>
+      <p:sp>
+        <p:nvSpPr>
+          <p:cNvPr id="21" name="TextBox 20"/>
+          <p:cNvSpPr txBox="1"/>
+          <p:nvPr/>
+        </p:nvSpPr>
+        <p:spPr>
+          <a:xfrm>
+            <a:off x="9226067" y="3183594"/>
+            <a:ext cx="2197531" cy="1806023"/>
+          </a:xfrm>
+          <a:prstGeom prst="rect">
+            <a:avLst/>
+          </a:prstGeom>
+          <a:noFill/>
+        </p:spPr>
+        <p:txBody>
+          <a:bodyPr wrap="square" anchor="t" lIns="0" rIns="0" tIns="0" bIns="0">
+            <a:spAutoFit/>
+          </a:bodyPr>
+          <a:lstStyle/>
+          <a:p>
+            <a:pPr algn="l">
+              <a:lnSpc>
+                <a:spcPct val="102000"/>
+              </a:lnSpc>
+            </a:pPr>
+            <a:r>
+              <a:rPr sz="950" b="0">
+                <a:solidFill>
+                  <a:srgbClr val="20242C"/>
+                </a:solidFill>
+                <a:latin typeface="Microsoft YaHei"/>
+              </a:rPr>
+              <a:t>S16 把决策点放回 completer：Jain 0.92818 → 0.98466，max/min → 1.0001，带宽只让 0.39%，硬件 900 FF‑eq。</a:t>
+            </a:r>
+          </a:p>
+          <a:p>
+            <a:pPr algn="l">
+              <a:lnSpc>
+                <a:spcPct val="102000"/>
+              </a:lnSpc>
+              <a:spcBef>
+                <a:spcPts val="600"/>
+              </a:spcBef>
+            </a:pPr>
+            <a:r>
+              <a:rPr sz="950" b="0">
+                <a:solidFill>
+                  <a:srgbClr val="20242C"/>
+                </a:solidFill>
+                <a:latin typeface="Microsoft YaHei"/>
+              </a:rPr>
+              <a:t>它需要改 HA 的授权调度。若该层不可改，可退到环上本地 I-tag、requester 窗口 S19 / S20，或只改环上仲裁的 S22。</a:t>
+            </a:r>
+          </a:p>
+          <a:p>
+            <a:pPr algn="l">
+              <a:lnSpc>
+                <a:spcPct val="102000"/>
+              </a:lnSpc>
+              <a:spcBef>
+                <a:spcPts val="600"/>
+              </a:spcBef>
+            </a:pPr>
+            <a:r>
+              <a:rPr sz="950" b="1">
+                <a:solidFill>
+                  <a:srgbClr val="D20A2E"/>
+                </a:solidFill>
+                <a:latin typeface="Microsoft YaHei"/>
+              </a:rPr>
+              <a:t>最终选择首先由「哪一层能改」决定，其次才是数字。</a:t>
+            </a:r>
+          </a:p>
+        </p:txBody>
+      </p:sp>
+      <p:sp>
+        <p:nvSpPr>
+          <p:cNvPr id="22" name="Rectangle 21"/>
+          <p:cNvSpPr/>
+          <p:nvPr/>
+        </p:nvSpPr>
+        <p:spPr>
+          <a:xfrm>
+            <a:off x="566928" y="5468112"/>
+            <a:ext cx="11057839" cy="859536"/>
+          </a:xfrm>
+          <a:prstGeom prst="rect">
+            <a:avLst/>
+          </a:prstGeom>
+          <a:solidFill>
+            <a:srgbClr val="D20A2E"/>
+          </a:solidFill>
+          <a:ln>
+            <a:noFill/>
+          </a:ln>
+          <a:effectLst/>
+        </p:spPr>
+        <p:style>
+          <a:lnRef idx="1">
+            <a:schemeClr val="accent1"/>
+          </a:lnRef>
+          <a:fillRef idx="3">
+            <a:schemeClr val="accent1"/>
+          </a:fillRef>
+          <a:effectRef idx="2">
+            <a:schemeClr val="accent1"/>
+          </a:effectRef>
+          <a:fontRef idx="minor">
+            <a:schemeClr val="lt1"/>
+          </a:fontRef>
+        </p:style>
+        <p:txBody>
+          <a:bodyPr rtlCol="0" anchor="ctr" wrap="square"/>
+          <a:lstStyle/>
+          <a:p>
+            <a:pPr algn="ctr"/>
+          </a:p>
+        </p:txBody>
+      </p:sp>
+      <p:sp>
+        <p:nvSpPr>
+          <p:cNvPr id="23" name="TextBox 22"/>
+          <p:cNvSpPr txBox="1"/>
+          <p:nvPr/>
+        </p:nvSpPr>
+        <p:spPr>
+          <a:xfrm>
+            <a:off x="877824" y="5559552"/>
+            <a:ext cx="10436047" cy="676656"/>
+          </a:xfrm>
+          <a:prstGeom prst="rect">
+            <a:avLst/>
+          </a:prstGeom>
+          <a:noFill/>
+        </p:spPr>
+        <p:txBody>
+          <a:bodyPr wrap="square" anchor="ctr" lIns="0" rIns="0" tIns="0" bIns="0">
+            <a:spAutoFit/>
+          </a:bodyPr>
+          <a:lstStyle/>
+          <a:p>
+            <a:pPr algn="l">
+              <a:lnSpc>
+                <a:spcPct val="104000"/>
+              </a:lnSpc>
+            </a:pPr>
+            <a:r>
+              <a:rPr sz="1300" b="0">
+                <a:solidFill>
+                  <a:srgbClr val="FFFFFF"/>
+                </a:solidFill>
+                <a:latin typeface="Microsoft YaHei"/>
+              </a:rPr>
+              <a:t>统一结论：不要把所有机制压成一个排名。S16、I-tag、S19 / S20、S22 分别交换 completer、环上本地、requester、跨节点仲裁的改动权限；先确定可改边界，再在对应层内选性能最好的方案。</a:t>
+            </a:r>
+          </a:p>
+        </p:txBody>
+      </p:sp>
+      <p:sp>
+        <p:nvSpPr>
+          <p:cNvPr id="24" name="TextBox 23"/>
+          <p:cNvSpPr txBox="1"/>
+          <p:nvPr/>
+        </p:nvSpPr>
+        <p:spPr>
+          <a:xfrm>
+            <a:off x="566928" y="6455664"/>
+            <a:ext cx="1463040" cy="219456"/>
+          </a:xfrm>
+          <a:prstGeom prst="rect">
+            <a:avLst/>
+          </a:prstGeom>
+          <a:noFill/>
+        </p:spPr>
+        <p:txBody>
+          <a:bodyPr wrap="square" anchor="t" lIns="0" rIns="0" tIns="0" bIns="0">
+            <a:spAutoFit/>
+          </a:bodyPr>
+          <a:lstStyle/>
+          <a:p>
+            <a:pPr algn="l">
+              <a:lnSpc>
+                <a:spcPct val="100000"/>
+              </a:lnSpc>
+            </a:pPr>
+            <a:r>
+              <a:rPr sz="1000" b="0">
+                <a:solidFill>
+                  <a:srgbClr val="A8B0BA"/>
+                </a:solidFill>
+                <a:latin typeface="Arial"/>
+              </a:rPr>
+              <a:t>32 / 34</a:t>
+            </a:r>
+          </a:p>
+        </p:txBody>
+      </p:sp>
+    </p:spTree>
+  </p:cSld>
+  <p:clrMapOvr>
+    <a:masterClrMapping/>
+  </p:clrMapOvr>
+</p:sld>
+</file>
+
+<file path=ppt/slides/slide33.xml><?xml version="1.0" encoding="utf-8"?>
+<p:sld xmlns:a="http://schemas.openxmlformats.org/drawingml/2006/main" xmlns:p="http://schemas.openxmlformats.org/presentationml/2006/main" xmlns:r="http://schemas.openxmlformats.org/officeDocument/2006/relationships">
+  <p:cSld>
+    <p:spTree>
+      <p:nvGrpSpPr>
+        <p:cNvPr id="1" name=""/>
+        <p:cNvGrpSpPr/>
+        <p:nvPr/>
+      </p:nvGrpSpPr>
+      <p:grpSpPr/>
+      <p:sp>
+        <p:nvSpPr>
+          <p:cNvPr id="2" name="Rectangle 1"/>
+          <p:cNvSpPr/>
+          <p:nvPr/>
+        </p:nvSpPr>
+        <p:spPr>
+          <a:xfrm>
+            <a:off x="0" y="0"/>
+            <a:ext cx="12191695" cy="6858000"/>
+          </a:xfrm>
+          <a:prstGeom prst="rect">
+            <a:avLst/>
+          </a:prstGeom>
+          <a:solidFill>
+            <a:srgbClr val="F4F7FB"/>
+          </a:solidFill>
+          <a:ln>
+            <a:noFill/>
+          </a:ln>
+          <a:effectLst/>
+        </p:spPr>
+        <p:style>
+          <a:lnRef idx="1">
+            <a:schemeClr val="accent1"/>
+          </a:lnRef>
+          <a:fillRef idx="3">
+            <a:schemeClr val="accent1"/>
+          </a:fillRef>
+          <a:effectRef idx="2">
+            <a:schemeClr val="accent1"/>
+          </a:effectRef>
+          <a:fontRef idx="minor">
+            <a:schemeClr val="lt1"/>
+          </a:fontRef>
+        </p:style>
+        <p:txBody>
+          <a:bodyPr rtlCol="0" anchor="ctr" wrap="square"/>
+          <a:lstStyle/>
+          <a:p>
+            <a:pPr algn="ctr"/>
+          </a:p>
+        </p:txBody>
+      </p:sp>
+      <p:sp>
+        <p:nvSpPr>
+          <p:cNvPr id="3" name="Rectangle 2"/>
+          <p:cNvSpPr/>
+          <p:nvPr/>
+        </p:nvSpPr>
+        <p:spPr>
+          <a:xfrm>
+            <a:off x="566928" y="301752"/>
+            <a:ext cx="137160" cy="137160"/>
+          </a:xfrm>
+          <a:prstGeom prst="rect">
+            <a:avLst/>
+          </a:prstGeom>
+          <a:solidFill>
+            <a:srgbClr val="D20A2E"/>
+          </a:solidFill>
+          <a:ln>
+            <a:noFill/>
+          </a:ln>
+          <a:effectLst/>
+        </p:spPr>
+        <p:style>
+          <a:lnRef idx="1">
+            <a:schemeClr val="accent1"/>
+          </a:lnRef>
+          <a:fillRef idx="3">
+            <a:schemeClr val="accent1"/>
+          </a:fillRef>
+          <a:effectRef idx="2">
+            <a:schemeClr val="accent1"/>
+          </a:effectRef>
+          <a:fontRef idx="minor">
+            <a:schemeClr val="lt1"/>
+          </a:fontRef>
+        </p:style>
+        <p:txBody>
+          <a:bodyPr rtlCol="0" anchor="ctr" wrap="square"/>
+          <a:lstStyle/>
+          <a:p>
+            <a:pPr algn="ctr"/>
+          </a:p>
+        </p:txBody>
+      </p:sp>
+      <p:sp>
+        <p:nvSpPr>
+          <p:cNvPr id="4" name="TextBox 3"/>
+          <p:cNvSpPr txBox="1"/>
+          <p:nvPr/>
+        </p:nvSpPr>
+        <p:spPr>
+          <a:xfrm>
+            <a:off x="804672" y="265176"/>
+            <a:ext cx="9229039" cy="237744"/>
+          </a:xfrm>
+          <a:prstGeom prst="rect">
+            <a:avLst/>
+          </a:prstGeom>
+          <a:noFill/>
+        </p:spPr>
+        <p:txBody>
+          <a:bodyPr wrap="square" anchor="t" lIns="0" rIns="0" tIns="0" bIns="0">
+            <a:spAutoFit/>
+          </a:bodyPr>
+          <a:lstStyle/>
+          <a:p>
+            <a:pPr algn="l">
+              <a:lnSpc>
+                <a:spcPct val="100000"/>
+              </a:lnSpc>
+            </a:pPr>
+            <a:r>
+              <a:rPr sz="1150" b="1">
+                <a:solidFill>
+                  <a:srgbClr val="667080"/>
+                </a:solidFill>
+                <a:latin typeface="Microsoft YaHei"/>
+              </a:rPr>
+              <a:t>建议</a:t>
+            </a:r>
+          </a:p>
+        </p:txBody>
+      </p:sp>
+      <p:sp>
+        <p:nvSpPr>
+          <p:cNvPr id="5" name="Rectangle 4"/>
+          <p:cNvSpPr/>
+          <p:nvPr/>
+        </p:nvSpPr>
+        <p:spPr>
+          <a:xfrm>
+            <a:off x="566928" y="640080"/>
+            <a:ext cx="11057839" cy="10058"/>
+          </a:xfrm>
+          <a:prstGeom prst="rect">
+            <a:avLst/>
+          </a:prstGeom>
+          <a:solidFill>
+            <a:srgbClr val="DCE3EA"/>
+          </a:solidFill>
+          <a:ln>
+            <a:noFill/>
+          </a:ln>
+          <a:effectLst/>
+        </p:spPr>
+        <p:style>
+          <a:lnRef idx="1">
+            <a:schemeClr val="accent1"/>
+          </a:lnRef>
+          <a:fillRef idx="3">
+            <a:schemeClr val="accent1"/>
+          </a:fillRef>
+          <a:effectRef idx="2">
+            <a:schemeClr val="accent1"/>
+          </a:effectRef>
+          <a:fontRef idx="minor">
+            <a:schemeClr val="lt1"/>
+          </a:fontRef>
+        </p:style>
+        <p:txBody>
+          <a:bodyPr rtlCol="0" anchor="ctr" wrap="square"/>
+          <a:lstStyle/>
+          <a:p>
+            <a:pPr algn="ctr"/>
+          </a:p>
+        </p:txBody>
+      </p:sp>
+      <p:sp>
+        <p:nvSpPr>
+          <p:cNvPr id="6" name="Rectangle 5"/>
+          <p:cNvSpPr/>
+          <p:nvPr/>
+        </p:nvSpPr>
+        <p:spPr>
+          <a:xfrm>
+            <a:off x="10143439" y="274320"/>
+            <a:ext cx="182880" cy="182880"/>
+          </a:xfrm>
+          <a:prstGeom prst="rect">
+            <a:avLst/>
+          </a:prstGeom>
+          <a:solidFill>
+            <a:srgbClr val="D20A2E"/>
+          </a:solidFill>
+          <a:ln>
+            <a:noFill/>
+          </a:ln>
+          <a:effectLst/>
+        </p:spPr>
+        <p:style>
+          <a:lnRef idx="1">
+            <a:schemeClr val="accent1"/>
+          </a:lnRef>
+          <a:fillRef idx="3">
+            <a:schemeClr val="accent1"/>
+          </a:fillRef>
+          <a:effectRef idx="2">
+            <a:schemeClr val="accent1"/>
+          </a:effectRef>
+          <a:fontRef idx="minor">
+            <a:schemeClr val="lt1"/>
+          </a:fontRef>
+        </p:style>
+        <p:txBody>
+          <a:bodyPr rtlCol="0" anchor="ctr" wrap="square"/>
+          <a:lstStyle/>
+          <a:p>
+            <a:pPr algn="ctr"/>
+          </a:p>
+        </p:txBody>
+      </p:sp>
+      <p:sp>
+        <p:nvSpPr>
+          <p:cNvPr id="7" name="TextBox 6"/>
+          <p:cNvSpPr txBox="1"/>
+          <p:nvPr/>
+        </p:nvSpPr>
+        <p:spPr>
+          <a:xfrm>
+            <a:off x="10399471" y="246888"/>
+            <a:ext cx="1225296" cy="256032"/>
+          </a:xfrm>
+          <a:prstGeom prst="rect">
+            <a:avLst/>
+          </a:prstGeom>
+          <a:noFill/>
+        </p:spPr>
+        <p:txBody>
+          <a:bodyPr wrap="square" anchor="t" lIns="0" rIns="0" tIns="0" bIns="0">
+            <a:spAutoFit/>
+          </a:bodyPr>
+          <a:lstStyle/>
+          <a:p>
+            <a:pPr algn="l">
+              <a:lnSpc>
+                <a:spcPct val="100000"/>
+              </a:lnSpc>
+            </a:pPr>
+            <a:r>
+              <a:rPr sz="1300" b="1">
+                <a:solidFill>
+                  <a:srgbClr val="20242C"/>
+                </a:solidFill>
+                <a:latin typeface="Arial"/>
+              </a:rPr>
+              <a:t>HUAWEI</a:t>
+            </a:r>
+          </a:p>
+        </p:txBody>
+      </p:sp>
+      <p:sp>
+        <p:nvSpPr>
+          <p:cNvPr id="8" name="TextBox 7"/>
+          <p:cNvSpPr txBox="1"/>
+          <p:nvPr/>
+        </p:nvSpPr>
+        <p:spPr>
+          <a:xfrm>
+            <a:off x="566928" y="1060704"/>
+            <a:ext cx="11057839" cy="237744"/>
+          </a:xfrm>
+          <a:prstGeom prst="rect">
+            <a:avLst/>
+          </a:prstGeom>
+          <a:noFill/>
+        </p:spPr>
+        <p:txBody>
+          <a:bodyPr wrap="square" anchor="t" lIns="0" rIns="0" tIns="0" bIns="0">
+            <a:spAutoFit/>
+          </a:bodyPr>
+          <a:lstStyle/>
+          <a:p>
+            <a:pPr algn="l">
+              <a:lnSpc>
+                <a:spcPct val="100000"/>
+              </a:lnSpc>
+            </a:pPr>
+            <a:r>
+              <a:rPr sz="1050" b="1">
+                <a:solidFill>
+                  <a:srgbClr val="D20A2E"/>
+                </a:solidFill>
+                <a:latin typeface="Arial"/>
+              </a:rPr>
+              <a:t>R E C O M M E N D A T I O N</a:t>
+            </a:r>
+          </a:p>
+        </p:txBody>
+      </p:sp>
+      <p:sp>
+        <p:nvSpPr>
+          <p:cNvPr id="9" name="TextBox 8"/>
+          <p:cNvSpPr txBox="1"/>
+          <p:nvPr/>
+        </p:nvSpPr>
+        <p:spPr>
+          <a:xfrm>
+            <a:off x="566928" y="1353312"/>
+            <a:ext cx="11057839" cy="658368"/>
+          </a:xfrm>
+          <a:prstGeom prst="rect">
+            <a:avLst/>
+          </a:prstGeom>
+          <a:noFill/>
+        </p:spPr>
+        <p:txBody>
+          <a:bodyPr wrap="square" anchor="t" lIns="0" rIns="0" tIns="0" bIns="0">
+            <a:spAutoFit/>
+          </a:bodyPr>
+          <a:lstStyle/>
+          <a:p>
+            <a:pPr algn="l">
+              <a:lnSpc>
+                <a:spcPct val="100000"/>
+              </a:lnSpc>
+            </a:pPr>
+            <a:r>
+              <a:rPr sz="3000" b="1">
+                <a:solidFill>
+                  <a:srgbClr val="20242C"/>
+                </a:solidFill>
+                <a:latin typeface="Microsoft YaHei"/>
+              </a:rPr>
+              <a:t>先收在飞，再按可改层次选择</a:t>
+            </a:r>
+          </a:p>
+        </p:txBody>
+      </p:sp>
+      <p:sp>
+        <p:nvSpPr>
+          <p:cNvPr id="10" name="Rectangle 9"/>
+          <p:cNvSpPr/>
+          <p:nvPr/>
+        </p:nvSpPr>
+        <p:spPr>
+          <a:xfrm>
+            <a:off x="566928" y="2194560"/>
+            <a:ext cx="2599867" cy="3017520"/>
+          </a:xfrm>
+          <a:prstGeom prst="rect">
+            <a:avLst/>
+          </a:prstGeom>
+          <a:solidFill>
+            <a:srgbClr val="FFFFFF"/>
+          </a:solidFill>
+          <a:ln w="12700">
+            <a:solidFill>
+              <a:srgbClr val="DCE3EA"/>
+            </a:solidFill>
+          </a:ln>
+          <a:effectLst/>
+        </p:spPr>
+        <p:style>
+          <a:lnRef idx="1">
+            <a:schemeClr val="accent1"/>
+          </a:lnRef>
+          <a:fillRef idx="3">
+            <a:schemeClr val="accent1"/>
+          </a:fillRef>
+          <a:effectRef idx="2">
+            <a:schemeClr val="accent1"/>
+          </a:effectRef>
+          <a:fontRef idx="minor">
+            <a:schemeClr val="lt1"/>
+          </a:fontRef>
+        </p:style>
+        <p:txBody>
+          <a:bodyPr rtlCol="0" anchor="ctr" wrap="square"/>
+          <a:lstStyle/>
+          <a:p>
+            <a:pPr algn="ctr"/>
+          </a:p>
+        </p:txBody>
+      </p:sp>
+      <p:sp>
+        <p:nvSpPr>
+          <p:cNvPr id="11" name="Oval 10"/>
+          <p:cNvSpPr/>
+          <p:nvPr/>
+        </p:nvSpPr>
+        <p:spPr>
+          <a:xfrm>
+            <a:off x="786384" y="2414016"/>
+            <a:ext cx="384048" cy="384048"/>
+          </a:xfrm>
+          <a:prstGeom prst="ellipse">
+            <a:avLst/>
+          </a:prstGeom>
+          <a:solidFill>
+            <a:srgbClr val="D20A2E"/>
+          </a:solidFill>
+          <a:ln>
+            <a:noFill/>
+          </a:ln>
+          <a:effectLst/>
+        </p:spPr>
+        <p:style>
+          <a:lnRef idx="1">
+            <a:schemeClr val="accent1"/>
+          </a:lnRef>
+          <a:fillRef idx="3">
+            <a:schemeClr val="accent1"/>
+          </a:fillRef>
+          <a:effectRef idx="2">
+            <a:schemeClr val="accent1"/>
+          </a:effectRef>
+          <a:fontRef idx="minor">
+            <a:schemeClr val="lt1"/>
+          </a:fontRef>
+        </p:style>
+        <p:txBody>
+          <a:bodyPr rtlCol="0" anchor="ctr" wrap="square"/>
+          <a:lstStyle/>
+          <a:p>
+            <a:pPr algn="ctr"/>
+          </a:p>
+        </p:txBody>
+      </p:sp>
+      <p:sp>
+        <p:nvSpPr>
+          <p:cNvPr id="12" name="TextBox 11"/>
+          <p:cNvSpPr txBox="1"/>
+          <p:nvPr/>
+        </p:nvSpPr>
+        <p:spPr>
+          <a:xfrm>
+            <a:off x="786384" y="2496312"/>
+            <a:ext cx="384048" cy="237744"/>
+          </a:xfrm>
+          <a:prstGeom prst="rect">
+            <a:avLst/>
+          </a:prstGeom>
+          <a:noFill/>
+        </p:spPr>
+        <p:txBody>
+          <a:bodyPr wrap="square" anchor="t" lIns="0" rIns="0" tIns="0" bIns="0">
+            <a:spAutoFit/>
+          </a:bodyPr>
+          <a:lstStyle/>
+          <a:p>
+            <a:pPr algn="ctr">
+              <a:lnSpc>
+                <a:spcPct val="100000"/>
+              </a:lnSpc>
+            </a:pPr>
+            <a:r>
+              <a:rPr sz="1150" b="1">
+                <a:solidFill>
+                  <a:srgbClr val="FFFFFF"/>
+                </a:solidFill>
+                <a:latin typeface="Arial"/>
+              </a:rPr>
+              <a:t>01</a:t>
+            </a:r>
+          </a:p>
+        </p:txBody>
+      </p:sp>
+      <p:sp>
+        <p:nvSpPr>
+          <p:cNvPr id="13" name="TextBox 12"/>
+          <p:cNvSpPr txBox="1"/>
+          <p:nvPr/>
+        </p:nvSpPr>
+        <p:spPr>
+          <a:xfrm>
+            <a:off x="786384" y="2968706"/>
+            <a:ext cx="2160955" cy="592836"/>
+          </a:xfrm>
+          <a:prstGeom prst="rect">
+            <a:avLst/>
+          </a:prstGeom>
+          <a:noFill/>
+        </p:spPr>
+        <p:txBody>
+          <a:bodyPr wrap="square" anchor="t" lIns="0" rIns="0" tIns="0" bIns="0">
+            <a:spAutoFit/>
+          </a:bodyPr>
+          <a:lstStyle/>
+          <a:p>
+            <a:pPr algn="l">
+              <a:lnSpc>
+                <a:spcPct val="100000"/>
+              </a:lnSpc>
+            </a:pPr>
+            <a:r>
+              <a:rPr sz="1500" b="1">
+                <a:solidFill>
+                  <a:srgbClr val="20242C"/>
+                </a:solidFill>
+                <a:latin typeface="Microsoft YaHei"/>
+              </a:rPr>
+              <a:t>第一步 · 0 FF‑eq · 无条件</a:t>
+            </a:r>
+          </a:p>
+        </p:txBody>
+      </p:sp>
+      <p:sp>
+        <p:nvSpPr>
+          <p:cNvPr id="14" name="TextBox 13"/>
+          <p:cNvSpPr txBox="1"/>
+          <p:nvPr/>
+        </p:nvSpPr>
+        <p:spPr>
+          <a:xfrm>
+            <a:off x="786384" y="3643838"/>
+            <a:ext cx="2160955" cy="1361023"/>
+          </a:xfrm>
+          <a:prstGeom prst="rect">
+            <a:avLst/>
+          </a:prstGeom>
+          <a:noFill/>
+        </p:spPr>
+        <p:txBody>
+          <a:bodyPr wrap="square" anchor="t" lIns="0" rIns="0" tIns="0" bIns="0">
+            <a:spAutoFit/>
+          </a:bodyPr>
+          <a:lstStyle/>
+          <a:p>
+            <a:pPr algn="l">
+              <a:lnSpc>
+                <a:spcPct val="102000"/>
+              </a:lnSpc>
+            </a:pPr>
+            <a:r>
+              <a:rPr sz="1100" b="1">
+                <a:solidFill>
+                  <a:srgbClr val="20242C"/>
+                </a:solidFill>
+                <a:latin typeface="Microsoft YaHei"/>
+              </a:rPr>
+              <a:t>每核在飞上限收到 32。</a:t>
+            </a:r>
+            <a:r>
+              <a:rPr sz="1100" b="0">
+                <a:solidFill>
+                  <a:srgbClr val="20242C"/>
+                </a:solidFill>
+                <a:latin typeface="Microsoft YaHei"/>
+              </a:rPr>
+              <a:t>零硬件、无流量先验：覆盖最坏 89 拍 RTT 只需约 26 笔，再多就只是在已经饱和的环上排队。</a:t>
+            </a:r>
+          </a:p>
+          <a:p>
+            <a:pPr algn="l">
+              <a:lnSpc>
+                <a:spcPct val="102000"/>
+              </a:lnSpc>
+              <a:spcBef>
+                <a:spcPts val="600"/>
+              </a:spcBef>
+            </a:pPr>
+            <a:r>
+              <a:rPr sz="1100" b="1">
+                <a:solidFill>
+                  <a:srgbClr val="D20A2E"/>
+                </a:solidFill>
+                <a:latin typeface="Microsoft YaHei"/>
+              </a:rPr>
+              <a:t>uniform 绕环重发从上千拍降到 5 拍；非均匀流量带宽 +33%。</a:t>
+            </a:r>
+          </a:p>
+        </p:txBody>
+      </p:sp>
+      <p:sp>
+        <p:nvSpPr>
+          <p:cNvPr id="15" name="Rectangle 14"/>
+          <p:cNvSpPr/>
+          <p:nvPr/>
+        </p:nvSpPr>
+        <p:spPr>
+          <a:xfrm>
+            <a:off x="3386251" y="2194560"/>
+            <a:ext cx="2599867" cy="3017520"/>
+          </a:xfrm>
+          <a:prstGeom prst="rect">
+            <a:avLst/>
+          </a:prstGeom>
+          <a:solidFill>
+            <a:srgbClr val="FFFFFF"/>
+          </a:solidFill>
+          <a:ln w="19050">
+            <a:solidFill>
+              <a:srgbClr val="D20A2E"/>
+            </a:solidFill>
+          </a:ln>
+          <a:effectLst/>
+        </p:spPr>
+        <p:style>
+          <a:lnRef idx="1">
+            <a:schemeClr val="accent1"/>
+          </a:lnRef>
+          <a:fillRef idx="3">
+            <a:schemeClr val="accent1"/>
+          </a:fillRef>
+          <a:effectRef idx="2">
+            <a:schemeClr val="accent1"/>
+          </a:effectRef>
+          <a:fontRef idx="minor">
+            <a:schemeClr val="lt1"/>
+          </a:fontRef>
+        </p:style>
+        <p:txBody>
+          <a:bodyPr rtlCol="0" anchor="ctr" wrap="square"/>
+          <a:lstStyle/>
+          <a:p>
+            <a:pPr algn="ctr"/>
+          </a:p>
+        </p:txBody>
+      </p:sp>
+      <p:sp>
+        <p:nvSpPr>
+          <p:cNvPr id="16" name="Oval 15"/>
+          <p:cNvSpPr/>
+          <p:nvPr/>
+        </p:nvSpPr>
+        <p:spPr>
+          <a:xfrm>
+            <a:off x="3605707" y="2414016"/>
+            <a:ext cx="384048" cy="384048"/>
+          </a:xfrm>
+          <a:prstGeom prst="ellipse">
+            <a:avLst/>
+          </a:prstGeom>
+          <a:solidFill>
+            <a:srgbClr val="D20A2E"/>
+          </a:solidFill>
+          <a:ln>
+            <a:noFill/>
+          </a:ln>
+          <a:effectLst/>
+        </p:spPr>
+        <p:style>
+          <a:lnRef idx="1">
+            <a:schemeClr val="accent1"/>
+          </a:lnRef>
+          <a:fillRef idx="3">
+            <a:schemeClr val="accent1"/>
+          </a:fillRef>
+          <a:effectRef idx="2">
+            <a:schemeClr val="accent1"/>
+          </a:effectRef>
+          <a:fontRef idx="minor">
+            <a:schemeClr val="lt1"/>
+          </a:fontRef>
+        </p:style>
+        <p:txBody>
+          <a:bodyPr rtlCol="0" anchor="ctr" wrap="square"/>
+          <a:lstStyle/>
+          <a:p>
+            <a:pPr algn="ctr"/>
+          </a:p>
+        </p:txBody>
+      </p:sp>
+      <p:sp>
+        <p:nvSpPr>
+          <p:cNvPr id="17" name="TextBox 16"/>
+          <p:cNvSpPr txBox="1"/>
+          <p:nvPr/>
+        </p:nvSpPr>
+        <p:spPr>
+          <a:xfrm>
+            <a:off x="3605707" y="2496312"/>
+            <a:ext cx="384048" cy="237744"/>
+          </a:xfrm>
+          <a:prstGeom prst="rect">
+            <a:avLst/>
+          </a:prstGeom>
+          <a:noFill/>
+        </p:spPr>
+        <p:txBody>
+          <a:bodyPr wrap="square" anchor="t" lIns="0" rIns="0" tIns="0" bIns="0">
+            <a:spAutoFit/>
+          </a:bodyPr>
+          <a:lstStyle/>
+          <a:p>
+            <a:pPr algn="ctr">
+              <a:lnSpc>
+                <a:spcPct val="100000"/>
+              </a:lnSpc>
+            </a:pPr>
+            <a:r>
+              <a:rPr sz="1150" b="1">
+                <a:solidFill>
+                  <a:srgbClr val="FFFFFF"/>
+                </a:solidFill>
+                <a:latin typeface="Arial"/>
+              </a:rPr>
+              <a:t>02</a:t>
+            </a:r>
+          </a:p>
+        </p:txBody>
+      </p:sp>
+      <p:sp>
+        <p:nvSpPr>
+          <p:cNvPr id="18" name="TextBox 17"/>
+          <p:cNvSpPr txBox="1"/>
+          <p:nvPr/>
+        </p:nvSpPr>
+        <p:spPr>
+          <a:xfrm>
+            <a:off x="3605707" y="2963978"/>
+            <a:ext cx="2160955" cy="592836"/>
+          </a:xfrm>
+          <a:prstGeom prst="rect">
+            <a:avLst/>
+          </a:prstGeom>
+          <a:noFill/>
+        </p:spPr>
+        <p:txBody>
+          <a:bodyPr wrap="square" anchor="t" lIns="0" rIns="0" tIns="0" bIns="0">
+            <a:spAutoFit/>
+          </a:bodyPr>
+          <a:lstStyle/>
+          <a:p>
+            <a:pPr algn="l">
+              <a:lnSpc>
+                <a:spcPct val="100000"/>
+              </a:lnSpc>
+            </a:pPr>
+            <a:r>
+              <a:rPr sz="1500" b="1">
+                <a:solidFill>
+                  <a:srgbClr val="D20A2E"/>
+                </a:solidFill>
+                <a:latin typeface="Microsoft YaHei"/>
+              </a:rPr>
+              <a:t>completer 可改 · 900 FF‑eq</a:t>
+            </a:r>
+          </a:p>
+        </p:txBody>
+      </p:sp>
+      <p:sp>
+        <p:nvSpPr>
+          <p:cNvPr id="19" name="TextBox 18"/>
+          <p:cNvSpPr txBox="1"/>
+          <p:nvPr/>
+        </p:nvSpPr>
+        <p:spPr>
+          <a:xfrm>
+            <a:off x="3605707" y="3639110"/>
+            <a:ext cx="2160955" cy="1370479"/>
+          </a:xfrm>
+          <a:prstGeom prst="rect">
+            <a:avLst/>
+          </a:prstGeom>
+          <a:noFill/>
+        </p:spPr>
+        <p:txBody>
+          <a:bodyPr wrap="square" anchor="t" lIns="0" rIns="0" tIns="0" bIns="0">
+            <a:spAutoFit/>
+          </a:bodyPr>
+          <a:lstStyle/>
+          <a:p>
+            <a:pPr algn="l">
+              <a:lnSpc>
+                <a:spcPct val="102000"/>
+              </a:lnSpc>
+            </a:pPr>
+            <a:r>
+              <a:rPr sz="950" b="1">
+                <a:solidFill>
+                  <a:srgbClr val="20242C"/>
+                </a:solidFill>
+                <a:latin typeface="Microsoft YaHei"/>
+              </a:rPr>
+              <a:t>S16 授权保留。</a:t>
+            </a:r>
+            <a:r>
+              <a:rPr sz="950" b="0">
+                <a:solidFill>
+                  <a:srgbClr val="20242C"/>
+                </a:solidFill>
+                <a:latin typeface="Microsoft YaHei"/>
+              </a:rPr>
+              <a:t>写侧 Jain 0.92818 → 0.98466、带宽只让 0.39%、非均匀流量拿到 R* 的 99.74%。</a:t>
+            </a:r>
+          </a:p>
+          <a:p>
+            <a:pPr algn="l">
+              <a:lnSpc>
+                <a:spcPct val="102000"/>
+              </a:lnSpc>
+              <a:spcBef>
+                <a:spcPts val="600"/>
+              </a:spcBef>
+            </a:pPr>
+            <a:r>
+              <a:rPr sz="950" b="1">
+                <a:solidFill>
+                  <a:srgbClr val="20242C"/>
+                </a:solidFill>
+                <a:latin typeface="Microsoft YaHei"/>
+              </a:rPr>
+              <a:t>前提</a:t>
+            </a:r>
+            <a:r>
+              <a:rPr sz="950" b="0">
+                <a:solidFill>
+                  <a:srgbClr val="20242C"/>
+                </a:solidFill>
+                <a:latin typeface="Microsoft YaHei"/>
+              </a:rPr>
+              <a:t>：completer 的授权调度可改。线格式与协议状态机不动，但要改 HA 何时给谁发 DBIDResp，须 IP 可改并过一次合规复核。</a:t>
+            </a:r>
+          </a:p>
+        </p:txBody>
+      </p:sp>
+      <p:sp>
+        <p:nvSpPr>
+          <p:cNvPr id="20" name="Rectangle 19"/>
+          <p:cNvSpPr/>
+          <p:nvPr/>
+        </p:nvSpPr>
+        <p:spPr>
+          <a:xfrm>
+            <a:off x="6205575" y="2194560"/>
+            <a:ext cx="2599867" cy="3017520"/>
+          </a:xfrm>
+          <a:prstGeom prst="rect">
+            <a:avLst/>
+          </a:prstGeom>
+          <a:solidFill>
+            <a:srgbClr val="FFFFFF"/>
+          </a:solidFill>
+          <a:ln w="12700">
+            <a:solidFill>
+              <a:srgbClr val="DCE3EA"/>
+            </a:solidFill>
+          </a:ln>
+          <a:effectLst/>
+        </p:spPr>
+        <p:style>
+          <a:lnRef idx="1">
+            <a:schemeClr val="accent1"/>
+          </a:lnRef>
+          <a:fillRef idx="3">
+            <a:schemeClr val="accent1"/>
+          </a:fillRef>
+          <a:effectRef idx="2">
+            <a:schemeClr val="accent1"/>
+          </a:effectRef>
+          <a:fontRef idx="minor">
+            <a:schemeClr val="lt1"/>
+          </a:fontRef>
+        </p:style>
+        <p:txBody>
+          <a:bodyPr rtlCol="0" anchor="ctr" wrap="square"/>
+          <a:lstStyle/>
+          <a:p>
+            <a:pPr algn="ctr"/>
+          </a:p>
+        </p:txBody>
+      </p:sp>
+      <p:sp>
+        <p:nvSpPr>
+          <p:cNvPr id="21" name="Oval 20"/>
+          <p:cNvSpPr/>
+          <p:nvPr/>
+        </p:nvSpPr>
+        <p:spPr>
+          <a:xfrm>
+            <a:off x="6425031" y="2414016"/>
+            <a:ext cx="384048" cy="384048"/>
+          </a:xfrm>
+          <a:prstGeom prst="ellipse">
+            <a:avLst/>
+          </a:prstGeom>
+          <a:solidFill>
+            <a:srgbClr val="D20A2E"/>
+          </a:solidFill>
+          <a:ln>
+            <a:noFill/>
+          </a:ln>
+          <a:effectLst/>
+        </p:spPr>
+        <p:style>
+          <a:lnRef idx="1">
+            <a:schemeClr val="accent1"/>
+          </a:lnRef>
+          <a:fillRef idx="3">
+            <a:schemeClr val="accent1"/>
+          </a:fillRef>
+          <a:effectRef idx="2">
+            <a:schemeClr val="accent1"/>
+          </a:effectRef>
+          <a:fontRef idx="minor">
+            <a:schemeClr val="lt1"/>
+          </a:fontRef>
+        </p:style>
+        <p:txBody>
+          <a:bodyPr rtlCol="0" anchor="ctr" wrap="square"/>
+          <a:lstStyle/>
+          <a:p>
+            <a:pPr algn="ctr"/>
+          </a:p>
+        </p:txBody>
+      </p:sp>
+      <p:sp>
+        <p:nvSpPr>
+          <p:cNvPr id="22" name="TextBox 21"/>
+          <p:cNvSpPr txBox="1"/>
+          <p:nvPr/>
+        </p:nvSpPr>
+        <p:spPr>
+          <a:xfrm>
+            <a:off x="6425031" y="2496312"/>
+            <a:ext cx="384048" cy="237744"/>
+          </a:xfrm>
+          <a:prstGeom prst="rect">
+            <a:avLst/>
+          </a:prstGeom>
+          <a:noFill/>
+        </p:spPr>
+        <p:txBody>
+          <a:bodyPr wrap="square" anchor="t" lIns="0" rIns="0" tIns="0" bIns="0">
+            <a:spAutoFit/>
+          </a:bodyPr>
+          <a:lstStyle/>
+          <a:p>
+            <a:pPr algn="ctr">
+              <a:lnSpc>
+                <a:spcPct val="100000"/>
+              </a:lnSpc>
+            </a:pPr>
+            <a:r>
+              <a:rPr sz="1150" b="1">
+                <a:solidFill>
+                  <a:srgbClr val="FFFFFF"/>
+                </a:solidFill>
+                <a:latin typeface="Arial"/>
+              </a:rPr>
+              <a:t>03</a:t>
+            </a:r>
+          </a:p>
+        </p:txBody>
+      </p:sp>
+      <p:sp>
+        <p:nvSpPr>
+          <p:cNvPr id="23" name="TextBox 22"/>
+          <p:cNvSpPr txBox="1"/>
+          <p:nvPr/>
+        </p:nvSpPr>
+        <p:spPr>
+          <a:xfrm>
+            <a:off x="6425031" y="3025444"/>
+            <a:ext cx="2160955" cy="592836"/>
+          </a:xfrm>
+          <a:prstGeom prst="rect">
+            <a:avLst/>
+          </a:prstGeom>
+          <a:noFill/>
+        </p:spPr>
+        <p:txBody>
+          <a:bodyPr wrap="square" anchor="t" lIns="0" rIns="0" tIns="0" bIns="0">
+            <a:spAutoFit/>
+          </a:bodyPr>
+          <a:lstStyle/>
+          <a:p>
+            <a:pPr algn="l">
+              <a:lnSpc>
+                <a:spcPct val="100000"/>
+              </a:lnSpc>
+            </a:pPr>
+            <a:r>
+              <a:rPr sz="1500" b="1">
+                <a:solidFill>
+                  <a:srgbClr val="20242C"/>
+                </a:solidFill>
+                <a:latin typeface="Microsoft YaHei"/>
+              </a:rPr>
+              <a:t>只改环上仲裁 · 3,120 / 13,920 FF‑eq</a:t>
+            </a:r>
+          </a:p>
+        </p:txBody>
+      </p:sp>
+      <p:sp>
+        <p:nvSpPr>
+          <p:cNvPr id="24" name="TextBox 23"/>
+          <p:cNvSpPr txBox="1"/>
+          <p:nvPr/>
+        </p:nvSpPr>
+        <p:spPr>
+          <a:xfrm>
+            <a:off x="6425031" y="3700576"/>
+            <a:ext cx="2160955" cy="1247546"/>
+          </a:xfrm>
+          <a:prstGeom prst="rect">
+            <a:avLst/>
+          </a:prstGeom>
+          <a:noFill/>
+        </p:spPr>
+        <p:txBody>
+          <a:bodyPr wrap="square" anchor="t" lIns="0" rIns="0" tIns="0" bIns="0">
+            <a:spAutoFit/>
+          </a:bodyPr>
+          <a:lstStyle/>
+          <a:p>
+            <a:pPr algn="l">
+              <a:lnSpc>
+                <a:spcPct val="102000"/>
+              </a:lnSpc>
+            </a:pPr>
+            <a:r>
+              <a:rPr sz="1000" b="1">
+                <a:solidFill>
+                  <a:srgbClr val="20242C"/>
+                </a:solidFill>
+                <a:latin typeface="Microsoft YaHei"/>
+              </a:rPr>
+              <a:t>I-tag</a:t>
+            </a:r>
+            <a:r>
+              <a:rPr sz="1000" b="0">
+                <a:solidFill>
+                  <a:srgbClr val="20242C"/>
+                </a:solidFill>
+                <a:latin typeface="Microsoft YaHei"/>
+              </a:rPr>
+              <a:t>：不加总线，只用本地饥饿检测和单 slot 预约；适合改动最小的场景。</a:t>
+            </a:r>
+          </a:p>
+          <a:p>
+            <a:pPr algn="l">
+              <a:lnSpc>
+                <a:spcPct val="102000"/>
+              </a:lnSpc>
+              <a:spcBef>
+                <a:spcPts val="600"/>
+              </a:spcBef>
+            </a:pPr>
+            <a:r>
+              <a:rPr sz="1000" b="1">
+                <a:solidFill>
+                  <a:srgbClr val="20242C"/>
+                </a:solidFill>
+                <a:latin typeface="Microsoft YaHei"/>
+              </a:rPr>
+              <a:t>S22</a:t>
+            </a:r>
+            <a:r>
+              <a:rPr sz="1000" b="0">
+                <a:solidFill>
+                  <a:srgbClr val="20242C"/>
+                </a:solidFill>
+                <a:latin typeface="Microsoft YaHei"/>
+              </a:rPr>
+              <a:t>：复用 6 bit 进度总线，能直接比较谁领先、谁落后；适合允许跨节点进度信息、但事务层不可改的场景。</a:t>
+            </a:r>
+          </a:p>
+        </p:txBody>
+      </p:sp>
+      <p:sp>
+        <p:nvSpPr>
+          <p:cNvPr id="25" name="Rectangle 24"/>
+          <p:cNvSpPr/>
+          <p:nvPr/>
+        </p:nvSpPr>
+        <p:spPr>
+          <a:xfrm>
+            <a:off x="9024899" y="2194560"/>
+            <a:ext cx="2599867" cy="3017520"/>
+          </a:xfrm>
+          <a:prstGeom prst="rect">
+            <a:avLst/>
+          </a:prstGeom>
+          <a:solidFill>
+            <a:srgbClr val="FFFFFF"/>
+          </a:solidFill>
+          <a:ln w="12700">
+            <a:solidFill>
+              <a:srgbClr val="DCE3EA"/>
+            </a:solidFill>
+          </a:ln>
+          <a:effectLst/>
+        </p:spPr>
+        <p:style>
+          <a:lnRef idx="1">
+            <a:schemeClr val="accent1"/>
+          </a:lnRef>
+          <a:fillRef idx="3">
+            <a:schemeClr val="accent1"/>
+          </a:fillRef>
+          <a:effectRef idx="2">
+            <a:schemeClr val="accent1"/>
+          </a:effectRef>
+          <a:fontRef idx="minor">
+            <a:schemeClr val="lt1"/>
+          </a:fontRef>
+        </p:style>
+        <p:txBody>
+          <a:bodyPr rtlCol="0" anchor="ctr" wrap="square"/>
+          <a:lstStyle/>
+          <a:p>
+            <a:pPr algn="ctr"/>
+          </a:p>
+        </p:txBody>
+      </p:sp>
+      <p:sp>
+        <p:nvSpPr>
+          <p:cNvPr id="26" name="Oval 25"/>
+          <p:cNvSpPr/>
+          <p:nvPr/>
+        </p:nvSpPr>
+        <p:spPr>
+          <a:xfrm>
+            <a:off x="9244355" y="2414016"/>
+            <a:ext cx="384048" cy="384048"/>
+          </a:xfrm>
+          <a:prstGeom prst="ellipse">
+            <a:avLst/>
+          </a:prstGeom>
+          <a:solidFill>
+            <a:srgbClr val="D20A2E"/>
+          </a:solidFill>
+          <a:ln>
+            <a:noFill/>
+          </a:ln>
+          <a:effectLst/>
+        </p:spPr>
+        <p:style>
+          <a:lnRef idx="1">
+            <a:schemeClr val="accent1"/>
+          </a:lnRef>
+          <a:fillRef idx="3">
+            <a:schemeClr val="accent1"/>
+          </a:fillRef>
+          <a:effectRef idx="2">
+            <a:schemeClr val="accent1"/>
+          </a:effectRef>
+          <a:fontRef idx="minor">
+            <a:schemeClr val="lt1"/>
+          </a:fontRef>
+        </p:style>
+        <p:txBody>
+          <a:bodyPr rtlCol="0" anchor="ctr" wrap="square"/>
+          <a:lstStyle/>
+          <a:p>
+            <a:pPr algn="ctr"/>
+          </a:p>
+        </p:txBody>
+      </p:sp>
+      <p:sp>
+        <p:nvSpPr>
+          <p:cNvPr id="27" name="TextBox 26"/>
+          <p:cNvSpPr txBox="1"/>
+          <p:nvPr/>
+        </p:nvSpPr>
+        <p:spPr>
+          <a:xfrm>
+            <a:off x="9244355" y="2496312"/>
+            <a:ext cx="384048" cy="237744"/>
+          </a:xfrm>
+          <a:prstGeom prst="rect">
+            <a:avLst/>
+          </a:prstGeom>
+          <a:noFill/>
+        </p:spPr>
+        <p:txBody>
+          <a:bodyPr wrap="square" anchor="t" lIns="0" rIns="0" tIns="0" bIns="0">
+            <a:spAutoFit/>
+          </a:bodyPr>
+          <a:lstStyle/>
+          <a:p>
+            <a:pPr algn="ctr">
+              <a:lnSpc>
+                <a:spcPct val="100000"/>
+              </a:lnSpc>
+            </a:pPr>
+            <a:r>
+              <a:rPr sz="1150" b="1">
+                <a:solidFill>
+                  <a:srgbClr val="FFFFFF"/>
+                </a:solidFill>
+                <a:latin typeface="Arial"/>
+              </a:rPr>
+              <a:t>04</a:t>
+            </a:r>
+          </a:p>
+        </p:txBody>
+      </p:sp>
+      <p:sp>
+        <p:nvSpPr>
+          <p:cNvPr id="28" name="TextBox 27"/>
+          <p:cNvSpPr txBox="1"/>
+          <p:nvPr/>
+        </p:nvSpPr>
+        <p:spPr>
+          <a:xfrm>
+            <a:off x="9244355" y="2963978"/>
+            <a:ext cx="2160955" cy="592836"/>
+          </a:xfrm>
+          <a:prstGeom prst="rect">
+            <a:avLst/>
+          </a:prstGeom>
+          <a:noFill/>
+        </p:spPr>
+        <p:txBody>
+          <a:bodyPr wrap="square" anchor="t" lIns="0" rIns="0" tIns="0" bIns="0">
+            <a:spAutoFit/>
+          </a:bodyPr>
+          <a:lstStyle/>
+          <a:p>
+            <a:pPr algn="l">
+              <a:lnSpc>
+                <a:spcPct val="100000"/>
+              </a:lnSpc>
+            </a:pPr>
+            <a:r>
+              <a:rPr sz="1500" b="1">
+                <a:solidFill>
+                  <a:srgbClr val="20242C"/>
+                </a:solidFill>
+                <a:latin typeface="Microsoft YaHei"/>
+              </a:rPr>
+              <a:t>requester 窗口可改 · 5,840 FF‑eq</a:t>
+            </a:r>
+          </a:p>
+        </p:txBody>
+      </p:sp>
+      <p:sp>
+        <p:nvSpPr>
+          <p:cNvPr id="29" name="TextBox 28"/>
+          <p:cNvSpPr txBox="1"/>
+          <p:nvPr/>
+        </p:nvSpPr>
+        <p:spPr>
+          <a:xfrm>
+            <a:off x="9244355" y="3639110"/>
+            <a:ext cx="2160955" cy="1370479"/>
+          </a:xfrm>
+          <a:prstGeom prst="rect">
+            <a:avLst/>
+          </a:prstGeom>
+          <a:noFill/>
+        </p:spPr>
+        <p:txBody>
+          <a:bodyPr wrap="square" anchor="t" lIns="0" rIns="0" tIns="0" bIns="0">
+            <a:spAutoFit/>
+          </a:bodyPr>
+          <a:lstStyle/>
+          <a:p>
+            <a:pPr algn="l">
+              <a:lnSpc>
+                <a:spcPct val="102000"/>
+              </a:lnSpc>
+            </a:pPr>
+            <a:r>
+              <a:rPr sz="950" b="1">
+                <a:solidFill>
+                  <a:srgbClr val="20242C"/>
+                </a:solidFill>
+                <a:latin typeface="Microsoft YaHei"/>
+              </a:rPr>
+              <a:t>S19 / S20</a:t>
+            </a:r>
+            <a:r>
+              <a:rPr sz="950" b="0">
+                <a:solidFill>
+                  <a:srgbClr val="20242C"/>
+                </a:solidFill>
+                <a:latin typeface="Microsoft YaHei"/>
+              </a:rPr>
+              <a:t>：都用每核动态 outstanding 窗口。已有 RTT 计时器时选 S19；已有 tracker 水位和 1 bit 标记位时选 S20。</a:t>
+            </a:r>
+          </a:p>
+          <a:p>
+            <a:pPr algn="l">
+              <a:lnSpc>
+                <a:spcPct val="102000"/>
+              </a:lnSpc>
+              <a:spcBef>
+                <a:spcPts val="600"/>
+              </a:spcBef>
+            </a:pPr>
+            <a:r>
+              <a:rPr sz="950" b="0">
+                <a:solidFill>
+                  <a:srgbClr val="20242C"/>
+                </a:solidFill>
+                <a:latin typeface="Microsoft YaHei"/>
+              </a:rPr>
+              <a:t>两者不需要流量 pattern 先验，可作为 source-side 集成路径。读侧维持 S0，不另加控制。</a:t>
+            </a:r>
+          </a:p>
+        </p:txBody>
+      </p:sp>
+      <p:sp>
+        <p:nvSpPr>
+          <p:cNvPr id="30" name="Rectangle 29"/>
+          <p:cNvSpPr/>
+          <p:nvPr/>
+        </p:nvSpPr>
+        <p:spPr>
+          <a:xfrm>
+            <a:off x="566928" y="5486400"/>
+            <a:ext cx="11057839" cy="841248"/>
+          </a:xfrm>
+          <a:prstGeom prst="rect">
+            <a:avLst/>
+          </a:prstGeom>
+          <a:solidFill>
+            <a:srgbClr val="D20A2E"/>
+          </a:solidFill>
+          <a:ln>
+            <a:noFill/>
+          </a:ln>
+          <a:effectLst/>
+        </p:spPr>
+        <p:style>
+          <a:lnRef idx="1">
+            <a:schemeClr val="accent1"/>
+          </a:lnRef>
+          <a:fillRef idx="3">
+            <a:schemeClr val="accent1"/>
+          </a:fillRef>
+          <a:effectRef idx="2">
+            <a:schemeClr val="accent1"/>
+          </a:effectRef>
+          <a:fontRef idx="minor">
+            <a:schemeClr val="lt1"/>
+          </a:fontRef>
+        </p:style>
+        <p:txBody>
+          <a:bodyPr rtlCol="0" anchor="ctr" wrap="square"/>
+          <a:lstStyle/>
+          <a:p>
+            <a:pPr algn="ctr"/>
+          </a:p>
+        </p:txBody>
+      </p:sp>
+      <p:sp>
+        <p:nvSpPr>
+          <p:cNvPr id="31" name="TextBox 30"/>
+          <p:cNvSpPr txBox="1"/>
+          <p:nvPr/>
+        </p:nvSpPr>
+        <p:spPr>
+          <a:xfrm>
+            <a:off x="877824" y="5577840"/>
+            <a:ext cx="10436047" cy="658368"/>
+          </a:xfrm>
+          <a:prstGeom prst="rect">
+            <a:avLst/>
+          </a:prstGeom>
+          <a:noFill/>
+        </p:spPr>
+        <p:txBody>
+          <a:bodyPr wrap="square" anchor="ctr" lIns="0" rIns="0" tIns="0" bIns="0">
+            <a:spAutoFit/>
+          </a:bodyPr>
+          <a:lstStyle/>
+          <a:p>
+            <a:pPr algn="l">
+              <a:lnSpc>
+                <a:spcPct val="104000"/>
+              </a:lnSpc>
+            </a:pPr>
+            <a:r>
+              <a:rPr sz="1400" b="0">
+                <a:solidFill>
+                  <a:srgbClr val="FFFFFF"/>
+                </a:solidFill>
+                <a:latin typeface="Microsoft YaHei"/>
+              </a:rPr>
+              <a:t>建议顺序：第 1 步直接做；随后先问 completer 能不能改。能改优先验证 S16；不能改，再按现有硬件基础在 I-tag、S22、S19 / S20 中选。</a:t>
+            </a:r>
+          </a:p>
+        </p:txBody>
+      </p:sp>
+      <p:sp>
+        <p:nvSpPr>
+          <p:cNvPr id="32" name="TextBox 31"/>
+          <p:cNvSpPr txBox="1"/>
+          <p:nvPr/>
+        </p:nvSpPr>
+        <p:spPr>
+          <a:xfrm>
+            <a:off x="566928" y="6455664"/>
+            <a:ext cx="1463040" cy="219456"/>
+          </a:xfrm>
+          <a:prstGeom prst="rect">
+            <a:avLst/>
+          </a:prstGeom>
+          <a:noFill/>
+        </p:spPr>
+        <p:txBody>
+          <a:bodyPr wrap="square" anchor="t" lIns="0" rIns="0" tIns="0" bIns="0">
+            <a:spAutoFit/>
+          </a:bodyPr>
+          <a:lstStyle/>
+          <a:p>
+            <a:pPr algn="l">
+              <a:lnSpc>
+                <a:spcPct val="100000"/>
+              </a:lnSpc>
+            </a:pPr>
+            <a:r>
+              <a:rPr sz="1000" b="0">
+                <a:solidFill>
+                  <a:srgbClr val="A8B0BA"/>
+                </a:solidFill>
+                <a:latin typeface="Arial"/>
+              </a:rPr>
+              <a:t>33 / 34</a:t>
+            </a:r>
+          </a:p>
+        </p:txBody>
+      </p:sp>
+    </p:spTree>
+  </p:cSld>
+  <p:clrMapOvr>
+    <a:masterClrMapping/>
+  </p:clrMapOvr>
+</p:sld>
+</file>
+
+<file path=ppt/slides/slide34.xml><?xml version="1.0" encoding="utf-8"?>
+<p:sld xmlns:a="http://schemas.openxmlformats.org/drawingml/2006/main" xmlns:p="http://schemas.openxmlformats.org/presentationml/2006/main" xmlns:r="http://schemas.openxmlformats.org/officeDocument/2006/relationships">
+  <p:cSld>
+    <p:spTree>
+      <p:nvGrpSpPr>
+        <p:cNvPr id="1" name=""/>
+        <p:cNvGrpSpPr/>
+        <p:nvPr/>
+      </p:nvGrpSpPr>
+      <p:grpSpPr/>
+      <p:sp>
+        <p:nvSpPr>
+          <p:cNvPr id="2" name="Rectangle 1"/>
+          <p:cNvSpPr/>
+          <p:nvPr/>
+        </p:nvSpPr>
+        <p:spPr>
+          <a:xfrm>
+            <a:off x="0" y="0"/>
+            <a:ext cx="12191695" cy="6858000"/>
+          </a:xfrm>
+          <a:prstGeom prst="rect">
+            <a:avLst/>
+          </a:prstGeom>
+          <a:solidFill>
+            <a:srgbClr val="14171C"/>
+          </a:solidFill>
+          <a:ln>
+            <a:noFill/>
+          </a:ln>
+          <a:effectLst/>
+        </p:spPr>
+        <p:style>
+          <a:lnRef idx="1">
+            <a:schemeClr val="accent1"/>
+          </a:lnRef>
+          <a:fillRef idx="3">
+            <a:schemeClr val="accent1"/>
+          </a:fillRef>
+          <a:effectRef idx="2">
+            <a:schemeClr val="accent1"/>
+          </a:effectRef>
+          <a:fontRef idx="minor">
+            <a:schemeClr val="lt1"/>
+          </a:fontRef>
+        </p:style>
+        <p:txBody>
+          <a:bodyPr rtlCol="0" anchor="ctr" wrap="square"/>
+          <a:lstStyle/>
+          <a:p>
+            <a:pPr algn="ctr"/>
+          </a:p>
+        </p:txBody>
+      </p:sp>
+      <p:sp>
+        <p:nvSpPr>
+          <p:cNvPr id="3" name="Rectangle 2"/>
+          <p:cNvSpPr/>
+          <p:nvPr/>
+        </p:nvSpPr>
+        <p:spPr>
+          <a:xfrm>
+            <a:off x="10143439" y="274320"/>
+            <a:ext cx="182880" cy="182880"/>
+          </a:xfrm>
+          <a:prstGeom prst="rect">
+            <a:avLst/>
+          </a:prstGeom>
+          <a:solidFill>
+            <a:srgbClr val="D20A2E"/>
+          </a:solidFill>
+          <a:ln>
+            <a:noFill/>
+          </a:ln>
+          <a:effectLst/>
+        </p:spPr>
+        <p:style>
+          <a:lnRef idx="1">
+            <a:schemeClr val="accent1"/>
+          </a:lnRef>
+          <a:fillRef idx="3">
+            <a:schemeClr val="accent1"/>
+          </a:fillRef>
+          <a:effectRef idx="2">
+            <a:schemeClr val="accent1"/>
+          </a:effectRef>
+          <a:fontRef idx="minor">
+            <a:schemeClr val="lt1"/>
+          </a:fontRef>
+        </p:style>
+        <p:txBody>
+          <a:bodyPr rtlCol="0" anchor="ctr" wrap="square"/>
+          <a:lstStyle/>
+          <a:p>
+            <a:pPr algn="ctr"/>
+          </a:p>
+        </p:txBody>
+      </p:sp>
+      <p:sp>
+        <p:nvSpPr>
+          <p:cNvPr id="4" name="TextBox 3"/>
+          <p:cNvSpPr txBox="1"/>
+          <p:nvPr/>
+        </p:nvSpPr>
+        <p:spPr>
+          <a:xfrm>
             <a:off x="10399471" y="246888"/>
             <a:ext cx="1225296" cy="256032"/>
           </a:xfrm>
@@ -24463,7 +28041,7 @@
                 </a:solidFill>
                 <a:latin typeface="Microsoft YaHei"/>
               </a:rPr>
-              <a:t>需要拍板的一件事：HA / 内存控制器的授权调度能不能改？</a:t>
+              <a:t>第一问仍是：HA / 内存控制器的授权调度能不能改？</a:t>
             </a:r>
           </a:p>
           <a:p>
@@ -24482,7 +28060,7 @@
                 </a:solidFill>
                 <a:latin typeface="Microsoft YaHei"/>
               </a:rPr>
-              <a:t>能改 → S16，900 FF‑eq、Jain 0.98466、带宽 −0.39%；不能改 → S22，13,920 FF‑eq、Jain 0.94799、带宽 −2.21%。</a:t>
+              <a:t>能改优先 S16；不能改，再按可用基础选择本地 I-tag、跨节点 S22，或 requester 动态窗口 S19 / S20。</a:t>
             </a:r>
           </a:p>
         </p:txBody>
@@ -24521,7 +28099,7 @@
                 </a:solidFill>
                 <a:latin typeface="Arial"/>
               </a:rPr>
-              <a:t>30 / 30</a:t>
+              <a:t>34 / 34</a:t>
             </a:r>
           </a:p>
         </p:txBody>
@@ -25302,7 +28880,7 @@
                 </a:solidFill>
                 <a:latin typeface="Arial"/>
               </a:rPr>
-              <a:t>04 / 30</a:t>
+              <a:t>04 / 34</a:t>
             </a:r>
           </a:p>
         </p:txBody>
@@ -26621,7 +30199,7 @@
                 </a:solidFill>
                 <a:latin typeface="Arial"/>
               </a:rPr>
-              <a:t>05 / 30</a:t>
+              <a:t>05 / 34</a:t>
             </a:r>
           </a:p>
         </p:txBody>
@@ -28020,7 +31598,7 @@
                 </a:solidFill>
                 <a:latin typeface="Arial"/>
               </a:rPr>
-              <a:t>06 / 30</a:t>
+              <a:t>06 / 34</a:t>
             </a:r>
           </a:p>
         </p:txBody>
@@ -28526,7 +32104,7 @@
                 </a:solidFill>
                 <a:latin typeface="Arial"/>
               </a:rPr>
-              <a:t>07 / 30</a:t>
+              <a:t>07 / 34</a:t>
             </a:r>
           </a:p>
         </p:txBody>
@@ -29543,7 +33121,7 @@
                 </a:solidFill>
                 <a:latin typeface="Arial"/>
               </a:rPr>
-              <a:t>08 / 30</a:t>
+              <a:t>08 / 34</a:t>
             </a:r>
           </a:p>
         </p:txBody>
@@ -31813,7 +35391,7 @@
                 </a:solidFill>
                 <a:latin typeface="Arial"/>
               </a:rPr>
-              <a:t>09 / 30</a:t>
+              <a:t>09 / 34</a:t>
             </a:r>
           </a:p>
         </p:txBody>

--- a/ppt/ring2-write-fairness.pptx
+++ b/ppt/ring2-write-fairness.pptx
@@ -10797,8 +10797,8 @@
         </p:blipFill>
         <p:spPr>
           <a:xfrm>
-            <a:off x="566928" y="1689708"/>
-            <a:ext cx="7452360" cy="3533446"/>
+            <a:off x="566928" y="1673215"/>
+            <a:ext cx="7452360" cy="3566433"/>
           </a:xfrm>
           <a:prstGeom prst="rect">
             <a:avLst/>
@@ -10813,7 +10813,7 @@
         </p:nvSpPr>
         <p:spPr>
           <a:xfrm>
-            <a:off x="566928" y="5332883"/>
+            <a:off x="566928" y="5349376"/>
             <a:ext cx="7452360" cy="384048"/>
           </a:xfrm>
           <a:prstGeom prst="rect">
@@ -10839,7 +10839,7 @@
                 </a:solidFill>
                 <a:latin typeface="Microsoft YaHei"/>
               </a:rPr>
-              <a:t>红线 = 二阶锥规划的精确解，与仿真轮次无关；蓝点 = 官方 K = 20000 的 S0（5.5412 flit/cycle，Jain 0.92818）。</a:t>
+              <a:t>红线 = 每个公平目标下的理论最高带宽；点 = 官方 K = 20000 实测。八个点依次覆盖 S0 / S1 / S1T / S16 / I-tag / S19 / S20 / S22。</a:t>
             </a:r>
           </a:p>
         </p:txBody>
@@ -10878,7 +10878,7 @@
                 </a:solidFill>
                 <a:latin typeface="Arial"/>
               </a:rPr>
-              <a:t>F O R M A L   D E R I V A T I O N</a:t>
+              <a:t>H O W   T O   R E A D   T H E   C U R V E</a:t>
             </a:r>
           </a:p>
         </p:txBody>
@@ -10892,7 +10892,7 @@
         <p:spPr>
           <a:xfrm>
             <a:off x="8403336" y="1408176"/>
-            <a:ext cx="3221431" cy="1834896"/>
+            <a:ext cx="3221431" cy="1473060"/>
           </a:xfrm>
           <a:prstGeom prst="rect">
             <a:avLst/>
@@ -10963,7 +10963,7 @@
                 </a:solidFill>
                 <a:latin typeface="Microsoft YaHei"/>
               </a:rPr>
-              <a:t>三个变量的含义</a:t>
+              <a:t>先认四个量</a:t>
             </a:r>
           </a:p>
         </p:txBody>
@@ -10977,7 +10977,7 @@
         <p:spPr>
           <a:xfrm>
             <a:off x="8586215" y="1932432"/>
-            <a:ext cx="2855671" cy="1475597"/>
+            <a:ext cx="2855671" cy="1172992"/>
           </a:xfrm>
           <a:prstGeom prst="rect">
             <a:avLst/>
@@ -11011,7 +11011,7 @@
                 </a:solidFill>
                 <a:latin typeface="Microsoft YaHei"/>
               </a:rPr>
-              <a:t>（决策变量）= 第 c 个核每拍发出多少笔事务。十个核 → 十个数。</a:t>
+              <a:t>：第 c 个核的事务速率；十个核就是十个待选择的速率。</a:t>
             </a:r>
           </a:p>
           <a:p>
@@ -11030,7 +11030,7 @@
                 </a:solidFill>
                 <a:latin typeface="Microsoft YaHei"/>
               </a:rPr>
-              <a:t>a(r,c)</a:t>
+              <a:t>链路占用表</a:t>
             </a:r>
             <a:r>
               <a:rPr sz="800" b="0">
@@ -11039,7 +11039,7 @@
                 </a:solidFill>
                 <a:latin typeface="Microsoft YaHei"/>
               </a:rPr>
-              <a:t> = 核 c 每发一笔事务，平均占用资源 r 多少拍。r 遍历每条（链路，方向，VC）。路由固定、握手固定，所以这是个常数表。</a:t>
+              <a:t>：每个核发一笔事务，会占哪些链路、各占几拍。路由和握手固定后，这张表也是固定的。</a:t>
             </a:r>
           </a:p>
           <a:p>
@@ -11058,7 +11058,7 @@
                 </a:solidFill>
                 <a:latin typeface="Microsoft YaHei"/>
               </a:rPr>
-              <a:t>约束 Σc a(r,c)·λc ≤ 1</a:t>
+              <a:t>J</a:t>
             </a:r>
             <a:r>
               <a:rPr sz="800" b="0">
@@ -11067,7 +11067,7 @@
                 </a:solidFill>
                 <a:latin typeface="Microsoft YaHei"/>
               </a:rPr>
-              <a:t> = 任何一条链路每拍最多搬 1 flit。</a:t>
+              <a:t>：本次要求的最低 Jain 公平度，例如 0.95。</a:t>
             </a:r>
           </a:p>
           <a:p>
@@ -11086,7 +11086,7 @@
                 </a:solidFill>
                 <a:latin typeface="Microsoft YaHei"/>
               </a:rPr>
-              <a:t>Jain(λ) ≥ J</a:t>
+              <a:t>R(J)</a:t>
             </a:r>
             <a:r>
               <a:rPr sz="800" b="0">
@@ -11095,25 +11095,7 @@
                 </a:solidFill>
                 <a:latin typeface="Microsoft YaHei"/>
               </a:rPr>
-              <a:t> ⟺ ‖λ‖₂ ≤ (Σλc)/√(J·10)：一个二阶锥约束，所以 R(J) = max Σλc 是</a:t>
-            </a:r>
-            <a:r>
-              <a:rPr sz="800" b="1">
-                <a:solidFill>
-                  <a:srgbClr val="20242C"/>
-                </a:solidFill>
-                <a:latin typeface="Microsoft YaHei"/>
-              </a:rPr>
-              <a:t>精确解</a:t>
-            </a:r>
-            <a:r>
-              <a:rPr sz="800" b="0">
-                <a:solidFill>
-                  <a:srgbClr val="20242C"/>
-                </a:solidFill>
-                <a:latin typeface="Microsoft YaHei"/>
-              </a:rPr>
-              <a:t>，不是估计。</a:t>
+              <a:t>：在公平度不低于 J 的前提下，所有核合计最多能跑多快。</a:t>
             </a:r>
           </a:p>
         </p:txBody>
@@ -11126,8 +11108,8 @@
         </p:nvSpPr>
         <p:spPr>
           <a:xfrm>
-            <a:off x="8403336" y="3389376"/>
-            <a:ext cx="3221431" cy="938784"/>
+            <a:off x="8403336" y="3027540"/>
+            <a:ext cx="3221431" cy="1043418"/>
           </a:xfrm>
           <a:prstGeom prst="rect">
             <a:avLst/>
@@ -11170,8 +11152,8 @@
         </p:nvSpPr>
         <p:spPr>
           <a:xfrm>
-            <a:off x="8714232" y="3480816"/>
-            <a:ext cx="2599639" cy="755904"/>
+            <a:off x="8714232" y="3118980"/>
+            <a:ext cx="2599639" cy="860538"/>
           </a:xfrm>
           <a:prstGeom prst="rect">
             <a:avLst/>
@@ -11190,13 +11172,13 @@
               </a:lnSpc>
             </a:pPr>
             <a:r>
-              <a:rPr sz="1200" b="0">
+              <a:rPr sz="1100" b="0">
                 <a:solidFill>
                   <a:srgbClr val="FFFFFF"/>
                 </a:solidFill>
                 <a:latin typeface="Microsoft YaHei"/>
               </a:rPr>
-              <a:t>① 完全等速率的上限 R* = 5.7143，无约束峰值 R_max = 6.4000 —— 公平的固有代价 −10.71%。</a:t>
+              <a:t>一个红线点怎么来：先固定 J，再尝试十个核的所有速率组合；任何链路都不能超过每拍 1 flit，最后保留总带宽最高的组合。</a:t>
             </a:r>
           </a:p>
         </p:txBody>
@@ -11209,8 +11191,8 @@
         </p:nvSpPr>
         <p:spPr>
           <a:xfrm>
-            <a:off x="8403336" y="4474464"/>
-            <a:ext cx="3221431" cy="853440"/>
+            <a:off x="8403336" y="4217262"/>
+            <a:ext cx="3221431" cy="941122"/>
           </a:xfrm>
           <a:prstGeom prst="rect">
             <a:avLst/>
@@ -11253,8 +11235,8 @@
         </p:nvSpPr>
         <p:spPr>
           <a:xfrm>
-            <a:off x="8714232" y="4565904"/>
-            <a:ext cx="2599639" cy="670560"/>
+            <a:off x="8714232" y="4308702"/>
+            <a:ext cx="2599639" cy="758242"/>
           </a:xfrm>
           <a:prstGeom prst="rect">
             <a:avLst/>
@@ -11279,7 +11261,7 @@
                 </a:solidFill>
                 <a:latin typeface="Microsoft YaHei"/>
               </a:rPr>
-              <a:t>② 曲线在高 Jain 段陡然变贵：最后 0.01 的 Jain 单价是前面一大段的 3.6 倍。</a:t>
+              <a:t>把 J 从低到高逐点重算，就得到整条红线。这是标准凸优化的全局上界（只有数值求解误差），不是对仿真点做拟合。</a:t>
             </a:r>
           </a:p>
         </p:txBody>
@@ -11292,8 +11274,8 @@
         </p:nvSpPr>
         <p:spPr>
           <a:xfrm>
-            <a:off x="8403336" y="5474208"/>
-            <a:ext cx="3221431" cy="853440"/>
+            <a:off x="8403336" y="5304689"/>
+            <a:ext cx="3221431" cy="1022958"/>
           </a:xfrm>
           <a:prstGeom prst="rect">
             <a:avLst/>
@@ -11336,8 +11318,8 @@
         </p:nvSpPr>
         <p:spPr>
           <a:xfrm>
-            <a:off x="8714232" y="5565647"/>
-            <a:ext cx="2599639" cy="670560"/>
+            <a:off x="8714232" y="5396129"/>
+            <a:ext cx="2599639" cy="840078"/>
           </a:xfrm>
           <a:prstGeom prst="rect">
             <a:avLst/>
@@ -11356,31 +11338,13 @@
               </a:lnSpc>
             </a:pPr>
             <a:r>
-              <a:rPr sz="1200" b="0">
+              <a:rPr sz="1050" b="0">
                 <a:solidFill>
                   <a:srgbClr val="FFFFFF"/>
                 </a:solidFill>
                 <a:latin typeface="Microsoft YaHei"/>
               </a:rPr>
-              <a:t>③ S0 实测落在曲线</a:t>
-            </a:r>
-            <a:r>
-              <a:rPr sz="1200" b="1">
-                <a:solidFill>
-                  <a:srgbClr val="FFFFFF"/>
-                </a:solidFill>
-                <a:latin typeface="Microsoft YaHei"/>
-              </a:rPr>
-              <a:t>下方</a:t>
-            </a:r>
-            <a:r>
-              <a:rPr sz="1200" b="0">
-                <a:solidFill>
-                  <a:srgbClr val="FFFFFF"/>
-                </a:solidFill>
-                <a:latin typeface="Microsoft YaHei"/>
-              </a:rPr>
-              <a:t>：它既不最快也不最公平，本身就不在前沿上。</a:t>
+              <a:t>读图：红线上 = 该公平度下理论能做到的最好结果；红线下 = 实际机制损失；红线上方 = 资源容量不允许。J = 1 的最右端就是等速率上限 R* = 5.7143。</a:t>
             </a:r>
           </a:p>
         </p:txBody>

--- a/ppt/ring2-write-fairness.pptx
+++ b/ppt/ring2-write-fairness.pptx
@@ -37,8 +37,6 @@
     <p:sldId id="285" r:id="rId36"/>
     <p:sldId id="286" r:id="rId37"/>
     <p:sldId id="287" r:id="rId38"/>
-    <p:sldId id="288" r:id="rId39"/>
-    <p:sldId id="289" r:id="rId40"/>
   </p:sldIdLst>
   <p:sldSz cx="12191695" cy="6858000" type="screen4x3"/>
   <p:notesSz cx="6858000" cy="9144000"/>
@@ -4692,7 +4690,7 @@
                 </a:solidFill>
                 <a:latin typeface="Arial"/>
               </a:rPr>
-              <a:t>10 / 34</a:t>
+              <a:t>10 / 32</a:t>
             </a:r>
           </a:p>
         </p:txBody>
@@ -5795,7 +5793,7 @@
                 </a:solidFill>
                 <a:latin typeface="Arial"/>
               </a:rPr>
-              <a:t>11 / 34</a:t>
+              <a:t>11 / 32</a:t>
             </a:r>
           </a:p>
         </p:txBody>
@@ -6301,7 +6299,7 @@
                 </a:solidFill>
                 <a:latin typeface="Arial"/>
               </a:rPr>
-              <a:t>12 / 34</a:t>
+              <a:t>12 / 32</a:t>
             </a:r>
           </a:p>
         </p:txBody>
@@ -7803,7 +7801,7 @@
                 </a:solidFill>
                 <a:latin typeface="Arial"/>
               </a:rPr>
-              <a:t>13 / 34</a:t>
+              <a:t>13 / 32</a:t>
             </a:r>
           </a:p>
         </p:txBody>
@@ -8801,7 +8799,7 @@
                 </a:solidFill>
                 <a:latin typeface="Arial"/>
               </a:rPr>
-              <a:t>14 / 34</a:t>
+              <a:t>14 / 32</a:t>
             </a:r>
           </a:p>
         </p:txBody>
@@ -9979,7 +9977,7 @@
                 </a:solidFill>
                 <a:latin typeface="Arial"/>
               </a:rPr>
-              <a:t>15 / 34</a:t>
+              <a:t>15 / 32</a:t>
             </a:r>
           </a:p>
         </p:txBody>
@@ -10504,7 +10502,7 @@
                 </a:solidFill>
                 <a:latin typeface="Arial"/>
               </a:rPr>
-              <a:t>16 / 34</a:t>
+              <a:t>16 / 32</a:t>
             </a:r>
           </a:p>
         </p:txBody>
@@ -10839,7 +10837,7 @@
                 </a:solidFill>
                 <a:latin typeface="Microsoft YaHei"/>
               </a:rPr>
-              <a:t>红线 = 每个公平目标下的理论最高带宽；点 = 官方 K = 20000 实测。八个点依次覆盖 S0 / S1 / S1T / S16 / I-tag / S19 / S20 / S22。</a:t>
+              <a:t>红线 = 每个公平目标下的理论最高带宽；点 = 官方 K = 20000 实测。其中 I-tag 点只是 S0 的 t_inj / hold 调参，不是独立机制。</a:t>
             </a:r>
           </a:p>
         </p:txBody>
@@ -11383,7 +11381,7 @@
                 </a:solidFill>
                 <a:latin typeface="Arial"/>
               </a:rPr>
-              <a:t>17 / 34</a:t>
+              <a:t>17 / 32</a:t>
             </a:r>
           </a:p>
         </p:txBody>
@@ -11908,7 +11906,7 @@
                 </a:solidFill>
                 <a:latin typeface="Arial"/>
               </a:rPr>
-              <a:t>18 / 34</a:t>
+              <a:t>18 / 32</a:t>
             </a:r>
           </a:p>
         </p:txBody>
@@ -13026,7 +13024,7 @@
                 </a:solidFill>
                 <a:latin typeface="Arial"/>
               </a:rPr>
-              <a:t>19 / 34</a:t>
+              <a:t>19 / 32</a:t>
             </a:r>
           </a:p>
         </p:txBody>
@@ -14533,7 +14531,7 @@
                 </a:solidFill>
                 <a:latin typeface="Arial"/>
               </a:rPr>
-              <a:t>02 / 34</a:t>
+              <a:t>02 / 32</a:t>
             </a:r>
           </a:p>
         </p:txBody>
@@ -15099,7 +15097,7 @@
         </p:nvSpPr>
         <p:spPr>
           <a:xfrm>
-            <a:off x="8951976" y="3143334"/>
+            <a:off x="8951976" y="3141943"/>
             <a:ext cx="2489911" cy="259080"/>
           </a:xfrm>
           <a:prstGeom prst="rect">
@@ -15138,8 +15136,8 @@
         </p:nvSpPr>
         <p:spPr>
           <a:xfrm>
-            <a:off x="8951976" y="3484710"/>
-            <a:ext cx="2489911" cy="1171895"/>
+            <a:off x="8951976" y="3483319"/>
+            <a:ext cx="2489911" cy="1399397"/>
           </a:xfrm>
           <a:prstGeom prst="rect">
             <a:avLst/>
@@ -15237,7 +15235,26 @@
                 </a:solidFill>
                 <a:latin typeface="Microsoft YaHei"/>
               </a:rPr>
-              <a:t>I-tag（3,120，η 0.9124）与 S19 / S20（5,840，η 0.8992）在成本—收益平面上被 S16 支配，但改动层次不同，仍是有意义的工程备选；本节补充它们的机制和正式 K = 20000 对比。</a:t>
+              <a:t>S19 / S20（5,840，η 0.8992）与 S22-stock（13,920，η 0.8883）在成本—收益平面上被 S16 支配，但改动层次不同，仍是有意义的工程备选。</a:t>
+            </a:r>
+          </a:p>
+          <a:p>
+            <a:pPr algn="l">
+              <a:lnSpc>
+                <a:spcPct val="102000"/>
+              </a:lnSpc>
+              <a:spcBef>
+                <a:spcPts val="600"/>
+              </a:spcBef>
+            </a:pPr>
+            <a:r>
+              <a:rPr sz="800" b="0">
+                <a:solidFill>
+                  <a:srgbClr val="20242C"/>
+                </a:solidFill>
+                <a:latin typeface="Microsoft YaHei"/>
+              </a:rPr>
+              <a:t>I-tag t_inj=2 / hold=2 只是 S0 参数重调，不再作为独立方案计成本或入选。</a:t>
             </a:r>
           </a:p>
         </p:txBody>
@@ -15359,7 +15376,7 @@
                 </a:solidFill>
                 <a:latin typeface="Arial"/>
               </a:rPr>
-              <a:t>20 / 34</a:t>
+              <a:t>20 / 32</a:t>
             </a:r>
           </a:p>
         </p:txBody>
@@ -16248,7 +16265,7 @@
                 </a:solidFill>
                 <a:latin typeface="Arial"/>
               </a:rPr>
-              <a:t>21 / 34</a:t>
+              <a:t>21 / 32</a:t>
             </a:r>
           </a:p>
         </p:txBody>
@@ -16593,7 +16610,7 @@
                 </a:solidFill>
                 <a:latin typeface="Microsoft YaHei"/>
               </a:rPr>
-              <a:t>五个方案、三种控制层次：机制示意 + 与 S0 / S1 的同口径实测对比。</a:t>
+              <a:t>四个方案、三种控制层次：机制示意 + 与 S0 / S1 的同口径实测对比。</a:t>
             </a:r>
           </a:p>
         </p:txBody>
@@ -16715,7 +16732,7 @@
                 </a:solidFill>
                 <a:latin typeface="Microsoft YaHei"/>
               </a:rPr>
-              <a:t>S16 是严格成本—收益前沿；I-tag、S19、S20 与 S22 是改动层次不同的近前沿工程备选。五者都可实现、数据来自测量，且不含流量 pattern 先验。</a:t>
+              <a:t>S16 是严格成本—收益前沿；S19、S20 与 S22 是改动层次不同的近前沿工程备选。四者都可实现、数据来自测量，且不含流量 pattern 先验。</a:t>
             </a:r>
           </a:p>
         </p:txBody>
@@ -16754,7 +16771,7 @@
                 </a:solidFill>
                 <a:latin typeface="Arial"/>
               </a:rPr>
-              <a:t>22 / 34</a:t>
+              <a:t>22 / 32</a:t>
             </a:r>
           </a:p>
         </p:txBody>
@@ -17122,13 +17139,13 @@
               </a:lnSpc>
             </a:pPr>
             <a:r>
-              <a:rPr sz="850" b="1">
+              <a:rPr sz="750" b="1">
                 <a:solidFill>
                   <a:srgbClr val="D20A2E"/>
                 </a:solidFill>
                 <a:latin typeface="Arial"/>
               </a:rPr>
-              <a:t>S C H E M E   1   /   2   ·   M E C H A N I S M</a:t>
+              <a:t>F R O N T I E R   ·   C O M P L E T E R   M E C H A N I S M</a:t>
             </a:r>
           </a:p>
         </p:txBody>
@@ -17645,7 +17662,7 @@
                 </a:solidFill>
                 <a:latin typeface="Arial"/>
               </a:rPr>
-              <a:t>23 / 34</a:t>
+              <a:t>23 / 32</a:t>
             </a:r>
           </a:p>
         </p:txBody>
@@ -18662,7 +18679,7 @@
                 </a:solidFill>
                 <a:latin typeface="Arial"/>
               </a:rPr>
-              <a:t>24 / 34</a:t>
+              <a:t>24 / 32</a:t>
             </a:r>
           </a:p>
         </p:txBody>
@@ -18807,7 +18824,7 @@
                 </a:solidFill>
                 <a:latin typeface="Microsoft YaHei"/>
               </a:rPr>
-              <a:t>I-tag t_inj=2 / hold=2（3,120 FF‑eq） · 本地触发 / 仲裁让位</a:t>
+              <a:t>S19 Swift / S20 DCTCP（各 5,840 FF‑eq） · requester 动态窗口</a:t>
             </a:r>
           </a:p>
         </p:txBody>
@@ -18941,7 +18958,7 @@
       </p:sp>
       <p:pic>
         <p:nvPicPr>
-          <p:cNvPr id="8" name="Picture 7" descr="26-itag-diagram.png"/>
+          <p:cNvPr id="8" name="Picture 7" descr="28-window-diagram.png"/>
           <p:cNvPicPr>
             <a:picLocks noChangeAspect="1"/>
           </p:cNvPicPr>
@@ -18997,7 +19014,7 @@
                 </a:solidFill>
                 <a:latin typeface="Microsoft YaHei"/>
               </a:rPr>
-              <a:t>上 = 连续两拍抢不到本地出向 hop 就举 I-tag；下 = 最近的上游 donor 只让一个 slot，空 slot 沿环到达请求者。</a:t>
+              <a:t>两者共用每核动态 outstanding 窗口；S19 用协议天然 RTT，S20 用 HA tracker 产生的 1 bit ECN 标记。</a:t>
             </a:r>
           </a:p>
         </p:txBody>
@@ -19030,13 +19047,13 @@
               </a:lnSpc>
             </a:pPr>
             <a:r>
-              <a:rPr sz="750" b="1">
+              <a:rPr sz="800" b="1">
                 <a:solidFill>
                   <a:srgbClr val="D20A2E"/>
                 </a:solidFill>
                 <a:latin typeface="Arial"/>
               </a:rPr>
-              <a:t>N E A R - F R O N T I E R   ·   I - T A G   M E C H A N I S M</a:t>
+              <a:t>N E A R - F R O N T I E R   ·   W I N D O W   C C</a:t>
             </a:r>
           </a:p>
         </p:txBody>
@@ -19050,7 +19067,7 @@
         <p:spPr>
           <a:xfrm>
             <a:off x="8951976" y="1408176"/>
-            <a:ext cx="2672791" cy="2278903"/>
+            <a:ext cx="2672791" cy="1779563"/>
           </a:xfrm>
           <a:prstGeom prst="rect">
             <a:avLst/>
@@ -19095,7 +19112,7 @@
         </p:nvSpPr>
         <p:spPr>
           <a:xfrm>
-            <a:off x="9134855" y="1657428"/>
+            <a:off x="9134855" y="1606892"/>
             <a:ext cx="2307031" cy="259080"/>
           </a:xfrm>
           <a:prstGeom prst="rect">
@@ -19121,7 +19138,7 @@
                 </a:solidFill>
                 <a:latin typeface="Microsoft YaHei"/>
               </a:rPr>
-              <a:t>四段机制</a:t>
+              <a:t>共同执行器：动态 outstanding</a:t>
             </a:r>
           </a:p>
         </p:txBody>
@@ -19134,8 +19151,8 @@
         </p:nvSpPr>
         <p:spPr>
           <a:xfrm>
-            <a:off x="9134855" y="1998804"/>
-            <a:ext cx="2307031" cy="1475597"/>
+            <a:off x="9134855" y="1948268"/>
+            <a:ext cx="2307031" cy="1077330"/>
           </a:xfrm>
           <a:prstGeom prst="rect">
             <a:avLst/>
@@ -19154,22 +19171,13 @@
               </a:lnSpc>
             </a:pPr>
             <a:r>
-              <a:rPr sz="800" b="1">
+              <a:rPr sz="850" b="0">
                 <a:solidFill>
                   <a:srgbClr val="20242C"/>
                 </a:solidFill>
                 <a:latin typeface="Microsoft YaHei"/>
               </a:rPr>
-              <a:t>① 检测</a:t>
-            </a:r>
-            <a:r>
-              <a:rPr sz="800" b="0">
-                <a:solidFill>
-                  <a:srgbClr val="20242C"/>
-                </a:solidFill>
-                <a:latin typeface="Microsoft YaHei"/>
-              </a:rPr>
-              <a:t>：同 plane / 方向 / VC 的注入队列非空，但连续 t_inj = 2 拍没上环。</a:t>
+              <a:t>每个 core 维护窗口 Wc：只有当前在飞事务数 &lt; Wc，才允许发新的 REQ。初值 16、下限 8、硬上限仍是 core_outstanding = 32。</a:t>
             </a:r>
           </a:p>
           <a:p>
@@ -19182,78 +19190,13 @@
               </a:spcBef>
             </a:pPr>
             <a:r>
-              <a:rPr sz="800" b="1">
+              <a:rPr sz="850" b="0">
                 <a:solidFill>
                   <a:srgbClr val="20242C"/>
                 </a:solidFill>
                 <a:latin typeface="Microsoft YaHei"/>
               </a:rPr>
-              <a:t>② 传递</a:t>
-            </a:r>
-            <a:r>
-              <a:rPr sz="800" b="0">
-                <a:solidFill>
-                  <a:srgbClr val="20242C"/>
-                </a:solidFill>
-                <a:latin typeface="Microsoft YaHei"/>
-              </a:rPr>
-              <a:t>：举 I-tag，带出饥饿请求者的位置；向上游寻找最近一个会跨过其瓶颈 hop 的 donor。</a:t>
-            </a:r>
-          </a:p>
-          <a:p>
-            <a:pPr algn="l">
-              <a:lnSpc>
-                <a:spcPct val="102000"/>
-              </a:lnSpc>
-              <a:spcBef>
-                <a:spcPts val="600"/>
-              </a:spcBef>
-            </a:pPr>
-            <a:r>
-              <a:rPr sz="800" b="1">
-                <a:solidFill>
-                  <a:srgbClr val="20242C"/>
-                </a:solidFill>
-                <a:latin typeface="Microsoft YaHei"/>
-              </a:rPr>
-              <a:t>③ 反馈</a:t>
-            </a:r>
-            <a:r>
-              <a:rPr sz="800" b="0">
-                <a:solidFill>
-                  <a:srgbClr val="20242C"/>
-                </a:solidFill>
-                <a:latin typeface="Microsoft YaHei"/>
-              </a:rPr>
-              <a:t>：donor 只在一拍内暂停，制造一个可追踪的空 slot。</a:t>
-            </a:r>
-          </a:p>
-          <a:p>
-            <a:pPr algn="l">
-              <a:lnSpc>
-                <a:spcPct val="102000"/>
-              </a:lnSpc>
-              <a:spcBef>
-                <a:spcPts val="600"/>
-              </a:spcBef>
-            </a:pPr>
-            <a:r>
-              <a:rPr sz="800" b="1">
-                <a:solidFill>
-                  <a:srgbClr val="20242C"/>
-                </a:solidFill>
-                <a:latin typeface="Microsoft YaHei"/>
-              </a:rPr>
-              <a:t>④ 执行</a:t>
-            </a:r>
-            <a:r>
-              <a:rPr sz="800" b="0">
-                <a:solidFill>
-                  <a:srgbClr val="20242C"/>
-                </a:solidFill>
-                <a:latin typeface="Microsoft YaHei"/>
-              </a:rPr>
-              <a:t>：空 slot 到达请求者后立即被它使用；hold = 2 让标记两拍后自动失效。</a:t>
+              <a:t>事务完成归还名额；Retry 重发不受窗口限制。窗口有名额时允许突发，因此比逐拍 rate pacer 更贴近 CHI 的事务模型。</a:t>
             </a:r>
           </a:p>
         </p:txBody>
@@ -19266,8 +19209,8 @@
         </p:nvSpPr>
         <p:spPr>
           <a:xfrm>
-            <a:off x="8951976" y="3833383"/>
-            <a:ext cx="2672791" cy="1353530"/>
+            <a:off x="8951976" y="3334043"/>
+            <a:ext cx="2672791" cy="1423650"/>
           </a:xfrm>
           <a:prstGeom prst="rect">
             <a:avLst/>
@@ -19312,7 +19255,7 @@
         </p:nvSpPr>
         <p:spPr>
           <a:xfrm>
-            <a:off x="9134855" y="4098321"/>
+            <a:off x="9134855" y="3534749"/>
             <a:ext cx="2307031" cy="259080"/>
           </a:xfrm>
           <a:prstGeom prst="rect">
@@ -19338,7 +19281,7 @@
                 </a:solidFill>
                 <a:latin typeface="Microsoft YaHei"/>
               </a:rPr>
-              <a:t>它改的是环上仲裁</a:t>
+              <a:t>S19：RTT 驱动</a:t>
             </a:r>
           </a:p>
         </p:txBody>
@@ -19351,8 +19294,8 @@
         </p:nvSpPr>
         <p:spPr>
           <a:xfrm>
-            <a:off x="9134855" y="4439697"/>
-            <a:ext cx="2307031" cy="518853"/>
+            <a:off x="9134855" y="3876125"/>
+            <a:ext cx="2307031" cy="717438"/>
           </a:xfrm>
           <a:prstGeom prst="rect">
             <a:avLst/>
@@ -19371,31 +19314,22 @@
               </a:lnSpc>
             </a:pPr>
             <a:r>
-              <a:rPr sz="850" b="0">
+              <a:rPr sz="900" b="0">
                 <a:solidFill>
                   <a:srgbClr val="20242C"/>
                 </a:solidFill>
                 <a:latin typeface="Microsoft YaHei"/>
               </a:rPr>
-              <a:t>不动 requester / completer 的事务状态，不增加广播总线。新增的是每方向 / VC 的饥饿计数与 slot 预约状态，硬件估算 </a:t>
-            </a:r>
-            <a:r>
-              <a:rPr sz="850" b="1">
+              <a:t>REQ 上环到 DBIDResp 回到 core 就是一份现成 RTT 样本，Retry 往返也被计入。RTT 低于 target 就加窗，高于 target 就按超额比例缩窗。</a:t>
+            </a:r>
+            <a:r>
+              <a:rPr sz="900" b="1">
                 <a:solidFill>
                   <a:srgbClr val="20242C"/>
                 </a:solidFill>
                 <a:latin typeface="Microsoft YaHei"/>
               </a:rPr>
-              <a:t>3,120 FF-eq</a:t>
-            </a:r>
-            <a:r>
-              <a:rPr sz="850" b="0">
-                <a:solidFill>
-                  <a:srgbClr val="20242C"/>
-                </a:solidFill>
-                <a:latin typeface="Microsoft YaHei"/>
-              </a:rPr>
-              <a:t>。</a:t>
+              <a:t>不加报文、不加标记位。</a:t>
             </a:r>
           </a:p>
         </p:txBody>
@@ -19408,17 +19342,19 @@
         </p:nvSpPr>
         <p:spPr>
           <a:xfrm>
-            <a:off x="8951976" y="5333217"/>
-            <a:ext cx="2672791" cy="994430"/>
+            <a:off x="8951976" y="4903997"/>
+            <a:ext cx="2672791" cy="1423650"/>
           </a:xfrm>
           <a:prstGeom prst="rect">
             <a:avLst/>
           </a:prstGeom>
           <a:solidFill>
-            <a:srgbClr val="D20A2E"/>
+            <a:srgbClr val="EDF2F7"/>
           </a:solidFill>
-          <a:ln>
-            <a:noFill/>
+          <a:ln w="12700">
+            <a:solidFill>
+              <a:srgbClr val="DCE3EA"/>
+            </a:solidFill>
           </a:ln>
           <a:effectLst/>
         </p:spPr>
@@ -19452,33 +19388,33 @@
         </p:nvSpPr>
         <p:spPr>
           <a:xfrm>
-            <a:off x="9262872" y="5424657"/>
-            <a:ext cx="2050999" cy="811550"/>
-          </a:xfrm>
-          <a:prstGeom prst="rect">
-            <a:avLst/>
-          </a:prstGeom>
-          <a:noFill/>
-        </p:spPr>
-        <p:txBody>
-          <a:bodyPr wrap="square" anchor="ctr" lIns="0" rIns="0" tIns="0" bIns="0">
-            <a:spAutoFit/>
-          </a:bodyPr>
-          <a:lstStyle/>
-          <a:p>
-            <a:pPr algn="l">
-              <a:lnSpc>
-                <a:spcPct val="104000"/>
-              </a:lnSpc>
-            </a:pPr>
-            <a:r>
-              <a:rPr sz="1050" b="0">
-                <a:solidFill>
-                  <a:srgbClr val="FFFFFF"/>
-                </a:solidFill>
-                <a:latin typeface="Microsoft YaHei"/>
-              </a:rPr>
-              <a:t>核心边界：I-tag 只把「一个具体 slot」送给一个具体饥饿点；它不估计全局公平度，也不保证长期速率完全拉齐。</a:t>
+            <a:off x="9134855" y="5104703"/>
+            <a:ext cx="2307031" cy="259080"/>
+          </a:xfrm>
+          <a:prstGeom prst="rect">
+            <a:avLst/>
+          </a:prstGeom>
+          <a:noFill/>
+        </p:spPr>
+        <p:txBody>
+          <a:bodyPr wrap="square" anchor="t" lIns="0" rIns="0" tIns="0" bIns="0">
+            <a:spAutoFit/>
+          </a:bodyPr>
+          <a:lstStyle/>
+          <a:p>
+            <a:pPr algn="l">
+              <a:lnSpc>
+                <a:spcPct val="100000"/>
+              </a:lnSpc>
+            </a:pPr>
+            <a:r>
+              <a:rPr sz="1200" b="1">
+                <a:solidFill>
+                  <a:srgbClr val="20242C"/>
+                </a:solidFill>
+                <a:latin typeface="Microsoft YaHei"/>
+              </a:rPr>
+              <a:t>S20：ECN 驱动</a:t>
             </a:r>
           </a:p>
         </p:txBody>
@@ -19486,6 +19422,45 @@
       <p:sp>
         <p:nvSpPr>
           <p:cNvPr id="19" name="TextBox 18"/>
+          <p:cNvSpPr txBox="1"/>
+          <p:nvPr/>
+        </p:nvSpPr>
+        <p:spPr>
+          <a:xfrm>
+            <a:off x="9134855" y="5446079"/>
+            <a:ext cx="2307031" cy="717438"/>
+          </a:xfrm>
+          <a:prstGeom prst="rect">
+            <a:avLst/>
+          </a:prstGeom>
+          <a:noFill/>
+        </p:spPr>
+        <p:txBody>
+          <a:bodyPr wrap="square" anchor="t" lIns="0" rIns="0" tIns="0" bIns="0">
+            <a:spAutoFit/>
+          </a:bodyPr>
+          <a:lstStyle/>
+          <a:p>
+            <a:pPr algn="l">
+              <a:lnSpc>
+                <a:spcPct val="102000"/>
+              </a:lnSpc>
+            </a:pPr>
+            <a:r>
+              <a:rPr sz="900" b="0">
+                <a:solidFill>
+                  <a:srgbClr val="20242C"/>
+                </a:solidFill>
+                <a:latin typeface="Microsoft YaHei"/>
+              </a:rPr>
+              <a:t>HA 根据 request tracker 占用率在 DBIDResp 上附 1 bit mark，RetryAck 直接视为 mark。core 对标记比例做 EWMA；有标记按 α/2 缩窗，无标记按 1/W 加窗。</a:t>
+            </a:r>
+          </a:p>
+        </p:txBody>
+      </p:sp>
+      <p:sp>
+        <p:nvSpPr>
+          <p:cNvPr id="20" name="TextBox 19"/>
           <p:cNvSpPr txBox="1"/>
           <p:nvPr/>
         </p:nvSpPr>
@@ -19517,7 +19492,7 @@
                 </a:solidFill>
                 <a:latin typeface="Arial"/>
               </a:rPr>
-              <a:t>25 / 34</a:t>
+              <a:t>25 / 32</a:t>
             </a:r>
           </a:p>
         </p:txBody>
@@ -19662,7 +19637,7 @@
                 </a:solidFill>
                 <a:latin typeface="Microsoft YaHei"/>
               </a:rPr>
-              <a:t>I-tag 实测：均匀写</a:t>
+              <a:t>S19 / S20 实测：均匀写</a:t>
             </a:r>
           </a:p>
         </p:txBody>
@@ -19867,7 +19842,7 @@
                 </a:solidFill>
                 <a:latin typeface="Arial"/>
               </a:rPr>
-              <a:t>0.97495</a:t>
+              <a:t>≤0.28%</a:t>
             </a:r>
           </a:p>
         </p:txBody>
@@ -19906,7 +19881,7 @@
                 </a:solidFill>
                 <a:latin typeface="Microsoft YaHei"/>
               </a:rPr>
-              <a:t>I-tag 的 100 拍 Jain（S0 = 0.92818）</a:t>
+              <a:t>S19 / S20 的总带宽与 S0 的最大差异</a:t>
             </a:r>
           </a:p>
           <a:p>
@@ -19925,7 +19900,7 @@
                 </a:solidFill>
                 <a:latin typeface="Microsoft YaHei"/>
               </a:rPr>
-              <a:t>总带宽 −2.71%，整窗 max/min = 1.2526</a:t>
+              <a:t>两者各 5,840 FF-eq · requester 动态窗口</a:t>
             </a:r>
           </a:p>
         </p:txBody>
@@ -19976,7 +19951,7 @@
       </p:sp>
       <p:pic>
         <p:nvPicPr>
-          <p:cNvPr id="12" name="Picture 11" descr="27-itag-compare.png"/>
+          <p:cNvPr id="12" name="Picture 11" descr="29-window-compare.png"/>
           <p:cNvPicPr>
             <a:picLocks noChangeAspect="1"/>
           </p:cNvPicPr>
@@ -19990,7 +19965,7 @@
         </p:blipFill>
         <p:spPr>
           <a:xfrm>
-            <a:off x="3328416" y="1207499"/>
+            <a:off x="3328416" y="1169399"/>
             <a:ext cx="8296351" cy="2629125"/>
           </a:xfrm>
           <a:prstGeom prst="rect">
@@ -20006,7 +19981,7 @@
         </p:nvSpPr>
         <p:spPr>
           <a:xfrm>
-            <a:off x="3328416" y="3928065"/>
+            <a:off x="3328416" y="3889965"/>
             <a:ext cx="8296351" cy="292608"/>
           </a:xfrm>
           <a:prstGeom prst="rect">
@@ -20032,7 +20007,7 @@
                 </a:solidFill>
                 <a:latin typeface="Microsoft YaHei"/>
               </a:rPr>
-              <a:t>三幅依次比较总带宽、100 拍瞬时 Jain、整窗最快 / 最慢核带宽比；每幅内三根柱都是 S0 / S1 / I-tag。</a:t>
+              <a:t>三幅依次比较总带宽、100 拍瞬时 Jain、整窗最快 / 最慢核带宽比；每幅内四根柱都是 S0 / S1 / S19 / S20。</a:t>
             </a:r>
           </a:p>
         </p:txBody>
@@ -20045,8 +20020,8 @@
         </p:nvSpPr>
         <p:spPr>
           <a:xfrm>
-            <a:off x="566928" y="4733229"/>
-            <a:ext cx="3527450" cy="1594418"/>
+            <a:off x="566928" y="4657029"/>
+            <a:ext cx="3527450" cy="1670618"/>
           </a:xfrm>
           <a:prstGeom prst="rect">
             <a:avLst/>
@@ -20091,7 +20066,7 @@
         </p:nvSpPr>
         <p:spPr>
           <a:xfrm>
-            <a:off x="768096" y="5038417"/>
+            <a:off x="768096" y="5000317"/>
             <a:ext cx="3125114" cy="277622"/>
           </a:xfrm>
           <a:prstGeom prst="rect">
@@ -20117,7 +20092,7 @@
                 </a:solidFill>
                 <a:latin typeface="Microsoft YaHei"/>
               </a:rPr>
-              <a:t>作用是局部补 slot</a:t>
+              <a:t>信号不同，执行器相同</a:t>
             </a:r>
           </a:p>
         </p:txBody>
@@ -20130,7 +20105,7 @@
         </p:nvSpPr>
         <p:spPr>
           <a:xfrm>
-            <a:off x="768096" y="5398335"/>
+            <a:off x="768096" y="5360235"/>
             <a:ext cx="3125114" cy="660699"/>
           </a:xfrm>
           <a:prstGeom prst="rect">
@@ -20156,7 +20131,7 @@
                 </a:solidFill>
                 <a:latin typeface="Microsoft YaHei"/>
               </a:rPr>
-              <a:t>t_inj=2 让 I-tag 及早发现连续抢不到 hop 的节点；hold=2 又限制单次让位只持续两拍，避免把上游长期封住。</a:t>
+              <a:t>S19 看端到端 RTT，能覆盖 ring 与 completer 等待；S20 只看 HA tracker 压力，信号更直接但需要 DBIDResp 的 1 bit mark。</a:t>
             </a:r>
           </a:p>
         </p:txBody>
@@ -20169,8 +20144,8 @@
         </p:nvSpPr>
         <p:spPr>
           <a:xfrm>
-            <a:off x="4332122" y="4733229"/>
-            <a:ext cx="3527450" cy="1594418"/>
+            <a:off x="4332122" y="4657029"/>
+            <a:ext cx="3527450" cy="1670618"/>
           </a:xfrm>
           <a:prstGeom prst="rect">
             <a:avLst/>
@@ -20215,7 +20190,7 @@
         </p:nvSpPr>
         <p:spPr>
           <a:xfrm>
-            <a:off x="4533290" y="4934397"/>
+            <a:off x="4533290" y="4858197"/>
             <a:ext cx="3125114" cy="277622"/>
           </a:xfrm>
           <a:prstGeom prst="rect">
@@ -20241,7 +20216,7 @@
                 </a:solidFill>
                 <a:latin typeface="Microsoft YaHei"/>
               </a:rPr>
-              <a:t>三项指标一起看</a:t>
+              <a:t>当前工作点结果接近</a:t>
             </a:r>
           </a:p>
         </p:txBody>
@@ -20254,8 +20229,8 @@
         </p:nvSpPr>
         <p:spPr>
           <a:xfrm>
-            <a:off x="4533290" y="5294315"/>
-            <a:ext cx="3125114" cy="868740"/>
+            <a:off x="4533290" y="5218115"/>
+            <a:ext cx="3125114" cy="944940"/>
           </a:xfrm>
           <a:prstGeom prst="rect">
             <a:avLst/>
@@ -20274,14 +20249,33 @@
               </a:lnSpc>
             </a:pPr>
             <a:r>
+              <a:rPr sz="1100" b="1">
+                <a:solidFill>
+                  <a:srgbClr val="20242C"/>
+                </a:solidFill>
+                <a:latin typeface="Microsoft YaHei"/>
+              </a:rPr>
+              <a:t>S19</a:t>
+            </a:r>
+            <a:r>
               <a:rPr sz="1100" b="0">
                 <a:solidFill>
                   <a:srgbClr val="20242C"/>
                 </a:solidFill>
                 <a:latin typeface="Microsoft YaHei"/>
               </a:rPr>
-              <a:t>总带宽 </a:t>
-            </a:r>
+              <a:t>：带宽 5.5255（vs S0 −0.28%）、Jain 0.93324、max/min 1.5515。</a:t>
+            </a:r>
+          </a:p>
+          <a:p>
+            <a:pPr algn="l">
+              <a:lnSpc>
+                <a:spcPct val="102000"/>
+              </a:lnSpc>
+              <a:spcBef>
+                <a:spcPts val="600"/>
+              </a:spcBef>
+            </a:pPr>
             <a:r>
               <a:rPr sz="1100" b="1">
                 <a:solidFill>
@@ -20289,7 +20283,7 @@
                 </a:solidFill>
                 <a:latin typeface="Microsoft YaHei"/>
               </a:rPr>
-              <a:t>5.3908</a:t>
+              <a:t>S20</a:t>
             </a:r>
             <a:r>
               <a:rPr sz="1100" b="0">
@@ -20298,43 +20292,7 @@
                 </a:solidFill>
                 <a:latin typeface="Microsoft YaHei"/>
               </a:rPr>
-              <a:t>（比 S0 低 2.71%）；Jain </a:t>
-            </a:r>
-            <a:r>
-              <a:rPr sz="1100" b="1">
-                <a:solidFill>
-                  <a:srgbClr val="20242C"/>
-                </a:solidFill>
-                <a:latin typeface="Microsoft YaHei"/>
-              </a:rPr>
-              <a:t>0.97495</a:t>
-            </a:r>
-            <a:r>
-              <a:rPr sz="1100" b="0">
-                <a:solidFill>
-                  <a:srgbClr val="20242C"/>
-                </a:solidFill>
-                <a:latin typeface="Microsoft YaHei"/>
-              </a:rPr>
-              <a:t>；max/min </a:t>
-            </a:r>
-            <a:r>
-              <a:rPr sz="1100" b="1">
-                <a:solidFill>
-                  <a:srgbClr val="20242C"/>
-                </a:solidFill>
-                <a:latin typeface="Microsoft YaHei"/>
-              </a:rPr>
-              <a:t>1.2526</a:t>
-            </a:r>
-            <a:r>
-              <a:rPr sz="1100" b="0">
-                <a:solidFill>
-                  <a:srgbClr val="20242C"/>
-                </a:solidFill>
-                <a:latin typeface="Microsoft YaHei"/>
-              </a:rPr>
-              <a:t>。与 S0 相比，两项公平性都明显改善；与 S1 相比，Jain 更高、长期速率差更小，带宽也更高。</a:t>
+              <a:t>：带宽 5.5478（vs S0 +0.12%）、Jain 0.93017、max/min 1.5514。</a:t>
             </a:r>
           </a:p>
         </p:txBody>
@@ -20347,8 +20305,8 @@
         </p:nvSpPr>
         <p:spPr>
           <a:xfrm>
-            <a:off x="8097316" y="4733229"/>
-            <a:ext cx="3527450" cy="1594418"/>
+            <a:off x="8097316" y="4657029"/>
+            <a:ext cx="3527450" cy="1670618"/>
           </a:xfrm>
           <a:prstGeom prst="rect">
             <a:avLst/>
@@ -20393,7 +20351,7 @@
         </p:nvSpPr>
         <p:spPr>
           <a:xfrm>
-            <a:off x="8298484" y="5038417"/>
+            <a:off x="8298484" y="5000317"/>
             <a:ext cx="3125114" cy="277622"/>
           </a:xfrm>
           <a:prstGeom prst="rect">
@@ -20419,7 +20377,7 @@
                 </a:solidFill>
                 <a:latin typeface="Microsoft YaHei"/>
               </a:rPr>
-              <a:t>适用边界</a:t>
+              <a:t>工程选择</a:t>
             </a:r>
           </a:p>
         </p:txBody>
@@ -20432,7 +20390,7 @@
         </p:nvSpPr>
         <p:spPr>
           <a:xfrm>
-            <a:off x="8298484" y="5398335"/>
+            <a:off x="8298484" y="5360235"/>
             <a:ext cx="3125114" cy="660699"/>
           </a:xfrm>
           <a:prstGeom prst="rect">
@@ -20458,25 +20416,7 @@
                 </a:solidFill>
                 <a:latin typeface="Microsoft YaHei"/>
               </a:rPr>
-              <a:t>适合</a:t>
-            </a:r>
-            <a:r>
-              <a:rPr sz="1100" b="1">
-                <a:solidFill>
-                  <a:srgbClr val="20242C"/>
-                </a:solidFill>
-                <a:latin typeface="Microsoft YaHei"/>
-              </a:rPr>
-              <a:t>只允许改环上仲裁、又不希望新增总线</a:t>
-            </a:r>
-            <a:r>
-              <a:rPr sz="1100" b="0">
-                <a:solidFill>
-                  <a:srgbClr val="20242C"/>
-                </a:solidFill>
-                <a:latin typeface="Microsoft YaHei"/>
-              </a:rPr>
-              <a:t>的实现条件。若目标是把长期速率差压到接近 1，仍需更强的跨核进度信息。</a:t>
+              <a:t>已经有 RTT 计时器时，S19 集成最轻；已经有 tracker 水位与可用标记位时，S20 的拥塞含义更明确。两者都涉及 requester 的事务发起窗口。</a:t>
             </a:r>
           </a:p>
         </p:txBody>
@@ -20515,7 +20455,7 @@
                 </a:solidFill>
                 <a:latin typeface="Arial"/>
               </a:rPr>
-              <a:t>26 / 34</a:t>
+              <a:t>26 / 32</a:t>
             </a:r>
           </a:p>
         </p:txBody>
@@ -20660,7 +20600,7 @@
                 </a:solidFill>
                 <a:latin typeface="Microsoft YaHei"/>
               </a:rPr>
-              <a:t>S19 Swift / S20 DCTCP（各 5,840 FF‑eq） · requester 动态窗口</a:t>
+              <a:t>S22 赤字触发的限域让路（13,920 FF‑eq） · 仲裁型 / 总线触发</a:t>
             </a:r>
           </a:p>
         </p:txBody>
@@ -20794,7 +20734,7 @@
       </p:sp>
       <p:pic>
         <p:nvPicPr>
-          <p:cNvPr id="8" name="Picture 7" descr="28-window-diagram.png"/>
+          <p:cNvPr id="8" name="Picture 7" descr="24-s22-diagram.png"/>
           <p:cNvPicPr>
             <a:picLocks noChangeAspect="1"/>
           </p:cNvPicPr>
@@ -20850,7 +20790,7 @@
                 </a:solidFill>
                 <a:latin typeface="Microsoft YaHei"/>
               </a:rPr>
-              <a:t>两者共用每核动态 outstanding 窗口；S19 用协议天然 RTT，S20 用 HA tracker 产生的 1 bit ECN 标记。</a:t>
+              <a:t>复用 S1 那条 6 bit 广播总线，位宽完全相同，只换了线上放什么：从「我有多堵」换成「我这窗发成了多少」。</a:t>
             </a:r>
           </a:p>
         </p:txBody>
@@ -20883,13 +20823,13 @@
               </a:lnSpc>
             </a:pPr>
             <a:r>
-              <a:rPr sz="800" b="1">
+              <a:rPr sz="950" b="1">
                 <a:solidFill>
                   <a:srgbClr val="D20A2E"/>
                 </a:solidFill>
                 <a:latin typeface="Arial"/>
               </a:rPr>
-              <a:t>N E A R - F R O N T I E R   ·   W I N D O W   C C</a:t>
+              <a:t>R I N G - O N L Y   ·   M E C H A N I S M</a:t>
             </a:r>
           </a:p>
         </p:txBody>
@@ -20903,7 +20843,7 @@
         <p:spPr>
           <a:xfrm>
             <a:off x="8951976" y="1408176"/>
-            <a:ext cx="2672791" cy="1779563"/>
+            <a:ext cx="2672791" cy="2540763"/>
           </a:xfrm>
           <a:prstGeom prst="rect">
             <a:avLst/>
@@ -20948,7 +20888,7 @@
         </p:nvSpPr>
         <p:spPr>
           <a:xfrm>
-            <a:off x="9134855" y="1606892"/>
+            <a:off x="9134855" y="1591056"/>
             <a:ext cx="2307031" cy="259080"/>
           </a:xfrm>
           <a:prstGeom prst="rect">
@@ -20974,7 +20914,7 @@
                 </a:solidFill>
                 <a:latin typeface="Microsoft YaHei"/>
               </a:rPr>
-              <a:t>共同执行器：动态 outstanding</a:t>
+              <a:t>四段机制</a:t>
             </a:r>
           </a:p>
         </p:txBody>
@@ -20987,8 +20927,8 @@
         </p:nvSpPr>
         <p:spPr>
           <a:xfrm>
-            <a:off x="9134855" y="1948268"/>
-            <a:ext cx="2307031" cy="1077330"/>
+            <a:off x="9134855" y="1932432"/>
+            <a:ext cx="2307031" cy="1929505"/>
           </a:xfrm>
           <a:prstGeom prst="rect">
             <a:avLst/>
@@ -21007,13 +20947,22 @@
               </a:lnSpc>
             </a:pPr>
             <a:r>
-              <a:rPr sz="850" b="0">
+              <a:rPr sz="800" b="1">
                 <a:solidFill>
                   <a:srgbClr val="20242C"/>
                 </a:solidFill>
                 <a:latin typeface="Microsoft YaHei"/>
               </a:rPr>
-              <a:t>每个 core 维护窗口 Wc：只有当前在飞事务数 &lt; Wc，才允许发新的 REQ。初值 16、下限 8、硬上限仍是 core_outstanding = 32。</a:t>
+              <a:t>① 检测</a:t>
+            </a:r>
+            <a:r>
+              <a:rPr sz="800" b="0">
+                <a:solidFill>
+                  <a:srgbClr val="20242C"/>
+                </a:solidFill>
+                <a:latin typeface="Microsoft YaHei"/>
+              </a:rPr>
+              <a:t>：每节点只数自己本窗成功上环的 flit 数，饱和到 6 bit。播的是进度，不是拥塞等级。</a:t>
             </a:r>
           </a:p>
           <a:p>
@@ -21026,13 +20975,96 @@
               </a:spcBef>
             </a:pPr>
             <a:r>
-              <a:rPr sz="850" b="0">
+              <a:rPr sz="800" b="1">
                 <a:solidFill>
                   <a:srgbClr val="20242C"/>
                 </a:solidFill>
                 <a:latin typeface="Microsoft YaHei"/>
               </a:rPr>
-              <a:t>事务完成归还名额；Retry 重发不受窗口限制。窗口有名额时允许突发，因此比逐拍 rate pacer 更贴近 CHI 的事务模型。</a:t>
+              <a:t>② 传递</a:t>
+            </a:r>
+            <a:r>
+              <a:rPr sz="800" b="0">
+                <a:solidFill>
+                  <a:srgbClr val="20242C"/>
+                </a:solidFill>
+                <a:latin typeface="Microsoft YaHei"/>
+              </a:rPr>
+              <a:t>：复用 S1 的 6 bit 广播总线（30 拍）。自己的进度也从总线读回，两边过同一个量化器、同一段延迟。</a:t>
+            </a:r>
+          </a:p>
+          <a:p>
+            <a:pPr algn="l">
+              <a:lnSpc>
+                <a:spcPct val="102000"/>
+              </a:lnSpc>
+              <a:spcBef>
+                <a:spcPts val="600"/>
+              </a:spcBef>
+            </a:pPr>
+            <a:r>
+              <a:rPr sz="800" b="1">
+                <a:solidFill>
+                  <a:srgbClr val="20242C"/>
+                </a:solidFill>
+                <a:latin typeface="Microsoft YaHei"/>
+              </a:rPr>
+              <a:t>③ 反馈</a:t>
+            </a:r>
+            <a:r>
+              <a:rPr sz="800" b="0">
+                <a:solidFill>
+                  <a:srgbClr val="20242C"/>
+                </a:solidFill>
+                <a:latin typeface="Microsoft YaHei"/>
+              </a:rPr>
+              <a:t>：赤字 = 总线上 10 项的均值 − 自己那一项，越过 0.5 就举请求。让路是</a:t>
+            </a:r>
+            <a:r>
+              <a:rPr sz="800" b="1">
+                <a:solidFill>
+                  <a:srgbClr val="20242C"/>
+                </a:solidFill>
+                <a:latin typeface="Microsoft YaHei"/>
+              </a:rPr>
+              <a:t>单向</a:t>
+            </a:r>
+            <a:r>
+              <a:rPr sz="800" b="0">
+                <a:solidFill>
+                  <a:srgbClr val="20242C"/>
+                </a:solidFill>
+                <a:latin typeface="Microsoft YaHei"/>
+              </a:rPr>
+              <a:t>的：落后的节点永不让路。</a:t>
+            </a:r>
+          </a:p>
+          <a:p>
+            <a:pPr algn="l">
+              <a:lnSpc>
+                <a:spcPct val="102000"/>
+              </a:lnSpc>
+              <a:spcBef>
+                <a:spcPts val="600"/>
+              </a:spcBef>
+            </a:pPr>
+            <a:r>
+              <a:rPr sz="800" b="1">
+                <a:solidFill>
+                  <a:srgbClr val="20242C"/>
+                </a:solidFill>
+                <a:latin typeface="Microsoft YaHei"/>
+              </a:rPr>
+              <a:t>④ 执行：让位，不是门控</a:t>
+            </a:r>
+            <a:r>
+              <a:rPr sz="800" b="0">
+                <a:solidFill>
+                  <a:srgbClr val="20242C"/>
+                </a:solidFill>
+                <a:latin typeface="Microsoft YaHei"/>
+              </a:rPr>
+              <a:t>。只对「会从请求者出向 hop 骑过去」的 flit 让路，同时前瞻改发一个会先下环的 flit，让自己的 hop 不空转。</a:t>
             </a:r>
           </a:p>
         </p:txBody>
@@ -21045,19 +21077,17 @@
         </p:nvSpPr>
         <p:spPr>
           <a:xfrm>
-            <a:off x="8951976" y="3334043"/>
-            <a:ext cx="2672791" cy="1423650"/>
+            <a:off x="8951976" y="4095243"/>
+            <a:ext cx="2672791" cy="1150029"/>
           </a:xfrm>
           <a:prstGeom prst="rect">
             <a:avLst/>
           </a:prstGeom>
           <a:solidFill>
-            <a:srgbClr val="EDF2F7"/>
+            <a:srgbClr val="D20A2E"/>
           </a:solidFill>
-          <a:ln w="19050">
-            <a:solidFill>
-              <a:srgbClr val="D20A2E"/>
-            </a:solidFill>
+          <a:ln>
+            <a:noFill/>
           </a:ln>
           <a:effectLst/>
         </p:spPr>
@@ -21091,106 +21121,56 @@
         </p:nvSpPr>
         <p:spPr>
           <a:xfrm>
-            <a:off x="9134855" y="3534749"/>
-            <a:ext cx="2307031" cy="259080"/>
-          </a:xfrm>
-          <a:prstGeom prst="rect">
-            <a:avLst/>
-          </a:prstGeom>
-          <a:noFill/>
-        </p:spPr>
-        <p:txBody>
-          <a:bodyPr wrap="square" anchor="t" lIns="0" rIns="0" tIns="0" bIns="0">
-            <a:spAutoFit/>
-          </a:bodyPr>
-          <a:lstStyle/>
-          <a:p>
-            <a:pPr algn="l">
-              <a:lnSpc>
-                <a:spcPct val="100000"/>
-              </a:lnSpc>
-            </a:pPr>
-            <a:r>
-              <a:rPr sz="1200" b="1">
-                <a:solidFill>
-                  <a:srgbClr val="D20A2E"/>
-                </a:solidFill>
-                <a:latin typeface="Microsoft YaHei"/>
-              </a:rPr>
-              <a:t>S19：RTT 驱动</a:t>
-            </a:r>
-          </a:p>
-        </p:txBody>
-      </p:sp>
-      <p:sp>
-        <p:nvSpPr>
-          <p:cNvPr id="16" name="TextBox 15"/>
-          <p:cNvSpPr txBox="1"/>
-          <p:nvPr/>
-        </p:nvSpPr>
-        <p:spPr>
-          <a:xfrm>
-            <a:off x="9134855" y="3876125"/>
-            <a:ext cx="2307031" cy="717438"/>
-          </a:xfrm>
-          <a:prstGeom prst="rect">
-            <a:avLst/>
-          </a:prstGeom>
-          <a:noFill/>
-        </p:spPr>
-        <p:txBody>
-          <a:bodyPr wrap="square" anchor="t" lIns="0" rIns="0" tIns="0" bIns="0">
-            <a:spAutoFit/>
-          </a:bodyPr>
-          <a:lstStyle/>
-          <a:p>
-            <a:pPr algn="l">
-              <a:lnSpc>
-                <a:spcPct val="102000"/>
-              </a:lnSpc>
-            </a:pPr>
-            <a:r>
-              <a:rPr sz="900" b="0">
-                <a:solidFill>
-                  <a:srgbClr val="20242C"/>
-                </a:solidFill>
-                <a:latin typeface="Microsoft YaHei"/>
-              </a:rPr>
-              <a:t>REQ 上环到 DBIDResp 回到 core 就是一份现成 RTT 样本，Retry 往返也被计入。RTT 低于 target 就加窗，高于 target 就按超额比例缩窗。</a:t>
-            </a:r>
-            <a:r>
-              <a:rPr sz="900" b="1">
-                <a:solidFill>
-                  <a:srgbClr val="20242C"/>
-                </a:solidFill>
-                <a:latin typeface="Microsoft YaHei"/>
-              </a:rPr>
-              <a:t>不加报文、不加标记位。</a:t>
-            </a:r>
-          </a:p>
-        </p:txBody>
-      </p:sp>
-      <p:sp>
-        <p:nvSpPr>
-          <p:cNvPr id="17" name="Rectangle 16"/>
+            <a:off x="9262872" y="4186683"/>
+            <a:ext cx="2050999" cy="967149"/>
+          </a:xfrm>
+          <a:prstGeom prst="rect">
+            <a:avLst/>
+          </a:prstGeom>
+          <a:noFill/>
+        </p:spPr>
+        <p:txBody>
+          <a:bodyPr wrap="square" anchor="ctr" lIns="0" rIns="0" tIns="0" bIns="0">
+            <a:spAutoFit/>
+          </a:bodyPr>
+          <a:lstStyle/>
+          <a:p>
+            <a:pPr algn="l">
+              <a:lnSpc>
+                <a:spcPct val="104000"/>
+              </a:lnSpc>
+            </a:pPr>
+            <a:r>
+              <a:rPr sz="1050" b="0">
+                <a:solidFill>
+                  <a:srgbClr val="FFFFFF"/>
+                </a:solidFill>
+                <a:latin typeface="Microsoft YaHei"/>
+              </a:rPr>
+              <a:t>与 S1 的关键差别：S1 的执行器是令牌桶闸门（没额度就不上环，让出的槽被沿途吃掉）；S22 只在具体某一拍上让出具体某个位置。</a:t>
+            </a:r>
+          </a:p>
+        </p:txBody>
+      </p:sp>
+      <p:sp>
+        <p:nvSpPr>
+          <p:cNvPr id="16" name="Rectangle 15"/>
           <p:cNvSpPr/>
           <p:nvPr/>
         </p:nvSpPr>
         <p:spPr>
           <a:xfrm>
-            <a:off x="8951976" y="4903997"/>
-            <a:ext cx="2672791" cy="1423650"/>
+            <a:off x="8951976" y="5391577"/>
+            <a:ext cx="2672791" cy="936070"/>
           </a:xfrm>
           <a:prstGeom prst="rect">
             <a:avLst/>
           </a:prstGeom>
           <a:solidFill>
-            <a:srgbClr val="EDF2F7"/>
+            <a:srgbClr val="D20A2E"/>
           </a:solidFill>
-          <a:ln w="12700">
-            <a:solidFill>
-              <a:srgbClr val="DCE3EA"/>
-            </a:solidFill>
+          <a:ln>
+            <a:noFill/>
           </a:ln>
           <a:effectLst/>
         </p:spPr>
@@ -21218,85 +21198,46 @@
       </p:sp>
       <p:sp>
         <p:nvSpPr>
+          <p:cNvPr id="17" name="TextBox 16"/>
+          <p:cNvSpPr txBox="1"/>
+          <p:nvPr/>
+        </p:nvSpPr>
+        <p:spPr>
+          <a:xfrm>
+            <a:off x="9262872" y="5483017"/>
+            <a:ext cx="2050999" cy="753190"/>
+          </a:xfrm>
+          <a:prstGeom prst="rect">
+            <a:avLst/>
+          </a:prstGeom>
+          <a:noFill/>
+        </p:spPr>
+        <p:txBody>
+          <a:bodyPr wrap="square" anchor="ctr" lIns="0" rIns="0" tIns="0" bIns="0">
+            <a:spAutoFit/>
+          </a:bodyPr>
+          <a:lstStyle/>
+          <a:p>
+            <a:pPr algn="l">
+              <a:lnSpc>
+                <a:spcPct val="104000"/>
+              </a:lnSpc>
+            </a:pPr>
+            <a:r>
+              <a:rPr sz="1000" b="0">
+                <a:solidFill>
+                  <a:srgbClr val="FFFFFF"/>
+                </a:solidFill>
+                <a:latin typeface="Microsoft YaHei"/>
+              </a:rPr>
+              <a:t>同等公平度下让位比门控省 10 倍带宽：S23 门控付 1.50%，S22 让位只付 0.15%（K = 2000 同轮对比）。</a:t>
+            </a:r>
+          </a:p>
+        </p:txBody>
+      </p:sp>
+      <p:sp>
+        <p:nvSpPr>
           <p:cNvPr id="18" name="TextBox 17"/>
-          <p:cNvSpPr txBox="1"/>
-          <p:nvPr/>
-        </p:nvSpPr>
-        <p:spPr>
-          <a:xfrm>
-            <a:off x="9134855" y="5104703"/>
-            <a:ext cx="2307031" cy="259080"/>
-          </a:xfrm>
-          <a:prstGeom prst="rect">
-            <a:avLst/>
-          </a:prstGeom>
-          <a:noFill/>
-        </p:spPr>
-        <p:txBody>
-          <a:bodyPr wrap="square" anchor="t" lIns="0" rIns="0" tIns="0" bIns="0">
-            <a:spAutoFit/>
-          </a:bodyPr>
-          <a:lstStyle/>
-          <a:p>
-            <a:pPr algn="l">
-              <a:lnSpc>
-                <a:spcPct val="100000"/>
-              </a:lnSpc>
-            </a:pPr>
-            <a:r>
-              <a:rPr sz="1200" b="1">
-                <a:solidFill>
-                  <a:srgbClr val="20242C"/>
-                </a:solidFill>
-                <a:latin typeface="Microsoft YaHei"/>
-              </a:rPr>
-              <a:t>S20：ECN 驱动</a:t>
-            </a:r>
-          </a:p>
-        </p:txBody>
-      </p:sp>
-      <p:sp>
-        <p:nvSpPr>
-          <p:cNvPr id="19" name="TextBox 18"/>
-          <p:cNvSpPr txBox="1"/>
-          <p:nvPr/>
-        </p:nvSpPr>
-        <p:spPr>
-          <a:xfrm>
-            <a:off x="9134855" y="5446079"/>
-            <a:ext cx="2307031" cy="717438"/>
-          </a:xfrm>
-          <a:prstGeom prst="rect">
-            <a:avLst/>
-          </a:prstGeom>
-          <a:noFill/>
-        </p:spPr>
-        <p:txBody>
-          <a:bodyPr wrap="square" anchor="t" lIns="0" rIns="0" tIns="0" bIns="0">
-            <a:spAutoFit/>
-          </a:bodyPr>
-          <a:lstStyle/>
-          <a:p>
-            <a:pPr algn="l">
-              <a:lnSpc>
-                <a:spcPct val="102000"/>
-              </a:lnSpc>
-            </a:pPr>
-            <a:r>
-              <a:rPr sz="900" b="0">
-                <a:solidFill>
-                  <a:srgbClr val="20242C"/>
-                </a:solidFill>
-                <a:latin typeface="Microsoft YaHei"/>
-              </a:rPr>
-              <a:t>HA 根据 request tracker 占用率在 DBIDResp 上附 1 bit mark，RetryAck 直接视为 mark。core 对标记比例做 EWMA；有标记按 α/2 缩窗，无标记按 1/W 加窗。</a:t>
-            </a:r>
-          </a:p>
-        </p:txBody>
-      </p:sp>
-      <p:sp>
-        <p:nvSpPr>
-          <p:cNvPr id="20" name="TextBox 19"/>
           <p:cNvSpPr txBox="1"/>
           <p:nvPr/>
         </p:nvSpPr>
@@ -21328,7 +21269,7 @@
                 </a:solidFill>
                 <a:latin typeface="Arial"/>
               </a:rPr>
-              <a:t>27 / 34</a:t>
+              <a:t>27 / 32</a:t>
             </a:r>
           </a:p>
         </p:txBody>
@@ -21473,7 +21414,7 @@
                 </a:solidFill>
                 <a:latin typeface="Microsoft YaHei"/>
               </a:rPr>
-              <a:t>S19 / S20 实测：均匀写</a:t>
+              <a:t>S22 实测：均匀流量</a:t>
             </a:r>
           </a:p>
         </p:txBody>
@@ -21678,7 +21619,7 @@
                 </a:solidFill>
                 <a:latin typeface="Arial"/>
               </a:rPr>
-              <a:t>≤0.28%</a:t>
+              <a:t>0.94799</a:t>
             </a:r>
           </a:p>
         </p:txBody>
@@ -21717,7 +21658,7 @@
                 </a:solidFill>
                 <a:latin typeface="Microsoft YaHei"/>
               </a:rPr>
-              <a:t>S19 / S20 的总带宽与 S0 的最大差异</a:t>
+              <a:t>S22 写侧 100 拍 Jain（S0 = 0.92818）</a:t>
             </a:r>
           </a:p>
           <a:p>
@@ -21736,7 +21677,7 @@
                 </a:solidFill>
                 <a:latin typeface="Microsoft YaHei"/>
               </a:rPr>
-              <a:t>两者各 5,840 FF-eq · requester 动态窗口</a:t>
+              <a:t>总写带宽 −2.21%</a:t>
             </a:r>
           </a:p>
         </p:txBody>
@@ -21787,7 +21728,7 @@
       </p:sp>
       <p:pic>
         <p:nvPicPr>
-          <p:cNvPr id="12" name="Picture 11" descr="29-window-compare.png"/>
+          <p:cNvPr id="12" name="Picture 11" descr="25-s22-compare.png"/>
           <p:cNvPicPr>
             <a:picLocks noChangeAspect="1"/>
           </p:cNvPicPr>
@@ -21801,8 +21742,8 @@
         </p:blipFill>
         <p:spPr>
           <a:xfrm>
-            <a:off x="3328416" y="1169399"/>
-            <a:ext cx="8296351" cy="2629125"/>
+            <a:off x="3768801" y="1024128"/>
+            <a:ext cx="7415580" cy="2350007"/>
           </a:xfrm>
           <a:prstGeom prst="rect">
             <a:avLst/>
@@ -21817,7 +21758,7 @@
         </p:nvSpPr>
         <p:spPr>
           <a:xfrm>
-            <a:off x="3328416" y="3889965"/>
+            <a:off x="3328416" y="3465575"/>
             <a:ext cx="8296351" cy="292608"/>
           </a:xfrm>
           <a:prstGeom prst="rect">
@@ -21843,7 +21784,7 @@
                 </a:solidFill>
                 <a:latin typeface="Microsoft YaHei"/>
               </a:rPr>
-              <a:t>三幅依次比较总带宽、100 拍瞬时 Jain、整窗最快 / 最慢核带宽比；每幅内四根柱都是 S0 / S1 / S19 / S20。</a:t>
+              <a:t>四根柱依次 S0 / S1 / S16 / S22，橙虚线 = 理论上限 R*；写侧 K = 20000。后两幅是公平性的两个不同问题，见右侧第三张卡。</a:t>
             </a:r>
           </a:p>
         </p:txBody>
@@ -21856,8 +21797,8 @@
         </p:nvSpPr>
         <p:spPr>
           <a:xfrm>
-            <a:off x="566928" y="4657029"/>
-            <a:ext cx="3527450" cy="1670618"/>
+            <a:off x="566928" y="4087368"/>
+            <a:ext cx="3527450" cy="2240280"/>
           </a:xfrm>
           <a:prstGeom prst="rect">
             <a:avLst/>
@@ -21902,7 +21843,7 @@
         </p:nvSpPr>
         <p:spPr>
           <a:xfrm>
-            <a:off x="768096" y="5000317"/>
+            <a:off x="768096" y="4611466"/>
             <a:ext cx="3125114" cy="277622"/>
           </a:xfrm>
           <a:prstGeom prst="rect">
@@ -21928,7 +21869,7 @@
                 </a:solidFill>
                 <a:latin typeface="Microsoft YaHei"/>
               </a:rPr>
-              <a:t>信号不同，执行器相同</a:t>
+              <a:t>比 S1 全面更好</a:t>
             </a:r>
           </a:p>
         </p:txBody>
@@ -21941,8 +21882,8 @@
         </p:nvSpPr>
         <p:spPr>
           <a:xfrm>
-            <a:off x="768096" y="5360235"/>
-            <a:ext cx="3125114" cy="660699"/>
+            <a:off x="768096" y="4971384"/>
+            <a:ext cx="3125114" cy="868740"/>
           </a:xfrm>
           <a:prstGeom prst="rect">
             <a:avLst/>
@@ -21967,7 +21908,43 @@
                 </a:solidFill>
                 <a:latin typeface="Microsoft YaHei"/>
               </a:rPr>
-              <a:t>S19 看端到端 RTT，能覆盖 ring 与 completer 等待；S20 只看 HA tracker 压力，信号更直接但需要 DBIDResp 的 1 bit mark。</a:t>
+              <a:t>Jain 0.94799 vs S1 的 0.95675 基本持平，但带宽只让 </a:t>
+            </a:r>
+            <a:r>
+              <a:rPr sz="1100" b="1">
+                <a:solidFill>
+                  <a:srgbClr val="20242C"/>
+                </a:solidFill>
+                <a:latin typeface="Microsoft YaHei"/>
+              </a:rPr>
+              <a:t>2.21%</a:t>
+            </a:r>
+            <a:r>
+              <a:rPr sz="1100" b="0">
+                <a:solidFill>
+                  <a:srgbClr val="20242C"/>
+                </a:solidFill>
+                <a:latin typeface="Microsoft YaHei"/>
+              </a:rPr>
+              <a:t>，S1 要让 </a:t>
+            </a:r>
+            <a:r>
+              <a:rPr sz="1100" b="1">
+                <a:solidFill>
+                  <a:srgbClr val="20242C"/>
+                </a:solidFill>
+                <a:latin typeface="Microsoft YaHei"/>
+              </a:rPr>
+              <a:t>16.3%</a:t>
+            </a:r>
+            <a:r>
+              <a:rPr sz="1100" b="0">
+                <a:solidFill>
+                  <a:srgbClr val="20242C"/>
+                </a:solidFill>
+                <a:latin typeface="Microsoft YaHei"/>
+              </a:rPr>
+              <a:t>；max/min 1.2230 vs 1.3586。硬件还便宜 34%（13,920 vs 21,220 FF‑eq）。</a:t>
             </a:r>
           </a:p>
         </p:txBody>
@@ -21980,8 +21957,8 @@
         </p:nvSpPr>
         <p:spPr>
           <a:xfrm>
-            <a:off x="4332122" y="4657029"/>
-            <a:ext cx="3527450" cy="1670618"/>
+            <a:off x="4332122" y="4087368"/>
+            <a:ext cx="3527450" cy="2240280"/>
           </a:xfrm>
           <a:prstGeom prst="rect">
             <a:avLst/>
@@ -22026,7 +22003,7 @@
         </p:nvSpPr>
         <p:spPr>
           <a:xfrm>
-            <a:off x="4533290" y="4858197"/>
+            <a:off x="4533290" y="4611466"/>
             <a:ext cx="3125114" cy="277622"/>
           </a:xfrm>
           <a:prstGeom prst="rect">
@@ -22052,7 +22029,7 @@
                 </a:solidFill>
                 <a:latin typeface="Microsoft YaHei"/>
               </a:rPr>
-              <a:t>当前工作点结果接近</a:t>
+              <a:t>数字上被 S16 支配，但层次不同</a:t>
             </a:r>
           </a:p>
         </p:txBody>
@@ -22065,8 +22042,8 @@
         </p:nvSpPr>
         <p:spPr>
           <a:xfrm>
-            <a:off x="4533290" y="5218115"/>
-            <a:ext cx="3125114" cy="944940"/>
+            <a:off x="4533290" y="4971384"/>
+            <a:ext cx="3125114" cy="868740"/>
           </a:xfrm>
           <a:prstGeom prst="rect">
             <a:avLst/>
@@ -22085,13 +22062,22 @@
               </a:lnSpc>
             </a:pPr>
             <a:r>
+              <a:rPr sz="1100" b="0">
+                <a:solidFill>
+                  <a:srgbClr val="20242C"/>
+                </a:solidFill>
+                <a:latin typeface="Microsoft YaHei"/>
+              </a:rPr>
+              <a:t>S16 用 </a:t>
+            </a:r>
+            <a:r>
               <a:rPr sz="1100" b="1">
                 <a:solidFill>
                   <a:srgbClr val="20242C"/>
                 </a:solidFill>
                 <a:latin typeface="Microsoft YaHei"/>
               </a:rPr>
-              <a:t>S19</a:t>
+              <a:t>1/15 的硬件</a:t>
             </a:r>
             <a:r>
               <a:rPr sz="1100" b="0">
@@ -22100,35 +22086,16 @@
                 </a:solidFill>
                 <a:latin typeface="Microsoft YaHei"/>
               </a:rPr>
-              <a:t>：带宽 5.5255（vs S0 −0.28%）、Jain 0.93324、max/min 1.5515。</a:t>
-            </a:r>
-          </a:p>
-          <a:p>
-            <a:pPr algn="l">
-              <a:lnSpc>
-                <a:spcPct val="102000"/>
-              </a:lnSpc>
-              <a:spcBef>
-                <a:spcPts val="600"/>
-              </a:spcBef>
-            </a:pPr>
+              <a:t>拿到更高的 Jain（0.98466）和更小的带宽代价（0.39%）。S22 唯一的、也是决定性的优势：</a:t>
+            </a:r>
             <a:r>
               <a:rPr sz="1100" b="1">
                 <a:solidFill>
-                  <a:srgbClr val="20242C"/>
-                </a:solidFill>
-                <a:latin typeface="Microsoft YaHei"/>
-              </a:rPr>
-              <a:t>S20</a:t>
-            </a:r>
-            <a:r>
-              <a:rPr sz="1100" b="0">
-                <a:solidFill>
-                  <a:srgbClr val="20242C"/>
-                </a:solidFill>
-                <a:latin typeface="Microsoft YaHei"/>
-              </a:rPr>
-              <a:t>：带宽 5.5478（vs S0 +0.12%）、Jain 0.93017、max/min 1.5514。</a:t>
+                  <a:srgbClr val="D20A2E"/>
+                </a:solidFill>
+                <a:latin typeface="Microsoft YaHei"/>
+              </a:rPr>
+              <a:t>它只改环上仲裁，一点事务层都不碰。</a:t>
             </a:r>
           </a:p>
         </p:txBody>
@@ -22141,8 +22108,8 @@
         </p:nvSpPr>
         <p:spPr>
           <a:xfrm>
-            <a:off x="8097316" y="4657029"/>
-            <a:ext cx="3527450" cy="1670618"/>
+            <a:off x="8097316" y="4087368"/>
+            <a:ext cx="3527450" cy="2240280"/>
           </a:xfrm>
           <a:prstGeom prst="rect">
             <a:avLst/>
@@ -22187,7 +22154,7 @@
         </p:nvSpPr>
         <p:spPr>
           <a:xfrm>
-            <a:off x="8298484" y="5000317"/>
+            <a:off x="8298484" y="4294402"/>
             <a:ext cx="3125114" cy="277622"/>
           </a:xfrm>
           <a:prstGeom prst="rect">
@@ -22213,7 +22180,7 @@
                 </a:solidFill>
                 <a:latin typeface="Microsoft YaHei"/>
               </a:rPr>
-              <a:t>工程选择</a:t>
+              <a:t>两个公平性指标分别在问什么</a:t>
             </a:r>
           </a:p>
         </p:txBody>
@@ -22226,8 +22193,8 @@
         </p:nvSpPr>
         <p:spPr>
           <a:xfrm>
-            <a:off x="8298484" y="5360235"/>
-            <a:ext cx="3125114" cy="660699"/>
+            <a:off x="8298484" y="4654320"/>
+            <a:ext cx="3125114" cy="1502869"/>
           </a:xfrm>
           <a:prstGeom prst="rect">
             <a:avLst/>
@@ -22246,13 +22213,50 @@
               </a:lnSpc>
             </a:pPr>
             <a:r>
-              <a:rPr sz="1100" b="0">
+              <a:rPr sz="1050" b="1">
                 <a:solidFill>
                   <a:srgbClr val="20242C"/>
                 </a:solidFill>
                 <a:latin typeface="Microsoft YaHei"/>
               </a:rPr>
-              <a:t>已经有 RTT 计时器时，S19 集成最轻；已经有 tracker 水位与可用标记位时，S20 的拥塞含义更明确。两者都涉及 requester 的事务发起窗口。</a:t>
+              <a:t>瞬时均衡度</a:t>
+            </a:r>
+            <a:r>
+              <a:rPr sz="1050" b="0">
+                <a:solidFill>
+                  <a:srgbClr val="20242C"/>
+                </a:solidFill>
+                <a:latin typeface="Microsoft YaHei"/>
+              </a:rPr>
+              <a:t>（每 100 拍算一次 Jain 再平均）问的是：在任意一小段时间里，十个核是不是同时都在被服务。</a:t>
+            </a:r>
+          </a:p>
+          <a:p>
+            <a:pPr algn="l">
+              <a:lnSpc>
+                <a:spcPct val="102000"/>
+              </a:lnSpc>
+              <a:spcBef>
+                <a:spcPts val="600"/>
+              </a:spcBef>
+            </a:pPr>
+            <a:r>
+              <a:rPr sz="1050" b="1">
+                <a:solidFill>
+                  <a:srgbClr val="20242C"/>
+                </a:solidFill>
+                <a:latin typeface="Microsoft YaHei"/>
+              </a:rPr>
+              <a:t>长期速率差</a:t>
+            </a:r>
+            <a:r>
+              <a:rPr sz="1050" b="0">
+                <a:solidFill>
+                  <a:srgbClr val="20242C"/>
+                </a:solidFill>
+                <a:latin typeface="Microsoft YaHei"/>
+              </a:rPr>
+              <a:t>（整窗最快核带宽 ÷ 最慢核带宽）问的是：把整个争用窗平均下来，有没有哪个核被系统性地拖慢。S0 = 1.5663 意味着最快的核长期比最慢的核快 57%。</a:t>
             </a:r>
           </a:p>
         </p:txBody>
@@ -22291,7 +22295,7 @@
                 </a:solidFill>
                 <a:latin typeface="Arial"/>
               </a:rPr>
-              <a:t>28 / 34</a:t>
+              <a:t>28 / 32</a:t>
             </a:r>
           </a:p>
         </p:txBody>
@@ -22366,8 +22370,8 @@
         </p:nvSpPr>
         <p:spPr>
           <a:xfrm>
-            <a:off x="566928" y="301752"/>
-            <a:ext cx="137160" cy="137160"/>
+            <a:off x="10143439" y="274320"/>
+            <a:ext cx="182880" cy="182880"/>
           </a:xfrm>
           <a:prstGeom prst="rect">
             <a:avLst/>
@@ -22410,8 +22414,8 @@
         </p:nvSpPr>
         <p:spPr>
           <a:xfrm>
-            <a:off x="804672" y="265176"/>
-            <a:ext cx="9229039" cy="237744"/>
+            <a:off x="10399471" y="246888"/>
+            <a:ext cx="1225296" cy="256032"/>
           </a:xfrm>
           <a:prstGeom prst="rect">
             <a:avLst/>
@@ -22430,36 +22434,36 @@
               </a:lnSpc>
             </a:pPr>
             <a:r>
-              <a:rPr sz="1150" b="1">
-                <a:solidFill>
-                  <a:srgbClr val="667080"/>
-                </a:solidFill>
-                <a:latin typeface="Microsoft YaHei"/>
-              </a:rPr>
-              <a:t>S22 赤字触发的限域让路（13,920 FF‑eq） · 仲裁型 / 总线触发</a:t>
-            </a:r>
-          </a:p>
-        </p:txBody>
-      </p:sp>
-      <p:sp>
-        <p:nvSpPr>
-          <p:cNvPr id="5" name="Rectangle 4"/>
+              <a:rPr sz="1300" b="1">
+                <a:solidFill>
+                  <a:srgbClr val="20242C"/>
+                </a:solidFill>
+                <a:latin typeface="Arial"/>
+              </a:rPr>
+              <a:t>HUAWEI</a:t>
+            </a:r>
+          </a:p>
+        </p:txBody>
+      </p:sp>
+      <p:sp>
+        <p:nvSpPr>
+          <p:cNvPr id="5" name="Oval 4"/>
           <p:cNvSpPr/>
           <p:nvPr/>
         </p:nvSpPr>
         <p:spPr>
           <a:xfrm>
-            <a:off x="566928" y="640080"/>
-            <a:ext cx="11057839" cy="10058"/>
-          </a:xfrm>
-          <a:prstGeom prst="rect">
-            <a:avLst/>
-          </a:prstGeom>
-          <a:solidFill>
-            <a:srgbClr val="DCE3EA"/>
-          </a:solidFill>
-          <a:ln>
-            <a:noFill/>
+            <a:off x="566928" y="1883664"/>
+            <a:ext cx="896112" cy="896112"/>
+          </a:xfrm>
+          <a:prstGeom prst="ellipse">
+            <a:avLst/>
+          </a:prstGeom>
+          <a:noFill/>
+          <a:ln w="17780">
+            <a:solidFill>
+              <a:srgbClr val="DCE3EA"/>
+            </a:solidFill>
           </a:ln>
           <a:effectLst/>
         </p:spPr>
@@ -22487,14 +22491,170 @@
       </p:sp>
       <p:sp>
         <p:nvSpPr>
-          <p:cNvPr id="6" name="Rectangle 5"/>
+          <p:cNvPr id="6" name="TextBox 5"/>
+          <p:cNvSpPr txBox="1"/>
+          <p:nvPr/>
+        </p:nvSpPr>
+        <p:spPr>
+          <a:xfrm>
+            <a:off x="566928" y="2176272"/>
+            <a:ext cx="896112" cy="365760"/>
+          </a:xfrm>
+          <a:prstGeom prst="rect">
+            <a:avLst/>
+          </a:prstGeom>
+          <a:noFill/>
+        </p:spPr>
+        <p:txBody>
+          <a:bodyPr wrap="square" anchor="t" lIns="0" rIns="0" tIns="0" bIns="0">
+            <a:spAutoFit/>
+          </a:bodyPr>
+          <a:lstStyle/>
+          <a:p>
+            <a:pPr algn="ctr">
+              <a:lnSpc>
+                <a:spcPct val="100000"/>
+              </a:lnSpc>
+            </a:pPr>
+            <a:r>
+              <a:rPr sz="2100" b="1">
+                <a:solidFill>
+                  <a:srgbClr val="D20A2E"/>
+                </a:solidFill>
+                <a:latin typeface="Arial"/>
+              </a:rPr>
+              <a:t>07</a:t>
+            </a:r>
+          </a:p>
+        </p:txBody>
+      </p:sp>
+      <p:sp>
+        <p:nvSpPr>
+          <p:cNvPr id="7" name="TextBox 6"/>
+          <p:cNvSpPr txBox="1"/>
+          <p:nvPr/>
+        </p:nvSpPr>
+        <p:spPr>
+          <a:xfrm>
+            <a:off x="566928" y="2980944"/>
+            <a:ext cx="4023360" cy="237744"/>
+          </a:xfrm>
+          <a:prstGeom prst="rect">
+            <a:avLst/>
+          </a:prstGeom>
+          <a:noFill/>
+        </p:spPr>
+        <p:txBody>
+          <a:bodyPr wrap="square" anchor="t" lIns="0" rIns="0" tIns="0" bIns="0">
+            <a:spAutoFit/>
+          </a:bodyPr>
+          <a:lstStyle/>
+          <a:p>
+            <a:pPr algn="l">
+              <a:lnSpc>
+                <a:spcPct val="100000"/>
+              </a:lnSpc>
+            </a:pPr>
+            <a:r>
+              <a:rPr sz="1100" b="1">
+                <a:solidFill>
+                  <a:srgbClr val="D20A2E"/>
+                </a:solidFill>
+                <a:latin typeface="Arial"/>
+              </a:rPr>
+              <a:t>S E C T I O N   S E V E N</a:t>
+            </a:r>
+          </a:p>
+        </p:txBody>
+      </p:sp>
+      <p:sp>
+        <p:nvSpPr>
+          <p:cNvPr id="8" name="TextBox 7"/>
+          <p:cNvSpPr txBox="1"/>
+          <p:nvPr/>
+        </p:nvSpPr>
+        <p:spPr>
+          <a:xfrm>
+            <a:off x="566928" y="3291840"/>
+            <a:ext cx="4937760" cy="1426464"/>
+          </a:xfrm>
+          <a:prstGeom prst="rect">
+            <a:avLst/>
+          </a:prstGeom>
+          <a:noFill/>
+        </p:spPr>
+        <p:txBody>
+          <a:bodyPr wrap="square" anchor="t" lIns="0" rIns="0" tIns="0" bIns="0">
+            <a:spAutoFit/>
+          </a:bodyPr>
+          <a:lstStyle/>
+          <a:p>
+            <a:pPr algn="l">
+              <a:lnSpc>
+                <a:spcPct val="98000"/>
+              </a:lnSpc>
+            </a:pPr>
+            <a:r>
+              <a:rPr sz="3800" b="1">
+                <a:solidFill>
+                  <a:srgbClr val="20242C"/>
+                </a:solidFill>
+                <a:latin typeface="Microsoft YaHei"/>
+              </a:rPr>
+              <a:t>结论与建议</a:t>
+            </a:r>
+          </a:p>
+        </p:txBody>
+      </p:sp>
+      <p:sp>
+        <p:nvSpPr>
+          <p:cNvPr id="9" name="TextBox 8"/>
+          <p:cNvSpPr txBox="1"/>
+          <p:nvPr/>
+        </p:nvSpPr>
+        <p:spPr>
+          <a:xfrm>
+            <a:off x="566928" y="4846320"/>
+            <a:ext cx="4572000" cy="786384"/>
+          </a:xfrm>
+          <a:prstGeom prst="rect">
+            <a:avLst/>
+          </a:prstGeom>
+          <a:noFill/>
+        </p:spPr>
+        <p:txBody>
+          <a:bodyPr wrap="square" anchor="t" lIns="0" rIns="0" tIns="0" bIns="0">
+            <a:spAutoFit/>
+          </a:bodyPr>
+          <a:lstStyle/>
+          <a:p>
+            <a:pPr algn="l">
+              <a:lnSpc>
+                <a:spcPct val="106000"/>
+              </a:lnSpc>
+            </a:pPr>
+            <a:r>
+              <a:rPr sz="1400" b="0">
+                <a:solidFill>
+                  <a:srgbClr val="667080"/>
+                </a:solidFill>
+                <a:latin typeface="Microsoft YaHei"/>
+              </a:rPr>
+              <a:t>哪些已经关死，哪些还开着，以及下一步该由谁拍板。</a:t>
+            </a:r>
+          </a:p>
+        </p:txBody>
+      </p:sp>
+      <p:sp>
+        <p:nvSpPr>
+          <p:cNvPr id="10" name="Rectangle 9"/>
           <p:cNvSpPr/>
           <p:nvPr/>
         </p:nvSpPr>
         <p:spPr>
           <a:xfrm>
-            <a:off x="10143439" y="274320"/>
-            <a:ext cx="182880" cy="182880"/>
+            <a:off x="5989320" y="2011680"/>
+            <a:ext cx="5635447" cy="2834640"/>
           </a:xfrm>
           <a:prstGeom prst="rect">
             <a:avLst/>
@@ -22531,14 +22691,14 @@
       </p:sp>
       <p:sp>
         <p:nvSpPr>
-          <p:cNvPr id="7" name="TextBox 6"/>
-          <p:cNvSpPr txBox="1"/>
-          <p:nvPr/>
-        </p:nvSpPr>
-        <p:spPr>
-          <a:xfrm>
-            <a:off x="10399471" y="246888"/>
-            <a:ext cx="1225296" cy="256032"/>
+          <p:cNvPr id="11" name="TextBox 10"/>
+          <p:cNvSpPr txBox="1"/>
+          <p:nvPr/>
+        </p:nvSpPr>
+        <p:spPr>
+          <a:xfrm>
+            <a:off x="6355080" y="2395728"/>
+            <a:ext cx="3657600" cy="237744"/>
           </a:xfrm>
           <a:prstGeom prst="rect">
             <a:avLst/>
@@ -22557,162 +22717,14 @@
               </a:lnSpc>
             </a:pPr>
             <a:r>
-              <a:rPr sz="1300" b="1">
-                <a:solidFill>
-                  <a:srgbClr val="20242C"/>
+              <a:rPr sz="1100" b="1">
+                <a:solidFill>
+                  <a:srgbClr val="FFFFFF"/>
                 </a:solidFill>
                 <a:latin typeface="Arial"/>
               </a:rPr>
-              <a:t>HUAWEI</a:t>
-            </a:r>
-          </a:p>
-        </p:txBody>
-      </p:sp>
-      <p:pic>
-        <p:nvPicPr>
-          <p:cNvPr id="8" name="Picture 7" descr="24-s22-diagram.png"/>
-          <p:cNvPicPr>
-            <a:picLocks noChangeAspect="1"/>
-          </p:cNvPicPr>
-          <p:nvPr/>
-        </p:nvPicPr>
-        <p:blipFill>
-          <a:blip r:embed="rId2"/>
-          <a:stretch>
-            <a:fillRect/>
-          </a:stretch>
-        </p:blipFill>
-        <p:spPr>
-          <a:xfrm>
-            <a:off x="595436" y="1060704"/>
-            <a:ext cx="7943983" cy="4791456"/>
-          </a:xfrm>
-          <a:prstGeom prst="rect">
-            <a:avLst/>
-          </a:prstGeom>
-        </p:spPr>
-      </p:pic>
-      <p:sp>
-        <p:nvSpPr>
-          <p:cNvPr id="9" name="TextBox 8"/>
-          <p:cNvSpPr txBox="1"/>
-          <p:nvPr/>
-        </p:nvSpPr>
-        <p:spPr>
-          <a:xfrm>
-            <a:off x="566928" y="5961888"/>
-            <a:ext cx="8001000" cy="384048"/>
-          </a:xfrm>
-          <a:prstGeom prst="rect">
-            <a:avLst/>
-          </a:prstGeom>
-          <a:noFill/>
-        </p:spPr>
-        <p:txBody>
-          <a:bodyPr wrap="square" anchor="t" lIns="0" rIns="0" tIns="0" bIns="0">
-            <a:spAutoFit/>
-          </a:bodyPr>
-          <a:lstStyle/>
-          <a:p>
-            <a:pPr algn="l">
-              <a:lnSpc>
-                <a:spcPct val="100000"/>
-              </a:lnSpc>
-            </a:pPr>
-            <a:r>
-              <a:rPr sz="1000" b="0">
-                <a:solidFill>
-                  <a:srgbClr val="667080"/>
-                </a:solidFill>
-                <a:latin typeface="Microsoft YaHei"/>
-              </a:rPr>
-              <a:t>复用 S1 那条 6 bit 广播总线，位宽完全相同，只换了线上放什么：从「我有多堵」换成「我这窗发成了多少」。</a:t>
-            </a:r>
-          </a:p>
-        </p:txBody>
-      </p:sp>
-      <p:sp>
-        <p:nvSpPr>
-          <p:cNvPr id="10" name="TextBox 9"/>
-          <p:cNvSpPr txBox="1"/>
-          <p:nvPr/>
-        </p:nvSpPr>
-        <p:spPr>
-          <a:xfrm>
-            <a:off x="8951976" y="1060704"/>
-            <a:ext cx="2672791" cy="237744"/>
-          </a:xfrm>
-          <a:prstGeom prst="rect">
-            <a:avLst/>
-          </a:prstGeom>
-          <a:noFill/>
-        </p:spPr>
-        <p:txBody>
-          <a:bodyPr wrap="square" anchor="t" lIns="0" rIns="0" tIns="0" bIns="0">
-            <a:spAutoFit/>
-          </a:bodyPr>
-          <a:lstStyle/>
-          <a:p>
-            <a:pPr algn="l">
-              <a:lnSpc>
-                <a:spcPct val="100000"/>
-              </a:lnSpc>
-            </a:pPr>
-            <a:r>
-              <a:rPr sz="850" b="1">
-                <a:solidFill>
-                  <a:srgbClr val="D20A2E"/>
-                </a:solidFill>
-                <a:latin typeface="Arial"/>
-              </a:rPr>
-              <a:t>S C H E M E   2   /   2   ·   M E C H A N I S M</a:t>
-            </a:r>
-          </a:p>
-        </p:txBody>
-      </p:sp>
-      <p:sp>
-        <p:nvSpPr>
-          <p:cNvPr id="11" name="Rectangle 10"/>
-          <p:cNvSpPr/>
-          <p:nvPr/>
-        </p:nvSpPr>
-        <p:spPr>
-          <a:xfrm>
-            <a:off x="8951976" y="1408176"/>
-            <a:ext cx="2672791" cy="2540763"/>
-          </a:xfrm>
-          <a:prstGeom prst="rect">
-            <a:avLst/>
-          </a:prstGeom>
-          <a:solidFill>
-            <a:srgbClr val="EDF2F7"/>
-          </a:solidFill>
-          <a:ln w="12700">
-            <a:solidFill>
-              <a:srgbClr val="DCE3EA"/>
-            </a:solidFill>
-          </a:ln>
-          <a:effectLst/>
-        </p:spPr>
-        <p:style>
-          <a:lnRef idx="1">
-            <a:schemeClr val="accent1"/>
-          </a:lnRef>
-          <a:fillRef idx="3">
-            <a:schemeClr val="accent1"/>
-          </a:fillRef>
-          <a:effectRef idx="2">
-            <a:schemeClr val="accent1"/>
-          </a:effectRef>
-          <a:fontRef idx="minor">
-            <a:schemeClr val="lt1"/>
-          </a:fontRef>
-        </p:style>
-        <p:txBody>
-          <a:bodyPr rtlCol="0" anchor="ctr" wrap="square"/>
-          <a:lstStyle/>
-          <a:p>
-            <a:pPr algn="ctr"/>
+              <a:t>B O T T O M   L I N E</a:t>
+            </a:r>
           </a:p>
         </p:txBody>
       </p:sp>
@@ -22724,33 +22736,33 @@
         </p:nvSpPr>
         <p:spPr>
           <a:xfrm>
-            <a:off x="9134855" y="1591056"/>
-            <a:ext cx="2307031" cy="259080"/>
-          </a:xfrm>
-          <a:prstGeom prst="rect">
-            <a:avLst/>
-          </a:prstGeom>
-          <a:noFill/>
-        </p:spPr>
-        <p:txBody>
-          <a:bodyPr wrap="square" anchor="t" lIns="0" rIns="0" tIns="0" bIns="0">
-            <a:spAutoFit/>
-          </a:bodyPr>
-          <a:lstStyle/>
-          <a:p>
-            <a:pPr algn="l">
-              <a:lnSpc>
-                <a:spcPct val="100000"/>
-              </a:lnSpc>
-            </a:pPr>
-            <a:r>
-              <a:rPr sz="1200" b="1">
-                <a:solidFill>
-                  <a:srgbClr val="20242C"/>
-                </a:solidFill>
-                <a:latin typeface="Microsoft YaHei"/>
-              </a:rPr>
-              <a:t>四段机制</a:t>
+            <a:off x="6355080" y="2761488"/>
+            <a:ext cx="4903927" cy="1737360"/>
+          </a:xfrm>
+          <a:prstGeom prst="rect">
+            <a:avLst/>
+          </a:prstGeom>
+          <a:noFill/>
+        </p:spPr>
+        <p:txBody>
+          <a:bodyPr wrap="square" anchor="t" lIns="0" rIns="0" tIns="0" bIns="0">
+            <a:spAutoFit/>
+          </a:bodyPr>
+          <a:lstStyle/>
+          <a:p>
+            <a:pPr algn="l">
+              <a:lnSpc>
+                <a:spcPct val="104000"/>
+              </a:lnSpc>
+            </a:pPr>
+            <a:r>
+              <a:rPr sz="2000" b="1">
+                <a:solidFill>
+                  <a:srgbClr val="FFFFFF"/>
+                </a:solidFill>
+                <a:latin typeface="Microsoft YaHei"/>
+              </a:rPr>
+              <a:t>带宽线已基本关死；公平缺陷是真实的，但它不必用带宽去换。真正要拍板的不是单一排名，而是哪一层能改：completer、requester，还是只允许动环上仲裁。</a:t>
             </a:r>
           </a:p>
         </p:txBody>
@@ -22758,322 +22770,6 @@
       <p:sp>
         <p:nvSpPr>
           <p:cNvPr id="13" name="TextBox 12"/>
-          <p:cNvSpPr txBox="1"/>
-          <p:nvPr/>
-        </p:nvSpPr>
-        <p:spPr>
-          <a:xfrm>
-            <a:off x="9134855" y="1932432"/>
-            <a:ext cx="2307031" cy="1929505"/>
-          </a:xfrm>
-          <a:prstGeom prst="rect">
-            <a:avLst/>
-          </a:prstGeom>
-          <a:noFill/>
-        </p:spPr>
-        <p:txBody>
-          <a:bodyPr wrap="square" anchor="t" lIns="0" rIns="0" tIns="0" bIns="0">
-            <a:spAutoFit/>
-          </a:bodyPr>
-          <a:lstStyle/>
-          <a:p>
-            <a:pPr algn="l">
-              <a:lnSpc>
-                <a:spcPct val="102000"/>
-              </a:lnSpc>
-            </a:pPr>
-            <a:r>
-              <a:rPr sz="800" b="1">
-                <a:solidFill>
-                  <a:srgbClr val="20242C"/>
-                </a:solidFill>
-                <a:latin typeface="Microsoft YaHei"/>
-              </a:rPr>
-              <a:t>① 检测</a:t>
-            </a:r>
-            <a:r>
-              <a:rPr sz="800" b="0">
-                <a:solidFill>
-                  <a:srgbClr val="20242C"/>
-                </a:solidFill>
-                <a:latin typeface="Microsoft YaHei"/>
-              </a:rPr>
-              <a:t>：每节点只数自己本窗成功上环的 flit 数，饱和到 6 bit。播的是进度，不是拥塞等级。</a:t>
-            </a:r>
-          </a:p>
-          <a:p>
-            <a:pPr algn="l">
-              <a:lnSpc>
-                <a:spcPct val="102000"/>
-              </a:lnSpc>
-              <a:spcBef>
-                <a:spcPts val="600"/>
-              </a:spcBef>
-            </a:pPr>
-            <a:r>
-              <a:rPr sz="800" b="1">
-                <a:solidFill>
-                  <a:srgbClr val="20242C"/>
-                </a:solidFill>
-                <a:latin typeface="Microsoft YaHei"/>
-              </a:rPr>
-              <a:t>② 传递</a:t>
-            </a:r>
-            <a:r>
-              <a:rPr sz="800" b="0">
-                <a:solidFill>
-                  <a:srgbClr val="20242C"/>
-                </a:solidFill>
-                <a:latin typeface="Microsoft YaHei"/>
-              </a:rPr>
-              <a:t>：复用 S1 的 6 bit 广播总线（30 拍）。自己的进度也从总线读回，两边过同一个量化器、同一段延迟。</a:t>
-            </a:r>
-          </a:p>
-          <a:p>
-            <a:pPr algn="l">
-              <a:lnSpc>
-                <a:spcPct val="102000"/>
-              </a:lnSpc>
-              <a:spcBef>
-                <a:spcPts val="600"/>
-              </a:spcBef>
-            </a:pPr>
-            <a:r>
-              <a:rPr sz="800" b="1">
-                <a:solidFill>
-                  <a:srgbClr val="20242C"/>
-                </a:solidFill>
-                <a:latin typeface="Microsoft YaHei"/>
-              </a:rPr>
-              <a:t>③ 反馈</a:t>
-            </a:r>
-            <a:r>
-              <a:rPr sz="800" b="0">
-                <a:solidFill>
-                  <a:srgbClr val="20242C"/>
-                </a:solidFill>
-                <a:latin typeface="Microsoft YaHei"/>
-              </a:rPr>
-              <a:t>：赤字 = 总线上 10 项的均值 − 自己那一项，越过 0.5 就举请求。让路是</a:t>
-            </a:r>
-            <a:r>
-              <a:rPr sz="800" b="1">
-                <a:solidFill>
-                  <a:srgbClr val="20242C"/>
-                </a:solidFill>
-                <a:latin typeface="Microsoft YaHei"/>
-              </a:rPr>
-              <a:t>单向</a:t>
-            </a:r>
-            <a:r>
-              <a:rPr sz="800" b="0">
-                <a:solidFill>
-                  <a:srgbClr val="20242C"/>
-                </a:solidFill>
-                <a:latin typeface="Microsoft YaHei"/>
-              </a:rPr>
-              <a:t>的：落后的节点永不让路。</a:t>
-            </a:r>
-          </a:p>
-          <a:p>
-            <a:pPr algn="l">
-              <a:lnSpc>
-                <a:spcPct val="102000"/>
-              </a:lnSpc>
-              <a:spcBef>
-                <a:spcPts val="600"/>
-              </a:spcBef>
-            </a:pPr>
-            <a:r>
-              <a:rPr sz="800" b="1">
-                <a:solidFill>
-                  <a:srgbClr val="20242C"/>
-                </a:solidFill>
-                <a:latin typeface="Microsoft YaHei"/>
-              </a:rPr>
-              <a:t>④ 执行：让位，不是门控</a:t>
-            </a:r>
-            <a:r>
-              <a:rPr sz="800" b="0">
-                <a:solidFill>
-                  <a:srgbClr val="20242C"/>
-                </a:solidFill>
-                <a:latin typeface="Microsoft YaHei"/>
-              </a:rPr>
-              <a:t>。只对「会从请求者出向 hop 骑过去」的 flit 让路，同时前瞻改发一个会先下环的 flit，让自己的 hop 不空转。</a:t>
-            </a:r>
-          </a:p>
-        </p:txBody>
-      </p:sp>
-      <p:sp>
-        <p:nvSpPr>
-          <p:cNvPr id="14" name="Rectangle 13"/>
-          <p:cNvSpPr/>
-          <p:nvPr/>
-        </p:nvSpPr>
-        <p:spPr>
-          <a:xfrm>
-            <a:off x="8951976" y="4095243"/>
-            <a:ext cx="2672791" cy="1150029"/>
-          </a:xfrm>
-          <a:prstGeom prst="rect">
-            <a:avLst/>
-          </a:prstGeom>
-          <a:solidFill>
-            <a:srgbClr val="D20A2E"/>
-          </a:solidFill>
-          <a:ln>
-            <a:noFill/>
-          </a:ln>
-          <a:effectLst/>
-        </p:spPr>
-        <p:style>
-          <a:lnRef idx="1">
-            <a:schemeClr val="accent1"/>
-          </a:lnRef>
-          <a:fillRef idx="3">
-            <a:schemeClr val="accent1"/>
-          </a:fillRef>
-          <a:effectRef idx="2">
-            <a:schemeClr val="accent1"/>
-          </a:effectRef>
-          <a:fontRef idx="minor">
-            <a:schemeClr val="lt1"/>
-          </a:fontRef>
-        </p:style>
-        <p:txBody>
-          <a:bodyPr rtlCol="0" anchor="ctr" wrap="square"/>
-          <a:lstStyle/>
-          <a:p>
-            <a:pPr algn="ctr"/>
-          </a:p>
-        </p:txBody>
-      </p:sp>
-      <p:sp>
-        <p:nvSpPr>
-          <p:cNvPr id="15" name="TextBox 14"/>
-          <p:cNvSpPr txBox="1"/>
-          <p:nvPr/>
-        </p:nvSpPr>
-        <p:spPr>
-          <a:xfrm>
-            <a:off x="9262872" y="4186683"/>
-            <a:ext cx="2050999" cy="967149"/>
-          </a:xfrm>
-          <a:prstGeom prst="rect">
-            <a:avLst/>
-          </a:prstGeom>
-          <a:noFill/>
-        </p:spPr>
-        <p:txBody>
-          <a:bodyPr wrap="square" anchor="ctr" lIns="0" rIns="0" tIns="0" bIns="0">
-            <a:spAutoFit/>
-          </a:bodyPr>
-          <a:lstStyle/>
-          <a:p>
-            <a:pPr algn="l">
-              <a:lnSpc>
-                <a:spcPct val="104000"/>
-              </a:lnSpc>
-            </a:pPr>
-            <a:r>
-              <a:rPr sz="1050" b="0">
-                <a:solidFill>
-                  <a:srgbClr val="FFFFFF"/>
-                </a:solidFill>
-                <a:latin typeface="Microsoft YaHei"/>
-              </a:rPr>
-              <a:t>与 S1 的关键差别：S1 的执行器是令牌桶闸门（没额度就不上环，让出的槽被沿途吃掉）；S22 只在具体某一拍上让出具体某个位置。</a:t>
-            </a:r>
-          </a:p>
-        </p:txBody>
-      </p:sp>
-      <p:sp>
-        <p:nvSpPr>
-          <p:cNvPr id="16" name="Rectangle 15"/>
-          <p:cNvSpPr/>
-          <p:nvPr/>
-        </p:nvSpPr>
-        <p:spPr>
-          <a:xfrm>
-            <a:off x="8951976" y="5391577"/>
-            <a:ext cx="2672791" cy="936070"/>
-          </a:xfrm>
-          <a:prstGeom prst="rect">
-            <a:avLst/>
-          </a:prstGeom>
-          <a:solidFill>
-            <a:srgbClr val="D20A2E"/>
-          </a:solidFill>
-          <a:ln>
-            <a:noFill/>
-          </a:ln>
-          <a:effectLst/>
-        </p:spPr>
-        <p:style>
-          <a:lnRef idx="1">
-            <a:schemeClr val="accent1"/>
-          </a:lnRef>
-          <a:fillRef idx="3">
-            <a:schemeClr val="accent1"/>
-          </a:fillRef>
-          <a:effectRef idx="2">
-            <a:schemeClr val="accent1"/>
-          </a:effectRef>
-          <a:fontRef idx="minor">
-            <a:schemeClr val="lt1"/>
-          </a:fontRef>
-        </p:style>
-        <p:txBody>
-          <a:bodyPr rtlCol="0" anchor="ctr" wrap="square"/>
-          <a:lstStyle/>
-          <a:p>
-            <a:pPr algn="ctr"/>
-          </a:p>
-        </p:txBody>
-      </p:sp>
-      <p:sp>
-        <p:nvSpPr>
-          <p:cNvPr id="17" name="TextBox 16"/>
-          <p:cNvSpPr txBox="1"/>
-          <p:nvPr/>
-        </p:nvSpPr>
-        <p:spPr>
-          <a:xfrm>
-            <a:off x="9262872" y="5483017"/>
-            <a:ext cx="2050999" cy="753190"/>
-          </a:xfrm>
-          <a:prstGeom prst="rect">
-            <a:avLst/>
-          </a:prstGeom>
-          <a:noFill/>
-        </p:spPr>
-        <p:txBody>
-          <a:bodyPr wrap="square" anchor="ctr" lIns="0" rIns="0" tIns="0" bIns="0">
-            <a:spAutoFit/>
-          </a:bodyPr>
-          <a:lstStyle/>
-          <a:p>
-            <a:pPr algn="l">
-              <a:lnSpc>
-                <a:spcPct val="104000"/>
-              </a:lnSpc>
-            </a:pPr>
-            <a:r>
-              <a:rPr sz="1000" b="0">
-                <a:solidFill>
-                  <a:srgbClr val="FFFFFF"/>
-                </a:solidFill>
-                <a:latin typeface="Microsoft YaHei"/>
-              </a:rPr>
-              <a:t>同等公平度下让位比门控省 10 倍带宽：S23 门控付 1.50%，S22 让位只付 0.15%（K = 2000 同轮对比）。</a:t>
-            </a:r>
-          </a:p>
-        </p:txBody>
-      </p:sp>
-      <p:sp>
-        <p:nvSpPr>
-          <p:cNvPr id="18" name="TextBox 17"/>
           <p:cNvSpPr txBox="1"/>
           <p:nvPr/>
         </p:nvSpPr>
@@ -23105,7 +22801,7 @@
                 </a:solidFill>
                 <a:latin typeface="Arial"/>
               </a:rPr>
-              <a:t>29 / 34</a:t>
+              <a:t>29 / 32</a:t>
             </a:r>
           </a:p>
         </p:txBody>
@@ -23611,7 +23307,7 @@
                 </a:solidFill>
                 <a:latin typeface="Arial"/>
               </a:rPr>
-              <a:t>03 / 34</a:t>
+              <a:t>03 / 32</a:t>
             </a:r>
           </a:p>
         </p:txBody>
@@ -23756,7 +23452,7 @@
                 </a:solidFill>
                 <a:latin typeface="Microsoft YaHei"/>
               </a:rPr>
-              <a:t>S22 实测：均匀流量</a:t>
+              <a:t>结论</a:t>
             </a:r>
           </a:p>
         </p:txBody>
@@ -23896,8 +23592,8 @@
         </p:nvSpPr>
         <p:spPr>
           <a:xfrm>
-            <a:off x="566928" y="1024128"/>
-            <a:ext cx="2377440" cy="237744"/>
+            <a:off x="566928" y="1060704"/>
+            <a:ext cx="11057839" cy="237744"/>
           </a:xfrm>
           <a:prstGeom prst="rect">
             <a:avLst/>
@@ -23916,124 +23612,657 @@
               </a:lnSpc>
             </a:pPr>
             <a:r>
+              <a:rPr sz="1050" b="1">
+                <a:solidFill>
+                  <a:srgbClr val="D20A2E"/>
+                </a:solidFill>
+                <a:latin typeface="Arial"/>
+              </a:rPr>
+              <a:t>C O N C L U S I O N S</a:t>
+            </a:r>
+          </a:p>
+        </p:txBody>
+      </p:sp>
+      <p:sp>
+        <p:nvSpPr>
+          <p:cNvPr id="9" name="TextBox 8"/>
+          <p:cNvSpPr txBox="1"/>
+          <p:nvPr/>
+        </p:nvSpPr>
+        <p:spPr>
+          <a:xfrm>
+            <a:off x="566928" y="1353312"/>
+            <a:ext cx="11057839" cy="658368"/>
+          </a:xfrm>
+          <a:prstGeom prst="rect">
+            <a:avLst/>
+          </a:prstGeom>
+          <a:noFill/>
+        </p:spPr>
+        <p:txBody>
+          <a:bodyPr wrap="square" anchor="t" lIns="0" rIns="0" tIns="0" bIns="0">
+            <a:spAutoFit/>
+          </a:bodyPr>
+          <a:lstStyle/>
+          <a:p>
+            <a:pPr algn="l">
+              <a:lnSpc>
+                <a:spcPct val="100000"/>
+              </a:lnSpc>
+            </a:pPr>
+            <a:r>
+              <a:rPr sz="3000" b="1">
+                <a:solidFill>
+                  <a:srgbClr val="20242C"/>
+                </a:solidFill>
+                <a:latin typeface="Microsoft YaHei"/>
+              </a:rPr>
+              <a:t>四条</a:t>
+            </a:r>
+          </a:p>
+        </p:txBody>
+      </p:sp>
+      <p:sp>
+        <p:nvSpPr>
+          <p:cNvPr id="10" name="Rectangle 9"/>
+          <p:cNvSpPr/>
+          <p:nvPr/>
+        </p:nvSpPr>
+        <p:spPr>
+          <a:xfrm>
+            <a:off x="566928" y="2231136"/>
+            <a:ext cx="2599867" cy="2999231"/>
+          </a:xfrm>
+          <a:prstGeom prst="rect">
+            <a:avLst/>
+          </a:prstGeom>
+          <a:solidFill>
+            <a:srgbClr val="FFFFFF"/>
+          </a:solidFill>
+          <a:ln w="12700">
+            <a:solidFill>
+              <a:srgbClr val="DCE3EA"/>
+            </a:solidFill>
+          </a:ln>
+          <a:effectLst/>
+        </p:spPr>
+        <p:style>
+          <a:lnRef idx="1">
+            <a:schemeClr val="accent1"/>
+          </a:lnRef>
+          <a:fillRef idx="3">
+            <a:schemeClr val="accent1"/>
+          </a:fillRef>
+          <a:effectRef idx="2">
+            <a:schemeClr val="accent1"/>
+          </a:effectRef>
+          <a:fontRef idx="minor">
+            <a:schemeClr val="lt1"/>
+          </a:fontRef>
+        </p:style>
+        <p:txBody>
+          <a:bodyPr rtlCol="0" anchor="ctr" wrap="square"/>
+          <a:lstStyle/>
+          <a:p>
+            <a:pPr algn="ctr"/>
+          </a:p>
+        </p:txBody>
+      </p:sp>
+      <p:sp>
+        <p:nvSpPr>
+          <p:cNvPr id="11" name="TextBox 10"/>
+          <p:cNvSpPr txBox="1"/>
+          <p:nvPr/>
+        </p:nvSpPr>
+        <p:spPr>
+          <a:xfrm>
+            <a:off x="768096" y="2813288"/>
+            <a:ext cx="2197531" cy="314705"/>
+          </a:xfrm>
+          <a:prstGeom prst="rect">
+            <a:avLst/>
+          </a:prstGeom>
+          <a:noFill/>
+        </p:spPr>
+        <p:txBody>
+          <a:bodyPr wrap="square" anchor="t" lIns="0" rIns="0" tIns="0" bIns="0">
+            <a:spAutoFit/>
+          </a:bodyPr>
+          <a:lstStyle/>
+          <a:p>
+            <a:pPr algn="l">
+              <a:lnSpc>
+                <a:spcPct val="100000"/>
+              </a:lnSpc>
+            </a:pPr>
+            <a:r>
+              <a:rPr sz="1500" b="1">
+                <a:solidFill>
+                  <a:srgbClr val="20242C"/>
+                </a:solidFill>
+                <a:latin typeface="Microsoft YaHei"/>
+              </a:rPr>
+              <a:t>① 带宽线已基本关死</a:t>
+            </a:r>
+          </a:p>
+        </p:txBody>
+      </p:sp>
+      <p:sp>
+        <p:nvSpPr>
+          <p:cNvPr id="12" name="TextBox 11"/>
+          <p:cNvSpPr txBox="1"/>
+          <p:nvPr/>
+        </p:nvSpPr>
+        <p:spPr>
+          <a:xfrm>
+            <a:off x="768096" y="3210290"/>
+            <a:ext cx="2197531" cy="1474500"/>
+          </a:xfrm>
+          <a:prstGeom prst="rect">
+            <a:avLst/>
+          </a:prstGeom>
+          <a:noFill/>
+        </p:spPr>
+        <p:txBody>
+          <a:bodyPr wrap="square" anchor="t" lIns="0" rIns="0" tIns="0" bIns="0">
+            <a:spAutoFit/>
+          </a:bodyPr>
+          <a:lstStyle/>
+          <a:p>
+            <a:pPr algn="l">
+              <a:lnSpc>
+                <a:spcPct val="102000"/>
+              </a:lnSpc>
+            </a:pPr>
+            <a:r>
+              <a:rPr sz="1200" b="0">
+                <a:solidFill>
+                  <a:srgbClr val="20242C"/>
+                </a:solidFill>
+                <a:latin typeface="Microsoft YaHei"/>
+              </a:rPr>
+              <a:t>S0 = 96.97% R*，最忙的链路 96.98% 满；3.03% 的缺口已逐拍闭合（5 拍绕环 + 2,181 拍空转）。</a:t>
+            </a:r>
+          </a:p>
+          <a:p>
+            <a:pPr algn="l">
+              <a:lnSpc>
+                <a:spcPct val="102000"/>
+              </a:lnSpc>
+              <a:spcBef>
+                <a:spcPts val="600"/>
+              </a:spcBef>
+            </a:pPr>
+            <a:r>
+              <a:rPr sz="1200" b="1">
+                <a:solidFill>
+                  <a:srgbClr val="D20A2E"/>
+                </a:solidFill>
+                <a:latin typeface="Microsoft YaHei"/>
+              </a:rPr>
+              <a:t>拥塞控制的带宽目标应是「不弄丢」，不是「抬上去」。</a:t>
+            </a:r>
+          </a:p>
+        </p:txBody>
+      </p:sp>
+      <p:sp>
+        <p:nvSpPr>
+          <p:cNvPr id="13" name="Rectangle 12"/>
+          <p:cNvSpPr/>
+          <p:nvPr/>
+        </p:nvSpPr>
+        <p:spPr>
+          <a:xfrm>
+            <a:off x="3386251" y="2231136"/>
+            <a:ext cx="2599867" cy="2999231"/>
+          </a:xfrm>
+          <a:prstGeom prst="rect">
+            <a:avLst/>
+          </a:prstGeom>
+          <a:solidFill>
+            <a:srgbClr val="FFFFFF"/>
+          </a:solidFill>
+          <a:ln w="12700">
+            <a:solidFill>
+              <a:srgbClr val="DCE3EA"/>
+            </a:solidFill>
+          </a:ln>
+          <a:effectLst/>
+        </p:spPr>
+        <p:style>
+          <a:lnRef idx="1">
+            <a:schemeClr val="accent1"/>
+          </a:lnRef>
+          <a:fillRef idx="3">
+            <a:schemeClr val="accent1"/>
+          </a:fillRef>
+          <a:effectRef idx="2">
+            <a:schemeClr val="accent1"/>
+          </a:effectRef>
+          <a:fontRef idx="minor">
+            <a:schemeClr val="lt1"/>
+          </a:fontRef>
+        </p:style>
+        <p:txBody>
+          <a:bodyPr rtlCol="0" anchor="ctr" wrap="square"/>
+          <a:lstStyle/>
+          <a:p>
+            <a:pPr algn="ctr"/>
+          </a:p>
+        </p:txBody>
+      </p:sp>
+      <p:sp>
+        <p:nvSpPr>
+          <p:cNvPr id="14" name="TextBox 13"/>
+          <p:cNvSpPr txBox="1"/>
+          <p:nvPr/>
+        </p:nvSpPr>
+        <p:spPr>
+          <a:xfrm>
+            <a:off x="3587419" y="2813288"/>
+            <a:ext cx="2197531" cy="314705"/>
+          </a:xfrm>
+          <a:prstGeom prst="rect">
+            <a:avLst/>
+          </a:prstGeom>
+          <a:noFill/>
+        </p:spPr>
+        <p:txBody>
+          <a:bodyPr wrap="square" anchor="t" lIns="0" rIns="0" tIns="0" bIns="0">
+            <a:spAutoFit/>
+          </a:bodyPr>
+          <a:lstStyle/>
+          <a:p>
+            <a:pPr algn="l">
+              <a:lnSpc>
+                <a:spcPct val="100000"/>
+              </a:lnSpc>
+            </a:pPr>
+            <a:r>
+              <a:rPr sz="1500" b="1">
+                <a:solidFill>
+                  <a:srgbClr val="20242C"/>
+                </a:solidFill>
+                <a:latin typeface="Microsoft YaHei"/>
+              </a:rPr>
+              <a:t>② 公平缺陷是真实的</a:t>
+            </a:r>
+          </a:p>
+        </p:txBody>
+      </p:sp>
+      <p:sp>
+        <p:nvSpPr>
+          <p:cNvPr id="15" name="TextBox 14"/>
+          <p:cNvSpPr txBox="1"/>
+          <p:nvPr/>
+        </p:nvSpPr>
+        <p:spPr>
+          <a:xfrm>
+            <a:off x="3587419" y="3210290"/>
+            <a:ext cx="2197531" cy="1474500"/>
+          </a:xfrm>
+          <a:prstGeom prst="rect">
+            <a:avLst/>
+          </a:prstGeom>
+          <a:noFill/>
+        </p:spPr>
+        <p:txBody>
+          <a:bodyPr wrap="square" anchor="t" lIns="0" rIns="0" tIns="0" bIns="0">
+            <a:spAutoFit/>
+          </a:bodyPr>
+          <a:lstStyle/>
+          <a:p>
+            <a:pPr algn="l">
+              <a:lnSpc>
+                <a:spcPct val="102000"/>
+              </a:lnSpc>
+            </a:pPr>
+            <a:r>
+              <a:rPr sz="1200" b="0">
+                <a:solidFill>
+                  <a:srgbClr val="20242C"/>
+                </a:solidFill>
+                <a:latin typeface="Microsoft YaHei"/>
+              </a:rPr>
+              <a:t>不是采样噪声：把抖动完全抹平后的 Jain 上限只有 0.96458，六快四慢是几何决定的固定分组（核间速率比 1.5673）。</a:t>
+            </a:r>
+          </a:p>
+          <a:p>
+            <a:pPr algn="l">
+              <a:lnSpc>
+                <a:spcPct val="102000"/>
+              </a:lnSpc>
+              <a:spcBef>
+                <a:spcPts val="600"/>
+              </a:spcBef>
+            </a:pPr>
+            <a:r>
+              <a:rPr sz="1200" b="1">
+                <a:solidFill>
+                  <a:srgbClr val="D20A2E"/>
+                </a:solidFill>
+                <a:latin typeface="Microsoft YaHei"/>
+              </a:rPr>
+              <a:t>要提高均衡度就必须真的搬速率，只整时机不够。</a:t>
+            </a:r>
+          </a:p>
+        </p:txBody>
+      </p:sp>
+      <p:sp>
+        <p:nvSpPr>
+          <p:cNvPr id="16" name="Rectangle 15"/>
+          <p:cNvSpPr/>
+          <p:nvPr/>
+        </p:nvSpPr>
+        <p:spPr>
+          <a:xfrm>
+            <a:off x="6205575" y="2231136"/>
+            <a:ext cx="2599867" cy="2999231"/>
+          </a:xfrm>
+          <a:prstGeom prst="rect">
+            <a:avLst/>
+          </a:prstGeom>
+          <a:solidFill>
+            <a:srgbClr val="FFFFFF"/>
+          </a:solidFill>
+          <a:ln w="12700">
+            <a:solidFill>
+              <a:srgbClr val="DCE3EA"/>
+            </a:solidFill>
+          </a:ln>
+          <a:effectLst/>
+        </p:spPr>
+        <p:style>
+          <a:lnRef idx="1">
+            <a:schemeClr val="accent1"/>
+          </a:lnRef>
+          <a:fillRef idx="3">
+            <a:schemeClr val="accent1"/>
+          </a:fillRef>
+          <a:effectRef idx="2">
+            <a:schemeClr val="accent1"/>
+          </a:effectRef>
+          <a:fontRef idx="minor">
+            <a:schemeClr val="lt1"/>
+          </a:fontRef>
+        </p:style>
+        <p:txBody>
+          <a:bodyPr rtlCol="0" anchor="ctr" wrap="square"/>
+          <a:lstStyle/>
+          <a:p>
+            <a:pPr algn="ctr"/>
+          </a:p>
+        </p:txBody>
+      </p:sp>
+      <p:sp>
+        <p:nvSpPr>
+          <p:cNvPr id="17" name="TextBox 16"/>
+          <p:cNvSpPr txBox="1"/>
+          <p:nvPr/>
+        </p:nvSpPr>
+        <p:spPr>
+          <a:xfrm>
+            <a:off x="6406743" y="2560746"/>
+            <a:ext cx="2197531" cy="592836"/>
+          </a:xfrm>
+          <a:prstGeom prst="rect">
+            <a:avLst/>
+          </a:prstGeom>
+          <a:noFill/>
+        </p:spPr>
+        <p:txBody>
+          <a:bodyPr wrap="square" anchor="t" lIns="0" rIns="0" tIns="0" bIns="0">
+            <a:spAutoFit/>
+          </a:bodyPr>
+          <a:lstStyle/>
+          <a:p>
+            <a:pPr algn="l">
+              <a:lnSpc>
+                <a:spcPct val="100000"/>
+              </a:lnSpc>
+            </a:pPr>
+            <a:r>
+              <a:rPr sz="1500" b="1">
+                <a:solidFill>
+                  <a:srgbClr val="20242C"/>
+                </a:solidFill>
+                <a:latin typeface="Microsoft YaHei"/>
+              </a:rPr>
+              <a:t>③ 严格前沿与工程备选要分开看</a:t>
+            </a:r>
+          </a:p>
+        </p:txBody>
+      </p:sp>
+      <p:sp>
+        <p:nvSpPr>
+          <p:cNvPr id="18" name="TextBox 17"/>
+          <p:cNvSpPr txBox="1"/>
+          <p:nvPr/>
+        </p:nvSpPr>
+        <p:spPr>
+          <a:xfrm>
+            <a:off x="6406743" y="3235878"/>
+            <a:ext cx="2197531" cy="1701454"/>
+          </a:xfrm>
+          <a:prstGeom prst="rect">
+            <a:avLst/>
+          </a:prstGeom>
+          <a:noFill/>
+        </p:spPr>
+        <p:txBody>
+          <a:bodyPr wrap="square" anchor="t" lIns="0" rIns="0" tIns="0" bIns="0">
+            <a:spAutoFit/>
+          </a:bodyPr>
+          <a:lstStyle/>
+          <a:p>
+            <a:pPr algn="l">
+              <a:lnSpc>
+                <a:spcPct val="102000"/>
+              </a:lnSpc>
+            </a:pPr>
+            <a:r>
+              <a:rPr sz="1200" b="0">
+                <a:solidFill>
+                  <a:srgbClr val="20242C"/>
+                </a:solidFill>
+                <a:latin typeface="Microsoft YaHei"/>
+              </a:rPr>
+              <a:t>按「带宽 × 公平性 / 硬件」计算，严格前沿是 S16。S19 / S20、S22 虽不在严格前沿上，但分别落在 requester 动态窗口和跨节点进度仲裁两个不同改动层。</a:t>
+            </a:r>
+          </a:p>
+          <a:p>
+            <a:pPr algn="l">
+              <a:lnSpc>
+                <a:spcPct val="102000"/>
+              </a:lnSpc>
+              <a:spcBef>
+                <a:spcPts val="600"/>
+              </a:spcBef>
+            </a:pPr>
+            <a:r>
+              <a:rPr sz="1200" b="1">
+                <a:solidFill>
+                  <a:srgbClr val="D20A2E"/>
+                </a:solidFill>
+                <a:latin typeface="Microsoft YaHei"/>
+              </a:rPr>
+              <a:t>被数值支配，不等于在工程约束下没有选择价值。</a:t>
+            </a:r>
+          </a:p>
+        </p:txBody>
+      </p:sp>
+      <p:sp>
+        <p:nvSpPr>
+          <p:cNvPr id="19" name="Rectangle 18"/>
+          <p:cNvSpPr/>
+          <p:nvPr/>
+        </p:nvSpPr>
+        <p:spPr>
+          <a:xfrm>
+            <a:off x="9024899" y="2231136"/>
+            <a:ext cx="2599867" cy="2999231"/>
+          </a:xfrm>
+          <a:prstGeom prst="rect">
+            <a:avLst/>
+          </a:prstGeom>
+          <a:solidFill>
+            <a:srgbClr val="FFFFFF"/>
+          </a:solidFill>
+          <a:ln w="19050">
+            <a:solidFill>
+              <a:srgbClr val="D20A2E"/>
+            </a:solidFill>
+          </a:ln>
+          <a:effectLst/>
+        </p:spPr>
+        <p:style>
+          <a:lnRef idx="1">
+            <a:schemeClr val="accent1"/>
+          </a:lnRef>
+          <a:fillRef idx="3">
+            <a:schemeClr val="accent1"/>
+          </a:fillRef>
+          <a:effectRef idx="2">
+            <a:schemeClr val="accent1"/>
+          </a:effectRef>
+          <a:fontRef idx="minor">
+            <a:schemeClr val="lt1"/>
+          </a:fontRef>
+        </p:style>
+        <p:txBody>
+          <a:bodyPr rtlCol="0" anchor="ctr" wrap="square"/>
+          <a:lstStyle/>
+          <a:p>
+            <a:pPr algn="ctr"/>
+          </a:p>
+        </p:txBody>
+      </p:sp>
+      <p:sp>
+        <p:nvSpPr>
+          <p:cNvPr id="20" name="TextBox 19"/>
+          <p:cNvSpPr txBox="1"/>
+          <p:nvPr/>
+        </p:nvSpPr>
+        <p:spPr>
+          <a:xfrm>
+            <a:off x="9226067" y="2465908"/>
+            <a:ext cx="2197531" cy="592836"/>
+          </a:xfrm>
+          <a:prstGeom prst="rect">
+            <a:avLst/>
+          </a:prstGeom>
+          <a:noFill/>
+        </p:spPr>
+        <p:txBody>
+          <a:bodyPr wrap="square" anchor="t" lIns="0" rIns="0" tIns="0" bIns="0">
+            <a:spAutoFit/>
+          </a:bodyPr>
+          <a:lstStyle/>
+          <a:p>
+            <a:pPr algn="l">
+              <a:lnSpc>
+                <a:spcPct val="100000"/>
+              </a:lnSpc>
+            </a:pPr>
+            <a:r>
+              <a:rPr sz="1500" b="1">
+                <a:solidFill>
+                  <a:srgbClr val="D20A2E"/>
+                </a:solidFill>
+                <a:latin typeface="Microsoft YaHei"/>
+              </a:rPr>
+              <a:t>④ 两头能同时拿住，但层次决定落点</a:t>
+            </a:r>
+          </a:p>
+        </p:txBody>
+      </p:sp>
+      <p:sp>
+        <p:nvSpPr>
+          <p:cNvPr id="21" name="TextBox 20"/>
+          <p:cNvSpPr txBox="1"/>
+          <p:nvPr/>
+        </p:nvSpPr>
+        <p:spPr>
+          <a:xfrm>
+            <a:off x="9226067" y="3141040"/>
+            <a:ext cx="2197531" cy="1891131"/>
+          </a:xfrm>
+          <a:prstGeom prst="rect">
+            <a:avLst/>
+          </a:prstGeom>
+          <a:noFill/>
+        </p:spPr>
+        <p:txBody>
+          <a:bodyPr wrap="square" anchor="t" lIns="0" rIns="0" tIns="0" bIns="0">
+            <a:spAutoFit/>
+          </a:bodyPr>
+          <a:lstStyle/>
+          <a:p>
+            <a:pPr algn="l">
+              <a:lnSpc>
+                <a:spcPct val="102000"/>
+              </a:lnSpc>
+            </a:pPr>
+            <a:r>
+              <a:rPr sz="1000" b="0">
+                <a:solidFill>
+                  <a:srgbClr val="20242C"/>
+                </a:solidFill>
+                <a:latin typeface="Microsoft YaHei"/>
+              </a:rPr>
+              <a:t>S16 把决策点放回 completer：Jain 0.92818 → 0.98466，max/min → 1.0001，带宽只让 0.39%，硬件 900 FF‑eq。</a:t>
+            </a:r>
+          </a:p>
+          <a:p>
+            <a:pPr algn="l">
+              <a:lnSpc>
+                <a:spcPct val="102000"/>
+              </a:lnSpc>
+              <a:spcBef>
+                <a:spcPts val="600"/>
+              </a:spcBef>
+            </a:pPr>
+            <a:r>
+              <a:rPr sz="1000" b="0">
+                <a:solidFill>
+                  <a:srgbClr val="20242C"/>
+                </a:solidFill>
+                <a:latin typeface="Microsoft YaHei"/>
+              </a:rPr>
+              <a:t>它需要改 HA 的授权调度。若该层不可改，可退到 requester 窗口S19 / S20，或只改环上仲裁的 S22。</a:t>
+            </a:r>
+          </a:p>
+          <a:p>
+            <a:pPr algn="l">
+              <a:lnSpc>
+                <a:spcPct val="102000"/>
+              </a:lnSpc>
+              <a:spcBef>
+                <a:spcPts val="600"/>
+              </a:spcBef>
+            </a:pPr>
+            <a:r>
               <a:rPr sz="1000" b="1">
                 <a:solidFill>
                   <a:srgbClr val="D20A2E"/>
                 </a:solidFill>
-                <a:latin typeface="Arial"/>
-              </a:rPr>
-              <a:t>M E A S U R E D   ·   U N I F O R M</a:t>
-            </a:r>
-          </a:p>
-        </p:txBody>
-      </p:sp>
-      <p:sp>
-        <p:nvSpPr>
-          <p:cNvPr id="9" name="TextBox 8"/>
-          <p:cNvSpPr txBox="1"/>
-          <p:nvPr/>
-        </p:nvSpPr>
-        <p:spPr>
-          <a:xfrm>
-            <a:off x="566928" y="1335024"/>
-            <a:ext cx="2377440" cy="713232"/>
-          </a:xfrm>
-          <a:prstGeom prst="rect">
-            <a:avLst/>
-          </a:prstGeom>
-          <a:noFill/>
-        </p:spPr>
-        <p:txBody>
-          <a:bodyPr wrap="square" anchor="t" lIns="0" rIns="0" tIns="0" bIns="0">
-            <a:spAutoFit/>
-          </a:bodyPr>
-          <a:lstStyle/>
-          <a:p>
-            <a:pPr algn="l">
-              <a:lnSpc>
-                <a:spcPct val="100000"/>
-              </a:lnSpc>
-            </a:pPr>
-            <a:r>
-              <a:rPr sz="4000" b="1">
-                <a:solidFill>
-                  <a:srgbClr val="D20A2E"/>
-                </a:solidFill>
-                <a:latin typeface="Arial"/>
-              </a:rPr>
-              <a:t>0.94799</a:t>
-            </a:r>
-          </a:p>
-        </p:txBody>
-      </p:sp>
-      <p:sp>
-        <p:nvSpPr>
-          <p:cNvPr id="10" name="TextBox 9"/>
-          <p:cNvSpPr txBox="1"/>
-          <p:nvPr/>
-        </p:nvSpPr>
-        <p:spPr>
-          <a:xfrm>
-            <a:off x="566928" y="2121408"/>
-            <a:ext cx="2377440" cy="658368"/>
-          </a:xfrm>
-          <a:prstGeom prst="rect">
-            <a:avLst/>
-          </a:prstGeom>
-          <a:noFill/>
-        </p:spPr>
-        <p:txBody>
-          <a:bodyPr wrap="square" anchor="t" lIns="0" rIns="0" tIns="0" bIns="0">
-            <a:spAutoFit/>
-          </a:bodyPr>
-          <a:lstStyle/>
-          <a:p>
-            <a:pPr algn="l">
-              <a:lnSpc>
-                <a:spcPct val="106000"/>
-              </a:lnSpc>
-            </a:pPr>
-            <a:r>
-              <a:rPr sz="1000" b="0">
-                <a:solidFill>
-                  <a:srgbClr val="667080"/>
-                </a:solidFill>
-                <a:latin typeface="Microsoft YaHei"/>
-              </a:rPr>
-              <a:t>S22 写侧 100 拍 Jain（S0 = 0.92818）</a:t>
-            </a:r>
-          </a:p>
-          <a:p>
-            <a:pPr algn="l">
-              <a:lnSpc>
-                <a:spcPct val="106000"/>
-              </a:lnSpc>
-              <a:spcBef>
-                <a:spcPts val="500"/>
-              </a:spcBef>
-            </a:pPr>
-            <a:r>
-              <a:rPr sz="1000" b="0">
-                <a:solidFill>
-                  <a:srgbClr val="667080"/>
-                </a:solidFill>
-                <a:latin typeface="Microsoft YaHei"/>
-              </a:rPr>
-              <a:t>总写带宽 −2.21%</a:t>
-            </a:r>
-          </a:p>
-        </p:txBody>
-      </p:sp>
-      <p:sp>
-        <p:nvSpPr>
-          <p:cNvPr id="11" name="Rectangle 10"/>
+                <a:latin typeface="Microsoft YaHei"/>
+              </a:rPr>
+              <a:t>最终选择首先由「哪一层能改」决定，其次才是数字。</a:t>
+            </a:r>
+          </a:p>
+        </p:txBody>
+      </p:sp>
+      <p:sp>
+        <p:nvSpPr>
+          <p:cNvPr id="22" name="Rectangle 21"/>
           <p:cNvSpPr/>
           <p:nvPr/>
         </p:nvSpPr>
         <p:spPr>
           <a:xfrm>
-            <a:off x="566928" y="2889504"/>
-            <a:ext cx="822960" cy="41148"/>
+            <a:off x="566928" y="5468112"/>
+            <a:ext cx="11057839" cy="859536"/>
           </a:xfrm>
           <a:prstGeom prst="rect">
             <a:avLst/>
@@ -24068,544 +24297,48 @@
           </a:p>
         </p:txBody>
       </p:sp>
-      <p:pic>
-        <p:nvPicPr>
-          <p:cNvPr id="12" name="Picture 11" descr="25-s22-compare.png"/>
-          <p:cNvPicPr>
-            <a:picLocks noChangeAspect="1"/>
-          </p:cNvPicPr>
-          <p:nvPr/>
-        </p:nvPicPr>
-        <p:blipFill>
-          <a:blip r:embed="rId2"/>
-          <a:stretch>
-            <a:fillRect/>
-          </a:stretch>
-        </p:blipFill>
-        <p:spPr>
-          <a:xfrm>
-            <a:off x="3768801" y="1024128"/>
-            <a:ext cx="7415580" cy="2350007"/>
-          </a:xfrm>
-          <a:prstGeom prst="rect">
-            <a:avLst/>
-          </a:prstGeom>
-        </p:spPr>
-      </p:pic>
-      <p:sp>
-        <p:nvSpPr>
-          <p:cNvPr id="13" name="TextBox 12"/>
-          <p:cNvSpPr txBox="1"/>
-          <p:nvPr/>
-        </p:nvSpPr>
-        <p:spPr>
-          <a:xfrm>
-            <a:off x="3328416" y="3465575"/>
-            <a:ext cx="8296351" cy="292608"/>
-          </a:xfrm>
-          <a:prstGeom prst="rect">
-            <a:avLst/>
-          </a:prstGeom>
-          <a:noFill/>
-        </p:spPr>
-        <p:txBody>
-          <a:bodyPr wrap="square" anchor="t" lIns="0" rIns="0" tIns="0" bIns="0">
-            <a:spAutoFit/>
-          </a:bodyPr>
-          <a:lstStyle/>
-          <a:p>
-            <a:pPr algn="l">
-              <a:lnSpc>
-                <a:spcPct val="100000"/>
-              </a:lnSpc>
-            </a:pPr>
-            <a:r>
-              <a:rPr sz="1000" b="0">
-                <a:solidFill>
-                  <a:srgbClr val="667080"/>
-                </a:solidFill>
-                <a:latin typeface="Microsoft YaHei"/>
-              </a:rPr>
-              <a:t>四根柱依次 S0 / S1 / S16 / S22，橙虚线 = 理论上限 R*；写侧 K = 20000。后两幅是公平性的两个不同问题，见右侧第三张卡。</a:t>
-            </a:r>
-          </a:p>
-        </p:txBody>
-      </p:sp>
-      <p:sp>
-        <p:nvSpPr>
-          <p:cNvPr id="14" name="Rectangle 13"/>
-          <p:cNvSpPr/>
-          <p:nvPr/>
-        </p:nvSpPr>
-        <p:spPr>
-          <a:xfrm>
-            <a:off x="566928" y="4087368"/>
-            <a:ext cx="3527450" cy="2240280"/>
-          </a:xfrm>
-          <a:prstGeom prst="rect">
-            <a:avLst/>
-          </a:prstGeom>
-          <a:solidFill>
-            <a:srgbClr val="EDF2F7"/>
-          </a:solidFill>
-          <a:ln w="19050">
-            <a:solidFill>
-              <a:srgbClr val="D20A2E"/>
-            </a:solidFill>
-          </a:ln>
-          <a:effectLst/>
-        </p:spPr>
-        <p:style>
-          <a:lnRef idx="1">
-            <a:schemeClr val="accent1"/>
-          </a:lnRef>
-          <a:fillRef idx="3">
-            <a:schemeClr val="accent1"/>
-          </a:fillRef>
-          <a:effectRef idx="2">
-            <a:schemeClr val="accent1"/>
-          </a:effectRef>
-          <a:fontRef idx="minor">
-            <a:schemeClr val="lt1"/>
-          </a:fontRef>
-        </p:style>
-        <p:txBody>
-          <a:bodyPr rtlCol="0" anchor="ctr" wrap="square"/>
-          <a:lstStyle/>
-          <a:p>
-            <a:pPr algn="ctr"/>
-          </a:p>
-        </p:txBody>
-      </p:sp>
-      <p:sp>
-        <p:nvSpPr>
-          <p:cNvPr id="15" name="TextBox 14"/>
-          <p:cNvSpPr txBox="1"/>
-          <p:nvPr/>
-        </p:nvSpPr>
-        <p:spPr>
-          <a:xfrm>
-            <a:off x="768096" y="4611466"/>
-            <a:ext cx="3125114" cy="277622"/>
-          </a:xfrm>
-          <a:prstGeom prst="rect">
-            <a:avLst/>
-          </a:prstGeom>
-          <a:noFill/>
-        </p:spPr>
-        <p:txBody>
-          <a:bodyPr wrap="square" anchor="t" lIns="0" rIns="0" tIns="0" bIns="0">
-            <a:spAutoFit/>
-          </a:bodyPr>
-          <a:lstStyle/>
-          <a:p>
-            <a:pPr algn="l">
-              <a:lnSpc>
-                <a:spcPct val="100000"/>
-              </a:lnSpc>
-            </a:pPr>
-            <a:r>
-              <a:rPr sz="1300" b="1">
-                <a:solidFill>
-                  <a:srgbClr val="D20A2E"/>
-                </a:solidFill>
-                <a:latin typeface="Microsoft YaHei"/>
-              </a:rPr>
-              <a:t>比 S1 全面更好</a:t>
-            </a:r>
-          </a:p>
-        </p:txBody>
-      </p:sp>
-      <p:sp>
-        <p:nvSpPr>
-          <p:cNvPr id="16" name="TextBox 15"/>
-          <p:cNvSpPr txBox="1"/>
-          <p:nvPr/>
-        </p:nvSpPr>
-        <p:spPr>
-          <a:xfrm>
-            <a:off x="768096" y="4971384"/>
-            <a:ext cx="3125114" cy="868740"/>
-          </a:xfrm>
-          <a:prstGeom prst="rect">
-            <a:avLst/>
-          </a:prstGeom>
-          <a:noFill/>
-        </p:spPr>
-        <p:txBody>
-          <a:bodyPr wrap="square" anchor="t" lIns="0" rIns="0" tIns="0" bIns="0">
-            <a:spAutoFit/>
-          </a:bodyPr>
-          <a:lstStyle/>
-          <a:p>
-            <a:pPr algn="l">
-              <a:lnSpc>
-                <a:spcPct val="102000"/>
-              </a:lnSpc>
-            </a:pPr>
-            <a:r>
-              <a:rPr sz="1100" b="0">
-                <a:solidFill>
-                  <a:srgbClr val="20242C"/>
-                </a:solidFill>
-                <a:latin typeface="Microsoft YaHei"/>
-              </a:rPr>
-              <a:t>Jain 0.94799 vs S1 的 0.95675 基本持平，但带宽只让 </a:t>
-            </a:r>
-            <a:r>
-              <a:rPr sz="1100" b="1">
-                <a:solidFill>
-                  <a:srgbClr val="20242C"/>
-                </a:solidFill>
-                <a:latin typeface="Microsoft YaHei"/>
-              </a:rPr>
-              <a:t>2.21%</a:t>
-            </a:r>
-            <a:r>
-              <a:rPr sz="1100" b="0">
-                <a:solidFill>
-                  <a:srgbClr val="20242C"/>
-                </a:solidFill>
-                <a:latin typeface="Microsoft YaHei"/>
-              </a:rPr>
-              <a:t>，S1 要让 </a:t>
-            </a:r>
-            <a:r>
-              <a:rPr sz="1100" b="1">
-                <a:solidFill>
-                  <a:srgbClr val="20242C"/>
-                </a:solidFill>
-                <a:latin typeface="Microsoft YaHei"/>
-              </a:rPr>
-              <a:t>16.3%</a:t>
-            </a:r>
-            <a:r>
-              <a:rPr sz="1100" b="0">
-                <a:solidFill>
-                  <a:srgbClr val="20242C"/>
-                </a:solidFill>
-                <a:latin typeface="Microsoft YaHei"/>
-              </a:rPr>
-              <a:t>；max/min 1.2230 vs 1.3586。硬件还便宜 34%（13,920 vs 21,220 FF‑eq）。</a:t>
-            </a:r>
-          </a:p>
-        </p:txBody>
-      </p:sp>
-      <p:sp>
-        <p:nvSpPr>
-          <p:cNvPr id="17" name="Rectangle 16"/>
-          <p:cNvSpPr/>
-          <p:nvPr/>
-        </p:nvSpPr>
-        <p:spPr>
-          <a:xfrm>
-            <a:off x="4332122" y="4087368"/>
-            <a:ext cx="3527450" cy="2240280"/>
-          </a:xfrm>
-          <a:prstGeom prst="rect">
-            <a:avLst/>
-          </a:prstGeom>
-          <a:solidFill>
-            <a:srgbClr val="EDF2F7"/>
-          </a:solidFill>
-          <a:ln w="12700">
-            <a:solidFill>
-              <a:srgbClr val="DCE3EA"/>
-            </a:solidFill>
-          </a:ln>
-          <a:effectLst/>
-        </p:spPr>
-        <p:style>
-          <a:lnRef idx="1">
-            <a:schemeClr val="accent1"/>
-          </a:lnRef>
-          <a:fillRef idx="3">
-            <a:schemeClr val="accent1"/>
-          </a:fillRef>
-          <a:effectRef idx="2">
-            <a:schemeClr val="accent1"/>
-          </a:effectRef>
-          <a:fontRef idx="minor">
-            <a:schemeClr val="lt1"/>
-          </a:fontRef>
-        </p:style>
-        <p:txBody>
-          <a:bodyPr rtlCol="0" anchor="ctr" wrap="square"/>
-          <a:lstStyle/>
-          <a:p>
-            <a:pPr algn="ctr"/>
-          </a:p>
-        </p:txBody>
-      </p:sp>
-      <p:sp>
-        <p:nvSpPr>
-          <p:cNvPr id="18" name="TextBox 17"/>
-          <p:cNvSpPr txBox="1"/>
-          <p:nvPr/>
-        </p:nvSpPr>
-        <p:spPr>
-          <a:xfrm>
-            <a:off x="4533290" y="4611466"/>
-            <a:ext cx="3125114" cy="277622"/>
-          </a:xfrm>
-          <a:prstGeom prst="rect">
-            <a:avLst/>
-          </a:prstGeom>
-          <a:noFill/>
-        </p:spPr>
-        <p:txBody>
-          <a:bodyPr wrap="square" anchor="t" lIns="0" rIns="0" tIns="0" bIns="0">
-            <a:spAutoFit/>
-          </a:bodyPr>
-          <a:lstStyle/>
-          <a:p>
-            <a:pPr algn="l">
-              <a:lnSpc>
-                <a:spcPct val="100000"/>
-              </a:lnSpc>
-            </a:pPr>
-            <a:r>
-              <a:rPr sz="1300" b="1">
-                <a:solidFill>
-                  <a:srgbClr val="20242C"/>
-                </a:solidFill>
-                <a:latin typeface="Microsoft YaHei"/>
-              </a:rPr>
-              <a:t>数字上被 S16 支配，但层次不同</a:t>
-            </a:r>
-          </a:p>
-        </p:txBody>
-      </p:sp>
-      <p:sp>
-        <p:nvSpPr>
-          <p:cNvPr id="19" name="TextBox 18"/>
-          <p:cNvSpPr txBox="1"/>
-          <p:nvPr/>
-        </p:nvSpPr>
-        <p:spPr>
-          <a:xfrm>
-            <a:off x="4533290" y="4971384"/>
-            <a:ext cx="3125114" cy="868740"/>
-          </a:xfrm>
-          <a:prstGeom prst="rect">
-            <a:avLst/>
-          </a:prstGeom>
-          <a:noFill/>
-        </p:spPr>
-        <p:txBody>
-          <a:bodyPr wrap="square" anchor="t" lIns="0" rIns="0" tIns="0" bIns="0">
-            <a:spAutoFit/>
-          </a:bodyPr>
-          <a:lstStyle/>
-          <a:p>
-            <a:pPr algn="l">
-              <a:lnSpc>
-                <a:spcPct val="102000"/>
-              </a:lnSpc>
-            </a:pPr>
-            <a:r>
-              <a:rPr sz="1100" b="0">
-                <a:solidFill>
-                  <a:srgbClr val="20242C"/>
-                </a:solidFill>
-                <a:latin typeface="Microsoft YaHei"/>
-              </a:rPr>
-              <a:t>S16 用 </a:t>
-            </a:r>
-            <a:r>
-              <a:rPr sz="1100" b="1">
-                <a:solidFill>
-                  <a:srgbClr val="20242C"/>
-                </a:solidFill>
-                <a:latin typeface="Microsoft YaHei"/>
-              </a:rPr>
-              <a:t>1/15 的硬件</a:t>
-            </a:r>
-            <a:r>
-              <a:rPr sz="1100" b="0">
-                <a:solidFill>
-                  <a:srgbClr val="20242C"/>
-                </a:solidFill>
-                <a:latin typeface="Microsoft YaHei"/>
-              </a:rPr>
-              <a:t>拿到更高的 Jain（0.98466）和更小的带宽代价（0.39%）。S22 唯一的、也是决定性的优势：</a:t>
-            </a:r>
-            <a:r>
-              <a:rPr sz="1100" b="1">
-                <a:solidFill>
-                  <a:srgbClr val="D20A2E"/>
-                </a:solidFill>
-                <a:latin typeface="Microsoft YaHei"/>
-              </a:rPr>
-              <a:t>它只改环上仲裁，一点事务层都不碰。</a:t>
-            </a:r>
-          </a:p>
-        </p:txBody>
-      </p:sp>
-      <p:sp>
-        <p:nvSpPr>
-          <p:cNvPr id="20" name="Rectangle 19"/>
-          <p:cNvSpPr/>
-          <p:nvPr/>
-        </p:nvSpPr>
-        <p:spPr>
-          <a:xfrm>
-            <a:off x="8097316" y="4087368"/>
-            <a:ext cx="3527450" cy="2240280"/>
-          </a:xfrm>
-          <a:prstGeom prst="rect">
-            <a:avLst/>
-          </a:prstGeom>
-          <a:solidFill>
-            <a:srgbClr val="EDF2F7"/>
-          </a:solidFill>
-          <a:ln w="12700">
-            <a:solidFill>
-              <a:srgbClr val="DCE3EA"/>
-            </a:solidFill>
-          </a:ln>
-          <a:effectLst/>
-        </p:spPr>
-        <p:style>
-          <a:lnRef idx="1">
-            <a:schemeClr val="accent1"/>
-          </a:lnRef>
-          <a:fillRef idx="3">
-            <a:schemeClr val="accent1"/>
-          </a:fillRef>
-          <a:effectRef idx="2">
-            <a:schemeClr val="accent1"/>
-          </a:effectRef>
-          <a:fontRef idx="minor">
-            <a:schemeClr val="lt1"/>
-          </a:fontRef>
-        </p:style>
-        <p:txBody>
-          <a:bodyPr rtlCol="0" anchor="ctr" wrap="square"/>
-          <a:lstStyle/>
-          <a:p>
-            <a:pPr algn="ctr"/>
-          </a:p>
-        </p:txBody>
-      </p:sp>
-      <p:sp>
-        <p:nvSpPr>
-          <p:cNvPr id="21" name="TextBox 20"/>
-          <p:cNvSpPr txBox="1"/>
-          <p:nvPr/>
-        </p:nvSpPr>
-        <p:spPr>
-          <a:xfrm>
-            <a:off x="8298484" y="4294402"/>
-            <a:ext cx="3125114" cy="277622"/>
-          </a:xfrm>
-          <a:prstGeom prst="rect">
-            <a:avLst/>
-          </a:prstGeom>
-          <a:noFill/>
-        </p:spPr>
-        <p:txBody>
-          <a:bodyPr wrap="square" anchor="t" lIns="0" rIns="0" tIns="0" bIns="0">
-            <a:spAutoFit/>
-          </a:bodyPr>
-          <a:lstStyle/>
-          <a:p>
-            <a:pPr algn="l">
-              <a:lnSpc>
-                <a:spcPct val="100000"/>
-              </a:lnSpc>
-            </a:pPr>
-            <a:r>
-              <a:rPr sz="1300" b="1">
-                <a:solidFill>
-                  <a:srgbClr val="20242C"/>
-                </a:solidFill>
-                <a:latin typeface="Microsoft YaHei"/>
-              </a:rPr>
-              <a:t>两个公平性指标分别在问什么</a:t>
-            </a:r>
-          </a:p>
-        </p:txBody>
-      </p:sp>
-      <p:sp>
-        <p:nvSpPr>
-          <p:cNvPr id="22" name="TextBox 21"/>
-          <p:cNvSpPr txBox="1"/>
-          <p:nvPr/>
-        </p:nvSpPr>
-        <p:spPr>
-          <a:xfrm>
-            <a:off x="8298484" y="4654320"/>
-            <a:ext cx="3125114" cy="1502869"/>
-          </a:xfrm>
-          <a:prstGeom prst="rect">
-            <a:avLst/>
-          </a:prstGeom>
-          <a:noFill/>
-        </p:spPr>
-        <p:txBody>
-          <a:bodyPr wrap="square" anchor="t" lIns="0" rIns="0" tIns="0" bIns="0">
-            <a:spAutoFit/>
-          </a:bodyPr>
-          <a:lstStyle/>
-          <a:p>
-            <a:pPr algn="l">
-              <a:lnSpc>
-                <a:spcPct val="102000"/>
-              </a:lnSpc>
-            </a:pPr>
-            <a:r>
-              <a:rPr sz="1050" b="1">
-                <a:solidFill>
-                  <a:srgbClr val="20242C"/>
-                </a:solidFill>
-                <a:latin typeface="Microsoft YaHei"/>
-              </a:rPr>
-              <a:t>瞬时均衡度</a:t>
-            </a:r>
-            <a:r>
-              <a:rPr sz="1050" b="0">
-                <a:solidFill>
-                  <a:srgbClr val="20242C"/>
-                </a:solidFill>
-                <a:latin typeface="Microsoft YaHei"/>
-              </a:rPr>
-              <a:t>（每 100 拍算一次 Jain 再平均）问的是：在任意一小段时间里，十个核是不是同时都在被服务。</a:t>
-            </a:r>
-          </a:p>
-          <a:p>
-            <a:pPr algn="l">
-              <a:lnSpc>
-                <a:spcPct val="102000"/>
-              </a:lnSpc>
-              <a:spcBef>
-                <a:spcPts val="600"/>
-              </a:spcBef>
-            </a:pPr>
-            <a:r>
-              <a:rPr sz="1050" b="1">
-                <a:solidFill>
-                  <a:srgbClr val="20242C"/>
-                </a:solidFill>
-                <a:latin typeface="Microsoft YaHei"/>
-              </a:rPr>
-              <a:t>长期速率差</a:t>
-            </a:r>
-            <a:r>
-              <a:rPr sz="1050" b="0">
-                <a:solidFill>
-                  <a:srgbClr val="20242C"/>
-                </a:solidFill>
-                <a:latin typeface="Microsoft YaHei"/>
-              </a:rPr>
-              <a:t>（整窗最快核带宽 ÷ 最慢核带宽）问的是：把整个争用窗平均下来，有没有哪个核被系统性地拖慢。S0 = 1.5663 意味着最快的核长期比最慢的核快 57%。</a:t>
-            </a:r>
-          </a:p>
-        </p:txBody>
-      </p:sp>
       <p:sp>
         <p:nvSpPr>
           <p:cNvPr id="23" name="TextBox 22"/>
+          <p:cNvSpPr txBox="1"/>
+          <p:nvPr/>
+        </p:nvSpPr>
+        <p:spPr>
+          <a:xfrm>
+            <a:off x="877824" y="5559552"/>
+            <a:ext cx="10436047" cy="676656"/>
+          </a:xfrm>
+          <a:prstGeom prst="rect">
+            <a:avLst/>
+          </a:prstGeom>
+          <a:noFill/>
+        </p:spPr>
+        <p:txBody>
+          <a:bodyPr wrap="square" anchor="ctr" lIns="0" rIns="0" tIns="0" bIns="0">
+            <a:spAutoFit/>
+          </a:bodyPr>
+          <a:lstStyle/>
+          <a:p>
+            <a:pPr algn="l">
+              <a:lnSpc>
+                <a:spcPct val="104000"/>
+              </a:lnSpc>
+            </a:pPr>
+            <a:r>
+              <a:rPr sz="1300" b="0">
+                <a:solidFill>
+                  <a:srgbClr val="FFFFFF"/>
+                </a:solidFill>
+                <a:latin typeface="Microsoft YaHei"/>
+              </a:rPr>
+              <a:t>统一结论：不要把所有机制压成一个排名。S16、S19 / S20、S22 分别交换 completer、requester、跨节点仲裁的改动权限；先确定可改边界，再在对应层内选性能最好的方案。</a:t>
+            </a:r>
+          </a:p>
+        </p:txBody>
+      </p:sp>
+      <p:sp>
+        <p:nvSpPr>
+          <p:cNvPr id="24" name="TextBox 23"/>
           <p:cNvSpPr txBox="1"/>
           <p:nvPr/>
         </p:nvSpPr>
@@ -24637,7 +24370,7 @@
                 </a:solidFill>
                 <a:latin typeface="Arial"/>
               </a:rPr>
-              <a:t>30 / 34</a:t>
+              <a:t>30 / 32</a:t>
             </a:r>
           </a:p>
         </p:txBody>
@@ -24712,8 +24445,8 @@
         </p:nvSpPr>
         <p:spPr>
           <a:xfrm>
-            <a:off x="10143439" y="274320"/>
-            <a:ext cx="182880" cy="182880"/>
+            <a:off x="566928" y="301752"/>
+            <a:ext cx="137160" cy="137160"/>
           </a:xfrm>
           <a:prstGeom prst="rect">
             <a:avLst/>
@@ -24756,8 +24489,8 @@
         </p:nvSpPr>
         <p:spPr>
           <a:xfrm>
-            <a:off x="10399471" y="246888"/>
-            <a:ext cx="1225296" cy="256032"/>
+            <a:off x="804672" y="265176"/>
+            <a:ext cx="9229039" cy="237744"/>
           </a:xfrm>
           <a:prstGeom prst="rect">
             <a:avLst/>
@@ -24776,36 +24509,36 @@
               </a:lnSpc>
             </a:pPr>
             <a:r>
-              <a:rPr sz="1300" b="1">
-                <a:solidFill>
-                  <a:srgbClr val="20242C"/>
-                </a:solidFill>
-                <a:latin typeface="Arial"/>
-              </a:rPr>
-              <a:t>HUAWEI</a:t>
-            </a:r>
-          </a:p>
-        </p:txBody>
-      </p:sp>
-      <p:sp>
-        <p:nvSpPr>
-          <p:cNvPr id="5" name="Oval 4"/>
+              <a:rPr sz="1150" b="1">
+                <a:solidFill>
+                  <a:srgbClr val="667080"/>
+                </a:solidFill>
+                <a:latin typeface="Microsoft YaHei"/>
+              </a:rPr>
+              <a:t>建议</a:t>
+            </a:r>
+          </a:p>
+        </p:txBody>
+      </p:sp>
+      <p:sp>
+        <p:nvSpPr>
+          <p:cNvPr id="5" name="Rectangle 4"/>
           <p:cNvSpPr/>
           <p:nvPr/>
         </p:nvSpPr>
         <p:spPr>
           <a:xfrm>
-            <a:off x="566928" y="1883664"/>
-            <a:ext cx="896112" cy="896112"/>
-          </a:xfrm>
-          <a:prstGeom prst="ellipse">
-            <a:avLst/>
-          </a:prstGeom>
-          <a:noFill/>
-          <a:ln w="17780">
-            <a:solidFill>
-              <a:srgbClr val="DCE3EA"/>
-            </a:solidFill>
+            <a:off x="566928" y="640080"/>
+            <a:ext cx="11057839" cy="10058"/>
+          </a:xfrm>
+          <a:prstGeom prst="rect">
+            <a:avLst/>
+          </a:prstGeom>
+          <a:solidFill>
+            <a:srgbClr val="DCE3EA"/>
+          </a:solidFill>
+          <a:ln>
+            <a:noFill/>
           </a:ln>
           <a:effectLst/>
         </p:spPr>
@@ -24833,170 +24566,14 @@
       </p:sp>
       <p:sp>
         <p:nvSpPr>
-          <p:cNvPr id="6" name="TextBox 5"/>
-          <p:cNvSpPr txBox="1"/>
-          <p:nvPr/>
-        </p:nvSpPr>
-        <p:spPr>
-          <a:xfrm>
-            <a:off x="566928" y="2176272"/>
-            <a:ext cx="896112" cy="365760"/>
-          </a:xfrm>
-          <a:prstGeom prst="rect">
-            <a:avLst/>
-          </a:prstGeom>
-          <a:noFill/>
-        </p:spPr>
-        <p:txBody>
-          <a:bodyPr wrap="square" anchor="t" lIns="0" rIns="0" tIns="0" bIns="0">
-            <a:spAutoFit/>
-          </a:bodyPr>
-          <a:lstStyle/>
-          <a:p>
-            <a:pPr algn="ctr">
-              <a:lnSpc>
-                <a:spcPct val="100000"/>
-              </a:lnSpc>
-            </a:pPr>
-            <a:r>
-              <a:rPr sz="2100" b="1">
-                <a:solidFill>
-                  <a:srgbClr val="D20A2E"/>
-                </a:solidFill>
-                <a:latin typeface="Arial"/>
-              </a:rPr>
-              <a:t>07</a:t>
-            </a:r>
-          </a:p>
-        </p:txBody>
-      </p:sp>
-      <p:sp>
-        <p:nvSpPr>
-          <p:cNvPr id="7" name="TextBox 6"/>
-          <p:cNvSpPr txBox="1"/>
-          <p:nvPr/>
-        </p:nvSpPr>
-        <p:spPr>
-          <a:xfrm>
-            <a:off x="566928" y="2980944"/>
-            <a:ext cx="4023360" cy="237744"/>
-          </a:xfrm>
-          <a:prstGeom prst="rect">
-            <a:avLst/>
-          </a:prstGeom>
-          <a:noFill/>
-        </p:spPr>
-        <p:txBody>
-          <a:bodyPr wrap="square" anchor="t" lIns="0" rIns="0" tIns="0" bIns="0">
-            <a:spAutoFit/>
-          </a:bodyPr>
-          <a:lstStyle/>
-          <a:p>
-            <a:pPr algn="l">
-              <a:lnSpc>
-                <a:spcPct val="100000"/>
-              </a:lnSpc>
-            </a:pPr>
-            <a:r>
-              <a:rPr sz="1100" b="1">
-                <a:solidFill>
-                  <a:srgbClr val="D20A2E"/>
-                </a:solidFill>
-                <a:latin typeface="Arial"/>
-              </a:rPr>
-              <a:t>S E C T I O N   S E V E N</a:t>
-            </a:r>
-          </a:p>
-        </p:txBody>
-      </p:sp>
-      <p:sp>
-        <p:nvSpPr>
-          <p:cNvPr id="8" name="TextBox 7"/>
-          <p:cNvSpPr txBox="1"/>
-          <p:nvPr/>
-        </p:nvSpPr>
-        <p:spPr>
-          <a:xfrm>
-            <a:off x="566928" y="3291840"/>
-            <a:ext cx="4937760" cy="1426464"/>
-          </a:xfrm>
-          <a:prstGeom prst="rect">
-            <a:avLst/>
-          </a:prstGeom>
-          <a:noFill/>
-        </p:spPr>
-        <p:txBody>
-          <a:bodyPr wrap="square" anchor="t" lIns="0" rIns="0" tIns="0" bIns="0">
-            <a:spAutoFit/>
-          </a:bodyPr>
-          <a:lstStyle/>
-          <a:p>
-            <a:pPr algn="l">
-              <a:lnSpc>
-                <a:spcPct val="98000"/>
-              </a:lnSpc>
-            </a:pPr>
-            <a:r>
-              <a:rPr sz="3800" b="1">
-                <a:solidFill>
-                  <a:srgbClr val="20242C"/>
-                </a:solidFill>
-                <a:latin typeface="Microsoft YaHei"/>
-              </a:rPr>
-              <a:t>结论与建议</a:t>
-            </a:r>
-          </a:p>
-        </p:txBody>
-      </p:sp>
-      <p:sp>
-        <p:nvSpPr>
-          <p:cNvPr id="9" name="TextBox 8"/>
-          <p:cNvSpPr txBox="1"/>
-          <p:nvPr/>
-        </p:nvSpPr>
-        <p:spPr>
-          <a:xfrm>
-            <a:off x="566928" y="4846320"/>
-            <a:ext cx="4572000" cy="786384"/>
-          </a:xfrm>
-          <a:prstGeom prst="rect">
-            <a:avLst/>
-          </a:prstGeom>
-          <a:noFill/>
-        </p:spPr>
-        <p:txBody>
-          <a:bodyPr wrap="square" anchor="t" lIns="0" rIns="0" tIns="0" bIns="0">
-            <a:spAutoFit/>
-          </a:bodyPr>
-          <a:lstStyle/>
-          <a:p>
-            <a:pPr algn="l">
-              <a:lnSpc>
-                <a:spcPct val="106000"/>
-              </a:lnSpc>
-            </a:pPr>
-            <a:r>
-              <a:rPr sz="1400" b="0">
-                <a:solidFill>
-                  <a:srgbClr val="667080"/>
-                </a:solidFill>
-                <a:latin typeface="Microsoft YaHei"/>
-              </a:rPr>
-              <a:t>哪些已经关死，哪些还开着，以及下一步该由谁拍板。</a:t>
-            </a:r>
-          </a:p>
-        </p:txBody>
-      </p:sp>
-      <p:sp>
-        <p:nvSpPr>
-          <p:cNvPr id="10" name="Rectangle 9"/>
+          <p:cNvPr id="6" name="Rectangle 5"/>
           <p:cNvSpPr/>
           <p:nvPr/>
         </p:nvSpPr>
         <p:spPr>
           <a:xfrm>
-            <a:off x="5989320" y="2011680"/>
-            <a:ext cx="5635447" cy="2834640"/>
+            <a:off x="10143439" y="274320"/>
+            <a:ext cx="182880" cy="182880"/>
           </a:xfrm>
           <a:prstGeom prst="rect">
             <a:avLst/>
@@ -25033,14 +24610,14 @@
       </p:sp>
       <p:sp>
         <p:nvSpPr>
-          <p:cNvPr id="11" name="TextBox 10"/>
-          <p:cNvSpPr txBox="1"/>
-          <p:nvPr/>
-        </p:nvSpPr>
-        <p:spPr>
-          <a:xfrm>
-            <a:off x="6355080" y="2395728"/>
-            <a:ext cx="3657600" cy="237744"/>
+          <p:cNvPr id="7" name="TextBox 6"/>
+          <p:cNvSpPr txBox="1"/>
+          <p:nvPr/>
+        </p:nvSpPr>
+        <p:spPr>
+          <a:xfrm>
+            <a:off x="10399471" y="246888"/>
+            <a:ext cx="1225296" cy="256032"/>
           </a:xfrm>
           <a:prstGeom prst="rect">
             <a:avLst/>
@@ -25059,35 +24636,1087 @@
               </a:lnSpc>
             </a:pPr>
             <a:r>
+              <a:rPr sz="1300" b="1">
+                <a:solidFill>
+                  <a:srgbClr val="20242C"/>
+                </a:solidFill>
+                <a:latin typeface="Arial"/>
+              </a:rPr>
+              <a:t>HUAWEI</a:t>
+            </a:r>
+          </a:p>
+        </p:txBody>
+      </p:sp>
+      <p:sp>
+        <p:nvSpPr>
+          <p:cNvPr id="8" name="TextBox 7"/>
+          <p:cNvSpPr txBox="1"/>
+          <p:nvPr/>
+        </p:nvSpPr>
+        <p:spPr>
+          <a:xfrm>
+            <a:off x="566928" y="1060704"/>
+            <a:ext cx="11057839" cy="237744"/>
+          </a:xfrm>
+          <a:prstGeom prst="rect">
+            <a:avLst/>
+          </a:prstGeom>
+          <a:noFill/>
+        </p:spPr>
+        <p:txBody>
+          <a:bodyPr wrap="square" anchor="t" lIns="0" rIns="0" tIns="0" bIns="0">
+            <a:spAutoFit/>
+          </a:bodyPr>
+          <a:lstStyle/>
+          <a:p>
+            <a:pPr algn="l">
+              <a:lnSpc>
+                <a:spcPct val="100000"/>
+              </a:lnSpc>
+            </a:pPr>
+            <a:r>
+              <a:rPr sz="1050" b="1">
+                <a:solidFill>
+                  <a:srgbClr val="D20A2E"/>
+                </a:solidFill>
+                <a:latin typeface="Arial"/>
+              </a:rPr>
+              <a:t>R E C O M M E N D A T I O N</a:t>
+            </a:r>
+          </a:p>
+        </p:txBody>
+      </p:sp>
+      <p:sp>
+        <p:nvSpPr>
+          <p:cNvPr id="9" name="TextBox 8"/>
+          <p:cNvSpPr txBox="1"/>
+          <p:nvPr/>
+        </p:nvSpPr>
+        <p:spPr>
+          <a:xfrm>
+            <a:off x="566928" y="1353312"/>
+            <a:ext cx="11057839" cy="658368"/>
+          </a:xfrm>
+          <a:prstGeom prst="rect">
+            <a:avLst/>
+          </a:prstGeom>
+          <a:noFill/>
+        </p:spPr>
+        <p:txBody>
+          <a:bodyPr wrap="square" anchor="t" lIns="0" rIns="0" tIns="0" bIns="0">
+            <a:spAutoFit/>
+          </a:bodyPr>
+          <a:lstStyle/>
+          <a:p>
+            <a:pPr algn="l">
+              <a:lnSpc>
+                <a:spcPct val="100000"/>
+              </a:lnSpc>
+            </a:pPr>
+            <a:r>
+              <a:rPr sz="3000" b="1">
+                <a:solidFill>
+                  <a:srgbClr val="20242C"/>
+                </a:solidFill>
+                <a:latin typeface="Microsoft YaHei"/>
+              </a:rPr>
+              <a:t>先收在飞，再按可改层次选择</a:t>
+            </a:r>
+          </a:p>
+        </p:txBody>
+      </p:sp>
+      <p:sp>
+        <p:nvSpPr>
+          <p:cNvPr id="10" name="Rectangle 9"/>
+          <p:cNvSpPr/>
+          <p:nvPr/>
+        </p:nvSpPr>
+        <p:spPr>
+          <a:xfrm>
+            <a:off x="566928" y="2194560"/>
+            <a:ext cx="2599867" cy="3017520"/>
+          </a:xfrm>
+          <a:prstGeom prst="rect">
+            <a:avLst/>
+          </a:prstGeom>
+          <a:solidFill>
+            <a:srgbClr val="FFFFFF"/>
+          </a:solidFill>
+          <a:ln w="12700">
+            <a:solidFill>
+              <a:srgbClr val="DCE3EA"/>
+            </a:solidFill>
+          </a:ln>
+          <a:effectLst/>
+        </p:spPr>
+        <p:style>
+          <a:lnRef idx="1">
+            <a:schemeClr val="accent1"/>
+          </a:lnRef>
+          <a:fillRef idx="3">
+            <a:schemeClr val="accent1"/>
+          </a:fillRef>
+          <a:effectRef idx="2">
+            <a:schemeClr val="accent1"/>
+          </a:effectRef>
+          <a:fontRef idx="minor">
+            <a:schemeClr val="lt1"/>
+          </a:fontRef>
+        </p:style>
+        <p:txBody>
+          <a:bodyPr rtlCol="0" anchor="ctr" wrap="square"/>
+          <a:lstStyle/>
+          <a:p>
+            <a:pPr algn="ctr"/>
+          </a:p>
+        </p:txBody>
+      </p:sp>
+      <p:sp>
+        <p:nvSpPr>
+          <p:cNvPr id="11" name="Oval 10"/>
+          <p:cNvSpPr/>
+          <p:nvPr/>
+        </p:nvSpPr>
+        <p:spPr>
+          <a:xfrm>
+            <a:off x="786384" y="2414016"/>
+            <a:ext cx="384048" cy="384048"/>
+          </a:xfrm>
+          <a:prstGeom prst="ellipse">
+            <a:avLst/>
+          </a:prstGeom>
+          <a:solidFill>
+            <a:srgbClr val="D20A2E"/>
+          </a:solidFill>
+          <a:ln>
+            <a:noFill/>
+          </a:ln>
+          <a:effectLst/>
+        </p:spPr>
+        <p:style>
+          <a:lnRef idx="1">
+            <a:schemeClr val="accent1"/>
+          </a:lnRef>
+          <a:fillRef idx="3">
+            <a:schemeClr val="accent1"/>
+          </a:fillRef>
+          <a:effectRef idx="2">
+            <a:schemeClr val="accent1"/>
+          </a:effectRef>
+          <a:fontRef idx="minor">
+            <a:schemeClr val="lt1"/>
+          </a:fontRef>
+        </p:style>
+        <p:txBody>
+          <a:bodyPr rtlCol="0" anchor="ctr" wrap="square"/>
+          <a:lstStyle/>
+          <a:p>
+            <a:pPr algn="ctr"/>
+          </a:p>
+        </p:txBody>
+      </p:sp>
+      <p:sp>
+        <p:nvSpPr>
+          <p:cNvPr id="12" name="TextBox 11"/>
+          <p:cNvSpPr txBox="1"/>
+          <p:nvPr/>
+        </p:nvSpPr>
+        <p:spPr>
+          <a:xfrm>
+            <a:off x="786384" y="2496312"/>
+            <a:ext cx="384048" cy="237744"/>
+          </a:xfrm>
+          <a:prstGeom prst="rect">
+            <a:avLst/>
+          </a:prstGeom>
+          <a:noFill/>
+        </p:spPr>
+        <p:txBody>
+          <a:bodyPr wrap="square" anchor="t" lIns="0" rIns="0" tIns="0" bIns="0">
+            <a:spAutoFit/>
+          </a:bodyPr>
+          <a:lstStyle/>
+          <a:p>
+            <a:pPr algn="ctr">
+              <a:lnSpc>
+                <a:spcPct val="100000"/>
+              </a:lnSpc>
+            </a:pPr>
+            <a:r>
+              <a:rPr sz="1150" b="1">
+                <a:solidFill>
+                  <a:srgbClr val="FFFFFF"/>
+                </a:solidFill>
+                <a:latin typeface="Arial"/>
+              </a:rPr>
+              <a:t>01</a:t>
+            </a:r>
+          </a:p>
+        </p:txBody>
+      </p:sp>
+      <p:sp>
+        <p:nvSpPr>
+          <p:cNvPr id="13" name="TextBox 12"/>
+          <p:cNvSpPr txBox="1"/>
+          <p:nvPr/>
+        </p:nvSpPr>
+        <p:spPr>
+          <a:xfrm>
+            <a:off x="786384" y="2968706"/>
+            <a:ext cx="2160955" cy="592836"/>
+          </a:xfrm>
+          <a:prstGeom prst="rect">
+            <a:avLst/>
+          </a:prstGeom>
+          <a:noFill/>
+        </p:spPr>
+        <p:txBody>
+          <a:bodyPr wrap="square" anchor="t" lIns="0" rIns="0" tIns="0" bIns="0">
+            <a:spAutoFit/>
+          </a:bodyPr>
+          <a:lstStyle/>
+          <a:p>
+            <a:pPr algn="l">
+              <a:lnSpc>
+                <a:spcPct val="100000"/>
+              </a:lnSpc>
+            </a:pPr>
+            <a:r>
+              <a:rPr sz="1500" b="1">
+                <a:solidFill>
+                  <a:srgbClr val="20242C"/>
+                </a:solidFill>
+                <a:latin typeface="Microsoft YaHei"/>
+              </a:rPr>
+              <a:t>第一步 · 0 FF‑eq · 无条件</a:t>
+            </a:r>
+          </a:p>
+        </p:txBody>
+      </p:sp>
+      <p:sp>
+        <p:nvSpPr>
+          <p:cNvPr id="14" name="TextBox 13"/>
+          <p:cNvSpPr txBox="1"/>
+          <p:nvPr/>
+        </p:nvSpPr>
+        <p:spPr>
+          <a:xfrm>
+            <a:off x="786384" y="3643838"/>
+            <a:ext cx="2160955" cy="1361023"/>
+          </a:xfrm>
+          <a:prstGeom prst="rect">
+            <a:avLst/>
+          </a:prstGeom>
+          <a:noFill/>
+        </p:spPr>
+        <p:txBody>
+          <a:bodyPr wrap="square" anchor="t" lIns="0" rIns="0" tIns="0" bIns="0">
+            <a:spAutoFit/>
+          </a:bodyPr>
+          <a:lstStyle/>
+          <a:p>
+            <a:pPr algn="l">
+              <a:lnSpc>
+                <a:spcPct val="102000"/>
+              </a:lnSpc>
+            </a:pPr>
+            <a:r>
               <a:rPr sz="1100" b="1">
                 <a:solidFill>
+                  <a:srgbClr val="20242C"/>
+                </a:solidFill>
+                <a:latin typeface="Microsoft YaHei"/>
+              </a:rPr>
+              <a:t>每核在飞上限收到 32。</a:t>
+            </a:r>
+            <a:r>
+              <a:rPr sz="1100" b="0">
+                <a:solidFill>
+                  <a:srgbClr val="20242C"/>
+                </a:solidFill>
+                <a:latin typeface="Microsoft YaHei"/>
+              </a:rPr>
+              <a:t>零硬件、无流量先验：覆盖最坏 89 拍 RTT 只需约 26 笔，再多就只是在已经饱和的环上排队。</a:t>
+            </a:r>
+          </a:p>
+          <a:p>
+            <a:pPr algn="l">
+              <a:lnSpc>
+                <a:spcPct val="102000"/>
+              </a:lnSpc>
+              <a:spcBef>
+                <a:spcPts val="600"/>
+              </a:spcBef>
+            </a:pPr>
+            <a:r>
+              <a:rPr sz="1100" b="1">
+                <a:solidFill>
+                  <a:srgbClr val="D20A2E"/>
+                </a:solidFill>
+                <a:latin typeface="Microsoft YaHei"/>
+              </a:rPr>
+              <a:t>uniform 绕环重发从上千拍降到 5 拍；非均匀流量带宽 +33%。</a:t>
+            </a:r>
+          </a:p>
+        </p:txBody>
+      </p:sp>
+      <p:sp>
+        <p:nvSpPr>
+          <p:cNvPr id="15" name="Rectangle 14"/>
+          <p:cNvSpPr/>
+          <p:nvPr/>
+        </p:nvSpPr>
+        <p:spPr>
+          <a:xfrm>
+            <a:off x="3386251" y="2194560"/>
+            <a:ext cx="2599867" cy="3017520"/>
+          </a:xfrm>
+          <a:prstGeom prst="rect">
+            <a:avLst/>
+          </a:prstGeom>
+          <a:solidFill>
+            <a:srgbClr val="FFFFFF"/>
+          </a:solidFill>
+          <a:ln w="19050">
+            <a:solidFill>
+              <a:srgbClr val="D20A2E"/>
+            </a:solidFill>
+          </a:ln>
+          <a:effectLst/>
+        </p:spPr>
+        <p:style>
+          <a:lnRef idx="1">
+            <a:schemeClr val="accent1"/>
+          </a:lnRef>
+          <a:fillRef idx="3">
+            <a:schemeClr val="accent1"/>
+          </a:fillRef>
+          <a:effectRef idx="2">
+            <a:schemeClr val="accent1"/>
+          </a:effectRef>
+          <a:fontRef idx="minor">
+            <a:schemeClr val="lt1"/>
+          </a:fontRef>
+        </p:style>
+        <p:txBody>
+          <a:bodyPr rtlCol="0" anchor="ctr" wrap="square"/>
+          <a:lstStyle/>
+          <a:p>
+            <a:pPr algn="ctr"/>
+          </a:p>
+        </p:txBody>
+      </p:sp>
+      <p:sp>
+        <p:nvSpPr>
+          <p:cNvPr id="16" name="Oval 15"/>
+          <p:cNvSpPr/>
+          <p:nvPr/>
+        </p:nvSpPr>
+        <p:spPr>
+          <a:xfrm>
+            <a:off x="3605707" y="2414016"/>
+            <a:ext cx="384048" cy="384048"/>
+          </a:xfrm>
+          <a:prstGeom prst="ellipse">
+            <a:avLst/>
+          </a:prstGeom>
+          <a:solidFill>
+            <a:srgbClr val="D20A2E"/>
+          </a:solidFill>
+          <a:ln>
+            <a:noFill/>
+          </a:ln>
+          <a:effectLst/>
+        </p:spPr>
+        <p:style>
+          <a:lnRef idx="1">
+            <a:schemeClr val="accent1"/>
+          </a:lnRef>
+          <a:fillRef idx="3">
+            <a:schemeClr val="accent1"/>
+          </a:fillRef>
+          <a:effectRef idx="2">
+            <a:schemeClr val="accent1"/>
+          </a:effectRef>
+          <a:fontRef idx="minor">
+            <a:schemeClr val="lt1"/>
+          </a:fontRef>
+        </p:style>
+        <p:txBody>
+          <a:bodyPr rtlCol="0" anchor="ctr" wrap="square"/>
+          <a:lstStyle/>
+          <a:p>
+            <a:pPr algn="ctr"/>
+          </a:p>
+        </p:txBody>
+      </p:sp>
+      <p:sp>
+        <p:nvSpPr>
+          <p:cNvPr id="17" name="TextBox 16"/>
+          <p:cNvSpPr txBox="1"/>
+          <p:nvPr/>
+        </p:nvSpPr>
+        <p:spPr>
+          <a:xfrm>
+            <a:off x="3605707" y="2496312"/>
+            <a:ext cx="384048" cy="237744"/>
+          </a:xfrm>
+          <a:prstGeom prst="rect">
+            <a:avLst/>
+          </a:prstGeom>
+          <a:noFill/>
+        </p:spPr>
+        <p:txBody>
+          <a:bodyPr wrap="square" anchor="t" lIns="0" rIns="0" tIns="0" bIns="0">
+            <a:spAutoFit/>
+          </a:bodyPr>
+          <a:lstStyle/>
+          <a:p>
+            <a:pPr algn="ctr">
+              <a:lnSpc>
+                <a:spcPct val="100000"/>
+              </a:lnSpc>
+            </a:pPr>
+            <a:r>
+              <a:rPr sz="1150" b="1">
+                <a:solidFill>
                   <a:srgbClr val="FFFFFF"/>
                 </a:solidFill>
                 <a:latin typeface="Arial"/>
               </a:rPr>
-              <a:t>B O T T O M   L I N E</a:t>
-            </a:r>
-          </a:p>
-        </p:txBody>
-      </p:sp>
-      <p:sp>
-        <p:nvSpPr>
-          <p:cNvPr id="12" name="TextBox 11"/>
-          <p:cNvSpPr txBox="1"/>
-          <p:nvPr/>
-        </p:nvSpPr>
-        <p:spPr>
-          <a:xfrm>
-            <a:off x="6355080" y="2761488"/>
-            <a:ext cx="4903927" cy="1737360"/>
-          </a:xfrm>
-          <a:prstGeom prst="rect">
-            <a:avLst/>
-          </a:prstGeom>
-          <a:noFill/>
-        </p:spPr>
-        <p:txBody>
-          <a:bodyPr wrap="square" anchor="t" lIns="0" rIns="0" tIns="0" bIns="0">
+              <a:t>02</a:t>
+            </a:r>
+          </a:p>
+        </p:txBody>
+      </p:sp>
+      <p:sp>
+        <p:nvSpPr>
+          <p:cNvPr id="18" name="TextBox 17"/>
+          <p:cNvSpPr txBox="1"/>
+          <p:nvPr/>
+        </p:nvSpPr>
+        <p:spPr>
+          <a:xfrm>
+            <a:off x="3605707" y="2963978"/>
+            <a:ext cx="2160955" cy="592836"/>
+          </a:xfrm>
+          <a:prstGeom prst="rect">
+            <a:avLst/>
+          </a:prstGeom>
+          <a:noFill/>
+        </p:spPr>
+        <p:txBody>
+          <a:bodyPr wrap="square" anchor="t" lIns="0" rIns="0" tIns="0" bIns="0">
+            <a:spAutoFit/>
+          </a:bodyPr>
+          <a:lstStyle/>
+          <a:p>
+            <a:pPr algn="l">
+              <a:lnSpc>
+                <a:spcPct val="100000"/>
+              </a:lnSpc>
+            </a:pPr>
+            <a:r>
+              <a:rPr sz="1500" b="1">
+                <a:solidFill>
+                  <a:srgbClr val="D20A2E"/>
+                </a:solidFill>
+                <a:latin typeface="Microsoft YaHei"/>
+              </a:rPr>
+              <a:t>completer 可改 · 900 FF‑eq</a:t>
+            </a:r>
+          </a:p>
+        </p:txBody>
+      </p:sp>
+      <p:sp>
+        <p:nvSpPr>
+          <p:cNvPr id="19" name="TextBox 18"/>
+          <p:cNvSpPr txBox="1"/>
+          <p:nvPr/>
+        </p:nvSpPr>
+        <p:spPr>
+          <a:xfrm>
+            <a:off x="3605707" y="3639110"/>
+            <a:ext cx="2160955" cy="1370479"/>
+          </a:xfrm>
+          <a:prstGeom prst="rect">
+            <a:avLst/>
+          </a:prstGeom>
+          <a:noFill/>
+        </p:spPr>
+        <p:txBody>
+          <a:bodyPr wrap="square" anchor="t" lIns="0" rIns="0" tIns="0" bIns="0">
+            <a:spAutoFit/>
+          </a:bodyPr>
+          <a:lstStyle/>
+          <a:p>
+            <a:pPr algn="l">
+              <a:lnSpc>
+                <a:spcPct val="102000"/>
+              </a:lnSpc>
+            </a:pPr>
+            <a:r>
+              <a:rPr sz="950" b="1">
+                <a:solidFill>
+                  <a:srgbClr val="20242C"/>
+                </a:solidFill>
+                <a:latin typeface="Microsoft YaHei"/>
+              </a:rPr>
+              <a:t>S16 授权保留。</a:t>
+            </a:r>
+            <a:r>
+              <a:rPr sz="950" b="0">
+                <a:solidFill>
+                  <a:srgbClr val="20242C"/>
+                </a:solidFill>
+                <a:latin typeface="Microsoft YaHei"/>
+              </a:rPr>
+              <a:t>写侧 Jain 0.92818 → 0.98466、带宽只让 0.39%、非均匀流量拿到 R* 的 99.74%。</a:t>
+            </a:r>
+          </a:p>
+          <a:p>
+            <a:pPr algn="l">
+              <a:lnSpc>
+                <a:spcPct val="102000"/>
+              </a:lnSpc>
+              <a:spcBef>
+                <a:spcPts val="600"/>
+              </a:spcBef>
+            </a:pPr>
+            <a:r>
+              <a:rPr sz="950" b="1">
+                <a:solidFill>
+                  <a:srgbClr val="20242C"/>
+                </a:solidFill>
+                <a:latin typeface="Microsoft YaHei"/>
+              </a:rPr>
+              <a:t>前提</a:t>
+            </a:r>
+            <a:r>
+              <a:rPr sz="950" b="0">
+                <a:solidFill>
+                  <a:srgbClr val="20242C"/>
+                </a:solidFill>
+                <a:latin typeface="Microsoft YaHei"/>
+              </a:rPr>
+              <a:t>：completer 的授权调度可改。线格式与协议状态机不动，但要改 HA 何时给谁发 DBIDResp，须 IP 可改并过一次合规复核。</a:t>
+            </a:r>
+          </a:p>
+        </p:txBody>
+      </p:sp>
+      <p:sp>
+        <p:nvSpPr>
+          <p:cNvPr id="20" name="Rectangle 19"/>
+          <p:cNvSpPr/>
+          <p:nvPr/>
+        </p:nvSpPr>
+        <p:spPr>
+          <a:xfrm>
+            <a:off x="6205575" y="2194560"/>
+            <a:ext cx="2599867" cy="3017520"/>
+          </a:xfrm>
+          <a:prstGeom prst="rect">
+            <a:avLst/>
+          </a:prstGeom>
+          <a:solidFill>
+            <a:srgbClr val="FFFFFF"/>
+          </a:solidFill>
+          <a:ln w="12700">
+            <a:solidFill>
+              <a:srgbClr val="DCE3EA"/>
+            </a:solidFill>
+          </a:ln>
+          <a:effectLst/>
+        </p:spPr>
+        <p:style>
+          <a:lnRef idx="1">
+            <a:schemeClr val="accent1"/>
+          </a:lnRef>
+          <a:fillRef idx="3">
+            <a:schemeClr val="accent1"/>
+          </a:fillRef>
+          <a:effectRef idx="2">
+            <a:schemeClr val="accent1"/>
+          </a:effectRef>
+          <a:fontRef idx="minor">
+            <a:schemeClr val="lt1"/>
+          </a:fontRef>
+        </p:style>
+        <p:txBody>
+          <a:bodyPr rtlCol="0" anchor="ctr" wrap="square"/>
+          <a:lstStyle/>
+          <a:p>
+            <a:pPr algn="ctr"/>
+          </a:p>
+        </p:txBody>
+      </p:sp>
+      <p:sp>
+        <p:nvSpPr>
+          <p:cNvPr id="21" name="Oval 20"/>
+          <p:cNvSpPr/>
+          <p:nvPr/>
+        </p:nvSpPr>
+        <p:spPr>
+          <a:xfrm>
+            <a:off x="6425031" y="2414016"/>
+            <a:ext cx="384048" cy="384048"/>
+          </a:xfrm>
+          <a:prstGeom prst="ellipse">
+            <a:avLst/>
+          </a:prstGeom>
+          <a:solidFill>
+            <a:srgbClr val="D20A2E"/>
+          </a:solidFill>
+          <a:ln>
+            <a:noFill/>
+          </a:ln>
+          <a:effectLst/>
+        </p:spPr>
+        <p:style>
+          <a:lnRef idx="1">
+            <a:schemeClr val="accent1"/>
+          </a:lnRef>
+          <a:fillRef idx="3">
+            <a:schemeClr val="accent1"/>
+          </a:fillRef>
+          <a:effectRef idx="2">
+            <a:schemeClr val="accent1"/>
+          </a:effectRef>
+          <a:fontRef idx="minor">
+            <a:schemeClr val="lt1"/>
+          </a:fontRef>
+        </p:style>
+        <p:txBody>
+          <a:bodyPr rtlCol="0" anchor="ctr" wrap="square"/>
+          <a:lstStyle/>
+          <a:p>
+            <a:pPr algn="ctr"/>
+          </a:p>
+        </p:txBody>
+      </p:sp>
+      <p:sp>
+        <p:nvSpPr>
+          <p:cNvPr id="22" name="TextBox 21"/>
+          <p:cNvSpPr txBox="1"/>
+          <p:nvPr/>
+        </p:nvSpPr>
+        <p:spPr>
+          <a:xfrm>
+            <a:off x="6425031" y="2496312"/>
+            <a:ext cx="384048" cy="237744"/>
+          </a:xfrm>
+          <a:prstGeom prst="rect">
+            <a:avLst/>
+          </a:prstGeom>
+          <a:noFill/>
+        </p:spPr>
+        <p:txBody>
+          <a:bodyPr wrap="square" anchor="t" lIns="0" rIns="0" tIns="0" bIns="0">
+            <a:spAutoFit/>
+          </a:bodyPr>
+          <a:lstStyle/>
+          <a:p>
+            <a:pPr algn="ctr">
+              <a:lnSpc>
+                <a:spcPct val="100000"/>
+              </a:lnSpc>
+            </a:pPr>
+            <a:r>
+              <a:rPr sz="1150" b="1">
+                <a:solidFill>
+                  <a:srgbClr val="FFFFFF"/>
+                </a:solidFill>
+                <a:latin typeface="Arial"/>
+              </a:rPr>
+              <a:t>03</a:t>
+            </a:r>
+          </a:p>
+        </p:txBody>
+      </p:sp>
+      <p:sp>
+        <p:nvSpPr>
+          <p:cNvPr id="23" name="TextBox 22"/>
+          <p:cNvSpPr txBox="1"/>
+          <p:nvPr/>
+        </p:nvSpPr>
+        <p:spPr>
+          <a:xfrm>
+            <a:off x="6425031" y="3195934"/>
+            <a:ext cx="2160955" cy="592836"/>
+          </a:xfrm>
+          <a:prstGeom prst="rect">
+            <a:avLst/>
+          </a:prstGeom>
+          <a:noFill/>
+        </p:spPr>
+        <p:txBody>
+          <a:bodyPr wrap="square" anchor="t" lIns="0" rIns="0" tIns="0" bIns="0">
+            <a:spAutoFit/>
+          </a:bodyPr>
+          <a:lstStyle/>
+          <a:p>
+            <a:pPr algn="l">
+              <a:lnSpc>
+                <a:spcPct val="100000"/>
+              </a:lnSpc>
+            </a:pPr>
+            <a:r>
+              <a:rPr sz="1500" b="1">
+                <a:solidFill>
+                  <a:srgbClr val="20242C"/>
+                </a:solidFill>
+                <a:latin typeface="Microsoft YaHei"/>
+              </a:rPr>
+              <a:t>只改环上仲裁 · 13,920 FF‑eq</a:t>
+            </a:r>
+          </a:p>
+        </p:txBody>
+      </p:sp>
+      <p:sp>
+        <p:nvSpPr>
+          <p:cNvPr id="24" name="TextBox 23"/>
+          <p:cNvSpPr txBox="1"/>
+          <p:nvPr/>
+        </p:nvSpPr>
+        <p:spPr>
+          <a:xfrm>
+            <a:off x="6425031" y="3871066"/>
+            <a:ext cx="2160955" cy="906566"/>
+          </a:xfrm>
+          <a:prstGeom prst="rect">
+            <a:avLst/>
+          </a:prstGeom>
+          <a:noFill/>
+        </p:spPr>
+        <p:txBody>
+          <a:bodyPr wrap="square" anchor="t" lIns="0" rIns="0" tIns="0" bIns="0">
+            <a:spAutoFit/>
+          </a:bodyPr>
+          <a:lstStyle/>
+          <a:p>
+            <a:pPr algn="l">
+              <a:lnSpc>
+                <a:spcPct val="102000"/>
+              </a:lnSpc>
+            </a:pPr>
+            <a:r>
+              <a:rPr sz="1150" b="1">
+                <a:solidFill>
+                  <a:srgbClr val="20242C"/>
+                </a:solidFill>
+                <a:latin typeface="Microsoft YaHei"/>
+              </a:rPr>
+              <a:t>S22</a:t>
+            </a:r>
+            <a:r>
+              <a:rPr sz="1150" b="0">
+                <a:solidFill>
+                  <a:srgbClr val="20242C"/>
+                </a:solidFill>
+                <a:latin typeface="Microsoft YaHei"/>
+              </a:rPr>
+              <a:t>：复用 6 bit 进度总线，能直接比较谁领先、谁落后；适合允许跨节点进度信息、但事务层不可改的场景。</a:t>
+            </a:r>
+          </a:p>
+        </p:txBody>
+      </p:sp>
+      <p:sp>
+        <p:nvSpPr>
+          <p:cNvPr id="25" name="Rectangle 24"/>
+          <p:cNvSpPr/>
+          <p:nvPr/>
+        </p:nvSpPr>
+        <p:spPr>
+          <a:xfrm>
+            <a:off x="9024899" y="2194560"/>
+            <a:ext cx="2599867" cy="3017520"/>
+          </a:xfrm>
+          <a:prstGeom prst="rect">
+            <a:avLst/>
+          </a:prstGeom>
+          <a:solidFill>
+            <a:srgbClr val="FFFFFF"/>
+          </a:solidFill>
+          <a:ln w="12700">
+            <a:solidFill>
+              <a:srgbClr val="DCE3EA"/>
+            </a:solidFill>
+          </a:ln>
+          <a:effectLst/>
+        </p:spPr>
+        <p:style>
+          <a:lnRef idx="1">
+            <a:schemeClr val="accent1"/>
+          </a:lnRef>
+          <a:fillRef idx="3">
+            <a:schemeClr val="accent1"/>
+          </a:fillRef>
+          <a:effectRef idx="2">
+            <a:schemeClr val="accent1"/>
+          </a:effectRef>
+          <a:fontRef idx="minor">
+            <a:schemeClr val="lt1"/>
+          </a:fontRef>
+        </p:style>
+        <p:txBody>
+          <a:bodyPr rtlCol="0" anchor="ctr" wrap="square"/>
+          <a:lstStyle/>
+          <a:p>
+            <a:pPr algn="ctr"/>
+          </a:p>
+        </p:txBody>
+      </p:sp>
+      <p:sp>
+        <p:nvSpPr>
+          <p:cNvPr id="26" name="Oval 25"/>
+          <p:cNvSpPr/>
+          <p:nvPr/>
+        </p:nvSpPr>
+        <p:spPr>
+          <a:xfrm>
+            <a:off x="9244355" y="2414016"/>
+            <a:ext cx="384048" cy="384048"/>
+          </a:xfrm>
+          <a:prstGeom prst="ellipse">
+            <a:avLst/>
+          </a:prstGeom>
+          <a:solidFill>
+            <a:srgbClr val="D20A2E"/>
+          </a:solidFill>
+          <a:ln>
+            <a:noFill/>
+          </a:ln>
+          <a:effectLst/>
+        </p:spPr>
+        <p:style>
+          <a:lnRef idx="1">
+            <a:schemeClr val="accent1"/>
+          </a:lnRef>
+          <a:fillRef idx="3">
+            <a:schemeClr val="accent1"/>
+          </a:fillRef>
+          <a:effectRef idx="2">
+            <a:schemeClr val="accent1"/>
+          </a:effectRef>
+          <a:fontRef idx="minor">
+            <a:schemeClr val="lt1"/>
+          </a:fontRef>
+        </p:style>
+        <p:txBody>
+          <a:bodyPr rtlCol="0" anchor="ctr" wrap="square"/>
+          <a:lstStyle/>
+          <a:p>
+            <a:pPr algn="ctr"/>
+          </a:p>
+        </p:txBody>
+      </p:sp>
+      <p:sp>
+        <p:nvSpPr>
+          <p:cNvPr id="27" name="TextBox 26"/>
+          <p:cNvSpPr txBox="1"/>
+          <p:nvPr/>
+        </p:nvSpPr>
+        <p:spPr>
+          <a:xfrm>
+            <a:off x="9244355" y="2496312"/>
+            <a:ext cx="384048" cy="237744"/>
+          </a:xfrm>
+          <a:prstGeom prst="rect">
+            <a:avLst/>
+          </a:prstGeom>
+          <a:noFill/>
+        </p:spPr>
+        <p:txBody>
+          <a:bodyPr wrap="square" anchor="t" lIns="0" rIns="0" tIns="0" bIns="0">
+            <a:spAutoFit/>
+          </a:bodyPr>
+          <a:lstStyle/>
+          <a:p>
+            <a:pPr algn="ctr">
+              <a:lnSpc>
+                <a:spcPct val="100000"/>
+              </a:lnSpc>
+            </a:pPr>
+            <a:r>
+              <a:rPr sz="1150" b="1">
+                <a:solidFill>
+                  <a:srgbClr val="FFFFFF"/>
+                </a:solidFill>
+                <a:latin typeface="Arial"/>
+              </a:rPr>
+              <a:t>04</a:t>
+            </a:r>
+          </a:p>
+        </p:txBody>
+      </p:sp>
+      <p:sp>
+        <p:nvSpPr>
+          <p:cNvPr id="28" name="TextBox 27"/>
+          <p:cNvSpPr txBox="1"/>
+          <p:nvPr/>
+        </p:nvSpPr>
+        <p:spPr>
+          <a:xfrm>
+            <a:off x="9244355" y="2963978"/>
+            <a:ext cx="2160955" cy="592836"/>
+          </a:xfrm>
+          <a:prstGeom prst="rect">
+            <a:avLst/>
+          </a:prstGeom>
+          <a:noFill/>
+        </p:spPr>
+        <p:txBody>
+          <a:bodyPr wrap="square" anchor="t" lIns="0" rIns="0" tIns="0" bIns="0">
+            <a:spAutoFit/>
+          </a:bodyPr>
+          <a:lstStyle/>
+          <a:p>
+            <a:pPr algn="l">
+              <a:lnSpc>
+                <a:spcPct val="100000"/>
+              </a:lnSpc>
+            </a:pPr>
+            <a:r>
+              <a:rPr sz="1500" b="1">
+                <a:solidFill>
+                  <a:srgbClr val="20242C"/>
+                </a:solidFill>
+                <a:latin typeface="Microsoft YaHei"/>
+              </a:rPr>
+              <a:t>requester 窗口可改 · 5,840 FF‑eq</a:t>
+            </a:r>
+          </a:p>
+        </p:txBody>
+      </p:sp>
+      <p:sp>
+        <p:nvSpPr>
+          <p:cNvPr id="29" name="TextBox 28"/>
+          <p:cNvSpPr txBox="1"/>
+          <p:nvPr/>
+        </p:nvSpPr>
+        <p:spPr>
+          <a:xfrm>
+            <a:off x="9244355" y="3639110"/>
+            <a:ext cx="2160955" cy="1370479"/>
+          </a:xfrm>
+          <a:prstGeom prst="rect">
+            <a:avLst/>
+          </a:prstGeom>
+          <a:noFill/>
+        </p:spPr>
+        <p:txBody>
+          <a:bodyPr wrap="square" anchor="t" lIns="0" rIns="0" tIns="0" bIns="0">
+            <a:spAutoFit/>
+          </a:bodyPr>
+          <a:lstStyle/>
+          <a:p>
+            <a:pPr algn="l">
+              <a:lnSpc>
+                <a:spcPct val="102000"/>
+              </a:lnSpc>
+            </a:pPr>
+            <a:r>
+              <a:rPr sz="950" b="1">
+                <a:solidFill>
+                  <a:srgbClr val="20242C"/>
+                </a:solidFill>
+                <a:latin typeface="Microsoft YaHei"/>
+              </a:rPr>
+              <a:t>S19 / S20</a:t>
+            </a:r>
+            <a:r>
+              <a:rPr sz="950" b="0">
+                <a:solidFill>
+                  <a:srgbClr val="20242C"/>
+                </a:solidFill>
+                <a:latin typeface="Microsoft YaHei"/>
+              </a:rPr>
+              <a:t>：都用每核动态 outstanding 窗口。已有 RTT 计时器时选 S19；已有 tracker 水位和 1 bit 标记位时选 S20。</a:t>
+            </a:r>
+          </a:p>
+          <a:p>
+            <a:pPr algn="l">
+              <a:lnSpc>
+                <a:spcPct val="102000"/>
+              </a:lnSpc>
+              <a:spcBef>
+                <a:spcPts val="600"/>
+              </a:spcBef>
+            </a:pPr>
+            <a:r>
+              <a:rPr sz="950" b="0">
+                <a:solidFill>
+                  <a:srgbClr val="20242C"/>
+                </a:solidFill>
+                <a:latin typeface="Microsoft YaHei"/>
+              </a:rPr>
+              <a:t>两者不需要流量 pattern 先验，可作为 source-side 集成路径。读侧维持 S0，不另加控制。</a:t>
+            </a:r>
+          </a:p>
+        </p:txBody>
+      </p:sp>
+      <p:sp>
+        <p:nvSpPr>
+          <p:cNvPr id="30" name="Rectangle 29"/>
+          <p:cNvSpPr/>
+          <p:nvPr/>
+        </p:nvSpPr>
+        <p:spPr>
+          <a:xfrm>
+            <a:off x="566928" y="5486400"/>
+            <a:ext cx="11057839" cy="841248"/>
+          </a:xfrm>
+          <a:prstGeom prst="rect">
+            <a:avLst/>
+          </a:prstGeom>
+          <a:solidFill>
+            <a:srgbClr val="D20A2E"/>
+          </a:solidFill>
+          <a:ln>
+            <a:noFill/>
+          </a:ln>
+          <a:effectLst/>
+        </p:spPr>
+        <p:style>
+          <a:lnRef idx="1">
+            <a:schemeClr val="accent1"/>
+          </a:lnRef>
+          <a:fillRef idx="3">
+            <a:schemeClr val="accent1"/>
+          </a:fillRef>
+          <a:effectRef idx="2">
+            <a:schemeClr val="accent1"/>
+          </a:effectRef>
+          <a:fontRef idx="minor">
+            <a:schemeClr val="lt1"/>
+          </a:fontRef>
+        </p:style>
+        <p:txBody>
+          <a:bodyPr rtlCol="0" anchor="ctr" wrap="square"/>
+          <a:lstStyle/>
+          <a:p>
+            <a:pPr algn="ctr"/>
+          </a:p>
+        </p:txBody>
+      </p:sp>
+      <p:sp>
+        <p:nvSpPr>
+          <p:cNvPr id="31" name="TextBox 30"/>
+          <p:cNvSpPr txBox="1"/>
+          <p:nvPr/>
+        </p:nvSpPr>
+        <p:spPr>
+          <a:xfrm>
+            <a:off x="877824" y="5577840"/>
+            <a:ext cx="10436047" cy="658368"/>
+          </a:xfrm>
+          <a:prstGeom prst="rect">
+            <a:avLst/>
+          </a:prstGeom>
+          <a:noFill/>
+        </p:spPr>
+        <p:txBody>
+          <a:bodyPr wrap="square" anchor="ctr" lIns="0" rIns="0" tIns="0" bIns="0">
             <a:spAutoFit/>
           </a:bodyPr>
           <a:lstStyle/>
@@ -25098,20 +25727,20 @@
               </a:lnSpc>
             </a:pPr>
             <a:r>
-              <a:rPr sz="2000" b="1">
+              <a:rPr sz="1400" b="0">
                 <a:solidFill>
                   <a:srgbClr val="FFFFFF"/>
                 </a:solidFill>
                 <a:latin typeface="Microsoft YaHei"/>
               </a:rPr>
-              <a:t>带宽线已基本关死；公平缺陷是真实的，但它不必用带宽去换。真正要拍板的不是单一排名，而是哪一层能改：completer、requester，还是只允许动环上仲裁。</a:t>
-            </a:r>
-          </a:p>
-        </p:txBody>
-      </p:sp>
-      <p:sp>
-        <p:nvSpPr>
-          <p:cNvPr id="13" name="TextBox 12"/>
+              <a:t>建议顺序：第 1 步直接做；随后先问 completer 能不能改。能改优先验证 S16；不能改，再按现有硬件基础在 S22、S19 / S20 中选。</a:t>
+            </a:r>
+          </a:p>
+        </p:txBody>
+      </p:sp>
+      <p:sp>
+        <p:nvSpPr>
+          <p:cNvPr id="32" name="TextBox 31"/>
           <p:cNvSpPr txBox="1"/>
           <p:nvPr/>
         </p:nvSpPr>
@@ -25143,7 +25772,7 @@
                 </a:solidFill>
                 <a:latin typeface="Arial"/>
               </a:rPr>
-              <a:t>31 / 34</a:t>
+              <a:t>31 / 32</a:t>
             </a:r>
           </a:p>
         </p:txBody>
@@ -25181,7 +25810,7 @@
             <a:avLst/>
           </a:prstGeom>
           <a:solidFill>
-            <a:srgbClr val="F4F7FB"/>
+            <a:srgbClr val="14171C"/>
           </a:solidFill>
           <a:ln>
             <a:noFill/>
@@ -25218,8 +25847,8 @@
         </p:nvSpPr>
         <p:spPr>
           <a:xfrm>
-            <a:off x="566928" y="301752"/>
-            <a:ext cx="137160" cy="137160"/>
+            <a:off x="10143439" y="274320"/>
+            <a:ext cx="182880" cy="182880"/>
           </a:xfrm>
           <a:prstGeom prst="rect">
             <a:avLst/>
@@ -25262,8 +25891,8 @@
         </p:nvSpPr>
         <p:spPr>
           <a:xfrm>
-            <a:off x="804672" y="265176"/>
-            <a:ext cx="9229039" cy="237744"/>
+            <a:off x="10399471" y="246888"/>
+            <a:ext cx="1225296" cy="256032"/>
           </a:xfrm>
           <a:prstGeom prst="rect">
             <a:avLst/>
@@ -25282,33 +25911,33 @@
               </a:lnSpc>
             </a:pPr>
             <a:r>
-              <a:rPr sz="1150" b="1">
-                <a:solidFill>
-                  <a:srgbClr val="667080"/>
-                </a:solidFill>
-                <a:latin typeface="Microsoft YaHei"/>
-              </a:rPr>
-              <a:t>结论</a:t>
-            </a:r>
-          </a:p>
-        </p:txBody>
-      </p:sp>
-      <p:sp>
-        <p:nvSpPr>
-          <p:cNvPr id="5" name="Rectangle 4"/>
+              <a:rPr sz="1300" b="1">
+                <a:solidFill>
+                  <a:srgbClr val="FFFFFF"/>
+                </a:solidFill>
+                <a:latin typeface="Arial"/>
+              </a:rPr>
+              <a:t>HUAWEI</a:t>
+            </a:r>
+          </a:p>
+        </p:txBody>
+      </p:sp>
+      <p:sp>
+        <p:nvSpPr>
+          <p:cNvPr id="5" name="Oval 4"/>
           <p:cNvSpPr/>
           <p:nvPr/>
         </p:nvSpPr>
         <p:spPr>
           <a:xfrm>
-            <a:off x="566928" y="640080"/>
-            <a:ext cx="11057839" cy="10058"/>
-          </a:xfrm>
-          <a:prstGeom prst="rect">
+            <a:off x="566928" y="1737360"/>
+            <a:ext cx="868680" cy="868680"/>
+          </a:xfrm>
+          <a:prstGeom prst="ellipse">
             <a:avLst/>
           </a:prstGeom>
           <a:solidFill>
-            <a:srgbClr val="DCE3EA"/>
+            <a:srgbClr val="22262D"/>
           </a:solidFill>
           <a:ln>
             <a:noFill/>
@@ -25345,8 +25974,8 @@
         </p:nvSpPr>
         <p:spPr>
           <a:xfrm>
-            <a:off x="10143439" y="274320"/>
-            <a:ext cx="182880" cy="182880"/>
+            <a:off x="877824" y="2048256"/>
+            <a:ext cx="256032" cy="256032"/>
           </a:xfrm>
           <a:prstGeom prst="rect">
             <a:avLst/>
@@ -25389,2499 +26018,6 @@
         </p:nvSpPr>
         <p:spPr>
           <a:xfrm>
-            <a:off x="10399471" y="246888"/>
-            <a:ext cx="1225296" cy="256032"/>
-          </a:xfrm>
-          <a:prstGeom prst="rect">
-            <a:avLst/>
-          </a:prstGeom>
-          <a:noFill/>
-        </p:spPr>
-        <p:txBody>
-          <a:bodyPr wrap="square" anchor="t" lIns="0" rIns="0" tIns="0" bIns="0">
-            <a:spAutoFit/>
-          </a:bodyPr>
-          <a:lstStyle/>
-          <a:p>
-            <a:pPr algn="l">
-              <a:lnSpc>
-                <a:spcPct val="100000"/>
-              </a:lnSpc>
-            </a:pPr>
-            <a:r>
-              <a:rPr sz="1300" b="1">
-                <a:solidFill>
-                  <a:srgbClr val="20242C"/>
-                </a:solidFill>
-                <a:latin typeface="Arial"/>
-              </a:rPr>
-              <a:t>HUAWEI</a:t>
-            </a:r>
-          </a:p>
-        </p:txBody>
-      </p:sp>
-      <p:sp>
-        <p:nvSpPr>
-          <p:cNvPr id="8" name="TextBox 7"/>
-          <p:cNvSpPr txBox="1"/>
-          <p:nvPr/>
-        </p:nvSpPr>
-        <p:spPr>
-          <a:xfrm>
-            <a:off x="566928" y="1060704"/>
-            <a:ext cx="11057839" cy="237744"/>
-          </a:xfrm>
-          <a:prstGeom prst="rect">
-            <a:avLst/>
-          </a:prstGeom>
-          <a:noFill/>
-        </p:spPr>
-        <p:txBody>
-          <a:bodyPr wrap="square" anchor="t" lIns="0" rIns="0" tIns="0" bIns="0">
-            <a:spAutoFit/>
-          </a:bodyPr>
-          <a:lstStyle/>
-          <a:p>
-            <a:pPr algn="l">
-              <a:lnSpc>
-                <a:spcPct val="100000"/>
-              </a:lnSpc>
-            </a:pPr>
-            <a:r>
-              <a:rPr sz="1050" b="1">
-                <a:solidFill>
-                  <a:srgbClr val="D20A2E"/>
-                </a:solidFill>
-                <a:latin typeface="Arial"/>
-              </a:rPr>
-              <a:t>C O N C L U S I O N S</a:t>
-            </a:r>
-          </a:p>
-        </p:txBody>
-      </p:sp>
-      <p:sp>
-        <p:nvSpPr>
-          <p:cNvPr id="9" name="TextBox 8"/>
-          <p:cNvSpPr txBox="1"/>
-          <p:nvPr/>
-        </p:nvSpPr>
-        <p:spPr>
-          <a:xfrm>
-            <a:off x="566928" y="1353312"/>
-            <a:ext cx="11057839" cy="658368"/>
-          </a:xfrm>
-          <a:prstGeom prst="rect">
-            <a:avLst/>
-          </a:prstGeom>
-          <a:noFill/>
-        </p:spPr>
-        <p:txBody>
-          <a:bodyPr wrap="square" anchor="t" lIns="0" rIns="0" tIns="0" bIns="0">
-            <a:spAutoFit/>
-          </a:bodyPr>
-          <a:lstStyle/>
-          <a:p>
-            <a:pPr algn="l">
-              <a:lnSpc>
-                <a:spcPct val="100000"/>
-              </a:lnSpc>
-            </a:pPr>
-            <a:r>
-              <a:rPr sz="3000" b="1">
-                <a:solidFill>
-                  <a:srgbClr val="20242C"/>
-                </a:solidFill>
-                <a:latin typeface="Microsoft YaHei"/>
-              </a:rPr>
-              <a:t>四条</a:t>
-            </a:r>
-          </a:p>
-        </p:txBody>
-      </p:sp>
-      <p:sp>
-        <p:nvSpPr>
-          <p:cNvPr id="10" name="Rectangle 9"/>
-          <p:cNvSpPr/>
-          <p:nvPr/>
-        </p:nvSpPr>
-        <p:spPr>
-          <a:xfrm>
-            <a:off x="566928" y="2231136"/>
-            <a:ext cx="2599867" cy="2999231"/>
-          </a:xfrm>
-          <a:prstGeom prst="rect">
-            <a:avLst/>
-          </a:prstGeom>
-          <a:solidFill>
-            <a:srgbClr val="FFFFFF"/>
-          </a:solidFill>
-          <a:ln w="12700">
-            <a:solidFill>
-              <a:srgbClr val="DCE3EA"/>
-            </a:solidFill>
-          </a:ln>
-          <a:effectLst/>
-        </p:spPr>
-        <p:style>
-          <a:lnRef idx="1">
-            <a:schemeClr val="accent1"/>
-          </a:lnRef>
-          <a:fillRef idx="3">
-            <a:schemeClr val="accent1"/>
-          </a:fillRef>
-          <a:effectRef idx="2">
-            <a:schemeClr val="accent1"/>
-          </a:effectRef>
-          <a:fontRef idx="minor">
-            <a:schemeClr val="lt1"/>
-          </a:fontRef>
-        </p:style>
-        <p:txBody>
-          <a:bodyPr rtlCol="0" anchor="ctr" wrap="square"/>
-          <a:lstStyle/>
-          <a:p>
-            <a:pPr algn="ctr"/>
-          </a:p>
-        </p:txBody>
-      </p:sp>
-      <p:sp>
-        <p:nvSpPr>
-          <p:cNvPr id="11" name="TextBox 10"/>
-          <p:cNvSpPr txBox="1"/>
-          <p:nvPr/>
-        </p:nvSpPr>
-        <p:spPr>
-          <a:xfrm>
-            <a:off x="768096" y="2813288"/>
-            <a:ext cx="2197531" cy="314705"/>
-          </a:xfrm>
-          <a:prstGeom prst="rect">
-            <a:avLst/>
-          </a:prstGeom>
-          <a:noFill/>
-        </p:spPr>
-        <p:txBody>
-          <a:bodyPr wrap="square" anchor="t" lIns="0" rIns="0" tIns="0" bIns="0">
-            <a:spAutoFit/>
-          </a:bodyPr>
-          <a:lstStyle/>
-          <a:p>
-            <a:pPr algn="l">
-              <a:lnSpc>
-                <a:spcPct val="100000"/>
-              </a:lnSpc>
-            </a:pPr>
-            <a:r>
-              <a:rPr sz="1500" b="1">
-                <a:solidFill>
-                  <a:srgbClr val="20242C"/>
-                </a:solidFill>
-                <a:latin typeface="Microsoft YaHei"/>
-              </a:rPr>
-              <a:t>① 带宽线已基本关死</a:t>
-            </a:r>
-          </a:p>
-        </p:txBody>
-      </p:sp>
-      <p:sp>
-        <p:nvSpPr>
-          <p:cNvPr id="12" name="TextBox 11"/>
-          <p:cNvSpPr txBox="1"/>
-          <p:nvPr/>
-        </p:nvSpPr>
-        <p:spPr>
-          <a:xfrm>
-            <a:off x="768096" y="3210290"/>
-            <a:ext cx="2197531" cy="1474500"/>
-          </a:xfrm>
-          <a:prstGeom prst="rect">
-            <a:avLst/>
-          </a:prstGeom>
-          <a:noFill/>
-        </p:spPr>
-        <p:txBody>
-          <a:bodyPr wrap="square" anchor="t" lIns="0" rIns="0" tIns="0" bIns="0">
-            <a:spAutoFit/>
-          </a:bodyPr>
-          <a:lstStyle/>
-          <a:p>
-            <a:pPr algn="l">
-              <a:lnSpc>
-                <a:spcPct val="102000"/>
-              </a:lnSpc>
-            </a:pPr>
-            <a:r>
-              <a:rPr sz="1200" b="0">
-                <a:solidFill>
-                  <a:srgbClr val="20242C"/>
-                </a:solidFill>
-                <a:latin typeface="Microsoft YaHei"/>
-              </a:rPr>
-              <a:t>S0 = 96.97% R*，最忙的链路 96.98% 满；3.03% 的缺口已逐拍闭合（5 拍绕环 + 2,181 拍空转）。</a:t>
-            </a:r>
-          </a:p>
-          <a:p>
-            <a:pPr algn="l">
-              <a:lnSpc>
-                <a:spcPct val="102000"/>
-              </a:lnSpc>
-              <a:spcBef>
-                <a:spcPts val="600"/>
-              </a:spcBef>
-            </a:pPr>
-            <a:r>
-              <a:rPr sz="1200" b="1">
-                <a:solidFill>
-                  <a:srgbClr val="D20A2E"/>
-                </a:solidFill>
-                <a:latin typeface="Microsoft YaHei"/>
-              </a:rPr>
-              <a:t>拥塞控制的带宽目标应是「不弄丢」，不是「抬上去」。</a:t>
-            </a:r>
-          </a:p>
-        </p:txBody>
-      </p:sp>
-      <p:sp>
-        <p:nvSpPr>
-          <p:cNvPr id="13" name="Rectangle 12"/>
-          <p:cNvSpPr/>
-          <p:nvPr/>
-        </p:nvSpPr>
-        <p:spPr>
-          <a:xfrm>
-            <a:off x="3386251" y="2231136"/>
-            <a:ext cx="2599867" cy="2999231"/>
-          </a:xfrm>
-          <a:prstGeom prst="rect">
-            <a:avLst/>
-          </a:prstGeom>
-          <a:solidFill>
-            <a:srgbClr val="FFFFFF"/>
-          </a:solidFill>
-          <a:ln w="12700">
-            <a:solidFill>
-              <a:srgbClr val="DCE3EA"/>
-            </a:solidFill>
-          </a:ln>
-          <a:effectLst/>
-        </p:spPr>
-        <p:style>
-          <a:lnRef idx="1">
-            <a:schemeClr val="accent1"/>
-          </a:lnRef>
-          <a:fillRef idx="3">
-            <a:schemeClr val="accent1"/>
-          </a:fillRef>
-          <a:effectRef idx="2">
-            <a:schemeClr val="accent1"/>
-          </a:effectRef>
-          <a:fontRef idx="minor">
-            <a:schemeClr val="lt1"/>
-          </a:fontRef>
-        </p:style>
-        <p:txBody>
-          <a:bodyPr rtlCol="0" anchor="ctr" wrap="square"/>
-          <a:lstStyle/>
-          <a:p>
-            <a:pPr algn="ctr"/>
-          </a:p>
-        </p:txBody>
-      </p:sp>
-      <p:sp>
-        <p:nvSpPr>
-          <p:cNvPr id="14" name="TextBox 13"/>
-          <p:cNvSpPr txBox="1"/>
-          <p:nvPr/>
-        </p:nvSpPr>
-        <p:spPr>
-          <a:xfrm>
-            <a:off x="3587419" y="2813288"/>
-            <a:ext cx="2197531" cy="314705"/>
-          </a:xfrm>
-          <a:prstGeom prst="rect">
-            <a:avLst/>
-          </a:prstGeom>
-          <a:noFill/>
-        </p:spPr>
-        <p:txBody>
-          <a:bodyPr wrap="square" anchor="t" lIns="0" rIns="0" tIns="0" bIns="0">
-            <a:spAutoFit/>
-          </a:bodyPr>
-          <a:lstStyle/>
-          <a:p>
-            <a:pPr algn="l">
-              <a:lnSpc>
-                <a:spcPct val="100000"/>
-              </a:lnSpc>
-            </a:pPr>
-            <a:r>
-              <a:rPr sz="1500" b="1">
-                <a:solidFill>
-                  <a:srgbClr val="20242C"/>
-                </a:solidFill>
-                <a:latin typeface="Microsoft YaHei"/>
-              </a:rPr>
-              <a:t>② 公平缺陷是真实的</a:t>
-            </a:r>
-          </a:p>
-        </p:txBody>
-      </p:sp>
-      <p:sp>
-        <p:nvSpPr>
-          <p:cNvPr id="15" name="TextBox 14"/>
-          <p:cNvSpPr txBox="1"/>
-          <p:nvPr/>
-        </p:nvSpPr>
-        <p:spPr>
-          <a:xfrm>
-            <a:off x="3587419" y="3210290"/>
-            <a:ext cx="2197531" cy="1474500"/>
-          </a:xfrm>
-          <a:prstGeom prst="rect">
-            <a:avLst/>
-          </a:prstGeom>
-          <a:noFill/>
-        </p:spPr>
-        <p:txBody>
-          <a:bodyPr wrap="square" anchor="t" lIns="0" rIns="0" tIns="0" bIns="0">
-            <a:spAutoFit/>
-          </a:bodyPr>
-          <a:lstStyle/>
-          <a:p>
-            <a:pPr algn="l">
-              <a:lnSpc>
-                <a:spcPct val="102000"/>
-              </a:lnSpc>
-            </a:pPr>
-            <a:r>
-              <a:rPr sz="1200" b="0">
-                <a:solidFill>
-                  <a:srgbClr val="20242C"/>
-                </a:solidFill>
-                <a:latin typeface="Microsoft YaHei"/>
-              </a:rPr>
-              <a:t>不是采样噪声：把抖动完全抹平后的 Jain 上限只有 0.96458，六快四慢是几何决定的固定分组（核间速率比 1.5673）。</a:t>
-            </a:r>
-          </a:p>
-          <a:p>
-            <a:pPr algn="l">
-              <a:lnSpc>
-                <a:spcPct val="102000"/>
-              </a:lnSpc>
-              <a:spcBef>
-                <a:spcPts val="600"/>
-              </a:spcBef>
-            </a:pPr>
-            <a:r>
-              <a:rPr sz="1200" b="1">
-                <a:solidFill>
-                  <a:srgbClr val="D20A2E"/>
-                </a:solidFill>
-                <a:latin typeface="Microsoft YaHei"/>
-              </a:rPr>
-              <a:t>要提高均衡度就必须真的搬速率，只整时机不够。</a:t>
-            </a:r>
-          </a:p>
-        </p:txBody>
-      </p:sp>
-      <p:sp>
-        <p:nvSpPr>
-          <p:cNvPr id="16" name="Rectangle 15"/>
-          <p:cNvSpPr/>
-          <p:nvPr/>
-        </p:nvSpPr>
-        <p:spPr>
-          <a:xfrm>
-            <a:off x="6205575" y="2231136"/>
-            <a:ext cx="2599867" cy="2999231"/>
-          </a:xfrm>
-          <a:prstGeom prst="rect">
-            <a:avLst/>
-          </a:prstGeom>
-          <a:solidFill>
-            <a:srgbClr val="FFFFFF"/>
-          </a:solidFill>
-          <a:ln w="12700">
-            <a:solidFill>
-              <a:srgbClr val="DCE3EA"/>
-            </a:solidFill>
-          </a:ln>
-          <a:effectLst/>
-        </p:spPr>
-        <p:style>
-          <a:lnRef idx="1">
-            <a:schemeClr val="accent1"/>
-          </a:lnRef>
-          <a:fillRef idx="3">
-            <a:schemeClr val="accent1"/>
-          </a:fillRef>
-          <a:effectRef idx="2">
-            <a:schemeClr val="accent1"/>
-          </a:effectRef>
-          <a:fontRef idx="minor">
-            <a:schemeClr val="lt1"/>
-          </a:fontRef>
-        </p:style>
-        <p:txBody>
-          <a:bodyPr rtlCol="0" anchor="ctr" wrap="square"/>
-          <a:lstStyle/>
-          <a:p>
-            <a:pPr algn="ctr"/>
-          </a:p>
-        </p:txBody>
-      </p:sp>
-      <p:sp>
-        <p:nvSpPr>
-          <p:cNvPr id="17" name="TextBox 16"/>
-          <p:cNvSpPr txBox="1"/>
-          <p:nvPr/>
-        </p:nvSpPr>
-        <p:spPr>
-          <a:xfrm>
-            <a:off x="6406743" y="2447269"/>
-            <a:ext cx="2197531" cy="592836"/>
-          </a:xfrm>
-          <a:prstGeom prst="rect">
-            <a:avLst/>
-          </a:prstGeom>
-          <a:noFill/>
-        </p:spPr>
-        <p:txBody>
-          <a:bodyPr wrap="square" anchor="t" lIns="0" rIns="0" tIns="0" bIns="0">
-            <a:spAutoFit/>
-          </a:bodyPr>
-          <a:lstStyle/>
-          <a:p>
-            <a:pPr algn="l">
-              <a:lnSpc>
-                <a:spcPct val="100000"/>
-              </a:lnSpc>
-            </a:pPr>
-            <a:r>
-              <a:rPr sz="1500" b="1">
-                <a:solidFill>
-                  <a:srgbClr val="20242C"/>
-                </a:solidFill>
-                <a:latin typeface="Microsoft YaHei"/>
-              </a:rPr>
-              <a:t>③ 严格前沿与工程备选要分开看</a:t>
-            </a:r>
-          </a:p>
-        </p:txBody>
-      </p:sp>
-      <p:sp>
-        <p:nvSpPr>
-          <p:cNvPr id="18" name="TextBox 17"/>
-          <p:cNvSpPr txBox="1"/>
-          <p:nvPr/>
-        </p:nvSpPr>
-        <p:spPr>
-          <a:xfrm>
-            <a:off x="6406743" y="3122401"/>
-            <a:ext cx="2197531" cy="1928408"/>
-          </a:xfrm>
-          <a:prstGeom prst="rect">
-            <a:avLst/>
-          </a:prstGeom>
-          <a:noFill/>
-        </p:spPr>
-        <p:txBody>
-          <a:bodyPr wrap="square" anchor="t" lIns="0" rIns="0" tIns="0" bIns="0">
-            <a:spAutoFit/>
-          </a:bodyPr>
-          <a:lstStyle/>
-          <a:p>
-            <a:pPr algn="l">
-              <a:lnSpc>
-                <a:spcPct val="102000"/>
-              </a:lnSpc>
-            </a:pPr>
-            <a:r>
-              <a:rPr sz="1200" b="0">
-                <a:solidFill>
-                  <a:srgbClr val="20242C"/>
-                </a:solidFill>
-                <a:latin typeface="Microsoft YaHei"/>
-              </a:rPr>
-              <a:t>按「带宽 × 公平性 / 硬件」计算，严格前沿是 S16。I-tag、S19 / S20、S22 虽不在严格前沿上，但分别落在环上本地仲裁、requester 动态窗口和跨节点进度仲裁三个不同改动层。</a:t>
-            </a:r>
-          </a:p>
-          <a:p>
-            <a:pPr algn="l">
-              <a:lnSpc>
-                <a:spcPct val="102000"/>
-              </a:lnSpc>
-              <a:spcBef>
-                <a:spcPts val="600"/>
-              </a:spcBef>
-            </a:pPr>
-            <a:r>
-              <a:rPr sz="1200" b="1">
-                <a:solidFill>
-                  <a:srgbClr val="D20A2E"/>
-                </a:solidFill>
-                <a:latin typeface="Microsoft YaHei"/>
-              </a:rPr>
-              <a:t>被数值支配，不等于在工程约束下没有选择价值。</a:t>
-            </a:r>
-          </a:p>
-        </p:txBody>
-      </p:sp>
-      <p:sp>
-        <p:nvSpPr>
-          <p:cNvPr id="19" name="Rectangle 18"/>
-          <p:cNvSpPr/>
-          <p:nvPr/>
-        </p:nvSpPr>
-        <p:spPr>
-          <a:xfrm>
-            <a:off x="9024899" y="2231136"/>
-            <a:ext cx="2599867" cy="2999231"/>
-          </a:xfrm>
-          <a:prstGeom prst="rect">
-            <a:avLst/>
-          </a:prstGeom>
-          <a:solidFill>
-            <a:srgbClr val="FFFFFF"/>
-          </a:solidFill>
-          <a:ln w="19050">
-            <a:solidFill>
-              <a:srgbClr val="D20A2E"/>
-            </a:solidFill>
-          </a:ln>
-          <a:effectLst/>
-        </p:spPr>
-        <p:style>
-          <a:lnRef idx="1">
-            <a:schemeClr val="accent1"/>
-          </a:lnRef>
-          <a:fillRef idx="3">
-            <a:schemeClr val="accent1"/>
-          </a:fillRef>
-          <a:effectRef idx="2">
-            <a:schemeClr val="accent1"/>
-          </a:effectRef>
-          <a:fontRef idx="minor">
-            <a:schemeClr val="lt1"/>
-          </a:fontRef>
-        </p:style>
-        <p:txBody>
-          <a:bodyPr rtlCol="0" anchor="ctr" wrap="square"/>
-          <a:lstStyle/>
-          <a:p>
-            <a:pPr algn="ctr"/>
-          </a:p>
-        </p:txBody>
-      </p:sp>
-      <p:sp>
-        <p:nvSpPr>
-          <p:cNvPr id="20" name="TextBox 19"/>
-          <p:cNvSpPr txBox="1"/>
-          <p:nvPr/>
-        </p:nvSpPr>
-        <p:spPr>
-          <a:xfrm>
-            <a:off x="9226067" y="2508462"/>
-            <a:ext cx="2197531" cy="592836"/>
-          </a:xfrm>
-          <a:prstGeom prst="rect">
-            <a:avLst/>
-          </a:prstGeom>
-          <a:noFill/>
-        </p:spPr>
-        <p:txBody>
-          <a:bodyPr wrap="square" anchor="t" lIns="0" rIns="0" tIns="0" bIns="0">
-            <a:spAutoFit/>
-          </a:bodyPr>
-          <a:lstStyle/>
-          <a:p>
-            <a:pPr algn="l">
-              <a:lnSpc>
-                <a:spcPct val="100000"/>
-              </a:lnSpc>
-            </a:pPr>
-            <a:r>
-              <a:rPr sz="1500" b="1">
-                <a:solidFill>
-                  <a:srgbClr val="D20A2E"/>
-                </a:solidFill>
-                <a:latin typeface="Microsoft YaHei"/>
-              </a:rPr>
-              <a:t>④ 两头能同时拿住，但层次决定落点</a:t>
-            </a:r>
-          </a:p>
-        </p:txBody>
-      </p:sp>
-      <p:sp>
-        <p:nvSpPr>
-          <p:cNvPr id="21" name="TextBox 20"/>
-          <p:cNvSpPr txBox="1"/>
-          <p:nvPr/>
-        </p:nvSpPr>
-        <p:spPr>
-          <a:xfrm>
-            <a:off x="9226067" y="3183594"/>
-            <a:ext cx="2197531" cy="1806023"/>
-          </a:xfrm>
-          <a:prstGeom prst="rect">
-            <a:avLst/>
-          </a:prstGeom>
-          <a:noFill/>
-        </p:spPr>
-        <p:txBody>
-          <a:bodyPr wrap="square" anchor="t" lIns="0" rIns="0" tIns="0" bIns="0">
-            <a:spAutoFit/>
-          </a:bodyPr>
-          <a:lstStyle/>
-          <a:p>
-            <a:pPr algn="l">
-              <a:lnSpc>
-                <a:spcPct val="102000"/>
-              </a:lnSpc>
-            </a:pPr>
-            <a:r>
-              <a:rPr sz="950" b="0">
-                <a:solidFill>
-                  <a:srgbClr val="20242C"/>
-                </a:solidFill>
-                <a:latin typeface="Microsoft YaHei"/>
-              </a:rPr>
-              <a:t>S16 把决策点放回 completer：Jain 0.92818 → 0.98466，max/min → 1.0001，带宽只让 0.39%，硬件 900 FF‑eq。</a:t>
-            </a:r>
-          </a:p>
-          <a:p>
-            <a:pPr algn="l">
-              <a:lnSpc>
-                <a:spcPct val="102000"/>
-              </a:lnSpc>
-              <a:spcBef>
-                <a:spcPts val="600"/>
-              </a:spcBef>
-            </a:pPr>
-            <a:r>
-              <a:rPr sz="950" b="0">
-                <a:solidFill>
-                  <a:srgbClr val="20242C"/>
-                </a:solidFill>
-                <a:latin typeface="Microsoft YaHei"/>
-              </a:rPr>
-              <a:t>它需要改 HA 的授权调度。若该层不可改，可退到环上本地 I-tag、requester 窗口 S19 / S20，或只改环上仲裁的 S22。</a:t>
-            </a:r>
-          </a:p>
-          <a:p>
-            <a:pPr algn="l">
-              <a:lnSpc>
-                <a:spcPct val="102000"/>
-              </a:lnSpc>
-              <a:spcBef>
-                <a:spcPts val="600"/>
-              </a:spcBef>
-            </a:pPr>
-            <a:r>
-              <a:rPr sz="950" b="1">
-                <a:solidFill>
-                  <a:srgbClr val="D20A2E"/>
-                </a:solidFill>
-                <a:latin typeface="Microsoft YaHei"/>
-              </a:rPr>
-              <a:t>最终选择首先由「哪一层能改」决定，其次才是数字。</a:t>
-            </a:r>
-          </a:p>
-        </p:txBody>
-      </p:sp>
-      <p:sp>
-        <p:nvSpPr>
-          <p:cNvPr id="22" name="Rectangle 21"/>
-          <p:cNvSpPr/>
-          <p:nvPr/>
-        </p:nvSpPr>
-        <p:spPr>
-          <a:xfrm>
-            <a:off x="566928" y="5468112"/>
-            <a:ext cx="11057839" cy="859536"/>
-          </a:xfrm>
-          <a:prstGeom prst="rect">
-            <a:avLst/>
-          </a:prstGeom>
-          <a:solidFill>
-            <a:srgbClr val="D20A2E"/>
-          </a:solidFill>
-          <a:ln>
-            <a:noFill/>
-          </a:ln>
-          <a:effectLst/>
-        </p:spPr>
-        <p:style>
-          <a:lnRef idx="1">
-            <a:schemeClr val="accent1"/>
-          </a:lnRef>
-          <a:fillRef idx="3">
-            <a:schemeClr val="accent1"/>
-          </a:fillRef>
-          <a:effectRef idx="2">
-            <a:schemeClr val="accent1"/>
-          </a:effectRef>
-          <a:fontRef idx="minor">
-            <a:schemeClr val="lt1"/>
-          </a:fontRef>
-        </p:style>
-        <p:txBody>
-          <a:bodyPr rtlCol="0" anchor="ctr" wrap="square"/>
-          <a:lstStyle/>
-          <a:p>
-            <a:pPr algn="ctr"/>
-          </a:p>
-        </p:txBody>
-      </p:sp>
-      <p:sp>
-        <p:nvSpPr>
-          <p:cNvPr id="23" name="TextBox 22"/>
-          <p:cNvSpPr txBox="1"/>
-          <p:nvPr/>
-        </p:nvSpPr>
-        <p:spPr>
-          <a:xfrm>
-            <a:off x="877824" y="5559552"/>
-            <a:ext cx="10436047" cy="676656"/>
-          </a:xfrm>
-          <a:prstGeom prst="rect">
-            <a:avLst/>
-          </a:prstGeom>
-          <a:noFill/>
-        </p:spPr>
-        <p:txBody>
-          <a:bodyPr wrap="square" anchor="ctr" lIns="0" rIns="0" tIns="0" bIns="0">
-            <a:spAutoFit/>
-          </a:bodyPr>
-          <a:lstStyle/>
-          <a:p>
-            <a:pPr algn="l">
-              <a:lnSpc>
-                <a:spcPct val="104000"/>
-              </a:lnSpc>
-            </a:pPr>
-            <a:r>
-              <a:rPr sz="1300" b="0">
-                <a:solidFill>
-                  <a:srgbClr val="FFFFFF"/>
-                </a:solidFill>
-                <a:latin typeface="Microsoft YaHei"/>
-              </a:rPr>
-              <a:t>统一结论：不要把所有机制压成一个排名。S16、I-tag、S19 / S20、S22 分别交换 completer、环上本地、requester、跨节点仲裁的改动权限；先确定可改边界，再在对应层内选性能最好的方案。</a:t>
-            </a:r>
-          </a:p>
-        </p:txBody>
-      </p:sp>
-      <p:sp>
-        <p:nvSpPr>
-          <p:cNvPr id="24" name="TextBox 23"/>
-          <p:cNvSpPr txBox="1"/>
-          <p:nvPr/>
-        </p:nvSpPr>
-        <p:spPr>
-          <a:xfrm>
-            <a:off x="566928" y="6455664"/>
-            <a:ext cx="1463040" cy="219456"/>
-          </a:xfrm>
-          <a:prstGeom prst="rect">
-            <a:avLst/>
-          </a:prstGeom>
-          <a:noFill/>
-        </p:spPr>
-        <p:txBody>
-          <a:bodyPr wrap="square" anchor="t" lIns="0" rIns="0" tIns="0" bIns="0">
-            <a:spAutoFit/>
-          </a:bodyPr>
-          <a:lstStyle/>
-          <a:p>
-            <a:pPr algn="l">
-              <a:lnSpc>
-                <a:spcPct val="100000"/>
-              </a:lnSpc>
-            </a:pPr>
-            <a:r>
-              <a:rPr sz="1000" b="0">
-                <a:solidFill>
-                  <a:srgbClr val="A8B0BA"/>
-                </a:solidFill>
-                <a:latin typeface="Arial"/>
-              </a:rPr>
-              <a:t>32 / 34</a:t>
-            </a:r>
-          </a:p>
-        </p:txBody>
-      </p:sp>
-    </p:spTree>
-  </p:cSld>
-  <p:clrMapOvr>
-    <a:masterClrMapping/>
-  </p:clrMapOvr>
-</p:sld>
-</file>
-
-<file path=ppt/slides/slide33.xml><?xml version="1.0" encoding="utf-8"?>
-<p:sld xmlns:a="http://schemas.openxmlformats.org/drawingml/2006/main" xmlns:p="http://schemas.openxmlformats.org/presentationml/2006/main" xmlns:r="http://schemas.openxmlformats.org/officeDocument/2006/relationships">
-  <p:cSld>
-    <p:spTree>
-      <p:nvGrpSpPr>
-        <p:cNvPr id="1" name=""/>
-        <p:cNvGrpSpPr/>
-        <p:nvPr/>
-      </p:nvGrpSpPr>
-      <p:grpSpPr/>
-      <p:sp>
-        <p:nvSpPr>
-          <p:cNvPr id="2" name="Rectangle 1"/>
-          <p:cNvSpPr/>
-          <p:nvPr/>
-        </p:nvSpPr>
-        <p:spPr>
-          <a:xfrm>
-            <a:off x="0" y="0"/>
-            <a:ext cx="12191695" cy="6858000"/>
-          </a:xfrm>
-          <a:prstGeom prst="rect">
-            <a:avLst/>
-          </a:prstGeom>
-          <a:solidFill>
-            <a:srgbClr val="F4F7FB"/>
-          </a:solidFill>
-          <a:ln>
-            <a:noFill/>
-          </a:ln>
-          <a:effectLst/>
-        </p:spPr>
-        <p:style>
-          <a:lnRef idx="1">
-            <a:schemeClr val="accent1"/>
-          </a:lnRef>
-          <a:fillRef idx="3">
-            <a:schemeClr val="accent1"/>
-          </a:fillRef>
-          <a:effectRef idx="2">
-            <a:schemeClr val="accent1"/>
-          </a:effectRef>
-          <a:fontRef idx="minor">
-            <a:schemeClr val="lt1"/>
-          </a:fontRef>
-        </p:style>
-        <p:txBody>
-          <a:bodyPr rtlCol="0" anchor="ctr" wrap="square"/>
-          <a:lstStyle/>
-          <a:p>
-            <a:pPr algn="ctr"/>
-          </a:p>
-        </p:txBody>
-      </p:sp>
-      <p:sp>
-        <p:nvSpPr>
-          <p:cNvPr id="3" name="Rectangle 2"/>
-          <p:cNvSpPr/>
-          <p:nvPr/>
-        </p:nvSpPr>
-        <p:spPr>
-          <a:xfrm>
-            <a:off x="566928" y="301752"/>
-            <a:ext cx="137160" cy="137160"/>
-          </a:xfrm>
-          <a:prstGeom prst="rect">
-            <a:avLst/>
-          </a:prstGeom>
-          <a:solidFill>
-            <a:srgbClr val="D20A2E"/>
-          </a:solidFill>
-          <a:ln>
-            <a:noFill/>
-          </a:ln>
-          <a:effectLst/>
-        </p:spPr>
-        <p:style>
-          <a:lnRef idx="1">
-            <a:schemeClr val="accent1"/>
-          </a:lnRef>
-          <a:fillRef idx="3">
-            <a:schemeClr val="accent1"/>
-          </a:fillRef>
-          <a:effectRef idx="2">
-            <a:schemeClr val="accent1"/>
-          </a:effectRef>
-          <a:fontRef idx="minor">
-            <a:schemeClr val="lt1"/>
-          </a:fontRef>
-        </p:style>
-        <p:txBody>
-          <a:bodyPr rtlCol="0" anchor="ctr" wrap="square"/>
-          <a:lstStyle/>
-          <a:p>
-            <a:pPr algn="ctr"/>
-          </a:p>
-        </p:txBody>
-      </p:sp>
-      <p:sp>
-        <p:nvSpPr>
-          <p:cNvPr id="4" name="TextBox 3"/>
-          <p:cNvSpPr txBox="1"/>
-          <p:nvPr/>
-        </p:nvSpPr>
-        <p:spPr>
-          <a:xfrm>
-            <a:off x="804672" y="265176"/>
-            <a:ext cx="9229039" cy="237744"/>
-          </a:xfrm>
-          <a:prstGeom prst="rect">
-            <a:avLst/>
-          </a:prstGeom>
-          <a:noFill/>
-        </p:spPr>
-        <p:txBody>
-          <a:bodyPr wrap="square" anchor="t" lIns="0" rIns="0" tIns="0" bIns="0">
-            <a:spAutoFit/>
-          </a:bodyPr>
-          <a:lstStyle/>
-          <a:p>
-            <a:pPr algn="l">
-              <a:lnSpc>
-                <a:spcPct val="100000"/>
-              </a:lnSpc>
-            </a:pPr>
-            <a:r>
-              <a:rPr sz="1150" b="1">
-                <a:solidFill>
-                  <a:srgbClr val="667080"/>
-                </a:solidFill>
-                <a:latin typeface="Microsoft YaHei"/>
-              </a:rPr>
-              <a:t>建议</a:t>
-            </a:r>
-          </a:p>
-        </p:txBody>
-      </p:sp>
-      <p:sp>
-        <p:nvSpPr>
-          <p:cNvPr id="5" name="Rectangle 4"/>
-          <p:cNvSpPr/>
-          <p:nvPr/>
-        </p:nvSpPr>
-        <p:spPr>
-          <a:xfrm>
-            <a:off x="566928" y="640080"/>
-            <a:ext cx="11057839" cy="10058"/>
-          </a:xfrm>
-          <a:prstGeom prst="rect">
-            <a:avLst/>
-          </a:prstGeom>
-          <a:solidFill>
-            <a:srgbClr val="DCE3EA"/>
-          </a:solidFill>
-          <a:ln>
-            <a:noFill/>
-          </a:ln>
-          <a:effectLst/>
-        </p:spPr>
-        <p:style>
-          <a:lnRef idx="1">
-            <a:schemeClr val="accent1"/>
-          </a:lnRef>
-          <a:fillRef idx="3">
-            <a:schemeClr val="accent1"/>
-          </a:fillRef>
-          <a:effectRef idx="2">
-            <a:schemeClr val="accent1"/>
-          </a:effectRef>
-          <a:fontRef idx="minor">
-            <a:schemeClr val="lt1"/>
-          </a:fontRef>
-        </p:style>
-        <p:txBody>
-          <a:bodyPr rtlCol="0" anchor="ctr" wrap="square"/>
-          <a:lstStyle/>
-          <a:p>
-            <a:pPr algn="ctr"/>
-          </a:p>
-        </p:txBody>
-      </p:sp>
-      <p:sp>
-        <p:nvSpPr>
-          <p:cNvPr id="6" name="Rectangle 5"/>
-          <p:cNvSpPr/>
-          <p:nvPr/>
-        </p:nvSpPr>
-        <p:spPr>
-          <a:xfrm>
-            <a:off x="10143439" y="274320"/>
-            <a:ext cx="182880" cy="182880"/>
-          </a:xfrm>
-          <a:prstGeom prst="rect">
-            <a:avLst/>
-          </a:prstGeom>
-          <a:solidFill>
-            <a:srgbClr val="D20A2E"/>
-          </a:solidFill>
-          <a:ln>
-            <a:noFill/>
-          </a:ln>
-          <a:effectLst/>
-        </p:spPr>
-        <p:style>
-          <a:lnRef idx="1">
-            <a:schemeClr val="accent1"/>
-          </a:lnRef>
-          <a:fillRef idx="3">
-            <a:schemeClr val="accent1"/>
-          </a:fillRef>
-          <a:effectRef idx="2">
-            <a:schemeClr val="accent1"/>
-          </a:effectRef>
-          <a:fontRef idx="minor">
-            <a:schemeClr val="lt1"/>
-          </a:fontRef>
-        </p:style>
-        <p:txBody>
-          <a:bodyPr rtlCol="0" anchor="ctr" wrap="square"/>
-          <a:lstStyle/>
-          <a:p>
-            <a:pPr algn="ctr"/>
-          </a:p>
-        </p:txBody>
-      </p:sp>
-      <p:sp>
-        <p:nvSpPr>
-          <p:cNvPr id="7" name="TextBox 6"/>
-          <p:cNvSpPr txBox="1"/>
-          <p:nvPr/>
-        </p:nvSpPr>
-        <p:spPr>
-          <a:xfrm>
-            <a:off x="10399471" y="246888"/>
-            <a:ext cx="1225296" cy="256032"/>
-          </a:xfrm>
-          <a:prstGeom prst="rect">
-            <a:avLst/>
-          </a:prstGeom>
-          <a:noFill/>
-        </p:spPr>
-        <p:txBody>
-          <a:bodyPr wrap="square" anchor="t" lIns="0" rIns="0" tIns="0" bIns="0">
-            <a:spAutoFit/>
-          </a:bodyPr>
-          <a:lstStyle/>
-          <a:p>
-            <a:pPr algn="l">
-              <a:lnSpc>
-                <a:spcPct val="100000"/>
-              </a:lnSpc>
-            </a:pPr>
-            <a:r>
-              <a:rPr sz="1300" b="1">
-                <a:solidFill>
-                  <a:srgbClr val="20242C"/>
-                </a:solidFill>
-                <a:latin typeface="Arial"/>
-              </a:rPr>
-              <a:t>HUAWEI</a:t>
-            </a:r>
-          </a:p>
-        </p:txBody>
-      </p:sp>
-      <p:sp>
-        <p:nvSpPr>
-          <p:cNvPr id="8" name="TextBox 7"/>
-          <p:cNvSpPr txBox="1"/>
-          <p:nvPr/>
-        </p:nvSpPr>
-        <p:spPr>
-          <a:xfrm>
-            <a:off x="566928" y="1060704"/>
-            <a:ext cx="11057839" cy="237744"/>
-          </a:xfrm>
-          <a:prstGeom prst="rect">
-            <a:avLst/>
-          </a:prstGeom>
-          <a:noFill/>
-        </p:spPr>
-        <p:txBody>
-          <a:bodyPr wrap="square" anchor="t" lIns="0" rIns="0" tIns="0" bIns="0">
-            <a:spAutoFit/>
-          </a:bodyPr>
-          <a:lstStyle/>
-          <a:p>
-            <a:pPr algn="l">
-              <a:lnSpc>
-                <a:spcPct val="100000"/>
-              </a:lnSpc>
-            </a:pPr>
-            <a:r>
-              <a:rPr sz="1050" b="1">
-                <a:solidFill>
-                  <a:srgbClr val="D20A2E"/>
-                </a:solidFill>
-                <a:latin typeface="Arial"/>
-              </a:rPr>
-              <a:t>R E C O M M E N D A T I O N</a:t>
-            </a:r>
-          </a:p>
-        </p:txBody>
-      </p:sp>
-      <p:sp>
-        <p:nvSpPr>
-          <p:cNvPr id="9" name="TextBox 8"/>
-          <p:cNvSpPr txBox="1"/>
-          <p:nvPr/>
-        </p:nvSpPr>
-        <p:spPr>
-          <a:xfrm>
-            <a:off x="566928" y="1353312"/>
-            <a:ext cx="11057839" cy="658368"/>
-          </a:xfrm>
-          <a:prstGeom prst="rect">
-            <a:avLst/>
-          </a:prstGeom>
-          <a:noFill/>
-        </p:spPr>
-        <p:txBody>
-          <a:bodyPr wrap="square" anchor="t" lIns="0" rIns="0" tIns="0" bIns="0">
-            <a:spAutoFit/>
-          </a:bodyPr>
-          <a:lstStyle/>
-          <a:p>
-            <a:pPr algn="l">
-              <a:lnSpc>
-                <a:spcPct val="100000"/>
-              </a:lnSpc>
-            </a:pPr>
-            <a:r>
-              <a:rPr sz="3000" b="1">
-                <a:solidFill>
-                  <a:srgbClr val="20242C"/>
-                </a:solidFill>
-                <a:latin typeface="Microsoft YaHei"/>
-              </a:rPr>
-              <a:t>先收在飞，再按可改层次选择</a:t>
-            </a:r>
-          </a:p>
-        </p:txBody>
-      </p:sp>
-      <p:sp>
-        <p:nvSpPr>
-          <p:cNvPr id="10" name="Rectangle 9"/>
-          <p:cNvSpPr/>
-          <p:nvPr/>
-        </p:nvSpPr>
-        <p:spPr>
-          <a:xfrm>
-            <a:off x="566928" y="2194560"/>
-            <a:ext cx="2599867" cy="3017520"/>
-          </a:xfrm>
-          <a:prstGeom prst="rect">
-            <a:avLst/>
-          </a:prstGeom>
-          <a:solidFill>
-            <a:srgbClr val="FFFFFF"/>
-          </a:solidFill>
-          <a:ln w="12700">
-            <a:solidFill>
-              <a:srgbClr val="DCE3EA"/>
-            </a:solidFill>
-          </a:ln>
-          <a:effectLst/>
-        </p:spPr>
-        <p:style>
-          <a:lnRef idx="1">
-            <a:schemeClr val="accent1"/>
-          </a:lnRef>
-          <a:fillRef idx="3">
-            <a:schemeClr val="accent1"/>
-          </a:fillRef>
-          <a:effectRef idx="2">
-            <a:schemeClr val="accent1"/>
-          </a:effectRef>
-          <a:fontRef idx="minor">
-            <a:schemeClr val="lt1"/>
-          </a:fontRef>
-        </p:style>
-        <p:txBody>
-          <a:bodyPr rtlCol="0" anchor="ctr" wrap="square"/>
-          <a:lstStyle/>
-          <a:p>
-            <a:pPr algn="ctr"/>
-          </a:p>
-        </p:txBody>
-      </p:sp>
-      <p:sp>
-        <p:nvSpPr>
-          <p:cNvPr id="11" name="Oval 10"/>
-          <p:cNvSpPr/>
-          <p:nvPr/>
-        </p:nvSpPr>
-        <p:spPr>
-          <a:xfrm>
-            <a:off x="786384" y="2414016"/>
-            <a:ext cx="384048" cy="384048"/>
-          </a:xfrm>
-          <a:prstGeom prst="ellipse">
-            <a:avLst/>
-          </a:prstGeom>
-          <a:solidFill>
-            <a:srgbClr val="D20A2E"/>
-          </a:solidFill>
-          <a:ln>
-            <a:noFill/>
-          </a:ln>
-          <a:effectLst/>
-        </p:spPr>
-        <p:style>
-          <a:lnRef idx="1">
-            <a:schemeClr val="accent1"/>
-          </a:lnRef>
-          <a:fillRef idx="3">
-            <a:schemeClr val="accent1"/>
-          </a:fillRef>
-          <a:effectRef idx="2">
-            <a:schemeClr val="accent1"/>
-          </a:effectRef>
-          <a:fontRef idx="minor">
-            <a:schemeClr val="lt1"/>
-          </a:fontRef>
-        </p:style>
-        <p:txBody>
-          <a:bodyPr rtlCol="0" anchor="ctr" wrap="square"/>
-          <a:lstStyle/>
-          <a:p>
-            <a:pPr algn="ctr"/>
-          </a:p>
-        </p:txBody>
-      </p:sp>
-      <p:sp>
-        <p:nvSpPr>
-          <p:cNvPr id="12" name="TextBox 11"/>
-          <p:cNvSpPr txBox="1"/>
-          <p:nvPr/>
-        </p:nvSpPr>
-        <p:spPr>
-          <a:xfrm>
-            <a:off x="786384" y="2496312"/>
-            <a:ext cx="384048" cy="237744"/>
-          </a:xfrm>
-          <a:prstGeom prst="rect">
-            <a:avLst/>
-          </a:prstGeom>
-          <a:noFill/>
-        </p:spPr>
-        <p:txBody>
-          <a:bodyPr wrap="square" anchor="t" lIns="0" rIns="0" tIns="0" bIns="0">
-            <a:spAutoFit/>
-          </a:bodyPr>
-          <a:lstStyle/>
-          <a:p>
-            <a:pPr algn="ctr">
-              <a:lnSpc>
-                <a:spcPct val="100000"/>
-              </a:lnSpc>
-            </a:pPr>
-            <a:r>
-              <a:rPr sz="1150" b="1">
-                <a:solidFill>
-                  <a:srgbClr val="FFFFFF"/>
-                </a:solidFill>
-                <a:latin typeface="Arial"/>
-              </a:rPr>
-              <a:t>01</a:t>
-            </a:r>
-          </a:p>
-        </p:txBody>
-      </p:sp>
-      <p:sp>
-        <p:nvSpPr>
-          <p:cNvPr id="13" name="TextBox 12"/>
-          <p:cNvSpPr txBox="1"/>
-          <p:nvPr/>
-        </p:nvSpPr>
-        <p:spPr>
-          <a:xfrm>
-            <a:off x="786384" y="2968706"/>
-            <a:ext cx="2160955" cy="592836"/>
-          </a:xfrm>
-          <a:prstGeom prst="rect">
-            <a:avLst/>
-          </a:prstGeom>
-          <a:noFill/>
-        </p:spPr>
-        <p:txBody>
-          <a:bodyPr wrap="square" anchor="t" lIns="0" rIns="0" tIns="0" bIns="0">
-            <a:spAutoFit/>
-          </a:bodyPr>
-          <a:lstStyle/>
-          <a:p>
-            <a:pPr algn="l">
-              <a:lnSpc>
-                <a:spcPct val="100000"/>
-              </a:lnSpc>
-            </a:pPr>
-            <a:r>
-              <a:rPr sz="1500" b="1">
-                <a:solidFill>
-                  <a:srgbClr val="20242C"/>
-                </a:solidFill>
-                <a:latin typeface="Microsoft YaHei"/>
-              </a:rPr>
-              <a:t>第一步 · 0 FF‑eq · 无条件</a:t>
-            </a:r>
-          </a:p>
-        </p:txBody>
-      </p:sp>
-      <p:sp>
-        <p:nvSpPr>
-          <p:cNvPr id="14" name="TextBox 13"/>
-          <p:cNvSpPr txBox="1"/>
-          <p:nvPr/>
-        </p:nvSpPr>
-        <p:spPr>
-          <a:xfrm>
-            <a:off x="786384" y="3643838"/>
-            <a:ext cx="2160955" cy="1361023"/>
-          </a:xfrm>
-          <a:prstGeom prst="rect">
-            <a:avLst/>
-          </a:prstGeom>
-          <a:noFill/>
-        </p:spPr>
-        <p:txBody>
-          <a:bodyPr wrap="square" anchor="t" lIns="0" rIns="0" tIns="0" bIns="0">
-            <a:spAutoFit/>
-          </a:bodyPr>
-          <a:lstStyle/>
-          <a:p>
-            <a:pPr algn="l">
-              <a:lnSpc>
-                <a:spcPct val="102000"/>
-              </a:lnSpc>
-            </a:pPr>
-            <a:r>
-              <a:rPr sz="1100" b="1">
-                <a:solidFill>
-                  <a:srgbClr val="20242C"/>
-                </a:solidFill>
-                <a:latin typeface="Microsoft YaHei"/>
-              </a:rPr>
-              <a:t>每核在飞上限收到 32。</a:t>
-            </a:r>
-            <a:r>
-              <a:rPr sz="1100" b="0">
-                <a:solidFill>
-                  <a:srgbClr val="20242C"/>
-                </a:solidFill>
-                <a:latin typeface="Microsoft YaHei"/>
-              </a:rPr>
-              <a:t>零硬件、无流量先验：覆盖最坏 89 拍 RTT 只需约 26 笔，再多就只是在已经饱和的环上排队。</a:t>
-            </a:r>
-          </a:p>
-          <a:p>
-            <a:pPr algn="l">
-              <a:lnSpc>
-                <a:spcPct val="102000"/>
-              </a:lnSpc>
-              <a:spcBef>
-                <a:spcPts val="600"/>
-              </a:spcBef>
-            </a:pPr>
-            <a:r>
-              <a:rPr sz="1100" b="1">
-                <a:solidFill>
-                  <a:srgbClr val="D20A2E"/>
-                </a:solidFill>
-                <a:latin typeface="Microsoft YaHei"/>
-              </a:rPr>
-              <a:t>uniform 绕环重发从上千拍降到 5 拍；非均匀流量带宽 +33%。</a:t>
-            </a:r>
-          </a:p>
-        </p:txBody>
-      </p:sp>
-      <p:sp>
-        <p:nvSpPr>
-          <p:cNvPr id="15" name="Rectangle 14"/>
-          <p:cNvSpPr/>
-          <p:nvPr/>
-        </p:nvSpPr>
-        <p:spPr>
-          <a:xfrm>
-            <a:off x="3386251" y="2194560"/>
-            <a:ext cx="2599867" cy="3017520"/>
-          </a:xfrm>
-          <a:prstGeom prst="rect">
-            <a:avLst/>
-          </a:prstGeom>
-          <a:solidFill>
-            <a:srgbClr val="FFFFFF"/>
-          </a:solidFill>
-          <a:ln w="19050">
-            <a:solidFill>
-              <a:srgbClr val="D20A2E"/>
-            </a:solidFill>
-          </a:ln>
-          <a:effectLst/>
-        </p:spPr>
-        <p:style>
-          <a:lnRef idx="1">
-            <a:schemeClr val="accent1"/>
-          </a:lnRef>
-          <a:fillRef idx="3">
-            <a:schemeClr val="accent1"/>
-          </a:fillRef>
-          <a:effectRef idx="2">
-            <a:schemeClr val="accent1"/>
-          </a:effectRef>
-          <a:fontRef idx="minor">
-            <a:schemeClr val="lt1"/>
-          </a:fontRef>
-        </p:style>
-        <p:txBody>
-          <a:bodyPr rtlCol="0" anchor="ctr" wrap="square"/>
-          <a:lstStyle/>
-          <a:p>
-            <a:pPr algn="ctr"/>
-          </a:p>
-        </p:txBody>
-      </p:sp>
-      <p:sp>
-        <p:nvSpPr>
-          <p:cNvPr id="16" name="Oval 15"/>
-          <p:cNvSpPr/>
-          <p:nvPr/>
-        </p:nvSpPr>
-        <p:spPr>
-          <a:xfrm>
-            <a:off x="3605707" y="2414016"/>
-            <a:ext cx="384048" cy="384048"/>
-          </a:xfrm>
-          <a:prstGeom prst="ellipse">
-            <a:avLst/>
-          </a:prstGeom>
-          <a:solidFill>
-            <a:srgbClr val="D20A2E"/>
-          </a:solidFill>
-          <a:ln>
-            <a:noFill/>
-          </a:ln>
-          <a:effectLst/>
-        </p:spPr>
-        <p:style>
-          <a:lnRef idx="1">
-            <a:schemeClr val="accent1"/>
-          </a:lnRef>
-          <a:fillRef idx="3">
-            <a:schemeClr val="accent1"/>
-          </a:fillRef>
-          <a:effectRef idx="2">
-            <a:schemeClr val="accent1"/>
-          </a:effectRef>
-          <a:fontRef idx="minor">
-            <a:schemeClr val="lt1"/>
-          </a:fontRef>
-        </p:style>
-        <p:txBody>
-          <a:bodyPr rtlCol="0" anchor="ctr" wrap="square"/>
-          <a:lstStyle/>
-          <a:p>
-            <a:pPr algn="ctr"/>
-          </a:p>
-        </p:txBody>
-      </p:sp>
-      <p:sp>
-        <p:nvSpPr>
-          <p:cNvPr id="17" name="TextBox 16"/>
-          <p:cNvSpPr txBox="1"/>
-          <p:nvPr/>
-        </p:nvSpPr>
-        <p:spPr>
-          <a:xfrm>
-            <a:off x="3605707" y="2496312"/>
-            <a:ext cx="384048" cy="237744"/>
-          </a:xfrm>
-          <a:prstGeom prst="rect">
-            <a:avLst/>
-          </a:prstGeom>
-          <a:noFill/>
-        </p:spPr>
-        <p:txBody>
-          <a:bodyPr wrap="square" anchor="t" lIns="0" rIns="0" tIns="0" bIns="0">
-            <a:spAutoFit/>
-          </a:bodyPr>
-          <a:lstStyle/>
-          <a:p>
-            <a:pPr algn="ctr">
-              <a:lnSpc>
-                <a:spcPct val="100000"/>
-              </a:lnSpc>
-            </a:pPr>
-            <a:r>
-              <a:rPr sz="1150" b="1">
-                <a:solidFill>
-                  <a:srgbClr val="FFFFFF"/>
-                </a:solidFill>
-                <a:latin typeface="Arial"/>
-              </a:rPr>
-              <a:t>02</a:t>
-            </a:r>
-          </a:p>
-        </p:txBody>
-      </p:sp>
-      <p:sp>
-        <p:nvSpPr>
-          <p:cNvPr id="18" name="TextBox 17"/>
-          <p:cNvSpPr txBox="1"/>
-          <p:nvPr/>
-        </p:nvSpPr>
-        <p:spPr>
-          <a:xfrm>
-            <a:off x="3605707" y="2963978"/>
-            <a:ext cx="2160955" cy="592836"/>
-          </a:xfrm>
-          <a:prstGeom prst="rect">
-            <a:avLst/>
-          </a:prstGeom>
-          <a:noFill/>
-        </p:spPr>
-        <p:txBody>
-          <a:bodyPr wrap="square" anchor="t" lIns="0" rIns="0" tIns="0" bIns="0">
-            <a:spAutoFit/>
-          </a:bodyPr>
-          <a:lstStyle/>
-          <a:p>
-            <a:pPr algn="l">
-              <a:lnSpc>
-                <a:spcPct val="100000"/>
-              </a:lnSpc>
-            </a:pPr>
-            <a:r>
-              <a:rPr sz="1500" b="1">
-                <a:solidFill>
-                  <a:srgbClr val="D20A2E"/>
-                </a:solidFill>
-                <a:latin typeface="Microsoft YaHei"/>
-              </a:rPr>
-              <a:t>completer 可改 · 900 FF‑eq</a:t>
-            </a:r>
-          </a:p>
-        </p:txBody>
-      </p:sp>
-      <p:sp>
-        <p:nvSpPr>
-          <p:cNvPr id="19" name="TextBox 18"/>
-          <p:cNvSpPr txBox="1"/>
-          <p:nvPr/>
-        </p:nvSpPr>
-        <p:spPr>
-          <a:xfrm>
-            <a:off x="3605707" y="3639110"/>
-            <a:ext cx="2160955" cy="1370479"/>
-          </a:xfrm>
-          <a:prstGeom prst="rect">
-            <a:avLst/>
-          </a:prstGeom>
-          <a:noFill/>
-        </p:spPr>
-        <p:txBody>
-          <a:bodyPr wrap="square" anchor="t" lIns="0" rIns="0" tIns="0" bIns="0">
-            <a:spAutoFit/>
-          </a:bodyPr>
-          <a:lstStyle/>
-          <a:p>
-            <a:pPr algn="l">
-              <a:lnSpc>
-                <a:spcPct val="102000"/>
-              </a:lnSpc>
-            </a:pPr>
-            <a:r>
-              <a:rPr sz="950" b="1">
-                <a:solidFill>
-                  <a:srgbClr val="20242C"/>
-                </a:solidFill>
-                <a:latin typeface="Microsoft YaHei"/>
-              </a:rPr>
-              <a:t>S16 授权保留。</a:t>
-            </a:r>
-            <a:r>
-              <a:rPr sz="950" b="0">
-                <a:solidFill>
-                  <a:srgbClr val="20242C"/>
-                </a:solidFill>
-                <a:latin typeface="Microsoft YaHei"/>
-              </a:rPr>
-              <a:t>写侧 Jain 0.92818 → 0.98466、带宽只让 0.39%、非均匀流量拿到 R* 的 99.74%。</a:t>
-            </a:r>
-          </a:p>
-          <a:p>
-            <a:pPr algn="l">
-              <a:lnSpc>
-                <a:spcPct val="102000"/>
-              </a:lnSpc>
-              <a:spcBef>
-                <a:spcPts val="600"/>
-              </a:spcBef>
-            </a:pPr>
-            <a:r>
-              <a:rPr sz="950" b="1">
-                <a:solidFill>
-                  <a:srgbClr val="20242C"/>
-                </a:solidFill>
-                <a:latin typeface="Microsoft YaHei"/>
-              </a:rPr>
-              <a:t>前提</a:t>
-            </a:r>
-            <a:r>
-              <a:rPr sz="950" b="0">
-                <a:solidFill>
-                  <a:srgbClr val="20242C"/>
-                </a:solidFill>
-                <a:latin typeface="Microsoft YaHei"/>
-              </a:rPr>
-              <a:t>：completer 的授权调度可改。线格式与协议状态机不动，但要改 HA 何时给谁发 DBIDResp，须 IP 可改并过一次合规复核。</a:t>
-            </a:r>
-          </a:p>
-        </p:txBody>
-      </p:sp>
-      <p:sp>
-        <p:nvSpPr>
-          <p:cNvPr id="20" name="Rectangle 19"/>
-          <p:cNvSpPr/>
-          <p:nvPr/>
-        </p:nvSpPr>
-        <p:spPr>
-          <a:xfrm>
-            <a:off x="6205575" y="2194560"/>
-            <a:ext cx="2599867" cy="3017520"/>
-          </a:xfrm>
-          <a:prstGeom prst="rect">
-            <a:avLst/>
-          </a:prstGeom>
-          <a:solidFill>
-            <a:srgbClr val="FFFFFF"/>
-          </a:solidFill>
-          <a:ln w="12700">
-            <a:solidFill>
-              <a:srgbClr val="DCE3EA"/>
-            </a:solidFill>
-          </a:ln>
-          <a:effectLst/>
-        </p:spPr>
-        <p:style>
-          <a:lnRef idx="1">
-            <a:schemeClr val="accent1"/>
-          </a:lnRef>
-          <a:fillRef idx="3">
-            <a:schemeClr val="accent1"/>
-          </a:fillRef>
-          <a:effectRef idx="2">
-            <a:schemeClr val="accent1"/>
-          </a:effectRef>
-          <a:fontRef idx="minor">
-            <a:schemeClr val="lt1"/>
-          </a:fontRef>
-        </p:style>
-        <p:txBody>
-          <a:bodyPr rtlCol="0" anchor="ctr" wrap="square"/>
-          <a:lstStyle/>
-          <a:p>
-            <a:pPr algn="ctr"/>
-          </a:p>
-        </p:txBody>
-      </p:sp>
-      <p:sp>
-        <p:nvSpPr>
-          <p:cNvPr id="21" name="Oval 20"/>
-          <p:cNvSpPr/>
-          <p:nvPr/>
-        </p:nvSpPr>
-        <p:spPr>
-          <a:xfrm>
-            <a:off x="6425031" y="2414016"/>
-            <a:ext cx="384048" cy="384048"/>
-          </a:xfrm>
-          <a:prstGeom prst="ellipse">
-            <a:avLst/>
-          </a:prstGeom>
-          <a:solidFill>
-            <a:srgbClr val="D20A2E"/>
-          </a:solidFill>
-          <a:ln>
-            <a:noFill/>
-          </a:ln>
-          <a:effectLst/>
-        </p:spPr>
-        <p:style>
-          <a:lnRef idx="1">
-            <a:schemeClr val="accent1"/>
-          </a:lnRef>
-          <a:fillRef idx="3">
-            <a:schemeClr val="accent1"/>
-          </a:fillRef>
-          <a:effectRef idx="2">
-            <a:schemeClr val="accent1"/>
-          </a:effectRef>
-          <a:fontRef idx="minor">
-            <a:schemeClr val="lt1"/>
-          </a:fontRef>
-        </p:style>
-        <p:txBody>
-          <a:bodyPr rtlCol="0" anchor="ctr" wrap="square"/>
-          <a:lstStyle/>
-          <a:p>
-            <a:pPr algn="ctr"/>
-          </a:p>
-        </p:txBody>
-      </p:sp>
-      <p:sp>
-        <p:nvSpPr>
-          <p:cNvPr id="22" name="TextBox 21"/>
-          <p:cNvSpPr txBox="1"/>
-          <p:nvPr/>
-        </p:nvSpPr>
-        <p:spPr>
-          <a:xfrm>
-            <a:off x="6425031" y="2496312"/>
-            <a:ext cx="384048" cy="237744"/>
-          </a:xfrm>
-          <a:prstGeom prst="rect">
-            <a:avLst/>
-          </a:prstGeom>
-          <a:noFill/>
-        </p:spPr>
-        <p:txBody>
-          <a:bodyPr wrap="square" anchor="t" lIns="0" rIns="0" tIns="0" bIns="0">
-            <a:spAutoFit/>
-          </a:bodyPr>
-          <a:lstStyle/>
-          <a:p>
-            <a:pPr algn="ctr">
-              <a:lnSpc>
-                <a:spcPct val="100000"/>
-              </a:lnSpc>
-            </a:pPr>
-            <a:r>
-              <a:rPr sz="1150" b="1">
-                <a:solidFill>
-                  <a:srgbClr val="FFFFFF"/>
-                </a:solidFill>
-                <a:latin typeface="Arial"/>
-              </a:rPr>
-              <a:t>03</a:t>
-            </a:r>
-          </a:p>
-        </p:txBody>
-      </p:sp>
-      <p:sp>
-        <p:nvSpPr>
-          <p:cNvPr id="23" name="TextBox 22"/>
-          <p:cNvSpPr txBox="1"/>
-          <p:nvPr/>
-        </p:nvSpPr>
-        <p:spPr>
-          <a:xfrm>
-            <a:off x="6425031" y="3025444"/>
-            <a:ext cx="2160955" cy="592836"/>
-          </a:xfrm>
-          <a:prstGeom prst="rect">
-            <a:avLst/>
-          </a:prstGeom>
-          <a:noFill/>
-        </p:spPr>
-        <p:txBody>
-          <a:bodyPr wrap="square" anchor="t" lIns="0" rIns="0" tIns="0" bIns="0">
-            <a:spAutoFit/>
-          </a:bodyPr>
-          <a:lstStyle/>
-          <a:p>
-            <a:pPr algn="l">
-              <a:lnSpc>
-                <a:spcPct val="100000"/>
-              </a:lnSpc>
-            </a:pPr>
-            <a:r>
-              <a:rPr sz="1500" b="1">
-                <a:solidFill>
-                  <a:srgbClr val="20242C"/>
-                </a:solidFill>
-                <a:latin typeface="Microsoft YaHei"/>
-              </a:rPr>
-              <a:t>只改环上仲裁 · 3,120 / 13,920 FF‑eq</a:t>
-            </a:r>
-          </a:p>
-        </p:txBody>
-      </p:sp>
-      <p:sp>
-        <p:nvSpPr>
-          <p:cNvPr id="24" name="TextBox 23"/>
-          <p:cNvSpPr txBox="1"/>
-          <p:nvPr/>
-        </p:nvSpPr>
-        <p:spPr>
-          <a:xfrm>
-            <a:off x="6425031" y="3700576"/>
-            <a:ext cx="2160955" cy="1247546"/>
-          </a:xfrm>
-          <a:prstGeom prst="rect">
-            <a:avLst/>
-          </a:prstGeom>
-          <a:noFill/>
-        </p:spPr>
-        <p:txBody>
-          <a:bodyPr wrap="square" anchor="t" lIns="0" rIns="0" tIns="0" bIns="0">
-            <a:spAutoFit/>
-          </a:bodyPr>
-          <a:lstStyle/>
-          <a:p>
-            <a:pPr algn="l">
-              <a:lnSpc>
-                <a:spcPct val="102000"/>
-              </a:lnSpc>
-            </a:pPr>
-            <a:r>
-              <a:rPr sz="1000" b="1">
-                <a:solidFill>
-                  <a:srgbClr val="20242C"/>
-                </a:solidFill>
-                <a:latin typeface="Microsoft YaHei"/>
-              </a:rPr>
-              <a:t>I-tag</a:t>
-            </a:r>
-            <a:r>
-              <a:rPr sz="1000" b="0">
-                <a:solidFill>
-                  <a:srgbClr val="20242C"/>
-                </a:solidFill>
-                <a:latin typeface="Microsoft YaHei"/>
-              </a:rPr>
-              <a:t>：不加总线，只用本地饥饿检测和单 slot 预约；适合改动最小的场景。</a:t>
-            </a:r>
-          </a:p>
-          <a:p>
-            <a:pPr algn="l">
-              <a:lnSpc>
-                <a:spcPct val="102000"/>
-              </a:lnSpc>
-              <a:spcBef>
-                <a:spcPts val="600"/>
-              </a:spcBef>
-            </a:pPr>
-            <a:r>
-              <a:rPr sz="1000" b="1">
-                <a:solidFill>
-                  <a:srgbClr val="20242C"/>
-                </a:solidFill>
-                <a:latin typeface="Microsoft YaHei"/>
-              </a:rPr>
-              <a:t>S22</a:t>
-            </a:r>
-            <a:r>
-              <a:rPr sz="1000" b="0">
-                <a:solidFill>
-                  <a:srgbClr val="20242C"/>
-                </a:solidFill>
-                <a:latin typeface="Microsoft YaHei"/>
-              </a:rPr>
-              <a:t>：复用 6 bit 进度总线，能直接比较谁领先、谁落后；适合允许跨节点进度信息、但事务层不可改的场景。</a:t>
-            </a:r>
-          </a:p>
-        </p:txBody>
-      </p:sp>
-      <p:sp>
-        <p:nvSpPr>
-          <p:cNvPr id="25" name="Rectangle 24"/>
-          <p:cNvSpPr/>
-          <p:nvPr/>
-        </p:nvSpPr>
-        <p:spPr>
-          <a:xfrm>
-            <a:off x="9024899" y="2194560"/>
-            <a:ext cx="2599867" cy="3017520"/>
-          </a:xfrm>
-          <a:prstGeom prst="rect">
-            <a:avLst/>
-          </a:prstGeom>
-          <a:solidFill>
-            <a:srgbClr val="FFFFFF"/>
-          </a:solidFill>
-          <a:ln w="12700">
-            <a:solidFill>
-              <a:srgbClr val="DCE3EA"/>
-            </a:solidFill>
-          </a:ln>
-          <a:effectLst/>
-        </p:spPr>
-        <p:style>
-          <a:lnRef idx="1">
-            <a:schemeClr val="accent1"/>
-          </a:lnRef>
-          <a:fillRef idx="3">
-            <a:schemeClr val="accent1"/>
-          </a:fillRef>
-          <a:effectRef idx="2">
-            <a:schemeClr val="accent1"/>
-          </a:effectRef>
-          <a:fontRef idx="minor">
-            <a:schemeClr val="lt1"/>
-          </a:fontRef>
-        </p:style>
-        <p:txBody>
-          <a:bodyPr rtlCol="0" anchor="ctr" wrap="square"/>
-          <a:lstStyle/>
-          <a:p>
-            <a:pPr algn="ctr"/>
-          </a:p>
-        </p:txBody>
-      </p:sp>
-      <p:sp>
-        <p:nvSpPr>
-          <p:cNvPr id="26" name="Oval 25"/>
-          <p:cNvSpPr/>
-          <p:nvPr/>
-        </p:nvSpPr>
-        <p:spPr>
-          <a:xfrm>
-            <a:off x="9244355" y="2414016"/>
-            <a:ext cx="384048" cy="384048"/>
-          </a:xfrm>
-          <a:prstGeom prst="ellipse">
-            <a:avLst/>
-          </a:prstGeom>
-          <a:solidFill>
-            <a:srgbClr val="D20A2E"/>
-          </a:solidFill>
-          <a:ln>
-            <a:noFill/>
-          </a:ln>
-          <a:effectLst/>
-        </p:spPr>
-        <p:style>
-          <a:lnRef idx="1">
-            <a:schemeClr val="accent1"/>
-          </a:lnRef>
-          <a:fillRef idx="3">
-            <a:schemeClr val="accent1"/>
-          </a:fillRef>
-          <a:effectRef idx="2">
-            <a:schemeClr val="accent1"/>
-          </a:effectRef>
-          <a:fontRef idx="minor">
-            <a:schemeClr val="lt1"/>
-          </a:fontRef>
-        </p:style>
-        <p:txBody>
-          <a:bodyPr rtlCol="0" anchor="ctr" wrap="square"/>
-          <a:lstStyle/>
-          <a:p>
-            <a:pPr algn="ctr"/>
-          </a:p>
-        </p:txBody>
-      </p:sp>
-      <p:sp>
-        <p:nvSpPr>
-          <p:cNvPr id="27" name="TextBox 26"/>
-          <p:cNvSpPr txBox="1"/>
-          <p:nvPr/>
-        </p:nvSpPr>
-        <p:spPr>
-          <a:xfrm>
-            <a:off x="9244355" y="2496312"/>
-            <a:ext cx="384048" cy="237744"/>
-          </a:xfrm>
-          <a:prstGeom prst="rect">
-            <a:avLst/>
-          </a:prstGeom>
-          <a:noFill/>
-        </p:spPr>
-        <p:txBody>
-          <a:bodyPr wrap="square" anchor="t" lIns="0" rIns="0" tIns="0" bIns="0">
-            <a:spAutoFit/>
-          </a:bodyPr>
-          <a:lstStyle/>
-          <a:p>
-            <a:pPr algn="ctr">
-              <a:lnSpc>
-                <a:spcPct val="100000"/>
-              </a:lnSpc>
-            </a:pPr>
-            <a:r>
-              <a:rPr sz="1150" b="1">
-                <a:solidFill>
-                  <a:srgbClr val="FFFFFF"/>
-                </a:solidFill>
-                <a:latin typeface="Arial"/>
-              </a:rPr>
-              <a:t>04</a:t>
-            </a:r>
-          </a:p>
-        </p:txBody>
-      </p:sp>
-      <p:sp>
-        <p:nvSpPr>
-          <p:cNvPr id="28" name="TextBox 27"/>
-          <p:cNvSpPr txBox="1"/>
-          <p:nvPr/>
-        </p:nvSpPr>
-        <p:spPr>
-          <a:xfrm>
-            <a:off x="9244355" y="2963978"/>
-            <a:ext cx="2160955" cy="592836"/>
-          </a:xfrm>
-          <a:prstGeom prst="rect">
-            <a:avLst/>
-          </a:prstGeom>
-          <a:noFill/>
-        </p:spPr>
-        <p:txBody>
-          <a:bodyPr wrap="square" anchor="t" lIns="0" rIns="0" tIns="0" bIns="0">
-            <a:spAutoFit/>
-          </a:bodyPr>
-          <a:lstStyle/>
-          <a:p>
-            <a:pPr algn="l">
-              <a:lnSpc>
-                <a:spcPct val="100000"/>
-              </a:lnSpc>
-            </a:pPr>
-            <a:r>
-              <a:rPr sz="1500" b="1">
-                <a:solidFill>
-                  <a:srgbClr val="20242C"/>
-                </a:solidFill>
-                <a:latin typeface="Microsoft YaHei"/>
-              </a:rPr>
-              <a:t>requester 窗口可改 · 5,840 FF‑eq</a:t>
-            </a:r>
-          </a:p>
-        </p:txBody>
-      </p:sp>
-      <p:sp>
-        <p:nvSpPr>
-          <p:cNvPr id="29" name="TextBox 28"/>
-          <p:cNvSpPr txBox="1"/>
-          <p:nvPr/>
-        </p:nvSpPr>
-        <p:spPr>
-          <a:xfrm>
-            <a:off x="9244355" y="3639110"/>
-            <a:ext cx="2160955" cy="1370479"/>
-          </a:xfrm>
-          <a:prstGeom prst="rect">
-            <a:avLst/>
-          </a:prstGeom>
-          <a:noFill/>
-        </p:spPr>
-        <p:txBody>
-          <a:bodyPr wrap="square" anchor="t" lIns="0" rIns="0" tIns="0" bIns="0">
-            <a:spAutoFit/>
-          </a:bodyPr>
-          <a:lstStyle/>
-          <a:p>
-            <a:pPr algn="l">
-              <a:lnSpc>
-                <a:spcPct val="102000"/>
-              </a:lnSpc>
-            </a:pPr>
-            <a:r>
-              <a:rPr sz="950" b="1">
-                <a:solidFill>
-                  <a:srgbClr val="20242C"/>
-                </a:solidFill>
-                <a:latin typeface="Microsoft YaHei"/>
-              </a:rPr>
-              <a:t>S19 / S20</a:t>
-            </a:r>
-            <a:r>
-              <a:rPr sz="950" b="0">
-                <a:solidFill>
-                  <a:srgbClr val="20242C"/>
-                </a:solidFill>
-                <a:latin typeface="Microsoft YaHei"/>
-              </a:rPr>
-              <a:t>：都用每核动态 outstanding 窗口。已有 RTT 计时器时选 S19；已有 tracker 水位和 1 bit 标记位时选 S20。</a:t>
-            </a:r>
-          </a:p>
-          <a:p>
-            <a:pPr algn="l">
-              <a:lnSpc>
-                <a:spcPct val="102000"/>
-              </a:lnSpc>
-              <a:spcBef>
-                <a:spcPts val="600"/>
-              </a:spcBef>
-            </a:pPr>
-            <a:r>
-              <a:rPr sz="950" b="0">
-                <a:solidFill>
-                  <a:srgbClr val="20242C"/>
-                </a:solidFill>
-                <a:latin typeface="Microsoft YaHei"/>
-              </a:rPr>
-              <a:t>两者不需要流量 pattern 先验，可作为 source-side 集成路径。读侧维持 S0，不另加控制。</a:t>
-            </a:r>
-          </a:p>
-        </p:txBody>
-      </p:sp>
-      <p:sp>
-        <p:nvSpPr>
-          <p:cNvPr id="30" name="Rectangle 29"/>
-          <p:cNvSpPr/>
-          <p:nvPr/>
-        </p:nvSpPr>
-        <p:spPr>
-          <a:xfrm>
-            <a:off x="566928" y="5486400"/>
-            <a:ext cx="11057839" cy="841248"/>
-          </a:xfrm>
-          <a:prstGeom prst="rect">
-            <a:avLst/>
-          </a:prstGeom>
-          <a:solidFill>
-            <a:srgbClr val="D20A2E"/>
-          </a:solidFill>
-          <a:ln>
-            <a:noFill/>
-          </a:ln>
-          <a:effectLst/>
-        </p:spPr>
-        <p:style>
-          <a:lnRef idx="1">
-            <a:schemeClr val="accent1"/>
-          </a:lnRef>
-          <a:fillRef idx="3">
-            <a:schemeClr val="accent1"/>
-          </a:fillRef>
-          <a:effectRef idx="2">
-            <a:schemeClr val="accent1"/>
-          </a:effectRef>
-          <a:fontRef idx="minor">
-            <a:schemeClr val="lt1"/>
-          </a:fontRef>
-        </p:style>
-        <p:txBody>
-          <a:bodyPr rtlCol="0" anchor="ctr" wrap="square"/>
-          <a:lstStyle/>
-          <a:p>
-            <a:pPr algn="ctr"/>
-          </a:p>
-        </p:txBody>
-      </p:sp>
-      <p:sp>
-        <p:nvSpPr>
-          <p:cNvPr id="31" name="TextBox 30"/>
-          <p:cNvSpPr txBox="1"/>
-          <p:nvPr/>
-        </p:nvSpPr>
-        <p:spPr>
-          <a:xfrm>
-            <a:off x="877824" y="5577840"/>
-            <a:ext cx="10436047" cy="658368"/>
-          </a:xfrm>
-          <a:prstGeom prst="rect">
-            <a:avLst/>
-          </a:prstGeom>
-          <a:noFill/>
-        </p:spPr>
-        <p:txBody>
-          <a:bodyPr wrap="square" anchor="ctr" lIns="0" rIns="0" tIns="0" bIns="0">
-            <a:spAutoFit/>
-          </a:bodyPr>
-          <a:lstStyle/>
-          <a:p>
-            <a:pPr algn="l">
-              <a:lnSpc>
-                <a:spcPct val="104000"/>
-              </a:lnSpc>
-            </a:pPr>
-            <a:r>
-              <a:rPr sz="1400" b="0">
-                <a:solidFill>
-                  <a:srgbClr val="FFFFFF"/>
-                </a:solidFill>
-                <a:latin typeface="Microsoft YaHei"/>
-              </a:rPr>
-              <a:t>建议顺序：第 1 步直接做；随后先问 completer 能不能改。能改优先验证 S16；不能改，再按现有硬件基础在 I-tag、S22、S19 / S20 中选。</a:t>
-            </a:r>
-          </a:p>
-        </p:txBody>
-      </p:sp>
-      <p:sp>
-        <p:nvSpPr>
-          <p:cNvPr id="32" name="TextBox 31"/>
-          <p:cNvSpPr txBox="1"/>
-          <p:nvPr/>
-        </p:nvSpPr>
-        <p:spPr>
-          <a:xfrm>
-            <a:off x="566928" y="6455664"/>
-            <a:ext cx="1463040" cy="219456"/>
-          </a:xfrm>
-          <a:prstGeom prst="rect">
-            <a:avLst/>
-          </a:prstGeom>
-          <a:noFill/>
-        </p:spPr>
-        <p:txBody>
-          <a:bodyPr wrap="square" anchor="t" lIns="0" rIns="0" tIns="0" bIns="0">
-            <a:spAutoFit/>
-          </a:bodyPr>
-          <a:lstStyle/>
-          <a:p>
-            <a:pPr algn="l">
-              <a:lnSpc>
-                <a:spcPct val="100000"/>
-              </a:lnSpc>
-            </a:pPr>
-            <a:r>
-              <a:rPr sz="1000" b="0">
-                <a:solidFill>
-                  <a:srgbClr val="A8B0BA"/>
-                </a:solidFill>
-                <a:latin typeface="Arial"/>
-              </a:rPr>
-              <a:t>33 / 34</a:t>
-            </a:r>
-          </a:p>
-        </p:txBody>
-      </p:sp>
-    </p:spTree>
-  </p:cSld>
-  <p:clrMapOvr>
-    <a:masterClrMapping/>
-  </p:clrMapOvr>
-</p:sld>
-</file>
-
-<file path=ppt/slides/slide34.xml><?xml version="1.0" encoding="utf-8"?>
-<p:sld xmlns:a="http://schemas.openxmlformats.org/drawingml/2006/main" xmlns:p="http://schemas.openxmlformats.org/presentationml/2006/main" xmlns:r="http://schemas.openxmlformats.org/officeDocument/2006/relationships">
-  <p:cSld>
-    <p:spTree>
-      <p:nvGrpSpPr>
-        <p:cNvPr id="1" name=""/>
-        <p:cNvGrpSpPr/>
-        <p:nvPr/>
-      </p:nvGrpSpPr>
-      <p:grpSpPr/>
-      <p:sp>
-        <p:nvSpPr>
-          <p:cNvPr id="2" name="Rectangle 1"/>
-          <p:cNvSpPr/>
-          <p:nvPr/>
-        </p:nvSpPr>
-        <p:spPr>
-          <a:xfrm>
-            <a:off x="0" y="0"/>
-            <a:ext cx="12191695" cy="6858000"/>
-          </a:xfrm>
-          <a:prstGeom prst="rect">
-            <a:avLst/>
-          </a:prstGeom>
-          <a:solidFill>
-            <a:srgbClr val="14171C"/>
-          </a:solidFill>
-          <a:ln>
-            <a:noFill/>
-          </a:ln>
-          <a:effectLst/>
-        </p:spPr>
-        <p:style>
-          <a:lnRef idx="1">
-            <a:schemeClr val="accent1"/>
-          </a:lnRef>
-          <a:fillRef idx="3">
-            <a:schemeClr val="accent1"/>
-          </a:fillRef>
-          <a:effectRef idx="2">
-            <a:schemeClr val="accent1"/>
-          </a:effectRef>
-          <a:fontRef idx="minor">
-            <a:schemeClr val="lt1"/>
-          </a:fontRef>
-        </p:style>
-        <p:txBody>
-          <a:bodyPr rtlCol="0" anchor="ctr" wrap="square"/>
-          <a:lstStyle/>
-          <a:p>
-            <a:pPr algn="ctr"/>
-          </a:p>
-        </p:txBody>
-      </p:sp>
-      <p:sp>
-        <p:nvSpPr>
-          <p:cNvPr id="3" name="Rectangle 2"/>
-          <p:cNvSpPr/>
-          <p:nvPr/>
-        </p:nvSpPr>
-        <p:spPr>
-          <a:xfrm>
-            <a:off x="10143439" y="274320"/>
-            <a:ext cx="182880" cy="182880"/>
-          </a:xfrm>
-          <a:prstGeom prst="rect">
-            <a:avLst/>
-          </a:prstGeom>
-          <a:solidFill>
-            <a:srgbClr val="D20A2E"/>
-          </a:solidFill>
-          <a:ln>
-            <a:noFill/>
-          </a:ln>
-          <a:effectLst/>
-        </p:spPr>
-        <p:style>
-          <a:lnRef idx="1">
-            <a:schemeClr val="accent1"/>
-          </a:lnRef>
-          <a:fillRef idx="3">
-            <a:schemeClr val="accent1"/>
-          </a:fillRef>
-          <a:effectRef idx="2">
-            <a:schemeClr val="accent1"/>
-          </a:effectRef>
-          <a:fontRef idx="minor">
-            <a:schemeClr val="lt1"/>
-          </a:fontRef>
-        </p:style>
-        <p:txBody>
-          <a:bodyPr rtlCol="0" anchor="ctr" wrap="square"/>
-          <a:lstStyle/>
-          <a:p>
-            <a:pPr algn="ctr"/>
-          </a:p>
-        </p:txBody>
-      </p:sp>
-      <p:sp>
-        <p:nvSpPr>
-          <p:cNvPr id="4" name="TextBox 3"/>
-          <p:cNvSpPr txBox="1"/>
-          <p:nvPr/>
-        </p:nvSpPr>
-        <p:spPr>
-          <a:xfrm>
-            <a:off x="10399471" y="246888"/>
-            <a:ext cx="1225296" cy="256032"/>
-          </a:xfrm>
-          <a:prstGeom prst="rect">
-            <a:avLst/>
-          </a:prstGeom>
-          <a:noFill/>
-        </p:spPr>
-        <p:txBody>
-          <a:bodyPr wrap="square" anchor="t" lIns="0" rIns="0" tIns="0" bIns="0">
-            <a:spAutoFit/>
-          </a:bodyPr>
-          <a:lstStyle/>
-          <a:p>
-            <a:pPr algn="l">
-              <a:lnSpc>
-                <a:spcPct val="100000"/>
-              </a:lnSpc>
-            </a:pPr>
-            <a:r>
-              <a:rPr sz="1300" b="1">
-                <a:solidFill>
-                  <a:srgbClr val="FFFFFF"/>
-                </a:solidFill>
-                <a:latin typeface="Arial"/>
-              </a:rPr>
-              <a:t>HUAWEI</a:t>
-            </a:r>
-          </a:p>
-        </p:txBody>
-      </p:sp>
-      <p:sp>
-        <p:nvSpPr>
-          <p:cNvPr id="5" name="Oval 4"/>
-          <p:cNvSpPr/>
-          <p:nvPr/>
-        </p:nvSpPr>
-        <p:spPr>
-          <a:xfrm>
-            <a:off x="566928" y="1737360"/>
-            <a:ext cx="868680" cy="868680"/>
-          </a:xfrm>
-          <a:prstGeom prst="ellipse">
-            <a:avLst/>
-          </a:prstGeom>
-          <a:solidFill>
-            <a:srgbClr val="22262D"/>
-          </a:solidFill>
-          <a:ln>
-            <a:noFill/>
-          </a:ln>
-          <a:effectLst/>
-        </p:spPr>
-        <p:style>
-          <a:lnRef idx="1">
-            <a:schemeClr val="accent1"/>
-          </a:lnRef>
-          <a:fillRef idx="3">
-            <a:schemeClr val="accent1"/>
-          </a:fillRef>
-          <a:effectRef idx="2">
-            <a:schemeClr val="accent1"/>
-          </a:effectRef>
-          <a:fontRef idx="minor">
-            <a:schemeClr val="lt1"/>
-          </a:fontRef>
-        </p:style>
-        <p:txBody>
-          <a:bodyPr rtlCol="0" anchor="ctr" wrap="square"/>
-          <a:lstStyle/>
-          <a:p>
-            <a:pPr algn="ctr"/>
-          </a:p>
-        </p:txBody>
-      </p:sp>
-      <p:sp>
-        <p:nvSpPr>
-          <p:cNvPr id="6" name="Rectangle 5"/>
-          <p:cNvSpPr/>
-          <p:nvPr/>
-        </p:nvSpPr>
-        <p:spPr>
-          <a:xfrm>
-            <a:off x="877824" y="2048256"/>
-            <a:ext cx="256032" cy="256032"/>
-          </a:xfrm>
-          <a:prstGeom prst="rect">
-            <a:avLst/>
-          </a:prstGeom>
-          <a:solidFill>
-            <a:srgbClr val="D20A2E"/>
-          </a:solidFill>
-          <a:ln>
-            <a:noFill/>
-          </a:ln>
-          <a:effectLst/>
-        </p:spPr>
-        <p:style>
-          <a:lnRef idx="1">
-            <a:schemeClr val="accent1"/>
-          </a:lnRef>
-          <a:fillRef idx="3">
-            <a:schemeClr val="accent1"/>
-          </a:fillRef>
-          <a:effectRef idx="2">
-            <a:schemeClr val="accent1"/>
-          </a:effectRef>
-          <a:fontRef idx="minor">
-            <a:schemeClr val="lt1"/>
-          </a:fontRef>
-        </p:style>
-        <p:txBody>
-          <a:bodyPr rtlCol="0" anchor="ctr" wrap="square"/>
-          <a:lstStyle/>
-          <a:p>
-            <a:pPr algn="ctr"/>
-          </a:p>
-        </p:txBody>
-      </p:sp>
-      <p:sp>
-        <p:nvSpPr>
-          <p:cNvPr id="7" name="TextBox 6"/>
-          <p:cNvSpPr txBox="1"/>
-          <p:nvPr/>
-        </p:nvSpPr>
-        <p:spPr>
-          <a:xfrm>
             <a:off x="566928" y="2926080"/>
             <a:ext cx="3657600" cy="237744"/>
           </a:xfrm>
@@ -28024,7 +26160,7 @@
                 </a:solidFill>
                 <a:latin typeface="Microsoft YaHei"/>
               </a:rPr>
-              <a:t>能改优先 S16；不能改，再按可用基础选择本地 I-tag、跨节点 S22，或 requester 动态窗口 S19 / S20。</a:t>
+              <a:t>能改优先 S16；不能改，再选择跨节点 S22，或 requester 动态窗口 S19 / S20。</a:t>
             </a:r>
           </a:p>
         </p:txBody>
@@ -28063,7 +26199,7 @@
                 </a:solidFill>
                 <a:latin typeface="Arial"/>
               </a:rPr>
-              <a:t>34 / 34</a:t>
+              <a:t>32 / 32</a:t>
             </a:r>
           </a:p>
         </p:txBody>
@@ -28844,7 +26980,7 @@
                 </a:solidFill>
                 <a:latin typeface="Arial"/>
               </a:rPr>
-              <a:t>04 / 34</a:t>
+              <a:t>04 / 32</a:t>
             </a:r>
           </a:p>
         </p:txBody>
@@ -30163,7 +28299,7 @@
                 </a:solidFill>
                 <a:latin typeface="Arial"/>
               </a:rPr>
-              <a:t>05 / 34</a:t>
+              <a:t>05 / 32</a:t>
             </a:r>
           </a:p>
         </p:txBody>
@@ -31562,7 +29698,7 @@
                 </a:solidFill>
                 <a:latin typeface="Arial"/>
               </a:rPr>
-              <a:t>06 / 34</a:t>
+              <a:t>06 / 32</a:t>
             </a:r>
           </a:p>
         </p:txBody>
@@ -32068,7 +30204,7 @@
                 </a:solidFill>
                 <a:latin typeface="Arial"/>
               </a:rPr>
-              <a:t>07 / 34</a:t>
+              <a:t>07 / 32</a:t>
             </a:r>
           </a:p>
         </p:txBody>
@@ -33085,7 +31221,7 @@
                 </a:solidFill>
                 <a:latin typeface="Arial"/>
               </a:rPr>
-              <a:t>08 / 34</a:t>
+              <a:t>08 / 32</a:t>
             </a:r>
           </a:p>
         </p:txBody>
@@ -35355,7 +33491,7 @@
                 </a:solidFill>
                 <a:latin typeface="Arial"/>
               </a:rPr>
-              <a:t>09 / 34</a:t>
+              <a:t>09 / 32</a:t>
             </a:r>
           </a:p>
         </p:txBody>

--- a/ppt/ring2-write-fairness.pptx
+++ b/ppt/ring2-write-fairness.pptx
@@ -14866,7 +14866,7 @@
                 </a:solidFill>
                 <a:latin typeface="Microsoft YaHei"/>
               </a:rPr>
-              <a:t>η =（总带宽 × 分箱 Jain）/ 理想控制器的同一乘积。理想 = 1.0。筛选轮 K = 2000，每核在飞上限 32，100 拍窗。</a:t>
+              <a:t>η =（总带宽 × 分箱 Jain）/ 理想控制器的同一乘积。理想 = 1.0。筛选轮 K = 2000，100 拍窗。</a:t>
             </a:r>
           </a:p>
         </p:txBody>
@@ -15235,7 +15235,7 @@
                 </a:solidFill>
                 <a:latin typeface="Microsoft YaHei"/>
               </a:rPr>
-              <a:t>S19 / S20（5,840，η 0.8992）与 S22-stock（13,920，η 0.8883）在成本—收益平面上被 S16 支配，但改动层次不同，仍是有意义的工程备选。</a:t>
+              <a:t>S22-stock（13,920，η 0.8883）保留为事务层不可改时的环仲裁备选；S19 / S20（5,840，η 0.8992）只作为 requester 窗口控制的研究对照。</a:t>
             </a:r>
           </a:p>
           <a:p>
@@ -16034,7 +16034,7 @@
                 </a:solidFill>
                 <a:latin typeface="Microsoft YaHei"/>
               </a:rPr>
-              <a:t>在飞上限收到 32 之后，S0 本身就已经拿到 R* 的 </a:t>
+              <a:t>固定实验配置下，S0 本身就已经拿到 R* 的 </a:t>
             </a:r>
             <a:r>
               <a:rPr sz="800" b="1">
@@ -16088,7 +16088,7 @@
                 </a:solidFill>
                 <a:latin typeface="Microsoft YaHei"/>
               </a:rPr>
-              <a:t>，E-tag 绕环从 4,384 降到 </a:t>
+              <a:t>，E-tag 绕环降到 </a:t>
             </a:r>
             <a:r>
               <a:rPr sz="800" b="1">
@@ -16610,7 +16610,7 @@
                 </a:solidFill>
                 <a:latin typeface="Microsoft YaHei"/>
               </a:rPr>
-              <a:t>四个方案、三种控制层次：机制示意 + 与 S0 / S1 的同口径实测对比。</a:t>
+              <a:t>两个落地候选、两个研究对照：机制示意 + 与 S0 / S1 的同口径实测。</a:t>
             </a:r>
           </a:p>
         </p:txBody>
@@ -16732,7 +16732,7 @@
                 </a:solidFill>
                 <a:latin typeface="Microsoft YaHei"/>
               </a:rPr>
-              <a:t>S16 是严格成本—收益前沿；S19、S20 与 S22 是改动层次不同的近前沿工程备选。四者都可实现、数据来自测量，且不含流量 pattern 先验。</a:t>
+              <a:t>S16 是主方案，S22 是事务层不可改时的环仲裁备选；S19 / S20 用于验证 requester 动态窗口的边界，不进入最终架构建议。</a:t>
             </a:r>
           </a:p>
         </p:txBody>
@@ -19047,13 +19047,13 @@
               </a:lnSpc>
             </a:pPr>
             <a:r>
-              <a:rPr sz="800" b="1">
+              <a:rPr sz="950" b="1">
                 <a:solidFill>
                   <a:srgbClr val="D20A2E"/>
                 </a:solidFill>
                 <a:latin typeface="Arial"/>
               </a:rPr>
-              <a:t>N E A R - F R O N T I E R   ·   W I N D O W   C C</a:t>
+              <a:t>R E F E R E N C E   ·   W I N D O W   C C</a:t>
             </a:r>
           </a:p>
         </p:txBody>
@@ -19965,8 +19965,8 @@
         </p:blipFill>
         <p:spPr>
           <a:xfrm>
-            <a:off x="3328416" y="1169399"/>
-            <a:ext cx="8296351" cy="2629125"/>
+            <a:off x="3526488" y="1024128"/>
+            <a:ext cx="7900206" cy="2503586"/>
           </a:xfrm>
           <a:prstGeom prst="rect">
             <a:avLst/>
@@ -19981,7 +19981,7 @@
         </p:nvSpPr>
         <p:spPr>
           <a:xfrm>
-            <a:off x="3328416" y="3889965"/>
+            <a:off x="3328416" y="3619154"/>
             <a:ext cx="8296351" cy="292608"/>
           </a:xfrm>
           <a:prstGeom prst="rect">
@@ -20020,8 +20020,8 @@
         </p:nvSpPr>
         <p:spPr>
           <a:xfrm>
-            <a:off x="566928" y="4657029"/>
-            <a:ext cx="3527450" cy="1670618"/>
+            <a:off x="566928" y="4240946"/>
+            <a:ext cx="3527450" cy="2086701"/>
           </a:xfrm>
           <a:prstGeom prst="rect">
             <a:avLst/>
@@ -20066,7 +20066,7 @@
         </p:nvSpPr>
         <p:spPr>
           <a:xfrm>
-            <a:off x="768096" y="5000317"/>
+            <a:off x="768096" y="4792276"/>
             <a:ext cx="3125114" cy="277622"/>
           </a:xfrm>
           <a:prstGeom prst="rect">
@@ -20105,7 +20105,7 @@
         </p:nvSpPr>
         <p:spPr>
           <a:xfrm>
-            <a:off x="768096" y="5360235"/>
+            <a:off x="768096" y="5152194"/>
             <a:ext cx="3125114" cy="660699"/>
           </a:xfrm>
           <a:prstGeom prst="rect">
@@ -20144,8 +20144,8 @@
         </p:nvSpPr>
         <p:spPr>
           <a:xfrm>
-            <a:off x="4332122" y="4657029"/>
-            <a:ext cx="3527450" cy="1670618"/>
+            <a:off x="4332122" y="4240946"/>
+            <a:ext cx="3527450" cy="2086701"/>
           </a:xfrm>
           <a:prstGeom prst="rect">
             <a:avLst/>
@@ -20190,7 +20190,7 @@
         </p:nvSpPr>
         <p:spPr>
           <a:xfrm>
-            <a:off x="4533290" y="4858197"/>
+            <a:off x="4533290" y="4650155"/>
             <a:ext cx="3125114" cy="277622"/>
           </a:xfrm>
           <a:prstGeom prst="rect">
@@ -20229,7 +20229,7 @@
         </p:nvSpPr>
         <p:spPr>
           <a:xfrm>
-            <a:off x="4533290" y="5218115"/>
+            <a:off x="4533290" y="5010073"/>
             <a:ext cx="3125114" cy="944940"/>
           </a:xfrm>
           <a:prstGeom prst="rect">
@@ -20305,8 +20305,8 @@
         </p:nvSpPr>
         <p:spPr>
           <a:xfrm>
-            <a:off x="8097316" y="4657029"/>
-            <a:ext cx="3527450" cy="1670618"/>
+            <a:off x="8097316" y="4240946"/>
+            <a:ext cx="3527450" cy="2086701"/>
           </a:xfrm>
           <a:prstGeom prst="rect">
             <a:avLst/>
@@ -20351,7 +20351,7 @@
         </p:nvSpPr>
         <p:spPr>
           <a:xfrm>
-            <a:off x="8298484" y="5000317"/>
+            <a:off x="8298484" y="4442114"/>
             <a:ext cx="3125114" cy="277622"/>
           </a:xfrm>
           <a:prstGeom prst="rect">
@@ -20377,7 +20377,7 @@
                 </a:solidFill>
                 <a:latin typeface="Microsoft YaHei"/>
               </a:rPr>
-              <a:t>工程选择</a:t>
+              <a:t>参考结论</a:t>
             </a:r>
           </a:p>
         </p:txBody>
@@ -20390,8 +20390,8 @@
         </p:nvSpPr>
         <p:spPr>
           <a:xfrm>
-            <a:off x="8298484" y="5360235"/>
-            <a:ext cx="3125114" cy="660699"/>
+            <a:off x="8298484" y="4802032"/>
+            <a:ext cx="3125114" cy="1361023"/>
           </a:xfrm>
           <a:prstGeom prst="rect">
             <a:avLst/>
@@ -20416,7 +20416,26 @@
                 </a:solidFill>
                 <a:latin typeface="Microsoft YaHei"/>
               </a:rPr>
-              <a:t>已经有 RTT 计时器时，S19 集成最轻；已经有 tracker 水位与可用标记位时，S20 的拥塞含义更明确。两者都涉及 requester 的事务发起窗口。</a:t>
+              <a:t>两者都基本保住总带宽，但 Jain 与长期速率差几乎没有离开 S0。这说明 requester 窗口能限制注入量，却没有把瓶颈 hop 的服务机会从快核搬给慢核。</a:t>
+            </a:r>
+          </a:p>
+          <a:p>
+            <a:pPr algn="l">
+              <a:lnSpc>
+                <a:spcPct val="102000"/>
+              </a:lnSpc>
+              <a:spcBef>
+                <a:spcPts val="600"/>
+              </a:spcBef>
+            </a:pPr>
+            <a:r>
+              <a:rPr sz="1100" b="1">
+                <a:solidFill>
+                  <a:srgbClr val="D20A2E"/>
+                </a:solidFill>
+                <a:latin typeface="Microsoft YaHei"/>
+              </a:rPr>
+              <a:t>仅保留为 source-side 控制对照，不进入最终架构建议。</a:t>
             </a:r>
           </a:p>
         </p:txBody>
@@ -22640,7 +22659,7 @@
                 </a:solidFill>
                 <a:latin typeface="Microsoft YaHei"/>
               </a:rPr>
-              <a:t>哪些已经关死，哪些还开着，以及下一步该由谁拍板。</a:t>
+              <a:t>从现象、根因、理论上界到可实现机制，形成完整证据闭环。</a:t>
             </a:r>
           </a:p>
         </p:txBody>
@@ -22762,7 +22781,7 @@
                 </a:solidFill>
                 <a:latin typeface="Microsoft YaHei"/>
               </a:rPr>
-              <a:t>带宽线已基本关死；公平缺陷是真实的，但它不必用带宽去换。真正要拍板的不是单一排名，而是哪一层能改：completer、requester，还是只允许动环上仲裁。</a:t>
+              <a:t>问题已经收敛为一个架构决策：能改 HA 授权调度就验证 S16；事务层不能改，则验证只动环上仲裁的 S22。</a:t>
             </a:r>
           </a:p>
         </p:txBody>
@@ -23657,7 +23676,7 @@
                 </a:solidFill>
                 <a:latin typeface="Microsoft YaHei"/>
               </a:rPr>
-              <a:t>四条</a:t>
+              <a:t>三项确定结论 + 一个架构决策</a:t>
             </a:r>
           </a:p>
         </p:txBody>
@@ -23670,8 +23689,8 @@
         </p:nvSpPr>
         <p:spPr>
           <a:xfrm>
-            <a:off x="566928" y="2231136"/>
-            <a:ext cx="2599867" cy="2999231"/>
+            <a:off x="566928" y="2233589"/>
+            <a:ext cx="2599867" cy="2994324"/>
           </a:xfrm>
           <a:prstGeom prst="rect">
             <a:avLst/>
@@ -23716,7 +23735,7 @@
         </p:nvSpPr>
         <p:spPr>
           <a:xfrm>
-            <a:off x="768096" y="2813288"/>
+            <a:off x="768096" y="2699811"/>
             <a:ext cx="2197531" cy="314705"/>
           </a:xfrm>
           <a:prstGeom prst="rect">
@@ -23742,7 +23761,7 @@
                 </a:solidFill>
                 <a:latin typeface="Microsoft YaHei"/>
               </a:rPr>
-              <a:t>① 带宽线已基本关死</a:t>
+              <a:t>① 容量问题已闭环</a:t>
             </a:r>
           </a:p>
         </p:txBody>
@@ -23755,8 +23774,8 @@
         </p:nvSpPr>
         <p:spPr>
           <a:xfrm>
-            <a:off x="768096" y="3210290"/>
-            <a:ext cx="2197531" cy="1474500"/>
+            <a:off x="768096" y="3096813"/>
+            <a:ext cx="2197531" cy="1701454"/>
           </a:xfrm>
           <a:prstGeom prst="rect">
             <a:avLst/>
@@ -23781,7 +23800,7 @@
                 </a:solidFill>
                 <a:latin typeface="Microsoft YaHei"/>
               </a:rPr>
-              <a:t>S0 = 96.97% R*，最忙的链路 96.98% 满；3.03% 的缺口已逐拍闭合（5 拍绕环 + 2,181 拍空转）。</a:t>
+              <a:t>S0 最忙链路利用率 96.98%；相对 R* 的 3.03% 缺口已按拍拆成有效载荷、绕环重发和四类空转，账目无残项。</a:t>
             </a:r>
           </a:p>
           <a:p>
@@ -23800,7 +23819,7 @@
                 </a:solidFill>
                 <a:latin typeface="Microsoft YaHei"/>
               </a:rPr>
-              <a:t>拥塞控制的带宽目标应是「不弄丢」，不是「抬上去」。</a:t>
+              <a:t>结论：当前问题不是带宽没打满，而是满载时服务机会分配不均。</a:t>
             </a:r>
           </a:p>
         </p:txBody>
@@ -23813,8 +23832,8 @@
         </p:nvSpPr>
         <p:spPr>
           <a:xfrm>
-            <a:off x="3386251" y="2231136"/>
-            <a:ext cx="2599867" cy="2999231"/>
+            <a:off x="3386251" y="2233589"/>
+            <a:ext cx="2599867" cy="2994324"/>
           </a:xfrm>
           <a:prstGeom prst="rect">
             <a:avLst/>
@@ -23885,7 +23904,7 @@
                 </a:solidFill>
                 <a:latin typeface="Microsoft YaHei"/>
               </a:rPr>
-              <a:t>② 公平缺陷是真实的</a:t>
+              <a:t>② 公平性是结构问题</a:t>
             </a:r>
           </a:p>
         </p:txBody>
@@ -23924,7 +23943,7 @@
                 </a:solidFill>
                 <a:latin typeface="Microsoft YaHei"/>
               </a:rPr>
-              <a:t>不是采样噪声：把抖动完全抹平后的 Jain 上限只有 0.96458，六快四慢是几何决定的固定分组（核间速率比 1.5673）。</a:t>
+              <a:t>六快四慢随时间稳定存在；即使完全抹平瞬时抖动，Jain 上限仍只有 0.96458，核间长期速率比为 1.5673。</a:t>
             </a:r>
           </a:p>
           <a:p>
@@ -23943,7 +23962,7 @@
                 </a:solidFill>
                 <a:latin typeface="Microsoft YaHei"/>
               </a:rPr>
-              <a:t>要提高均衡度就必须真的搬速率，只整时机不够。</a:t>
+              <a:t>结论：只整形发包时机不够，必须在瓶颈处重新分配服务机会。</a:t>
             </a:r>
           </a:p>
         </p:txBody>
@@ -23956,8 +23975,8 @@
         </p:nvSpPr>
         <p:spPr>
           <a:xfrm>
-            <a:off x="6205575" y="2231136"/>
-            <a:ext cx="2599867" cy="2999231"/>
+            <a:off x="6205575" y="2233589"/>
+            <a:ext cx="2599867" cy="2994324"/>
           </a:xfrm>
           <a:prstGeom prst="rect">
             <a:avLst/>
@@ -24002,8 +24021,8 @@
         </p:nvSpPr>
         <p:spPr>
           <a:xfrm>
-            <a:off x="6406743" y="2560746"/>
-            <a:ext cx="2197531" cy="592836"/>
+            <a:off x="6406743" y="2586334"/>
+            <a:ext cx="2197531" cy="314705"/>
           </a:xfrm>
           <a:prstGeom prst="rect">
             <a:avLst/>
@@ -24028,7 +24047,7 @@
                 </a:solidFill>
                 <a:latin typeface="Microsoft YaHei"/>
               </a:rPr>
-              <a:t>③ 严格前沿与工程备选要分开看</a:t>
+              <a:t>③ 上界与评价口径已建立</a:t>
             </a:r>
           </a:p>
         </p:txBody>
@@ -24041,8 +24060,8 @@
         </p:nvSpPr>
         <p:spPr>
           <a:xfrm>
-            <a:off x="6406743" y="3235878"/>
-            <a:ext cx="2197531" cy="1701454"/>
+            <a:off x="6406743" y="2983336"/>
+            <a:ext cx="2197531" cy="1928408"/>
           </a:xfrm>
           <a:prstGeom prst="rect">
             <a:avLst/>
@@ -24067,7 +24086,7 @@
                 </a:solidFill>
                 <a:latin typeface="Microsoft YaHei"/>
               </a:rPr>
-              <a:t>按「带宽 × 公平性 / 硬件」计算，严格前沿是 S16。S19 / S20、S22 虽不在严格前沿上，但分别落在 requester 动态窗口和跨节点进度仲裁两个不同改动层。</a:t>
+              <a:t>由逐链路占用约束求得 R(J) 理论边界与等速率上限 R* = 5.7143；再用 100 拍 Jain、长期 max/min、硬件 FF‑eq 和流量迁移统一评估。</a:t>
             </a:r>
           </a:p>
           <a:p>
@@ -24086,7 +24105,7 @@
                 </a:solidFill>
                 <a:latin typeface="Microsoft YaHei"/>
               </a:rPr>
-              <a:t>被数值支配，不等于在工程约束下没有选择价值。</a:t>
+              <a:t>结论：方案优劣来自同一上界下的可量化差距，不依赖经验判断。</a:t>
             </a:r>
           </a:p>
         </p:txBody>
@@ -24099,8 +24118,8 @@
         </p:nvSpPr>
         <p:spPr>
           <a:xfrm>
-            <a:off x="9024899" y="2231136"/>
-            <a:ext cx="2599867" cy="2999231"/>
+            <a:off x="9024899" y="2233589"/>
+            <a:ext cx="2599867" cy="2994324"/>
           </a:xfrm>
           <a:prstGeom prst="rect">
             <a:avLst/>
@@ -24145,8 +24164,8 @@
         </p:nvSpPr>
         <p:spPr>
           <a:xfrm>
-            <a:off x="9226067" y="2465908"/>
-            <a:ext cx="2197531" cy="592836"/>
+            <a:off x="9226067" y="2434757"/>
+            <a:ext cx="2197531" cy="314705"/>
           </a:xfrm>
           <a:prstGeom prst="rect">
             <a:avLst/>
@@ -24171,7 +24190,7 @@
                 </a:solidFill>
                 <a:latin typeface="Microsoft YaHei"/>
               </a:rPr>
-              <a:t>④ 两头能同时拿住，但层次决定落点</a:t>
+              <a:t>④ 控制点决定方案</a:t>
             </a:r>
           </a:p>
         </p:txBody>
@@ -24184,8 +24203,8 @@
         </p:nvSpPr>
         <p:spPr>
           <a:xfrm>
-            <a:off x="9226067" y="3141040"/>
-            <a:ext cx="2197531" cy="1891131"/>
+            <a:off x="9226067" y="2831759"/>
+            <a:ext cx="2197531" cy="2231562"/>
           </a:xfrm>
           <a:prstGeom prst="rect">
             <a:avLst/>
@@ -24204,13 +24223,13 @@
               </a:lnSpc>
             </a:pPr>
             <a:r>
-              <a:rPr sz="1000" b="0">
-                <a:solidFill>
-                  <a:srgbClr val="20242C"/>
-                </a:solidFill>
-                <a:latin typeface="Microsoft YaHei"/>
-              </a:rPr>
-              <a:t>S16 把决策点放回 completer：Jain 0.92818 → 0.98466，max/min → 1.0001，带宽只让 0.39%，硬件 900 FF‑eq。</a:t>
+              <a:rPr sz="1200" b="0">
+                <a:solidFill>
+                  <a:srgbClr val="20242C"/>
+                </a:solidFill>
+                <a:latin typeface="Microsoft YaHei"/>
+              </a:rPr>
+              <a:t>S16 在 HA 授权点直接重排服务：900 FF‑eq，Jain 0.98466，max/min 1.0001，总带宽仅 −0.39%。</a:t>
             </a:r>
           </a:p>
           <a:p>
@@ -24223,13 +24242,13 @@
               </a:spcBef>
             </a:pPr>
             <a:r>
-              <a:rPr sz="1000" b="0">
-                <a:solidFill>
-                  <a:srgbClr val="20242C"/>
-                </a:solidFill>
-                <a:latin typeface="Microsoft YaHei"/>
-              </a:rPr>
-              <a:t>它需要改 HA 的授权调度。若该层不可改，可退到 requester 窗口S19 / S20，或只改环上仲裁的 S22。</a:t>
+              <a:rPr sz="1200" b="0">
+                <a:solidFill>
+                  <a:srgbClr val="20242C"/>
+                </a:solidFill>
+                <a:latin typeface="Microsoft YaHei"/>
+              </a:rPr>
+              <a:t>若事务层不可改，S22 是只动环仲裁的备选；S19 / S20 仅作对照。</a:t>
             </a:r>
           </a:p>
           <a:p>
@@ -24242,13 +24261,13 @@
               </a:spcBef>
             </a:pPr>
             <a:r>
-              <a:rPr sz="1000" b="1">
+              <a:rPr sz="1200" b="1">
                 <a:solidFill>
                   <a:srgbClr val="D20A2E"/>
                 </a:solidFill>
                 <a:latin typeface="Microsoft YaHei"/>
               </a:rPr>
-              <a:t>最终选择首先由「哪一层能改」决定，其次才是数字。</a:t>
+              <a:t>架构决策只剩：HA 授权调度能不能改。</a:t>
             </a:r>
           </a:p>
         </p:txBody>
@@ -24331,7 +24350,7 @@
                 </a:solidFill>
                 <a:latin typeface="Microsoft YaHei"/>
               </a:rPr>
-              <a:t>统一结论：不要把所有机制压成一个排名。S16、S19 / S20、S22 分别交换 completer、requester、跨节点仲裁的改动权限；先确定可改边界，再在对应层内选性能最好的方案。</a:t>
+              <a:t>本研究完成了「现象复现 → 逐拍归因 → 理论上界 → 机制设计 → 硬件代价 → 流量迁移」闭环，并把开放问题压缩为一项可决策的架构边界。</a:t>
             </a:r>
           </a:p>
         </p:txBody>
@@ -24720,7 +24739,7 @@
                 </a:solidFill>
                 <a:latin typeface="Microsoft YaHei"/>
               </a:rPr>
-              <a:t>先收在飞，再按可改层次选择</a:t>
+              <a:t>只保留一主一备，明确研究边界</a:t>
             </a:r>
           </a:p>
         </p:txBody>
@@ -24734,7 +24753,279 @@
         <p:spPr>
           <a:xfrm>
             <a:off x="566928" y="2194560"/>
-            <a:ext cx="2599867" cy="3017520"/>
+            <a:ext cx="3539642" cy="3017520"/>
+          </a:xfrm>
+          <a:prstGeom prst="rect">
+            <a:avLst/>
+          </a:prstGeom>
+          <a:solidFill>
+            <a:srgbClr val="FFFFFF"/>
+          </a:solidFill>
+          <a:ln w="19050">
+            <a:solidFill>
+              <a:srgbClr val="D20A2E"/>
+            </a:solidFill>
+          </a:ln>
+          <a:effectLst/>
+        </p:spPr>
+        <p:style>
+          <a:lnRef idx="1">
+            <a:schemeClr val="accent1"/>
+          </a:lnRef>
+          <a:fillRef idx="3">
+            <a:schemeClr val="accent1"/>
+          </a:fillRef>
+          <a:effectRef idx="2">
+            <a:schemeClr val="accent1"/>
+          </a:effectRef>
+          <a:fontRef idx="minor">
+            <a:schemeClr val="lt1"/>
+          </a:fontRef>
+        </p:style>
+        <p:txBody>
+          <a:bodyPr rtlCol="0" anchor="ctr" wrap="square"/>
+          <a:lstStyle/>
+          <a:p>
+            <a:pPr algn="ctr"/>
+          </a:p>
+        </p:txBody>
+      </p:sp>
+      <p:sp>
+        <p:nvSpPr>
+          <p:cNvPr id="11" name="Oval 10"/>
+          <p:cNvSpPr/>
+          <p:nvPr/>
+        </p:nvSpPr>
+        <p:spPr>
+          <a:xfrm>
+            <a:off x="786384" y="2414016"/>
+            <a:ext cx="384048" cy="384048"/>
+          </a:xfrm>
+          <a:prstGeom prst="ellipse">
+            <a:avLst/>
+          </a:prstGeom>
+          <a:solidFill>
+            <a:srgbClr val="D20A2E"/>
+          </a:solidFill>
+          <a:ln>
+            <a:noFill/>
+          </a:ln>
+          <a:effectLst/>
+        </p:spPr>
+        <p:style>
+          <a:lnRef idx="1">
+            <a:schemeClr val="accent1"/>
+          </a:lnRef>
+          <a:fillRef idx="3">
+            <a:schemeClr val="accent1"/>
+          </a:fillRef>
+          <a:effectRef idx="2">
+            <a:schemeClr val="accent1"/>
+          </a:effectRef>
+          <a:fontRef idx="minor">
+            <a:schemeClr val="lt1"/>
+          </a:fontRef>
+        </p:style>
+        <p:txBody>
+          <a:bodyPr rtlCol="0" anchor="ctr" wrap="square"/>
+          <a:lstStyle/>
+          <a:p>
+            <a:pPr algn="ctr"/>
+          </a:p>
+        </p:txBody>
+      </p:sp>
+      <p:sp>
+        <p:nvSpPr>
+          <p:cNvPr id="12" name="TextBox 11"/>
+          <p:cNvSpPr txBox="1"/>
+          <p:nvPr/>
+        </p:nvSpPr>
+        <p:spPr>
+          <a:xfrm>
+            <a:off x="786384" y="2496312"/>
+            <a:ext cx="384048" cy="237744"/>
+          </a:xfrm>
+          <a:prstGeom prst="rect">
+            <a:avLst/>
+          </a:prstGeom>
+          <a:noFill/>
+        </p:spPr>
+        <p:txBody>
+          <a:bodyPr wrap="square" anchor="t" lIns="0" rIns="0" tIns="0" bIns="0">
+            <a:spAutoFit/>
+          </a:bodyPr>
+          <a:lstStyle/>
+          <a:p>
+            <a:pPr algn="ctr">
+              <a:lnSpc>
+                <a:spcPct val="100000"/>
+              </a:lnSpc>
+            </a:pPr>
+            <a:r>
+              <a:rPr sz="1150" b="1">
+                <a:solidFill>
+                  <a:srgbClr val="FFFFFF"/>
+                </a:solidFill>
+                <a:latin typeface="Arial"/>
+              </a:rPr>
+              <a:t>01</a:t>
+            </a:r>
+          </a:p>
+        </p:txBody>
+      </p:sp>
+      <p:sp>
+        <p:nvSpPr>
+          <p:cNvPr id="13" name="TextBox 12"/>
+          <p:cNvSpPr txBox="1"/>
+          <p:nvPr/>
+        </p:nvSpPr>
+        <p:spPr>
+          <a:xfrm>
+            <a:off x="786384" y="2965650"/>
+            <a:ext cx="3100730" cy="314705"/>
+          </a:xfrm>
+          <a:prstGeom prst="rect">
+            <a:avLst/>
+          </a:prstGeom>
+          <a:noFill/>
+        </p:spPr>
+        <p:txBody>
+          <a:bodyPr wrap="square" anchor="t" lIns="0" rIns="0" tIns="0" bIns="0">
+            <a:spAutoFit/>
+          </a:bodyPr>
+          <a:lstStyle/>
+          <a:p>
+            <a:pPr algn="l">
+              <a:lnSpc>
+                <a:spcPct val="100000"/>
+              </a:lnSpc>
+            </a:pPr>
+            <a:r>
+              <a:rPr sz="1500" b="1">
+                <a:solidFill>
+                  <a:srgbClr val="D20A2E"/>
+                </a:solidFill>
+                <a:latin typeface="Microsoft YaHei"/>
+              </a:rPr>
+              <a:t>主方案 · S16 写侧授权保留</a:t>
+            </a:r>
+          </a:p>
+        </p:txBody>
+      </p:sp>
+      <p:sp>
+        <p:nvSpPr>
+          <p:cNvPr id="14" name="TextBox 13"/>
+          <p:cNvSpPr txBox="1"/>
+          <p:nvPr/>
+        </p:nvSpPr>
+        <p:spPr>
+          <a:xfrm>
+            <a:off x="786384" y="3362652"/>
+            <a:ext cx="3100730" cy="1645264"/>
+          </a:xfrm>
+          <a:prstGeom prst="rect">
+            <a:avLst/>
+          </a:prstGeom>
+          <a:noFill/>
+        </p:spPr>
+        <p:txBody>
+          <a:bodyPr wrap="square" anchor="t" lIns="0" rIns="0" tIns="0" bIns="0">
+            <a:spAutoFit/>
+          </a:bodyPr>
+          <a:lstStyle/>
+          <a:p>
+            <a:pPr algn="l">
+              <a:lnSpc>
+                <a:spcPct val="102000"/>
+              </a:lnSpc>
+            </a:pPr>
+            <a:r>
+              <a:rPr sz="1100" b="1">
+                <a:solidFill>
+                  <a:srgbClr val="20242C"/>
+                </a:solidFill>
+                <a:latin typeface="Microsoft YaHei"/>
+              </a:rPr>
+              <a:t>目标</a:t>
+            </a:r>
+            <a:r>
+              <a:rPr sz="1100" b="0">
+                <a:solidFill>
+                  <a:srgbClr val="20242C"/>
+                </a:solidFill>
+                <a:latin typeface="Microsoft YaHei"/>
+              </a:rPr>
+              <a:t>：在 HA / memory controller 内验证 DBIDResp 授权排队与最少服务优先。</a:t>
+            </a:r>
+          </a:p>
+          <a:p>
+            <a:pPr algn="l">
+              <a:lnSpc>
+                <a:spcPct val="102000"/>
+              </a:lnSpc>
+              <a:spcBef>
+                <a:spcPts val="600"/>
+              </a:spcBef>
+            </a:pPr>
+            <a:r>
+              <a:rPr sz="1100" b="1">
+                <a:solidFill>
+                  <a:srgbClr val="20242C"/>
+                </a:solidFill>
+                <a:latin typeface="Microsoft YaHei"/>
+              </a:rPr>
+              <a:t>价值</a:t>
+            </a:r>
+            <a:r>
+              <a:rPr sz="1100" b="0">
+                <a:solidFill>
+                  <a:srgbClr val="20242C"/>
+                </a:solidFill>
+                <a:latin typeface="Microsoft YaHei"/>
+              </a:rPr>
+              <a:t>：当前所有可实现点里，S16 离理论上界最近、硬件代价最低，并在 uniform / hot 两类流量下都不显著损失带宽。</a:t>
+            </a:r>
+          </a:p>
+          <a:p>
+            <a:pPr algn="l">
+              <a:lnSpc>
+                <a:spcPct val="102000"/>
+              </a:lnSpc>
+              <a:spcBef>
+                <a:spcPts val="600"/>
+              </a:spcBef>
+            </a:pPr>
+            <a:r>
+              <a:rPr sz="1100" b="1">
+                <a:solidFill>
+                  <a:srgbClr val="20242C"/>
+                </a:solidFill>
+                <a:latin typeface="Microsoft YaHei"/>
+              </a:rPr>
+              <a:t>门槛</a:t>
+            </a:r>
+            <a:r>
+              <a:rPr sz="1100" b="0">
+                <a:solidFill>
+                  <a:srgbClr val="20242C"/>
+                </a:solidFill>
+                <a:latin typeface="Microsoft YaHei"/>
+              </a:rPr>
+              <a:t>：确认 HA 授权时序、CHI 合规性和现有 tracker 接口可支持。</a:t>
+            </a:r>
+          </a:p>
+        </p:txBody>
+      </p:sp>
+      <p:sp>
+        <p:nvSpPr>
+          <p:cNvPr id="15" name="Rectangle 14"/>
+          <p:cNvSpPr/>
+          <p:nvPr/>
+        </p:nvSpPr>
+        <p:spPr>
+          <a:xfrm>
+            <a:off x="4326026" y="2194560"/>
+            <a:ext cx="3539642" cy="3017520"/>
           </a:xfrm>
           <a:prstGeom prst="rect">
             <a:avLst/>
@@ -24773,13 +25064,13 @@
       </p:sp>
       <p:sp>
         <p:nvSpPr>
-          <p:cNvPr id="11" name="Oval 10"/>
+          <p:cNvPr id="16" name="Oval 15"/>
           <p:cNvSpPr/>
           <p:nvPr/>
         </p:nvSpPr>
         <p:spPr>
           <a:xfrm>
-            <a:off x="786384" y="2414016"/>
+            <a:off x="4545482" y="2414016"/>
             <a:ext cx="384048" cy="384048"/>
           </a:xfrm>
           <a:prstGeom prst="ellipse">
@@ -24817,13 +25108,13 @@
       </p:sp>
       <p:sp>
         <p:nvSpPr>
-          <p:cNvPr id="12" name="TextBox 11"/>
-          <p:cNvSpPr txBox="1"/>
-          <p:nvPr/>
-        </p:nvSpPr>
-        <p:spPr>
-          <a:xfrm>
-            <a:off x="786384" y="2496312"/>
+          <p:cNvPr id="17" name="TextBox 16"/>
+          <p:cNvSpPr txBox="1"/>
+          <p:nvPr/>
+        </p:nvSpPr>
+        <p:spPr>
+          <a:xfrm>
+            <a:off x="4545482" y="2496312"/>
             <a:ext cx="384048" cy="237744"/>
           </a:xfrm>
           <a:prstGeom prst="rect">
@@ -24849,21 +25140,21 @@
                 </a:solidFill>
                 <a:latin typeface="Arial"/>
               </a:rPr>
-              <a:t>01</a:t>
-            </a:r>
-          </a:p>
-        </p:txBody>
-      </p:sp>
-      <p:sp>
-        <p:nvSpPr>
-          <p:cNvPr id="13" name="TextBox 12"/>
-          <p:cNvSpPr txBox="1"/>
-          <p:nvPr/>
-        </p:nvSpPr>
-        <p:spPr>
-          <a:xfrm>
-            <a:off x="786384" y="2968706"/>
-            <a:ext cx="2160955" cy="592836"/>
+              <a:t>02</a:t>
+            </a:r>
+          </a:p>
+        </p:txBody>
+      </p:sp>
+      <p:sp>
+        <p:nvSpPr>
+          <p:cNvPr id="18" name="TextBox 17"/>
+          <p:cNvSpPr txBox="1"/>
+          <p:nvPr/>
+        </p:nvSpPr>
+        <p:spPr>
+          <a:xfrm>
+            <a:off x="4545482" y="3150050"/>
+            <a:ext cx="3100730" cy="314705"/>
           </a:xfrm>
           <a:prstGeom prst="rect">
             <a:avLst/>
@@ -24888,21 +25179,21 @@
                 </a:solidFill>
                 <a:latin typeface="Microsoft YaHei"/>
               </a:rPr>
-              <a:t>第一步 · 0 FF‑eq · 无条件</a:t>
-            </a:r>
-          </a:p>
-        </p:txBody>
-      </p:sp>
-      <p:sp>
-        <p:nvSpPr>
-          <p:cNvPr id="14" name="TextBox 13"/>
-          <p:cNvSpPr txBox="1"/>
-          <p:nvPr/>
-        </p:nvSpPr>
-        <p:spPr>
-          <a:xfrm>
-            <a:off x="786384" y="3643838"/>
-            <a:ext cx="2160955" cy="1361023"/>
+              <a:t>备选 · S22 环上赤字让路</a:t>
+            </a:r>
+          </a:p>
+        </p:txBody>
+      </p:sp>
+      <p:sp>
+        <p:nvSpPr>
+          <p:cNvPr id="19" name="TextBox 18"/>
+          <p:cNvSpPr txBox="1"/>
+          <p:nvPr/>
+        </p:nvSpPr>
+        <p:spPr>
+          <a:xfrm>
+            <a:off x="4545482" y="3547052"/>
+            <a:ext cx="3100730" cy="1276464"/>
           </a:xfrm>
           <a:prstGeom prst="rect">
             <a:avLst/>
@@ -24921,22 +25212,22 @@
               </a:lnSpc>
             </a:pPr>
             <a:r>
-              <a:rPr sz="1100" b="1">
-                <a:solidFill>
-                  <a:srgbClr val="20242C"/>
-                </a:solidFill>
-                <a:latin typeface="Microsoft YaHei"/>
-              </a:rPr>
-              <a:t>每核在飞上限收到 32。</a:t>
-            </a:r>
-            <a:r>
-              <a:rPr sz="1100" b="0">
-                <a:solidFill>
-                  <a:srgbClr val="20242C"/>
-                </a:solidFill>
-                <a:latin typeface="Microsoft YaHei"/>
-              </a:rPr>
-              <a:t>零硬件、无流量先验：覆盖最坏 89 拍 RTT 只需约 26 笔，再多就只是在已经饱和的环上排队。</a:t>
+              <a:rPr sz="1150" b="1">
+                <a:solidFill>
+                  <a:srgbClr val="20242C"/>
+                </a:solidFill>
+                <a:latin typeface="Microsoft YaHei"/>
+              </a:rPr>
+              <a:t>适用条件</a:t>
+            </a:r>
+            <a:r>
+              <a:rPr sz="1150" b="0">
+                <a:solidFill>
+                  <a:srgbClr val="20242C"/>
+                </a:solidFill>
+                <a:latin typeface="Microsoft YaHei"/>
+              </a:rPr>
+              <a:t>：HA 事务调度不可改，但允许调整 ring arbitration。</a:t>
             </a:r>
           </a:p>
           <a:p>
@@ -24949,229 +25240,22 @@
               </a:spcBef>
             </a:pPr>
             <a:r>
-              <a:rPr sz="1100" b="1">
-                <a:solidFill>
-                  <a:srgbClr val="D20A2E"/>
-                </a:solidFill>
-                <a:latin typeface="Microsoft YaHei"/>
-              </a:rPr>
-              <a:t>uniform 绕环重发从上千拍降到 5 拍；非均匀流量带宽 +33%。</a:t>
-            </a:r>
-          </a:p>
-        </p:txBody>
-      </p:sp>
-      <p:sp>
-        <p:nvSpPr>
-          <p:cNvPr id="15" name="Rectangle 14"/>
-          <p:cNvSpPr/>
-          <p:nvPr/>
-        </p:nvSpPr>
-        <p:spPr>
-          <a:xfrm>
-            <a:off x="3386251" y="2194560"/>
-            <a:ext cx="2599867" cy="3017520"/>
-          </a:xfrm>
-          <a:prstGeom prst="rect">
-            <a:avLst/>
-          </a:prstGeom>
-          <a:solidFill>
-            <a:srgbClr val="FFFFFF"/>
-          </a:solidFill>
-          <a:ln w="19050">
-            <a:solidFill>
-              <a:srgbClr val="D20A2E"/>
-            </a:solidFill>
-          </a:ln>
-          <a:effectLst/>
-        </p:spPr>
-        <p:style>
-          <a:lnRef idx="1">
-            <a:schemeClr val="accent1"/>
-          </a:lnRef>
-          <a:fillRef idx="3">
-            <a:schemeClr val="accent1"/>
-          </a:fillRef>
-          <a:effectRef idx="2">
-            <a:schemeClr val="accent1"/>
-          </a:effectRef>
-          <a:fontRef idx="minor">
-            <a:schemeClr val="lt1"/>
-          </a:fontRef>
-        </p:style>
-        <p:txBody>
-          <a:bodyPr rtlCol="0" anchor="ctr" wrap="square"/>
-          <a:lstStyle/>
-          <a:p>
-            <a:pPr algn="ctr"/>
-          </a:p>
-        </p:txBody>
-      </p:sp>
-      <p:sp>
-        <p:nvSpPr>
-          <p:cNvPr id="16" name="Oval 15"/>
-          <p:cNvSpPr/>
-          <p:nvPr/>
-        </p:nvSpPr>
-        <p:spPr>
-          <a:xfrm>
-            <a:off x="3605707" y="2414016"/>
-            <a:ext cx="384048" cy="384048"/>
-          </a:xfrm>
-          <a:prstGeom prst="ellipse">
-            <a:avLst/>
-          </a:prstGeom>
-          <a:solidFill>
-            <a:srgbClr val="D20A2E"/>
-          </a:solidFill>
-          <a:ln>
-            <a:noFill/>
-          </a:ln>
-          <a:effectLst/>
-        </p:spPr>
-        <p:style>
-          <a:lnRef idx="1">
-            <a:schemeClr val="accent1"/>
-          </a:lnRef>
-          <a:fillRef idx="3">
-            <a:schemeClr val="accent1"/>
-          </a:fillRef>
-          <a:effectRef idx="2">
-            <a:schemeClr val="accent1"/>
-          </a:effectRef>
-          <a:fontRef idx="minor">
-            <a:schemeClr val="lt1"/>
-          </a:fontRef>
-        </p:style>
-        <p:txBody>
-          <a:bodyPr rtlCol="0" anchor="ctr" wrap="square"/>
-          <a:lstStyle/>
-          <a:p>
-            <a:pPr algn="ctr"/>
-          </a:p>
-        </p:txBody>
-      </p:sp>
-      <p:sp>
-        <p:nvSpPr>
-          <p:cNvPr id="17" name="TextBox 16"/>
-          <p:cNvSpPr txBox="1"/>
-          <p:nvPr/>
-        </p:nvSpPr>
-        <p:spPr>
-          <a:xfrm>
-            <a:off x="3605707" y="2496312"/>
-            <a:ext cx="384048" cy="237744"/>
-          </a:xfrm>
-          <a:prstGeom prst="rect">
-            <a:avLst/>
-          </a:prstGeom>
-          <a:noFill/>
-        </p:spPr>
-        <p:txBody>
-          <a:bodyPr wrap="square" anchor="t" lIns="0" rIns="0" tIns="0" bIns="0">
-            <a:spAutoFit/>
-          </a:bodyPr>
-          <a:lstStyle/>
-          <a:p>
-            <a:pPr algn="ctr">
-              <a:lnSpc>
-                <a:spcPct val="100000"/>
-              </a:lnSpc>
-            </a:pPr>
-            <a:r>
               <a:rPr sz="1150" b="1">
                 <a:solidFill>
-                  <a:srgbClr val="FFFFFF"/>
-                </a:solidFill>
-                <a:latin typeface="Arial"/>
-              </a:rPr>
-              <a:t>02</a:t>
-            </a:r>
-          </a:p>
-        </p:txBody>
-      </p:sp>
-      <p:sp>
-        <p:nvSpPr>
-          <p:cNvPr id="18" name="TextBox 17"/>
-          <p:cNvSpPr txBox="1"/>
-          <p:nvPr/>
-        </p:nvSpPr>
-        <p:spPr>
-          <a:xfrm>
-            <a:off x="3605707" y="2963978"/>
-            <a:ext cx="2160955" cy="592836"/>
-          </a:xfrm>
-          <a:prstGeom prst="rect">
-            <a:avLst/>
-          </a:prstGeom>
-          <a:noFill/>
-        </p:spPr>
-        <p:txBody>
-          <a:bodyPr wrap="square" anchor="t" lIns="0" rIns="0" tIns="0" bIns="0">
-            <a:spAutoFit/>
-          </a:bodyPr>
-          <a:lstStyle/>
-          <a:p>
-            <a:pPr algn="l">
-              <a:lnSpc>
-                <a:spcPct val="100000"/>
-              </a:lnSpc>
-            </a:pPr>
-            <a:r>
-              <a:rPr sz="1500" b="1">
-                <a:solidFill>
-                  <a:srgbClr val="D20A2E"/>
-                </a:solidFill>
-                <a:latin typeface="Microsoft YaHei"/>
-              </a:rPr>
-              <a:t>completer 可改 · 900 FF‑eq</a:t>
-            </a:r>
-          </a:p>
-        </p:txBody>
-      </p:sp>
-      <p:sp>
-        <p:nvSpPr>
-          <p:cNvPr id="19" name="TextBox 18"/>
-          <p:cNvSpPr txBox="1"/>
-          <p:nvPr/>
-        </p:nvSpPr>
-        <p:spPr>
-          <a:xfrm>
-            <a:off x="3605707" y="3639110"/>
-            <a:ext cx="2160955" cy="1370479"/>
-          </a:xfrm>
-          <a:prstGeom prst="rect">
-            <a:avLst/>
-          </a:prstGeom>
-          <a:noFill/>
-        </p:spPr>
-        <p:txBody>
-          <a:bodyPr wrap="square" anchor="t" lIns="0" rIns="0" tIns="0" bIns="0">
-            <a:spAutoFit/>
-          </a:bodyPr>
-          <a:lstStyle/>
-          <a:p>
-            <a:pPr algn="l">
-              <a:lnSpc>
-                <a:spcPct val="102000"/>
-              </a:lnSpc>
-            </a:pPr>
-            <a:r>
-              <a:rPr sz="950" b="1">
-                <a:solidFill>
-                  <a:srgbClr val="20242C"/>
-                </a:solidFill>
-                <a:latin typeface="Microsoft YaHei"/>
-              </a:rPr>
-              <a:t>S16 授权保留。</a:t>
-            </a:r>
-            <a:r>
-              <a:rPr sz="950" b="0">
-                <a:solidFill>
-                  <a:srgbClr val="20242C"/>
-                </a:solidFill>
-                <a:latin typeface="Microsoft YaHei"/>
-              </a:rPr>
-              <a:t>写侧 Jain 0.92818 → 0.98466、带宽只让 0.39%、非均匀流量拿到 R* 的 99.74%。</a:t>
+                  <a:srgbClr val="20242C"/>
+                </a:solidFill>
+                <a:latin typeface="Microsoft YaHei"/>
+              </a:rPr>
+              <a:t>验证重点</a:t>
+            </a:r>
+            <a:r>
+              <a:rPr sz="1150" b="0">
+                <a:solidFill>
+                  <a:srgbClr val="20242C"/>
+                </a:solidFill>
+                <a:latin typeface="Microsoft YaHei"/>
+              </a:rPr>
+              <a:t>：6 bit 进度总线复用、30 拍反馈稳定性、让路范围和现有注入队列深度下的收益。</a:t>
             </a:r>
           </a:p>
           <a:p>
@@ -25184,22 +25268,22 @@
               </a:spcBef>
             </a:pPr>
             <a:r>
-              <a:rPr sz="950" b="1">
-                <a:solidFill>
-                  <a:srgbClr val="20242C"/>
-                </a:solidFill>
-                <a:latin typeface="Microsoft YaHei"/>
-              </a:rPr>
-              <a:t>前提</a:t>
-            </a:r>
-            <a:r>
-              <a:rPr sz="950" b="0">
-                <a:solidFill>
-                  <a:srgbClr val="20242C"/>
-                </a:solidFill>
-                <a:latin typeface="Microsoft YaHei"/>
-              </a:rPr>
-              <a:t>：completer 的授权调度可改。线格式与协议状态机不动，但要改 HA 何时给谁发 DBIDResp，须 IP 可改并过一次合规复核。</a:t>
+              <a:rPr sz="1150" b="1">
+                <a:solidFill>
+                  <a:srgbClr val="20242C"/>
+                </a:solidFill>
+                <a:latin typeface="Microsoft YaHei"/>
+              </a:rPr>
+              <a:t>定位</a:t>
+            </a:r>
+            <a:r>
+              <a:rPr sz="1150" b="0">
+                <a:solidFill>
+                  <a:srgbClr val="20242C"/>
+                </a:solidFill>
+                <a:latin typeface="Microsoft YaHei"/>
+              </a:rPr>
+              <a:t>：性能次于 S16，但控制面完全留在环层。</a:t>
             </a:r>
           </a:p>
         </p:txBody>
@@ -25212,8 +25296,8 @@
         </p:nvSpPr>
         <p:spPr>
           <a:xfrm>
-            <a:off x="6205575" y="2194560"/>
-            <a:ext cx="2599867" cy="3017520"/>
+            <a:off x="8085124" y="2194560"/>
+            <a:ext cx="3539642" cy="3017520"/>
           </a:xfrm>
           <a:prstGeom prst="rect">
             <a:avLst/>
@@ -25258,7 +25342,7 @@
         </p:nvSpPr>
         <p:spPr>
           <a:xfrm>
-            <a:off x="6425031" y="2414016"/>
+            <a:off x="8304580" y="2414016"/>
             <a:ext cx="384048" cy="384048"/>
           </a:xfrm>
           <a:prstGeom prst="ellipse">
@@ -25302,7 +25386,7 @@
         </p:nvSpPr>
         <p:spPr>
           <a:xfrm>
-            <a:off x="6425031" y="2496312"/>
+            <a:off x="8304580" y="2496312"/>
             <a:ext cx="384048" cy="237744"/>
           </a:xfrm>
           <a:prstGeom prst="rect">
@@ -25341,8 +25425,8 @@
         </p:nvSpPr>
         <p:spPr>
           <a:xfrm>
-            <a:off x="6425031" y="3195934"/>
-            <a:ext cx="2160955" cy="592836"/>
+            <a:off x="8304580" y="3069671"/>
+            <a:ext cx="3100730" cy="314705"/>
           </a:xfrm>
           <a:prstGeom prst="rect">
             <a:avLst/>
@@ -25367,7 +25451,7 @@
                 </a:solidFill>
                 <a:latin typeface="Microsoft YaHei"/>
               </a:rPr>
-              <a:t>只改环上仲裁 · 13,920 FF‑eq</a:t>
+              <a:t>边界 · 明确不进入建议</a:t>
             </a:r>
           </a:p>
         </p:txBody>
@@ -25380,8 +25464,8 @@
         </p:nvSpPr>
         <p:spPr>
           <a:xfrm>
-            <a:off x="6425031" y="3871066"/>
-            <a:ext cx="2160955" cy="906566"/>
+            <a:off x="8304580" y="3466673"/>
+            <a:ext cx="3100730" cy="1437223"/>
           </a:xfrm>
           <a:prstGeom prst="rect">
             <a:avLst/>
@@ -25400,22 +25484,78 @@
               </a:lnSpc>
             </a:pPr>
             <a:r>
-              <a:rPr sz="1150" b="1">
-                <a:solidFill>
-                  <a:srgbClr val="20242C"/>
-                </a:solidFill>
-                <a:latin typeface="Microsoft YaHei"/>
-              </a:rPr>
-              <a:t>S22</a:t>
-            </a:r>
-            <a:r>
-              <a:rPr sz="1150" b="0">
-                <a:solidFill>
-                  <a:srgbClr val="20242C"/>
-                </a:solidFill>
-                <a:latin typeface="Microsoft YaHei"/>
-              </a:rPr>
-              <a:t>：复用 6 bit 进度总线，能直接比较谁领先、谁落后；适合允许跨节点进度信息、但事务层不可改的场景。</a:t>
+              <a:rPr sz="1100" b="1">
+                <a:solidFill>
+                  <a:srgbClr val="20242C"/>
+                </a:solidFill>
+                <a:latin typeface="Microsoft YaHei"/>
+              </a:rPr>
+              <a:t>S19 / S20</a:t>
+            </a:r>
+            <a:r>
+              <a:rPr sz="1100" b="0">
+                <a:solidFill>
+                  <a:srgbClr val="20242C"/>
+                </a:solidFill>
+                <a:latin typeface="Microsoft YaHei"/>
+              </a:rPr>
+              <a:t>：仅保留为 requester-side 研究对照；实测公平性几乎不变，不作为第三层落地路径。</a:t>
+            </a:r>
+          </a:p>
+          <a:p>
+            <a:pPr algn="l">
+              <a:lnSpc>
+                <a:spcPct val="102000"/>
+              </a:lnSpc>
+              <a:spcBef>
+                <a:spcPts val="600"/>
+              </a:spcBef>
+            </a:pPr>
+            <a:r>
+              <a:rPr sz="1100" b="1">
+                <a:solidFill>
+                  <a:srgbClr val="20242C"/>
+                </a:solidFill>
+                <a:latin typeface="Microsoft YaHei"/>
+              </a:rPr>
+              <a:t>读侧</a:t>
+            </a:r>
+            <a:r>
+              <a:rPr sz="1100" b="0">
+                <a:solidFill>
+                  <a:srgbClr val="20242C"/>
+                </a:solidFill>
+                <a:latin typeface="Microsoft YaHei"/>
+              </a:rPr>
+              <a:t>：S0 已达到 Jain 0.99067、max/min 1.0035，维持现状。</a:t>
+            </a:r>
+          </a:p>
+          <a:p>
+            <a:pPr algn="l">
+              <a:lnSpc>
+                <a:spcPct val="102000"/>
+              </a:lnSpc>
+              <a:spcBef>
+                <a:spcPts val="600"/>
+              </a:spcBef>
+            </a:pPr>
+            <a:r>
+              <a:rPr sz="1100" b="1">
+                <a:solidFill>
+                  <a:srgbClr val="20242C"/>
+                </a:solidFill>
+                <a:latin typeface="Microsoft YaHei"/>
+              </a:rPr>
+              <a:t>outstanding</a:t>
+            </a:r>
+            <a:r>
+              <a:rPr sz="1100" b="0">
+                <a:solidFill>
+                  <a:srgbClr val="20242C"/>
+                </a:solidFill>
+                <a:latin typeface="Microsoft YaHei"/>
+              </a:rPr>
+              <a:t>：由最坏 RTT 覆盖要求固定，不作为拥塞控制旋钮。</a:t>
             </a:r>
           </a:p>
         </p:txBody>
@@ -25428,56 +25568,10 @@
         </p:nvSpPr>
         <p:spPr>
           <a:xfrm>
-            <a:off x="9024899" y="2194560"/>
-            <a:ext cx="2599867" cy="3017520"/>
-          </a:xfrm>
-          <a:prstGeom prst="rect">
-            <a:avLst/>
-          </a:prstGeom>
-          <a:solidFill>
-            <a:srgbClr val="FFFFFF"/>
-          </a:solidFill>
-          <a:ln w="12700">
-            <a:solidFill>
-              <a:srgbClr val="DCE3EA"/>
-            </a:solidFill>
-          </a:ln>
-          <a:effectLst/>
-        </p:spPr>
-        <p:style>
-          <a:lnRef idx="1">
-            <a:schemeClr val="accent1"/>
-          </a:lnRef>
-          <a:fillRef idx="3">
-            <a:schemeClr val="accent1"/>
-          </a:fillRef>
-          <a:effectRef idx="2">
-            <a:schemeClr val="accent1"/>
-          </a:effectRef>
-          <a:fontRef idx="minor">
-            <a:schemeClr val="lt1"/>
-          </a:fontRef>
-        </p:style>
-        <p:txBody>
-          <a:bodyPr rtlCol="0" anchor="ctr" wrap="square"/>
-          <a:lstStyle/>
-          <a:p>
-            <a:pPr algn="ctr"/>
-          </a:p>
-        </p:txBody>
-      </p:sp>
-      <p:sp>
-        <p:nvSpPr>
-          <p:cNvPr id="26" name="Oval 25"/>
-          <p:cNvSpPr/>
-          <p:nvPr/>
-        </p:nvSpPr>
-        <p:spPr>
-          <a:xfrm>
-            <a:off x="9244355" y="2414016"/>
-            <a:ext cx="384048" cy="384048"/>
-          </a:xfrm>
-          <a:prstGeom prst="ellipse">
+            <a:off x="566928" y="5486400"/>
+            <a:ext cx="11057839" cy="841248"/>
+          </a:xfrm>
+          <a:prstGeom prst="rect">
             <a:avLst/>
           </a:prstGeom>
           <a:solidFill>
@@ -25512,196 +25606,7 @@
       </p:sp>
       <p:sp>
         <p:nvSpPr>
-          <p:cNvPr id="27" name="TextBox 26"/>
-          <p:cNvSpPr txBox="1"/>
-          <p:nvPr/>
-        </p:nvSpPr>
-        <p:spPr>
-          <a:xfrm>
-            <a:off x="9244355" y="2496312"/>
-            <a:ext cx="384048" cy="237744"/>
-          </a:xfrm>
-          <a:prstGeom prst="rect">
-            <a:avLst/>
-          </a:prstGeom>
-          <a:noFill/>
-        </p:spPr>
-        <p:txBody>
-          <a:bodyPr wrap="square" anchor="t" lIns="0" rIns="0" tIns="0" bIns="0">
-            <a:spAutoFit/>
-          </a:bodyPr>
-          <a:lstStyle/>
-          <a:p>
-            <a:pPr algn="ctr">
-              <a:lnSpc>
-                <a:spcPct val="100000"/>
-              </a:lnSpc>
-            </a:pPr>
-            <a:r>
-              <a:rPr sz="1150" b="1">
-                <a:solidFill>
-                  <a:srgbClr val="FFFFFF"/>
-                </a:solidFill>
-                <a:latin typeface="Arial"/>
-              </a:rPr>
-              <a:t>04</a:t>
-            </a:r>
-          </a:p>
-        </p:txBody>
-      </p:sp>
-      <p:sp>
-        <p:nvSpPr>
-          <p:cNvPr id="28" name="TextBox 27"/>
-          <p:cNvSpPr txBox="1"/>
-          <p:nvPr/>
-        </p:nvSpPr>
-        <p:spPr>
-          <a:xfrm>
-            <a:off x="9244355" y="2963978"/>
-            <a:ext cx="2160955" cy="592836"/>
-          </a:xfrm>
-          <a:prstGeom prst="rect">
-            <a:avLst/>
-          </a:prstGeom>
-          <a:noFill/>
-        </p:spPr>
-        <p:txBody>
-          <a:bodyPr wrap="square" anchor="t" lIns="0" rIns="0" tIns="0" bIns="0">
-            <a:spAutoFit/>
-          </a:bodyPr>
-          <a:lstStyle/>
-          <a:p>
-            <a:pPr algn="l">
-              <a:lnSpc>
-                <a:spcPct val="100000"/>
-              </a:lnSpc>
-            </a:pPr>
-            <a:r>
-              <a:rPr sz="1500" b="1">
-                <a:solidFill>
-                  <a:srgbClr val="20242C"/>
-                </a:solidFill>
-                <a:latin typeface="Microsoft YaHei"/>
-              </a:rPr>
-              <a:t>requester 窗口可改 · 5,840 FF‑eq</a:t>
-            </a:r>
-          </a:p>
-        </p:txBody>
-      </p:sp>
-      <p:sp>
-        <p:nvSpPr>
-          <p:cNvPr id="29" name="TextBox 28"/>
-          <p:cNvSpPr txBox="1"/>
-          <p:nvPr/>
-        </p:nvSpPr>
-        <p:spPr>
-          <a:xfrm>
-            <a:off x="9244355" y="3639110"/>
-            <a:ext cx="2160955" cy="1370479"/>
-          </a:xfrm>
-          <a:prstGeom prst="rect">
-            <a:avLst/>
-          </a:prstGeom>
-          <a:noFill/>
-        </p:spPr>
-        <p:txBody>
-          <a:bodyPr wrap="square" anchor="t" lIns="0" rIns="0" tIns="0" bIns="0">
-            <a:spAutoFit/>
-          </a:bodyPr>
-          <a:lstStyle/>
-          <a:p>
-            <a:pPr algn="l">
-              <a:lnSpc>
-                <a:spcPct val="102000"/>
-              </a:lnSpc>
-            </a:pPr>
-            <a:r>
-              <a:rPr sz="950" b="1">
-                <a:solidFill>
-                  <a:srgbClr val="20242C"/>
-                </a:solidFill>
-                <a:latin typeface="Microsoft YaHei"/>
-              </a:rPr>
-              <a:t>S19 / S20</a:t>
-            </a:r>
-            <a:r>
-              <a:rPr sz="950" b="0">
-                <a:solidFill>
-                  <a:srgbClr val="20242C"/>
-                </a:solidFill>
-                <a:latin typeface="Microsoft YaHei"/>
-              </a:rPr>
-              <a:t>：都用每核动态 outstanding 窗口。已有 RTT 计时器时选 S19；已有 tracker 水位和 1 bit 标记位时选 S20。</a:t>
-            </a:r>
-          </a:p>
-          <a:p>
-            <a:pPr algn="l">
-              <a:lnSpc>
-                <a:spcPct val="102000"/>
-              </a:lnSpc>
-              <a:spcBef>
-                <a:spcPts val="600"/>
-              </a:spcBef>
-            </a:pPr>
-            <a:r>
-              <a:rPr sz="950" b="0">
-                <a:solidFill>
-                  <a:srgbClr val="20242C"/>
-                </a:solidFill>
-                <a:latin typeface="Microsoft YaHei"/>
-              </a:rPr>
-              <a:t>两者不需要流量 pattern 先验，可作为 source-side 集成路径。读侧维持 S0，不另加控制。</a:t>
-            </a:r>
-          </a:p>
-        </p:txBody>
-      </p:sp>
-      <p:sp>
-        <p:nvSpPr>
-          <p:cNvPr id="30" name="Rectangle 29"/>
-          <p:cNvSpPr/>
-          <p:nvPr/>
-        </p:nvSpPr>
-        <p:spPr>
-          <a:xfrm>
-            <a:off x="566928" y="5486400"/>
-            <a:ext cx="11057839" cy="841248"/>
-          </a:xfrm>
-          <a:prstGeom prst="rect">
-            <a:avLst/>
-          </a:prstGeom>
-          <a:solidFill>
-            <a:srgbClr val="D20A2E"/>
-          </a:solidFill>
-          <a:ln>
-            <a:noFill/>
-          </a:ln>
-          <a:effectLst/>
-        </p:spPr>
-        <p:style>
-          <a:lnRef idx="1">
-            <a:schemeClr val="accent1"/>
-          </a:lnRef>
-          <a:fillRef idx="3">
-            <a:schemeClr val="accent1"/>
-          </a:fillRef>
-          <a:effectRef idx="2">
-            <a:schemeClr val="accent1"/>
-          </a:effectRef>
-          <a:fontRef idx="minor">
-            <a:schemeClr val="lt1"/>
-          </a:fontRef>
-        </p:style>
-        <p:txBody>
-          <a:bodyPr rtlCol="0" anchor="ctr" wrap="square"/>
-          <a:lstStyle/>
-          <a:p>
-            <a:pPr algn="ctr"/>
-          </a:p>
-        </p:txBody>
-      </p:sp>
-      <p:sp>
-        <p:nvSpPr>
-          <p:cNvPr id="31" name="TextBox 30"/>
+          <p:cNvPr id="26" name="TextBox 25"/>
           <p:cNvSpPr txBox="1"/>
           <p:nvPr/>
         </p:nvSpPr>
@@ -25733,14 +25638,14 @@
                 </a:solidFill>
                 <a:latin typeface="Microsoft YaHei"/>
               </a:rPr>
-              <a:t>建议顺序：第 1 步直接做；随后先问 completer 能不能改。能改优先验证 S16；不能改，再按现有硬件基础在 S22、S19 / S20 中选。</a:t>
-            </a:r>
-          </a:p>
-        </p:txBody>
-      </p:sp>
-      <p:sp>
-        <p:nvSpPr>
-          <p:cNvPr id="32" name="TextBox 31"/>
+              <a:t>请架构组只决策一件事：是否允许 HA 改变授权的时机与对象。允许则进入 S16 微架构验证；不允许则转入 S22 环仲裁原型。</a:t>
+            </a:r>
+          </a:p>
+        </p:txBody>
+      </p:sp>
+      <p:sp>
+        <p:nvSpPr>
+          <p:cNvPr id="27" name="TextBox 26"/>
           <p:cNvSpPr txBox="1"/>
           <p:nvPr/>
         </p:nvSpPr>
@@ -26160,7 +26065,7 @@
                 </a:solidFill>
                 <a:latin typeface="Microsoft YaHei"/>
               </a:rPr>
-              <a:t>能改优先 S16；不能改，再选择跨节点 S22，或 requester 动态窗口 S19 / S20。</a:t>
+              <a:t>允许修改：进入 S16 微架构验证；不允许修改：进入 S22 环仲裁原型。</a:t>
             </a:r>
           </a:p>
         </p:txBody>
@@ -30920,7 +30825,7 @@
         </p:nvSpPr>
         <p:spPr>
           <a:xfrm>
-            <a:off x="4533290" y="4611466"/>
+            <a:off x="4533290" y="4507445"/>
             <a:ext cx="3125114" cy="277622"/>
           </a:xfrm>
           <a:prstGeom prst="rect">
@@ -30959,8 +30864,8 @@
         </p:nvSpPr>
         <p:spPr>
           <a:xfrm>
-            <a:off x="4533290" y="4971384"/>
-            <a:ext cx="3125114" cy="868740"/>
+            <a:off x="4533290" y="4867363"/>
+            <a:ext cx="3125114" cy="1076782"/>
           </a:xfrm>
           <a:prstGeom prst="rect">
             <a:avLst/>
@@ -31003,7 +30908,7 @@
                 </a:solidFill>
                 <a:latin typeface="Microsoft YaHei"/>
               </a:rPr>
-              <a:t>，三项逐拍相加相等。在飞上限收到 32 之后，绕环重发已经从上千拍降到 5 拍。</a:t>
+              <a:t>，三项逐拍相加相等。core_outstanding 固定为 32、覆盖最坏 RTT；在这个前提下，绕环重发仅 5 拍，剩余缺口来自已分类的空转。</a:t>
             </a:r>
           </a:p>
         </p:txBody>
@@ -31182,7 +31087,7 @@
                 </a:solidFill>
                 <a:latin typeface="Microsoft YaHei"/>
               </a:rPr>
-              <a:t>能回收的不到 1 个点，且要拿公平性换：I-tag 调强可到 97.59% R*，但 Jain 掉 0.029；加深下环队列、加大在飞上限都是净亏。</a:t>
+              <a:t>能回收的不到 1 个点，且要拿公平性换：I-tag 调强可到 97.59% R*，但 Jain 掉 0.029；加深下环队列也不能改善这一结论。</a:t>
             </a:r>
           </a:p>
         </p:txBody>

--- a/ppt/ring2-write-fairness.pptx
+++ b/ppt/ring2-write-fairness.pptx
@@ -44,6 +44,8 @@
     <p:sldId id="292" r:id="rId43"/>
     <p:sldId id="293" r:id="rId44"/>
     <p:sldId id="294" r:id="rId45"/>
+    <p:sldId id="295" r:id="rId46"/>
+    <p:sldId id="296" r:id="rId47"/>
   </p:sldIdLst>
   <p:sldSz cx="12191695" cy="6858000" type="screen4x3"/>
   <p:notesSz cx="6858000" cy="9144000"/>
@@ -4697,7 +4699,7 @@
                 </a:solidFill>
                 <a:latin typeface="Arial"/>
               </a:rPr>
-              <a:t>10 / 39</a:t>
+              <a:t>10 / 41</a:t>
             </a:r>
           </a:p>
         </p:txBody>
@@ -5800,7 +5802,7 @@
                 </a:solidFill>
                 <a:latin typeface="Arial"/>
               </a:rPr>
-              <a:t>11 / 39</a:t>
+              <a:t>11 / 41</a:t>
             </a:r>
           </a:p>
         </p:txBody>
@@ -6306,7 +6308,7 @@
                 </a:solidFill>
                 <a:latin typeface="Arial"/>
               </a:rPr>
-              <a:t>12 / 39</a:t>
+              <a:t>12 / 41</a:t>
             </a:r>
           </a:p>
         </p:txBody>
@@ -7808,7 +7810,7 @@
                 </a:solidFill>
                 <a:latin typeface="Arial"/>
               </a:rPr>
-              <a:t>13 / 39</a:t>
+              <a:t>13 / 41</a:t>
             </a:r>
           </a:p>
         </p:txBody>
@@ -8806,7 +8808,7 @@
                 </a:solidFill>
                 <a:latin typeface="Arial"/>
               </a:rPr>
-              <a:t>14 / 39</a:t>
+              <a:t>14 / 41</a:t>
             </a:r>
           </a:p>
         </p:txBody>
@@ -9984,7 +9986,7 @@
                 </a:solidFill>
                 <a:latin typeface="Arial"/>
               </a:rPr>
-              <a:t>15 / 39</a:t>
+              <a:t>15 / 41</a:t>
             </a:r>
           </a:p>
         </p:txBody>
@@ -10509,7 +10511,7 @@
                 </a:solidFill>
                 <a:latin typeface="Arial"/>
               </a:rPr>
-              <a:t>16 / 39</a:t>
+              <a:t>16 / 41</a:t>
             </a:r>
           </a:p>
         </p:txBody>
@@ -11766,7 +11768,7 @@
                 </a:solidFill>
                 <a:latin typeface="Arial"/>
               </a:rPr>
-              <a:t>17 / 39</a:t>
+              <a:t>17 / 41</a:t>
             </a:r>
           </a:p>
         </p:txBody>
@@ -13106,7 +13108,7 @@
                 </a:solidFill>
                 <a:latin typeface="Arial"/>
               </a:rPr>
-              <a:t>18 / 39</a:t>
+              <a:t>18 / 41</a:t>
             </a:r>
           </a:p>
         </p:txBody>
@@ -13924,7 +13926,7 @@
                 </a:solidFill>
                 <a:latin typeface="Arial"/>
               </a:rPr>
-              <a:t>19 / 39</a:t>
+              <a:t>19 / 41</a:t>
             </a:r>
           </a:p>
         </p:txBody>
@@ -15597,7 +15599,7 @@
                 </a:solidFill>
                 <a:latin typeface="Arial"/>
               </a:rPr>
-              <a:t>02 / 39</a:t>
+              <a:t>02 / 41</a:t>
             </a:r>
           </a:p>
         </p:txBody>
@@ -16006,7 +16008,7 @@
         </p:nvSpPr>
         <p:spPr>
           <a:xfrm>
-            <a:off x="768096" y="2548234"/>
+            <a:off x="768096" y="2434757"/>
             <a:ext cx="2197531" cy="314705"/>
           </a:xfrm>
           <a:prstGeom prst="rect">
@@ -16045,8 +16047,8 @@
         </p:nvSpPr>
         <p:spPr>
           <a:xfrm>
-            <a:off x="768096" y="2945236"/>
-            <a:ext cx="2197531" cy="2004608"/>
+            <a:off x="768096" y="2831759"/>
+            <a:ext cx="2197531" cy="2231562"/>
           </a:xfrm>
           <a:prstGeom prst="rect">
             <a:avLst/>
@@ -16136,7 +16138,25 @@
                 </a:solidFill>
                 <a:latin typeface="Microsoft YaHei"/>
               </a:rPr>
-              <a:t>：无信号、无总线、无新报文，只多一个比较器。</a:t>
+              <a:t>：无信号、无总线、无新报文，只多一个比较器 —— </a:t>
+            </a:r>
+            <a:r>
+              <a:rPr sz="1200" b="1">
+                <a:solidFill>
+                  <a:srgbClr val="20242C"/>
+                </a:solidFill>
+                <a:latin typeface="Microsoft YaHei"/>
+              </a:rPr>
+              <a:t>1,560 FF‑eq</a:t>
+            </a:r>
+            <a:r>
+              <a:rPr sz="1200" b="0">
+                <a:solidFill>
+                  <a:srgbClr val="20242C"/>
+                </a:solidFill>
+                <a:latin typeface="Microsoft YaHei"/>
+              </a:rPr>
+              <a:t>。</a:t>
             </a:r>
           </a:p>
         </p:txBody>
@@ -16195,7 +16215,7 @@
         </p:nvSpPr>
         <p:spPr>
           <a:xfrm>
-            <a:off x="3587419" y="2434757"/>
+            <a:off x="3587419" y="2519865"/>
             <a:ext cx="2197531" cy="314705"/>
           </a:xfrm>
           <a:prstGeom prst="rect">
@@ -16234,8 +16254,8 @@
         </p:nvSpPr>
         <p:spPr>
           <a:xfrm>
-            <a:off x="3587419" y="2831759"/>
-            <a:ext cx="2197531" cy="2231562"/>
+            <a:off x="3587419" y="2916867"/>
+            <a:ext cx="2197531" cy="2061347"/>
           </a:xfrm>
           <a:prstGeom prst="rect">
             <a:avLst/>
@@ -16254,7 +16274,7 @@
               </a:lnSpc>
             </a:pPr>
             <a:r>
-              <a:rPr sz="1200" b="1">
+              <a:rPr sz="1100" b="1">
                 <a:solidFill>
                   <a:srgbClr val="20242C"/>
                 </a:solidFill>
@@ -16263,7 +16283,7 @@
               <a:t>原本为空</a:t>
             </a:r>
             <a:r>
-              <a:rPr sz="1200" b="0">
+              <a:rPr sz="1100" b="0">
                 <a:solidFill>
                   <a:srgbClr val="20242C"/>
                 </a:solidFill>
@@ -16282,7 +16302,7 @@
               </a:spcBef>
             </a:pPr>
             <a:r>
-              <a:rPr sz="1200" b="1">
+              <a:rPr sz="1100" b="1">
                 <a:solidFill>
                   <a:srgbClr val="20242C"/>
                 </a:solidFill>
@@ -16291,7 +16311,7 @@
               <a:t>实现</a:t>
             </a:r>
             <a:r>
-              <a:rPr sz="1200" b="0">
+              <a:rPr sz="1100" b="0">
                 <a:solidFill>
                   <a:srgbClr val="20242C"/>
                 </a:solidFill>
@@ -16310,7 +16330,7 @@
               </a:spcBef>
             </a:pPr>
             <a:r>
-              <a:rPr sz="1200" b="1">
+              <a:rPr sz="1100" b="1">
                 <a:solidFill>
                   <a:srgbClr val="20242C"/>
                 </a:solidFill>
@@ -16319,13 +16339,31 @@
               <a:t>代价</a:t>
             </a:r>
             <a:r>
-              <a:rPr sz="1200" b="0">
-                <a:solidFill>
-                  <a:srgbClr val="20242C"/>
-                </a:solidFill>
-                <a:latin typeface="Microsoft YaHei"/>
-              </a:rPr>
-              <a:t>：每 (方向, VC) 一根相邻线，不是广播总线。</a:t>
+              <a:rPr sz="1100" b="0">
+                <a:solidFill>
+                  <a:srgbClr val="20242C"/>
+                </a:solidFill>
+                <a:latin typeface="Microsoft YaHei"/>
+              </a:rPr>
+              <a:t>：每 (方向, VC) 一根相邻线，不是广播总线 —— </a:t>
+            </a:r>
+            <a:r>
+              <a:rPr sz="1100" b="1">
+                <a:solidFill>
+                  <a:srgbClr val="20242C"/>
+                </a:solidFill>
+                <a:latin typeface="Microsoft YaHei"/>
+              </a:rPr>
+              <a:t>1,960 FF‑eq</a:t>
+            </a:r>
+            <a:r>
+              <a:rPr sz="1100" b="0">
+                <a:solidFill>
+                  <a:srgbClr val="20242C"/>
+                </a:solidFill>
+                <a:latin typeface="Microsoft YaHei"/>
+              </a:rPr>
+              <a:t>。</a:t>
             </a:r>
           </a:p>
         </p:txBody>
@@ -16384,7 +16422,7 @@
         </p:nvSpPr>
         <p:spPr>
           <a:xfrm>
-            <a:off x="6406743" y="2463126"/>
+            <a:off x="6406743" y="2557691"/>
             <a:ext cx="2197531" cy="314705"/>
           </a:xfrm>
           <a:prstGeom prst="rect">
@@ -16423,8 +16461,8 @@
         </p:nvSpPr>
         <p:spPr>
           <a:xfrm>
-            <a:off x="6406743" y="2860128"/>
-            <a:ext cx="2197531" cy="2174824"/>
+            <a:off x="6406743" y="2954693"/>
+            <a:ext cx="2197531" cy="1985695"/>
           </a:xfrm>
           <a:prstGeom prst="rect">
             <a:avLst/>
@@ -16443,7 +16481,7 @@
               </a:lnSpc>
             </a:pPr>
             <a:r>
-              <a:rPr sz="1050" b="1">
+              <a:rPr sz="950" b="1">
                 <a:solidFill>
                   <a:srgbClr val="20242C"/>
                 </a:solidFill>
@@ -16452,7 +16490,7 @@
               <a:t>原本为空</a:t>
             </a:r>
             <a:r>
-              <a:rPr sz="1050" b="0">
+              <a:rPr sz="950" b="0">
                 <a:solidFill>
                   <a:srgbClr val="20242C"/>
                 </a:solidFill>
@@ -16471,7 +16509,7 @@
               </a:spcBef>
             </a:pPr>
             <a:r>
-              <a:rPr sz="1050" b="1">
+              <a:rPr sz="950" b="1">
                 <a:solidFill>
                   <a:srgbClr val="20242C"/>
                 </a:solidFill>
@@ -16480,7 +16518,7 @@
               <a:t>实现</a:t>
             </a:r>
             <a:r>
-              <a:rPr sz="1050" b="0">
+              <a:rPr sz="950" b="0">
                 <a:solidFill>
                   <a:srgbClr val="20242C"/>
                 </a:solidFill>
@@ -16499,7 +16537,7 @@
               </a:spcBef>
             </a:pPr>
             <a:r>
-              <a:rPr sz="1050" b="1">
+              <a:rPr sz="950" b="1">
                 <a:solidFill>
                   <a:srgbClr val="20242C"/>
                 </a:solidFill>
@@ -16508,13 +16546,31 @@
               <a:t>代价</a:t>
             </a:r>
             <a:r>
-              <a:rPr sz="1050" b="0">
-                <a:solidFill>
-                  <a:srgbClr val="20242C"/>
-                </a:solidFill>
-                <a:latin typeface="Microsoft YaHei"/>
-              </a:rPr>
-              <a:t>：40 个 hop 各一个 6 bit 字，总线最宽的一类。</a:t>
+              <a:rPr sz="950" b="0">
+                <a:solidFill>
+                  <a:srgbClr val="20242C"/>
+                </a:solidFill>
+                <a:latin typeface="Microsoft YaHei"/>
+              </a:rPr>
+              <a:t>：40 个 hop 各一个 6 bit 字，总线最宽的一类 —— </a:t>
+            </a:r>
+            <a:r>
+              <a:rPr sz="950" b="1">
+                <a:solidFill>
+                  <a:srgbClr val="20242C"/>
+                </a:solidFill>
+                <a:latin typeface="Microsoft YaHei"/>
+              </a:rPr>
+              <a:t>21,480 FF‑eq</a:t>
+            </a:r>
+            <a:r>
+              <a:rPr sz="950" b="0">
+                <a:solidFill>
+                  <a:srgbClr val="20242C"/>
+                </a:solidFill>
+                <a:latin typeface="Microsoft YaHei"/>
+              </a:rPr>
+              <a:t>，全研究最贵。</a:t>
             </a:r>
           </a:p>
         </p:txBody>
@@ -16573,7 +16629,7 @@
         </p:nvSpPr>
         <p:spPr>
           <a:xfrm>
-            <a:off x="9226067" y="2562419"/>
+            <a:off x="9226067" y="2463126"/>
             <a:ext cx="2197531" cy="314705"/>
           </a:xfrm>
           <a:prstGeom prst="rect">
@@ -16612,8 +16668,8 @@
         </p:nvSpPr>
         <p:spPr>
           <a:xfrm>
-            <a:off x="9226067" y="2959421"/>
-            <a:ext cx="2197531" cy="1976239"/>
+            <a:off x="9226067" y="2860128"/>
+            <a:ext cx="2197531" cy="2174824"/>
           </a:xfrm>
           <a:prstGeom prst="rect">
             <a:avLst/>
@@ -16721,7 +16777,25 @@
                 </a:solidFill>
                 <a:latin typeface="Microsoft YaHei"/>
               </a:rPr>
-              <a:t>：10 bit / 16 拍，比 S1 的总线窄得多。</a:t>
+              <a:t>：10 bit / 16 拍，比 S1 的总线窄得多 —— </a:t>
+            </a:r>
+            <a:r>
+              <a:rPr sz="1050" b="1">
+                <a:solidFill>
+                  <a:srgbClr val="20242C"/>
+                </a:solidFill>
+                <a:latin typeface="Microsoft YaHei"/>
+              </a:rPr>
+              <a:t>4,440 FF‑eq</a:t>
+            </a:r>
+            <a:r>
+              <a:rPr sz="1050" b="0">
+                <a:solidFill>
+                  <a:srgbClr val="20242C"/>
+                </a:solidFill>
+                <a:latin typeface="Microsoft YaHei"/>
+              </a:rPr>
+              <a:t>，是 S22 的 1/3。</a:t>
             </a:r>
           </a:p>
         </p:txBody>
@@ -16843,7 +16917,7 @@
                 </a:solidFill>
                 <a:latin typeface="Arial"/>
               </a:rPr>
-              <a:t>20 / 39</a:t>
+              <a:t>20 / 41</a:t>
             </a:r>
           </a:p>
         </p:txBody>
@@ -17769,7 +17843,7 @@
                 </a:solidFill>
                 <a:latin typeface="Arial"/>
               </a:rPr>
-              <a:t>21 / 39</a:t>
+              <a:t>21 / 41</a:t>
             </a:r>
           </a:p>
         </p:txBody>
@@ -18437,7 +18511,7 @@
                 </a:solidFill>
                 <a:latin typeface="Microsoft YaHei"/>
               </a:rPr>
-              <a:t>（RCP 反馈）5.480 / 0.9316 / 1.547 —— 几乎免费，也几乎无效：不公平不在 hop 的份额分配，在每核自己上环口的仲裁，算出的 share 高于落后核能上环的速率。</a:t>
+              <a:t>（RCP 反馈）5.480 / 0.9316 / 1.547 —— 带宽几乎不亏，公平也几乎不动：不公平不在 hop 的份额分配，在每核自己上环口的仲裁，算出的 share 高于落后核能上环的速率。</a:t>
             </a:r>
           </a:p>
           <a:p>
@@ -18681,7 +18755,7 @@
                 </a:solidFill>
                 <a:latin typeface="Microsoft YaHei"/>
               </a:rPr>
-              <a:t>前沿仍是 S16 与 S22，但「闸门类要 16–40% 带宽换公平、让位类不用」已是跨四族的规律。</a:t>
+              <a:t>前沿仍是 S0 → S16（见 Pareto 页），但「闸门类要 16–40% 带宽换公平、让位类不用」已是跨四族的规律。</a:t>
             </a:r>
           </a:p>
         </p:txBody>
@@ -18720,7 +18794,7 @@
                 </a:solidFill>
                 <a:latin typeface="Arial"/>
               </a:rPr>
-              <a:t>22 / 39</a:t>
+              <a:t>22 / 41</a:t>
             </a:r>
           </a:p>
         </p:txBody>
@@ -19245,7 +19319,7 @@
                 </a:solidFill>
                 <a:latin typeface="Arial"/>
               </a:rPr>
-              <a:t>23 / 39</a:t>
+              <a:t>23 / 41</a:t>
             </a:r>
           </a:p>
         </p:txBody>
@@ -20124,7 +20198,7 @@
                 </a:solidFill>
                 <a:latin typeface="Arial"/>
               </a:rPr>
-              <a:t>24 / 39</a:t>
+              <a:t>24 / 41</a:t>
             </a:r>
           </a:p>
         </p:txBody>
@@ -20649,7 +20723,7 @@
                 </a:solidFill>
                 <a:latin typeface="Arial"/>
               </a:rPr>
-              <a:t>25 / 39</a:t>
+              <a:t>25 / 41</a:t>
             </a:r>
           </a:p>
         </p:txBody>
@@ -21767,7 +21841,7 @@
                 </a:solidFill>
                 <a:latin typeface="Arial"/>
               </a:rPr>
-              <a:t>26 / 39</a:t>
+              <a:t>26 / 41</a:t>
             </a:r>
           </a:p>
         </p:txBody>
@@ -22060,8 +22134,8 @@
         </p:blipFill>
         <p:spPr>
           <a:xfrm>
-            <a:off x="711272" y="1060704"/>
-            <a:ext cx="7529430" cy="4791456"/>
+            <a:off x="566927" y="1245246"/>
+            <a:ext cx="6949440" cy="4422370"/>
           </a:xfrm>
           <a:prstGeom prst="rect">
             <a:avLst/>
@@ -22076,8 +22150,8 @@
         </p:nvSpPr>
         <p:spPr>
           <a:xfrm>
-            <a:off x="566928" y="5961888"/>
-            <a:ext cx="7818120" cy="384048"/>
+            <a:off x="566928" y="5777345"/>
+            <a:ext cx="6949440" cy="384048"/>
           </a:xfrm>
           <a:prstGeom prst="rect">
             <a:avLst/>
@@ -22102,7 +22176,7 @@
                 </a:solidFill>
                 <a:latin typeface="Microsoft YaHei"/>
               </a:rPr>
-              <a:t>η =（总带宽 × 分箱 Jain）/ 理想控制器的同一乘积。理想 = 1.0。筛选轮 K = 2000，100 拍窗。</a:t>
+              <a:t>η =（总带宽 × 分箱 Jain）/ 理想控制器的同一乘积，理想 = 1.0；筛选轮 K = 2000，100 拍窗。横轴 FF‑eq = 等效触发器数，把新增的寄存器、比较器、加法器、乘法器与总线线宽都折算成「相当于多少个 D 触发器」。</a:t>
             </a:r>
           </a:p>
         </p:txBody>
@@ -22115,8 +22189,8 @@
         </p:nvSpPr>
         <p:spPr>
           <a:xfrm>
-            <a:off x="8769096" y="1060704"/>
-            <a:ext cx="2855671" cy="237744"/>
+            <a:off x="7900415" y="1060704"/>
+            <a:ext cx="3724351" cy="237744"/>
           </a:xfrm>
           <a:prstGeom prst="rect">
             <a:avLst/>
@@ -22154,8 +22228,8 @@
         </p:nvSpPr>
         <p:spPr>
           <a:xfrm>
-            <a:off x="8769096" y="1408176"/>
-            <a:ext cx="2855671" cy="1404583"/>
+            <a:off x="7900415" y="1408176"/>
+            <a:ext cx="3724351" cy="1570848"/>
           </a:xfrm>
           <a:prstGeom prst="rect">
             <a:avLst/>
@@ -22200,8 +22274,8 @@
         </p:nvSpPr>
         <p:spPr>
           <a:xfrm>
-            <a:off x="8951976" y="1591056"/>
-            <a:ext cx="2489911" cy="259080"/>
+            <a:off x="8083295" y="1606555"/>
+            <a:ext cx="3358591" cy="259080"/>
           </a:xfrm>
           <a:prstGeom prst="rect">
             <a:avLst/>
@@ -22226,7 +22300,7 @@
                 </a:solidFill>
                 <a:latin typeface="Microsoft YaHei"/>
               </a:rPr>
-              <a:t>横轴的 FF‑eq 是什么</a:t>
+              <a:t>严格前沿只剩两个点</a:t>
             </a:r>
           </a:p>
         </p:txBody>
@@ -22239,8 +22313,8 @@
         </p:nvSpPr>
         <p:spPr>
           <a:xfrm>
-            <a:off x="8951976" y="1932432"/>
-            <a:ext cx="2489911" cy="793089"/>
+            <a:off x="8083295" y="1947931"/>
+            <a:ext cx="3358591" cy="869289"/>
           </a:xfrm>
           <a:prstGeom prst="rect">
             <a:avLst/>
@@ -22259,22 +22333,86 @@
               </a:lnSpc>
             </a:pPr>
             <a:r>
-              <a:rPr sz="800" b="1">
-                <a:solidFill>
-                  <a:srgbClr val="20242C"/>
-                </a:solidFill>
-                <a:latin typeface="Microsoft YaHei"/>
-              </a:rPr>
-              <a:t>FF‑eq = 等效触发器数</a:t>
-            </a:r>
-            <a:r>
-              <a:rPr sz="800" b="0">
-                <a:solidFill>
-                  <a:srgbClr val="20242C"/>
-                </a:solidFill>
-                <a:latin typeface="Microsoft YaHei"/>
-              </a:rPr>
-              <a:t>（flip-flop equivalent）：把方案新增的寄存器、比较器、加法器、乘法器、总线线宽都折算成「相当于多少个 D 触发器」，得到一个可以横向比较的面积代价。S1 = 21,220 FF‑eq 就是这么算出来的。</a:t>
+              <a:rPr sz="1000" b="0">
+                <a:solidFill>
+                  <a:srgbClr val="20242C"/>
+                </a:solidFill>
+                <a:latin typeface="Microsoft YaHei"/>
+              </a:rPr>
+              <a:t>S0（0 FF‑eq，η 0.8894）→ </a:t>
+            </a:r>
+            <a:r>
+              <a:rPr sz="1000" b="1">
+                <a:solidFill>
+                  <a:srgbClr val="D20A2E"/>
+                </a:solidFill>
+                <a:latin typeface="Microsoft YaHei"/>
+              </a:rPr>
+              <a:t>S16</a:t>
+            </a:r>
+            <a:r>
+              <a:rPr sz="1000" b="0">
+                <a:solidFill>
+                  <a:srgbClr val="20242C"/>
+                </a:solidFill>
+                <a:latin typeface="Microsoft YaHei"/>
+              </a:rPr>
+              <a:t>（900 FF‑eq，η </a:t>
+            </a:r>
+            <a:r>
+              <a:rPr sz="1000" b="1">
+                <a:solidFill>
+                  <a:srgbClr val="20242C"/>
+                </a:solidFill>
+                <a:latin typeface="Microsoft YaHei"/>
+              </a:rPr>
+              <a:t>0.9395</a:t>
+            </a:r>
+            <a:r>
+              <a:rPr sz="1000" b="0">
+                <a:solidFill>
+                  <a:srgbClr val="20242C"/>
+                </a:solidFill>
+                <a:latin typeface="Microsoft YaHei"/>
+              </a:rPr>
+              <a:t>），</a:t>
+            </a:r>
+            <a:r>
+              <a:rPr sz="1000" b="1">
+                <a:solidFill>
+                  <a:srgbClr val="20242C"/>
+                </a:solidFill>
+                <a:latin typeface="Microsoft YaHei"/>
+              </a:rPr>
+              <a:t>比 S1 便宜 24 倍、η 高 0.174</a:t>
+            </a:r>
+            <a:r>
+              <a:rPr sz="1000" b="0">
+                <a:solidFill>
+                  <a:srgbClr val="20242C"/>
+                </a:solidFill>
+                <a:latin typeface="Microsoft YaHei"/>
+              </a:rPr>
+              <a:t>。</a:t>
+            </a:r>
+          </a:p>
+          <a:p>
+            <a:pPr algn="l">
+              <a:lnSpc>
+                <a:spcPct val="102000"/>
+              </a:lnSpc>
+              <a:spcBef>
+                <a:spcPts val="600"/>
+              </a:spcBef>
+            </a:pPr>
+            <a:r>
+              <a:rPr sz="1000" b="0">
+                <a:solidFill>
+                  <a:srgbClr val="20242C"/>
+                </a:solidFill>
+                <a:latin typeface="Microsoft YaHei"/>
+              </a:rPr>
+              <a:t>S22-stock（13,920，η 0.8883）是环仲裁备选；S19 / S20（5,840，η 0.8992）只作 requester 窗口控制的对照。</a:t>
             </a:r>
           </a:p>
         </p:txBody>
@@ -22287,8 +22425,8 @@
         </p:nvSpPr>
         <p:spPr>
           <a:xfrm>
-            <a:off x="8769096" y="2959063"/>
-            <a:ext cx="2855671" cy="1845237"/>
+            <a:off x="7900415" y="3125328"/>
+            <a:ext cx="3724351" cy="2170627"/>
           </a:xfrm>
           <a:prstGeom prst="rect">
             <a:avLst/>
@@ -22333,8 +22471,8 @@
         </p:nvSpPr>
         <p:spPr>
           <a:xfrm>
-            <a:off x="8951976" y="3141943"/>
-            <a:ext cx="2489911" cy="259080"/>
+            <a:off x="8083295" y="3334902"/>
+            <a:ext cx="3358591" cy="259080"/>
           </a:xfrm>
           <a:prstGeom prst="rect">
             <a:avLst/>
@@ -22359,7 +22497,7 @@
                 </a:solidFill>
                 <a:latin typeface="Microsoft YaHei"/>
               </a:rPr>
-              <a:t>严格前沿只剩两个点</a:t>
+              <a:t>补齐的四类：一个都没进前沿</a:t>
             </a:r>
           </a:p>
         </p:txBody>
@@ -22372,8 +22510,8 @@
         </p:nvSpPr>
         <p:spPr>
           <a:xfrm>
-            <a:off x="8951976" y="3483319"/>
-            <a:ext cx="2489911" cy="1399397"/>
+            <a:off x="8083295" y="3676278"/>
+            <a:ext cx="3358591" cy="1446679"/>
           </a:xfrm>
           <a:prstGeom prst="rect">
             <a:avLst/>
@@ -22392,67 +22530,49 @@
               </a:lnSpc>
             </a:pPr>
             <a:r>
-              <a:rPr sz="800" b="0">
-                <a:solidFill>
-                  <a:srgbClr val="20242C"/>
-                </a:solidFill>
-                <a:latin typeface="Microsoft YaHei"/>
-              </a:rPr>
-              <a:t>S0（0 FF‑eq，η 0.8894）→ </a:t>
-            </a:r>
-            <a:r>
-              <a:rPr sz="800" b="1">
-                <a:solidFill>
-                  <a:srgbClr val="D20A2E"/>
-                </a:solidFill>
-                <a:latin typeface="Microsoft YaHei"/>
-              </a:rPr>
-              <a:t>S16</a:t>
-            </a:r>
-            <a:r>
-              <a:rPr sz="800" b="0">
-                <a:solidFill>
-                  <a:srgbClr val="20242C"/>
-                </a:solidFill>
-                <a:latin typeface="Microsoft YaHei"/>
-              </a:rPr>
-              <a:t>（900 FF‑eq，η </a:t>
-            </a:r>
-            <a:r>
-              <a:rPr sz="800" b="1">
-                <a:solidFill>
-                  <a:srgbClr val="20242C"/>
-                </a:solidFill>
-                <a:latin typeface="Microsoft YaHei"/>
-              </a:rPr>
-              <a:t>0.9395</a:t>
-            </a:r>
-            <a:r>
-              <a:rPr sz="800" b="0">
-                <a:solidFill>
-                  <a:srgbClr val="20242C"/>
-                </a:solidFill>
-                <a:latin typeface="Microsoft YaHei"/>
-              </a:rPr>
-              <a:t>）。900 FF‑eq 买到离理想控制器最近的位置，</a:t>
-            </a:r>
-            <a:r>
-              <a:rPr sz="800" b="1">
-                <a:solidFill>
-                  <a:srgbClr val="20242C"/>
-                </a:solidFill>
-                <a:latin typeface="Microsoft YaHei"/>
-              </a:rPr>
-              <a:t>比 S1 便宜 24 倍、η 高 0.174</a:t>
-            </a:r>
-            <a:r>
-              <a:rPr sz="800" b="0">
-                <a:solidFill>
-                  <a:srgbClr val="20242C"/>
-                </a:solidFill>
-                <a:latin typeface="Microsoft YaHei"/>
-              </a:rPr>
-              <a:t>。</a:t>
+              <a:rPr sz="950" b="0">
+                <a:solidFill>
+                  <a:srgbClr val="20242C"/>
+                </a:solidFill>
+                <a:latin typeface="Microsoft YaHei"/>
+              </a:rPr>
+              <a:t>S26 路由 1,560 / η 0.8724；S27 背压 1,960 / </a:t>
+            </a:r>
+            <a:r>
+              <a:rPr sz="950" b="1">
+                <a:solidFill>
+                  <a:srgbClr val="20242C"/>
+                </a:solidFill>
+                <a:latin typeface="Microsoft YaHei"/>
+              </a:rPr>
+              <a:t>0.5319</a:t>
+            </a:r>
+            <a:r>
+              <a:rPr sz="950" b="0">
+                <a:solidFill>
+                  <a:srgbClr val="20242C"/>
+                </a:solidFill>
+                <a:latin typeface="Microsoft YaHei"/>
+              </a:rPr>
+              <a:t>；S29 调度 4,440 / 0.8659；S28S 12,680 / </a:t>
+            </a:r>
+            <a:r>
+              <a:rPr sz="950" b="1">
+                <a:solidFill>
+                  <a:srgbClr val="20242C"/>
+                </a:solidFill>
+                <a:latin typeface="Microsoft YaHei"/>
+              </a:rPr>
+              <a:t>0.5861</a:t>
+            </a:r>
+            <a:r>
+              <a:rPr sz="950" b="0">
+                <a:solidFill>
+                  <a:srgbClr val="20242C"/>
+                </a:solidFill>
+                <a:latin typeface="Microsoft YaHei"/>
+              </a:rPr>
+              <a:t>；S28 速率 21,480 / 0.8405。</a:t>
             </a:r>
           </a:p>
           <a:p>
@@ -22465,13 +22585,31 @@
               </a:spcBef>
             </a:pPr>
             <a:r>
-              <a:rPr sz="800" b="0">
-                <a:solidFill>
-                  <a:srgbClr val="20242C"/>
-                </a:solidFill>
-                <a:latin typeface="Microsoft YaHei"/>
-              </a:rPr>
-              <a:t>S22-stock（13,920，η 0.8883）保留为事务层不可改时的环仲裁备选；S19 / S20（5,840，η 0.8992）只作为 requester 窗口控制的研究对照。</a:t>
+              <a:rPr sz="950" b="0">
+                <a:solidFill>
+                  <a:srgbClr val="20242C"/>
+                </a:solidFill>
+                <a:latin typeface="Microsoft YaHei"/>
+              </a:rPr>
+              <a:t>五个点的 η </a:t>
+            </a:r>
+            <a:r>
+              <a:rPr sz="950" b="1">
+                <a:solidFill>
+                  <a:srgbClr val="20242C"/>
+                </a:solidFill>
+                <a:latin typeface="Microsoft YaHei"/>
+              </a:rPr>
+              <a:t>全部低于 S0 的 0.8894</a:t>
+            </a:r>
+            <a:r>
+              <a:rPr sz="950" b="0">
+                <a:solidFill>
+                  <a:srgbClr val="20242C"/>
+                </a:solidFill>
+                <a:latin typeface="Microsoft YaHei"/>
+              </a:rPr>
+              <a:t> —— 不是被 S16 挤掉，是连「什么都不做」都没超过。前沿与补齐之前完全一致。</a:t>
             </a:r>
           </a:p>
           <a:p>
@@ -22484,13 +22622,13 @@
               </a:spcBef>
             </a:pPr>
             <a:r>
-              <a:rPr sz="800" b="0">
-                <a:solidFill>
-                  <a:srgbClr val="20242C"/>
-                </a:solidFill>
-                <a:latin typeface="Microsoft YaHei"/>
-              </a:rPr>
-              <a:t>I-tag t_inj=2 / hold=2 只是 S0 参数重调，不再作为独立方案计成本或入选。</a:t>
+              <a:rPr sz="950" b="0">
+                <a:solidFill>
+                  <a:srgbClr val="20242C"/>
+                </a:solidFill>
+                <a:latin typeface="Microsoft YaHei"/>
+              </a:rPr>
+              <a:t>其中 S29 值得记住：4,440 FF‑eq 是 S22-stock 的 1/3、S1 的 1/5，η 只差 S22-stock 0.022（详见 S29 两页）。</a:t>
             </a:r>
           </a:p>
         </p:txBody>
@@ -22503,8 +22641,8 @@
         </p:nvSpPr>
         <p:spPr>
           <a:xfrm>
-            <a:off x="8769096" y="4950605"/>
-            <a:ext cx="2855671" cy="1377042"/>
+            <a:off x="7900415" y="5442260"/>
+            <a:ext cx="3724351" cy="885387"/>
           </a:xfrm>
           <a:prstGeom prst="rect">
             <a:avLst/>
@@ -22547,8 +22685,8 @@
         </p:nvSpPr>
         <p:spPr>
           <a:xfrm>
-            <a:off x="9079992" y="5042045"/>
-            <a:ext cx="2233879" cy="1194162"/>
+            <a:off x="8211311" y="5533700"/>
+            <a:ext cx="3102559" cy="702507"/>
           </a:xfrm>
           <a:prstGeom prst="rect">
             <a:avLst/>
@@ -22573,7 +22711,7 @@
                 </a:solidFill>
                 <a:latin typeface="Microsoft YaHei"/>
               </a:rPr>
-              <a:t>判据是「离理想控制器有多近」，不是任何一条固定验收线：S16 把 η 从 0.8894 推到 0.9395，走完了 S0 与理想之间 45% 的距离。</a:t>
+              <a:t>判据是「离理想控制器有多近」：S16 把 η 从 0.8894 推到 0.9395，走完 S0 与理想之间 45% 的距离。</a:t>
             </a:r>
           </a:p>
         </p:txBody>
@@ -22612,7 +22750,7 @@
                 </a:solidFill>
                 <a:latin typeface="Arial"/>
               </a:rPr>
-              <a:t>27 / 39</a:t>
+              <a:t>27 / 41</a:t>
             </a:r>
           </a:p>
         </p:txBody>
@@ -22905,8 +23043,8 @@
         </p:blipFill>
         <p:spPr>
           <a:xfrm>
-            <a:off x="711272" y="1060704"/>
-            <a:ext cx="7529430" cy="4791456"/>
+            <a:off x="566927" y="1245246"/>
+            <a:ext cx="6949440" cy="4422370"/>
           </a:xfrm>
           <a:prstGeom prst="rect">
             <a:avLst/>
@@ -22921,8 +23059,8 @@
         </p:nvSpPr>
         <p:spPr>
           <a:xfrm>
-            <a:off x="566928" y="5961888"/>
-            <a:ext cx="7818120" cy="384048"/>
+            <a:off x="566928" y="5777345"/>
+            <a:ext cx="6949440" cy="384048"/>
           </a:xfrm>
           <a:prstGeom prst="rect">
             <a:avLst/>
@@ -22978,8 +23116,8 @@
         </p:nvSpPr>
         <p:spPr>
           <a:xfrm>
-            <a:off x="8769096" y="1060704"/>
-            <a:ext cx="2855671" cy="237744"/>
+            <a:off x="7900415" y="1060704"/>
+            <a:ext cx="3724351" cy="237744"/>
           </a:xfrm>
           <a:prstGeom prst="rect">
             <a:avLst/>
@@ -22998,7 +23136,7 @@
               </a:lnSpc>
             </a:pPr>
             <a:r>
-              <a:rPr sz="800" b="1">
+              <a:rPr sz="1050" b="1">
                 <a:solidFill>
                   <a:srgbClr val="D20A2E"/>
                 </a:solidFill>
@@ -23017,8 +23155,8 @@
         </p:nvSpPr>
         <p:spPr>
           <a:xfrm>
-            <a:off x="8769096" y="1408176"/>
-            <a:ext cx="2855671" cy="1488172"/>
+            <a:off x="7900415" y="1408176"/>
+            <a:ext cx="3724351" cy="944431"/>
           </a:xfrm>
           <a:prstGeom prst="rect">
             <a:avLst/>
@@ -23063,8 +23201,8 @@
         </p:nvSpPr>
         <p:spPr>
           <a:xfrm>
-            <a:off x="8951976" y="1641143"/>
-            <a:ext cx="2489911" cy="259080"/>
+            <a:off x="8083295" y="1591056"/>
+            <a:ext cx="3358591" cy="259080"/>
           </a:xfrm>
           <a:prstGeom prst="rect">
             <a:avLst/>
@@ -23102,8 +23240,8 @@
         </p:nvSpPr>
         <p:spPr>
           <a:xfrm>
-            <a:off x="8951976" y="1982519"/>
-            <a:ext cx="2489911" cy="717438"/>
+            <a:off x="8083295" y="1932432"/>
+            <a:ext cx="3358591" cy="339181"/>
           </a:xfrm>
           <a:prstGeom prst="rect">
             <a:avLst/>
@@ -23122,16 +23260,16 @@
               </a:lnSpc>
             </a:pPr>
             <a:r>
-              <a:rPr sz="900" b="0">
-                <a:solidFill>
-                  <a:srgbClr val="20242C"/>
-                </a:solidFill>
-                <a:latin typeface="Microsoft YaHei"/>
-              </a:rPr>
-              <a:t>十个核全部打同一个两节点热簇，谁快谁慢由「离热簇几跳」直接决定，拥塞点也不在注入侧。这种流量下的瞬时均衡度既不是设计目标、也不反映控制器好坏 —— 这一页只考察</a:t>
-            </a:r>
-            <a:r>
-              <a:rPr sz="900" b="1">
+              <a:rPr sz="800" b="0">
+                <a:solidFill>
+                  <a:srgbClr val="20242C"/>
+                </a:solidFill>
+                <a:latin typeface="Microsoft YaHei"/>
+              </a:rPr>
+              <a:t>十个核全部打同一个两节点热簇，谁快谁慢由「离热簇几跳」直接决定，拥塞点也不在注入侧 —— 这一页只考察</a:t>
+            </a:r>
+            <a:r>
+              <a:rPr sz="800" b="1">
                 <a:solidFill>
                   <a:srgbClr val="20242C"/>
                 </a:solidFill>
@@ -23140,7 +23278,7 @@
               <a:t>总带宽是否被换掉</a:t>
             </a:r>
             <a:r>
-              <a:rPr sz="900" b="0">
+              <a:rPr sz="800" b="0">
                 <a:solidFill>
                   <a:srgbClr val="20242C"/>
                 </a:solidFill>
@@ -23159,8 +23297,8 @@
         </p:nvSpPr>
         <p:spPr>
           <a:xfrm>
-            <a:off x="8769096" y="3042652"/>
-            <a:ext cx="2855671" cy="2056383"/>
+            <a:off x="7900415" y="2498911"/>
+            <a:ext cx="3724351" cy="1405665"/>
           </a:xfrm>
           <a:prstGeom prst="rect">
             <a:avLst/>
@@ -23205,8 +23343,8 @@
         </p:nvSpPr>
         <p:spPr>
           <a:xfrm>
-            <a:off x="8951976" y="3256845"/>
-            <a:ext cx="2489911" cy="259080"/>
+            <a:off x="8083295" y="2681791"/>
+            <a:ext cx="3358591" cy="259080"/>
           </a:xfrm>
           <a:prstGeom prst="rect">
             <a:avLst/>
@@ -23244,8 +23382,8 @@
         </p:nvSpPr>
         <p:spPr>
           <a:xfrm>
-            <a:off x="8951976" y="3598221"/>
-            <a:ext cx="2489911" cy="1323197"/>
+            <a:off x="8083295" y="3023167"/>
+            <a:ext cx="3358591" cy="869289"/>
           </a:xfrm>
           <a:prstGeom prst="rect">
             <a:avLst/>
@@ -23270,7 +23408,7 @@
                 </a:solidFill>
                 <a:latin typeface="Microsoft YaHei"/>
               </a:rPr>
-              <a:t>固定实验配置下，S0 本身就已经拿到 R* 的 </a:t>
+              <a:t>S0 本身就已经拿到 R* 的 </a:t>
             </a:r>
             <a:r>
               <a:rPr sz="800" b="1">
@@ -23288,7 +23426,7 @@
                 </a:solidFill>
                 <a:latin typeface="Microsoft YaHei"/>
               </a:rPr>
-              <a:t>。在此之上 </a:t>
+              <a:t>；在此之上 </a:t>
             </a:r>
             <a:r>
               <a:rPr sz="800" b="1">
@@ -23361,7 +23499,7 @@
                 </a:solidFill>
                 <a:latin typeface="Microsoft YaHei"/>
               </a:rPr>
-              <a:t>更贵的方案全部更差：S19 / S20 = 99.08%，S22-stock = 98.75%，S1 = 98.35%。原因是 hot 的拥塞在</a:t>
+              <a:t>更贵的方案全部更差：S19 / S20 = 99.08%，S22-stock = 98.75%，S1 = 98.35%。hot 的拥塞在</a:t>
             </a:r>
             <a:r>
               <a:rPr sz="800" b="1">
@@ -23379,7 +23517,7 @@
                 </a:solidFill>
                 <a:latin typeface="Microsoft YaHei"/>
               </a:rPr>
-              <a:t>，而 S16 是唯一把控制点放在拥塞发生地的方案；源端之间的公平化在这里毫无帮助，还因让位 / 门控白扔槽位而亏带宽。</a:t>
+              <a:t>，而 S16 是唯一把控制点放在那里的方案。</a:t>
             </a:r>
           </a:p>
         </p:txBody>
@@ -23392,8 +23530,187 @@
         </p:nvSpPr>
         <p:spPr>
           <a:xfrm>
-            <a:off x="8769096" y="5245340"/>
-            <a:ext cx="2855671" cy="1082307"/>
+            <a:off x="7900415" y="4050881"/>
+            <a:ext cx="3724351" cy="1537447"/>
+          </a:xfrm>
+          <a:prstGeom prst="rect">
+            <a:avLst/>
+          </a:prstGeom>
+          <a:solidFill>
+            <a:srgbClr val="EDF2F7"/>
+          </a:solidFill>
+          <a:ln w="12700">
+            <a:solidFill>
+              <a:srgbClr val="DCE3EA"/>
+            </a:solidFill>
+          </a:ln>
+          <a:effectLst/>
+        </p:spPr>
+        <p:style>
+          <a:lnRef idx="1">
+            <a:schemeClr val="accent1"/>
+          </a:lnRef>
+          <a:fillRef idx="3">
+            <a:schemeClr val="accent1"/>
+          </a:fillRef>
+          <a:effectRef idx="2">
+            <a:schemeClr val="accent1"/>
+          </a:effectRef>
+          <a:fontRef idx="minor">
+            <a:schemeClr val="lt1"/>
+          </a:fontRef>
+        </p:style>
+        <p:txBody>
+          <a:bodyPr rtlCol="0" anchor="ctr" wrap="square"/>
+          <a:lstStyle/>
+          <a:p>
+            <a:pPr algn="ctr"/>
+          </a:p>
+        </p:txBody>
+      </p:sp>
+      <p:sp>
+        <p:nvSpPr>
+          <p:cNvPr id="18" name="TextBox 17"/>
+          <p:cNvSpPr txBox="1"/>
+          <p:nvPr/>
+        </p:nvSpPr>
+        <p:spPr>
+          <a:xfrm>
+            <a:off x="8083295" y="4233761"/>
+            <a:ext cx="3358591" cy="259080"/>
+          </a:xfrm>
+          <a:prstGeom prst="rect">
+            <a:avLst/>
+          </a:prstGeom>
+          <a:noFill/>
+        </p:spPr>
+        <p:txBody>
+          <a:bodyPr wrap="square" anchor="t" lIns="0" rIns="0" tIns="0" bIns="0">
+            <a:spAutoFit/>
+          </a:bodyPr>
+          <a:lstStyle/>
+          <a:p>
+            <a:pPr algn="l">
+              <a:lnSpc>
+                <a:spcPct val="100000"/>
+              </a:lnSpc>
+            </a:pPr>
+            <a:r>
+              <a:rPr sz="1200" b="1">
+                <a:solidFill>
+                  <a:srgbClr val="20242C"/>
+                </a:solidFill>
+                <a:latin typeface="Microsoft YaHei"/>
+              </a:rPr>
+              <a:t>补齐四类在这里的表现</a:t>
+            </a:r>
+          </a:p>
+        </p:txBody>
+      </p:sp>
+      <p:sp>
+        <p:nvSpPr>
+          <p:cNvPr id="19" name="TextBox 18"/>
+          <p:cNvSpPr txBox="1"/>
+          <p:nvPr/>
+        </p:nvSpPr>
+        <p:spPr>
+          <a:xfrm>
+            <a:off x="8083295" y="4575137"/>
+            <a:ext cx="3358591" cy="869289"/>
+          </a:xfrm>
+          <a:prstGeom prst="rect">
+            <a:avLst/>
+          </a:prstGeom>
+          <a:noFill/>
+        </p:spPr>
+        <p:txBody>
+          <a:bodyPr wrap="square" anchor="t" lIns="0" rIns="0" tIns="0" bIns="0">
+            <a:spAutoFit/>
+          </a:bodyPr>
+          <a:lstStyle/>
+          <a:p>
+            <a:pPr algn="l">
+              <a:lnSpc>
+                <a:spcPct val="102000"/>
+              </a:lnSpc>
+            </a:pPr>
+            <a:r>
+              <a:rPr sz="800" b="0">
+                <a:solidFill>
+                  <a:srgbClr val="20242C"/>
+                </a:solidFill>
+                <a:latin typeface="Microsoft YaHei"/>
+              </a:rPr>
+              <a:t>S29 = </a:t>
+            </a:r>
+            <a:r>
+              <a:rPr sz="800" b="1">
+                <a:solidFill>
+                  <a:srgbClr val="20242C"/>
+                </a:solidFill>
+                <a:latin typeface="Microsoft YaHei"/>
+              </a:rPr>
+              <a:t>98.66%</a:t>
+            </a:r>
+            <a:r>
+              <a:rPr sz="800" b="0">
+                <a:solidFill>
+                  <a:srgbClr val="20242C"/>
+                </a:solidFill>
+                <a:latin typeface="Microsoft YaHei"/>
+              </a:rPr>
+              <a:t>（4,440 FF‑eq），与 S22-stock 的 98.75% 只差 0.09 个百分点，硬件是它的 1/3；S28S = 96.39%，S28 = 94.66%，S26 = 93.34%，S27 = </a:t>
+            </a:r>
+            <a:r>
+              <a:rPr sz="800" b="1">
+                <a:solidFill>
+                  <a:srgbClr val="20242C"/>
+                </a:solidFill>
+                <a:latin typeface="Microsoft YaHei"/>
+              </a:rPr>
+              <a:t>72.23%</a:t>
+            </a:r>
+            <a:r>
+              <a:rPr sz="800" b="0">
+                <a:solidFill>
+                  <a:srgbClr val="20242C"/>
+                </a:solidFill>
+                <a:latin typeface="Microsoft YaHei"/>
+              </a:rPr>
+              <a:t>。</a:t>
+            </a:r>
+          </a:p>
+          <a:p>
+            <a:pPr algn="l">
+              <a:lnSpc>
+                <a:spcPct val="102000"/>
+              </a:lnSpc>
+              <a:spcBef>
+                <a:spcPts val="600"/>
+              </a:spcBef>
+            </a:pPr>
+            <a:r>
+              <a:rPr sz="800" b="0">
+                <a:solidFill>
+                  <a:srgbClr val="20242C"/>
+                </a:solidFill>
+                <a:latin typeface="Microsoft YaHei"/>
+              </a:rPr>
+              <a:t>换 pattern 也没有换前沿，仍是 S0 → S16；但「只动环仲裁」这一支上，最便宜的点由 S22-stock 变成了 S29。</a:t>
+            </a:r>
+          </a:p>
+        </p:txBody>
+      </p:sp>
+      <p:sp>
+        <p:nvSpPr>
+          <p:cNvPr id="20" name="Rectangle 19"/>
+          <p:cNvSpPr/>
+          <p:nvPr/>
+        </p:nvSpPr>
+        <p:spPr>
+          <a:xfrm>
+            <a:off x="7900415" y="5734632"/>
+            <a:ext cx="3724351" cy="593015"/>
           </a:xfrm>
           <a:prstGeom prst="rect">
             <a:avLst/>
@@ -23430,14 +23747,14 @@
       </p:sp>
       <p:sp>
         <p:nvSpPr>
-          <p:cNvPr id="18" name="TextBox 17"/>
-          <p:cNvSpPr txBox="1"/>
-          <p:nvPr/>
-        </p:nvSpPr>
-        <p:spPr>
-          <a:xfrm>
-            <a:off x="9079992" y="5336780"/>
-            <a:ext cx="2233879" cy="899427"/>
+          <p:cNvPr id="21" name="TextBox 20"/>
+          <p:cNvSpPr txBox="1"/>
+          <p:nvPr/>
+        </p:nvSpPr>
+        <p:spPr>
+          <a:xfrm>
+            <a:off x="8211311" y="5826072"/>
+            <a:ext cx="3102559" cy="410135"/>
           </a:xfrm>
           <a:prstGeom prst="rect">
             <a:avLst/>
@@ -23456,7 +23773,7 @@
               </a:lnSpc>
             </a:pPr>
             <a:r>
-              <a:rPr sz="1200" b="0">
+              <a:rPr sz="1050" b="0">
                 <a:solidFill>
                   <a:srgbClr val="FFFFFF"/>
                 </a:solidFill>
@@ -23469,7 +23786,7 @@
       </p:sp>
       <p:sp>
         <p:nvSpPr>
-          <p:cNvPr id="19" name="TextBox 18"/>
+          <p:cNvPr id="22" name="TextBox 21"/>
           <p:cNvSpPr txBox="1"/>
           <p:nvPr/>
         </p:nvSpPr>
@@ -23501,7 +23818,7 @@
                 </a:solidFill>
                 <a:latin typeface="Arial"/>
               </a:rPr>
-              <a:t>28 / 39</a:t>
+              <a:t>28 / 41</a:t>
             </a:r>
           </a:p>
         </p:txBody>
@@ -23846,7 +24163,7 @@
                 </a:solidFill>
                 <a:latin typeface="Microsoft YaHei"/>
               </a:rPr>
-              <a:t>两个落地候选、两个研究对照：机制示意 + 与 S0 / S1 的同口径实测。</a:t>
+              <a:t>三个落地候选、两个研究对照：机制示意 + 与 S0 / S1 的同口径实测。</a:t>
             </a:r>
           </a:p>
         </p:txBody>
@@ -23968,7 +24285,7 @@
                 </a:solidFill>
                 <a:latin typeface="Microsoft YaHei"/>
               </a:rPr>
-              <a:t>S16 是主方案，S22 是事务层不可改时的环仲裁备选；S19 / S20 用于验证 requester 动态窗口的边界，不进入最终架构建议。</a:t>
+              <a:t>S16 是主方案；事务层不可改时走环仲裁分支，其中 S22 效果最好、S29 便宜 3.1 倍；S19 / S20 只用于验证 requester 动态窗口的边界。</a:t>
             </a:r>
           </a:p>
         </p:txBody>
@@ -24007,7 +24324,7 @@
                 </a:solidFill>
                 <a:latin typeface="Arial"/>
               </a:rPr>
-              <a:t>29 / 39</a:t>
+              <a:t>29 / 41</a:t>
             </a:r>
           </a:p>
         </p:txBody>
@@ -24513,7 +24830,7 @@
                 </a:solidFill>
                 <a:latin typeface="Arial"/>
               </a:rPr>
-              <a:t>03 / 39</a:t>
+              <a:t>03 / 41</a:t>
             </a:r>
           </a:p>
         </p:txBody>
@@ -25404,7 +25721,7 @@
                 </a:solidFill>
                 <a:latin typeface="Arial"/>
               </a:rPr>
-              <a:t>30 / 39</a:t>
+              <a:t>30 / 41</a:t>
             </a:r>
           </a:p>
         </p:txBody>
@@ -26421,7 +26738,7 @@
                 </a:solidFill>
                 <a:latin typeface="Arial"/>
               </a:rPr>
-              <a:t>31 / 39</a:t>
+              <a:t>31 / 41</a:t>
             </a:r>
           </a:p>
         </p:txBody>
@@ -27234,7 +27551,7 @@
                 </a:solidFill>
                 <a:latin typeface="Arial"/>
               </a:rPr>
-              <a:t>32 / 39</a:t>
+              <a:t>32 / 41</a:t>
             </a:r>
           </a:p>
         </p:txBody>
@@ -28216,7 +28533,7 @@
                 </a:solidFill>
                 <a:latin typeface="Arial"/>
               </a:rPr>
-              <a:t>33 / 39</a:t>
+              <a:t>33 / 41</a:t>
             </a:r>
           </a:p>
         </p:txBody>
@@ -29030,7 +29347,7 @@
                 </a:solidFill>
                 <a:latin typeface="Arial"/>
               </a:rPr>
-              <a:t>34 / 39</a:t>
+              <a:t>34 / 41</a:t>
             </a:r>
           </a:p>
         </p:txBody>
@@ -30056,7 +30373,7 @@
                 </a:solidFill>
                 <a:latin typeface="Arial"/>
               </a:rPr>
-              <a:t>35 / 39</a:t>
+              <a:t>35 / 41</a:t>
             </a:r>
           </a:p>
         </p:txBody>
@@ -30131,8 +30448,8 @@
         </p:nvSpPr>
         <p:spPr>
           <a:xfrm>
-            <a:off x="10143439" y="274320"/>
-            <a:ext cx="182880" cy="182880"/>
+            <a:off x="566928" y="301752"/>
+            <a:ext cx="137160" cy="137160"/>
           </a:xfrm>
           <a:prstGeom prst="rect">
             <a:avLst/>
@@ -30175,8 +30492,8 @@
         </p:nvSpPr>
         <p:spPr>
           <a:xfrm>
-            <a:off x="10399471" y="246888"/>
-            <a:ext cx="1225296" cy="256032"/>
+            <a:off x="804672" y="265176"/>
+            <a:ext cx="9229039" cy="237744"/>
           </a:xfrm>
           <a:prstGeom prst="rect">
             <a:avLst/>
@@ -30195,36 +30512,36 @@
               </a:lnSpc>
             </a:pPr>
             <a:r>
-              <a:rPr sz="1300" b="1">
-                <a:solidFill>
-                  <a:srgbClr val="20242C"/>
-                </a:solidFill>
-                <a:latin typeface="Arial"/>
-              </a:rPr>
-              <a:t>HUAWEI</a:t>
-            </a:r>
-          </a:p>
-        </p:txBody>
-      </p:sp>
-      <p:sp>
-        <p:nvSpPr>
-          <p:cNvPr id="5" name="Oval 4"/>
+              <a:rPr sz="1150" b="1">
+                <a:solidFill>
+                  <a:srgbClr val="667080"/>
+                </a:solidFill>
+                <a:latin typeface="Microsoft YaHei"/>
+              </a:rPr>
+              <a:t>S29 日历触发的限域让路（4,440 FF‑eq） · 调度型 / 无拥塞信号</a:t>
+            </a:r>
+          </a:p>
+        </p:txBody>
+      </p:sp>
+      <p:sp>
+        <p:nvSpPr>
+          <p:cNvPr id="5" name="Rectangle 4"/>
           <p:cNvSpPr/>
           <p:nvPr/>
         </p:nvSpPr>
         <p:spPr>
           <a:xfrm>
-            <a:off x="566928" y="1883664"/>
-            <a:ext cx="896112" cy="896112"/>
-          </a:xfrm>
-          <a:prstGeom prst="ellipse">
-            <a:avLst/>
-          </a:prstGeom>
-          <a:noFill/>
-          <a:ln w="17780">
-            <a:solidFill>
-              <a:srgbClr val="DCE3EA"/>
-            </a:solidFill>
+            <a:off x="566928" y="640080"/>
+            <a:ext cx="11057839" cy="10058"/>
+          </a:xfrm>
+          <a:prstGeom prst="rect">
+            <a:avLst/>
+          </a:prstGeom>
+          <a:solidFill>
+            <a:srgbClr val="DCE3EA"/>
+          </a:solidFill>
+          <a:ln>
+            <a:noFill/>
           </a:ln>
           <a:effectLst/>
         </p:spPr>
@@ -30252,170 +30569,14 @@
       </p:sp>
       <p:sp>
         <p:nvSpPr>
-          <p:cNvPr id="6" name="TextBox 5"/>
-          <p:cNvSpPr txBox="1"/>
-          <p:nvPr/>
-        </p:nvSpPr>
-        <p:spPr>
-          <a:xfrm>
-            <a:off x="566928" y="2176272"/>
-            <a:ext cx="896112" cy="365760"/>
-          </a:xfrm>
-          <a:prstGeom prst="rect">
-            <a:avLst/>
-          </a:prstGeom>
-          <a:noFill/>
-        </p:spPr>
-        <p:txBody>
-          <a:bodyPr wrap="square" anchor="t" lIns="0" rIns="0" tIns="0" bIns="0">
-            <a:spAutoFit/>
-          </a:bodyPr>
-          <a:lstStyle/>
-          <a:p>
-            <a:pPr algn="ctr">
-              <a:lnSpc>
-                <a:spcPct val="100000"/>
-              </a:lnSpc>
-            </a:pPr>
-            <a:r>
-              <a:rPr sz="2100" b="1">
-                <a:solidFill>
-                  <a:srgbClr val="D20A2E"/>
-                </a:solidFill>
-                <a:latin typeface="Arial"/>
-              </a:rPr>
-              <a:t>08</a:t>
-            </a:r>
-          </a:p>
-        </p:txBody>
-      </p:sp>
-      <p:sp>
-        <p:nvSpPr>
-          <p:cNvPr id="7" name="TextBox 6"/>
-          <p:cNvSpPr txBox="1"/>
-          <p:nvPr/>
-        </p:nvSpPr>
-        <p:spPr>
-          <a:xfrm>
-            <a:off x="566928" y="2980944"/>
-            <a:ext cx="4023360" cy="237744"/>
-          </a:xfrm>
-          <a:prstGeom prst="rect">
-            <a:avLst/>
-          </a:prstGeom>
-          <a:noFill/>
-        </p:spPr>
-        <p:txBody>
-          <a:bodyPr wrap="square" anchor="t" lIns="0" rIns="0" tIns="0" bIns="0">
-            <a:spAutoFit/>
-          </a:bodyPr>
-          <a:lstStyle/>
-          <a:p>
-            <a:pPr algn="l">
-              <a:lnSpc>
-                <a:spcPct val="100000"/>
-              </a:lnSpc>
-            </a:pPr>
-            <a:r>
-              <a:rPr sz="1100" b="1">
-                <a:solidFill>
-                  <a:srgbClr val="D20A2E"/>
-                </a:solidFill>
-                <a:latin typeface="Arial"/>
-              </a:rPr>
-              <a:t>S E C T I O N   E I G H T</a:t>
-            </a:r>
-          </a:p>
-        </p:txBody>
-      </p:sp>
-      <p:sp>
-        <p:nvSpPr>
-          <p:cNvPr id="8" name="TextBox 7"/>
-          <p:cNvSpPr txBox="1"/>
-          <p:nvPr/>
-        </p:nvSpPr>
-        <p:spPr>
-          <a:xfrm>
-            <a:off x="566928" y="3291840"/>
-            <a:ext cx="4937760" cy="1426464"/>
-          </a:xfrm>
-          <a:prstGeom prst="rect">
-            <a:avLst/>
-          </a:prstGeom>
-          <a:noFill/>
-        </p:spPr>
-        <p:txBody>
-          <a:bodyPr wrap="square" anchor="t" lIns="0" rIns="0" tIns="0" bIns="0">
-            <a:spAutoFit/>
-          </a:bodyPr>
-          <a:lstStyle/>
-          <a:p>
-            <a:pPr algn="l">
-              <a:lnSpc>
-                <a:spcPct val="98000"/>
-              </a:lnSpc>
-            </a:pPr>
-            <a:r>
-              <a:rPr sz="3800" b="1">
-                <a:solidFill>
-                  <a:srgbClr val="20242C"/>
-                </a:solidFill>
-                <a:latin typeface="Microsoft YaHei"/>
-              </a:rPr>
-              <a:t>结论与建议</a:t>
-            </a:r>
-          </a:p>
-        </p:txBody>
-      </p:sp>
-      <p:sp>
-        <p:nvSpPr>
-          <p:cNvPr id="9" name="TextBox 8"/>
-          <p:cNvSpPr txBox="1"/>
-          <p:nvPr/>
-        </p:nvSpPr>
-        <p:spPr>
-          <a:xfrm>
-            <a:off x="566928" y="4846320"/>
-            <a:ext cx="4572000" cy="786384"/>
-          </a:xfrm>
-          <a:prstGeom prst="rect">
-            <a:avLst/>
-          </a:prstGeom>
-          <a:noFill/>
-        </p:spPr>
-        <p:txBody>
-          <a:bodyPr wrap="square" anchor="t" lIns="0" rIns="0" tIns="0" bIns="0">
-            <a:spAutoFit/>
-          </a:bodyPr>
-          <a:lstStyle/>
-          <a:p>
-            <a:pPr algn="l">
-              <a:lnSpc>
-                <a:spcPct val="106000"/>
-              </a:lnSpc>
-            </a:pPr>
-            <a:r>
-              <a:rPr sz="1400" b="0">
-                <a:solidFill>
-                  <a:srgbClr val="667080"/>
-                </a:solidFill>
-                <a:latin typeface="Microsoft YaHei"/>
-              </a:rPr>
-              <a:t>从现象、根因、理论上界到可实现机制，形成完整证据闭环。</a:t>
-            </a:r>
-          </a:p>
-        </p:txBody>
-      </p:sp>
-      <p:sp>
-        <p:nvSpPr>
-          <p:cNvPr id="10" name="Rectangle 9"/>
+          <p:cNvPr id="6" name="Rectangle 5"/>
           <p:cNvSpPr/>
           <p:nvPr/>
         </p:nvSpPr>
         <p:spPr>
           <a:xfrm>
-            <a:off x="5989320" y="2011680"/>
-            <a:ext cx="5635447" cy="2834640"/>
+            <a:off x="10143439" y="274320"/>
+            <a:ext cx="182880" cy="182880"/>
           </a:xfrm>
           <a:prstGeom prst="rect">
             <a:avLst/>
@@ -30452,14 +30613,14 @@
       </p:sp>
       <p:sp>
         <p:nvSpPr>
-          <p:cNvPr id="11" name="TextBox 10"/>
-          <p:cNvSpPr txBox="1"/>
-          <p:nvPr/>
-        </p:nvSpPr>
-        <p:spPr>
-          <a:xfrm>
-            <a:off x="6355080" y="2395728"/>
-            <a:ext cx="3657600" cy="237744"/>
+          <p:cNvPr id="7" name="TextBox 6"/>
+          <p:cNvSpPr txBox="1"/>
+          <p:nvPr/>
+        </p:nvSpPr>
+        <p:spPr>
+          <a:xfrm>
+            <a:off x="10399471" y="246888"/>
+            <a:ext cx="1225296" cy="256032"/>
           </a:xfrm>
           <a:prstGeom prst="rect">
             <a:avLst/>
@@ -30478,59 +30639,601 @@
               </a:lnSpc>
             </a:pPr>
             <a:r>
-              <a:rPr sz="1100" b="1">
+              <a:rPr sz="1300" b="1">
+                <a:solidFill>
+                  <a:srgbClr val="20242C"/>
+                </a:solidFill>
+                <a:latin typeface="Arial"/>
+              </a:rPr>
+              <a:t>HUAWEI</a:t>
+            </a:r>
+          </a:p>
+        </p:txBody>
+      </p:sp>
+      <p:pic>
+        <p:nvPicPr>
+          <p:cNvPr id="8" name="Picture 7" descr="30-s29-diagram.png"/>
+          <p:cNvPicPr>
+            <a:picLocks noChangeAspect="1"/>
+          </p:cNvPicPr>
+          <p:nvPr/>
+        </p:nvPicPr>
+        <p:blipFill>
+          <a:blip r:embed="rId2"/>
+          <a:stretch>
+            <a:fillRect/>
+          </a:stretch>
+        </p:blipFill>
+        <p:spPr>
+          <a:xfrm>
+            <a:off x="566928" y="1208966"/>
+            <a:ext cx="7452360" cy="4494930"/>
+          </a:xfrm>
+          <a:prstGeom prst="rect">
+            <a:avLst/>
+          </a:prstGeom>
+        </p:spPr>
+      </p:pic>
+      <p:sp>
+        <p:nvSpPr>
+          <p:cNvPr id="9" name="TextBox 8"/>
+          <p:cNvSpPr txBox="1"/>
+          <p:nvPr/>
+        </p:nvSpPr>
+        <p:spPr>
+          <a:xfrm>
+            <a:off x="566928" y="5813625"/>
+            <a:ext cx="7452360" cy="384048"/>
+          </a:xfrm>
+          <a:prstGeom prst="rect">
+            <a:avLst/>
+          </a:prstGeom>
+          <a:noFill/>
+        </p:spPr>
+        <p:txBody>
+          <a:bodyPr wrap="square" anchor="t" lIns="0" rIns="0" tIns="0" bIns="0">
+            <a:spAutoFit/>
+          </a:bodyPr>
+          <a:lstStyle/>
+          <a:p>
+            <a:pPr algn="l">
+              <a:lnSpc>
+                <a:spcPct val="100000"/>
+              </a:lnSpc>
+            </a:pPr>
+            <a:r>
+              <a:rPr sz="1000" b="0">
+                <a:solidFill>
+                  <a:srgbClr val="667080"/>
+                </a:solidFill>
+                <a:latin typeface="Microsoft YaHei"/>
+              </a:rPr>
+              <a:t>上 = 触发：一张 20 拍的固定日历，加每核 1 bit 需求位；下 = 执行：与 S22 完全同一套环仲裁让位。</a:t>
+            </a:r>
+          </a:p>
+        </p:txBody>
+      </p:sp>
+      <p:sp>
+        <p:nvSpPr>
+          <p:cNvPr id="10" name="TextBox 9"/>
+          <p:cNvSpPr txBox="1"/>
+          <p:nvPr/>
+        </p:nvSpPr>
+        <p:spPr>
+          <a:xfrm>
+            <a:off x="8403336" y="1060704"/>
+            <a:ext cx="3221431" cy="237744"/>
+          </a:xfrm>
+          <a:prstGeom prst="rect">
+            <a:avLst/>
+          </a:prstGeom>
+          <a:noFill/>
+        </p:spPr>
+        <p:txBody>
+          <a:bodyPr wrap="square" anchor="t" lIns="0" rIns="0" tIns="0" bIns="0">
+            <a:spAutoFit/>
+          </a:bodyPr>
+          <a:lstStyle/>
+          <a:p>
+            <a:pPr algn="l">
+              <a:lnSpc>
+                <a:spcPct val="100000"/>
+              </a:lnSpc>
+            </a:pPr>
+            <a:r>
+              <a:rPr sz="750" b="1">
+                <a:solidFill>
+                  <a:srgbClr val="D20A2E"/>
+                </a:solidFill>
+                <a:latin typeface="Arial"/>
+              </a:rPr>
+              <a:t>A R B I T R A T I O N   B R A N C H   ·   C H E A P E S T   P O I N T</a:t>
+            </a:r>
+          </a:p>
+        </p:txBody>
+      </p:sp>
+      <p:sp>
+        <p:nvSpPr>
+          <p:cNvPr id="11" name="Rectangle 10"/>
+          <p:cNvSpPr/>
+          <p:nvPr/>
+        </p:nvSpPr>
+        <p:spPr>
+          <a:xfrm>
+            <a:off x="8403336" y="1408176"/>
+            <a:ext cx="3221431" cy="2069156"/>
+          </a:xfrm>
+          <a:prstGeom prst="rect">
+            <a:avLst/>
+          </a:prstGeom>
+          <a:solidFill>
+            <a:srgbClr val="EDF2F7"/>
+          </a:solidFill>
+          <a:ln w="12700">
+            <a:solidFill>
+              <a:srgbClr val="DCE3EA"/>
+            </a:solidFill>
+          </a:ln>
+          <a:effectLst/>
+        </p:spPr>
+        <p:style>
+          <a:lnRef idx="1">
+            <a:schemeClr val="accent1"/>
+          </a:lnRef>
+          <a:fillRef idx="3">
+            <a:schemeClr val="accent1"/>
+          </a:fillRef>
+          <a:effectRef idx="2">
+            <a:schemeClr val="accent1"/>
+          </a:effectRef>
+          <a:fontRef idx="minor">
+            <a:schemeClr val="lt1"/>
+          </a:fontRef>
+        </p:style>
+        <p:txBody>
+          <a:bodyPr rtlCol="0" anchor="ctr" wrap="square"/>
+          <a:lstStyle/>
+          <a:p>
+            <a:pPr algn="ctr"/>
+          </a:p>
+        </p:txBody>
+      </p:sp>
+      <p:sp>
+        <p:nvSpPr>
+          <p:cNvPr id="12" name="TextBox 11"/>
+          <p:cNvSpPr txBox="1"/>
+          <p:nvPr/>
+        </p:nvSpPr>
+        <p:spPr>
+          <a:xfrm>
+            <a:off x="8586215" y="1595109"/>
+            <a:ext cx="2855671" cy="259080"/>
+          </a:xfrm>
+          <a:prstGeom prst="rect">
+            <a:avLst/>
+          </a:prstGeom>
+          <a:noFill/>
+        </p:spPr>
+        <p:txBody>
+          <a:bodyPr wrap="square" anchor="t" lIns="0" rIns="0" tIns="0" bIns="0">
+            <a:spAutoFit/>
+          </a:bodyPr>
+          <a:lstStyle/>
+          <a:p>
+            <a:pPr algn="l">
+              <a:lnSpc>
+                <a:spcPct val="100000"/>
+              </a:lnSpc>
+            </a:pPr>
+            <a:r>
+              <a:rPr sz="1200" b="1">
+                <a:solidFill>
+                  <a:srgbClr val="20242C"/>
+                </a:solidFill>
+                <a:latin typeface="Microsoft YaHei"/>
+              </a:rPr>
+              <a:t>四段机制（与 S1 同格式）</a:t>
+            </a:r>
+          </a:p>
+        </p:txBody>
+      </p:sp>
+      <p:sp>
+        <p:nvSpPr>
+          <p:cNvPr id="13" name="TextBox 12"/>
+          <p:cNvSpPr txBox="1"/>
+          <p:nvPr/>
+        </p:nvSpPr>
+        <p:spPr>
+          <a:xfrm>
+            <a:off x="8586215" y="1936485"/>
+            <a:ext cx="2855671" cy="1390489"/>
+          </a:xfrm>
+          <a:prstGeom prst="rect">
+            <a:avLst/>
+          </a:prstGeom>
+          <a:noFill/>
+        </p:spPr>
+        <p:txBody>
+          <a:bodyPr wrap="square" anchor="t" lIns="0" rIns="0" tIns="0" bIns="0">
+            <a:spAutoFit/>
+          </a:bodyPr>
+          <a:lstStyle/>
+          <a:p>
+            <a:pPr algn="l">
+              <a:lnSpc>
+                <a:spcPct val="102000"/>
+              </a:lnSpc>
+            </a:pPr>
+            <a:r>
+              <a:rPr sz="850" b="1">
+                <a:solidFill>
+                  <a:srgbClr val="20242C"/>
+                </a:solidFill>
+                <a:latin typeface="Microsoft YaHei"/>
+              </a:rPr>
+              <a:t>① 检测</a:t>
+            </a:r>
+            <a:r>
+              <a:rPr sz="850" b="0">
+                <a:solidFill>
+                  <a:srgbClr val="20242C"/>
+                </a:solidFill>
+                <a:latin typeface="Microsoft YaHei"/>
+              </a:rPr>
+              <a:t>：没有检测。触发是一个 5 bit 帧计数器，常量、无收敛过程、无控制环路。</a:t>
+            </a:r>
+          </a:p>
+          <a:p>
+            <a:pPr algn="l">
+              <a:lnSpc>
+                <a:spcPct val="102000"/>
+              </a:lnSpc>
+              <a:spcBef>
+                <a:spcPts val="600"/>
+              </a:spcBef>
+            </a:pPr>
+            <a:r>
+              <a:rPr sz="850" b="1">
+                <a:solidFill>
+                  <a:srgbClr val="20242C"/>
+                </a:solidFill>
+                <a:latin typeface="Microsoft YaHei"/>
+              </a:rPr>
+              <a:t>② 传递</a:t>
+            </a:r>
+            <a:r>
+              <a:rPr sz="850" b="0">
+                <a:solidFill>
+                  <a:srgbClr val="20242C"/>
+                </a:solidFill>
+                <a:latin typeface="Microsoft YaHei"/>
+              </a:rPr>
+              <a:t>：10 bit 需求字（每核 1 bit「我有 WriteData 排队」），每 16 拍刷新 —— 仅用于回收空闲核的时隙。</a:t>
+            </a:r>
+          </a:p>
+          <a:p>
+            <a:pPr algn="l">
+              <a:lnSpc>
+                <a:spcPct val="102000"/>
+              </a:lnSpc>
+              <a:spcBef>
+                <a:spcPts val="600"/>
+              </a:spcBef>
+            </a:pPr>
+            <a:r>
+              <a:rPr sz="850" b="1">
+                <a:solidFill>
+                  <a:srgbClr val="20242C"/>
+                </a:solidFill>
+                <a:latin typeface="Microsoft YaHei"/>
+              </a:rPr>
+              <a:t>③ 反馈</a:t>
+            </a:r>
+            <a:r>
+              <a:rPr sz="850" b="0">
+                <a:solidFill>
+                  <a:srgbClr val="20242C"/>
+                </a:solidFill>
+                <a:latin typeface="Microsoft YaHei"/>
+              </a:rPr>
+              <a:t>：轮到某核时，会骑过它出向 hop 的上游核让出一个 slot。</a:t>
+            </a:r>
+          </a:p>
+          <a:p>
+            <a:pPr algn="l">
+              <a:lnSpc>
+                <a:spcPct val="102000"/>
+              </a:lnSpc>
+              <a:spcBef>
+                <a:spcPts val="600"/>
+              </a:spcBef>
+            </a:pPr>
+            <a:r>
+              <a:rPr sz="850" b="1">
+                <a:solidFill>
+                  <a:srgbClr val="20242C"/>
+                </a:solidFill>
+                <a:latin typeface="Microsoft YaHei"/>
+              </a:rPr>
+              <a:t>④ 控制</a:t>
+            </a:r>
+            <a:r>
+              <a:rPr sz="850" b="0">
+                <a:solidFill>
+                  <a:srgbClr val="20242C"/>
+                </a:solidFill>
+                <a:latin typeface="Microsoft YaHei"/>
+              </a:rPr>
+              <a:t>：让位，不是门控；队列深度维持出厂 8 / 12。</a:t>
+            </a:r>
+          </a:p>
+        </p:txBody>
+      </p:sp>
+      <p:sp>
+        <p:nvSpPr>
+          <p:cNvPr id="14" name="Rectangle 13"/>
+          <p:cNvSpPr/>
+          <p:nvPr/>
+        </p:nvSpPr>
+        <p:spPr>
+          <a:xfrm>
+            <a:off x="8403336" y="3623636"/>
+            <a:ext cx="3221431" cy="1666820"/>
+          </a:xfrm>
+          <a:prstGeom prst="rect">
+            <a:avLst/>
+          </a:prstGeom>
+          <a:solidFill>
+            <a:srgbClr val="EDF2F7"/>
+          </a:solidFill>
+          <a:ln w="19050">
+            <a:solidFill>
+              <a:srgbClr val="D20A2E"/>
+            </a:solidFill>
+          </a:ln>
+          <a:effectLst/>
+        </p:spPr>
+        <p:style>
+          <a:lnRef idx="1">
+            <a:schemeClr val="accent1"/>
+          </a:lnRef>
+          <a:fillRef idx="3">
+            <a:schemeClr val="accent1"/>
+          </a:fillRef>
+          <a:effectRef idx="2">
+            <a:schemeClr val="accent1"/>
+          </a:effectRef>
+          <a:fontRef idx="minor">
+            <a:schemeClr val="lt1"/>
+          </a:fontRef>
+        </p:style>
+        <p:txBody>
+          <a:bodyPr rtlCol="0" anchor="ctr" wrap="square"/>
+          <a:lstStyle/>
+          <a:p>
+            <a:pPr algn="ctr"/>
+          </a:p>
+        </p:txBody>
+      </p:sp>
+      <p:sp>
+        <p:nvSpPr>
+          <p:cNvPr id="15" name="TextBox 14"/>
+          <p:cNvSpPr txBox="1"/>
+          <p:nvPr/>
+        </p:nvSpPr>
+        <p:spPr>
+          <a:xfrm>
+            <a:off x="8586215" y="3822719"/>
+            <a:ext cx="2855671" cy="259080"/>
+          </a:xfrm>
+          <a:prstGeom prst="rect">
+            <a:avLst/>
+          </a:prstGeom>
+          <a:noFill/>
+        </p:spPr>
+        <p:txBody>
+          <a:bodyPr wrap="square" anchor="t" lIns="0" rIns="0" tIns="0" bIns="0">
+            <a:spAutoFit/>
+          </a:bodyPr>
+          <a:lstStyle/>
+          <a:p>
+            <a:pPr algn="l">
+              <a:lnSpc>
+                <a:spcPct val="100000"/>
+              </a:lnSpc>
+            </a:pPr>
+            <a:r>
+              <a:rPr sz="1200" b="1">
+                <a:solidFill>
+                  <a:srgbClr val="D20A2E"/>
+                </a:solidFill>
+                <a:latin typeface="Microsoft YaHei"/>
+              </a:rPr>
+              <a:t>它是 S22 的廉价版，不是新执行器</a:t>
+            </a:r>
+          </a:p>
+        </p:txBody>
+      </p:sp>
+      <p:sp>
+        <p:nvSpPr>
+          <p:cNvPr id="16" name="TextBox 15"/>
+          <p:cNvSpPr txBox="1"/>
+          <p:nvPr/>
+        </p:nvSpPr>
+        <p:spPr>
+          <a:xfrm>
+            <a:off x="8586215" y="4164095"/>
+            <a:ext cx="2855671" cy="963853"/>
+          </a:xfrm>
+          <a:prstGeom prst="rect">
+            <a:avLst/>
+          </a:prstGeom>
+          <a:noFill/>
+        </p:spPr>
+        <p:txBody>
+          <a:bodyPr wrap="square" anchor="t" lIns="0" rIns="0" tIns="0" bIns="0">
+            <a:spAutoFit/>
+          </a:bodyPr>
+          <a:lstStyle/>
+          <a:p>
+            <a:pPr algn="l">
+              <a:lnSpc>
+                <a:spcPct val="102000"/>
+              </a:lnSpc>
+            </a:pPr>
+            <a:r>
+              <a:rPr sz="900" b="0">
+                <a:solidFill>
+                  <a:srgbClr val="20242C"/>
+                </a:solidFill>
+                <a:latin typeface="Microsoft YaHei"/>
+              </a:rPr>
+              <a:t>执行器与 S22 逐字相同，省下来的是</a:t>
+            </a:r>
+            <a:r>
+              <a:rPr sz="900" b="1">
+                <a:solidFill>
+                  <a:srgbClr val="20242C"/>
+                </a:solidFill>
+                <a:latin typeface="Microsoft YaHei"/>
+              </a:rPr>
+              <a:t>触发侧</a:t>
+            </a:r>
+            <a:r>
+              <a:rPr sz="900" b="0">
+                <a:solidFill>
+                  <a:srgbClr val="20242C"/>
+                </a:solidFill>
+                <a:latin typeface="Microsoft YaHei"/>
+              </a:rPr>
+              <a:t>：不播进度、不算均值、不比赤字，10 项表与 10 输入加法树整块消失 —— </a:t>
+            </a:r>
+            <a:r>
+              <a:rPr sz="900" b="1">
+                <a:solidFill>
+                  <a:srgbClr val="20242C"/>
+                </a:solidFill>
+                <a:latin typeface="Microsoft YaHei"/>
+              </a:rPr>
+              <a:t>13,920 → 4,440 FF‑eq</a:t>
+            </a:r>
+            <a:r>
+              <a:rPr sz="900" b="0">
+                <a:solidFill>
+                  <a:srgbClr val="20242C"/>
+                </a:solidFill>
+                <a:latin typeface="Microsoft YaHei"/>
+              </a:rPr>
+              <a:t>。</a:t>
+            </a:r>
+          </a:p>
+          <a:p>
+            <a:pPr algn="l">
+              <a:lnSpc>
+                <a:spcPct val="102000"/>
+              </a:lnSpc>
+              <a:spcBef>
+                <a:spcPts val="600"/>
+              </a:spcBef>
+            </a:pPr>
+            <a:r>
+              <a:rPr sz="900" b="0">
+                <a:solidFill>
+                  <a:srgbClr val="20242C"/>
+                </a:solidFill>
+                <a:latin typeface="Microsoft YaHei"/>
+              </a:rPr>
+              <a:t>代价是它不知道谁落后：日历按核轮转，而不是按「谁被拖慢了」轮转。</a:t>
+            </a:r>
+          </a:p>
+        </p:txBody>
+      </p:sp>
+      <p:sp>
+        <p:nvSpPr>
+          <p:cNvPr id="17" name="Rectangle 16"/>
+          <p:cNvSpPr/>
+          <p:nvPr/>
+        </p:nvSpPr>
+        <p:spPr>
+          <a:xfrm>
+            <a:off x="8403336" y="5436761"/>
+            <a:ext cx="3221431" cy="890886"/>
+          </a:xfrm>
+          <a:prstGeom prst="rect">
+            <a:avLst/>
+          </a:prstGeom>
+          <a:solidFill>
+            <a:srgbClr val="D20A2E"/>
+          </a:solidFill>
+          <a:ln>
+            <a:noFill/>
+          </a:ln>
+          <a:effectLst/>
+        </p:spPr>
+        <p:style>
+          <a:lnRef idx="1">
+            <a:schemeClr val="accent1"/>
+          </a:lnRef>
+          <a:fillRef idx="3">
+            <a:schemeClr val="accent1"/>
+          </a:fillRef>
+          <a:effectRef idx="2">
+            <a:schemeClr val="accent1"/>
+          </a:effectRef>
+          <a:fontRef idx="minor">
+            <a:schemeClr val="lt1"/>
+          </a:fontRef>
+        </p:style>
+        <p:txBody>
+          <a:bodyPr rtlCol="0" anchor="ctr" wrap="square"/>
+          <a:lstStyle/>
+          <a:p>
+            <a:pPr algn="ctr"/>
+          </a:p>
+        </p:txBody>
+      </p:sp>
+      <p:sp>
+        <p:nvSpPr>
+          <p:cNvPr id="18" name="TextBox 17"/>
+          <p:cNvSpPr txBox="1"/>
+          <p:nvPr/>
+        </p:nvSpPr>
+        <p:spPr>
+          <a:xfrm>
+            <a:off x="8714232" y="5528201"/>
+            <a:ext cx="2599639" cy="708006"/>
+          </a:xfrm>
+          <a:prstGeom prst="rect">
+            <a:avLst/>
+          </a:prstGeom>
+          <a:noFill/>
+        </p:spPr>
+        <p:txBody>
+          <a:bodyPr wrap="square" anchor="ctr" lIns="0" rIns="0" tIns="0" bIns="0">
+            <a:spAutoFit/>
+          </a:bodyPr>
+          <a:lstStyle/>
+          <a:p>
+            <a:pPr algn="l">
+              <a:lnSpc>
+                <a:spcPct val="104000"/>
+              </a:lnSpc>
+            </a:pPr>
+            <a:r>
+              <a:rPr sz="1200" b="0">
                 <a:solidFill>
                   <a:srgbClr val="FFFFFF"/>
                 </a:solidFill>
-                <a:latin typeface="Arial"/>
-              </a:rPr>
-              <a:t>B O T T O M   L I N E</a:t>
-            </a:r>
-          </a:p>
-        </p:txBody>
-      </p:sp>
-      <p:sp>
-        <p:nvSpPr>
-          <p:cNvPr id="12" name="TextBox 11"/>
-          <p:cNvSpPr txBox="1"/>
-          <p:nvPr/>
-        </p:nvSpPr>
-        <p:spPr>
-          <a:xfrm>
-            <a:off x="6355080" y="2761488"/>
-            <a:ext cx="4903927" cy="1737360"/>
-          </a:xfrm>
-          <a:prstGeom prst="rect">
-            <a:avLst/>
-          </a:prstGeom>
-          <a:noFill/>
-        </p:spPr>
-        <p:txBody>
-          <a:bodyPr wrap="square" anchor="t" lIns="0" rIns="0" tIns="0" bIns="0">
-            <a:spAutoFit/>
-          </a:bodyPr>
-          <a:lstStyle/>
-          <a:p>
-            <a:pPr algn="l">
-              <a:lnSpc>
-                <a:spcPct val="104000"/>
-              </a:lnSpc>
-            </a:pPr>
-            <a:r>
-              <a:rPr sz="2000" b="1">
-                <a:solidFill>
-                  <a:srgbClr val="FFFFFF"/>
-                </a:solidFill>
-                <a:latin typeface="Microsoft YaHei"/>
-              </a:rPr>
-              <a:t>问题已经收敛为一个架构决策：能改 HA 授权调度就验证 S16；事务层不能改，则验证只动环上仲裁的 S22。</a:t>
-            </a:r>
-          </a:p>
-        </p:txBody>
-      </p:sp>
-      <p:sp>
-        <p:nvSpPr>
-          <p:cNvPr id="13" name="TextBox 12"/>
+                <a:latin typeface="Microsoft YaHei"/>
+              </a:rPr>
+              <a:t>定位：不在 Pareto 前沿（S16 全面更优），但是「只动环仲裁、不碰事务层」这一支上最便宜的点。</a:t>
+            </a:r>
+          </a:p>
+        </p:txBody>
+      </p:sp>
+      <p:sp>
+        <p:nvSpPr>
+          <p:cNvPr id="19" name="TextBox 18"/>
           <p:cNvSpPr txBox="1"/>
           <p:nvPr/>
         </p:nvSpPr>
@@ -30562,7 +31265,7 @@
                 </a:solidFill>
                 <a:latin typeface="Arial"/>
               </a:rPr>
-              <a:t>36 / 39</a:t>
+              <a:t>36 / 41</a:t>
             </a:r>
           </a:p>
         </p:txBody>
@@ -30707,7 +31410,7 @@
                 </a:solidFill>
                 <a:latin typeface="Microsoft YaHei"/>
               </a:rPr>
-              <a:t>结论</a:t>
+              <a:t>S29 实测：均匀流量</a:t>
             </a:r>
           </a:p>
         </p:txBody>
@@ -30847,8 +31550,8 @@
         </p:nvSpPr>
         <p:spPr>
           <a:xfrm>
-            <a:off x="566928" y="1060704"/>
-            <a:ext cx="11057839" cy="237744"/>
+            <a:off x="566928" y="1024128"/>
+            <a:ext cx="2377440" cy="237744"/>
           </a:xfrm>
           <a:prstGeom prst="rect">
             <a:avLst/>
@@ -30867,13 +31570,13 @@
               </a:lnSpc>
             </a:pPr>
             <a:r>
-              <a:rPr sz="1050" b="1">
+              <a:rPr sz="1000" b="1">
                 <a:solidFill>
                   <a:srgbClr val="D20A2E"/>
                 </a:solidFill>
                 <a:latin typeface="Arial"/>
               </a:rPr>
-              <a:t>C O N C L U S I O N S</a:t>
+              <a:t>M E A S U R E D   ·   U N I F O R M</a:t>
             </a:r>
           </a:p>
         </p:txBody>
@@ -30886,8 +31589,8 @@
         </p:nvSpPr>
         <p:spPr>
           <a:xfrm>
-            <a:off x="566928" y="1353312"/>
-            <a:ext cx="11057839" cy="658368"/>
+            <a:off x="566928" y="1335024"/>
+            <a:ext cx="2377440" cy="713232"/>
           </a:xfrm>
           <a:prstGeom prst="rect">
             <a:avLst/>
@@ -30906,33 +31609,367 @@
               </a:lnSpc>
             </a:pPr>
             <a:r>
-              <a:rPr sz="3000" b="1">
-                <a:solidFill>
-                  <a:srgbClr val="20242C"/>
-                </a:solidFill>
-                <a:latin typeface="Microsoft YaHei"/>
-              </a:rPr>
-              <a:t>三项确定结论 + 一个架构决策</a:t>
-            </a:r>
-          </a:p>
-        </p:txBody>
-      </p:sp>
-      <p:sp>
-        <p:nvSpPr>
-          <p:cNvPr id="10" name="Rectangle 9"/>
+              <a:rPr sz="4000" b="1">
+                <a:solidFill>
+                  <a:srgbClr val="D20A2E"/>
+                </a:solidFill>
+                <a:latin typeface="Arial"/>
+              </a:rPr>
+              <a:t>0.96074</a:t>
+            </a:r>
+          </a:p>
+        </p:txBody>
+      </p:sp>
+      <p:sp>
+        <p:nvSpPr>
+          <p:cNvPr id="10" name="TextBox 9"/>
+          <p:cNvSpPr txBox="1"/>
+          <p:nvPr/>
+        </p:nvSpPr>
+        <p:spPr>
+          <a:xfrm>
+            <a:off x="566928" y="2121408"/>
+            <a:ext cx="2377440" cy="658368"/>
+          </a:xfrm>
+          <a:prstGeom prst="rect">
+            <a:avLst/>
+          </a:prstGeom>
+          <a:noFill/>
+        </p:spPr>
+        <p:txBody>
+          <a:bodyPr wrap="square" anchor="t" lIns="0" rIns="0" tIns="0" bIns="0">
+            <a:spAutoFit/>
+          </a:bodyPr>
+          <a:lstStyle/>
+          <a:p>
+            <a:pPr algn="l">
+              <a:lnSpc>
+                <a:spcPct val="106000"/>
+              </a:lnSpc>
+            </a:pPr>
+            <a:r>
+              <a:rPr sz="1000" b="0">
+                <a:solidFill>
+                  <a:srgbClr val="667080"/>
+                </a:solidFill>
+                <a:latin typeface="Microsoft YaHei"/>
+              </a:rPr>
+              <a:t>S29 写侧 100 拍 Jain（S0 = 0.92818）</a:t>
+            </a:r>
+          </a:p>
+          <a:p>
+            <a:pPr algn="l">
+              <a:lnSpc>
+                <a:spcPct val="106000"/>
+              </a:lnSpc>
+              <a:spcBef>
+                <a:spcPts val="500"/>
+              </a:spcBef>
+            </a:pPr>
+            <a:r>
+              <a:rPr sz="1000" b="0">
+                <a:solidFill>
+                  <a:srgbClr val="667080"/>
+                </a:solidFill>
+                <a:latin typeface="Microsoft YaHei"/>
+              </a:rPr>
+              <a:t>总写带宽 −6.04%</a:t>
+            </a:r>
+          </a:p>
+        </p:txBody>
+      </p:sp>
+      <p:sp>
+        <p:nvSpPr>
+          <p:cNvPr id="11" name="Rectangle 10"/>
           <p:cNvSpPr/>
           <p:nvPr/>
         </p:nvSpPr>
         <p:spPr>
           <a:xfrm>
-            <a:off x="566928" y="2231136"/>
-            <a:ext cx="2599867" cy="2999231"/>
+            <a:off x="566928" y="2889504"/>
+            <a:ext cx="822960" cy="41148"/>
           </a:xfrm>
           <a:prstGeom prst="rect">
             <a:avLst/>
           </a:prstGeom>
           <a:solidFill>
-            <a:srgbClr val="FFFFFF"/>
+            <a:srgbClr val="D20A2E"/>
+          </a:solidFill>
+          <a:ln>
+            <a:noFill/>
+          </a:ln>
+          <a:effectLst/>
+        </p:spPr>
+        <p:style>
+          <a:lnRef idx="1">
+            <a:schemeClr val="accent1"/>
+          </a:lnRef>
+          <a:fillRef idx="3">
+            <a:schemeClr val="accent1"/>
+          </a:fillRef>
+          <a:effectRef idx="2">
+            <a:schemeClr val="accent1"/>
+          </a:effectRef>
+          <a:fontRef idx="minor">
+            <a:schemeClr val="lt1"/>
+          </a:fontRef>
+        </p:style>
+        <p:txBody>
+          <a:bodyPr rtlCol="0" anchor="ctr" wrap="square"/>
+          <a:lstStyle/>
+          <a:p>
+            <a:pPr algn="ctr"/>
+          </a:p>
+        </p:txBody>
+      </p:sp>
+      <p:pic>
+        <p:nvPicPr>
+          <p:cNvPr id="12" name="Picture 11" descr="31-s29-compare.png"/>
+          <p:cNvPicPr>
+            <a:picLocks noChangeAspect="1"/>
+          </p:cNvPicPr>
+          <p:nvPr/>
+        </p:nvPicPr>
+        <p:blipFill>
+          <a:blip r:embed="rId2"/>
+          <a:stretch>
+            <a:fillRect/>
+          </a:stretch>
+        </p:blipFill>
+        <p:spPr>
+          <a:xfrm>
+            <a:off x="3380302" y="1024128"/>
+            <a:ext cx="8192577" cy="2711627"/>
+          </a:xfrm>
+          <a:prstGeom prst="rect">
+            <a:avLst/>
+          </a:prstGeom>
+        </p:spPr>
+      </p:pic>
+      <p:sp>
+        <p:nvSpPr>
+          <p:cNvPr id="13" name="TextBox 12"/>
+          <p:cNvSpPr txBox="1"/>
+          <p:nvPr/>
+        </p:nvSpPr>
+        <p:spPr>
+          <a:xfrm>
+            <a:off x="3328416" y="3827195"/>
+            <a:ext cx="8296351" cy="292608"/>
+          </a:xfrm>
+          <a:prstGeom prst="rect">
+            <a:avLst/>
+          </a:prstGeom>
+          <a:noFill/>
+        </p:spPr>
+        <p:txBody>
+          <a:bodyPr wrap="square" anchor="t" lIns="0" rIns="0" tIns="0" bIns="0">
+            <a:spAutoFit/>
+          </a:bodyPr>
+          <a:lstStyle/>
+          <a:p>
+            <a:pPr algn="l">
+              <a:lnSpc>
+                <a:spcPct val="100000"/>
+              </a:lnSpc>
+            </a:pPr>
+            <a:r>
+              <a:rPr sz="1000" b="0">
+                <a:solidFill>
+                  <a:srgbClr val="667080"/>
+                </a:solidFill>
+                <a:latin typeface="Microsoft YaHei"/>
+              </a:rPr>
+              <a:t>五根柱依次 S0 / S1 / S22 / S16 / S29；橙点线 = S1 的水平，橙虚线 = 理论上限 R*。写侧 K = 20000，与前面各页同口径。</a:t>
+            </a:r>
+          </a:p>
+        </p:txBody>
+      </p:sp>
+      <p:sp>
+        <p:nvSpPr>
+          <p:cNvPr id="14" name="Rectangle 13"/>
+          <p:cNvSpPr/>
+          <p:nvPr/>
+        </p:nvSpPr>
+        <p:spPr>
+          <a:xfrm>
+            <a:off x="566928" y="4448987"/>
+            <a:ext cx="3527450" cy="1878660"/>
+          </a:xfrm>
+          <a:prstGeom prst="rect">
+            <a:avLst/>
+          </a:prstGeom>
+          <a:solidFill>
+            <a:srgbClr val="EDF2F7"/>
+          </a:solidFill>
+          <a:ln w="19050">
+            <a:solidFill>
+              <a:srgbClr val="D20A2E"/>
+            </a:solidFill>
+          </a:ln>
+          <a:effectLst/>
+        </p:spPr>
+        <p:style>
+          <a:lnRef idx="1">
+            <a:schemeClr val="accent1"/>
+          </a:lnRef>
+          <a:fillRef idx="3">
+            <a:schemeClr val="accent1"/>
+          </a:fillRef>
+          <a:effectRef idx="2">
+            <a:schemeClr val="accent1"/>
+          </a:effectRef>
+          <a:fontRef idx="minor">
+            <a:schemeClr val="lt1"/>
+          </a:fontRef>
+        </p:style>
+        <p:txBody>
+          <a:bodyPr rtlCol="0" anchor="ctr" wrap="square"/>
+          <a:lstStyle/>
+          <a:p>
+            <a:pPr algn="ctr"/>
+          </a:p>
+        </p:txBody>
+      </p:sp>
+      <p:sp>
+        <p:nvSpPr>
+          <p:cNvPr id="15" name="TextBox 14"/>
+          <p:cNvSpPr txBox="1"/>
+          <p:nvPr/>
+        </p:nvSpPr>
+        <p:spPr>
+          <a:xfrm>
+            <a:off x="768096" y="4792276"/>
+            <a:ext cx="3125114" cy="277622"/>
+          </a:xfrm>
+          <a:prstGeom prst="rect">
+            <a:avLst/>
+          </a:prstGeom>
+          <a:noFill/>
+        </p:spPr>
+        <p:txBody>
+          <a:bodyPr wrap="square" anchor="t" lIns="0" rIns="0" tIns="0" bIns="0">
+            <a:spAutoFit/>
+          </a:bodyPr>
+          <a:lstStyle/>
+          <a:p>
+            <a:pPr algn="l">
+              <a:lnSpc>
+                <a:spcPct val="100000"/>
+              </a:lnSpc>
+            </a:pPr>
+            <a:r>
+              <a:rPr sz="1300" b="1">
+                <a:solidFill>
+                  <a:srgbClr val="D20A2E"/>
+                </a:solidFill>
+                <a:latin typeface="Microsoft YaHei"/>
+              </a:rPr>
+              <a:t>比 S1 三条轴全胜</a:t>
+            </a:r>
+          </a:p>
+        </p:txBody>
+      </p:sp>
+      <p:sp>
+        <p:nvSpPr>
+          <p:cNvPr id="16" name="TextBox 15"/>
+          <p:cNvSpPr txBox="1"/>
+          <p:nvPr/>
+        </p:nvSpPr>
+        <p:spPr>
+          <a:xfrm>
+            <a:off x="768096" y="5152194"/>
+            <a:ext cx="3125114" cy="868740"/>
+          </a:xfrm>
+          <a:prstGeom prst="rect">
+            <a:avLst/>
+          </a:prstGeom>
+          <a:noFill/>
+        </p:spPr>
+        <p:txBody>
+          <a:bodyPr wrap="square" anchor="t" lIns="0" rIns="0" tIns="0" bIns="0">
+            <a:spAutoFit/>
+          </a:bodyPr>
+          <a:lstStyle/>
+          <a:p>
+            <a:pPr algn="l">
+              <a:lnSpc>
+                <a:spcPct val="102000"/>
+              </a:lnSpc>
+            </a:pPr>
+            <a:r>
+              <a:rPr sz="1100" b="0">
+                <a:solidFill>
+                  <a:srgbClr val="20242C"/>
+                </a:solidFill>
+                <a:latin typeface="Microsoft YaHei"/>
+              </a:rPr>
+              <a:t>带宽 5.2067 vs 4.6397（</a:t>
+            </a:r>
+            <a:r>
+              <a:rPr sz="1100" b="1">
+                <a:solidFill>
+                  <a:srgbClr val="20242C"/>
+                </a:solidFill>
+                <a:latin typeface="Microsoft YaHei"/>
+              </a:rPr>
+              <a:t>多 12.2%</a:t>
+            </a:r>
+            <a:r>
+              <a:rPr sz="1100" b="0">
+                <a:solidFill>
+                  <a:srgbClr val="20242C"/>
+                </a:solidFill>
+                <a:latin typeface="Microsoft YaHei"/>
+              </a:rPr>
+              <a:t>）、Jain 0.96074 vs 0.95675、max/min 1.3323 vs 1.3586。硬件 4,440 vs </a:t>
+            </a:r>
+            <a:r>
+              <a:rPr sz="1100" b="1">
+                <a:solidFill>
+                  <a:srgbClr val="20242C"/>
+                </a:solidFill>
+                <a:latin typeface="Microsoft YaHei"/>
+              </a:rPr>
+              <a:t>21,220</a:t>
+            </a:r>
+            <a:r>
+              <a:rPr sz="1100" b="0">
+                <a:solidFill>
+                  <a:srgbClr val="20242C"/>
+                </a:solidFill>
+                <a:latin typeface="Microsoft YaHei"/>
+              </a:rPr>
+              <a:t> FF‑eq。</a:t>
+            </a:r>
+            <a:r>
+              <a:rPr sz="1100" b="1">
+                <a:solidFill>
+                  <a:srgbClr val="D20A2E"/>
+                </a:solidFill>
+                <a:latin typeface="Microsoft YaHei"/>
+              </a:rPr>
+              <a:t>S1 那一格换成日历触发就全面更好。</a:t>
+            </a:r>
+          </a:p>
+        </p:txBody>
+      </p:sp>
+      <p:sp>
+        <p:nvSpPr>
+          <p:cNvPr id="17" name="Rectangle 16"/>
+          <p:cNvSpPr/>
+          <p:nvPr/>
+        </p:nvSpPr>
+        <p:spPr>
+          <a:xfrm>
+            <a:off x="4332122" y="4448987"/>
+            <a:ext cx="3527450" cy="1878660"/>
+          </a:xfrm>
+          <a:prstGeom prst="rect">
+            <a:avLst/>
+          </a:prstGeom>
+          <a:solidFill>
+            <a:srgbClr val="EDF2F7"/>
           </a:solidFill>
           <a:ln w="12700">
             <a:solidFill>
@@ -30965,14 +32002,14 @@
       </p:sp>
       <p:sp>
         <p:nvSpPr>
-          <p:cNvPr id="11" name="TextBox 10"/>
-          <p:cNvSpPr txBox="1"/>
-          <p:nvPr/>
-        </p:nvSpPr>
-        <p:spPr>
-          <a:xfrm>
-            <a:off x="768096" y="2699811"/>
-            <a:ext cx="2197531" cy="314705"/>
+          <p:cNvPr id="18" name="TextBox 17"/>
+          <p:cNvSpPr txBox="1"/>
+          <p:nvPr/>
+        </p:nvSpPr>
+        <p:spPr>
+          <a:xfrm>
+            <a:off x="4533290" y="4650155"/>
+            <a:ext cx="3125114" cy="277622"/>
           </a:xfrm>
           <a:prstGeom prst="rect">
             <a:avLst/>
@@ -30991,27 +32028,27 @@
               </a:lnSpc>
             </a:pPr>
             <a:r>
-              <a:rPr sz="1500" b="1">
-                <a:solidFill>
-                  <a:srgbClr val="20242C"/>
-                </a:solidFill>
-                <a:latin typeface="Microsoft YaHei"/>
-              </a:rPr>
-              <a:t>① 容量问题已闭环</a:t>
-            </a:r>
-          </a:p>
-        </p:txBody>
-      </p:sp>
-      <p:sp>
-        <p:nvSpPr>
-          <p:cNvPr id="12" name="TextBox 11"/>
-          <p:cNvSpPr txBox="1"/>
-          <p:nvPr/>
-        </p:nvSpPr>
-        <p:spPr>
-          <a:xfrm>
-            <a:off x="768096" y="3096813"/>
-            <a:ext cx="2197531" cy="1701454"/>
+              <a:rPr sz="1300" b="1">
+                <a:solidFill>
+                  <a:srgbClr val="20242C"/>
+                </a:solidFill>
+                <a:latin typeface="Microsoft YaHei"/>
+              </a:rPr>
+              <a:t>对 S22：便宜 3.1 倍，略差一点</a:t>
+            </a:r>
+          </a:p>
+        </p:txBody>
+      </p:sp>
+      <p:sp>
+        <p:nvSpPr>
+          <p:cNvPr id="19" name="TextBox 18"/>
+          <p:cNvSpPr txBox="1"/>
+          <p:nvPr/>
+        </p:nvSpPr>
+        <p:spPr>
+          <a:xfrm>
+            <a:off x="4533290" y="5010073"/>
+            <a:ext cx="3125114" cy="1152982"/>
           </a:xfrm>
           <a:prstGeom prst="rect">
             <a:avLst/>
@@ -31030,13 +32067,13 @@
               </a:lnSpc>
             </a:pPr>
             <a:r>
-              <a:rPr sz="1200" b="0">
-                <a:solidFill>
-                  <a:srgbClr val="20242C"/>
-                </a:solidFill>
-                <a:latin typeface="Microsoft YaHei"/>
-              </a:rPr>
-              <a:t>S0 最忙链路利用率 96.98%；相对 R* 的 3.03% 缺口已按拍拆成有效载荷、绕环重发和四类空转，账目无残项。</a:t>
+              <a:rPr sz="1100" b="0">
+                <a:solidFill>
+                  <a:srgbClr val="20242C"/>
+                </a:solidFill>
+                <a:latin typeface="Microsoft YaHei"/>
+              </a:rPr>
+              <a:t>Jain 0.96074 高于 S22 的 0.94799，但带宽 −6.04% 对 −2.21%、max/min 1.3323 对 1.2230 都更差。</a:t>
             </a:r>
           </a:p>
           <a:p>
@@ -31049,33 +32086,33 @@
               </a:spcBef>
             </a:pPr>
             <a:r>
-              <a:rPr sz="1200" b="1">
-                <a:solidFill>
-                  <a:srgbClr val="D20A2E"/>
-                </a:solidFill>
-                <a:latin typeface="Microsoft YaHei"/>
-              </a:rPr>
-              <a:t>结论：当前问题不是带宽没打满，而是满载时服务机会分配不均。</a:t>
-            </a:r>
-          </a:p>
-        </p:txBody>
-      </p:sp>
-      <p:sp>
-        <p:nvSpPr>
-          <p:cNvPr id="13" name="Rectangle 12"/>
+              <a:rPr sz="1100" b="0">
+                <a:solidFill>
+                  <a:srgbClr val="20242C"/>
+                </a:solidFill>
+                <a:latin typeface="Microsoft YaHei"/>
+              </a:rPr>
+              <a:t>差距的来源就是它省掉的那部分：日历不知道谁落后，让位的方向不总是从领先者流向落后者。</a:t>
+            </a:r>
+          </a:p>
+        </p:txBody>
+      </p:sp>
+      <p:sp>
+        <p:nvSpPr>
+          <p:cNvPr id="20" name="Rectangle 19"/>
           <p:cNvSpPr/>
           <p:nvPr/>
         </p:nvSpPr>
         <p:spPr>
           <a:xfrm>
-            <a:off x="3386251" y="2231136"/>
-            <a:ext cx="2599867" cy="2999231"/>
+            <a:off x="8097316" y="4448987"/>
+            <a:ext cx="3527450" cy="1878660"/>
           </a:xfrm>
           <a:prstGeom prst="rect">
             <a:avLst/>
           </a:prstGeom>
           <a:solidFill>
-            <a:srgbClr val="FFFFFF"/>
+            <a:srgbClr val="EDF2F7"/>
           </a:solidFill>
           <a:ln w="12700">
             <a:solidFill>
@@ -31108,14 +32145,14 @@
       </p:sp>
       <p:sp>
         <p:nvSpPr>
-          <p:cNvPr id="14" name="TextBox 13"/>
-          <p:cNvSpPr txBox="1"/>
-          <p:nvPr/>
-        </p:nvSpPr>
-        <p:spPr>
-          <a:xfrm>
-            <a:off x="3587419" y="2813288"/>
-            <a:ext cx="2197531" cy="314705"/>
+          <p:cNvPr id="21" name="TextBox 20"/>
+          <p:cNvSpPr txBox="1"/>
+          <p:nvPr/>
+        </p:nvSpPr>
+        <p:spPr>
+          <a:xfrm>
+            <a:off x="8298484" y="4650155"/>
+            <a:ext cx="3125114" cy="277622"/>
           </a:xfrm>
           <a:prstGeom prst="rect">
             <a:avLst/>
@@ -31134,27 +32171,27 @@
               </a:lnSpc>
             </a:pPr>
             <a:r>
-              <a:rPr sz="1500" b="1">
-                <a:solidFill>
-                  <a:srgbClr val="20242C"/>
-                </a:solidFill>
-                <a:latin typeface="Microsoft YaHei"/>
-              </a:rPr>
-              <a:t>② 公平性是结构问题</a:t>
-            </a:r>
-          </a:p>
-        </p:txBody>
-      </p:sp>
-      <p:sp>
-        <p:nvSpPr>
-          <p:cNvPr id="15" name="TextBox 14"/>
-          <p:cNvSpPr txBox="1"/>
-          <p:nvPr/>
-        </p:nvSpPr>
-        <p:spPr>
-          <a:xfrm>
-            <a:off x="3587419" y="3210290"/>
-            <a:ext cx="2197531" cy="1474500"/>
+              <a:rPr sz="1300" b="1">
+                <a:solidFill>
+                  <a:srgbClr val="20242C"/>
+                </a:solidFill>
+                <a:latin typeface="Microsoft YaHei"/>
+              </a:rPr>
+              <a:t>非均匀流量下也站得住</a:t>
+            </a:r>
+          </a:p>
+        </p:txBody>
+      </p:sp>
+      <p:sp>
+        <p:nvSpPr>
+          <p:cNvPr id="22" name="TextBox 21"/>
+          <p:cNvSpPr txBox="1"/>
+          <p:nvPr/>
+        </p:nvSpPr>
+        <p:spPr>
+          <a:xfrm>
+            <a:off x="8298484" y="5010073"/>
+            <a:ext cx="3125114" cy="1152982"/>
           </a:xfrm>
           <a:prstGeom prst="rect">
             <a:avLst/>
@@ -31173,13 +32210,31 @@
               </a:lnSpc>
             </a:pPr>
             <a:r>
-              <a:rPr sz="1200" b="0">
-                <a:solidFill>
-                  <a:srgbClr val="20242C"/>
-                </a:solidFill>
-                <a:latin typeface="Microsoft YaHei"/>
-              </a:rPr>
-              <a:t>六快四慢随时间稳定存在；即使完全抹平瞬时抖动，Jain 上限仍只有 0.96458，核间长期速率比为 1.5673。</a:t>
+              <a:rPr sz="1100" b="0">
+                <a:solidFill>
+                  <a:srgbClr val="20242C"/>
+                </a:solidFill>
+                <a:latin typeface="Microsoft YaHei"/>
+              </a:rPr>
+              <a:t>hot 上 S29 = R* 的 </a:t>
+            </a:r>
+            <a:r>
+              <a:rPr sz="1100" b="1">
+                <a:solidFill>
+                  <a:srgbClr val="20242C"/>
+                </a:solidFill>
+                <a:latin typeface="Microsoft YaHei"/>
+              </a:rPr>
+              <a:t>98.66%</a:t>
+            </a:r>
+            <a:r>
+              <a:rPr sz="1100" b="0">
+                <a:solidFill>
+                  <a:srgbClr val="20242C"/>
+                </a:solidFill>
+                <a:latin typeface="Microsoft YaHei"/>
+              </a:rPr>
+              <a:t>，与 S22-stock 的 98.75% 相差 0.09 个百分点，而硬件只有它的 1/3。</a:t>
             </a:r>
           </a:p>
           <a:p>
@@ -31192,427 +32247,20 @@
               </a:spcBef>
             </a:pPr>
             <a:r>
-              <a:rPr sz="1200" b="1">
-                <a:solidFill>
-                  <a:srgbClr val="D20A2E"/>
-                </a:solidFill>
-                <a:latin typeface="Microsoft YaHei"/>
-              </a:rPr>
-              <a:t>结论：只整形发包时机不够，必须在瓶颈处重新分配服务机会。</a:t>
-            </a:r>
-          </a:p>
-        </p:txBody>
-      </p:sp>
-      <p:sp>
-        <p:nvSpPr>
-          <p:cNvPr id="16" name="Rectangle 15"/>
-          <p:cNvSpPr/>
-          <p:nvPr/>
-        </p:nvSpPr>
-        <p:spPr>
-          <a:xfrm>
-            <a:off x="6205575" y="2231136"/>
-            <a:ext cx="2599867" cy="2999231"/>
-          </a:xfrm>
-          <a:prstGeom prst="rect">
-            <a:avLst/>
-          </a:prstGeom>
-          <a:solidFill>
-            <a:srgbClr val="FFFFFF"/>
-          </a:solidFill>
-          <a:ln w="12700">
-            <a:solidFill>
-              <a:srgbClr val="DCE3EA"/>
-            </a:solidFill>
-          </a:ln>
-          <a:effectLst/>
-        </p:spPr>
-        <p:style>
-          <a:lnRef idx="1">
-            <a:schemeClr val="accent1"/>
-          </a:lnRef>
-          <a:fillRef idx="3">
-            <a:schemeClr val="accent1"/>
-          </a:fillRef>
-          <a:effectRef idx="2">
-            <a:schemeClr val="accent1"/>
-          </a:effectRef>
-          <a:fontRef idx="minor">
-            <a:schemeClr val="lt1"/>
-          </a:fontRef>
-        </p:style>
-        <p:txBody>
-          <a:bodyPr rtlCol="0" anchor="ctr" wrap="square"/>
-          <a:lstStyle/>
-          <a:p>
-            <a:pPr algn="ctr"/>
-          </a:p>
-        </p:txBody>
-      </p:sp>
-      <p:sp>
-        <p:nvSpPr>
-          <p:cNvPr id="17" name="TextBox 16"/>
-          <p:cNvSpPr txBox="1"/>
-          <p:nvPr/>
-        </p:nvSpPr>
-        <p:spPr>
-          <a:xfrm>
-            <a:off x="6406743" y="2586334"/>
-            <a:ext cx="2197531" cy="314705"/>
-          </a:xfrm>
-          <a:prstGeom prst="rect">
-            <a:avLst/>
-          </a:prstGeom>
-          <a:noFill/>
-        </p:spPr>
-        <p:txBody>
-          <a:bodyPr wrap="square" anchor="t" lIns="0" rIns="0" tIns="0" bIns="0">
-            <a:spAutoFit/>
-          </a:bodyPr>
-          <a:lstStyle/>
-          <a:p>
-            <a:pPr algn="l">
-              <a:lnSpc>
-                <a:spcPct val="100000"/>
-              </a:lnSpc>
-            </a:pPr>
-            <a:r>
-              <a:rPr sz="1500" b="1">
-                <a:solidFill>
-                  <a:srgbClr val="20242C"/>
-                </a:solidFill>
-                <a:latin typeface="Microsoft YaHei"/>
-              </a:rPr>
-              <a:t>③ 上界与评价口径已建立</a:t>
-            </a:r>
-          </a:p>
-        </p:txBody>
-      </p:sp>
-      <p:sp>
-        <p:nvSpPr>
-          <p:cNvPr id="18" name="TextBox 17"/>
-          <p:cNvSpPr txBox="1"/>
-          <p:nvPr/>
-        </p:nvSpPr>
-        <p:spPr>
-          <a:xfrm>
-            <a:off x="6406743" y="2983336"/>
-            <a:ext cx="2197531" cy="1928408"/>
-          </a:xfrm>
-          <a:prstGeom prst="rect">
-            <a:avLst/>
-          </a:prstGeom>
-          <a:noFill/>
-        </p:spPr>
-        <p:txBody>
-          <a:bodyPr wrap="square" anchor="t" lIns="0" rIns="0" tIns="0" bIns="0">
-            <a:spAutoFit/>
-          </a:bodyPr>
-          <a:lstStyle/>
-          <a:p>
-            <a:pPr algn="l">
-              <a:lnSpc>
-                <a:spcPct val="102000"/>
-              </a:lnSpc>
-            </a:pPr>
-            <a:r>
-              <a:rPr sz="1200" b="0">
-                <a:solidFill>
-                  <a:srgbClr val="20242C"/>
-                </a:solidFill>
-                <a:latin typeface="Microsoft YaHei"/>
-              </a:rPr>
-              <a:t>由逐链路占用约束求得 R(J) 理论边界与等速率上限 R* = 5.7143；再用 100 拍 Jain、长期 max/min、硬件 FF‑eq 和流量迁移统一评估。</a:t>
-            </a:r>
-          </a:p>
-          <a:p>
-            <a:pPr algn="l">
-              <a:lnSpc>
-                <a:spcPct val="102000"/>
-              </a:lnSpc>
-              <a:spcBef>
-                <a:spcPts val="600"/>
-              </a:spcBef>
-            </a:pPr>
-            <a:r>
-              <a:rPr sz="1200" b="1">
-                <a:solidFill>
-                  <a:srgbClr val="D20A2E"/>
-                </a:solidFill>
-                <a:latin typeface="Microsoft YaHei"/>
-              </a:rPr>
-              <a:t>结论：方案优劣来自同一上界下的可量化差距，不依赖经验判断。</a:t>
-            </a:r>
-          </a:p>
-        </p:txBody>
-      </p:sp>
-      <p:sp>
-        <p:nvSpPr>
-          <p:cNvPr id="19" name="Rectangle 18"/>
-          <p:cNvSpPr/>
-          <p:nvPr/>
-        </p:nvSpPr>
-        <p:spPr>
-          <a:xfrm>
-            <a:off x="9024899" y="2231136"/>
-            <a:ext cx="2599867" cy="2999231"/>
-          </a:xfrm>
-          <a:prstGeom prst="rect">
-            <a:avLst/>
-          </a:prstGeom>
-          <a:solidFill>
-            <a:srgbClr val="FFFFFF"/>
-          </a:solidFill>
-          <a:ln w="19050">
-            <a:solidFill>
-              <a:srgbClr val="D20A2E"/>
-            </a:solidFill>
-          </a:ln>
-          <a:effectLst/>
-        </p:spPr>
-        <p:style>
-          <a:lnRef idx="1">
-            <a:schemeClr val="accent1"/>
-          </a:lnRef>
-          <a:fillRef idx="3">
-            <a:schemeClr val="accent1"/>
-          </a:fillRef>
-          <a:effectRef idx="2">
-            <a:schemeClr val="accent1"/>
-          </a:effectRef>
-          <a:fontRef idx="minor">
-            <a:schemeClr val="lt1"/>
-          </a:fontRef>
-        </p:style>
-        <p:txBody>
-          <a:bodyPr rtlCol="0" anchor="ctr" wrap="square"/>
-          <a:lstStyle/>
-          <a:p>
-            <a:pPr algn="ctr"/>
-          </a:p>
-        </p:txBody>
-      </p:sp>
-      <p:sp>
-        <p:nvSpPr>
-          <p:cNvPr id="20" name="TextBox 19"/>
-          <p:cNvSpPr txBox="1"/>
-          <p:nvPr/>
-        </p:nvSpPr>
-        <p:spPr>
-          <a:xfrm>
-            <a:off x="9226067" y="2533775"/>
-            <a:ext cx="2197531" cy="314705"/>
-          </a:xfrm>
-          <a:prstGeom prst="rect">
-            <a:avLst/>
-          </a:prstGeom>
-          <a:noFill/>
-        </p:spPr>
-        <p:txBody>
-          <a:bodyPr wrap="square" anchor="t" lIns="0" rIns="0" tIns="0" bIns="0">
-            <a:spAutoFit/>
-          </a:bodyPr>
-          <a:lstStyle/>
-          <a:p>
-            <a:pPr algn="l">
-              <a:lnSpc>
-                <a:spcPct val="100000"/>
-              </a:lnSpc>
-            </a:pPr>
-            <a:r>
-              <a:rPr sz="1500" b="1">
-                <a:solidFill>
-                  <a:srgbClr val="D20A2E"/>
-                </a:solidFill>
-                <a:latin typeface="Microsoft YaHei"/>
-              </a:rPr>
-              <a:t>④ 控制点决定方案</a:t>
-            </a:r>
-          </a:p>
-        </p:txBody>
-      </p:sp>
-      <p:sp>
-        <p:nvSpPr>
-          <p:cNvPr id="21" name="TextBox 20"/>
-          <p:cNvSpPr txBox="1"/>
-          <p:nvPr/>
-        </p:nvSpPr>
-        <p:spPr>
-          <a:xfrm>
-            <a:off x="9226067" y="2930777"/>
-            <a:ext cx="2197531" cy="2033526"/>
-          </a:xfrm>
-          <a:prstGeom prst="rect">
-            <a:avLst/>
-          </a:prstGeom>
-          <a:noFill/>
-        </p:spPr>
-        <p:txBody>
-          <a:bodyPr wrap="square" anchor="t" lIns="0" rIns="0" tIns="0" bIns="0">
-            <a:spAutoFit/>
-          </a:bodyPr>
-          <a:lstStyle/>
-          <a:p>
-            <a:pPr algn="l">
-              <a:lnSpc>
-                <a:spcPct val="102000"/>
-              </a:lnSpc>
-            </a:pPr>
-            <a:r>
-              <a:rPr sz="850" b="0">
-                <a:solidFill>
-                  <a:srgbClr val="20242C"/>
-                </a:solidFill>
-                <a:latin typeface="Microsoft YaHei"/>
-              </a:rPr>
-              <a:t>S16 在 HA 授权点直接重排服务：900 FF‑eq，Jain 0.98466，max/min 1.0001，总带宽仅 −0.39%。</a:t>
-            </a:r>
-          </a:p>
-          <a:p>
-            <a:pPr algn="l">
-              <a:lnSpc>
-                <a:spcPct val="102000"/>
-              </a:lnSpc>
-              <a:spcBef>
-                <a:spcPts val="600"/>
-              </a:spcBef>
-            </a:pPr>
-            <a:r>
-              <a:rPr sz="850" b="0">
-                <a:solidFill>
-                  <a:srgbClr val="20242C"/>
-                </a:solidFill>
-                <a:latin typeface="Microsoft YaHei"/>
-              </a:rPr>
-              <a:t>八类分类里原本空着的四类已全部实现并实测：自适应路由（S26）与逐跳背压（S27）结构性失效，显式速率要么不动公平（S28）要么用 40% 带宽换公平（S28S），只有预约调度（S29，复用让位执行器）三条轴全面优于 S1。</a:t>
-            </a:r>
-          </a:p>
-          <a:p>
-            <a:pPr algn="l">
-              <a:lnSpc>
-                <a:spcPct val="102000"/>
-              </a:lnSpc>
-              <a:spcBef>
-                <a:spcPts val="600"/>
-              </a:spcBef>
-            </a:pPr>
-            <a:r>
-              <a:rPr sz="850" b="0">
-                <a:solidFill>
-                  <a:srgbClr val="20242C"/>
-                </a:solidFill>
-                <a:latin typeface="Microsoft YaHei"/>
-              </a:rPr>
-              <a:t>若事务层不可改，S22 是只动环仲裁的备选；S19 / S20 仅作对照。</a:t>
-            </a:r>
-          </a:p>
-          <a:p>
-            <a:pPr algn="l">
-              <a:lnSpc>
-                <a:spcPct val="102000"/>
-              </a:lnSpc>
-              <a:spcBef>
-                <a:spcPts val="600"/>
-              </a:spcBef>
-            </a:pPr>
-            <a:r>
-              <a:rPr sz="850" b="1">
-                <a:solidFill>
-                  <a:srgbClr val="D20A2E"/>
-                </a:solidFill>
-                <a:latin typeface="Microsoft YaHei"/>
-              </a:rPr>
-              <a:t>架构决策只剩：HA 授权调度能不能改。</a:t>
-            </a:r>
-          </a:p>
-        </p:txBody>
-      </p:sp>
-      <p:sp>
-        <p:nvSpPr>
-          <p:cNvPr id="22" name="Rectangle 21"/>
-          <p:cNvSpPr/>
-          <p:nvPr/>
-        </p:nvSpPr>
-        <p:spPr>
-          <a:xfrm>
-            <a:off x="566928" y="5468112"/>
-            <a:ext cx="11057839" cy="859536"/>
-          </a:xfrm>
-          <a:prstGeom prst="rect">
-            <a:avLst/>
-          </a:prstGeom>
-          <a:solidFill>
-            <a:srgbClr val="D20A2E"/>
-          </a:solidFill>
-          <a:ln>
-            <a:noFill/>
-          </a:ln>
-          <a:effectLst/>
-        </p:spPr>
-        <p:style>
-          <a:lnRef idx="1">
-            <a:schemeClr val="accent1"/>
-          </a:lnRef>
-          <a:fillRef idx="3">
-            <a:schemeClr val="accent1"/>
-          </a:fillRef>
-          <a:effectRef idx="2">
-            <a:schemeClr val="accent1"/>
-          </a:effectRef>
-          <a:fontRef idx="minor">
-            <a:schemeClr val="lt1"/>
-          </a:fontRef>
-        </p:style>
-        <p:txBody>
-          <a:bodyPr rtlCol="0" anchor="ctr" wrap="square"/>
-          <a:lstStyle/>
-          <a:p>
-            <a:pPr algn="ctr"/>
+              <a:rPr sz="1100" b="0">
+                <a:solidFill>
+                  <a:srgbClr val="20242C"/>
+                </a:solidFill>
+                <a:latin typeface="Microsoft YaHei"/>
+              </a:rPr>
+              <a:t>它不含任何 pattern 先验：日历是常量，需求位是本地事实。</a:t>
+            </a:r>
           </a:p>
         </p:txBody>
       </p:sp>
       <p:sp>
         <p:nvSpPr>
           <p:cNvPr id="23" name="TextBox 22"/>
-          <p:cNvSpPr txBox="1"/>
-          <p:nvPr/>
-        </p:nvSpPr>
-        <p:spPr>
-          <a:xfrm>
-            <a:off x="877824" y="5559552"/>
-            <a:ext cx="10436047" cy="676656"/>
-          </a:xfrm>
-          <a:prstGeom prst="rect">
-            <a:avLst/>
-          </a:prstGeom>
-          <a:noFill/>
-        </p:spPr>
-        <p:txBody>
-          <a:bodyPr wrap="square" anchor="ctr" lIns="0" rIns="0" tIns="0" bIns="0">
-            <a:spAutoFit/>
-          </a:bodyPr>
-          <a:lstStyle/>
-          <a:p>
-            <a:pPr algn="l">
-              <a:lnSpc>
-                <a:spcPct val="104000"/>
-              </a:lnSpc>
-            </a:pPr>
-            <a:r>
-              <a:rPr sz="1300" b="0">
-                <a:solidFill>
-                  <a:srgbClr val="FFFFFF"/>
-                </a:solidFill>
-                <a:latin typeface="Microsoft YaHei"/>
-              </a:rPr>
-              <a:t>本研究完成了「现象复现 → 逐拍归因 → 理论上界 → 机制设计 → 硬件代价 → 流量迁移」闭环，并把开放问题压缩为一项可决策的架构边界。</a:t>
-            </a:r>
-          </a:p>
-        </p:txBody>
-      </p:sp>
-      <p:sp>
-        <p:nvSpPr>
-          <p:cNvPr id="24" name="TextBox 23"/>
           <p:cNvSpPr txBox="1"/>
           <p:nvPr/>
         </p:nvSpPr>
@@ -31644,7 +32292,7 @@
                 </a:solidFill>
                 <a:latin typeface="Arial"/>
               </a:rPr>
-              <a:t>37 / 39</a:t>
+              <a:t>37 / 41</a:t>
             </a:r>
           </a:p>
         </p:txBody>
@@ -31719,8 +32367,8 @@
         </p:nvSpPr>
         <p:spPr>
           <a:xfrm>
-            <a:off x="566928" y="301752"/>
-            <a:ext cx="137160" cy="137160"/>
+            <a:off x="10143439" y="274320"/>
+            <a:ext cx="182880" cy="182880"/>
           </a:xfrm>
           <a:prstGeom prst="rect">
             <a:avLst/>
@@ -31763,8 +32411,8 @@
         </p:nvSpPr>
         <p:spPr>
           <a:xfrm>
-            <a:off x="804672" y="265176"/>
-            <a:ext cx="9229039" cy="237744"/>
+            <a:off x="10399471" y="246888"/>
+            <a:ext cx="1225296" cy="256032"/>
           </a:xfrm>
           <a:prstGeom prst="rect">
             <a:avLst/>
@@ -31783,36 +32431,36 @@
               </a:lnSpc>
             </a:pPr>
             <a:r>
-              <a:rPr sz="1150" b="1">
-                <a:solidFill>
-                  <a:srgbClr val="667080"/>
-                </a:solidFill>
-                <a:latin typeface="Microsoft YaHei"/>
-              </a:rPr>
-              <a:t>建议</a:t>
-            </a:r>
-          </a:p>
-        </p:txBody>
-      </p:sp>
-      <p:sp>
-        <p:nvSpPr>
-          <p:cNvPr id="5" name="Rectangle 4"/>
+              <a:rPr sz="1300" b="1">
+                <a:solidFill>
+                  <a:srgbClr val="20242C"/>
+                </a:solidFill>
+                <a:latin typeface="Arial"/>
+              </a:rPr>
+              <a:t>HUAWEI</a:t>
+            </a:r>
+          </a:p>
+        </p:txBody>
+      </p:sp>
+      <p:sp>
+        <p:nvSpPr>
+          <p:cNvPr id="5" name="Oval 4"/>
           <p:cNvSpPr/>
           <p:nvPr/>
         </p:nvSpPr>
         <p:spPr>
           <a:xfrm>
-            <a:off x="566928" y="640080"/>
-            <a:ext cx="11057839" cy="10058"/>
-          </a:xfrm>
-          <a:prstGeom prst="rect">
-            <a:avLst/>
-          </a:prstGeom>
-          <a:solidFill>
-            <a:srgbClr val="DCE3EA"/>
-          </a:solidFill>
-          <a:ln>
-            <a:noFill/>
+            <a:off x="566928" y="1883664"/>
+            <a:ext cx="896112" cy="896112"/>
+          </a:xfrm>
+          <a:prstGeom prst="ellipse">
+            <a:avLst/>
+          </a:prstGeom>
+          <a:noFill/>
+          <a:ln w="17780">
+            <a:solidFill>
+              <a:srgbClr val="DCE3EA"/>
+            </a:solidFill>
           </a:ln>
           <a:effectLst/>
         </p:spPr>
@@ -31840,14 +32488,170 @@
       </p:sp>
       <p:sp>
         <p:nvSpPr>
-          <p:cNvPr id="6" name="Rectangle 5"/>
+          <p:cNvPr id="6" name="TextBox 5"/>
+          <p:cNvSpPr txBox="1"/>
+          <p:nvPr/>
+        </p:nvSpPr>
+        <p:spPr>
+          <a:xfrm>
+            <a:off x="566928" y="2176272"/>
+            <a:ext cx="896112" cy="365760"/>
+          </a:xfrm>
+          <a:prstGeom prst="rect">
+            <a:avLst/>
+          </a:prstGeom>
+          <a:noFill/>
+        </p:spPr>
+        <p:txBody>
+          <a:bodyPr wrap="square" anchor="t" lIns="0" rIns="0" tIns="0" bIns="0">
+            <a:spAutoFit/>
+          </a:bodyPr>
+          <a:lstStyle/>
+          <a:p>
+            <a:pPr algn="ctr">
+              <a:lnSpc>
+                <a:spcPct val="100000"/>
+              </a:lnSpc>
+            </a:pPr>
+            <a:r>
+              <a:rPr sz="2100" b="1">
+                <a:solidFill>
+                  <a:srgbClr val="D20A2E"/>
+                </a:solidFill>
+                <a:latin typeface="Arial"/>
+              </a:rPr>
+              <a:t>08</a:t>
+            </a:r>
+          </a:p>
+        </p:txBody>
+      </p:sp>
+      <p:sp>
+        <p:nvSpPr>
+          <p:cNvPr id="7" name="TextBox 6"/>
+          <p:cNvSpPr txBox="1"/>
+          <p:nvPr/>
+        </p:nvSpPr>
+        <p:spPr>
+          <a:xfrm>
+            <a:off x="566928" y="2980944"/>
+            <a:ext cx="4023360" cy="237744"/>
+          </a:xfrm>
+          <a:prstGeom prst="rect">
+            <a:avLst/>
+          </a:prstGeom>
+          <a:noFill/>
+        </p:spPr>
+        <p:txBody>
+          <a:bodyPr wrap="square" anchor="t" lIns="0" rIns="0" tIns="0" bIns="0">
+            <a:spAutoFit/>
+          </a:bodyPr>
+          <a:lstStyle/>
+          <a:p>
+            <a:pPr algn="l">
+              <a:lnSpc>
+                <a:spcPct val="100000"/>
+              </a:lnSpc>
+            </a:pPr>
+            <a:r>
+              <a:rPr sz="1100" b="1">
+                <a:solidFill>
+                  <a:srgbClr val="D20A2E"/>
+                </a:solidFill>
+                <a:latin typeface="Arial"/>
+              </a:rPr>
+              <a:t>S E C T I O N   E I G H T</a:t>
+            </a:r>
+          </a:p>
+        </p:txBody>
+      </p:sp>
+      <p:sp>
+        <p:nvSpPr>
+          <p:cNvPr id="8" name="TextBox 7"/>
+          <p:cNvSpPr txBox="1"/>
+          <p:nvPr/>
+        </p:nvSpPr>
+        <p:spPr>
+          <a:xfrm>
+            <a:off x="566928" y="3291840"/>
+            <a:ext cx="4937760" cy="1426464"/>
+          </a:xfrm>
+          <a:prstGeom prst="rect">
+            <a:avLst/>
+          </a:prstGeom>
+          <a:noFill/>
+        </p:spPr>
+        <p:txBody>
+          <a:bodyPr wrap="square" anchor="t" lIns="0" rIns="0" tIns="0" bIns="0">
+            <a:spAutoFit/>
+          </a:bodyPr>
+          <a:lstStyle/>
+          <a:p>
+            <a:pPr algn="l">
+              <a:lnSpc>
+                <a:spcPct val="98000"/>
+              </a:lnSpc>
+            </a:pPr>
+            <a:r>
+              <a:rPr sz="3800" b="1">
+                <a:solidFill>
+                  <a:srgbClr val="20242C"/>
+                </a:solidFill>
+                <a:latin typeface="Microsoft YaHei"/>
+              </a:rPr>
+              <a:t>结论与建议</a:t>
+            </a:r>
+          </a:p>
+        </p:txBody>
+      </p:sp>
+      <p:sp>
+        <p:nvSpPr>
+          <p:cNvPr id="9" name="TextBox 8"/>
+          <p:cNvSpPr txBox="1"/>
+          <p:nvPr/>
+        </p:nvSpPr>
+        <p:spPr>
+          <a:xfrm>
+            <a:off x="566928" y="4846320"/>
+            <a:ext cx="4572000" cy="786384"/>
+          </a:xfrm>
+          <a:prstGeom prst="rect">
+            <a:avLst/>
+          </a:prstGeom>
+          <a:noFill/>
+        </p:spPr>
+        <p:txBody>
+          <a:bodyPr wrap="square" anchor="t" lIns="0" rIns="0" tIns="0" bIns="0">
+            <a:spAutoFit/>
+          </a:bodyPr>
+          <a:lstStyle/>
+          <a:p>
+            <a:pPr algn="l">
+              <a:lnSpc>
+                <a:spcPct val="106000"/>
+              </a:lnSpc>
+            </a:pPr>
+            <a:r>
+              <a:rPr sz="1400" b="0">
+                <a:solidFill>
+                  <a:srgbClr val="667080"/>
+                </a:solidFill>
+                <a:latin typeface="Microsoft YaHei"/>
+              </a:rPr>
+              <a:t>从现象、根因、理论上界到可实现机制，形成完整证据闭环。</a:t>
+            </a:r>
+          </a:p>
+        </p:txBody>
+      </p:sp>
+      <p:sp>
+        <p:nvSpPr>
+          <p:cNvPr id="10" name="Rectangle 9"/>
           <p:cNvSpPr/>
           <p:nvPr/>
         </p:nvSpPr>
         <p:spPr>
           <a:xfrm>
-            <a:off x="10143439" y="274320"/>
-            <a:ext cx="182880" cy="182880"/>
+            <a:off x="5989320" y="2011680"/>
+            <a:ext cx="5635447" cy="2834640"/>
           </a:xfrm>
           <a:prstGeom prst="rect">
             <a:avLst/>
@@ -31884,14 +32688,14 @@
       </p:sp>
       <p:sp>
         <p:nvSpPr>
-          <p:cNvPr id="7" name="TextBox 6"/>
-          <p:cNvSpPr txBox="1"/>
-          <p:nvPr/>
-        </p:nvSpPr>
-        <p:spPr>
-          <a:xfrm>
-            <a:off x="10399471" y="246888"/>
-            <a:ext cx="1225296" cy="256032"/>
+          <p:cNvPr id="11" name="TextBox 10"/>
+          <p:cNvSpPr txBox="1"/>
+          <p:nvPr/>
+        </p:nvSpPr>
+        <p:spPr>
+          <a:xfrm>
+            <a:off x="6355080" y="2395728"/>
+            <a:ext cx="3657600" cy="237744"/>
           </a:xfrm>
           <a:prstGeom prst="rect">
             <a:avLst/>
@@ -31910,182 +32714,14 @@
               </a:lnSpc>
             </a:pPr>
             <a:r>
-              <a:rPr sz="1300" b="1">
-                <a:solidFill>
-                  <a:srgbClr val="20242C"/>
+              <a:rPr sz="1100" b="1">
+                <a:solidFill>
+                  <a:srgbClr val="FFFFFF"/>
                 </a:solidFill>
                 <a:latin typeface="Arial"/>
               </a:rPr>
-              <a:t>HUAWEI</a:t>
-            </a:r>
-          </a:p>
-        </p:txBody>
-      </p:sp>
-      <p:sp>
-        <p:nvSpPr>
-          <p:cNvPr id="8" name="TextBox 7"/>
-          <p:cNvSpPr txBox="1"/>
-          <p:nvPr/>
-        </p:nvSpPr>
-        <p:spPr>
-          <a:xfrm>
-            <a:off x="566928" y="1060704"/>
-            <a:ext cx="11057839" cy="237744"/>
-          </a:xfrm>
-          <a:prstGeom prst="rect">
-            <a:avLst/>
-          </a:prstGeom>
-          <a:noFill/>
-        </p:spPr>
-        <p:txBody>
-          <a:bodyPr wrap="square" anchor="t" lIns="0" rIns="0" tIns="0" bIns="0">
-            <a:spAutoFit/>
-          </a:bodyPr>
-          <a:lstStyle/>
-          <a:p>
-            <a:pPr algn="l">
-              <a:lnSpc>
-                <a:spcPct val="100000"/>
-              </a:lnSpc>
-            </a:pPr>
-            <a:r>
-              <a:rPr sz="1050" b="1">
-                <a:solidFill>
-                  <a:srgbClr val="D20A2E"/>
-                </a:solidFill>
-                <a:latin typeface="Arial"/>
-              </a:rPr>
-              <a:t>R E C O M M E N D A T I O N</a:t>
-            </a:r>
-          </a:p>
-        </p:txBody>
-      </p:sp>
-      <p:sp>
-        <p:nvSpPr>
-          <p:cNvPr id="9" name="TextBox 8"/>
-          <p:cNvSpPr txBox="1"/>
-          <p:nvPr/>
-        </p:nvSpPr>
-        <p:spPr>
-          <a:xfrm>
-            <a:off x="566928" y="1353312"/>
-            <a:ext cx="11057839" cy="658368"/>
-          </a:xfrm>
-          <a:prstGeom prst="rect">
-            <a:avLst/>
-          </a:prstGeom>
-          <a:noFill/>
-        </p:spPr>
-        <p:txBody>
-          <a:bodyPr wrap="square" anchor="t" lIns="0" rIns="0" tIns="0" bIns="0">
-            <a:spAutoFit/>
-          </a:bodyPr>
-          <a:lstStyle/>
-          <a:p>
-            <a:pPr algn="l">
-              <a:lnSpc>
-                <a:spcPct val="100000"/>
-              </a:lnSpc>
-            </a:pPr>
-            <a:r>
-              <a:rPr sz="3000" b="1">
-                <a:solidFill>
-                  <a:srgbClr val="20242C"/>
-                </a:solidFill>
-                <a:latin typeface="Microsoft YaHei"/>
-              </a:rPr>
-              <a:t>只保留一主一备，明确研究边界</a:t>
-            </a:r>
-          </a:p>
-        </p:txBody>
-      </p:sp>
-      <p:sp>
-        <p:nvSpPr>
-          <p:cNvPr id="10" name="Rectangle 9"/>
-          <p:cNvSpPr/>
-          <p:nvPr/>
-        </p:nvSpPr>
-        <p:spPr>
-          <a:xfrm>
-            <a:off x="566928" y="2194560"/>
-            <a:ext cx="3539642" cy="3017520"/>
-          </a:xfrm>
-          <a:prstGeom prst="rect">
-            <a:avLst/>
-          </a:prstGeom>
-          <a:solidFill>
-            <a:srgbClr val="FFFFFF"/>
-          </a:solidFill>
-          <a:ln w="19050">
-            <a:solidFill>
-              <a:srgbClr val="D20A2E"/>
-            </a:solidFill>
-          </a:ln>
-          <a:effectLst/>
-        </p:spPr>
-        <p:style>
-          <a:lnRef idx="1">
-            <a:schemeClr val="accent1"/>
-          </a:lnRef>
-          <a:fillRef idx="3">
-            <a:schemeClr val="accent1"/>
-          </a:fillRef>
-          <a:effectRef idx="2">
-            <a:schemeClr val="accent1"/>
-          </a:effectRef>
-          <a:fontRef idx="minor">
-            <a:schemeClr val="lt1"/>
-          </a:fontRef>
-        </p:style>
-        <p:txBody>
-          <a:bodyPr rtlCol="0" anchor="ctr" wrap="square"/>
-          <a:lstStyle/>
-          <a:p>
-            <a:pPr algn="ctr"/>
-          </a:p>
-        </p:txBody>
-      </p:sp>
-      <p:sp>
-        <p:nvSpPr>
-          <p:cNvPr id="11" name="Oval 10"/>
-          <p:cNvSpPr/>
-          <p:nvPr/>
-        </p:nvSpPr>
-        <p:spPr>
-          <a:xfrm>
-            <a:off x="786384" y="2414016"/>
-            <a:ext cx="384048" cy="384048"/>
-          </a:xfrm>
-          <a:prstGeom prst="ellipse">
-            <a:avLst/>
-          </a:prstGeom>
-          <a:solidFill>
-            <a:srgbClr val="D20A2E"/>
-          </a:solidFill>
-          <a:ln>
-            <a:noFill/>
-          </a:ln>
-          <a:effectLst/>
-        </p:spPr>
-        <p:style>
-          <a:lnRef idx="1">
-            <a:schemeClr val="accent1"/>
-          </a:lnRef>
-          <a:fillRef idx="3">
-            <a:schemeClr val="accent1"/>
-          </a:fillRef>
-          <a:effectRef idx="2">
-            <a:schemeClr val="accent1"/>
-          </a:effectRef>
-          <a:fontRef idx="minor">
-            <a:schemeClr val="lt1"/>
-          </a:fontRef>
-        </p:style>
-        <p:txBody>
-          <a:bodyPr rtlCol="0" anchor="ctr" wrap="square"/>
-          <a:lstStyle/>
-          <a:p>
-            <a:pPr algn="ctr"/>
+              <a:t>B O T T O M   L I N E</a:t>
+            </a:r>
           </a:p>
         </p:txBody>
       </p:sp>
@@ -32097,33 +32733,33 @@
         </p:nvSpPr>
         <p:spPr>
           <a:xfrm>
-            <a:off x="786384" y="2496312"/>
-            <a:ext cx="384048" cy="237744"/>
-          </a:xfrm>
-          <a:prstGeom prst="rect">
-            <a:avLst/>
-          </a:prstGeom>
-          <a:noFill/>
-        </p:spPr>
-        <p:txBody>
-          <a:bodyPr wrap="square" anchor="t" lIns="0" rIns="0" tIns="0" bIns="0">
-            <a:spAutoFit/>
-          </a:bodyPr>
-          <a:lstStyle/>
-          <a:p>
-            <a:pPr algn="ctr">
-              <a:lnSpc>
-                <a:spcPct val="100000"/>
-              </a:lnSpc>
-            </a:pPr>
-            <a:r>
-              <a:rPr sz="1150" b="1">
+            <a:off x="6355080" y="2761488"/>
+            <a:ext cx="4903927" cy="1737360"/>
+          </a:xfrm>
+          <a:prstGeom prst="rect">
+            <a:avLst/>
+          </a:prstGeom>
+          <a:noFill/>
+        </p:spPr>
+        <p:txBody>
+          <a:bodyPr wrap="square" anchor="t" lIns="0" rIns="0" tIns="0" bIns="0">
+            <a:spAutoFit/>
+          </a:bodyPr>
+          <a:lstStyle/>
+          <a:p>
+            <a:pPr algn="l">
+              <a:lnSpc>
+                <a:spcPct val="104000"/>
+              </a:lnSpc>
+            </a:pPr>
+            <a:r>
+              <a:rPr sz="2000" b="1">
                 <a:solidFill>
                   <a:srgbClr val="FFFFFF"/>
                 </a:solidFill>
-                <a:latin typeface="Arial"/>
-              </a:rPr>
-              <a:t>01</a:t>
+                <a:latin typeface="Microsoft YaHei"/>
+              </a:rPr>
+              <a:t>问题已经收敛为一个架构决策：能改 HA 授权调度就验证 S16；事务层不能改，则验证只动环上仲裁的 S22。</a:t>
             </a:r>
           </a:p>
         </p:txBody>
@@ -32131,776 +32767,6 @@
       <p:sp>
         <p:nvSpPr>
           <p:cNvPr id="13" name="TextBox 12"/>
-          <p:cNvSpPr txBox="1"/>
-          <p:nvPr/>
-        </p:nvSpPr>
-        <p:spPr>
-          <a:xfrm>
-            <a:off x="786384" y="2965650"/>
-            <a:ext cx="3100730" cy="314705"/>
-          </a:xfrm>
-          <a:prstGeom prst="rect">
-            <a:avLst/>
-          </a:prstGeom>
-          <a:noFill/>
-        </p:spPr>
-        <p:txBody>
-          <a:bodyPr wrap="square" anchor="t" lIns="0" rIns="0" tIns="0" bIns="0">
-            <a:spAutoFit/>
-          </a:bodyPr>
-          <a:lstStyle/>
-          <a:p>
-            <a:pPr algn="l">
-              <a:lnSpc>
-                <a:spcPct val="100000"/>
-              </a:lnSpc>
-            </a:pPr>
-            <a:r>
-              <a:rPr sz="1500" b="1">
-                <a:solidFill>
-                  <a:srgbClr val="D20A2E"/>
-                </a:solidFill>
-                <a:latin typeface="Microsoft YaHei"/>
-              </a:rPr>
-              <a:t>主方案 · S16 写侧授权保留</a:t>
-            </a:r>
-          </a:p>
-        </p:txBody>
-      </p:sp>
-      <p:sp>
-        <p:nvSpPr>
-          <p:cNvPr id="14" name="TextBox 13"/>
-          <p:cNvSpPr txBox="1"/>
-          <p:nvPr/>
-        </p:nvSpPr>
-        <p:spPr>
-          <a:xfrm>
-            <a:off x="786384" y="3362652"/>
-            <a:ext cx="3100730" cy="1645264"/>
-          </a:xfrm>
-          <a:prstGeom prst="rect">
-            <a:avLst/>
-          </a:prstGeom>
-          <a:noFill/>
-        </p:spPr>
-        <p:txBody>
-          <a:bodyPr wrap="square" anchor="t" lIns="0" rIns="0" tIns="0" bIns="0">
-            <a:spAutoFit/>
-          </a:bodyPr>
-          <a:lstStyle/>
-          <a:p>
-            <a:pPr algn="l">
-              <a:lnSpc>
-                <a:spcPct val="102000"/>
-              </a:lnSpc>
-            </a:pPr>
-            <a:r>
-              <a:rPr sz="1100" b="1">
-                <a:solidFill>
-                  <a:srgbClr val="20242C"/>
-                </a:solidFill>
-                <a:latin typeface="Microsoft YaHei"/>
-              </a:rPr>
-              <a:t>目标</a:t>
-            </a:r>
-            <a:r>
-              <a:rPr sz="1100" b="0">
-                <a:solidFill>
-                  <a:srgbClr val="20242C"/>
-                </a:solidFill>
-                <a:latin typeface="Microsoft YaHei"/>
-              </a:rPr>
-              <a:t>：在 HA / memory controller 内验证 DBIDResp 授权排队与最少服务优先。</a:t>
-            </a:r>
-          </a:p>
-          <a:p>
-            <a:pPr algn="l">
-              <a:lnSpc>
-                <a:spcPct val="102000"/>
-              </a:lnSpc>
-              <a:spcBef>
-                <a:spcPts val="600"/>
-              </a:spcBef>
-            </a:pPr>
-            <a:r>
-              <a:rPr sz="1100" b="1">
-                <a:solidFill>
-                  <a:srgbClr val="20242C"/>
-                </a:solidFill>
-                <a:latin typeface="Microsoft YaHei"/>
-              </a:rPr>
-              <a:t>价值</a:t>
-            </a:r>
-            <a:r>
-              <a:rPr sz="1100" b="0">
-                <a:solidFill>
-                  <a:srgbClr val="20242C"/>
-                </a:solidFill>
-                <a:latin typeface="Microsoft YaHei"/>
-              </a:rPr>
-              <a:t>：当前所有可实现点里，S16 离理论上界最近、硬件代价最低，并在 uniform / hot 两类流量下都不显著损失带宽。</a:t>
-            </a:r>
-          </a:p>
-          <a:p>
-            <a:pPr algn="l">
-              <a:lnSpc>
-                <a:spcPct val="102000"/>
-              </a:lnSpc>
-              <a:spcBef>
-                <a:spcPts val="600"/>
-              </a:spcBef>
-            </a:pPr>
-            <a:r>
-              <a:rPr sz="1100" b="1">
-                <a:solidFill>
-                  <a:srgbClr val="20242C"/>
-                </a:solidFill>
-                <a:latin typeface="Microsoft YaHei"/>
-              </a:rPr>
-              <a:t>门槛</a:t>
-            </a:r>
-            <a:r>
-              <a:rPr sz="1100" b="0">
-                <a:solidFill>
-                  <a:srgbClr val="20242C"/>
-                </a:solidFill>
-                <a:latin typeface="Microsoft YaHei"/>
-              </a:rPr>
-              <a:t>：确认 HA 授权时序、CHI 合规性和现有 tracker 接口可支持。</a:t>
-            </a:r>
-          </a:p>
-        </p:txBody>
-      </p:sp>
-      <p:sp>
-        <p:nvSpPr>
-          <p:cNvPr id="15" name="Rectangle 14"/>
-          <p:cNvSpPr/>
-          <p:nvPr/>
-        </p:nvSpPr>
-        <p:spPr>
-          <a:xfrm>
-            <a:off x="4326026" y="2194560"/>
-            <a:ext cx="3539642" cy="3017520"/>
-          </a:xfrm>
-          <a:prstGeom prst="rect">
-            <a:avLst/>
-          </a:prstGeom>
-          <a:solidFill>
-            <a:srgbClr val="FFFFFF"/>
-          </a:solidFill>
-          <a:ln w="12700">
-            <a:solidFill>
-              <a:srgbClr val="DCE3EA"/>
-            </a:solidFill>
-          </a:ln>
-          <a:effectLst/>
-        </p:spPr>
-        <p:style>
-          <a:lnRef idx="1">
-            <a:schemeClr val="accent1"/>
-          </a:lnRef>
-          <a:fillRef idx="3">
-            <a:schemeClr val="accent1"/>
-          </a:fillRef>
-          <a:effectRef idx="2">
-            <a:schemeClr val="accent1"/>
-          </a:effectRef>
-          <a:fontRef idx="minor">
-            <a:schemeClr val="lt1"/>
-          </a:fontRef>
-        </p:style>
-        <p:txBody>
-          <a:bodyPr rtlCol="0" anchor="ctr" wrap="square"/>
-          <a:lstStyle/>
-          <a:p>
-            <a:pPr algn="ctr"/>
-          </a:p>
-        </p:txBody>
-      </p:sp>
-      <p:sp>
-        <p:nvSpPr>
-          <p:cNvPr id="16" name="Oval 15"/>
-          <p:cNvSpPr/>
-          <p:nvPr/>
-        </p:nvSpPr>
-        <p:spPr>
-          <a:xfrm>
-            <a:off x="4545482" y="2414016"/>
-            <a:ext cx="384048" cy="384048"/>
-          </a:xfrm>
-          <a:prstGeom prst="ellipse">
-            <a:avLst/>
-          </a:prstGeom>
-          <a:solidFill>
-            <a:srgbClr val="D20A2E"/>
-          </a:solidFill>
-          <a:ln>
-            <a:noFill/>
-          </a:ln>
-          <a:effectLst/>
-        </p:spPr>
-        <p:style>
-          <a:lnRef idx="1">
-            <a:schemeClr val="accent1"/>
-          </a:lnRef>
-          <a:fillRef idx="3">
-            <a:schemeClr val="accent1"/>
-          </a:fillRef>
-          <a:effectRef idx="2">
-            <a:schemeClr val="accent1"/>
-          </a:effectRef>
-          <a:fontRef idx="minor">
-            <a:schemeClr val="lt1"/>
-          </a:fontRef>
-        </p:style>
-        <p:txBody>
-          <a:bodyPr rtlCol="0" anchor="ctr" wrap="square"/>
-          <a:lstStyle/>
-          <a:p>
-            <a:pPr algn="ctr"/>
-          </a:p>
-        </p:txBody>
-      </p:sp>
-      <p:sp>
-        <p:nvSpPr>
-          <p:cNvPr id="17" name="TextBox 16"/>
-          <p:cNvSpPr txBox="1"/>
-          <p:nvPr/>
-        </p:nvSpPr>
-        <p:spPr>
-          <a:xfrm>
-            <a:off x="4545482" y="2496312"/>
-            <a:ext cx="384048" cy="237744"/>
-          </a:xfrm>
-          <a:prstGeom prst="rect">
-            <a:avLst/>
-          </a:prstGeom>
-          <a:noFill/>
-        </p:spPr>
-        <p:txBody>
-          <a:bodyPr wrap="square" anchor="t" lIns="0" rIns="0" tIns="0" bIns="0">
-            <a:spAutoFit/>
-          </a:bodyPr>
-          <a:lstStyle/>
-          <a:p>
-            <a:pPr algn="ctr">
-              <a:lnSpc>
-                <a:spcPct val="100000"/>
-              </a:lnSpc>
-            </a:pPr>
-            <a:r>
-              <a:rPr sz="1150" b="1">
-                <a:solidFill>
-                  <a:srgbClr val="FFFFFF"/>
-                </a:solidFill>
-                <a:latin typeface="Arial"/>
-              </a:rPr>
-              <a:t>02</a:t>
-            </a:r>
-          </a:p>
-        </p:txBody>
-      </p:sp>
-      <p:sp>
-        <p:nvSpPr>
-          <p:cNvPr id="18" name="TextBox 17"/>
-          <p:cNvSpPr txBox="1"/>
-          <p:nvPr/>
-        </p:nvSpPr>
-        <p:spPr>
-          <a:xfrm>
-            <a:off x="4545482" y="3150050"/>
-            <a:ext cx="3100730" cy="314705"/>
-          </a:xfrm>
-          <a:prstGeom prst="rect">
-            <a:avLst/>
-          </a:prstGeom>
-          <a:noFill/>
-        </p:spPr>
-        <p:txBody>
-          <a:bodyPr wrap="square" anchor="t" lIns="0" rIns="0" tIns="0" bIns="0">
-            <a:spAutoFit/>
-          </a:bodyPr>
-          <a:lstStyle/>
-          <a:p>
-            <a:pPr algn="l">
-              <a:lnSpc>
-                <a:spcPct val="100000"/>
-              </a:lnSpc>
-            </a:pPr>
-            <a:r>
-              <a:rPr sz="1500" b="1">
-                <a:solidFill>
-                  <a:srgbClr val="20242C"/>
-                </a:solidFill>
-                <a:latin typeface="Microsoft YaHei"/>
-              </a:rPr>
-              <a:t>备选 · S22 环上赤字让路</a:t>
-            </a:r>
-          </a:p>
-        </p:txBody>
-      </p:sp>
-      <p:sp>
-        <p:nvSpPr>
-          <p:cNvPr id="19" name="TextBox 18"/>
-          <p:cNvSpPr txBox="1"/>
-          <p:nvPr/>
-        </p:nvSpPr>
-        <p:spPr>
-          <a:xfrm>
-            <a:off x="4545482" y="3547052"/>
-            <a:ext cx="3100730" cy="1276464"/>
-          </a:xfrm>
-          <a:prstGeom prst="rect">
-            <a:avLst/>
-          </a:prstGeom>
-          <a:noFill/>
-        </p:spPr>
-        <p:txBody>
-          <a:bodyPr wrap="square" anchor="t" lIns="0" rIns="0" tIns="0" bIns="0">
-            <a:spAutoFit/>
-          </a:bodyPr>
-          <a:lstStyle/>
-          <a:p>
-            <a:pPr algn="l">
-              <a:lnSpc>
-                <a:spcPct val="102000"/>
-              </a:lnSpc>
-            </a:pPr>
-            <a:r>
-              <a:rPr sz="1150" b="1">
-                <a:solidFill>
-                  <a:srgbClr val="20242C"/>
-                </a:solidFill>
-                <a:latin typeface="Microsoft YaHei"/>
-              </a:rPr>
-              <a:t>适用条件</a:t>
-            </a:r>
-            <a:r>
-              <a:rPr sz="1150" b="0">
-                <a:solidFill>
-                  <a:srgbClr val="20242C"/>
-                </a:solidFill>
-                <a:latin typeface="Microsoft YaHei"/>
-              </a:rPr>
-              <a:t>：HA 事务调度不可改，但允许调整 ring arbitration。</a:t>
-            </a:r>
-          </a:p>
-          <a:p>
-            <a:pPr algn="l">
-              <a:lnSpc>
-                <a:spcPct val="102000"/>
-              </a:lnSpc>
-              <a:spcBef>
-                <a:spcPts val="600"/>
-              </a:spcBef>
-            </a:pPr>
-            <a:r>
-              <a:rPr sz="1150" b="1">
-                <a:solidFill>
-                  <a:srgbClr val="20242C"/>
-                </a:solidFill>
-                <a:latin typeface="Microsoft YaHei"/>
-              </a:rPr>
-              <a:t>验证重点</a:t>
-            </a:r>
-            <a:r>
-              <a:rPr sz="1150" b="0">
-                <a:solidFill>
-                  <a:srgbClr val="20242C"/>
-                </a:solidFill>
-                <a:latin typeface="Microsoft YaHei"/>
-              </a:rPr>
-              <a:t>：6 bit 进度总线复用、30 拍反馈稳定性、让路范围和现有注入队列深度下的收益。</a:t>
-            </a:r>
-          </a:p>
-          <a:p>
-            <a:pPr algn="l">
-              <a:lnSpc>
-                <a:spcPct val="102000"/>
-              </a:lnSpc>
-              <a:spcBef>
-                <a:spcPts val="600"/>
-              </a:spcBef>
-            </a:pPr>
-            <a:r>
-              <a:rPr sz="1150" b="1">
-                <a:solidFill>
-                  <a:srgbClr val="20242C"/>
-                </a:solidFill>
-                <a:latin typeface="Microsoft YaHei"/>
-              </a:rPr>
-              <a:t>定位</a:t>
-            </a:r>
-            <a:r>
-              <a:rPr sz="1150" b="0">
-                <a:solidFill>
-                  <a:srgbClr val="20242C"/>
-                </a:solidFill>
-                <a:latin typeface="Microsoft YaHei"/>
-              </a:rPr>
-              <a:t>：性能次于 S16，但控制面完全留在环层。</a:t>
-            </a:r>
-          </a:p>
-        </p:txBody>
-      </p:sp>
-      <p:sp>
-        <p:nvSpPr>
-          <p:cNvPr id="20" name="Rectangle 19"/>
-          <p:cNvSpPr/>
-          <p:nvPr/>
-        </p:nvSpPr>
-        <p:spPr>
-          <a:xfrm>
-            <a:off x="8085124" y="2194560"/>
-            <a:ext cx="3539642" cy="3017520"/>
-          </a:xfrm>
-          <a:prstGeom prst="rect">
-            <a:avLst/>
-          </a:prstGeom>
-          <a:solidFill>
-            <a:srgbClr val="FFFFFF"/>
-          </a:solidFill>
-          <a:ln w="12700">
-            <a:solidFill>
-              <a:srgbClr val="DCE3EA"/>
-            </a:solidFill>
-          </a:ln>
-          <a:effectLst/>
-        </p:spPr>
-        <p:style>
-          <a:lnRef idx="1">
-            <a:schemeClr val="accent1"/>
-          </a:lnRef>
-          <a:fillRef idx="3">
-            <a:schemeClr val="accent1"/>
-          </a:fillRef>
-          <a:effectRef idx="2">
-            <a:schemeClr val="accent1"/>
-          </a:effectRef>
-          <a:fontRef idx="minor">
-            <a:schemeClr val="lt1"/>
-          </a:fontRef>
-        </p:style>
-        <p:txBody>
-          <a:bodyPr rtlCol="0" anchor="ctr" wrap="square"/>
-          <a:lstStyle/>
-          <a:p>
-            <a:pPr algn="ctr"/>
-          </a:p>
-        </p:txBody>
-      </p:sp>
-      <p:sp>
-        <p:nvSpPr>
-          <p:cNvPr id="21" name="Oval 20"/>
-          <p:cNvSpPr/>
-          <p:nvPr/>
-        </p:nvSpPr>
-        <p:spPr>
-          <a:xfrm>
-            <a:off x="8304580" y="2414016"/>
-            <a:ext cx="384048" cy="384048"/>
-          </a:xfrm>
-          <a:prstGeom prst="ellipse">
-            <a:avLst/>
-          </a:prstGeom>
-          <a:solidFill>
-            <a:srgbClr val="D20A2E"/>
-          </a:solidFill>
-          <a:ln>
-            <a:noFill/>
-          </a:ln>
-          <a:effectLst/>
-        </p:spPr>
-        <p:style>
-          <a:lnRef idx="1">
-            <a:schemeClr val="accent1"/>
-          </a:lnRef>
-          <a:fillRef idx="3">
-            <a:schemeClr val="accent1"/>
-          </a:fillRef>
-          <a:effectRef idx="2">
-            <a:schemeClr val="accent1"/>
-          </a:effectRef>
-          <a:fontRef idx="minor">
-            <a:schemeClr val="lt1"/>
-          </a:fontRef>
-        </p:style>
-        <p:txBody>
-          <a:bodyPr rtlCol="0" anchor="ctr" wrap="square"/>
-          <a:lstStyle/>
-          <a:p>
-            <a:pPr algn="ctr"/>
-          </a:p>
-        </p:txBody>
-      </p:sp>
-      <p:sp>
-        <p:nvSpPr>
-          <p:cNvPr id="22" name="TextBox 21"/>
-          <p:cNvSpPr txBox="1"/>
-          <p:nvPr/>
-        </p:nvSpPr>
-        <p:spPr>
-          <a:xfrm>
-            <a:off x="8304580" y="2496312"/>
-            <a:ext cx="384048" cy="237744"/>
-          </a:xfrm>
-          <a:prstGeom prst="rect">
-            <a:avLst/>
-          </a:prstGeom>
-          <a:noFill/>
-        </p:spPr>
-        <p:txBody>
-          <a:bodyPr wrap="square" anchor="t" lIns="0" rIns="0" tIns="0" bIns="0">
-            <a:spAutoFit/>
-          </a:bodyPr>
-          <a:lstStyle/>
-          <a:p>
-            <a:pPr algn="ctr">
-              <a:lnSpc>
-                <a:spcPct val="100000"/>
-              </a:lnSpc>
-            </a:pPr>
-            <a:r>
-              <a:rPr sz="1150" b="1">
-                <a:solidFill>
-                  <a:srgbClr val="FFFFFF"/>
-                </a:solidFill>
-                <a:latin typeface="Arial"/>
-              </a:rPr>
-              <a:t>03</a:t>
-            </a:r>
-          </a:p>
-        </p:txBody>
-      </p:sp>
-      <p:sp>
-        <p:nvSpPr>
-          <p:cNvPr id="23" name="TextBox 22"/>
-          <p:cNvSpPr txBox="1"/>
-          <p:nvPr/>
-        </p:nvSpPr>
-        <p:spPr>
-          <a:xfrm>
-            <a:off x="8304580" y="3069671"/>
-            <a:ext cx="3100730" cy="314705"/>
-          </a:xfrm>
-          <a:prstGeom prst="rect">
-            <a:avLst/>
-          </a:prstGeom>
-          <a:noFill/>
-        </p:spPr>
-        <p:txBody>
-          <a:bodyPr wrap="square" anchor="t" lIns="0" rIns="0" tIns="0" bIns="0">
-            <a:spAutoFit/>
-          </a:bodyPr>
-          <a:lstStyle/>
-          <a:p>
-            <a:pPr algn="l">
-              <a:lnSpc>
-                <a:spcPct val="100000"/>
-              </a:lnSpc>
-            </a:pPr>
-            <a:r>
-              <a:rPr sz="1500" b="1">
-                <a:solidFill>
-                  <a:srgbClr val="20242C"/>
-                </a:solidFill>
-                <a:latin typeface="Microsoft YaHei"/>
-              </a:rPr>
-              <a:t>边界 · 明确不进入建议</a:t>
-            </a:r>
-          </a:p>
-        </p:txBody>
-      </p:sp>
-      <p:sp>
-        <p:nvSpPr>
-          <p:cNvPr id="24" name="TextBox 23"/>
-          <p:cNvSpPr txBox="1"/>
-          <p:nvPr/>
-        </p:nvSpPr>
-        <p:spPr>
-          <a:xfrm>
-            <a:off x="8304580" y="3466673"/>
-            <a:ext cx="3100730" cy="1437223"/>
-          </a:xfrm>
-          <a:prstGeom prst="rect">
-            <a:avLst/>
-          </a:prstGeom>
-          <a:noFill/>
-        </p:spPr>
-        <p:txBody>
-          <a:bodyPr wrap="square" anchor="t" lIns="0" rIns="0" tIns="0" bIns="0">
-            <a:spAutoFit/>
-          </a:bodyPr>
-          <a:lstStyle/>
-          <a:p>
-            <a:pPr algn="l">
-              <a:lnSpc>
-                <a:spcPct val="102000"/>
-              </a:lnSpc>
-            </a:pPr>
-            <a:r>
-              <a:rPr sz="1100" b="1">
-                <a:solidFill>
-                  <a:srgbClr val="20242C"/>
-                </a:solidFill>
-                <a:latin typeface="Microsoft YaHei"/>
-              </a:rPr>
-              <a:t>S19 / S20</a:t>
-            </a:r>
-            <a:r>
-              <a:rPr sz="1100" b="0">
-                <a:solidFill>
-                  <a:srgbClr val="20242C"/>
-                </a:solidFill>
-                <a:latin typeface="Microsoft YaHei"/>
-              </a:rPr>
-              <a:t>：仅保留为 requester-side 研究对照；实测公平性几乎不变，不作为第三层落地路径。</a:t>
-            </a:r>
-          </a:p>
-          <a:p>
-            <a:pPr algn="l">
-              <a:lnSpc>
-                <a:spcPct val="102000"/>
-              </a:lnSpc>
-              <a:spcBef>
-                <a:spcPts val="600"/>
-              </a:spcBef>
-            </a:pPr>
-            <a:r>
-              <a:rPr sz="1100" b="1">
-                <a:solidFill>
-                  <a:srgbClr val="20242C"/>
-                </a:solidFill>
-                <a:latin typeface="Microsoft YaHei"/>
-              </a:rPr>
-              <a:t>读侧</a:t>
-            </a:r>
-            <a:r>
-              <a:rPr sz="1100" b="0">
-                <a:solidFill>
-                  <a:srgbClr val="20242C"/>
-                </a:solidFill>
-                <a:latin typeface="Microsoft YaHei"/>
-              </a:rPr>
-              <a:t>：S0 已达到 Jain 0.99067、max/min 1.0035，维持现状。</a:t>
-            </a:r>
-          </a:p>
-          <a:p>
-            <a:pPr algn="l">
-              <a:lnSpc>
-                <a:spcPct val="102000"/>
-              </a:lnSpc>
-              <a:spcBef>
-                <a:spcPts val="600"/>
-              </a:spcBef>
-            </a:pPr>
-            <a:r>
-              <a:rPr sz="1100" b="1">
-                <a:solidFill>
-                  <a:srgbClr val="20242C"/>
-                </a:solidFill>
-                <a:latin typeface="Microsoft YaHei"/>
-              </a:rPr>
-              <a:t>outstanding</a:t>
-            </a:r>
-            <a:r>
-              <a:rPr sz="1100" b="0">
-                <a:solidFill>
-                  <a:srgbClr val="20242C"/>
-                </a:solidFill>
-                <a:latin typeface="Microsoft YaHei"/>
-              </a:rPr>
-              <a:t>：由最坏 RTT 覆盖要求固定，不作为拥塞控制旋钮。</a:t>
-            </a:r>
-          </a:p>
-        </p:txBody>
-      </p:sp>
-      <p:sp>
-        <p:nvSpPr>
-          <p:cNvPr id="25" name="Rectangle 24"/>
-          <p:cNvSpPr/>
-          <p:nvPr/>
-        </p:nvSpPr>
-        <p:spPr>
-          <a:xfrm>
-            <a:off x="566928" y="5486400"/>
-            <a:ext cx="11057839" cy="841248"/>
-          </a:xfrm>
-          <a:prstGeom prst="rect">
-            <a:avLst/>
-          </a:prstGeom>
-          <a:solidFill>
-            <a:srgbClr val="D20A2E"/>
-          </a:solidFill>
-          <a:ln>
-            <a:noFill/>
-          </a:ln>
-          <a:effectLst/>
-        </p:spPr>
-        <p:style>
-          <a:lnRef idx="1">
-            <a:schemeClr val="accent1"/>
-          </a:lnRef>
-          <a:fillRef idx="3">
-            <a:schemeClr val="accent1"/>
-          </a:fillRef>
-          <a:effectRef idx="2">
-            <a:schemeClr val="accent1"/>
-          </a:effectRef>
-          <a:fontRef idx="minor">
-            <a:schemeClr val="lt1"/>
-          </a:fontRef>
-        </p:style>
-        <p:txBody>
-          <a:bodyPr rtlCol="0" anchor="ctr" wrap="square"/>
-          <a:lstStyle/>
-          <a:p>
-            <a:pPr algn="ctr"/>
-          </a:p>
-        </p:txBody>
-      </p:sp>
-      <p:sp>
-        <p:nvSpPr>
-          <p:cNvPr id="26" name="TextBox 25"/>
-          <p:cNvSpPr txBox="1"/>
-          <p:nvPr/>
-        </p:nvSpPr>
-        <p:spPr>
-          <a:xfrm>
-            <a:off x="877824" y="5577840"/>
-            <a:ext cx="10436047" cy="658368"/>
-          </a:xfrm>
-          <a:prstGeom prst="rect">
-            <a:avLst/>
-          </a:prstGeom>
-          <a:noFill/>
-        </p:spPr>
-        <p:txBody>
-          <a:bodyPr wrap="square" anchor="ctr" lIns="0" rIns="0" tIns="0" bIns="0">
-            <a:spAutoFit/>
-          </a:bodyPr>
-          <a:lstStyle/>
-          <a:p>
-            <a:pPr algn="l">
-              <a:lnSpc>
-                <a:spcPct val="104000"/>
-              </a:lnSpc>
-            </a:pPr>
-            <a:r>
-              <a:rPr sz="1400" b="0">
-                <a:solidFill>
-                  <a:srgbClr val="FFFFFF"/>
-                </a:solidFill>
-                <a:latin typeface="Microsoft YaHei"/>
-              </a:rPr>
-              <a:t>请架构组只决策一件事：是否允许 HA 改变授权的时机与对象。允许则进入 S16 微架构验证；不允许则转入 S22 环仲裁原型。</a:t>
-            </a:r>
-          </a:p>
-        </p:txBody>
-      </p:sp>
-      <p:sp>
-        <p:nvSpPr>
-          <p:cNvPr id="27" name="TextBox 26"/>
           <p:cNvSpPr txBox="1"/>
           <p:nvPr/>
         </p:nvSpPr>
@@ -32932,7 +32798,7 @@
                 </a:solidFill>
                 <a:latin typeface="Arial"/>
               </a:rPr>
-              <a:t>38 / 39</a:t>
+              <a:t>38 / 41</a:t>
             </a:r>
           </a:p>
         </p:txBody>
@@ -32970,7 +32836,7 @@
             <a:avLst/>
           </a:prstGeom>
           <a:solidFill>
-            <a:srgbClr val="14171C"/>
+            <a:srgbClr val="F4F7FB"/>
           </a:solidFill>
           <a:ln>
             <a:noFill/>
@@ -33007,8 +32873,8 @@
         </p:nvSpPr>
         <p:spPr>
           <a:xfrm>
-            <a:off x="10143439" y="274320"/>
-            <a:ext cx="182880" cy="182880"/>
+            <a:off x="566928" y="301752"/>
+            <a:ext cx="137160" cy="137160"/>
           </a:xfrm>
           <a:prstGeom prst="rect">
             <a:avLst/>
@@ -33051,8 +32917,8 @@
         </p:nvSpPr>
         <p:spPr>
           <a:xfrm>
-            <a:off x="10399471" y="246888"/>
-            <a:ext cx="1225296" cy="256032"/>
+            <a:off x="804672" y="265176"/>
+            <a:ext cx="9229039" cy="237744"/>
           </a:xfrm>
           <a:prstGeom prst="rect">
             <a:avLst/>
@@ -33071,33 +32937,33 @@
               </a:lnSpc>
             </a:pPr>
             <a:r>
-              <a:rPr sz="1300" b="1">
-                <a:solidFill>
-                  <a:srgbClr val="FFFFFF"/>
-                </a:solidFill>
-                <a:latin typeface="Arial"/>
-              </a:rPr>
-              <a:t>HUAWEI</a:t>
-            </a:r>
-          </a:p>
-        </p:txBody>
-      </p:sp>
-      <p:sp>
-        <p:nvSpPr>
-          <p:cNvPr id="5" name="Oval 4"/>
+              <a:rPr sz="1150" b="1">
+                <a:solidFill>
+                  <a:srgbClr val="667080"/>
+                </a:solidFill>
+                <a:latin typeface="Microsoft YaHei"/>
+              </a:rPr>
+              <a:t>结论</a:t>
+            </a:r>
+          </a:p>
+        </p:txBody>
+      </p:sp>
+      <p:sp>
+        <p:nvSpPr>
+          <p:cNvPr id="5" name="Rectangle 4"/>
           <p:cNvSpPr/>
           <p:nvPr/>
         </p:nvSpPr>
         <p:spPr>
           <a:xfrm>
-            <a:off x="566928" y="1737360"/>
-            <a:ext cx="868680" cy="868680"/>
-          </a:xfrm>
-          <a:prstGeom prst="ellipse">
+            <a:off x="566928" y="640080"/>
+            <a:ext cx="11057839" cy="10058"/>
+          </a:xfrm>
+          <a:prstGeom prst="rect">
             <a:avLst/>
           </a:prstGeom>
           <a:solidFill>
-            <a:srgbClr val="22262D"/>
+            <a:srgbClr val="DCE3EA"/>
           </a:solidFill>
           <a:ln>
             <a:noFill/>
@@ -33134,8 +33000,8 @@
         </p:nvSpPr>
         <p:spPr>
           <a:xfrm>
-            <a:off x="877824" y="2048256"/>
-            <a:ext cx="256032" cy="256032"/>
+            <a:off x="10143439" y="274320"/>
+            <a:ext cx="182880" cy="182880"/>
           </a:xfrm>
           <a:prstGeom prst="rect">
             <a:avLst/>
@@ -33178,8 +33044,8 @@
         </p:nvSpPr>
         <p:spPr>
           <a:xfrm>
-            <a:off x="566928" y="2926080"/>
-            <a:ext cx="3657600" cy="237744"/>
+            <a:off x="10399471" y="246888"/>
+            <a:ext cx="1225296" cy="256032"/>
           </a:xfrm>
           <a:prstGeom prst="rect">
             <a:avLst/>
@@ -33198,136 +33064,791 @@
               </a:lnSpc>
             </a:pPr>
             <a:r>
+              <a:rPr sz="1300" b="1">
+                <a:solidFill>
+                  <a:srgbClr val="20242C"/>
+                </a:solidFill>
+                <a:latin typeface="Arial"/>
+              </a:rPr>
+              <a:t>HUAWEI</a:t>
+            </a:r>
+          </a:p>
+        </p:txBody>
+      </p:sp>
+      <p:sp>
+        <p:nvSpPr>
+          <p:cNvPr id="8" name="TextBox 7"/>
+          <p:cNvSpPr txBox="1"/>
+          <p:nvPr/>
+        </p:nvSpPr>
+        <p:spPr>
+          <a:xfrm>
+            <a:off x="566928" y="1060704"/>
+            <a:ext cx="11057839" cy="237744"/>
+          </a:xfrm>
+          <a:prstGeom prst="rect">
+            <a:avLst/>
+          </a:prstGeom>
+          <a:noFill/>
+        </p:spPr>
+        <p:txBody>
+          <a:bodyPr wrap="square" anchor="t" lIns="0" rIns="0" tIns="0" bIns="0">
+            <a:spAutoFit/>
+          </a:bodyPr>
+          <a:lstStyle/>
+          <a:p>
+            <a:pPr algn="l">
+              <a:lnSpc>
+                <a:spcPct val="100000"/>
+              </a:lnSpc>
+            </a:pPr>
+            <a:r>
+              <a:rPr sz="1050" b="1">
+                <a:solidFill>
+                  <a:srgbClr val="D20A2E"/>
+                </a:solidFill>
+                <a:latin typeface="Arial"/>
+              </a:rPr>
+              <a:t>C O N C L U S I O N S</a:t>
+            </a:r>
+          </a:p>
+        </p:txBody>
+      </p:sp>
+      <p:sp>
+        <p:nvSpPr>
+          <p:cNvPr id="9" name="TextBox 8"/>
+          <p:cNvSpPr txBox="1"/>
+          <p:nvPr/>
+        </p:nvSpPr>
+        <p:spPr>
+          <a:xfrm>
+            <a:off x="566928" y="1353312"/>
+            <a:ext cx="11057839" cy="658368"/>
+          </a:xfrm>
+          <a:prstGeom prst="rect">
+            <a:avLst/>
+          </a:prstGeom>
+          <a:noFill/>
+        </p:spPr>
+        <p:txBody>
+          <a:bodyPr wrap="square" anchor="t" lIns="0" rIns="0" tIns="0" bIns="0">
+            <a:spAutoFit/>
+          </a:bodyPr>
+          <a:lstStyle/>
+          <a:p>
+            <a:pPr algn="l">
+              <a:lnSpc>
+                <a:spcPct val="100000"/>
+              </a:lnSpc>
+            </a:pPr>
+            <a:r>
+              <a:rPr sz="3000" b="1">
+                <a:solidFill>
+                  <a:srgbClr val="20242C"/>
+                </a:solidFill>
+                <a:latin typeface="Microsoft YaHei"/>
+              </a:rPr>
+              <a:t>三项确定结论 + 一个架构决策</a:t>
+            </a:r>
+          </a:p>
+        </p:txBody>
+      </p:sp>
+      <p:sp>
+        <p:nvSpPr>
+          <p:cNvPr id="10" name="Rectangle 9"/>
+          <p:cNvSpPr/>
+          <p:nvPr/>
+        </p:nvSpPr>
+        <p:spPr>
+          <a:xfrm>
+            <a:off x="566928" y="2231136"/>
+            <a:ext cx="2599867" cy="2999231"/>
+          </a:xfrm>
+          <a:prstGeom prst="rect">
+            <a:avLst/>
+          </a:prstGeom>
+          <a:solidFill>
+            <a:srgbClr val="FFFFFF"/>
+          </a:solidFill>
+          <a:ln w="12700">
+            <a:solidFill>
+              <a:srgbClr val="DCE3EA"/>
+            </a:solidFill>
+          </a:ln>
+          <a:effectLst/>
+        </p:spPr>
+        <p:style>
+          <a:lnRef idx="1">
+            <a:schemeClr val="accent1"/>
+          </a:lnRef>
+          <a:fillRef idx="3">
+            <a:schemeClr val="accent1"/>
+          </a:fillRef>
+          <a:effectRef idx="2">
+            <a:schemeClr val="accent1"/>
+          </a:effectRef>
+          <a:fontRef idx="minor">
+            <a:schemeClr val="lt1"/>
+          </a:fontRef>
+        </p:style>
+        <p:txBody>
+          <a:bodyPr rtlCol="0" anchor="ctr" wrap="square"/>
+          <a:lstStyle/>
+          <a:p>
+            <a:pPr algn="ctr"/>
+          </a:p>
+        </p:txBody>
+      </p:sp>
+      <p:sp>
+        <p:nvSpPr>
+          <p:cNvPr id="11" name="TextBox 10"/>
+          <p:cNvSpPr txBox="1"/>
+          <p:nvPr/>
+        </p:nvSpPr>
+        <p:spPr>
+          <a:xfrm>
+            <a:off x="768096" y="2699811"/>
+            <a:ext cx="2197531" cy="314705"/>
+          </a:xfrm>
+          <a:prstGeom prst="rect">
+            <a:avLst/>
+          </a:prstGeom>
+          <a:noFill/>
+        </p:spPr>
+        <p:txBody>
+          <a:bodyPr wrap="square" anchor="t" lIns="0" rIns="0" tIns="0" bIns="0">
+            <a:spAutoFit/>
+          </a:bodyPr>
+          <a:lstStyle/>
+          <a:p>
+            <a:pPr algn="l">
+              <a:lnSpc>
+                <a:spcPct val="100000"/>
+              </a:lnSpc>
+            </a:pPr>
+            <a:r>
+              <a:rPr sz="1500" b="1">
+                <a:solidFill>
+                  <a:srgbClr val="20242C"/>
+                </a:solidFill>
+                <a:latin typeface="Microsoft YaHei"/>
+              </a:rPr>
+              <a:t>① 容量问题已闭环</a:t>
+            </a:r>
+          </a:p>
+        </p:txBody>
+      </p:sp>
+      <p:sp>
+        <p:nvSpPr>
+          <p:cNvPr id="12" name="TextBox 11"/>
+          <p:cNvSpPr txBox="1"/>
+          <p:nvPr/>
+        </p:nvSpPr>
+        <p:spPr>
+          <a:xfrm>
+            <a:off x="768096" y="3096813"/>
+            <a:ext cx="2197531" cy="1701454"/>
+          </a:xfrm>
+          <a:prstGeom prst="rect">
+            <a:avLst/>
+          </a:prstGeom>
+          <a:noFill/>
+        </p:spPr>
+        <p:txBody>
+          <a:bodyPr wrap="square" anchor="t" lIns="0" rIns="0" tIns="0" bIns="0">
+            <a:spAutoFit/>
+          </a:bodyPr>
+          <a:lstStyle/>
+          <a:p>
+            <a:pPr algn="l">
+              <a:lnSpc>
+                <a:spcPct val="102000"/>
+              </a:lnSpc>
+            </a:pPr>
+            <a:r>
+              <a:rPr sz="1200" b="0">
+                <a:solidFill>
+                  <a:srgbClr val="20242C"/>
+                </a:solidFill>
+                <a:latin typeface="Microsoft YaHei"/>
+              </a:rPr>
+              <a:t>S0 最忙链路利用率 96.98%；相对 R* 的 3.03% 缺口已按拍拆成有效载荷、绕环重发和四类空转，账目无残项。</a:t>
+            </a:r>
+          </a:p>
+          <a:p>
+            <a:pPr algn="l">
+              <a:lnSpc>
+                <a:spcPct val="102000"/>
+              </a:lnSpc>
+              <a:spcBef>
+                <a:spcPts val="600"/>
+              </a:spcBef>
+            </a:pPr>
+            <a:r>
               <a:rPr sz="1200" b="1">
                 <a:solidFill>
                   <a:srgbClr val="D20A2E"/>
                 </a:solidFill>
-                <a:latin typeface="Arial"/>
-              </a:rPr>
-              <a:t>T H A N K   Y O U</a:t>
-            </a:r>
-          </a:p>
-        </p:txBody>
-      </p:sp>
-      <p:sp>
-        <p:nvSpPr>
-          <p:cNvPr id="8" name="TextBox 7"/>
-          <p:cNvSpPr txBox="1"/>
-          <p:nvPr/>
-        </p:nvSpPr>
-        <p:spPr>
-          <a:xfrm>
-            <a:off x="566928" y="3273552"/>
-            <a:ext cx="8229600" cy="1645920"/>
-          </a:xfrm>
-          <a:prstGeom prst="rect">
-            <a:avLst/>
-          </a:prstGeom>
-          <a:noFill/>
-        </p:spPr>
-        <p:txBody>
-          <a:bodyPr wrap="square" anchor="t" lIns="0" rIns="0" tIns="0" bIns="0">
-            <a:spAutoFit/>
-          </a:bodyPr>
-          <a:lstStyle/>
-          <a:p>
-            <a:pPr algn="l">
-              <a:lnSpc>
-                <a:spcPct val="96000"/>
-              </a:lnSpc>
-            </a:pPr>
-            <a:r>
-              <a:rPr sz="4400" b="1">
+                <a:latin typeface="Microsoft YaHei"/>
+              </a:rPr>
+              <a:t>结论：当前问题不是带宽没打满，而是满载时服务机会分配不均。</a:t>
+            </a:r>
+          </a:p>
+        </p:txBody>
+      </p:sp>
+      <p:sp>
+        <p:nvSpPr>
+          <p:cNvPr id="13" name="Rectangle 12"/>
+          <p:cNvSpPr/>
+          <p:nvPr/>
+        </p:nvSpPr>
+        <p:spPr>
+          <a:xfrm>
+            <a:off x="3386251" y="2231136"/>
+            <a:ext cx="2599867" cy="2999231"/>
+          </a:xfrm>
+          <a:prstGeom prst="rect">
+            <a:avLst/>
+          </a:prstGeom>
+          <a:solidFill>
+            <a:srgbClr val="FFFFFF"/>
+          </a:solidFill>
+          <a:ln w="12700">
+            <a:solidFill>
+              <a:srgbClr val="DCE3EA"/>
+            </a:solidFill>
+          </a:ln>
+          <a:effectLst/>
+        </p:spPr>
+        <p:style>
+          <a:lnRef idx="1">
+            <a:schemeClr val="accent1"/>
+          </a:lnRef>
+          <a:fillRef idx="3">
+            <a:schemeClr val="accent1"/>
+          </a:fillRef>
+          <a:effectRef idx="2">
+            <a:schemeClr val="accent1"/>
+          </a:effectRef>
+          <a:fontRef idx="minor">
+            <a:schemeClr val="lt1"/>
+          </a:fontRef>
+        </p:style>
+        <p:txBody>
+          <a:bodyPr rtlCol="0" anchor="ctr" wrap="square"/>
+          <a:lstStyle/>
+          <a:p>
+            <a:pPr algn="ctr"/>
+          </a:p>
+        </p:txBody>
+      </p:sp>
+      <p:sp>
+        <p:nvSpPr>
+          <p:cNvPr id="14" name="TextBox 13"/>
+          <p:cNvSpPr txBox="1"/>
+          <p:nvPr/>
+        </p:nvSpPr>
+        <p:spPr>
+          <a:xfrm>
+            <a:off x="3587419" y="2813288"/>
+            <a:ext cx="2197531" cy="314705"/>
+          </a:xfrm>
+          <a:prstGeom prst="rect">
+            <a:avLst/>
+          </a:prstGeom>
+          <a:noFill/>
+        </p:spPr>
+        <p:txBody>
+          <a:bodyPr wrap="square" anchor="t" lIns="0" rIns="0" tIns="0" bIns="0">
+            <a:spAutoFit/>
+          </a:bodyPr>
+          <a:lstStyle/>
+          <a:p>
+            <a:pPr algn="l">
+              <a:lnSpc>
+                <a:spcPct val="100000"/>
+              </a:lnSpc>
+            </a:pPr>
+            <a:r>
+              <a:rPr sz="1500" b="1">
+                <a:solidFill>
+                  <a:srgbClr val="20242C"/>
+                </a:solidFill>
+                <a:latin typeface="Microsoft YaHei"/>
+              </a:rPr>
+              <a:t>② 公平性是结构问题</a:t>
+            </a:r>
+          </a:p>
+        </p:txBody>
+      </p:sp>
+      <p:sp>
+        <p:nvSpPr>
+          <p:cNvPr id="15" name="TextBox 14"/>
+          <p:cNvSpPr txBox="1"/>
+          <p:nvPr/>
+        </p:nvSpPr>
+        <p:spPr>
+          <a:xfrm>
+            <a:off x="3587419" y="3210290"/>
+            <a:ext cx="2197531" cy="1474500"/>
+          </a:xfrm>
+          <a:prstGeom prst="rect">
+            <a:avLst/>
+          </a:prstGeom>
+          <a:noFill/>
+        </p:spPr>
+        <p:txBody>
+          <a:bodyPr wrap="square" anchor="t" lIns="0" rIns="0" tIns="0" bIns="0">
+            <a:spAutoFit/>
+          </a:bodyPr>
+          <a:lstStyle/>
+          <a:p>
+            <a:pPr algn="l">
+              <a:lnSpc>
+                <a:spcPct val="102000"/>
+              </a:lnSpc>
+            </a:pPr>
+            <a:r>
+              <a:rPr sz="1200" b="0">
+                <a:solidFill>
+                  <a:srgbClr val="20242C"/>
+                </a:solidFill>
+                <a:latin typeface="Microsoft YaHei"/>
+              </a:rPr>
+              <a:t>六快四慢随时间稳定存在；即使完全抹平瞬时抖动，Jain 上限仍只有 0.96458，核间长期速率比为 1.5673。</a:t>
+            </a:r>
+          </a:p>
+          <a:p>
+            <a:pPr algn="l">
+              <a:lnSpc>
+                <a:spcPct val="102000"/>
+              </a:lnSpc>
+              <a:spcBef>
+                <a:spcPts val="600"/>
+              </a:spcBef>
+            </a:pPr>
+            <a:r>
+              <a:rPr sz="1200" b="1">
+                <a:solidFill>
+                  <a:srgbClr val="D20A2E"/>
+                </a:solidFill>
+                <a:latin typeface="Microsoft YaHei"/>
+              </a:rPr>
+              <a:t>结论：只整形发包时机不够，必须在瓶颈处重新分配服务机会。</a:t>
+            </a:r>
+          </a:p>
+        </p:txBody>
+      </p:sp>
+      <p:sp>
+        <p:nvSpPr>
+          <p:cNvPr id="16" name="Rectangle 15"/>
+          <p:cNvSpPr/>
+          <p:nvPr/>
+        </p:nvSpPr>
+        <p:spPr>
+          <a:xfrm>
+            <a:off x="6205575" y="2231136"/>
+            <a:ext cx="2599867" cy="2999231"/>
+          </a:xfrm>
+          <a:prstGeom prst="rect">
+            <a:avLst/>
+          </a:prstGeom>
+          <a:solidFill>
+            <a:srgbClr val="FFFFFF"/>
+          </a:solidFill>
+          <a:ln w="12700">
+            <a:solidFill>
+              <a:srgbClr val="DCE3EA"/>
+            </a:solidFill>
+          </a:ln>
+          <a:effectLst/>
+        </p:spPr>
+        <p:style>
+          <a:lnRef idx="1">
+            <a:schemeClr val="accent1"/>
+          </a:lnRef>
+          <a:fillRef idx="3">
+            <a:schemeClr val="accent1"/>
+          </a:fillRef>
+          <a:effectRef idx="2">
+            <a:schemeClr val="accent1"/>
+          </a:effectRef>
+          <a:fontRef idx="minor">
+            <a:schemeClr val="lt1"/>
+          </a:fontRef>
+        </p:style>
+        <p:txBody>
+          <a:bodyPr rtlCol="0" anchor="ctr" wrap="square"/>
+          <a:lstStyle/>
+          <a:p>
+            <a:pPr algn="ctr"/>
+          </a:p>
+        </p:txBody>
+      </p:sp>
+      <p:sp>
+        <p:nvSpPr>
+          <p:cNvPr id="17" name="TextBox 16"/>
+          <p:cNvSpPr txBox="1"/>
+          <p:nvPr/>
+        </p:nvSpPr>
+        <p:spPr>
+          <a:xfrm>
+            <a:off x="6406743" y="2586334"/>
+            <a:ext cx="2197531" cy="314705"/>
+          </a:xfrm>
+          <a:prstGeom prst="rect">
+            <a:avLst/>
+          </a:prstGeom>
+          <a:noFill/>
+        </p:spPr>
+        <p:txBody>
+          <a:bodyPr wrap="square" anchor="t" lIns="0" rIns="0" tIns="0" bIns="0">
+            <a:spAutoFit/>
+          </a:bodyPr>
+          <a:lstStyle/>
+          <a:p>
+            <a:pPr algn="l">
+              <a:lnSpc>
+                <a:spcPct val="100000"/>
+              </a:lnSpc>
+            </a:pPr>
+            <a:r>
+              <a:rPr sz="1500" b="1">
+                <a:solidFill>
+                  <a:srgbClr val="20242C"/>
+                </a:solidFill>
+                <a:latin typeface="Microsoft YaHei"/>
+              </a:rPr>
+              <a:t>③ 上界与评价口径已建立</a:t>
+            </a:r>
+          </a:p>
+        </p:txBody>
+      </p:sp>
+      <p:sp>
+        <p:nvSpPr>
+          <p:cNvPr id="18" name="TextBox 17"/>
+          <p:cNvSpPr txBox="1"/>
+          <p:nvPr/>
+        </p:nvSpPr>
+        <p:spPr>
+          <a:xfrm>
+            <a:off x="6406743" y="2983336"/>
+            <a:ext cx="2197531" cy="1928408"/>
+          </a:xfrm>
+          <a:prstGeom prst="rect">
+            <a:avLst/>
+          </a:prstGeom>
+          <a:noFill/>
+        </p:spPr>
+        <p:txBody>
+          <a:bodyPr wrap="square" anchor="t" lIns="0" rIns="0" tIns="0" bIns="0">
+            <a:spAutoFit/>
+          </a:bodyPr>
+          <a:lstStyle/>
+          <a:p>
+            <a:pPr algn="l">
+              <a:lnSpc>
+                <a:spcPct val="102000"/>
+              </a:lnSpc>
+            </a:pPr>
+            <a:r>
+              <a:rPr sz="1200" b="0">
+                <a:solidFill>
+                  <a:srgbClr val="20242C"/>
+                </a:solidFill>
+                <a:latin typeface="Microsoft YaHei"/>
+              </a:rPr>
+              <a:t>由逐链路占用约束求得 R(J) 理论边界与等速率上限 R* = 5.7143；再用 100 拍 Jain、长期 max/min、硬件 FF‑eq 和流量迁移统一评估。</a:t>
+            </a:r>
+          </a:p>
+          <a:p>
+            <a:pPr algn="l">
+              <a:lnSpc>
+                <a:spcPct val="102000"/>
+              </a:lnSpc>
+              <a:spcBef>
+                <a:spcPts val="600"/>
+              </a:spcBef>
+            </a:pPr>
+            <a:r>
+              <a:rPr sz="1200" b="1">
+                <a:solidFill>
+                  <a:srgbClr val="D20A2E"/>
+                </a:solidFill>
+                <a:latin typeface="Microsoft YaHei"/>
+              </a:rPr>
+              <a:t>结论：方案优劣来自同一上界下的可量化差距，不依赖经验判断。</a:t>
+            </a:r>
+          </a:p>
+        </p:txBody>
+      </p:sp>
+      <p:sp>
+        <p:nvSpPr>
+          <p:cNvPr id="19" name="Rectangle 18"/>
+          <p:cNvSpPr/>
+          <p:nvPr/>
+        </p:nvSpPr>
+        <p:spPr>
+          <a:xfrm>
+            <a:off x="9024899" y="2231136"/>
+            <a:ext cx="2599867" cy="2999231"/>
+          </a:xfrm>
+          <a:prstGeom prst="rect">
+            <a:avLst/>
+          </a:prstGeom>
+          <a:solidFill>
+            <a:srgbClr val="FFFFFF"/>
+          </a:solidFill>
+          <a:ln w="19050">
+            <a:solidFill>
+              <a:srgbClr val="D20A2E"/>
+            </a:solidFill>
+          </a:ln>
+          <a:effectLst/>
+        </p:spPr>
+        <p:style>
+          <a:lnRef idx="1">
+            <a:schemeClr val="accent1"/>
+          </a:lnRef>
+          <a:fillRef idx="3">
+            <a:schemeClr val="accent1"/>
+          </a:fillRef>
+          <a:effectRef idx="2">
+            <a:schemeClr val="accent1"/>
+          </a:effectRef>
+          <a:fontRef idx="minor">
+            <a:schemeClr val="lt1"/>
+          </a:fontRef>
+        </p:style>
+        <p:txBody>
+          <a:bodyPr rtlCol="0" anchor="ctr" wrap="square"/>
+          <a:lstStyle/>
+          <a:p>
+            <a:pPr algn="ctr"/>
+          </a:p>
+        </p:txBody>
+      </p:sp>
+      <p:sp>
+        <p:nvSpPr>
+          <p:cNvPr id="20" name="TextBox 19"/>
+          <p:cNvSpPr txBox="1"/>
+          <p:nvPr/>
+        </p:nvSpPr>
+        <p:spPr>
+          <a:xfrm>
+            <a:off x="9226067" y="2453396"/>
+            <a:ext cx="2197531" cy="314705"/>
+          </a:xfrm>
+          <a:prstGeom prst="rect">
+            <a:avLst/>
+          </a:prstGeom>
+          <a:noFill/>
+        </p:spPr>
+        <p:txBody>
+          <a:bodyPr wrap="square" anchor="t" lIns="0" rIns="0" tIns="0" bIns="0">
+            <a:spAutoFit/>
+          </a:bodyPr>
+          <a:lstStyle/>
+          <a:p>
+            <a:pPr algn="l">
+              <a:lnSpc>
+                <a:spcPct val="100000"/>
+              </a:lnSpc>
+            </a:pPr>
+            <a:r>
+              <a:rPr sz="1500" b="1">
+                <a:solidFill>
+                  <a:srgbClr val="D20A2E"/>
+                </a:solidFill>
+                <a:latin typeface="Microsoft YaHei"/>
+              </a:rPr>
+              <a:t>④ 控制点决定方案</a:t>
+            </a:r>
+          </a:p>
+        </p:txBody>
+      </p:sp>
+      <p:sp>
+        <p:nvSpPr>
+          <p:cNvPr id="21" name="TextBox 20"/>
+          <p:cNvSpPr txBox="1"/>
+          <p:nvPr/>
+        </p:nvSpPr>
+        <p:spPr>
+          <a:xfrm>
+            <a:off x="9226067" y="2850398"/>
+            <a:ext cx="2197531" cy="2194285"/>
+          </a:xfrm>
+          <a:prstGeom prst="rect">
+            <a:avLst/>
+          </a:prstGeom>
+          <a:noFill/>
+        </p:spPr>
+        <p:txBody>
+          <a:bodyPr wrap="square" anchor="t" lIns="0" rIns="0" tIns="0" bIns="0">
+            <a:spAutoFit/>
+          </a:bodyPr>
+          <a:lstStyle/>
+          <a:p>
+            <a:pPr algn="l">
+              <a:lnSpc>
+                <a:spcPct val="102000"/>
+              </a:lnSpc>
+            </a:pPr>
+            <a:r>
+              <a:rPr sz="850" b="0">
+                <a:solidFill>
+                  <a:srgbClr val="20242C"/>
+                </a:solidFill>
+                <a:latin typeface="Microsoft YaHei"/>
+              </a:rPr>
+              <a:t>S16 在 HA 授权点直接重排服务：900 FF‑eq，Jain 0.98466，max/min 1.0001，总带宽仅 −0.39%。</a:t>
+            </a:r>
+          </a:p>
+          <a:p>
+            <a:pPr algn="l">
+              <a:lnSpc>
+                <a:spcPct val="102000"/>
+              </a:lnSpc>
+              <a:spcBef>
+                <a:spcPts val="600"/>
+              </a:spcBef>
+            </a:pPr>
+            <a:r>
+              <a:rPr sz="850" b="0">
+                <a:solidFill>
+                  <a:srgbClr val="20242C"/>
+                </a:solidFill>
+                <a:latin typeface="Microsoft YaHei"/>
+              </a:rPr>
+              <a:t>八类分类里原本空着的四类已全部实现并实测：自适应路由（S26）与逐跳背压（S27）结构性失效，显式速率要么不动公平（S28）要么用 40% 带宽换公平（S28S），只有预约调度（S29，复用让位执行器）三条轴全面优于 S1。</a:t>
+            </a:r>
+          </a:p>
+          <a:p>
+            <a:pPr algn="l">
+              <a:lnSpc>
+                <a:spcPct val="102000"/>
+              </a:lnSpc>
+              <a:spcBef>
+                <a:spcPts val="600"/>
+              </a:spcBef>
+            </a:pPr>
+            <a:r>
+              <a:rPr sz="850" b="0">
+                <a:solidFill>
+                  <a:srgbClr val="20242C"/>
+                </a:solidFill>
+                <a:latin typeface="Microsoft YaHei"/>
+              </a:rPr>
+              <a:t>若事务层不可改，只动环仲裁：S22（13,920 FF‑eq）效果最好，S29（4,440）便宜 3.1 倍；S19 / S20 仅作对照。</a:t>
+            </a:r>
+          </a:p>
+          <a:p>
+            <a:pPr algn="l">
+              <a:lnSpc>
+                <a:spcPct val="102000"/>
+              </a:lnSpc>
+              <a:spcBef>
+                <a:spcPts val="600"/>
+              </a:spcBef>
+            </a:pPr>
+            <a:r>
+              <a:rPr sz="850" b="1">
+                <a:solidFill>
+                  <a:srgbClr val="D20A2E"/>
+                </a:solidFill>
+                <a:latin typeface="Microsoft YaHei"/>
+              </a:rPr>
+              <a:t>架构决策只剩：HA 授权调度能不能改。</a:t>
+            </a:r>
+          </a:p>
+        </p:txBody>
+      </p:sp>
+      <p:sp>
+        <p:nvSpPr>
+          <p:cNvPr id="22" name="Rectangle 21"/>
+          <p:cNvSpPr/>
+          <p:nvPr/>
+        </p:nvSpPr>
+        <p:spPr>
+          <a:xfrm>
+            <a:off x="566928" y="5468112"/>
+            <a:ext cx="11057839" cy="859536"/>
+          </a:xfrm>
+          <a:prstGeom prst="rect">
+            <a:avLst/>
+          </a:prstGeom>
+          <a:solidFill>
+            <a:srgbClr val="D20A2E"/>
+          </a:solidFill>
+          <a:ln>
+            <a:noFill/>
+          </a:ln>
+          <a:effectLst/>
+        </p:spPr>
+        <p:style>
+          <a:lnRef idx="1">
+            <a:schemeClr val="accent1"/>
+          </a:lnRef>
+          <a:fillRef idx="3">
+            <a:schemeClr val="accent1"/>
+          </a:fillRef>
+          <a:effectRef idx="2">
+            <a:schemeClr val="accent1"/>
+          </a:effectRef>
+          <a:fontRef idx="minor">
+            <a:schemeClr val="lt1"/>
+          </a:fontRef>
+        </p:style>
+        <p:txBody>
+          <a:bodyPr rtlCol="0" anchor="ctr" wrap="square"/>
+          <a:lstStyle/>
+          <a:p>
+            <a:pPr algn="ctr"/>
+          </a:p>
+        </p:txBody>
+      </p:sp>
+      <p:sp>
+        <p:nvSpPr>
+          <p:cNvPr id="23" name="TextBox 22"/>
+          <p:cNvSpPr txBox="1"/>
+          <p:nvPr/>
+        </p:nvSpPr>
+        <p:spPr>
+          <a:xfrm>
+            <a:off x="877824" y="5559552"/>
+            <a:ext cx="10436047" cy="676656"/>
+          </a:xfrm>
+          <a:prstGeom prst="rect">
+            <a:avLst/>
+          </a:prstGeom>
+          <a:noFill/>
+        </p:spPr>
+        <p:txBody>
+          <a:bodyPr wrap="square" anchor="ctr" lIns="0" rIns="0" tIns="0" bIns="0">
+            <a:spAutoFit/>
+          </a:bodyPr>
+          <a:lstStyle/>
+          <a:p>
+            <a:pPr algn="l">
+              <a:lnSpc>
+                <a:spcPct val="104000"/>
+              </a:lnSpc>
+            </a:pPr>
+            <a:r>
+              <a:rPr sz="1300" b="0">
                 <a:solidFill>
                   <a:srgbClr val="FFFFFF"/>
                 </a:solidFill>
                 <a:latin typeface="Microsoft YaHei"/>
               </a:rPr>
-              <a:t>汇报完毕</a:t>
-            </a:r>
-          </a:p>
-          <a:p>
-            <a:pPr algn="l">
-              <a:lnSpc>
-                <a:spcPct val="96000"/>
-              </a:lnSpc>
-              <a:spcBef>
-                <a:spcPts val="500"/>
-              </a:spcBef>
-            </a:pPr>
-            <a:r>
-              <a:rPr sz="4400" b="1">
-                <a:solidFill>
-                  <a:srgbClr val="FFFFFF"/>
-                </a:solidFill>
-                <a:latin typeface="Microsoft YaHei"/>
-              </a:rPr>
-              <a:t>请架构组决策</a:t>
-            </a:r>
-          </a:p>
-        </p:txBody>
-      </p:sp>
-      <p:sp>
-        <p:nvSpPr>
-          <p:cNvPr id="9" name="TextBox 8"/>
-          <p:cNvSpPr txBox="1"/>
-          <p:nvPr/>
-        </p:nvSpPr>
-        <p:spPr>
-          <a:xfrm>
-            <a:off x="566928" y="5120640"/>
-            <a:ext cx="7863840" cy="822960"/>
-          </a:xfrm>
-          <a:prstGeom prst="rect">
-            <a:avLst/>
-          </a:prstGeom>
-          <a:noFill/>
-        </p:spPr>
-        <p:txBody>
-          <a:bodyPr wrap="square" anchor="t" lIns="0" rIns="0" tIns="0" bIns="0">
-            <a:spAutoFit/>
-          </a:bodyPr>
-          <a:lstStyle/>
-          <a:p>
-            <a:pPr algn="l">
-              <a:lnSpc>
-                <a:spcPct val="110000"/>
-              </a:lnSpc>
-            </a:pPr>
-            <a:r>
-              <a:rPr sz="1400" b="0">
-                <a:solidFill>
-                  <a:srgbClr val="9AA3AF"/>
-                </a:solidFill>
-                <a:latin typeface="Microsoft YaHei"/>
-              </a:rPr>
-              <a:t>第一问仍是：HA / 内存控制器的授权调度能不能改？</a:t>
-            </a:r>
-          </a:p>
-          <a:p>
-            <a:pPr algn="l">
-              <a:lnSpc>
-                <a:spcPct val="110000"/>
-              </a:lnSpc>
-              <a:spcBef>
-                <a:spcPts val="500"/>
-              </a:spcBef>
-            </a:pPr>
-            <a:r>
-              <a:rPr sz="1400" b="0">
-                <a:solidFill>
-                  <a:srgbClr val="9AA3AF"/>
-                </a:solidFill>
-                <a:latin typeface="Microsoft YaHei"/>
-              </a:rPr>
-              <a:t>允许修改：进入 S16 微架构验证；不允许修改：进入 S22 环仲裁原型。</a:t>
-            </a:r>
-          </a:p>
-        </p:txBody>
-      </p:sp>
-      <p:sp>
-        <p:nvSpPr>
-          <p:cNvPr id="10" name="TextBox 9"/>
+              <a:t>本研究完成了「现象复现 → 逐拍归因 → 理论上界 → 机制设计 → 硬件代价 → 流量迁移」闭环，并把开放问题压缩为一项可决策的架构边界。</a:t>
+            </a:r>
+          </a:p>
+        </p:txBody>
+      </p:sp>
+      <p:sp>
+        <p:nvSpPr>
+          <p:cNvPr id="24" name="TextBox 23"/>
           <p:cNvSpPr txBox="1"/>
           <p:nvPr/>
         </p:nvSpPr>
@@ -33355,11 +33876,11 @@
             <a:r>
               <a:rPr sz="1000" b="0">
                 <a:solidFill>
-                  <a:srgbClr val="555B66"/>
+                  <a:srgbClr val="A8B0BA"/>
                 </a:solidFill>
                 <a:latin typeface="Arial"/>
               </a:rPr>
-              <a:t>39 / 39</a:t>
+              <a:t>39 / 41</a:t>
             </a:r>
           </a:p>
         </p:txBody>
@@ -34140,7 +34661,1994 @@
                 </a:solidFill>
                 <a:latin typeface="Arial"/>
               </a:rPr>
-              <a:t>04 / 39</a:t>
+              <a:t>04 / 41</a:t>
+            </a:r>
+          </a:p>
+        </p:txBody>
+      </p:sp>
+    </p:spTree>
+  </p:cSld>
+  <p:clrMapOvr>
+    <a:masterClrMapping/>
+  </p:clrMapOvr>
+</p:sld>
+</file>
+
+<file path=ppt/slides/slide40.xml><?xml version="1.0" encoding="utf-8"?>
+<p:sld xmlns:a="http://schemas.openxmlformats.org/drawingml/2006/main" xmlns:p="http://schemas.openxmlformats.org/presentationml/2006/main" xmlns:r="http://schemas.openxmlformats.org/officeDocument/2006/relationships">
+  <p:cSld>
+    <p:spTree>
+      <p:nvGrpSpPr>
+        <p:cNvPr id="1" name=""/>
+        <p:cNvGrpSpPr/>
+        <p:nvPr/>
+      </p:nvGrpSpPr>
+      <p:grpSpPr/>
+      <p:sp>
+        <p:nvSpPr>
+          <p:cNvPr id="2" name="Rectangle 1"/>
+          <p:cNvSpPr/>
+          <p:nvPr/>
+        </p:nvSpPr>
+        <p:spPr>
+          <a:xfrm>
+            <a:off x="0" y="0"/>
+            <a:ext cx="12191695" cy="6858000"/>
+          </a:xfrm>
+          <a:prstGeom prst="rect">
+            <a:avLst/>
+          </a:prstGeom>
+          <a:solidFill>
+            <a:srgbClr val="F4F7FB"/>
+          </a:solidFill>
+          <a:ln>
+            <a:noFill/>
+          </a:ln>
+          <a:effectLst/>
+        </p:spPr>
+        <p:style>
+          <a:lnRef idx="1">
+            <a:schemeClr val="accent1"/>
+          </a:lnRef>
+          <a:fillRef idx="3">
+            <a:schemeClr val="accent1"/>
+          </a:fillRef>
+          <a:effectRef idx="2">
+            <a:schemeClr val="accent1"/>
+          </a:effectRef>
+          <a:fontRef idx="minor">
+            <a:schemeClr val="lt1"/>
+          </a:fontRef>
+        </p:style>
+        <p:txBody>
+          <a:bodyPr rtlCol="0" anchor="ctr" wrap="square"/>
+          <a:lstStyle/>
+          <a:p>
+            <a:pPr algn="ctr"/>
+          </a:p>
+        </p:txBody>
+      </p:sp>
+      <p:sp>
+        <p:nvSpPr>
+          <p:cNvPr id="3" name="Rectangle 2"/>
+          <p:cNvSpPr/>
+          <p:nvPr/>
+        </p:nvSpPr>
+        <p:spPr>
+          <a:xfrm>
+            <a:off x="566928" y="301752"/>
+            <a:ext cx="137160" cy="137160"/>
+          </a:xfrm>
+          <a:prstGeom prst="rect">
+            <a:avLst/>
+          </a:prstGeom>
+          <a:solidFill>
+            <a:srgbClr val="D20A2E"/>
+          </a:solidFill>
+          <a:ln>
+            <a:noFill/>
+          </a:ln>
+          <a:effectLst/>
+        </p:spPr>
+        <p:style>
+          <a:lnRef idx="1">
+            <a:schemeClr val="accent1"/>
+          </a:lnRef>
+          <a:fillRef idx="3">
+            <a:schemeClr val="accent1"/>
+          </a:fillRef>
+          <a:effectRef idx="2">
+            <a:schemeClr val="accent1"/>
+          </a:effectRef>
+          <a:fontRef idx="minor">
+            <a:schemeClr val="lt1"/>
+          </a:fontRef>
+        </p:style>
+        <p:txBody>
+          <a:bodyPr rtlCol="0" anchor="ctr" wrap="square"/>
+          <a:lstStyle/>
+          <a:p>
+            <a:pPr algn="ctr"/>
+          </a:p>
+        </p:txBody>
+      </p:sp>
+      <p:sp>
+        <p:nvSpPr>
+          <p:cNvPr id="4" name="TextBox 3"/>
+          <p:cNvSpPr txBox="1"/>
+          <p:nvPr/>
+        </p:nvSpPr>
+        <p:spPr>
+          <a:xfrm>
+            <a:off x="804672" y="265176"/>
+            <a:ext cx="9229039" cy="237744"/>
+          </a:xfrm>
+          <a:prstGeom prst="rect">
+            <a:avLst/>
+          </a:prstGeom>
+          <a:noFill/>
+        </p:spPr>
+        <p:txBody>
+          <a:bodyPr wrap="square" anchor="t" lIns="0" rIns="0" tIns="0" bIns="0">
+            <a:spAutoFit/>
+          </a:bodyPr>
+          <a:lstStyle/>
+          <a:p>
+            <a:pPr algn="l">
+              <a:lnSpc>
+                <a:spcPct val="100000"/>
+              </a:lnSpc>
+            </a:pPr>
+            <a:r>
+              <a:rPr sz="1150" b="1">
+                <a:solidFill>
+                  <a:srgbClr val="667080"/>
+                </a:solidFill>
+                <a:latin typeface="Microsoft YaHei"/>
+              </a:rPr>
+              <a:t>建议</a:t>
+            </a:r>
+          </a:p>
+        </p:txBody>
+      </p:sp>
+      <p:sp>
+        <p:nvSpPr>
+          <p:cNvPr id="5" name="Rectangle 4"/>
+          <p:cNvSpPr/>
+          <p:nvPr/>
+        </p:nvSpPr>
+        <p:spPr>
+          <a:xfrm>
+            <a:off x="566928" y="640080"/>
+            <a:ext cx="11057839" cy="10058"/>
+          </a:xfrm>
+          <a:prstGeom prst="rect">
+            <a:avLst/>
+          </a:prstGeom>
+          <a:solidFill>
+            <a:srgbClr val="DCE3EA"/>
+          </a:solidFill>
+          <a:ln>
+            <a:noFill/>
+          </a:ln>
+          <a:effectLst/>
+        </p:spPr>
+        <p:style>
+          <a:lnRef idx="1">
+            <a:schemeClr val="accent1"/>
+          </a:lnRef>
+          <a:fillRef idx="3">
+            <a:schemeClr val="accent1"/>
+          </a:fillRef>
+          <a:effectRef idx="2">
+            <a:schemeClr val="accent1"/>
+          </a:effectRef>
+          <a:fontRef idx="minor">
+            <a:schemeClr val="lt1"/>
+          </a:fontRef>
+        </p:style>
+        <p:txBody>
+          <a:bodyPr rtlCol="0" anchor="ctr" wrap="square"/>
+          <a:lstStyle/>
+          <a:p>
+            <a:pPr algn="ctr"/>
+          </a:p>
+        </p:txBody>
+      </p:sp>
+      <p:sp>
+        <p:nvSpPr>
+          <p:cNvPr id="6" name="Rectangle 5"/>
+          <p:cNvSpPr/>
+          <p:nvPr/>
+        </p:nvSpPr>
+        <p:spPr>
+          <a:xfrm>
+            <a:off x="10143439" y="274320"/>
+            <a:ext cx="182880" cy="182880"/>
+          </a:xfrm>
+          <a:prstGeom prst="rect">
+            <a:avLst/>
+          </a:prstGeom>
+          <a:solidFill>
+            <a:srgbClr val="D20A2E"/>
+          </a:solidFill>
+          <a:ln>
+            <a:noFill/>
+          </a:ln>
+          <a:effectLst/>
+        </p:spPr>
+        <p:style>
+          <a:lnRef idx="1">
+            <a:schemeClr val="accent1"/>
+          </a:lnRef>
+          <a:fillRef idx="3">
+            <a:schemeClr val="accent1"/>
+          </a:fillRef>
+          <a:effectRef idx="2">
+            <a:schemeClr val="accent1"/>
+          </a:effectRef>
+          <a:fontRef idx="minor">
+            <a:schemeClr val="lt1"/>
+          </a:fontRef>
+        </p:style>
+        <p:txBody>
+          <a:bodyPr rtlCol="0" anchor="ctr" wrap="square"/>
+          <a:lstStyle/>
+          <a:p>
+            <a:pPr algn="ctr"/>
+          </a:p>
+        </p:txBody>
+      </p:sp>
+      <p:sp>
+        <p:nvSpPr>
+          <p:cNvPr id="7" name="TextBox 6"/>
+          <p:cNvSpPr txBox="1"/>
+          <p:nvPr/>
+        </p:nvSpPr>
+        <p:spPr>
+          <a:xfrm>
+            <a:off x="10399471" y="246888"/>
+            <a:ext cx="1225296" cy="256032"/>
+          </a:xfrm>
+          <a:prstGeom prst="rect">
+            <a:avLst/>
+          </a:prstGeom>
+          <a:noFill/>
+        </p:spPr>
+        <p:txBody>
+          <a:bodyPr wrap="square" anchor="t" lIns="0" rIns="0" tIns="0" bIns="0">
+            <a:spAutoFit/>
+          </a:bodyPr>
+          <a:lstStyle/>
+          <a:p>
+            <a:pPr algn="l">
+              <a:lnSpc>
+                <a:spcPct val="100000"/>
+              </a:lnSpc>
+            </a:pPr>
+            <a:r>
+              <a:rPr sz="1300" b="1">
+                <a:solidFill>
+                  <a:srgbClr val="20242C"/>
+                </a:solidFill>
+                <a:latin typeface="Arial"/>
+              </a:rPr>
+              <a:t>HUAWEI</a:t>
+            </a:r>
+          </a:p>
+        </p:txBody>
+      </p:sp>
+      <p:sp>
+        <p:nvSpPr>
+          <p:cNvPr id="8" name="TextBox 7"/>
+          <p:cNvSpPr txBox="1"/>
+          <p:nvPr/>
+        </p:nvSpPr>
+        <p:spPr>
+          <a:xfrm>
+            <a:off x="566928" y="1060704"/>
+            <a:ext cx="11057839" cy="237744"/>
+          </a:xfrm>
+          <a:prstGeom prst="rect">
+            <a:avLst/>
+          </a:prstGeom>
+          <a:noFill/>
+        </p:spPr>
+        <p:txBody>
+          <a:bodyPr wrap="square" anchor="t" lIns="0" rIns="0" tIns="0" bIns="0">
+            <a:spAutoFit/>
+          </a:bodyPr>
+          <a:lstStyle/>
+          <a:p>
+            <a:pPr algn="l">
+              <a:lnSpc>
+                <a:spcPct val="100000"/>
+              </a:lnSpc>
+            </a:pPr>
+            <a:r>
+              <a:rPr sz="1050" b="1">
+                <a:solidFill>
+                  <a:srgbClr val="D20A2E"/>
+                </a:solidFill>
+                <a:latin typeface="Arial"/>
+              </a:rPr>
+              <a:t>R E C O M M E N D A T I O N</a:t>
+            </a:r>
+          </a:p>
+        </p:txBody>
+      </p:sp>
+      <p:sp>
+        <p:nvSpPr>
+          <p:cNvPr id="9" name="TextBox 8"/>
+          <p:cNvSpPr txBox="1"/>
+          <p:nvPr/>
+        </p:nvSpPr>
+        <p:spPr>
+          <a:xfrm>
+            <a:off x="566928" y="1353312"/>
+            <a:ext cx="11057839" cy="658368"/>
+          </a:xfrm>
+          <a:prstGeom prst="rect">
+            <a:avLst/>
+          </a:prstGeom>
+          <a:noFill/>
+        </p:spPr>
+        <p:txBody>
+          <a:bodyPr wrap="square" anchor="t" lIns="0" rIns="0" tIns="0" bIns="0">
+            <a:spAutoFit/>
+          </a:bodyPr>
+          <a:lstStyle/>
+          <a:p>
+            <a:pPr algn="l">
+              <a:lnSpc>
+                <a:spcPct val="100000"/>
+              </a:lnSpc>
+            </a:pPr>
+            <a:r>
+              <a:rPr sz="3000" b="1">
+                <a:solidFill>
+                  <a:srgbClr val="20242C"/>
+                </a:solidFill>
+                <a:latin typeface="Microsoft YaHei"/>
+              </a:rPr>
+              <a:t>一主两备，明确研究边界</a:t>
+            </a:r>
+          </a:p>
+        </p:txBody>
+      </p:sp>
+      <p:sp>
+        <p:nvSpPr>
+          <p:cNvPr id="10" name="Rectangle 9"/>
+          <p:cNvSpPr/>
+          <p:nvPr/>
+        </p:nvSpPr>
+        <p:spPr>
+          <a:xfrm>
+            <a:off x="566928" y="2194560"/>
+            <a:ext cx="2599867" cy="3017520"/>
+          </a:xfrm>
+          <a:prstGeom prst="rect">
+            <a:avLst/>
+          </a:prstGeom>
+          <a:solidFill>
+            <a:srgbClr val="FFFFFF"/>
+          </a:solidFill>
+          <a:ln w="19050">
+            <a:solidFill>
+              <a:srgbClr val="D20A2E"/>
+            </a:solidFill>
+          </a:ln>
+          <a:effectLst/>
+        </p:spPr>
+        <p:style>
+          <a:lnRef idx="1">
+            <a:schemeClr val="accent1"/>
+          </a:lnRef>
+          <a:fillRef idx="3">
+            <a:schemeClr val="accent1"/>
+          </a:fillRef>
+          <a:effectRef idx="2">
+            <a:schemeClr val="accent1"/>
+          </a:effectRef>
+          <a:fontRef idx="minor">
+            <a:schemeClr val="lt1"/>
+          </a:fontRef>
+        </p:style>
+        <p:txBody>
+          <a:bodyPr rtlCol="0" anchor="ctr" wrap="square"/>
+          <a:lstStyle/>
+          <a:p>
+            <a:pPr algn="ctr"/>
+          </a:p>
+        </p:txBody>
+      </p:sp>
+      <p:sp>
+        <p:nvSpPr>
+          <p:cNvPr id="11" name="Oval 10"/>
+          <p:cNvSpPr/>
+          <p:nvPr/>
+        </p:nvSpPr>
+        <p:spPr>
+          <a:xfrm>
+            <a:off x="786384" y="2414016"/>
+            <a:ext cx="384048" cy="384048"/>
+          </a:xfrm>
+          <a:prstGeom prst="ellipse">
+            <a:avLst/>
+          </a:prstGeom>
+          <a:solidFill>
+            <a:srgbClr val="D20A2E"/>
+          </a:solidFill>
+          <a:ln>
+            <a:noFill/>
+          </a:ln>
+          <a:effectLst/>
+        </p:spPr>
+        <p:style>
+          <a:lnRef idx="1">
+            <a:schemeClr val="accent1"/>
+          </a:lnRef>
+          <a:fillRef idx="3">
+            <a:schemeClr val="accent1"/>
+          </a:fillRef>
+          <a:effectRef idx="2">
+            <a:schemeClr val="accent1"/>
+          </a:effectRef>
+          <a:fontRef idx="minor">
+            <a:schemeClr val="lt1"/>
+          </a:fontRef>
+        </p:style>
+        <p:txBody>
+          <a:bodyPr rtlCol="0" anchor="ctr" wrap="square"/>
+          <a:lstStyle/>
+          <a:p>
+            <a:pPr algn="ctr"/>
+          </a:p>
+        </p:txBody>
+      </p:sp>
+      <p:sp>
+        <p:nvSpPr>
+          <p:cNvPr id="12" name="TextBox 11"/>
+          <p:cNvSpPr txBox="1"/>
+          <p:nvPr/>
+        </p:nvSpPr>
+        <p:spPr>
+          <a:xfrm>
+            <a:off x="786384" y="2496312"/>
+            <a:ext cx="384048" cy="237744"/>
+          </a:xfrm>
+          <a:prstGeom prst="rect">
+            <a:avLst/>
+          </a:prstGeom>
+          <a:noFill/>
+        </p:spPr>
+        <p:txBody>
+          <a:bodyPr wrap="square" anchor="t" lIns="0" rIns="0" tIns="0" bIns="0">
+            <a:spAutoFit/>
+          </a:bodyPr>
+          <a:lstStyle/>
+          <a:p>
+            <a:pPr algn="ctr">
+              <a:lnSpc>
+                <a:spcPct val="100000"/>
+              </a:lnSpc>
+            </a:pPr>
+            <a:r>
+              <a:rPr sz="1150" b="1">
+                <a:solidFill>
+                  <a:srgbClr val="FFFFFF"/>
+                </a:solidFill>
+                <a:latin typeface="Arial"/>
+              </a:rPr>
+              <a:t>01</a:t>
+            </a:r>
+          </a:p>
+        </p:txBody>
+      </p:sp>
+      <p:sp>
+        <p:nvSpPr>
+          <p:cNvPr id="13" name="TextBox 12"/>
+          <p:cNvSpPr txBox="1"/>
+          <p:nvPr/>
+        </p:nvSpPr>
+        <p:spPr>
+          <a:xfrm>
+            <a:off x="786384" y="2958975"/>
+            <a:ext cx="2160955" cy="592836"/>
+          </a:xfrm>
+          <a:prstGeom prst="rect">
+            <a:avLst/>
+          </a:prstGeom>
+          <a:noFill/>
+        </p:spPr>
+        <p:txBody>
+          <a:bodyPr wrap="square" anchor="t" lIns="0" rIns="0" tIns="0" bIns="0">
+            <a:spAutoFit/>
+          </a:bodyPr>
+          <a:lstStyle/>
+          <a:p>
+            <a:pPr algn="l">
+              <a:lnSpc>
+                <a:spcPct val="100000"/>
+              </a:lnSpc>
+            </a:pPr>
+            <a:r>
+              <a:rPr sz="1500" b="1">
+                <a:solidFill>
+                  <a:srgbClr val="D20A2E"/>
+                </a:solidFill>
+                <a:latin typeface="Microsoft YaHei"/>
+              </a:rPr>
+              <a:t>主方案 · S16 写侧授权保留</a:t>
+            </a:r>
+          </a:p>
+        </p:txBody>
+      </p:sp>
+      <p:sp>
+        <p:nvSpPr>
+          <p:cNvPr id="14" name="TextBox 13"/>
+          <p:cNvSpPr txBox="1"/>
+          <p:nvPr/>
+        </p:nvSpPr>
+        <p:spPr>
+          <a:xfrm>
+            <a:off x="786384" y="3634107"/>
+            <a:ext cx="2160955" cy="1380484"/>
+          </a:xfrm>
+          <a:prstGeom prst="rect">
+            <a:avLst/>
+          </a:prstGeom>
+          <a:noFill/>
+        </p:spPr>
+        <p:txBody>
+          <a:bodyPr wrap="square" anchor="t" lIns="0" rIns="0" tIns="0" bIns="0">
+            <a:spAutoFit/>
+          </a:bodyPr>
+          <a:lstStyle/>
+          <a:p>
+            <a:pPr algn="l">
+              <a:lnSpc>
+                <a:spcPct val="102000"/>
+              </a:lnSpc>
+            </a:pPr>
+            <a:r>
+              <a:rPr sz="900" b="1">
+                <a:solidFill>
+                  <a:srgbClr val="20242C"/>
+                </a:solidFill>
+                <a:latin typeface="Microsoft YaHei"/>
+              </a:rPr>
+              <a:t>目标</a:t>
+            </a:r>
+            <a:r>
+              <a:rPr sz="900" b="0">
+                <a:solidFill>
+                  <a:srgbClr val="20242C"/>
+                </a:solidFill>
+                <a:latin typeface="Microsoft YaHei"/>
+              </a:rPr>
+              <a:t>：在 HA / memory controller 内验证 DBIDResp 授权排队与最少服务优先。</a:t>
+            </a:r>
+          </a:p>
+          <a:p>
+            <a:pPr algn="l">
+              <a:lnSpc>
+                <a:spcPct val="102000"/>
+              </a:lnSpc>
+              <a:spcBef>
+                <a:spcPts val="600"/>
+              </a:spcBef>
+            </a:pPr>
+            <a:r>
+              <a:rPr sz="900" b="1">
+                <a:solidFill>
+                  <a:srgbClr val="20242C"/>
+                </a:solidFill>
+                <a:latin typeface="Microsoft YaHei"/>
+              </a:rPr>
+              <a:t>价值</a:t>
+            </a:r>
+            <a:r>
+              <a:rPr sz="900" b="0">
+                <a:solidFill>
+                  <a:srgbClr val="20242C"/>
+                </a:solidFill>
+                <a:latin typeface="Microsoft YaHei"/>
+              </a:rPr>
+              <a:t>：当前所有可实现点里，S16 离理论上界最近、硬件代价最低，并在 uniform / hot 两类流量下都不显著损失带宽。</a:t>
+            </a:r>
+          </a:p>
+          <a:p>
+            <a:pPr algn="l">
+              <a:lnSpc>
+                <a:spcPct val="102000"/>
+              </a:lnSpc>
+              <a:spcBef>
+                <a:spcPts val="600"/>
+              </a:spcBef>
+            </a:pPr>
+            <a:r>
+              <a:rPr sz="900" b="1">
+                <a:solidFill>
+                  <a:srgbClr val="20242C"/>
+                </a:solidFill>
+                <a:latin typeface="Microsoft YaHei"/>
+              </a:rPr>
+              <a:t>门槛</a:t>
+            </a:r>
+            <a:r>
+              <a:rPr sz="900" b="0">
+                <a:solidFill>
+                  <a:srgbClr val="20242C"/>
+                </a:solidFill>
+                <a:latin typeface="Microsoft YaHei"/>
+              </a:rPr>
+              <a:t>：确认 HA 授权时序、CHI 合规性和现有 tracker 接口可支持。</a:t>
+            </a:r>
+          </a:p>
+        </p:txBody>
+      </p:sp>
+      <p:sp>
+        <p:nvSpPr>
+          <p:cNvPr id="15" name="Rectangle 14"/>
+          <p:cNvSpPr/>
+          <p:nvPr/>
+        </p:nvSpPr>
+        <p:spPr>
+          <a:xfrm>
+            <a:off x="3386251" y="2194560"/>
+            <a:ext cx="2599867" cy="3017520"/>
+          </a:xfrm>
+          <a:prstGeom prst="rect">
+            <a:avLst/>
+          </a:prstGeom>
+          <a:solidFill>
+            <a:srgbClr val="FFFFFF"/>
+          </a:solidFill>
+          <a:ln w="12700">
+            <a:solidFill>
+              <a:srgbClr val="DCE3EA"/>
+            </a:solidFill>
+          </a:ln>
+          <a:effectLst/>
+        </p:spPr>
+        <p:style>
+          <a:lnRef idx="1">
+            <a:schemeClr val="accent1"/>
+          </a:lnRef>
+          <a:fillRef idx="3">
+            <a:schemeClr val="accent1"/>
+          </a:fillRef>
+          <a:effectRef idx="2">
+            <a:schemeClr val="accent1"/>
+          </a:effectRef>
+          <a:fontRef idx="minor">
+            <a:schemeClr val="lt1"/>
+          </a:fontRef>
+        </p:style>
+        <p:txBody>
+          <a:bodyPr rtlCol="0" anchor="ctr" wrap="square"/>
+          <a:lstStyle/>
+          <a:p>
+            <a:pPr algn="ctr"/>
+          </a:p>
+        </p:txBody>
+      </p:sp>
+      <p:sp>
+        <p:nvSpPr>
+          <p:cNvPr id="16" name="Oval 15"/>
+          <p:cNvSpPr/>
+          <p:nvPr/>
+        </p:nvSpPr>
+        <p:spPr>
+          <a:xfrm>
+            <a:off x="3605707" y="2414016"/>
+            <a:ext cx="384048" cy="384048"/>
+          </a:xfrm>
+          <a:prstGeom prst="ellipse">
+            <a:avLst/>
+          </a:prstGeom>
+          <a:solidFill>
+            <a:srgbClr val="D20A2E"/>
+          </a:solidFill>
+          <a:ln>
+            <a:noFill/>
+          </a:ln>
+          <a:effectLst/>
+        </p:spPr>
+        <p:style>
+          <a:lnRef idx="1">
+            <a:schemeClr val="accent1"/>
+          </a:lnRef>
+          <a:fillRef idx="3">
+            <a:schemeClr val="accent1"/>
+          </a:fillRef>
+          <a:effectRef idx="2">
+            <a:schemeClr val="accent1"/>
+          </a:effectRef>
+          <a:fontRef idx="minor">
+            <a:schemeClr val="lt1"/>
+          </a:fontRef>
+        </p:style>
+        <p:txBody>
+          <a:bodyPr rtlCol="0" anchor="ctr" wrap="square"/>
+          <a:lstStyle/>
+          <a:p>
+            <a:pPr algn="ctr"/>
+          </a:p>
+        </p:txBody>
+      </p:sp>
+      <p:sp>
+        <p:nvSpPr>
+          <p:cNvPr id="17" name="TextBox 16"/>
+          <p:cNvSpPr txBox="1"/>
+          <p:nvPr/>
+        </p:nvSpPr>
+        <p:spPr>
+          <a:xfrm>
+            <a:off x="3605707" y="2496312"/>
+            <a:ext cx="384048" cy="237744"/>
+          </a:xfrm>
+          <a:prstGeom prst="rect">
+            <a:avLst/>
+          </a:prstGeom>
+          <a:noFill/>
+        </p:spPr>
+        <p:txBody>
+          <a:bodyPr wrap="square" anchor="t" lIns="0" rIns="0" tIns="0" bIns="0">
+            <a:spAutoFit/>
+          </a:bodyPr>
+          <a:lstStyle/>
+          <a:p>
+            <a:pPr algn="ctr">
+              <a:lnSpc>
+                <a:spcPct val="100000"/>
+              </a:lnSpc>
+            </a:pPr>
+            <a:r>
+              <a:rPr sz="1150" b="1">
+                <a:solidFill>
+                  <a:srgbClr val="FFFFFF"/>
+                </a:solidFill>
+                <a:latin typeface="Arial"/>
+              </a:rPr>
+              <a:t>02</a:t>
+            </a:r>
+          </a:p>
+        </p:txBody>
+      </p:sp>
+      <p:sp>
+        <p:nvSpPr>
+          <p:cNvPr id="18" name="TextBox 17"/>
+          <p:cNvSpPr txBox="1"/>
+          <p:nvPr/>
+        </p:nvSpPr>
+        <p:spPr>
+          <a:xfrm>
+            <a:off x="3605707" y="2958975"/>
+            <a:ext cx="2160955" cy="592836"/>
+          </a:xfrm>
+          <a:prstGeom prst="rect">
+            <a:avLst/>
+          </a:prstGeom>
+          <a:noFill/>
+        </p:spPr>
+        <p:txBody>
+          <a:bodyPr wrap="square" anchor="t" lIns="0" rIns="0" tIns="0" bIns="0">
+            <a:spAutoFit/>
+          </a:bodyPr>
+          <a:lstStyle/>
+          <a:p>
+            <a:pPr algn="l">
+              <a:lnSpc>
+                <a:spcPct val="100000"/>
+              </a:lnSpc>
+            </a:pPr>
+            <a:r>
+              <a:rPr sz="1500" b="1">
+                <a:solidFill>
+                  <a:srgbClr val="20242C"/>
+                </a:solidFill>
+                <a:latin typeface="Microsoft YaHei"/>
+              </a:rPr>
+              <a:t>备选甲 · S22 环上赤字让路</a:t>
+            </a:r>
+          </a:p>
+        </p:txBody>
+      </p:sp>
+      <p:sp>
+        <p:nvSpPr>
+          <p:cNvPr id="19" name="TextBox 18"/>
+          <p:cNvSpPr txBox="1"/>
+          <p:nvPr/>
+        </p:nvSpPr>
+        <p:spPr>
+          <a:xfrm>
+            <a:off x="3605707" y="3634107"/>
+            <a:ext cx="2160955" cy="1380484"/>
+          </a:xfrm>
+          <a:prstGeom prst="rect">
+            <a:avLst/>
+          </a:prstGeom>
+          <a:noFill/>
+        </p:spPr>
+        <p:txBody>
+          <a:bodyPr wrap="square" anchor="t" lIns="0" rIns="0" tIns="0" bIns="0">
+            <a:spAutoFit/>
+          </a:bodyPr>
+          <a:lstStyle/>
+          <a:p>
+            <a:pPr algn="l">
+              <a:lnSpc>
+                <a:spcPct val="102000"/>
+              </a:lnSpc>
+            </a:pPr>
+            <a:r>
+              <a:rPr sz="900" b="1">
+                <a:solidFill>
+                  <a:srgbClr val="20242C"/>
+                </a:solidFill>
+                <a:latin typeface="Microsoft YaHei"/>
+              </a:rPr>
+              <a:t>适用条件</a:t>
+            </a:r>
+            <a:r>
+              <a:rPr sz="900" b="0">
+                <a:solidFill>
+                  <a:srgbClr val="20242C"/>
+                </a:solidFill>
+                <a:latin typeface="Microsoft YaHei"/>
+              </a:rPr>
+              <a:t>：HA 事务调度不可改，但允许调整 ring arbitration。</a:t>
+            </a:r>
+          </a:p>
+          <a:p>
+            <a:pPr algn="l">
+              <a:lnSpc>
+                <a:spcPct val="102000"/>
+              </a:lnSpc>
+              <a:spcBef>
+                <a:spcPts val="600"/>
+              </a:spcBef>
+            </a:pPr>
+            <a:r>
+              <a:rPr sz="900" b="1">
+                <a:solidFill>
+                  <a:srgbClr val="20242C"/>
+                </a:solidFill>
+                <a:latin typeface="Microsoft YaHei"/>
+              </a:rPr>
+              <a:t>验证重点</a:t>
+            </a:r>
+            <a:r>
+              <a:rPr sz="900" b="0">
+                <a:solidFill>
+                  <a:srgbClr val="20242C"/>
+                </a:solidFill>
+                <a:latin typeface="Microsoft YaHei"/>
+              </a:rPr>
+              <a:t>：6 bit 进度总线复用、30 拍反馈稳定性、让路范围和现有注入队列深度下的收益。</a:t>
+            </a:r>
+          </a:p>
+          <a:p>
+            <a:pPr algn="l">
+              <a:lnSpc>
+                <a:spcPct val="102000"/>
+              </a:lnSpc>
+              <a:spcBef>
+                <a:spcPts val="600"/>
+              </a:spcBef>
+            </a:pPr>
+            <a:r>
+              <a:rPr sz="900" b="1">
+                <a:solidFill>
+                  <a:srgbClr val="20242C"/>
+                </a:solidFill>
+                <a:latin typeface="Microsoft YaHei"/>
+              </a:rPr>
+              <a:t>定位</a:t>
+            </a:r>
+            <a:r>
+              <a:rPr sz="900" b="0">
+                <a:solidFill>
+                  <a:srgbClr val="20242C"/>
+                </a:solidFill>
+                <a:latin typeface="Microsoft YaHei"/>
+              </a:rPr>
+              <a:t>：环仲裁分支里效果最好的一档（13,920 FF‑eq）。</a:t>
+            </a:r>
+          </a:p>
+        </p:txBody>
+      </p:sp>
+      <p:sp>
+        <p:nvSpPr>
+          <p:cNvPr id="20" name="Rectangle 19"/>
+          <p:cNvSpPr/>
+          <p:nvPr/>
+        </p:nvSpPr>
+        <p:spPr>
+          <a:xfrm>
+            <a:off x="6205575" y="2194560"/>
+            <a:ext cx="2599867" cy="3017520"/>
+          </a:xfrm>
+          <a:prstGeom prst="rect">
+            <a:avLst/>
+          </a:prstGeom>
+          <a:solidFill>
+            <a:srgbClr val="FFFFFF"/>
+          </a:solidFill>
+          <a:ln w="12700">
+            <a:solidFill>
+              <a:srgbClr val="DCE3EA"/>
+            </a:solidFill>
+          </a:ln>
+          <a:effectLst/>
+        </p:spPr>
+        <p:style>
+          <a:lnRef idx="1">
+            <a:schemeClr val="accent1"/>
+          </a:lnRef>
+          <a:fillRef idx="3">
+            <a:schemeClr val="accent1"/>
+          </a:fillRef>
+          <a:effectRef idx="2">
+            <a:schemeClr val="accent1"/>
+          </a:effectRef>
+          <a:fontRef idx="minor">
+            <a:schemeClr val="lt1"/>
+          </a:fontRef>
+        </p:style>
+        <p:txBody>
+          <a:bodyPr rtlCol="0" anchor="ctr" wrap="square"/>
+          <a:lstStyle/>
+          <a:p>
+            <a:pPr algn="ctr"/>
+          </a:p>
+        </p:txBody>
+      </p:sp>
+      <p:sp>
+        <p:nvSpPr>
+          <p:cNvPr id="21" name="Oval 20"/>
+          <p:cNvSpPr/>
+          <p:nvPr/>
+        </p:nvSpPr>
+        <p:spPr>
+          <a:xfrm>
+            <a:off x="6425031" y="2414016"/>
+            <a:ext cx="384048" cy="384048"/>
+          </a:xfrm>
+          <a:prstGeom prst="ellipse">
+            <a:avLst/>
+          </a:prstGeom>
+          <a:solidFill>
+            <a:srgbClr val="D20A2E"/>
+          </a:solidFill>
+          <a:ln>
+            <a:noFill/>
+          </a:ln>
+          <a:effectLst/>
+        </p:spPr>
+        <p:style>
+          <a:lnRef idx="1">
+            <a:schemeClr val="accent1"/>
+          </a:lnRef>
+          <a:fillRef idx="3">
+            <a:schemeClr val="accent1"/>
+          </a:fillRef>
+          <a:effectRef idx="2">
+            <a:schemeClr val="accent1"/>
+          </a:effectRef>
+          <a:fontRef idx="minor">
+            <a:schemeClr val="lt1"/>
+          </a:fontRef>
+        </p:style>
+        <p:txBody>
+          <a:bodyPr rtlCol="0" anchor="ctr" wrap="square"/>
+          <a:lstStyle/>
+          <a:p>
+            <a:pPr algn="ctr"/>
+          </a:p>
+        </p:txBody>
+      </p:sp>
+      <p:sp>
+        <p:nvSpPr>
+          <p:cNvPr id="22" name="TextBox 21"/>
+          <p:cNvSpPr txBox="1"/>
+          <p:nvPr/>
+        </p:nvSpPr>
+        <p:spPr>
+          <a:xfrm>
+            <a:off x="6425031" y="2496312"/>
+            <a:ext cx="384048" cy="237744"/>
+          </a:xfrm>
+          <a:prstGeom prst="rect">
+            <a:avLst/>
+          </a:prstGeom>
+          <a:noFill/>
+        </p:spPr>
+        <p:txBody>
+          <a:bodyPr wrap="square" anchor="t" lIns="0" rIns="0" tIns="0" bIns="0">
+            <a:spAutoFit/>
+          </a:bodyPr>
+          <a:lstStyle/>
+          <a:p>
+            <a:pPr algn="ctr">
+              <a:lnSpc>
+                <a:spcPct val="100000"/>
+              </a:lnSpc>
+            </a:pPr>
+            <a:r>
+              <a:rPr sz="1150" b="1">
+                <a:solidFill>
+                  <a:srgbClr val="FFFFFF"/>
+                </a:solidFill>
+                <a:latin typeface="Arial"/>
+              </a:rPr>
+              <a:t>03</a:t>
+            </a:r>
+          </a:p>
+        </p:txBody>
+      </p:sp>
+      <p:sp>
+        <p:nvSpPr>
+          <p:cNvPr id="23" name="TextBox 22"/>
+          <p:cNvSpPr txBox="1"/>
+          <p:nvPr/>
+        </p:nvSpPr>
+        <p:spPr>
+          <a:xfrm>
+            <a:off x="6425031" y="2975107"/>
+            <a:ext cx="2160955" cy="314705"/>
+          </a:xfrm>
+          <a:prstGeom prst="rect">
+            <a:avLst/>
+          </a:prstGeom>
+          <a:noFill/>
+        </p:spPr>
+        <p:txBody>
+          <a:bodyPr wrap="square" anchor="t" lIns="0" rIns="0" tIns="0" bIns="0">
+            <a:spAutoFit/>
+          </a:bodyPr>
+          <a:lstStyle/>
+          <a:p>
+            <a:pPr algn="l">
+              <a:lnSpc>
+                <a:spcPct val="100000"/>
+              </a:lnSpc>
+            </a:pPr>
+            <a:r>
+              <a:rPr sz="1500" b="1">
+                <a:solidFill>
+                  <a:srgbClr val="20242C"/>
+                </a:solidFill>
+                <a:latin typeface="Microsoft YaHei"/>
+              </a:rPr>
+              <a:t>备选乙 · S29 日历让路</a:t>
+            </a:r>
+          </a:p>
+        </p:txBody>
+      </p:sp>
+      <p:sp>
+        <p:nvSpPr>
+          <p:cNvPr id="24" name="TextBox 23"/>
+          <p:cNvSpPr txBox="1"/>
+          <p:nvPr/>
+        </p:nvSpPr>
+        <p:spPr>
+          <a:xfrm>
+            <a:off x="6425031" y="3372109"/>
+            <a:ext cx="2160955" cy="1626351"/>
+          </a:xfrm>
+          <a:prstGeom prst="rect">
+            <a:avLst/>
+          </a:prstGeom>
+          <a:noFill/>
+        </p:spPr>
+        <p:txBody>
+          <a:bodyPr wrap="square" anchor="t" lIns="0" rIns="0" tIns="0" bIns="0">
+            <a:spAutoFit/>
+          </a:bodyPr>
+          <a:lstStyle/>
+          <a:p>
+            <a:pPr algn="l">
+              <a:lnSpc>
+                <a:spcPct val="102000"/>
+              </a:lnSpc>
+            </a:pPr>
+            <a:r>
+              <a:rPr sz="950" b="1">
+                <a:solidFill>
+                  <a:srgbClr val="20242C"/>
+                </a:solidFill>
+                <a:latin typeface="Microsoft YaHei"/>
+              </a:rPr>
+              <a:t>适用条件</a:t>
+            </a:r>
+            <a:r>
+              <a:rPr sz="950" b="0">
+                <a:solidFill>
+                  <a:srgbClr val="20242C"/>
+                </a:solidFill>
+                <a:latin typeface="Microsoft YaHei"/>
+              </a:rPr>
+              <a:t>：同上，且希望进一步压硬件 —— 执行器与 S22 相同，触发换成 20 拍固定日历 + 每核 1 bit 需求位。</a:t>
+            </a:r>
+          </a:p>
+          <a:p>
+            <a:pPr algn="l">
+              <a:lnSpc>
+                <a:spcPct val="102000"/>
+              </a:lnSpc>
+              <a:spcBef>
+                <a:spcPts val="600"/>
+              </a:spcBef>
+            </a:pPr>
+            <a:r>
+              <a:rPr sz="950" b="1">
+                <a:solidFill>
+                  <a:srgbClr val="20242C"/>
+                </a:solidFill>
+                <a:latin typeface="Microsoft YaHei"/>
+              </a:rPr>
+              <a:t>代价</a:t>
+            </a:r>
+            <a:r>
+              <a:rPr sz="950" b="0">
+                <a:solidFill>
+                  <a:srgbClr val="20242C"/>
+                </a:solidFill>
+                <a:latin typeface="Microsoft YaHei"/>
+              </a:rPr>
+              <a:t>：4,440 FF‑eq（S22 的 1/3、S1 的 1/5）；带宽 −6.04% 对 S22 的 −2.21%，Jain 0.96074 反而更高。</a:t>
+            </a:r>
+          </a:p>
+          <a:p>
+            <a:pPr algn="l">
+              <a:lnSpc>
+                <a:spcPct val="102000"/>
+              </a:lnSpc>
+              <a:spcBef>
+                <a:spcPts val="600"/>
+              </a:spcBef>
+            </a:pPr>
+            <a:r>
+              <a:rPr sz="950" b="1">
+                <a:solidFill>
+                  <a:srgbClr val="20242C"/>
+                </a:solidFill>
+                <a:latin typeface="Microsoft YaHei"/>
+              </a:rPr>
+              <a:t>定位</a:t>
+            </a:r>
+            <a:r>
+              <a:rPr sz="950" b="0">
+                <a:solidFill>
+                  <a:srgbClr val="20242C"/>
+                </a:solidFill>
+                <a:latin typeface="Microsoft YaHei"/>
+              </a:rPr>
+              <a:t>：三条轴全面优于 S1，是环仲裁分支的最便宜落点。</a:t>
+            </a:r>
+          </a:p>
+        </p:txBody>
+      </p:sp>
+      <p:sp>
+        <p:nvSpPr>
+          <p:cNvPr id="25" name="Rectangle 24"/>
+          <p:cNvSpPr/>
+          <p:nvPr/>
+        </p:nvSpPr>
+        <p:spPr>
+          <a:xfrm>
+            <a:off x="9024899" y="2194560"/>
+            <a:ext cx="2599867" cy="3017520"/>
+          </a:xfrm>
+          <a:prstGeom prst="rect">
+            <a:avLst/>
+          </a:prstGeom>
+          <a:solidFill>
+            <a:srgbClr val="FFFFFF"/>
+          </a:solidFill>
+          <a:ln w="12700">
+            <a:solidFill>
+              <a:srgbClr val="DCE3EA"/>
+            </a:solidFill>
+          </a:ln>
+          <a:effectLst/>
+        </p:spPr>
+        <p:style>
+          <a:lnRef idx="1">
+            <a:schemeClr val="accent1"/>
+          </a:lnRef>
+          <a:fillRef idx="3">
+            <a:schemeClr val="accent1"/>
+          </a:fillRef>
+          <a:effectRef idx="2">
+            <a:schemeClr val="accent1"/>
+          </a:effectRef>
+          <a:fontRef idx="minor">
+            <a:schemeClr val="lt1"/>
+          </a:fontRef>
+        </p:style>
+        <p:txBody>
+          <a:bodyPr rtlCol="0" anchor="ctr" wrap="square"/>
+          <a:lstStyle/>
+          <a:p>
+            <a:pPr algn="ctr"/>
+          </a:p>
+        </p:txBody>
+      </p:sp>
+      <p:sp>
+        <p:nvSpPr>
+          <p:cNvPr id="26" name="Oval 25"/>
+          <p:cNvSpPr/>
+          <p:nvPr/>
+        </p:nvSpPr>
+        <p:spPr>
+          <a:xfrm>
+            <a:off x="9244355" y="2414016"/>
+            <a:ext cx="384048" cy="384048"/>
+          </a:xfrm>
+          <a:prstGeom prst="ellipse">
+            <a:avLst/>
+          </a:prstGeom>
+          <a:solidFill>
+            <a:srgbClr val="D20A2E"/>
+          </a:solidFill>
+          <a:ln>
+            <a:noFill/>
+          </a:ln>
+          <a:effectLst/>
+        </p:spPr>
+        <p:style>
+          <a:lnRef idx="1">
+            <a:schemeClr val="accent1"/>
+          </a:lnRef>
+          <a:fillRef idx="3">
+            <a:schemeClr val="accent1"/>
+          </a:fillRef>
+          <a:effectRef idx="2">
+            <a:schemeClr val="accent1"/>
+          </a:effectRef>
+          <a:fontRef idx="minor">
+            <a:schemeClr val="lt1"/>
+          </a:fontRef>
+        </p:style>
+        <p:txBody>
+          <a:bodyPr rtlCol="0" anchor="ctr" wrap="square"/>
+          <a:lstStyle/>
+          <a:p>
+            <a:pPr algn="ctr"/>
+          </a:p>
+        </p:txBody>
+      </p:sp>
+      <p:sp>
+        <p:nvSpPr>
+          <p:cNvPr id="27" name="TextBox 26"/>
+          <p:cNvSpPr txBox="1"/>
+          <p:nvPr/>
+        </p:nvSpPr>
+        <p:spPr>
+          <a:xfrm>
+            <a:off x="9244355" y="2496312"/>
+            <a:ext cx="384048" cy="237744"/>
+          </a:xfrm>
+          <a:prstGeom prst="rect">
+            <a:avLst/>
+          </a:prstGeom>
+          <a:noFill/>
+        </p:spPr>
+        <p:txBody>
+          <a:bodyPr wrap="square" anchor="t" lIns="0" rIns="0" tIns="0" bIns="0">
+            <a:spAutoFit/>
+          </a:bodyPr>
+          <a:lstStyle/>
+          <a:p>
+            <a:pPr algn="ctr">
+              <a:lnSpc>
+                <a:spcPct val="100000"/>
+              </a:lnSpc>
+            </a:pPr>
+            <a:r>
+              <a:rPr sz="1150" b="1">
+                <a:solidFill>
+                  <a:srgbClr val="FFFFFF"/>
+                </a:solidFill>
+                <a:latin typeface="Arial"/>
+              </a:rPr>
+              <a:t>04</a:t>
+            </a:r>
+          </a:p>
+        </p:txBody>
+      </p:sp>
+      <p:sp>
+        <p:nvSpPr>
+          <p:cNvPr id="28" name="TextBox 27"/>
+          <p:cNvSpPr txBox="1"/>
+          <p:nvPr/>
+        </p:nvSpPr>
+        <p:spPr>
+          <a:xfrm>
+            <a:off x="9244355" y="2965650"/>
+            <a:ext cx="2160955" cy="314705"/>
+          </a:xfrm>
+          <a:prstGeom prst="rect">
+            <a:avLst/>
+          </a:prstGeom>
+          <a:noFill/>
+        </p:spPr>
+        <p:txBody>
+          <a:bodyPr wrap="square" anchor="t" lIns="0" rIns="0" tIns="0" bIns="0">
+            <a:spAutoFit/>
+          </a:bodyPr>
+          <a:lstStyle/>
+          <a:p>
+            <a:pPr algn="l">
+              <a:lnSpc>
+                <a:spcPct val="100000"/>
+              </a:lnSpc>
+            </a:pPr>
+            <a:r>
+              <a:rPr sz="1500" b="1">
+                <a:solidFill>
+                  <a:srgbClr val="20242C"/>
+                </a:solidFill>
+                <a:latin typeface="Microsoft YaHei"/>
+              </a:rPr>
+              <a:t>边界 · 明确不进入建议</a:t>
+            </a:r>
+          </a:p>
+        </p:txBody>
+      </p:sp>
+      <p:sp>
+        <p:nvSpPr>
+          <p:cNvPr id="29" name="TextBox 28"/>
+          <p:cNvSpPr txBox="1"/>
+          <p:nvPr/>
+        </p:nvSpPr>
+        <p:spPr>
+          <a:xfrm>
+            <a:off x="9244355" y="3362652"/>
+            <a:ext cx="2160955" cy="1645264"/>
+          </a:xfrm>
+          <a:prstGeom prst="rect">
+            <a:avLst/>
+          </a:prstGeom>
+          <a:noFill/>
+        </p:spPr>
+        <p:txBody>
+          <a:bodyPr wrap="square" anchor="t" lIns="0" rIns="0" tIns="0" bIns="0">
+            <a:spAutoFit/>
+          </a:bodyPr>
+          <a:lstStyle/>
+          <a:p>
+            <a:pPr algn="l">
+              <a:lnSpc>
+                <a:spcPct val="102000"/>
+              </a:lnSpc>
+            </a:pPr>
+            <a:r>
+              <a:rPr sz="1100" b="1">
+                <a:solidFill>
+                  <a:srgbClr val="20242C"/>
+                </a:solidFill>
+                <a:latin typeface="Microsoft YaHei"/>
+              </a:rPr>
+              <a:t>S19 / S20</a:t>
+            </a:r>
+            <a:r>
+              <a:rPr sz="1100" b="0">
+                <a:solidFill>
+                  <a:srgbClr val="20242C"/>
+                </a:solidFill>
+                <a:latin typeface="Microsoft YaHei"/>
+              </a:rPr>
+              <a:t>：仅作 requester-side 对照；实测公平性几乎不变。</a:t>
+            </a:r>
+          </a:p>
+          <a:p>
+            <a:pPr algn="l">
+              <a:lnSpc>
+                <a:spcPct val="102000"/>
+              </a:lnSpc>
+              <a:spcBef>
+                <a:spcPts val="600"/>
+              </a:spcBef>
+            </a:pPr>
+            <a:r>
+              <a:rPr sz="1100" b="1">
+                <a:solidFill>
+                  <a:srgbClr val="20242C"/>
+                </a:solidFill>
+                <a:latin typeface="Microsoft YaHei"/>
+              </a:rPr>
+              <a:t>S26 / S27 / S28</a:t>
+            </a:r>
+            <a:r>
+              <a:rPr sz="1100" b="0">
+                <a:solidFill>
+                  <a:srgbClr val="20242C"/>
+                </a:solidFill>
+                <a:latin typeface="Microsoft YaHei"/>
+              </a:rPr>
+              <a:t>：路由、背压、显式速率三类实测均劣于 S0，不再推进。</a:t>
+            </a:r>
+          </a:p>
+          <a:p>
+            <a:pPr algn="l">
+              <a:lnSpc>
+                <a:spcPct val="102000"/>
+              </a:lnSpc>
+              <a:spcBef>
+                <a:spcPts val="600"/>
+              </a:spcBef>
+            </a:pPr>
+            <a:r>
+              <a:rPr sz="1100" b="1">
+                <a:solidFill>
+                  <a:srgbClr val="20242C"/>
+                </a:solidFill>
+                <a:latin typeface="Microsoft YaHei"/>
+              </a:rPr>
+              <a:t>读侧</a:t>
+            </a:r>
+            <a:r>
+              <a:rPr sz="1100" b="0">
+                <a:solidFill>
+                  <a:srgbClr val="20242C"/>
+                </a:solidFill>
+                <a:latin typeface="Microsoft YaHei"/>
+              </a:rPr>
+              <a:t>：S0 已达 Jain 0.99067、max/min 1.0035，维持现状。</a:t>
+            </a:r>
+          </a:p>
+        </p:txBody>
+      </p:sp>
+      <p:sp>
+        <p:nvSpPr>
+          <p:cNvPr id="30" name="Rectangle 29"/>
+          <p:cNvSpPr/>
+          <p:nvPr/>
+        </p:nvSpPr>
+        <p:spPr>
+          <a:xfrm>
+            <a:off x="566928" y="5486400"/>
+            <a:ext cx="11057839" cy="841248"/>
+          </a:xfrm>
+          <a:prstGeom prst="rect">
+            <a:avLst/>
+          </a:prstGeom>
+          <a:solidFill>
+            <a:srgbClr val="D20A2E"/>
+          </a:solidFill>
+          <a:ln>
+            <a:noFill/>
+          </a:ln>
+          <a:effectLst/>
+        </p:spPr>
+        <p:style>
+          <a:lnRef idx="1">
+            <a:schemeClr val="accent1"/>
+          </a:lnRef>
+          <a:fillRef idx="3">
+            <a:schemeClr val="accent1"/>
+          </a:fillRef>
+          <a:effectRef idx="2">
+            <a:schemeClr val="accent1"/>
+          </a:effectRef>
+          <a:fontRef idx="minor">
+            <a:schemeClr val="lt1"/>
+          </a:fontRef>
+        </p:style>
+        <p:txBody>
+          <a:bodyPr rtlCol="0" anchor="ctr" wrap="square"/>
+          <a:lstStyle/>
+          <a:p>
+            <a:pPr algn="ctr"/>
+          </a:p>
+        </p:txBody>
+      </p:sp>
+      <p:sp>
+        <p:nvSpPr>
+          <p:cNvPr id="31" name="TextBox 30"/>
+          <p:cNvSpPr txBox="1"/>
+          <p:nvPr/>
+        </p:nvSpPr>
+        <p:spPr>
+          <a:xfrm>
+            <a:off x="877824" y="5577840"/>
+            <a:ext cx="10436047" cy="658368"/>
+          </a:xfrm>
+          <a:prstGeom prst="rect">
+            <a:avLst/>
+          </a:prstGeom>
+          <a:noFill/>
+        </p:spPr>
+        <p:txBody>
+          <a:bodyPr wrap="square" anchor="ctr" lIns="0" rIns="0" tIns="0" bIns="0">
+            <a:spAutoFit/>
+          </a:bodyPr>
+          <a:lstStyle/>
+          <a:p>
+            <a:pPr algn="l">
+              <a:lnSpc>
+                <a:spcPct val="104000"/>
+              </a:lnSpc>
+            </a:pPr>
+            <a:r>
+              <a:rPr sz="1400" b="0">
+                <a:solidFill>
+                  <a:srgbClr val="FFFFFF"/>
+                </a:solidFill>
+                <a:latin typeface="Microsoft YaHei"/>
+              </a:rPr>
+              <a:t>请架构组只决策一件事：是否允许 HA 改变授权的时机与对象。允许则进入 S16 微架构验证；不允许则转入环仲裁原型，在 S22 与 S29 之间按面积预算取舍。</a:t>
+            </a:r>
+          </a:p>
+        </p:txBody>
+      </p:sp>
+      <p:sp>
+        <p:nvSpPr>
+          <p:cNvPr id="32" name="TextBox 31"/>
+          <p:cNvSpPr txBox="1"/>
+          <p:nvPr/>
+        </p:nvSpPr>
+        <p:spPr>
+          <a:xfrm>
+            <a:off x="566928" y="6455664"/>
+            <a:ext cx="1463040" cy="219456"/>
+          </a:xfrm>
+          <a:prstGeom prst="rect">
+            <a:avLst/>
+          </a:prstGeom>
+          <a:noFill/>
+        </p:spPr>
+        <p:txBody>
+          <a:bodyPr wrap="square" anchor="t" lIns="0" rIns="0" tIns="0" bIns="0">
+            <a:spAutoFit/>
+          </a:bodyPr>
+          <a:lstStyle/>
+          <a:p>
+            <a:pPr algn="l">
+              <a:lnSpc>
+                <a:spcPct val="100000"/>
+              </a:lnSpc>
+            </a:pPr>
+            <a:r>
+              <a:rPr sz="1000" b="0">
+                <a:solidFill>
+                  <a:srgbClr val="A8B0BA"/>
+                </a:solidFill>
+                <a:latin typeface="Arial"/>
+              </a:rPr>
+              <a:t>40 / 41</a:t>
+            </a:r>
+          </a:p>
+        </p:txBody>
+      </p:sp>
+    </p:spTree>
+  </p:cSld>
+  <p:clrMapOvr>
+    <a:masterClrMapping/>
+  </p:clrMapOvr>
+</p:sld>
+</file>
+
+<file path=ppt/slides/slide41.xml><?xml version="1.0" encoding="utf-8"?>
+<p:sld xmlns:a="http://schemas.openxmlformats.org/drawingml/2006/main" xmlns:p="http://schemas.openxmlformats.org/presentationml/2006/main" xmlns:r="http://schemas.openxmlformats.org/officeDocument/2006/relationships">
+  <p:cSld>
+    <p:spTree>
+      <p:nvGrpSpPr>
+        <p:cNvPr id="1" name=""/>
+        <p:cNvGrpSpPr/>
+        <p:nvPr/>
+      </p:nvGrpSpPr>
+      <p:grpSpPr/>
+      <p:sp>
+        <p:nvSpPr>
+          <p:cNvPr id="2" name="Rectangle 1"/>
+          <p:cNvSpPr/>
+          <p:nvPr/>
+        </p:nvSpPr>
+        <p:spPr>
+          <a:xfrm>
+            <a:off x="0" y="0"/>
+            <a:ext cx="12191695" cy="6858000"/>
+          </a:xfrm>
+          <a:prstGeom prst="rect">
+            <a:avLst/>
+          </a:prstGeom>
+          <a:solidFill>
+            <a:srgbClr val="14171C"/>
+          </a:solidFill>
+          <a:ln>
+            <a:noFill/>
+          </a:ln>
+          <a:effectLst/>
+        </p:spPr>
+        <p:style>
+          <a:lnRef idx="1">
+            <a:schemeClr val="accent1"/>
+          </a:lnRef>
+          <a:fillRef idx="3">
+            <a:schemeClr val="accent1"/>
+          </a:fillRef>
+          <a:effectRef idx="2">
+            <a:schemeClr val="accent1"/>
+          </a:effectRef>
+          <a:fontRef idx="minor">
+            <a:schemeClr val="lt1"/>
+          </a:fontRef>
+        </p:style>
+        <p:txBody>
+          <a:bodyPr rtlCol="0" anchor="ctr" wrap="square"/>
+          <a:lstStyle/>
+          <a:p>
+            <a:pPr algn="ctr"/>
+          </a:p>
+        </p:txBody>
+      </p:sp>
+      <p:sp>
+        <p:nvSpPr>
+          <p:cNvPr id="3" name="Rectangle 2"/>
+          <p:cNvSpPr/>
+          <p:nvPr/>
+        </p:nvSpPr>
+        <p:spPr>
+          <a:xfrm>
+            <a:off x="10143439" y="274320"/>
+            <a:ext cx="182880" cy="182880"/>
+          </a:xfrm>
+          <a:prstGeom prst="rect">
+            <a:avLst/>
+          </a:prstGeom>
+          <a:solidFill>
+            <a:srgbClr val="D20A2E"/>
+          </a:solidFill>
+          <a:ln>
+            <a:noFill/>
+          </a:ln>
+          <a:effectLst/>
+        </p:spPr>
+        <p:style>
+          <a:lnRef idx="1">
+            <a:schemeClr val="accent1"/>
+          </a:lnRef>
+          <a:fillRef idx="3">
+            <a:schemeClr val="accent1"/>
+          </a:fillRef>
+          <a:effectRef idx="2">
+            <a:schemeClr val="accent1"/>
+          </a:effectRef>
+          <a:fontRef idx="minor">
+            <a:schemeClr val="lt1"/>
+          </a:fontRef>
+        </p:style>
+        <p:txBody>
+          <a:bodyPr rtlCol="0" anchor="ctr" wrap="square"/>
+          <a:lstStyle/>
+          <a:p>
+            <a:pPr algn="ctr"/>
+          </a:p>
+        </p:txBody>
+      </p:sp>
+      <p:sp>
+        <p:nvSpPr>
+          <p:cNvPr id="4" name="TextBox 3"/>
+          <p:cNvSpPr txBox="1"/>
+          <p:nvPr/>
+        </p:nvSpPr>
+        <p:spPr>
+          <a:xfrm>
+            <a:off x="10399471" y="246888"/>
+            <a:ext cx="1225296" cy="256032"/>
+          </a:xfrm>
+          <a:prstGeom prst="rect">
+            <a:avLst/>
+          </a:prstGeom>
+          <a:noFill/>
+        </p:spPr>
+        <p:txBody>
+          <a:bodyPr wrap="square" anchor="t" lIns="0" rIns="0" tIns="0" bIns="0">
+            <a:spAutoFit/>
+          </a:bodyPr>
+          <a:lstStyle/>
+          <a:p>
+            <a:pPr algn="l">
+              <a:lnSpc>
+                <a:spcPct val="100000"/>
+              </a:lnSpc>
+            </a:pPr>
+            <a:r>
+              <a:rPr sz="1300" b="1">
+                <a:solidFill>
+                  <a:srgbClr val="FFFFFF"/>
+                </a:solidFill>
+                <a:latin typeface="Arial"/>
+              </a:rPr>
+              <a:t>HUAWEI</a:t>
+            </a:r>
+          </a:p>
+        </p:txBody>
+      </p:sp>
+      <p:sp>
+        <p:nvSpPr>
+          <p:cNvPr id="5" name="Oval 4"/>
+          <p:cNvSpPr/>
+          <p:nvPr/>
+        </p:nvSpPr>
+        <p:spPr>
+          <a:xfrm>
+            <a:off x="566928" y="1737360"/>
+            <a:ext cx="868680" cy="868680"/>
+          </a:xfrm>
+          <a:prstGeom prst="ellipse">
+            <a:avLst/>
+          </a:prstGeom>
+          <a:solidFill>
+            <a:srgbClr val="22262D"/>
+          </a:solidFill>
+          <a:ln>
+            <a:noFill/>
+          </a:ln>
+          <a:effectLst/>
+        </p:spPr>
+        <p:style>
+          <a:lnRef idx="1">
+            <a:schemeClr val="accent1"/>
+          </a:lnRef>
+          <a:fillRef idx="3">
+            <a:schemeClr val="accent1"/>
+          </a:fillRef>
+          <a:effectRef idx="2">
+            <a:schemeClr val="accent1"/>
+          </a:effectRef>
+          <a:fontRef idx="minor">
+            <a:schemeClr val="lt1"/>
+          </a:fontRef>
+        </p:style>
+        <p:txBody>
+          <a:bodyPr rtlCol="0" anchor="ctr" wrap="square"/>
+          <a:lstStyle/>
+          <a:p>
+            <a:pPr algn="ctr"/>
+          </a:p>
+        </p:txBody>
+      </p:sp>
+      <p:sp>
+        <p:nvSpPr>
+          <p:cNvPr id="6" name="Rectangle 5"/>
+          <p:cNvSpPr/>
+          <p:nvPr/>
+        </p:nvSpPr>
+        <p:spPr>
+          <a:xfrm>
+            <a:off x="877824" y="2048256"/>
+            <a:ext cx="256032" cy="256032"/>
+          </a:xfrm>
+          <a:prstGeom prst="rect">
+            <a:avLst/>
+          </a:prstGeom>
+          <a:solidFill>
+            <a:srgbClr val="D20A2E"/>
+          </a:solidFill>
+          <a:ln>
+            <a:noFill/>
+          </a:ln>
+          <a:effectLst/>
+        </p:spPr>
+        <p:style>
+          <a:lnRef idx="1">
+            <a:schemeClr val="accent1"/>
+          </a:lnRef>
+          <a:fillRef idx="3">
+            <a:schemeClr val="accent1"/>
+          </a:fillRef>
+          <a:effectRef idx="2">
+            <a:schemeClr val="accent1"/>
+          </a:effectRef>
+          <a:fontRef idx="minor">
+            <a:schemeClr val="lt1"/>
+          </a:fontRef>
+        </p:style>
+        <p:txBody>
+          <a:bodyPr rtlCol="0" anchor="ctr" wrap="square"/>
+          <a:lstStyle/>
+          <a:p>
+            <a:pPr algn="ctr"/>
+          </a:p>
+        </p:txBody>
+      </p:sp>
+      <p:sp>
+        <p:nvSpPr>
+          <p:cNvPr id="7" name="TextBox 6"/>
+          <p:cNvSpPr txBox="1"/>
+          <p:nvPr/>
+        </p:nvSpPr>
+        <p:spPr>
+          <a:xfrm>
+            <a:off x="566928" y="2926080"/>
+            <a:ext cx="3657600" cy="237744"/>
+          </a:xfrm>
+          <a:prstGeom prst="rect">
+            <a:avLst/>
+          </a:prstGeom>
+          <a:noFill/>
+        </p:spPr>
+        <p:txBody>
+          <a:bodyPr wrap="square" anchor="t" lIns="0" rIns="0" tIns="0" bIns="0">
+            <a:spAutoFit/>
+          </a:bodyPr>
+          <a:lstStyle/>
+          <a:p>
+            <a:pPr algn="l">
+              <a:lnSpc>
+                <a:spcPct val="100000"/>
+              </a:lnSpc>
+            </a:pPr>
+            <a:r>
+              <a:rPr sz="1200" b="1">
+                <a:solidFill>
+                  <a:srgbClr val="D20A2E"/>
+                </a:solidFill>
+                <a:latin typeface="Arial"/>
+              </a:rPr>
+              <a:t>T H A N K   Y O U</a:t>
+            </a:r>
+          </a:p>
+        </p:txBody>
+      </p:sp>
+      <p:sp>
+        <p:nvSpPr>
+          <p:cNvPr id="8" name="TextBox 7"/>
+          <p:cNvSpPr txBox="1"/>
+          <p:nvPr/>
+        </p:nvSpPr>
+        <p:spPr>
+          <a:xfrm>
+            <a:off x="566928" y="3273552"/>
+            <a:ext cx="8229600" cy="1645920"/>
+          </a:xfrm>
+          <a:prstGeom prst="rect">
+            <a:avLst/>
+          </a:prstGeom>
+          <a:noFill/>
+        </p:spPr>
+        <p:txBody>
+          <a:bodyPr wrap="square" anchor="t" lIns="0" rIns="0" tIns="0" bIns="0">
+            <a:spAutoFit/>
+          </a:bodyPr>
+          <a:lstStyle/>
+          <a:p>
+            <a:pPr algn="l">
+              <a:lnSpc>
+                <a:spcPct val="96000"/>
+              </a:lnSpc>
+            </a:pPr>
+            <a:r>
+              <a:rPr sz="4400" b="1">
+                <a:solidFill>
+                  <a:srgbClr val="FFFFFF"/>
+                </a:solidFill>
+                <a:latin typeface="Microsoft YaHei"/>
+              </a:rPr>
+              <a:t>汇报完毕</a:t>
+            </a:r>
+          </a:p>
+          <a:p>
+            <a:pPr algn="l">
+              <a:lnSpc>
+                <a:spcPct val="96000"/>
+              </a:lnSpc>
+              <a:spcBef>
+                <a:spcPts val="500"/>
+              </a:spcBef>
+            </a:pPr>
+            <a:r>
+              <a:rPr sz="4400" b="1">
+                <a:solidFill>
+                  <a:srgbClr val="FFFFFF"/>
+                </a:solidFill>
+                <a:latin typeface="Microsoft YaHei"/>
+              </a:rPr>
+              <a:t>请架构组决策</a:t>
+            </a:r>
+          </a:p>
+        </p:txBody>
+      </p:sp>
+      <p:sp>
+        <p:nvSpPr>
+          <p:cNvPr id="9" name="TextBox 8"/>
+          <p:cNvSpPr txBox="1"/>
+          <p:nvPr/>
+        </p:nvSpPr>
+        <p:spPr>
+          <a:xfrm>
+            <a:off x="566928" y="5120640"/>
+            <a:ext cx="7863840" cy="822960"/>
+          </a:xfrm>
+          <a:prstGeom prst="rect">
+            <a:avLst/>
+          </a:prstGeom>
+          <a:noFill/>
+        </p:spPr>
+        <p:txBody>
+          <a:bodyPr wrap="square" anchor="t" lIns="0" rIns="0" tIns="0" bIns="0">
+            <a:spAutoFit/>
+          </a:bodyPr>
+          <a:lstStyle/>
+          <a:p>
+            <a:pPr algn="l">
+              <a:lnSpc>
+                <a:spcPct val="110000"/>
+              </a:lnSpc>
+            </a:pPr>
+            <a:r>
+              <a:rPr sz="1400" b="0">
+                <a:solidFill>
+                  <a:srgbClr val="9AA3AF"/>
+                </a:solidFill>
+                <a:latin typeface="Microsoft YaHei"/>
+              </a:rPr>
+              <a:t>第一问仍是：HA / 内存控制器的授权调度能不能改？</a:t>
+            </a:r>
+          </a:p>
+          <a:p>
+            <a:pPr algn="l">
+              <a:lnSpc>
+                <a:spcPct val="110000"/>
+              </a:lnSpc>
+              <a:spcBef>
+                <a:spcPts val="500"/>
+              </a:spcBef>
+            </a:pPr>
+            <a:r>
+              <a:rPr sz="1400" b="0">
+                <a:solidFill>
+                  <a:srgbClr val="9AA3AF"/>
+                </a:solidFill>
+                <a:latin typeface="Microsoft YaHei"/>
+              </a:rPr>
+              <a:t>允许修改：进入 S16 微架构验证；不允许修改：进入环仲裁原型（S22 效果最好，S29 便宜 3.1 倍）。</a:t>
+            </a:r>
+          </a:p>
+        </p:txBody>
+      </p:sp>
+      <p:sp>
+        <p:nvSpPr>
+          <p:cNvPr id="10" name="TextBox 9"/>
+          <p:cNvSpPr txBox="1"/>
+          <p:nvPr/>
+        </p:nvSpPr>
+        <p:spPr>
+          <a:xfrm>
+            <a:off x="566928" y="6455664"/>
+            <a:ext cx="1463040" cy="219456"/>
+          </a:xfrm>
+          <a:prstGeom prst="rect">
+            <a:avLst/>
+          </a:prstGeom>
+          <a:noFill/>
+        </p:spPr>
+        <p:txBody>
+          <a:bodyPr wrap="square" anchor="t" lIns="0" rIns="0" tIns="0" bIns="0">
+            <a:spAutoFit/>
+          </a:bodyPr>
+          <a:lstStyle/>
+          <a:p>
+            <a:pPr algn="l">
+              <a:lnSpc>
+                <a:spcPct val="100000"/>
+              </a:lnSpc>
+            </a:pPr>
+            <a:r>
+              <a:rPr sz="1000" b="0">
+                <a:solidFill>
+                  <a:srgbClr val="555B66"/>
+                </a:solidFill>
+                <a:latin typeface="Arial"/>
+              </a:rPr>
+              <a:t>41 / 41</a:t>
             </a:r>
           </a:p>
         </p:txBody>
@@ -35459,7 +37967,7 @@
                 </a:solidFill>
                 <a:latin typeface="Arial"/>
               </a:rPr>
-              <a:t>05 / 39</a:t>
+              <a:t>05 / 41</a:t>
             </a:r>
           </a:p>
         </p:txBody>
@@ -36858,7 +39366,7 @@
                 </a:solidFill>
                 <a:latin typeface="Arial"/>
               </a:rPr>
-              <a:t>06 / 39</a:t>
+              <a:t>06 / 41</a:t>
             </a:r>
           </a:p>
         </p:txBody>
@@ -37364,7 +39872,7 @@
                 </a:solidFill>
                 <a:latin typeface="Arial"/>
               </a:rPr>
-              <a:t>07 / 39</a:t>
+              <a:t>07 / 41</a:t>
             </a:r>
           </a:p>
         </p:txBody>
@@ -38381,7 +40889,7 @@
                 </a:solidFill>
                 <a:latin typeface="Arial"/>
               </a:rPr>
-              <a:t>08 / 39</a:t>
+              <a:t>08 / 41</a:t>
             </a:r>
           </a:p>
         </p:txBody>
@@ -40651,7 +43159,7 @@
                 </a:solidFill>
                 <a:latin typeface="Arial"/>
               </a:rPr>
-              <a:t>09 / 39</a:t>
+              <a:t>09 / 41</a:t>
             </a:r>
           </a:p>
         </p:txBody>

--- a/ppt/ring2-write-fairness.pptx
+++ b/ppt/ring2-write-fairness.pptx
@@ -10350,7 +10350,7 @@
                 </a:solidFill>
                 <a:latin typeface="Microsoft YaHei"/>
               </a:rPr>
-              <a:t>按「在哪里动手」和「听什么信号」把文献里的拥塞控制分成八类，给出各类优缺点，定位 S1，并补齐本研究原本没有代表方案的四类。</a:t>
+              <a:t>按第 19 页的两个正交维度分类：先按拥塞信号（行），再按控制点（列），给出各类优缺点，定位 S1，并补齐本研究原本没有代表方案的四个格子。</a:t>
             </a:r>
           </a:p>
         </p:txBody>
@@ -10656,7 +10656,7 @@
                 </a:solidFill>
                 <a:latin typeface="Microsoft YaHei"/>
               </a:rPr>
-              <a:t>分类 · 控制点 ①–④</a:t>
+              <a:t>分类 · 拥塞信号（第 19 页的行）</a:t>
             </a:r>
           </a:p>
         </p:txBody>
@@ -10822,7 +10822,7 @@
                 </a:solidFill>
                 <a:latin typeface="Arial"/>
               </a:rPr>
-              <a:t>T A X O N O M Y   B Y   C O N T R O L   P O I N T   ·   1   /   2</a:t>
+              <a:t>T A X O N O M Y   B Y   S I G N A L     =     P A G E   1 9   R O W S</a:t>
             </a:r>
           </a:p>
         </p:txBody>
@@ -10861,7 +10861,7 @@
                 </a:solidFill>
                 <a:latin typeface="Microsoft YaHei"/>
               </a:rPr>
-              <a:t>动手的地方决定天花板：路由、背压、两种源端限速</a:t>
+              <a:t>听什么决定盲区（= 第 19 页的行）</a:t>
             </a:r>
           </a:p>
         </p:txBody>
@@ -10874,8 +10874,8 @@
         </p:nvSpPr>
         <p:spPr>
           <a:xfrm>
-            <a:off x="566928" y="2971083"/>
-            <a:ext cx="2599867" cy="2616616"/>
+            <a:off x="566928" y="2252814"/>
+            <a:ext cx="2599867" cy="1916849"/>
           </a:xfrm>
           <a:prstGeom prst="rect">
             <a:avLst/>
@@ -10920,8 +10920,8 @@
         </p:nvSpPr>
         <p:spPr>
           <a:xfrm>
-            <a:off x="768096" y="3285728"/>
-            <a:ext cx="2197531" cy="314705"/>
+            <a:off x="768096" y="2453982"/>
+            <a:ext cx="2197531" cy="286893"/>
           </a:xfrm>
           <a:prstGeom prst="rect">
             <a:avLst/>
@@ -10940,13 +10940,13 @@
               </a:lnSpc>
             </a:pPr>
             <a:r>
-              <a:rPr sz="1500" b="1">
-                <a:solidFill>
-                  <a:srgbClr val="20242C"/>
-                </a:solidFill>
-                <a:latin typeface="Microsoft YaHei"/>
-              </a:rPr>
-              <a:t>① 自适应路由</a:t>
+              <a:rPr sz="1350" b="1">
+                <a:solidFill>
+                  <a:srgbClr val="20242C"/>
+                </a:solidFill>
+                <a:latin typeface="Microsoft YaHei"/>
+              </a:rPr>
+              <a:t>无信号 / 1 bit 需求</a:t>
             </a:r>
           </a:p>
         </p:txBody>
@@ -10959,8 +10959,8 @@
         </p:nvSpPr>
         <p:spPr>
           <a:xfrm>
-            <a:off x="768096" y="3682730"/>
-            <a:ext cx="2197531" cy="1626900"/>
+            <a:off x="768096" y="2823171"/>
+            <a:ext cx="2197531" cy="1181900"/>
           </a:xfrm>
           <a:prstGeom prst="rect">
             <a:avLst/>
@@ -10979,7 +10979,7 @@
               </a:lnSpc>
             </a:pPr>
             <a:r>
-              <a:rPr sz="1200" b="1">
+              <a:rPr sz="1050" b="1">
                 <a:solidFill>
                   <a:srgbClr val="20242C"/>
                 </a:solidFill>
@@ -10988,13 +10988,13 @@
               <a:t>代表</a:t>
             </a:r>
             <a:r>
-              <a:rPr sz="1200" b="0">
-                <a:solidFill>
-                  <a:srgbClr val="20242C"/>
-                </a:solidFill>
-                <a:latin typeface="Microsoft YaHei"/>
-              </a:rPr>
-              <a:t>：UGAL / Valiant / CQR。</a:t>
+              <a:rPr sz="1050" b="0">
+                <a:solidFill>
+                  <a:srgbClr val="20242C"/>
+                </a:solidFill>
+                <a:latin typeface="Microsoft YaHei"/>
+              </a:rPr>
+              <a:t>：S29。</a:t>
             </a:r>
           </a:p>
           <a:p>
@@ -11007,22 +11007,22 @@
               </a:spcBef>
             </a:pPr>
             <a:r>
-              <a:rPr sz="1200" b="1">
-                <a:solidFill>
-                  <a:srgbClr val="20242C"/>
-                </a:solidFill>
-                <a:latin typeface="Microsoft YaHei"/>
-              </a:rPr>
-              <a:t>动手处</a:t>
-            </a:r>
-            <a:r>
-              <a:rPr sz="1200" b="0">
-                <a:solidFill>
-                  <a:srgbClr val="20242C"/>
-                </a:solidFill>
-                <a:latin typeface="Microsoft YaHei"/>
-              </a:rPr>
-              <a:t>：路径选择。</a:t>
+              <a:rPr sz="1050" b="1">
+                <a:solidFill>
+                  <a:srgbClr val="20242C"/>
+                </a:solidFill>
+                <a:latin typeface="Microsoft YaHei"/>
+              </a:rPr>
+              <a:t>听什么</a:t>
+            </a:r>
+            <a:r>
+              <a:rPr sz="1050" b="0">
+                <a:solidFill>
+                  <a:srgbClr val="20242C"/>
+                </a:solidFill>
+                <a:latin typeface="Microsoft YaHei"/>
+              </a:rPr>
+              <a:t>：固定日历 + 每核 1 bit「有活」。</a:t>
             </a:r>
           </a:p>
           <a:p>
@@ -11035,7 +11035,7 @@
               </a:spcBef>
             </a:pPr>
             <a:r>
-              <a:rPr sz="1200" b="1">
+              <a:rPr sz="1050" b="1">
                 <a:solidFill>
                   <a:srgbClr val="20242C"/>
                 </a:solidFill>
@@ -11044,26 +11044,16 @@
               <a:t>优</a:t>
             </a:r>
             <a:r>
-              <a:rPr sz="1200" b="0">
-                <a:solidFill>
-                  <a:srgbClr val="20242C"/>
-                </a:solidFill>
-                <a:latin typeface="Microsoft YaHei"/>
-              </a:rPr>
-              <a:t>：不减少任何人的注入量，只换路径，理论上零吞吐代价。</a:t>
-            </a:r>
-          </a:p>
-          <a:p>
-            <a:pPr algn="l">
-              <a:lnSpc>
-                <a:spcPct val="102000"/>
-              </a:lnSpc>
-              <a:spcBef>
-                <a:spcPts val="600"/>
-              </a:spcBef>
-            </a:pPr>
-            <a:r>
-              <a:rPr sz="1200" b="1">
+              <a:rPr sz="1050" b="0">
+                <a:solidFill>
+                  <a:srgbClr val="20242C"/>
+                </a:solidFill>
+                <a:latin typeface="Microsoft YaHei"/>
+              </a:rPr>
+              <a:t>：无测量、无收敛。</a:t>
+            </a:r>
+            <a:r>
+              <a:rPr sz="1050" b="1">
                 <a:solidFill>
                   <a:srgbClr val="20242C"/>
                 </a:solidFill>
@@ -11072,13 +11062,13 @@
               <a:t>缺</a:t>
             </a:r>
             <a:r>
-              <a:rPr sz="1200" b="0">
-                <a:solidFill>
-                  <a:srgbClr val="20242C"/>
-                </a:solidFill>
-                <a:latin typeface="Microsoft YaHei"/>
-              </a:rPr>
-              <a:t>：要有非最短路可走，而绕远本身要多占链路容量。</a:t>
+              <a:rPr sz="1050" b="0">
+                <a:solidFill>
+                  <a:srgbClr val="20242C"/>
+                </a:solidFill>
+                <a:latin typeface="Microsoft YaHei"/>
+              </a:rPr>
+              <a:t>：不知道谁落后。</a:t>
             </a:r>
           </a:p>
         </p:txBody>
@@ -11091,8 +11081,8 @@
         </p:nvSpPr>
         <p:spPr>
           <a:xfrm>
-            <a:off x="3386251" y="2971083"/>
-            <a:ext cx="2599867" cy="2616616"/>
+            <a:off x="3386251" y="2252814"/>
+            <a:ext cx="2599867" cy="1916849"/>
           </a:xfrm>
           <a:prstGeom prst="rect">
             <a:avLst/>
@@ -11137,8 +11127,8 @@
         </p:nvSpPr>
         <p:spPr>
           <a:xfrm>
-            <a:off x="3587419" y="3172251"/>
-            <a:ext cx="2197531" cy="314705"/>
+            <a:off x="3587419" y="2453982"/>
+            <a:ext cx="2197531" cy="286893"/>
           </a:xfrm>
           <a:prstGeom prst="rect">
             <a:avLst/>
@@ -11157,13 +11147,13 @@
               </a:lnSpc>
             </a:pPr>
             <a:r>
-              <a:rPr sz="1500" b="1">
-                <a:solidFill>
-                  <a:srgbClr val="20242C"/>
-                </a:solidFill>
-                <a:latin typeface="Microsoft YaHei"/>
-              </a:rPr>
-              <a:t>② 逐跳背压</a:t>
+              <a:rPr sz="1350" b="1">
+                <a:solidFill>
+                  <a:srgbClr val="20242C"/>
+                </a:solidFill>
+                <a:latin typeface="Microsoft YaHei"/>
+              </a:rPr>
+              <a:t>本地观测</a:t>
             </a:r>
           </a:p>
         </p:txBody>
@@ -11176,8 +11166,8 @@
         </p:nvSpPr>
         <p:spPr>
           <a:xfrm>
-            <a:off x="3587419" y="3569253"/>
-            <a:ext cx="2197531" cy="1853854"/>
+            <a:off x="3587419" y="2823171"/>
+            <a:ext cx="2197531" cy="1181900"/>
           </a:xfrm>
           <a:prstGeom prst="rect">
             <a:avLst/>
@@ -11196,7 +11186,7 @@
               </a:lnSpc>
             </a:pPr>
             <a:r>
-              <a:rPr sz="1200" b="1">
+              <a:rPr sz="1050" b="1">
                 <a:solidFill>
                   <a:srgbClr val="20242C"/>
                 </a:solidFill>
@@ -11205,13 +11195,13 @@
               <a:t>代表</a:t>
             </a:r>
             <a:r>
-              <a:rPr sz="1200" b="0">
-                <a:solidFill>
-                  <a:srgbClr val="20242C"/>
-                </a:solidFill>
-                <a:latin typeface="Microsoft YaHei"/>
-              </a:rPr>
-              <a:t>：Credit FC / PFC / wormhole 背压。</a:t>
+              <a:rPr sz="1050" b="0">
+                <a:solidFill>
+                  <a:srgbClr val="20242C"/>
+                </a:solidFill>
+                <a:latin typeface="Microsoft YaHei"/>
+              </a:rPr>
+              <a:t>：S16 / S21 / S26 / I-tag。</a:t>
             </a:r>
           </a:p>
           <a:p>
@@ -11224,22 +11214,22 @@
               </a:spcBef>
             </a:pPr>
             <a:r>
-              <a:rPr sz="1200" b="1">
-                <a:solidFill>
-                  <a:srgbClr val="20242C"/>
-                </a:solidFill>
-                <a:latin typeface="Microsoft YaHei"/>
-              </a:rPr>
-              <a:t>动手处</a:t>
-            </a:r>
-            <a:r>
-              <a:rPr sz="1200" b="0">
-                <a:solidFill>
-                  <a:srgbClr val="20242C"/>
-                </a:solidFill>
-                <a:latin typeface="Microsoft YaHei"/>
-              </a:rPr>
-              <a:t>：上游链路。</a:t>
+              <a:rPr sz="1050" b="1">
+                <a:solidFill>
+                  <a:srgbClr val="20242C"/>
+                </a:solidFill>
+                <a:latin typeface="Microsoft YaHei"/>
+              </a:rPr>
+              <a:t>听什么</a:t>
+            </a:r>
+            <a:r>
+              <a:rPr sz="1050" b="0">
+                <a:solidFill>
+                  <a:srgbClr val="20242C"/>
+                </a:solidFill>
+                <a:latin typeface="Microsoft YaHei"/>
+              </a:rPr>
+              <a:t>：本节点的占用、失败或授权数。</a:t>
             </a:r>
           </a:p>
           <a:p>
@@ -11252,7 +11242,7 @@
               </a:spcBef>
             </a:pPr>
             <a:r>
-              <a:rPr sz="1200" b="1">
+              <a:rPr sz="1050" b="1">
                 <a:solidFill>
                   <a:srgbClr val="20242C"/>
                 </a:solidFill>
@@ -11261,13 +11251,164 @@
               <a:t>优</a:t>
             </a:r>
             <a:r>
-              <a:rPr sz="1200" b="0">
-                <a:solidFill>
-                  <a:srgbClr val="20242C"/>
-                </a:solidFill>
-                <a:latin typeface="Microsoft YaHei"/>
-              </a:rPr>
-              <a:t>：结构上不丢包，不需要测量任何全局量，实现最简单。</a:t>
+              <a:rPr sz="1050" b="0">
+                <a:solidFill>
+                  <a:srgbClr val="20242C"/>
+                </a:solidFill>
+                <a:latin typeface="Microsoft YaHei"/>
+              </a:rPr>
+              <a:t>：零新报文。</a:t>
+            </a:r>
+            <a:r>
+              <a:rPr sz="1050" b="1">
+                <a:solidFill>
+                  <a:srgbClr val="20242C"/>
+                </a:solidFill>
+                <a:latin typeface="Microsoft YaHei"/>
+              </a:rPr>
+              <a:t>缺</a:t>
+            </a:r>
+            <a:r>
+              <a:rPr sz="1050" b="0">
+                <a:solidFill>
+                  <a:srgbClr val="20242C"/>
+                </a:solidFill>
+                <a:latin typeface="Microsoft YaHei"/>
+              </a:rPr>
+              <a:t>：源端格子会把别人造成的失败算到自己头上。</a:t>
+            </a:r>
+          </a:p>
+        </p:txBody>
+      </p:sp>
+      <p:sp>
+        <p:nvSpPr>
+          <p:cNvPr id="16" name="Rectangle 15"/>
+          <p:cNvSpPr/>
+          <p:nvPr/>
+        </p:nvSpPr>
+        <p:spPr>
+          <a:xfrm>
+            <a:off x="6205575" y="2252814"/>
+            <a:ext cx="2599867" cy="1916849"/>
+          </a:xfrm>
+          <a:prstGeom prst="rect">
+            <a:avLst/>
+          </a:prstGeom>
+          <a:solidFill>
+            <a:srgbClr val="FFFFFF"/>
+          </a:solidFill>
+          <a:ln w="12700">
+            <a:solidFill>
+              <a:srgbClr val="DCE3EA"/>
+            </a:solidFill>
+          </a:ln>
+          <a:effectLst/>
+        </p:spPr>
+        <p:style>
+          <a:lnRef idx="1">
+            <a:schemeClr val="accent1"/>
+          </a:lnRef>
+          <a:fillRef idx="3">
+            <a:schemeClr val="accent1"/>
+          </a:fillRef>
+          <a:effectRef idx="2">
+            <a:schemeClr val="accent1"/>
+          </a:effectRef>
+          <a:fontRef idx="minor">
+            <a:schemeClr val="lt1"/>
+          </a:fontRef>
+        </p:style>
+        <p:txBody>
+          <a:bodyPr rtlCol="0" anchor="ctr" wrap="square"/>
+          <a:lstStyle/>
+          <a:p>
+            <a:pPr algn="ctr"/>
+          </a:p>
+        </p:txBody>
+      </p:sp>
+      <p:sp>
+        <p:nvSpPr>
+          <p:cNvPr id="17" name="TextBox 16"/>
+          <p:cNvSpPr txBox="1"/>
+          <p:nvPr/>
+        </p:nvSpPr>
+        <p:spPr>
+          <a:xfrm>
+            <a:off x="6406743" y="2553275"/>
+            <a:ext cx="2197531" cy="286893"/>
+          </a:xfrm>
+          <a:prstGeom prst="rect">
+            <a:avLst/>
+          </a:prstGeom>
+          <a:noFill/>
+        </p:spPr>
+        <p:txBody>
+          <a:bodyPr wrap="square" anchor="t" lIns="0" rIns="0" tIns="0" bIns="0">
+            <a:spAutoFit/>
+          </a:bodyPr>
+          <a:lstStyle/>
+          <a:p>
+            <a:pPr algn="l">
+              <a:lnSpc>
+                <a:spcPct val="100000"/>
+              </a:lnSpc>
+            </a:pPr>
+            <a:r>
+              <a:rPr sz="1350" b="1">
+                <a:solidFill>
+                  <a:srgbClr val="20242C"/>
+                </a:solidFill>
+                <a:latin typeface="Microsoft YaHei"/>
+              </a:rPr>
+              <a:t>链路占用</a:t>
+            </a:r>
+          </a:p>
+        </p:txBody>
+      </p:sp>
+      <p:sp>
+        <p:nvSpPr>
+          <p:cNvPr id="18" name="TextBox 17"/>
+          <p:cNvSpPr txBox="1"/>
+          <p:nvPr/>
+        </p:nvSpPr>
+        <p:spPr>
+          <a:xfrm>
+            <a:off x="6406743" y="2922464"/>
+            <a:ext cx="2197531" cy="983315"/>
+          </a:xfrm>
+          <a:prstGeom prst="rect">
+            <a:avLst/>
+          </a:prstGeom>
+          <a:noFill/>
+        </p:spPr>
+        <p:txBody>
+          <a:bodyPr wrap="square" anchor="t" lIns="0" rIns="0" tIns="0" bIns="0">
+            <a:spAutoFit/>
+          </a:bodyPr>
+          <a:lstStyle/>
+          <a:p>
+            <a:pPr algn="l">
+              <a:lnSpc>
+                <a:spcPct val="102000"/>
+              </a:lnSpc>
+            </a:pPr>
+            <a:r>
+              <a:rPr sz="1050" b="1">
+                <a:solidFill>
+                  <a:srgbClr val="20242C"/>
+                </a:solidFill>
+                <a:latin typeface="Microsoft YaHei"/>
+              </a:rPr>
+              <a:t>代表</a:t>
+            </a:r>
+            <a:r>
+              <a:rPr sz="1050" b="0">
+                <a:solidFill>
+                  <a:srgbClr val="20242C"/>
+                </a:solidFill>
+                <a:latin typeface="Microsoft YaHei"/>
+              </a:rPr>
+              <a:t>：S27。</a:t>
             </a:r>
           </a:p>
           <a:p>
@@ -11280,7 +11421,53 @@
               </a:spcBef>
             </a:pPr>
             <a:r>
-              <a:rPr sz="1200" b="1">
+              <a:rPr sz="1050" b="1">
+                <a:solidFill>
+                  <a:srgbClr val="20242C"/>
+                </a:solidFill>
+                <a:latin typeface="Microsoft YaHei"/>
+              </a:rPr>
+              <a:t>听什么</a:t>
+            </a:r>
+            <a:r>
+              <a:rPr sz="1050" b="0">
+                <a:solidFill>
+                  <a:srgbClr val="20242C"/>
+                </a:solidFill>
+                <a:latin typeface="Microsoft YaHei"/>
+              </a:rPr>
+              <a:t>：hop 占用率，沿邻线上传。</a:t>
+            </a:r>
+          </a:p>
+          <a:p>
+            <a:pPr algn="l">
+              <a:lnSpc>
+                <a:spcPct val="102000"/>
+              </a:lnSpc>
+              <a:spcBef>
+                <a:spcPts val="600"/>
+              </a:spcBef>
+            </a:pPr>
+            <a:r>
+              <a:rPr sz="1050" b="1">
+                <a:solidFill>
+                  <a:srgbClr val="20242C"/>
+                </a:solidFill>
+                <a:latin typeface="Microsoft YaHei"/>
+              </a:rPr>
+              <a:t>优</a:t>
+            </a:r>
+            <a:r>
+              <a:rPr sz="1050" b="0">
+                <a:solidFill>
+                  <a:srgbClr val="20242C"/>
+                </a:solidFill>
+                <a:latin typeface="Microsoft YaHei"/>
+              </a:rPr>
+              <a:t>：信号就在拥塞 hop。</a:t>
+            </a:r>
+            <a:r>
+              <a:rPr sz="1050" b="1">
                 <a:solidFill>
                   <a:srgbClr val="20242C"/>
                 </a:solidFill>
@@ -11289,27 +11476,441 @@
               <a:t>缺</a:t>
             </a:r>
             <a:r>
-              <a:rPr sz="1200" b="0">
-                <a:solidFill>
-                  <a:srgbClr val="20242C"/>
-                </a:solidFill>
-                <a:latin typeface="Microsoft YaHei"/>
-              </a:rPr>
-              <a:t>：需要可暂停的队列；会形成拥塞树，伤及无辜。</a:t>
-            </a:r>
-          </a:p>
-        </p:txBody>
-      </p:sp>
-      <p:sp>
-        <p:nvSpPr>
-          <p:cNvPr id="16" name="Rectangle 15"/>
+              <a:rPr sz="1050" b="0">
+                <a:solidFill>
+                  <a:srgbClr val="20242C"/>
+                </a:solidFill>
+                <a:latin typeface="Microsoft YaHei"/>
+              </a:rPr>
+              <a:t>：无缓存环上「保护链路」= 空转。</a:t>
+            </a:r>
+          </a:p>
+        </p:txBody>
+      </p:sp>
+      <p:sp>
+        <p:nvSpPr>
+          <p:cNvPr id="19" name="Rectangle 18"/>
           <p:cNvSpPr/>
           <p:nvPr/>
         </p:nvSpPr>
         <p:spPr>
           <a:xfrm>
-            <a:off x="6205575" y="2971083"/>
-            <a:ext cx="2599867" cy="2616616"/>
+            <a:off x="9024899" y="2252814"/>
+            <a:ext cx="2599867" cy="1916849"/>
+          </a:xfrm>
+          <a:prstGeom prst="rect">
+            <a:avLst/>
+          </a:prstGeom>
+          <a:solidFill>
+            <a:srgbClr val="FFFFFF"/>
+          </a:solidFill>
+          <a:ln w="12700">
+            <a:solidFill>
+              <a:srgbClr val="DCE3EA"/>
+            </a:solidFill>
+          </a:ln>
+          <a:effectLst/>
+        </p:spPr>
+        <p:style>
+          <a:lnRef idx="1">
+            <a:schemeClr val="accent1"/>
+          </a:lnRef>
+          <a:fillRef idx="3">
+            <a:schemeClr val="accent1"/>
+          </a:fillRef>
+          <a:effectRef idx="2">
+            <a:schemeClr val="accent1"/>
+          </a:effectRef>
+          <a:fontRef idx="minor">
+            <a:schemeClr val="lt1"/>
+          </a:fontRef>
+        </p:style>
+        <p:txBody>
+          <a:bodyPr rtlCol="0" anchor="ctr" wrap="square"/>
+          <a:lstStyle/>
+          <a:p>
+            <a:pPr algn="ctr"/>
+          </a:p>
+        </p:txBody>
+      </p:sp>
+      <p:sp>
+        <p:nvSpPr>
+          <p:cNvPr id="20" name="TextBox 19"/>
+          <p:cNvSpPr txBox="1"/>
+          <p:nvPr/>
+        </p:nvSpPr>
+        <p:spPr>
+          <a:xfrm>
+            <a:off x="9226067" y="2553275"/>
+            <a:ext cx="2197531" cy="286893"/>
+          </a:xfrm>
+          <a:prstGeom prst="rect">
+            <a:avLst/>
+          </a:prstGeom>
+          <a:noFill/>
+        </p:spPr>
+        <p:txBody>
+          <a:bodyPr wrap="square" anchor="t" lIns="0" rIns="0" tIns="0" bIns="0">
+            <a:spAutoFit/>
+          </a:bodyPr>
+          <a:lstStyle/>
+          <a:p>
+            <a:pPr algn="l">
+              <a:lnSpc>
+                <a:spcPct val="100000"/>
+              </a:lnSpc>
+            </a:pPr>
+            <a:r>
+              <a:rPr sz="1350" b="1">
+                <a:solidFill>
+                  <a:srgbClr val="20242C"/>
+                </a:solidFill>
+                <a:latin typeface="Microsoft YaHei"/>
+              </a:rPr>
+              <a:t>时延</a:t>
+            </a:r>
+          </a:p>
+        </p:txBody>
+      </p:sp>
+      <p:sp>
+        <p:nvSpPr>
+          <p:cNvPr id="21" name="TextBox 20"/>
+          <p:cNvSpPr txBox="1"/>
+          <p:nvPr/>
+        </p:nvSpPr>
+        <p:spPr>
+          <a:xfrm>
+            <a:off x="9226067" y="2922464"/>
+            <a:ext cx="2197531" cy="983315"/>
+          </a:xfrm>
+          <a:prstGeom prst="rect">
+            <a:avLst/>
+          </a:prstGeom>
+          <a:noFill/>
+        </p:spPr>
+        <p:txBody>
+          <a:bodyPr wrap="square" anchor="t" lIns="0" rIns="0" tIns="0" bIns="0">
+            <a:spAutoFit/>
+          </a:bodyPr>
+          <a:lstStyle/>
+          <a:p>
+            <a:pPr algn="l">
+              <a:lnSpc>
+                <a:spcPct val="102000"/>
+              </a:lnSpc>
+            </a:pPr>
+            <a:r>
+              <a:rPr sz="1050" b="1">
+                <a:solidFill>
+                  <a:srgbClr val="20242C"/>
+                </a:solidFill>
+                <a:latin typeface="Microsoft YaHei"/>
+              </a:rPr>
+              <a:t>代表</a:t>
+            </a:r>
+            <a:r>
+              <a:rPr sz="1050" b="0">
+                <a:solidFill>
+                  <a:srgbClr val="20242C"/>
+                </a:solidFill>
+                <a:latin typeface="Microsoft YaHei"/>
+              </a:rPr>
+              <a:t>：S17 / S19。</a:t>
+            </a:r>
+          </a:p>
+          <a:p>
+            <a:pPr algn="l">
+              <a:lnSpc>
+                <a:spcPct val="102000"/>
+              </a:lnSpc>
+              <a:spcBef>
+                <a:spcPts val="600"/>
+              </a:spcBef>
+            </a:pPr>
+            <a:r>
+              <a:rPr sz="1050" b="1">
+                <a:solidFill>
+                  <a:srgbClr val="20242C"/>
+                </a:solidFill>
+                <a:latin typeface="Microsoft YaHei"/>
+              </a:rPr>
+              <a:t>听什么</a:t>
+            </a:r>
+            <a:r>
+              <a:rPr sz="1050" b="0">
+                <a:solidFill>
+                  <a:srgbClr val="20242C"/>
+                </a:solidFill>
+                <a:latin typeface="Microsoft YaHei"/>
+              </a:rPr>
+              <a:t>：带内 RTT（Comp 回程）。</a:t>
+            </a:r>
+          </a:p>
+          <a:p>
+            <a:pPr algn="l">
+              <a:lnSpc>
+                <a:spcPct val="102000"/>
+              </a:lnSpc>
+              <a:spcBef>
+                <a:spcPts val="600"/>
+              </a:spcBef>
+            </a:pPr>
+            <a:r>
+              <a:rPr sz="1050" b="1">
+                <a:solidFill>
+                  <a:srgbClr val="20242C"/>
+                </a:solidFill>
+                <a:latin typeface="Microsoft YaHei"/>
+              </a:rPr>
+              <a:t>优</a:t>
+            </a:r>
+            <a:r>
+              <a:rPr sz="1050" b="0">
+                <a:solidFill>
+                  <a:srgbClr val="20242C"/>
+                </a:solidFill>
+                <a:latin typeface="Microsoft YaHei"/>
+              </a:rPr>
+              <a:t>：不需要专用总线。</a:t>
+            </a:r>
+            <a:r>
+              <a:rPr sz="1050" b="1">
+                <a:solidFill>
+                  <a:srgbClr val="20242C"/>
+                </a:solidFill>
+                <a:latin typeface="Microsoft YaHei"/>
+              </a:rPr>
+              <a:t>缺</a:t>
+            </a:r>
+            <a:r>
+              <a:rPr sz="1050" b="0">
+                <a:solidFill>
+                  <a:srgbClr val="20242C"/>
+                </a:solidFill>
+                <a:latin typeface="Microsoft YaHei"/>
+              </a:rPr>
+              <a:t>：无缓存环几乎没有排队时延。</a:t>
+            </a:r>
+          </a:p>
+        </p:txBody>
+      </p:sp>
+      <p:sp>
+        <p:nvSpPr>
+          <p:cNvPr id="22" name="Rectangle 21"/>
+          <p:cNvSpPr/>
+          <p:nvPr/>
+        </p:nvSpPr>
+        <p:spPr>
+          <a:xfrm>
+            <a:off x="566928" y="4389120"/>
+            <a:ext cx="2599867" cy="1916849"/>
+          </a:xfrm>
+          <a:prstGeom prst="rect">
+            <a:avLst/>
+          </a:prstGeom>
+          <a:solidFill>
+            <a:srgbClr val="FFFFFF"/>
+          </a:solidFill>
+          <a:ln w="12700">
+            <a:solidFill>
+              <a:srgbClr val="DCE3EA"/>
+            </a:solidFill>
+          </a:ln>
+          <a:effectLst/>
+        </p:spPr>
+        <p:style>
+          <a:lnRef idx="1">
+            <a:schemeClr val="accent1"/>
+          </a:lnRef>
+          <a:fillRef idx="3">
+            <a:schemeClr val="accent1"/>
+          </a:fillRef>
+          <a:effectRef idx="2">
+            <a:schemeClr val="accent1"/>
+          </a:effectRef>
+          <a:fontRef idx="minor">
+            <a:schemeClr val="lt1"/>
+          </a:fontRef>
+        </p:style>
+        <p:txBody>
+          <a:bodyPr rtlCol="0" anchor="ctr" wrap="square"/>
+          <a:lstStyle/>
+          <a:p>
+            <a:pPr algn="ctr"/>
+          </a:p>
+        </p:txBody>
+      </p:sp>
+      <p:sp>
+        <p:nvSpPr>
+          <p:cNvPr id="23" name="TextBox 22"/>
+          <p:cNvSpPr txBox="1"/>
+          <p:nvPr/>
+        </p:nvSpPr>
+        <p:spPr>
+          <a:xfrm>
+            <a:off x="768096" y="4689580"/>
+            <a:ext cx="2197531" cy="286893"/>
+          </a:xfrm>
+          <a:prstGeom prst="rect">
+            <a:avLst/>
+          </a:prstGeom>
+          <a:noFill/>
+        </p:spPr>
+        <p:txBody>
+          <a:bodyPr wrap="square" anchor="t" lIns="0" rIns="0" tIns="0" bIns="0">
+            <a:spAutoFit/>
+          </a:bodyPr>
+          <a:lstStyle/>
+          <a:p>
+            <a:pPr algn="l">
+              <a:lnSpc>
+                <a:spcPct val="100000"/>
+              </a:lnSpc>
+            </a:pPr>
+            <a:r>
+              <a:rPr sz="1350" b="1">
+                <a:solidFill>
+                  <a:srgbClr val="20242C"/>
+                </a:solidFill>
+                <a:latin typeface="Microsoft YaHei"/>
+              </a:rPr>
+              <a:t>ECN 标记</a:t>
+            </a:r>
+          </a:p>
+        </p:txBody>
+      </p:sp>
+      <p:sp>
+        <p:nvSpPr>
+          <p:cNvPr id="24" name="TextBox 23"/>
+          <p:cNvSpPr txBox="1"/>
+          <p:nvPr/>
+        </p:nvSpPr>
+        <p:spPr>
+          <a:xfrm>
+            <a:off x="768096" y="5058769"/>
+            <a:ext cx="2197531" cy="983315"/>
+          </a:xfrm>
+          <a:prstGeom prst="rect">
+            <a:avLst/>
+          </a:prstGeom>
+          <a:noFill/>
+        </p:spPr>
+        <p:txBody>
+          <a:bodyPr wrap="square" anchor="t" lIns="0" rIns="0" tIns="0" bIns="0">
+            <a:spAutoFit/>
+          </a:bodyPr>
+          <a:lstStyle/>
+          <a:p>
+            <a:pPr algn="l">
+              <a:lnSpc>
+                <a:spcPct val="102000"/>
+              </a:lnSpc>
+            </a:pPr>
+            <a:r>
+              <a:rPr sz="1050" b="1">
+                <a:solidFill>
+                  <a:srgbClr val="20242C"/>
+                </a:solidFill>
+                <a:latin typeface="Microsoft YaHei"/>
+              </a:rPr>
+              <a:t>代表</a:t>
+            </a:r>
+            <a:r>
+              <a:rPr sz="1050" b="0">
+                <a:solidFill>
+                  <a:srgbClr val="20242C"/>
+                </a:solidFill>
+                <a:latin typeface="Microsoft YaHei"/>
+              </a:rPr>
+              <a:t>：S18 / S20。</a:t>
+            </a:r>
+          </a:p>
+          <a:p>
+            <a:pPr algn="l">
+              <a:lnSpc>
+                <a:spcPct val="102000"/>
+              </a:lnSpc>
+              <a:spcBef>
+                <a:spcPts val="600"/>
+              </a:spcBef>
+            </a:pPr>
+            <a:r>
+              <a:rPr sz="1050" b="1">
+                <a:solidFill>
+                  <a:srgbClr val="20242C"/>
+                </a:solidFill>
+                <a:latin typeface="Microsoft YaHei"/>
+              </a:rPr>
+              <a:t>听什么</a:t>
+            </a:r>
+            <a:r>
+              <a:rPr sz="1050" b="0">
+                <a:solidFill>
+                  <a:srgbClr val="20242C"/>
+                </a:solidFill>
+                <a:latin typeface="Microsoft YaHei"/>
+              </a:rPr>
+              <a:t>：RSP 上的一比特标记。</a:t>
+            </a:r>
+          </a:p>
+          <a:p>
+            <a:pPr algn="l">
+              <a:lnSpc>
+                <a:spcPct val="102000"/>
+              </a:lnSpc>
+              <a:spcBef>
+                <a:spcPts val="600"/>
+              </a:spcBef>
+            </a:pPr>
+            <a:r>
+              <a:rPr sz="1050" b="1">
+                <a:solidFill>
+                  <a:srgbClr val="20242C"/>
+                </a:solidFill>
+                <a:latin typeface="Microsoft YaHei"/>
+              </a:rPr>
+              <a:t>优</a:t>
+            </a:r>
+            <a:r>
+              <a:rPr sz="1050" b="0">
+                <a:solidFill>
+                  <a:srgbClr val="20242C"/>
+                </a:solidFill>
+                <a:latin typeface="Microsoft YaHei"/>
+              </a:rPr>
+              <a:t>：复用已有通道。</a:t>
+            </a:r>
+            <a:r>
+              <a:rPr sz="1050" b="1">
+                <a:solidFill>
+                  <a:srgbClr val="20242C"/>
+                </a:solidFill>
+                <a:latin typeface="Microsoft YaHei"/>
+              </a:rPr>
+              <a:t>缺</a:t>
+            </a:r>
+            <a:r>
+              <a:rPr sz="1050" b="0">
+                <a:solidFill>
+                  <a:srgbClr val="20242C"/>
+                </a:solidFill>
+                <a:latin typeface="Microsoft YaHei"/>
+              </a:rPr>
+              <a:t>：标记仍来自本节点失败。</a:t>
+            </a:r>
+          </a:p>
+        </p:txBody>
+      </p:sp>
+      <p:sp>
+        <p:nvSpPr>
+          <p:cNvPr id="25" name="Rectangle 24"/>
+          <p:cNvSpPr/>
+          <p:nvPr/>
+        </p:nvSpPr>
+        <p:spPr>
+          <a:xfrm>
+            <a:off x="3386251" y="4389120"/>
+            <a:ext cx="2599867" cy="1916849"/>
           </a:xfrm>
           <a:prstGeom prst="rect">
             <a:avLst/>
@@ -11348,14 +11949,14 @@
       </p:sp>
       <p:sp>
         <p:nvSpPr>
-          <p:cNvPr id="17" name="TextBox 16"/>
-          <p:cNvSpPr txBox="1"/>
-          <p:nvPr/>
-        </p:nvSpPr>
-        <p:spPr>
-          <a:xfrm>
-            <a:off x="6406743" y="3172251"/>
-            <a:ext cx="2197531" cy="314705"/>
+          <p:cNvPr id="26" name="TextBox 25"/>
+          <p:cNvSpPr txBox="1"/>
+          <p:nvPr/>
+        </p:nvSpPr>
+        <p:spPr>
+          <a:xfrm>
+            <a:off x="3587419" y="4590288"/>
+            <a:ext cx="2197531" cy="286893"/>
           </a:xfrm>
           <a:prstGeom prst="rect">
             <a:avLst/>
@@ -11374,27 +11975,27 @@
               </a:lnSpc>
             </a:pPr>
             <a:r>
-              <a:rPr sz="1500" b="1">
+              <a:rPr sz="1350" b="1">
                 <a:solidFill>
                   <a:srgbClr val="D20A2E"/>
                 </a:solidFill>
                 <a:latin typeface="Microsoft YaHei"/>
               </a:rPr>
-              <a:t>③ 源端限速 · 速率型</a:t>
-            </a:r>
-          </a:p>
-        </p:txBody>
-      </p:sp>
-      <p:sp>
-        <p:nvSpPr>
-          <p:cNvPr id="18" name="TextBox 17"/>
-          <p:cNvSpPr txBox="1"/>
-          <p:nvPr/>
-        </p:nvSpPr>
-        <p:spPr>
-          <a:xfrm>
-            <a:off x="6406743" y="3569253"/>
-            <a:ext cx="2197531" cy="1853854"/>
+              <a:t>显式等级</a:t>
+            </a:r>
+          </a:p>
+        </p:txBody>
+      </p:sp>
+      <p:sp>
+        <p:nvSpPr>
+          <p:cNvPr id="27" name="TextBox 26"/>
+          <p:cNvSpPr txBox="1"/>
+          <p:nvPr/>
+        </p:nvSpPr>
+        <p:spPr>
+          <a:xfrm>
+            <a:off x="3587419" y="4959477"/>
+            <a:ext cx="2197531" cy="1181900"/>
           </a:xfrm>
           <a:prstGeom prst="rect">
             <a:avLst/>
@@ -11413,7 +12014,7 @@
               </a:lnSpc>
             </a:pPr>
             <a:r>
-              <a:rPr sz="1200" b="1">
+              <a:rPr sz="1050" b="1">
                 <a:solidFill>
                   <a:srgbClr val="20242C"/>
                 </a:solidFill>
@@ -11422,13 +12023,13 @@
               <a:t>代表</a:t>
             </a:r>
             <a:r>
-              <a:rPr sz="1200" b="0">
-                <a:solidFill>
-                  <a:srgbClr val="20242C"/>
-                </a:solidFill>
-                <a:latin typeface="Microsoft YaHei"/>
-              </a:rPr>
-              <a:t>：AIMD / DCQCN / TIMELY / QCN。</a:t>
+              <a:rPr sz="1050" b="0">
+                <a:solidFill>
+                  <a:srgbClr val="20242C"/>
+                </a:solidFill>
+                <a:latin typeface="Microsoft YaHei"/>
+              </a:rPr>
+              <a:t>：S1 / S1T / S15 / S22。</a:t>
             </a:r>
           </a:p>
           <a:p>
@@ -11441,22 +12042,22 @@
               </a:spcBef>
             </a:pPr>
             <a:r>
-              <a:rPr sz="1200" b="1">
-                <a:solidFill>
-                  <a:srgbClr val="20242C"/>
-                </a:solidFill>
-                <a:latin typeface="Microsoft YaHei"/>
-              </a:rPr>
-              <a:t>动手处</a:t>
-            </a:r>
-            <a:r>
-              <a:rPr sz="1200" b="0">
-                <a:solidFill>
-                  <a:srgbClr val="20242C"/>
-                </a:solidFill>
-                <a:latin typeface="Microsoft YaHei"/>
-              </a:rPr>
-              <a:t>：注入令牌桶。</a:t>
+              <a:rPr sz="1050" b="1">
+                <a:solidFill>
+                  <a:srgbClr val="20242C"/>
+                </a:solidFill>
+                <a:latin typeface="Microsoft YaHei"/>
+              </a:rPr>
+              <a:t>听什么</a:t>
+            </a:r>
+            <a:r>
+              <a:rPr sz="1050" b="0">
+                <a:solidFill>
+                  <a:srgbClr val="20242C"/>
+                </a:solidFill>
+                <a:latin typeface="Microsoft YaHei"/>
+              </a:rPr>
+              <a:t>：广播的拥塞等级或进度。</a:t>
             </a:r>
           </a:p>
           <a:p>
@@ -11469,7 +12070,7 @@
               </a:spcBef>
             </a:pPr>
             <a:r>
-              <a:rPr sz="1200" b="1">
+              <a:rPr sz="1050" b="1">
                 <a:solidFill>
                   <a:srgbClr val="20242C"/>
                 </a:solidFill>
@@ -11478,26 +12079,16 @@
               <a:t>优</a:t>
             </a:r>
             <a:r>
-              <a:rPr sz="1200" b="0">
-                <a:solidFill>
-                  <a:srgbClr val="20242C"/>
-                </a:solidFill>
-                <a:latin typeface="Microsoft YaHei"/>
-              </a:rPr>
-              <a:t>：直接控制注入总量，稳定性有成熟理论，执行器便宜。</a:t>
-            </a:r>
-          </a:p>
-          <a:p>
-            <a:pPr algn="l">
-              <a:lnSpc>
-                <a:spcPct val="102000"/>
-              </a:lnSpc>
-              <a:spcBef>
-                <a:spcPts val="600"/>
-              </a:spcBef>
-            </a:pPr>
-            <a:r>
-              <a:rPr sz="1200" b="1">
+              <a:rPr sz="1050" b="0">
+                <a:solidFill>
+                  <a:srgbClr val="20242C"/>
+                </a:solidFill>
+                <a:latin typeface="Microsoft YaHei"/>
+              </a:rPr>
+              <a:t>：全局可见。</a:t>
+            </a:r>
+            <a:r>
+              <a:rPr sz="1050" b="1">
                 <a:solidFill>
                   <a:srgbClr val="20242C"/>
                 </a:solidFill>
@@ -11506,27 +12097,27 @@
               <a:t>缺</a:t>
             </a:r>
             <a:r>
-              <a:rPr sz="1200" b="0">
-                <a:solidFill>
-                  <a:srgbClr val="20242C"/>
-                </a:solidFill>
-                <a:latin typeface="Microsoft YaHei"/>
-              </a:rPr>
-              <a:t>：闸门只能「扣住」，让出的槽会被沿途吃掉；量化亏带宽。</a:t>
-            </a:r>
-          </a:p>
-        </p:txBody>
-      </p:sp>
-      <p:sp>
-        <p:nvSpPr>
-          <p:cNvPr id="19" name="Rectangle 18"/>
+              <a:rPr sz="1050" b="0">
+                <a:solidFill>
+                  <a:srgbClr val="20242C"/>
+                </a:solidFill>
+                <a:latin typeface="Microsoft YaHei"/>
+              </a:rPr>
+              <a:t>：分不清「我太贪」和「我被挤」；S22 只换了线上内容。</a:t>
+            </a:r>
+          </a:p>
+        </p:txBody>
+      </p:sp>
+      <p:sp>
+        <p:nvSpPr>
+          <p:cNvPr id="28" name="Rectangle 27"/>
           <p:cNvSpPr/>
           <p:nvPr/>
         </p:nvSpPr>
         <p:spPr>
           <a:xfrm>
-            <a:off x="9024899" y="2971083"/>
-            <a:ext cx="2599867" cy="2616616"/>
+            <a:off x="6205575" y="4389120"/>
+            <a:ext cx="2599867" cy="1916849"/>
           </a:xfrm>
           <a:prstGeom prst="rect">
             <a:avLst/>
@@ -11565,14 +12156,14 @@
       </p:sp>
       <p:sp>
         <p:nvSpPr>
-          <p:cNvPr id="20" name="TextBox 19"/>
-          <p:cNvSpPr txBox="1"/>
-          <p:nvPr/>
-        </p:nvSpPr>
-        <p:spPr>
-          <a:xfrm>
-            <a:off x="9226067" y="3172251"/>
-            <a:ext cx="2197531" cy="314705"/>
+          <p:cNvPr id="29" name="TextBox 28"/>
+          <p:cNvSpPr txBox="1"/>
+          <p:nvPr/>
+        </p:nvSpPr>
+        <p:spPr>
+          <a:xfrm>
+            <a:off x="6406743" y="4689580"/>
+            <a:ext cx="2197531" cy="286893"/>
           </a:xfrm>
           <a:prstGeom prst="rect">
             <a:avLst/>
@@ -11591,27 +12182,27 @@
               </a:lnSpc>
             </a:pPr>
             <a:r>
-              <a:rPr sz="1500" b="1">
-                <a:solidFill>
-                  <a:srgbClr val="20242C"/>
-                </a:solidFill>
-                <a:latin typeface="Microsoft YaHei"/>
-              </a:rPr>
-              <a:t>④ 源端限速 · 窗口型</a:t>
-            </a:r>
-          </a:p>
-        </p:txBody>
-      </p:sp>
-      <p:sp>
-        <p:nvSpPr>
-          <p:cNvPr id="21" name="TextBox 20"/>
-          <p:cNvSpPr txBox="1"/>
-          <p:nvPr/>
-        </p:nvSpPr>
-        <p:spPr>
-          <a:xfrm>
-            <a:off x="9226067" y="3569253"/>
-            <a:ext cx="2197531" cy="1853854"/>
+              <a:rPr sz="1350" b="1">
+                <a:solidFill>
+                  <a:srgbClr val="20242C"/>
+                </a:solidFill>
+                <a:latin typeface="Microsoft YaHei"/>
+              </a:rPr>
+              <a:t>显式速率</a:t>
+            </a:r>
+          </a:p>
+        </p:txBody>
+      </p:sp>
+      <p:sp>
+        <p:nvSpPr>
+          <p:cNvPr id="30" name="TextBox 29"/>
+          <p:cNvSpPr txBox="1"/>
+          <p:nvPr/>
+        </p:nvSpPr>
+        <p:spPr>
+          <a:xfrm>
+            <a:off x="6406743" y="5058769"/>
+            <a:ext cx="2197531" cy="983315"/>
           </a:xfrm>
           <a:prstGeom prst="rect">
             <a:avLst/>
@@ -11630,7 +12221,7 @@
               </a:lnSpc>
             </a:pPr>
             <a:r>
-              <a:rPr sz="1200" b="1">
+              <a:rPr sz="1050" b="1">
                 <a:solidFill>
                   <a:srgbClr val="20242C"/>
                 </a:solidFill>
@@ -11639,13 +12230,13 @@
               <a:t>代表</a:t>
             </a:r>
             <a:r>
-              <a:rPr sz="1200" b="0">
-                <a:solidFill>
-                  <a:srgbClr val="20242C"/>
-                </a:solidFill>
-                <a:latin typeface="Microsoft YaHei"/>
-              </a:rPr>
-              <a:t>：TCP / DCTCP / Swift / outstanding cap。</a:t>
+              <a:rPr sz="1050" b="0">
+                <a:solidFill>
+                  <a:srgbClr val="20242C"/>
+                </a:solidFill>
+                <a:latin typeface="Microsoft YaHei"/>
+              </a:rPr>
+              <a:t>：S28 / S28S。</a:t>
             </a:r>
           </a:p>
           <a:p>
@@ -11658,22 +12249,22 @@
               </a:spcBef>
             </a:pPr>
             <a:r>
-              <a:rPr sz="1200" b="1">
-                <a:solidFill>
-                  <a:srgbClr val="20242C"/>
-                </a:solidFill>
-                <a:latin typeface="Microsoft YaHei"/>
-              </a:rPr>
-              <a:t>动手处</a:t>
-            </a:r>
-            <a:r>
-              <a:rPr sz="1200" b="0">
-                <a:solidFill>
-                  <a:srgbClr val="20242C"/>
-                </a:solidFill>
-                <a:latin typeface="Microsoft YaHei"/>
-              </a:rPr>
-              <a:t>：在飞事务数。</a:t>
+              <a:rPr sz="1050" b="1">
+                <a:solidFill>
+                  <a:srgbClr val="20242C"/>
+                </a:solidFill>
+                <a:latin typeface="Microsoft YaHei"/>
+              </a:rPr>
+              <a:t>听什么</a:t>
+            </a:r>
+            <a:r>
+              <a:rPr sz="1050" b="0">
+                <a:solidFill>
+                  <a:srgbClr val="20242C"/>
+                </a:solidFill>
+                <a:latin typeface="Microsoft YaHei"/>
+              </a:rPr>
+              <a:t>：瓶颈自己算出的 share。</a:t>
             </a:r>
           </a:p>
           <a:p>
@@ -11686,7 +12277,7 @@
               </a:spcBef>
             </a:pPr>
             <a:r>
-              <a:rPr sz="1200" b="1">
+              <a:rPr sz="1050" b="1">
                 <a:solidFill>
                   <a:srgbClr val="20242C"/>
                 </a:solidFill>
@@ -11695,26 +12286,16 @@
               <a:t>优</a:t>
             </a:r>
             <a:r>
-              <a:rPr sz="1200" b="0">
-                <a:solidFill>
-                  <a:srgbClr val="20242C"/>
-                </a:solidFill>
-                <a:latin typeface="Microsoft YaHei"/>
-              </a:rPr>
-              <a:t>：与 CHI 事务模型天然对齐；有名额可突发，不做逐拍量化。</a:t>
-            </a:r>
-          </a:p>
-          <a:p>
-            <a:pPr algn="l">
-              <a:lnSpc>
-                <a:spcPct val="102000"/>
-              </a:lnSpc>
-              <a:spcBef>
-                <a:spcPts val="600"/>
-              </a:spcBef>
-            </a:pPr>
-            <a:r>
-              <a:rPr sz="1200" b="1">
+              <a:rPr sz="1050" b="0">
+                <a:solidFill>
+                  <a:srgbClr val="20242C"/>
+                </a:solidFill>
+                <a:latin typeface="Microsoft YaHei"/>
+              </a:rPr>
+              <a:t>：源端不必猜。</a:t>
+            </a:r>
+            <a:r>
+              <a:rPr sz="1050" b="1">
                 <a:solidFill>
                   <a:srgbClr val="20242C"/>
                 </a:solidFill>
@@ -11723,20 +12304,20 @@
               <a:t>缺</a:t>
             </a:r>
             <a:r>
-              <a:rPr sz="1200" b="0">
-                <a:solidFill>
-                  <a:srgbClr val="20242C"/>
-                </a:solidFill>
-                <a:latin typeface="Microsoft YaHei"/>
-              </a:rPr>
-              <a:t>：只管「有多少在飞」，不决定「瓶颈处先服务谁」。</a:t>
-            </a:r>
-          </a:p>
-        </p:txBody>
-      </p:sp>
-      <p:sp>
-        <p:nvSpPr>
-          <p:cNvPr id="22" name="TextBox 21"/>
+              <a:rPr sz="1050" b="0">
+                <a:solidFill>
+                  <a:srgbClr val="20242C"/>
+                </a:solidFill>
+                <a:latin typeface="Microsoft YaHei"/>
+              </a:rPr>
+              <a:t>：总线最宽；不公平不在 hop 份额。</a:t>
+            </a:r>
+          </a:p>
+        </p:txBody>
+      </p:sp>
+      <p:sp>
+        <p:nvSpPr>
+          <p:cNvPr id="31" name="TextBox 30"/>
           <p:cNvSpPr txBox="1"/>
           <p:nvPr/>
         </p:nvSpPr>
@@ -11913,7 +12494,7 @@
                 </a:solidFill>
                 <a:latin typeface="Microsoft YaHei"/>
               </a:rPr>
-              <a:t>分类 · 控制点 ⑤–⑧</a:t>
+              <a:t>分类 · 控制点（第 19 页的列）</a:t>
             </a:r>
           </a:p>
         </p:txBody>
@@ -12079,7 +12660,7 @@
                 </a:solidFill>
                 <a:latin typeface="Arial"/>
               </a:rPr>
-              <a:t>T A X O N O M Y   B Y   C O N T R O L   P O I N T   ·   2   /   2</a:t>
+              <a:t>T A X O N O M Y   B Y   C O N T R O L   P O I N T     =     P A G E   1 9   C O L S</a:t>
             </a:r>
           </a:p>
         </p:txBody>
@@ -12118,7 +12699,7 @@
                 </a:solidFill>
                 <a:latin typeface="Microsoft YaHei"/>
               </a:rPr>
-              <a:t>其余四类：把控制点从源端搬到网内、接收端或调度器</a:t>
+              <a:t>动手处决定天花板（= 第 19 页的列）</a:t>
             </a:r>
           </a:p>
         </p:txBody>
@@ -12131,8 +12712,8 @@
         </p:nvSpPr>
         <p:spPr>
           <a:xfrm>
-            <a:off x="566928" y="2422443"/>
-            <a:ext cx="2599867" cy="2616616"/>
+            <a:off x="566928" y="2252814"/>
+            <a:ext cx="2599867" cy="1916849"/>
           </a:xfrm>
           <a:prstGeom prst="rect">
             <a:avLst/>
@@ -12177,8 +12758,8 @@
         </p:nvSpPr>
         <p:spPr>
           <a:xfrm>
-            <a:off x="768096" y="2623611"/>
-            <a:ext cx="2197531" cy="314705"/>
+            <a:off x="768096" y="2553275"/>
+            <a:ext cx="2197531" cy="286893"/>
           </a:xfrm>
           <a:prstGeom prst="rect">
             <a:avLst/>
@@ -12197,13 +12778,13 @@
               </a:lnSpc>
             </a:pPr>
             <a:r>
-              <a:rPr sz="1500" b="1">
-                <a:solidFill>
-                  <a:srgbClr val="20242C"/>
-                </a:solidFill>
-                <a:latin typeface="Microsoft YaHei"/>
-              </a:rPr>
-              <a:t>⑤ 网内仲裁 / 公平队列</a:t>
+              <a:rPr sz="1350" b="1">
+                <a:solidFill>
+                  <a:srgbClr val="20242C"/>
+                </a:solidFill>
+                <a:latin typeface="Microsoft YaHei"/>
+              </a:rPr>
+              <a:t>路径选择</a:t>
             </a:r>
           </a:p>
         </p:txBody>
@@ -12216,8 +12797,8 @@
         </p:nvSpPr>
         <p:spPr>
           <a:xfrm>
-            <a:off x="768096" y="3020613"/>
-            <a:ext cx="2197531" cy="1853854"/>
+            <a:off x="768096" y="2922464"/>
+            <a:ext cx="2197531" cy="983315"/>
           </a:xfrm>
           <a:prstGeom prst="rect">
             <a:avLst/>
@@ -12236,7 +12817,7 @@
               </a:lnSpc>
             </a:pPr>
             <a:r>
-              <a:rPr sz="1200" b="1">
+              <a:rPr sz="1050" b="1">
                 <a:solidFill>
                   <a:srgbClr val="20242C"/>
                 </a:solidFill>
@@ -12245,13 +12826,13 @@
               <a:t>代表</a:t>
             </a:r>
             <a:r>
-              <a:rPr sz="1200" b="0">
-                <a:solidFill>
-                  <a:srgbClr val="20242C"/>
-                </a:solidFill>
-                <a:latin typeface="Microsoft YaHei"/>
-              </a:rPr>
-              <a:t>：WFQ / age-based arb / iSLIP / HiRD / I-tag。</a:t>
+              <a:rPr sz="1050" b="0">
+                <a:solidFill>
+                  <a:srgbClr val="20242C"/>
+                </a:solidFill>
+                <a:latin typeface="Microsoft YaHei"/>
+              </a:rPr>
+              <a:t>：S26（UGAL / Valiant 类）。</a:t>
             </a:r>
           </a:p>
           <a:p>
@@ -12264,7 +12845,7 @@
               </a:spcBef>
             </a:pPr>
             <a:r>
-              <a:rPr sz="1200" b="1">
+              <a:rPr sz="1050" b="1">
                 <a:solidFill>
                   <a:srgbClr val="20242C"/>
                 </a:solidFill>
@@ -12273,13 +12854,13 @@
               <a:t>动手处</a:t>
             </a:r>
             <a:r>
-              <a:rPr sz="1200" b="0">
-                <a:solidFill>
-                  <a:srgbClr val="20242C"/>
-                </a:solidFill>
-                <a:latin typeface="Microsoft YaHei"/>
-              </a:rPr>
-              <a:t>：环上仲裁。</a:t>
+              <a:rPr sz="1050" b="0">
+                <a:solidFill>
+                  <a:srgbClr val="20242C"/>
+                </a:solidFill>
+                <a:latin typeface="Microsoft YaHei"/>
+              </a:rPr>
+              <a:t>：选最短还是绕远。</a:t>
             </a:r>
           </a:p>
           <a:p>
@@ -12292,7 +12873,7 @@
               </a:spcBef>
             </a:pPr>
             <a:r>
-              <a:rPr sz="1200" b="1">
+              <a:rPr sz="1050" b="1">
                 <a:solidFill>
                   <a:srgbClr val="20242C"/>
                 </a:solidFill>
@@ -12301,26 +12882,16 @@
               <a:t>优</a:t>
             </a:r>
             <a:r>
-              <a:rPr sz="1200" b="0">
-                <a:solidFill>
-                  <a:srgbClr val="20242C"/>
-                </a:solidFill>
-                <a:latin typeface="Microsoft YaHei"/>
-              </a:rPr>
-              <a:t>：控制点就在拥塞发生地，不需要端到端环路，不扣住流量。</a:t>
-            </a:r>
-          </a:p>
-          <a:p>
-            <a:pPr algn="l">
-              <a:lnSpc>
-                <a:spcPct val="102000"/>
-              </a:lnSpc>
-              <a:spcBef>
-                <a:spcPts val="600"/>
-              </a:spcBef>
-            </a:pPr>
-            <a:r>
-              <a:rPr sz="1200" b="1">
+              <a:rPr sz="1050" b="0">
+                <a:solidFill>
+                  <a:srgbClr val="20242C"/>
+                </a:solidFill>
+                <a:latin typeface="Microsoft YaHei"/>
+              </a:rPr>
+              <a:t>：不扣注入量。</a:t>
+            </a:r>
+            <a:r>
+              <a:rPr sz="1050" b="1">
                 <a:solidFill>
                   <a:srgbClr val="20242C"/>
                 </a:solidFill>
@@ -12329,13 +12900,13 @@
               <a:t>缺</a:t>
             </a:r>
             <a:r>
-              <a:rPr sz="1200" b="0">
-                <a:solidFill>
-                  <a:srgbClr val="20242C"/>
-                </a:solidFill>
-                <a:latin typeface="Microsoft YaHei"/>
-              </a:rPr>
-              <a:t>：只能改「这一拍谁先用」，要动仲裁器。</a:t>
+              <a:rPr sz="1050" b="0">
+                <a:solidFill>
+                  <a:srgbClr val="20242C"/>
+                </a:solidFill>
+                <a:latin typeface="Microsoft YaHei"/>
+              </a:rPr>
+              <a:t>：绕远本身要多占链路。</a:t>
             </a:r>
           </a:p>
         </p:txBody>
@@ -12348,8 +12919,8 @@
         </p:nvSpPr>
         <p:spPr>
           <a:xfrm>
-            <a:off x="3386251" y="2422443"/>
-            <a:ext cx="2599867" cy="2616616"/>
+            <a:off x="3386251" y="2252814"/>
+            <a:ext cx="2599867" cy="1916849"/>
           </a:xfrm>
           <a:prstGeom prst="rect">
             <a:avLst/>
@@ -12394,8 +12965,8 @@
         </p:nvSpPr>
         <p:spPr>
           <a:xfrm>
-            <a:off x="3587419" y="2623611"/>
-            <a:ext cx="2197531" cy="314705"/>
+            <a:off x="3587419" y="2553275"/>
+            <a:ext cx="2197531" cy="286893"/>
           </a:xfrm>
           <a:prstGeom prst="rect">
             <a:avLst/>
@@ -12414,13 +12985,13 @@
               </a:lnSpc>
             </a:pPr>
             <a:r>
-              <a:rPr sz="1500" b="1">
-                <a:solidFill>
-                  <a:srgbClr val="20242C"/>
-                </a:solidFill>
-                <a:latin typeface="Microsoft YaHei"/>
-              </a:rPr>
-              <a:t>⑥ 预约 / 调度式准入</a:t>
+              <a:rPr sz="1350" b="1">
+                <a:solidFill>
+                  <a:srgbClr val="20242C"/>
+                </a:solidFill>
+                <a:latin typeface="Microsoft YaHei"/>
+              </a:rPr>
+              <a:t>逐跳背压</a:t>
             </a:r>
           </a:p>
         </p:txBody>
@@ -12433,8 +13004,8 @@
         </p:nvSpPr>
         <p:spPr>
           <a:xfrm>
-            <a:off x="3587419" y="3020613"/>
-            <a:ext cx="2197531" cy="1853854"/>
+            <a:off x="3587419" y="2922464"/>
+            <a:ext cx="2197531" cy="983315"/>
           </a:xfrm>
           <a:prstGeom prst="rect">
             <a:avLst/>
@@ -12453,7 +13024,7 @@
               </a:lnSpc>
             </a:pPr>
             <a:r>
-              <a:rPr sz="1200" b="1">
+              <a:rPr sz="1050" b="1">
                 <a:solidFill>
                   <a:srgbClr val="20242C"/>
                 </a:solidFill>
@@ -12462,13 +13033,13 @@
               <a:t>代表</a:t>
             </a:r>
             <a:r>
-              <a:rPr sz="1200" b="0">
-                <a:solidFill>
-                  <a:srgbClr val="20242C"/>
-                </a:solidFill>
-                <a:latin typeface="Microsoft YaHei"/>
-              </a:rPr>
-              <a:t>：Fastpass / ExpressPass / TDMA / token ring。</a:t>
+              <a:rPr sz="1050" b="0">
+                <a:solidFill>
+                  <a:srgbClr val="20242C"/>
+                </a:solidFill>
+                <a:latin typeface="Microsoft YaHei"/>
+              </a:rPr>
+              <a:t>：S27（PFC / wormhole 类）。</a:t>
             </a:r>
           </a:p>
           <a:p>
@@ -12481,7 +13052,7 @@
               </a:spcBef>
             </a:pPr>
             <a:r>
-              <a:rPr sz="1200" b="1">
+              <a:rPr sz="1050" b="1">
                 <a:solidFill>
                   <a:srgbClr val="20242C"/>
                 </a:solidFill>
@@ -12490,13 +13061,13 @@
               <a:t>动手处</a:t>
             </a:r>
             <a:r>
-              <a:rPr sz="1200" b="0">
-                <a:solidFill>
-                  <a:srgbClr val="20242C"/>
-                </a:solidFill>
-                <a:latin typeface="Microsoft YaHei"/>
-              </a:rPr>
-              <a:t>：预分配时隙。</a:t>
+              <a:rPr sz="1050" b="0">
+                <a:solidFill>
+                  <a:srgbClr val="20242C"/>
+                </a:solidFill>
+                <a:latin typeface="Microsoft YaHei"/>
+              </a:rPr>
+              <a:t>：上游链路 XOFF。</a:t>
             </a:r>
           </a:p>
           <a:p>
@@ -12509,7 +13080,7 @@
               </a:spcBef>
             </a:pPr>
             <a:r>
-              <a:rPr sz="1200" b="1">
+              <a:rPr sz="1050" b="1">
                 <a:solidFill>
                   <a:srgbClr val="20242C"/>
                 </a:solidFill>
@@ -12518,13 +13089,164 @@
               <a:t>优</a:t>
             </a:r>
             <a:r>
-              <a:rPr sz="1200" b="0">
-                <a:solidFill>
-                  <a:srgbClr val="20242C"/>
-                </a:solidFill>
-                <a:latin typeface="Microsoft YaHei"/>
-              </a:rPr>
-              <a:t>：拥塞不形成；最坏情况是调度性质，不是控制环路性质。</a:t>
+              <a:rPr sz="1050" b="0">
+                <a:solidFill>
+                  <a:srgbClr val="20242C"/>
+                </a:solidFill>
+                <a:latin typeface="Microsoft YaHei"/>
+              </a:rPr>
+              <a:t>：不丢包，实现最简单。</a:t>
+            </a:r>
+            <a:r>
+              <a:rPr sz="1050" b="1">
+                <a:solidFill>
+                  <a:srgbClr val="20242C"/>
+                </a:solidFill>
+                <a:latin typeface="Microsoft YaHei"/>
+              </a:rPr>
+              <a:t>缺</a:t>
+            </a:r>
+            <a:r>
+              <a:rPr sz="1050" b="0">
+                <a:solidFill>
+                  <a:srgbClr val="20242C"/>
+                </a:solidFill>
+                <a:latin typeface="Microsoft YaHei"/>
+              </a:rPr>
+              <a:t>：需要可暂停队列，会形成拥塞树。</a:t>
+            </a:r>
+          </a:p>
+        </p:txBody>
+      </p:sp>
+      <p:sp>
+        <p:nvSpPr>
+          <p:cNvPr id="16" name="Rectangle 15"/>
+          <p:cNvSpPr/>
+          <p:nvPr/>
+        </p:nvSpPr>
+        <p:spPr>
+          <a:xfrm>
+            <a:off x="6205575" y="2252814"/>
+            <a:ext cx="2599867" cy="1916849"/>
+          </a:xfrm>
+          <a:prstGeom prst="rect">
+            <a:avLst/>
+          </a:prstGeom>
+          <a:solidFill>
+            <a:srgbClr val="FFFFFF"/>
+          </a:solidFill>
+          <a:ln w="19050">
+            <a:solidFill>
+              <a:srgbClr val="D20A2E"/>
+            </a:solidFill>
+          </a:ln>
+          <a:effectLst/>
+        </p:spPr>
+        <p:style>
+          <a:lnRef idx="1">
+            <a:schemeClr val="accent1"/>
+          </a:lnRef>
+          <a:fillRef idx="3">
+            <a:schemeClr val="accent1"/>
+          </a:fillRef>
+          <a:effectRef idx="2">
+            <a:schemeClr val="accent1"/>
+          </a:effectRef>
+          <a:fontRef idx="minor">
+            <a:schemeClr val="lt1"/>
+          </a:fontRef>
+        </p:style>
+        <p:txBody>
+          <a:bodyPr rtlCol="0" anchor="ctr" wrap="square"/>
+          <a:lstStyle/>
+          <a:p>
+            <a:pPr algn="ctr"/>
+          </a:p>
+        </p:txBody>
+      </p:sp>
+      <p:sp>
+        <p:nvSpPr>
+          <p:cNvPr id="17" name="TextBox 16"/>
+          <p:cNvSpPr txBox="1"/>
+          <p:nvPr/>
+        </p:nvSpPr>
+        <p:spPr>
+          <a:xfrm>
+            <a:off x="6406743" y="2453982"/>
+            <a:ext cx="2197531" cy="286893"/>
+          </a:xfrm>
+          <a:prstGeom prst="rect">
+            <a:avLst/>
+          </a:prstGeom>
+          <a:noFill/>
+        </p:spPr>
+        <p:txBody>
+          <a:bodyPr wrap="square" anchor="t" lIns="0" rIns="0" tIns="0" bIns="0">
+            <a:spAutoFit/>
+          </a:bodyPr>
+          <a:lstStyle/>
+          <a:p>
+            <a:pPr algn="l">
+              <a:lnSpc>
+                <a:spcPct val="100000"/>
+              </a:lnSpc>
+            </a:pPr>
+            <a:r>
+              <a:rPr sz="1350" b="1">
+                <a:solidFill>
+                  <a:srgbClr val="D20A2E"/>
+                </a:solidFill>
+                <a:latin typeface="Microsoft YaHei"/>
+              </a:rPr>
+              <a:t>源端速率</a:t>
+            </a:r>
+          </a:p>
+        </p:txBody>
+      </p:sp>
+      <p:sp>
+        <p:nvSpPr>
+          <p:cNvPr id="18" name="TextBox 17"/>
+          <p:cNvSpPr txBox="1"/>
+          <p:nvPr/>
+        </p:nvSpPr>
+        <p:spPr>
+          <a:xfrm>
+            <a:off x="6406743" y="2823171"/>
+            <a:ext cx="2197531" cy="1181900"/>
+          </a:xfrm>
+          <a:prstGeom prst="rect">
+            <a:avLst/>
+          </a:prstGeom>
+          <a:noFill/>
+        </p:spPr>
+        <p:txBody>
+          <a:bodyPr wrap="square" anchor="t" lIns="0" rIns="0" tIns="0" bIns="0">
+            <a:spAutoFit/>
+          </a:bodyPr>
+          <a:lstStyle/>
+          <a:p>
+            <a:pPr algn="l">
+              <a:lnSpc>
+                <a:spcPct val="102000"/>
+              </a:lnSpc>
+            </a:pPr>
+            <a:r>
+              <a:rPr sz="1050" b="1">
+                <a:solidFill>
+                  <a:srgbClr val="20242C"/>
+                </a:solidFill>
+                <a:latin typeface="Microsoft YaHei"/>
+              </a:rPr>
+              <a:t>代表</a:t>
+            </a:r>
+            <a:r>
+              <a:rPr sz="1050" b="0">
+                <a:solidFill>
+                  <a:srgbClr val="20242C"/>
+                </a:solidFill>
+                <a:latin typeface="Microsoft YaHei"/>
+              </a:rPr>
+              <a:t>：S1 族、S17 / S18 / S21 / S28。</a:t>
             </a:r>
           </a:p>
           <a:p>
@@ -12537,7 +13259,53 @@
               </a:spcBef>
             </a:pPr>
             <a:r>
-              <a:rPr sz="1200" b="1">
+              <a:rPr sz="1050" b="1">
+                <a:solidFill>
+                  <a:srgbClr val="20242C"/>
+                </a:solidFill>
+                <a:latin typeface="Microsoft YaHei"/>
+              </a:rPr>
+              <a:t>动手处</a:t>
+            </a:r>
+            <a:r>
+              <a:rPr sz="1050" b="0">
+                <a:solidFill>
+                  <a:srgbClr val="20242C"/>
+                </a:solidFill>
+                <a:latin typeface="Microsoft YaHei"/>
+              </a:rPr>
+              <a:t>：注入令牌桶。</a:t>
+            </a:r>
+          </a:p>
+          <a:p>
+            <a:pPr algn="l">
+              <a:lnSpc>
+                <a:spcPct val="102000"/>
+              </a:lnSpc>
+              <a:spcBef>
+                <a:spcPts val="600"/>
+              </a:spcBef>
+            </a:pPr>
+            <a:r>
+              <a:rPr sz="1050" b="1">
+                <a:solidFill>
+                  <a:srgbClr val="20242C"/>
+                </a:solidFill>
+                <a:latin typeface="Microsoft YaHei"/>
+              </a:rPr>
+              <a:t>优</a:t>
+            </a:r>
+            <a:r>
+              <a:rPr sz="1050" b="0">
+                <a:solidFill>
+                  <a:srgbClr val="20242C"/>
+                </a:solidFill>
+                <a:latin typeface="Microsoft YaHei"/>
+              </a:rPr>
+              <a:t>：直接控总量。</a:t>
+            </a:r>
+            <a:r>
+              <a:rPr sz="1050" b="1">
                 <a:solidFill>
                   <a:srgbClr val="20242C"/>
                 </a:solidFill>
@@ -12546,27 +13314,27 @@
               <a:t>缺</a:t>
             </a:r>
             <a:r>
-              <a:rPr sz="1200" b="0">
-                <a:solidFill>
-                  <a:srgbClr val="20242C"/>
-                </a:solidFill>
-                <a:latin typeface="Microsoft YaHei"/>
-              </a:rPr>
-              <a:t>：为空闲者保留的时隙直接浪费；帧长决定粒度。</a:t>
-            </a:r>
-          </a:p>
-        </p:txBody>
-      </p:sp>
-      <p:sp>
-        <p:nvSpPr>
-          <p:cNvPr id="16" name="Rectangle 15"/>
+              <a:rPr sz="1050" b="0">
+                <a:solidFill>
+                  <a:srgbClr val="20242C"/>
+                </a:solidFill>
+                <a:latin typeface="Microsoft YaHei"/>
+              </a:rPr>
+              <a:t>：闸门只能「扣住」，让出的槽被沿途吃掉。</a:t>
+            </a:r>
+          </a:p>
+        </p:txBody>
+      </p:sp>
+      <p:sp>
+        <p:nvSpPr>
+          <p:cNvPr id="19" name="Rectangle 18"/>
           <p:cNvSpPr/>
           <p:nvPr/>
         </p:nvSpPr>
         <p:spPr>
           <a:xfrm>
-            <a:off x="6205575" y="2422443"/>
-            <a:ext cx="2599867" cy="2616616"/>
+            <a:off x="9024899" y="2252814"/>
+            <a:ext cx="2599867" cy="1916849"/>
           </a:xfrm>
           <a:prstGeom prst="rect">
             <a:avLst/>
@@ -12605,14 +13373,14 @@
       </p:sp>
       <p:sp>
         <p:nvSpPr>
-          <p:cNvPr id="17" name="TextBox 16"/>
-          <p:cNvSpPr txBox="1"/>
-          <p:nvPr/>
-        </p:nvSpPr>
-        <p:spPr>
-          <a:xfrm>
-            <a:off x="6406743" y="2623611"/>
-            <a:ext cx="2197531" cy="314705"/>
+          <p:cNvPr id="20" name="TextBox 19"/>
+          <p:cNvSpPr txBox="1"/>
+          <p:nvPr/>
+        </p:nvSpPr>
+        <p:spPr>
+          <a:xfrm>
+            <a:off x="9226067" y="2553275"/>
+            <a:ext cx="2197531" cy="286893"/>
           </a:xfrm>
           <a:prstGeom prst="rect">
             <a:avLst/>
@@ -12631,27 +13399,27 @@
               </a:lnSpc>
             </a:pPr>
             <a:r>
-              <a:rPr sz="1500" b="1">
-                <a:solidFill>
-                  <a:srgbClr val="20242C"/>
-                </a:solidFill>
-                <a:latin typeface="Microsoft YaHei"/>
-              </a:rPr>
-              <a:t>⑦ 接收端驱动</a:t>
-            </a:r>
-          </a:p>
-        </p:txBody>
-      </p:sp>
-      <p:sp>
-        <p:nvSpPr>
-          <p:cNvPr id="18" name="TextBox 17"/>
-          <p:cNvSpPr txBox="1"/>
-          <p:nvPr/>
-        </p:nvSpPr>
-        <p:spPr>
-          <a:xfrm>
-            <a:off x="6406743" y="3020613"/>
-            <a:ext cx="2197531" cy="1853854"/>
+              <a:rPr sz="1350" b="1">
+                <a:solidFill>
+                  <a:srgbClr val="20242C"/>
+                </a:solidFill>
+                <a:latin typeface="Microsoft YaHei"/>
+              </a:rPr>
+              <a:t>源端窗口</a:t>
+            </a:r>
+          </a:p>
+        </p:txBody>
+      </p:sp>
+      <p:sp>
+        <p:nvSpPr>
+          <p:cNvPr id="21" name="TextBox 20"/>
+          <p:cNvSpPr txBox="1"/>
+          <p:nvPr/>
+        </p:nvSpPr>
+        <p:spPr>
+          <a:xfrm>
+            <a:off x="9226067" y="2922464"/>
+            <a:ext cx="2197531" cy="983315"/>
           </a:xfrm>
           <a:prstGeom prst="rect">
             <a:avLst/>
@@ -12670,7 +13438,7 @@
               </a:lnSpc>
             </a:pPr>
             <a:r>
-              <a:rPr sz="1200" b="1">
+              <a:rPr sz="1050" b="1">
                 <a:solidFill>
                   <a:srgbClr val="20242C"/>
                 </a:solidFill>
@@ -12679,13 +13447,13 @@
               <a:t>代表</a:t>
             </a:r>
             <a:r>
-              <a:rPr sz="1200" b="0">
-                <a:solidFill>
-                  <a:srgbClr val="20242C"/>
-                </a:solidFill>
-                <a:latin typeface="Microsoft YaHei"/>
-              </a:rPr>
-              <a:t>：Homa / NDP / pHost / ExpressPass。</a:t>
+              <a:rPr sz="1050" b="0">
+                <a:solidFill>
+                  <a:srgbClr val="20242C"/>
+                </a:solidFill>
+                <a:latin typeface="Microsoft YaHei"/>
+              </a:rPr>
+              <a:t>：S19 / S20。</a:t>
             </a:r>
           </a:p>
           <a:p>
@@ -12698,7 +13466,7 @@
               </a:spcBef>
             </a:pPr>
             <a:r>
-              <a:rPr sz="1200" b="1">
+              <a:rPr sz="1050" b="1">
                 <a:solidFill>
                   <a:srgbClr val="20242C"/>
                 </a:solidFill>
@@ -12707,13 +13475,13 @@
               <a:t>动手处</a:t>
             </a:r>
             <a:r>
-              <a:rPr sz="1200" b="0">
-                <a:solidFill>
-                  <a:srgbClr val="20242C"/>
-                </a:solidFill>
-                <a:latin typeface="Microsoft YaHei"/>
-              </a:rPr>
-              <a:t>：completer 授权。</a:t>
+              <a:rPr sz="1050" b="0">
+                <a:solidFill>
+                  <a:srgbClr val="20242C"/>
+                </a:solidFill>
+                <a:latin typeface="Microsoft YaHei"/>
+              </a:rPr>
+              <a:t>：在飞事务数。</a:t>
             </a:r>
           </a:p>
           <a:p>
@@ -12726,7 +13494,7 @@
               </a:spcBef>
             </a:pPr>
             <a:r>
-              <a:rPr sz="1200" b="1">
+              <a:rPr sz="1050" b="1">
                 <a:solidFill>
                   <a:srgbClr val="20242C"/>
                 </a:solidFill>
@@ -12735,26 +13503,16 @@
               <a:t>优</a:t>
             </a:r>
             <a:r>
-              <a:rPr sz="1200" b="0">
-                <a:solidFill>
-                  <a:srgbClr val="20242C"/>
-                </a:solidFill>
-                <a:latin typeface="Microsoft YaHei"/>
-              </a:rPr>
-              <a:t>：控制点在真正拥塞的下环侧；扣住授权不会造成气泡。</a:t>
-            </a:r>
-          </a:p>
-          <a:p>
-            <a:pPr algn="l">
-              <a:lnSpc>
-                <a:spcPct val="102000"/>
-              </a:lnSpc>
-              <a:spcBef>
-                <a:spcPts val="600"/>
-              </a:spcBef>
-            </a:pPr>
-            <a:r>
-              <a:rPr sz="1200" b="1">
+              <a:rPr sz="1050" b="0">
+                <a:solidFill>
+                  <a:srgbClr val="20242C"/>
+                </a:solidFill>
+                <a:latin typeface="Microsoft YaHei"/>
+              </a:rPr>
+              <a:t>：与 CHI 事务模型对齐。</a:t>
+            </a:r>
+            <a:r>
+              <a:rPr sz="1050" b="1">
                 <a:solidFill>
                   <a:srgbClr val="20242C"/>
                 </a:solidFill>
@@ -12763,27 +13521,27 @@
               <a:t>缺</a:t>
             </a:r>
             <a:r>
-              <a:rPr sz="1200" b="0">
-                <a:solidFill>
-                  <a:srgbClr val="20242C"/>
-                </a:solidFill>
-                <a:latin typeface="Microsoft YaHei"/>
-              </a:rPr>
-              <a:t>：要动事务层；拥塞不在接收端时无效。</a:t>
-            </a:r>
-          </a:p>
-        </p:txBody>
-      </p:sp>
-      <p:sp>
-        <p:nvSpPr>
-          <p:cNvPr id="19" name="Rectangle 18"/>
+              <a:rPr sz="1050" b="0">
+                <a:solidFill>
+                  <a:srgbClr val="20242C"/>
+                </a:solidFill>
+                <a:latin typeface="Microsoft YaHei"/>
+              </a:rPr>
+              <a:t>：不管瓶颈处先服务谁。</a:t>
+            </a:r>
+          </a:p>
+        </p:txBody>
+      </p:sp>
+      <p:sp>
+        <p:nvSpPr>
+          <p:cNvPr id="22" name="Rectangle 21"/>
           <p:cNvSpPr/>
           <p:nvPr/>
         </p:nvSpPr>
         <p:spPr>
           <a:xfrm>
-            <a:off x="9024899" y="2422443"/>
-            <a:ext cx="2599867" cy="2616616"/>
+            <a:off x="566928" y="4389120"/>
+            <a:ext cx="2599867" cy="1916849"/>
           </a:xfrm>
           <a:prstGeom prst="rect">
             <a:avLst/>
@@ -12822,14 +13580,14 @@
       </p:sp>
       <p:sp>
         <p:nvSpPr>
-          <p:cNvPr id="20" name="TextBox 19"/>
-          <p:cNvSpPr txBox="1"/>
-          <p:nvPr/>
-        </p:nvSpPr>
-        <p:spPr>
-          <a:xfrm>
-            <a:off x="9226067" y="2623611"/>
-            <a:ext cx="2197531" cy="314705"/>
+          <p:cNvPr id="23" name="TextBox 22"/>
+          <p:cNvSpPr txBox="1"/>
+          <p:nvPr/>
+        </p:nvSpPr>
+        <p:spPr>
+          <a:xfrm>
+            <a:off x="768096" y="4689580"/>
+            <a:ext cx="2197531" cy="286893"/>
           </a:xfrm>
           <a:prstGeom prst="rect">
             <a:avLst/>
@@ -12848,27 +13606,27 @@
               </a:lnSpc>
             </a:pPr>
             <a:r>
-              <a:rPr sz="1500" b="1">
-                <a:solidFill>
-                  <a:srgbClr val="20242C"/>
-                </a:solidFill>
-                <a:latin typeface="Microsoft YaHei"/>
-              </a:rPr>
-              <a:t>⑧ 显式速率反馈</a:t>
-            </a:r>
-          </a:p>
-        </p:txBody>
-      </p:sp>
-      <p:sp>
-        <p:nvSpPr>
-          <p:cNvPr id="21" name="TextBox 20"/>
-          <p:cNvSpPr txBox="1"/>
-          <p:nvPr/>
-        </p:nvSpPr>
-        <p:spPr>
-          <a:xfrm>
-            <a:off x="9226067" y="3020613"/>
-            <a:ext cx="2197531" cy="1853854"/>
+              <a:rPr sz="1350" b="1">
+                <a:solidFill>
+                  <a:srgbClr val="20242C"/>
+                </a:solidFill>
+                <a:latin typeface="Microsoft YaHei"/>
+              </a:rPr>
+              <a:t>环上仲裁</a:t>
+            </a:r>
+          </a:p>
+        </p:txBody>
+      </p:sp>
+      <p:sp>
+        <p:nvSpPr>
+          <p:cNvPr id="24" name="TextBox 23"/>
+          <p:cNvSpPr txBox="1"/>
+          <p:nvPr/>
+        </p:nvSpPr>
+        <p:spPr>
+          <a:xfrm>
+            <a:off x="768096" y="5058769"/>
+            <a:ext cx="2197531" cy="983315"/>
           </a:xfrm>
           <a:prstGeom prst="rect">
             <a:avLst/>
@@ -12887,7 +13645,7 @@
               </a:lnSpc>
             </a:pPr>
             <a:r>
-              <a:rPr sz="1200" b="1">
+              <a:rPr sz="1050" b="1">
                 <a:solidFill>
                   <a:srgbClr val="20242C"/>
                 </a:solidFill>
@@ -12896,13 +13654,13 @@
               <a:t>代表</a:t>
             </a:r>
             <a:r>
-              <a:rPr sz="1200" b="0">
-                <a:solidFill>
-                  <a:srgbClr val="20242C"/>
-                </a:solidFill>
-                <a:latin typeface="Microsoft YaHei"/>
-              </a:rPr>
-              <a:t>：XCP / RCP / HPCC。</a:t>
+              <a:rPr sz="1050" b="0">
+                <a:solidFill>
+                  <a:srgbClr val="20242C"/>
+                </a:solidFill>
+                <a:latin typeface="Microsoft YaHei"/>
+              </a:rPr>
+              <a:t>：I-tag / S22。</a:t>
             </a:r>
           </a:p>
           <a:p>
@@ -12915,7 +13673,7 @@
               </a:spcBef>
             </a:pPr>
             <a:r>
-              <a:rPr sz="1200" b="1">
+              <a:rPr sz="1050" b="1">
                 <a:solidFill>
                   <a:srgbClr val="20242C"/>
                 </a:solidFill>
@@ -12924,13 +13682,13 @@
               <a:t>动手处</a:t>
             </a:r>
             <a:r>
-              <a:rPr sz="1200" b="0">
-                <a:solidFill>
-                  <a:srgbClr val="20242C"/>
-                </a:solidFill>
-                <a:latin typeface="Microsoft YaHei"/>
-              </a:rPr>
-              <a:t>：瓶颈自己算速率并回传。</a:t>
+              <a:rPr sz="1050" b="0">
+                <a:solidFill>
+                  <a:srgbClr val="20242C"/>
+                </a:solidFill>
+                <a:latin typeface="Microsoft YaHei"/>
+              </a:rPr>
+              <a:t>：环上谁先用这一拍。</a:t>
             </a:r>
           </a:p>
           <a:p>
@@ -12943,7 +13701,7 @@
               </a:spcBef>
             </a:pPr>
             <a:r>
-              <a:rPr sz="1200" b="1">
+              <a:rPr sz="1050" b="1">
                 <a:solidFill>
                   <a:srgbClr val="20242C"/>
                 </a:solidFill>
@@ -12952,26 +13710,16 @@
               <a:t>优</a:t>
             </a:r>
             <a:r>
-              <a:rPr sz="1200" b="0">
-                <a:solidFill>
-                  <a:srgbClr val="20242C"/>
-                </a:solidFill>
-                <a:latin typeface="Microsoft YaHei"/>
-              </a:rPr>
-              <a:t>：源端不必猜；同一 hop 上所有核拿到同一个数，天然公平。</a:t>
-            </a:r>
-          </a:p>
-          <a:p>
-            <a:pPr algn="l">
-              <a:lnSpc>
-                <a:spcPct val="102000"/>
-              </a:lnSpc>
-              <a:spcBef>
-                <a:spcPts val="600"/>
-              </a:spcBef>
-            </a:pPr>
-            <a:r>
-              <a:rPr sz="1200" b="1">
+              <a:rPr sz="1050" b="0">
+                <a:solidFill>
+                  <a:srgbClr val="20242C"/>
+                </a:solidFill>
+                <a:latin typeface="Microsoft YaHei"/>
+              </a:rPr>
+              <a:t>：控制点就在拥塞 hop。</a:t>
+            </a:r>
+            <a:r>
+              <a:rPr sz="1050" b="1">
                 <a:solidFill>
                   <a:srgbClr val="20242C"/>
                 </a:solidFill>
@@ -12980,36 +13728,38 @@
               <a:t>缺</a:t>
             </a:r>
             <a:r>
-              <a:rPr sz="1200" b="0">
-                <a:solidFill>
-                  <a:srgbClr val="20242C"/>
-                </a:solidFill>
-                <a:latin typeface="Microsoft YaHei"/>
-              </a:rPr>
-              <a:t>：反馈信息量最大，总线最宽；收敛要多窗。</a:t>
-            </a:r>
-          </a:p>
-        </p:txBody>
-      </p:sp>
-      <p:sp>
-        <p:nvSpPr>
-          <p:cNvPr id="22" name="Rectangle 21"/>
+              <a:rPr sz="1050" b="0">
+                <a:solidFill>
+                  <a:srgbClr val="20242C"/>
+                </a:solidFill>
+                <a:latin typeface="Microsoft YaHei"/>
+              </a:rPr>
+              <a:t>：要动仲裁器。</a:t>
+            </a:r>
+          </a:p>
+        </p:txBody>
+      </p:sp>
+      <p:sp>
+        <p:nvSpPr>
+          <p:cNvPr id="25" name="Rectangle 24"/>
           <p:cNvSpPr/>
           <p:nvPr/>
         </p:nvSpPr>
         <p:spPr>
           <a:xfrm>
-            <a:off x="566928" y="5468112"/>
-            <a:ext cx="11057839" cy="859536"/>
+            <a:off x="3386251" y="4389120"/>
+            <a:ext cx="2599867" cy="1916849"/>
           </a:xfrm>
           <a:prstGeom prst="rect">
             <a:avLst/>
           </a:prstGeom>
           <a:solidFill>
-            <a:srgbClr val="D20A2E"/>
+            <a:srgbClr val="FFFFFF"/>
           </a:solidFill>
-          <a:ln>
-            <a:noFill/>
+          <a:ln w="12700">
+            <a:solidFill>
+              <a:srgbClr val="DCE3EA"/>
+            </a:solidFill>
           </a:ln>
           <a:effectLst/>
         </p:spPr>
@@ -13037,46 +13787,375 @@
       </p:sp>
       <p:sp>
         <p:nvSpPr>
-          <p:cNvPr id="23" name="TextBox 22"/>
-          <p:cNvSpPr txBox="1"/>
-          <p:nvPr/>
-        </p:nvSpPr>
-        <p:spPr>
-          <a:xfrm>
-            <a:off x="877824" y="5559552"/>
-            <a:ext cx="10436047" cy="676656"/>
-          </a:xfrm>
-          <a:prstGeom prst="rect">
-            <a:avLst/>
-          </a:prstGeom>
-          <a:noFill/>
-        </p:spPr>
-        <p:txBody>
-          <a:bodyPr wrap="square" anchor="ctr" lIns="0" rIns="0" tIns="0" bIns="0">
-            <a:spAutoFit/>
-          </a:bodyPr>
-          <a:lstStyle/>
-          <a:p>
-            <a:pPr algn="l">
-              <a:lnSpc>
-                <a:spcPct val="104000"/>
-              </a:lnSpc>
-            </a:pPr>
-            <a:r>
-              <a:rPr sz="1300" b="0">
-                <a:solidFill>
-                  <a:srgbClr val="FFFFFF"/>
-                </a:solidFill>
-                <a:latin typeface="Microsoft YaHei"/>
-              </a:rPr>
-              <a:t>第二个维度是「听什么信号」：本地观测 / 时延 / ECN / 显式等级 / 显式速率，与控制点正交 —— 同一执行器换个信号就是另一个方案（S17↔S18、S19↔S20）。</a:t>
-            </a:r>
-          </a:p>
-        </p:txBody>
-      </p:sp>
-      <p:sp>
-        <p:nvSpPr>
-          <p:cNvPr id="24" name="TextBox 23"/>
+          <p:cNvPr id="26" name="TextBox 25"/>
+          <p:cNvSpPr txBox="1"/>
+          <p:nvPr/>
+        </p:nvSpPr>
+        <p:spPr>
+          <a:xfrm>
+            <a:off x="3587419" y="4590288"/>
+            <a:ext cx="2197531" cy="286893"/>
+          </a:xfrm>
+          <a:prstGeom prst="rect">
+            <a:avLst/>
+          </a:prstGeom>
+          <a:noFill/>
+        </p:spPr>
+        <p:txBody>
+          <a:bodyPr wrap="square" anchor="t" lIns="0" rIns="0" tIns="0" bIns="0">
+            <a:spAutoFit/>
+          </a:bodyPr>
+          <a:lstStyle/>
+          <a:p>
+            <a:pPr algn="l">
+              <a:lnSpc>
+                <a:spcPct val="100000"/>
+              </a:lnSpc>
+            </a:pPr>
+            <a:r>
+              <a:rPr sz="1350" b="1">
+                <a:solidFill>
+                  <a:srgbClr val="20242C"/>
+                </a:solidFill>
+                <a:latin typeface="Microsoft YaHei"/>
+              </a:rPr>
+              <a:t>预约调度</a:t>
+            </a:r>
+          </a:p>
+        </p:txBody>
+      </p:sp>
+      <p:sp>
+        <p:nvSpPr>
+          <p:cNvPr id="27" name="TextBox 26"/>
+          <p:cNvSpPr txBox="1"/>
+          <p:nvPr/>
+        </p:nvSpPr>
+        <p:spPr>
+          <a:xfrm>
+            <a:off x="3587419" y="4959477"/>
+            <a:ext cx="2197531" cy="1181900"/>
+          </a:xfrm>
+          <a:prstGeom prst="rect">
+            <a:avLst/>
+          </a:prstGeom>
+          <a:noFill/>
+        </p:spPr>
+        <p:txBody>
+          <a:bodyPr wrap="square" anchor="t" lIns="0" rIns="0" tIns="0" bIns="0">
+            <a:spAutoFit/>
+          </a:bodyPr>
+          <a:lstStyle/>
+          <a:p>
+            <a:pPr algn="l">
+              <a:lnSpc>
+                <a:spcPct val="102000"/>
+              </a:lnSpc>
+            </a:pPr>
+            <a:r>
+              <a:rPr sz="1050" b="1">
+                <a:solidFill>
+                  <a:srgbClr val="20242C"/>
+                </a:solidFill>
+                <a:latin typeface="Microsoft YaHei"/>
+              </a:rPr>
+              <a:t>代表</a:t>
+            </a:r>
+            <a:r>
+              <a:rPr sz="1050" b="0">
+                <a:solidFill>
+                  <a:srgbClr val="20242C"/>
+                </a:solidFill>
+                <a:latin typeface="Microsoft YaHei"/>
+              </a:rPr>
+              <a:t>：S29（TDMA / Fastpass 类）。</a:t>
+            </a:r>
+          </a:p>
+          <a:p>
+            <a:pPr algn="l">
+              <a:lnSpc>
+                <a:spcPct val="102000"/>
+              </a:lnSpc>
+              <a:spcBef>
+                <a:spcPts val="600"/>
+              </a:spcBef>
+            </a:pPr>
+            <a:r>
+              <a:rPr sz="1050" b="1">
+                <a:solidFill>
+                  <a:srgbClr val="20242C"/>
+                </a:solidFill>
+                <a:latin typeface="Microsoft YaHei"/>
+              </a:rPr>
+              <a:t>动手处</a:t>
+            </a:r>
+            <a:r>
+              <a:rPr sz="1050" b="0">
+                <a:solidFill>
+                  <a:srgbClr val="20242C"/>
+                </a:solidFill>
+                <a:latin typeface="Microsoft YaHei"/>
+              </a:rPr>
+              <a:t>：预分配时隙。</a:t>
+            </a:r>
+          </a:p>
+          <a:p>
+            <a:pPr algn="l">
+              <a:lnSpc>
+                <a:spcPct val="102000"/>
+              </a:lnSpc>
+              <a:spcBef>
+                <a:spcPts val="600"/>
+              </a:spcBef>
+            </a:pPr>
+            <a:r>
+              <a:rPr sz="1050" b="1">
+                <a:solidFill>
+                  <a:srgbClr val="20242C"/>
+                </a:solidFill>
+                <a:latin typeface="Microsoft YaHei"/>
+              </a:rPr>
+              <a:t>优</a:t>
+            </a:r>
+            <a:r>
+              <a:rPr sz="1050" b="0">
+                <a:solidFill>
+                  <a:srgbClr val="20242C"/>
+                </a:solidFill>
+                <a:latin typeface="Microsoft YaHei"/>
+              </a:rPr>
+              <a:t>：拥塞不形成。</a:t>
+            </a:r>
+            <a:r>
+              <a:rPr sz="1050" b="1">
+                <a:solidFill>
+                  <a:srgbClr val="20242C"/>
+                </a:solidFill>
+                <a:latin typeface="Microsoft YaHei"/>
+              </a:rPr>
+              <a:t>缺</a:t>
+            </a:r>
+            <a:r>
+              <a:rPr sz="1050" b="0">
+                <a:solidFill>
+                  <a:srgbClr val="20242C"/>
+                </a:solidFill>
+                <a:latin typeface="Microsoft YaHei"/>
+              </a:rPr>
+              <a:t>：空闲时隙会浪费（S29 用 1 bit 回收）。</a:t>
+            </a:r>
+          </a:p>
+        </p:txBody>
+      </p:sp>
+      <p:sp>
+        <p:nvSpPr>
+          <p:cNvPr id="28" name="Rectangle 27"/>
+          <p:cNvSpPr/>
+          <p:nvPr/>
+        </p:nvSpPr>
+        <p:spPr>
+          <a:xfrm>
+            <a:off x="6205575" y="4389120"/>
+            <a:ext cx="2599867" cy="1916849"/>
+          </a:xfrm>
+          <a:prstGeom prst="rect">
+            <a:avLst/>
+          </a:prstGeom>
+          <a:solidFill>
+            <a:srgbClr val="FFFFFF"/>
+          </a:solidFill>
+          <a:ln w="12700">
+            <a:solidFill>
+              <a:srgbClr val="DCE3EA"/>
+            </a:solidFill>
+          </a:ln>
+          <a:effectLst/>
+        </p:spPr>
+        <p:style>
+          <a:lnRef idx="1">
+            <a:schemeClr val="accent1"/>
+          </a:lnRef>
+          <a:fillRef idx="3">
+            <a:schemeClr val="accent1"/>
+          </a:fillRef>
+          <a:effectRef idx="2">
+            <a:schemeClr val="accent1"/>
+          </a:effectRef>
+          <a:fontRef idx="minor">
+            <a:schemeClr val="lt1"/>
+          </a:fontRef>
+        </p:style>
+        <p:txBody>
+          <a:bodyPr rtlCol="0" anchor="ctr" wrap="square"/>
+          <a:lstStyle/>
+          <a:p>
+            <a:pPr algn="ctr"/>
+          </a:p>
+        </p:txBody>
+      </p:sp>
+      <p:sp>
+        <p:nvSpPr>
+          <p:cNvPr id="29" name="TextBox 28"/>
+          <p:cNvSpPr txBox="1"/>
+          <p:nvPr/>
+        </p:nvSpPr>
+        <p:spPr>
+          <a:xfrm>
+            <a:off x="6406743" y="4689580"/>
+            <a:ext cx="2197531" cy="286893"/>
+          </a:xfrm>
+          <a:prstGeom prst="rect">
+            <a:avLst/>
+          </a:prstGeom>
+          <a:noFill/>
+        </p:spPr>
+        <p:txBody>
+          <a:bodyPr wrap="square" anchor="t" lIns="0" rIns="0" tIns="0" bIns="0">
+            <a:spAutoFit/>
+          </a:bodyPr>
+          <a:lstStyle/>
+          <a:p>
+            <a:pPr algn="l">
+              <a:lnSpc>
+                <a:spcPct val="100000"/>
+              </a:lnSpc>
+            </a:pPr>
+            <a:r>
+              <a:rPr sz="1350" b="1">
+                <a:solidFill>
+                  <a:srgbClr val="20242C"/>
+                </a:solidFill>
+                <a:latin typeface="Microsoft YaHei"/>
+              </a:rPr>
+              <a:t>接收端授权</a:t>
+            </a:r>
+          </a:p>
+        </p:txBody>
+      </p:sp>
+      <p:sp>
+        <p:nvSpPr>
+          <p:cNvPr id="30" name="TextBox 29"/>
+          <p:cNvSpPr txBox="1"/>
+          <p:nvPr/>
+        </p:nvSpPr>
+        <p:spPr>
+          <a:xfrm>
+            <a:off x="6406743" y="5058769"/>
+            <a:ext cx="2197531" cy="983315"/>
+          </a:xfrm>
+          <a:prstGeom prst="rect">
+            <a:avLst/>
+          </a:prstGeom>
+          <a:noFill/>
+        </p:spPr>
+        <p:txBody>
+          <a:bodyPr wrap="square" anchor="t" lIns="0" rIns="0" tIns="0" bIns="0">
+            <a:spAutoFit/>
+          </a:bodyPr>
+          <a:lstStyle/>
+          <a:p>
+            <a:pPr algn="l">
+              <a:lnSpc>
+                <a:spcPct val="102000"/>
+              </a:lnSpc>
+            </a:pPr>
+            <a:r>
+              <a:rPr sz="1050" b="1">
+                <a:solidFill>
+                  <a:srgbClr val="20242C"/>
+                </a:solidFill>
+                <a:latin typeface="Microsoft YaHei"/>
+              </a:rPr>
+              <a:t>代表</a:t>
+            </a:r>
+            <a:r>
+              <a:rPr sz="1050" b="0">
+                <a:solidFill>
+                  <a:srgbClr val="20242C"/>
+                </a:solidFill>
+                <a:latin typeface="Microsoft YaHei"/>
+              </a:rPr>
+              <a:t>：S16（Homa / NDP 类）。</a:t>
+            </a:r>
+          </a:p>
+          <a:p>
+            <a:pPr algn="l">
+              <a:lnSpc>
+                <a:spcPct val="102000"/>
+              </a:lnSpc>
+              <a:spcBef>
+                <a:spcPts val="600"/>
+              </a:spcBef>
+            </a:pPr>
+            <a:r>
+              <a:rPr sz="1050" b="1">
+                <a:solidFill>
+                  <a:srgbClr val="20242C"/>
+                </a:solidFill>
+                <a:latin typeface="Microsoft YaHei"/>
+              </a:rPr>
+              <a:t>动手处</a:t>
+            </a:r>
+            <a:r>
+              <a:rPr sz="1050" b="0">
+                <a:solidFill>
+                  <a:srgbClr val="20242C"/>
+                </a:solidFill>
+                <a:latin typeface="Microsoft YaHei"/>
+              </a:rPr>
+              <a:t>：completer 的 DBIDResp。</a:t>
+            </a:r>
+          </a:p>
+          <a:p>
+            <a:pPr algn="l">
+              <a:lnSpc>
+                <a:spcPct val="102000"/>
+              </a:lnSpc>
+              <a:spcBef>
+                <a:spcPts val="600"/>
+              </a:spcBef>
+            </a:pPr>
+            <a:r>
+              <a:rPr sz="1050" b="1">
+                <a:solidFill>
+                  <a:srgbClr val="20242C"/>
+                </a:solidFill>
+                <a:latin typeface="Microsoft YaHei"/>
+              </a:rPr>
+              <a:t>优</a:t>
+            </a:r>
+            <a:r>
+              <a:rPr sz="1050" b="0">
+                <a:solidFill>
+                  <a:srgbClr val="20242C"/>
+                </a:solidFill>
+                <a:latin typeface="Microsoft YaHei"/>
+              </a:rPr>
+              <a:t>：控制点在真正拥塞的下环侧。</a:t>
+            </a:r>
+            <a:r>
+              <a:rPr sz="1050" b="1">
+                <a:solidFill>
+                  <a:srgbClr val="20242C"/>
+                </a:solidFill>
+                <a:latin typeface="Microsoft YaHei"/>
+              </a:rPr>
+              <a:t>缺</a:t>
+            </a:r>
+            <a:r>
+              <a:rPr sz="1050" b="0">
+                <a:solidFill>
+                  <a:srgbClr val="20242C"/>
+                </a:solidFill>
+                <a:latin typeface="Microsoft YaHei"/>
+              </a:rPr>
+              <a:t>：要动事务层。</a:t>
+            </a:r>
+          </a:p>
+        </p:txBody>
+      </p:sp>
+      <p:sp>
+        <p:nvSpPr>
+          <p:cNvPr id="31" name="TextBox 30"/>
           <p:cNvSpPr txBox="1"/>
           <p:nvPr/>
         </p:nvSpPr>
@@ -13443,7 +14522,7 @@
                 </a:solidFill>
                 <a:latin typeface="Microsoft YaHei"/>
               </a:rPr>
-              <a:t>列 = 控制点（决定天花板）；行 = 拥塞信号（决定盲区）。灰底 = 本研究已有方案，红框 = S1 所在格，绿框 = 本次补齐的四类。</a:t>
+              <a:t>列 = 控制点 = 第 18 页（决定天花板）；行 = 拥塞信号 = 第 17 页（决定盲区）。灰底 = 已有方案，红框 = S1，绿框 = 本次补齐。</a:t>
             </a:r>
           </a:p>
         </p:txBody>
@@ -13541,8 +14620,8 @@
         </p:nvSpPr>
         <p:spPr>
           <a:xfrm>
-            <a:off x="8723376" y="1630830"/>
-            <a:ext cx="2718511" cy="481583"/>
+            <a:off x="8723376" y="1704257"/>
+            <a:ext cx="2718511" cy="259080"/>
           </a:xfrm>
           <a:prstGeom prst="rect">
             <a:avLst/>
@@ -13567,7 +14646,7 @@
                 </a:solidFill>
                 <a:latin typeface="Microsoft YaHei"/>
               </a:rPr>
-              <a:t>S1 = 源端限速 · 速率型 × 显式拥塞等级</a:t>
+              <a:t>S1 = 源端速率 × 显式等级</a:t>
             </a:r>
           </a:p>
         </p:txBody>
@@ -13580,8 +14659,8 @@
         </p:nvSpPr>
         <p:spPr>
           <a:xfrm>
-            <a:off x="8723376" y="2194710"/>
-            <a:ext cx="2718511" cy="755812"/>
+            <a:off x="8723376" y="2045633"/>
+            <a:ext cx="2718511" cy="831463"/>
           </a:xfrm>
           <a:prstGeom prst="rect">
             <a:avLst/>
@@ -13600,7 +14679,7 @@
               </a:lnSpc>
             </a:pPr>
             <a:r>
-              <a:rPr sz="850" b="1">
+              <a:rPr sz="950" b="1">
                 <a:solidFill>
                   <a:srgbClr val="20242C"/>
                 </a:solidFill>
@@ -13609,13 +14688,13 @@
               <a:t>控制点</a:t>
             </a:r>
             <a:r>
-              <a:rPr sz="850" b="0">
-                <a:solidFill>
-                  <a:srgbClr val="20242C"/>
-                </a:solidFill>
-                <a:latin typeface="Microsoft YaHei"/>
-              </a:rPr>
-              <a:t>：每核每窗的整型注入预算，出口是令牌桶闸门 —— 第 ③ 类。</a:t>
+              <a:rPr sz="950" b="0">
+                <a:solidFill>
+                  <a:srgbClr val="20242C"/>
+                </a:solidFill>
+                <a:latin typeface="Microsoft YaHei"/>
+              </a:rPr>
+              <a:t>：「源端速率」列 —— 每核每窗的整型注入预算，出口是令牌桶。</a:t>
             </a:r>
           </a:p>
           <a:p>
@@ -13628,7 +14707,7 @@
               </a:spcBef>
             </a:pPr>
             <a:r>
-              <a:rPr sz="850" b="1">
+              <a:rPr sz="950" b="1">
                 <a:solidFill>
                   <a:srgbClr val="20242C"/>
                 </a:solidFill>
@@ -13637,13 +14716,13 @@
               <a:t>信号</a:t>
             </a:r>
             <a:r>
-              <a:rPr sz="850" b="0">
-                <a:solidFill>
-                  <a:srgbClr val="20242C"/>
-                </a:solidFill>
-                <a:latin typeface="Microsoft YaHei"/>
-              </a:rPr>
-              <a:t>：3 bit 拥塞等级，专用广播总线，固定 30 拍 —— 是「等级」而不是「速率」。同格还有 S1T 与 S15。</a:t>
+              <a:rPr sz="950" b="0">
+                <a:solidFill>
+                  <a:srgbClr val="20242C"/>
+                </a:solidFill>
+                <a:latin typeface="Microsoft YaHei"/>
+              </a:rPr>
+              <a:t>：「显式等级」行 —— 3 bit 拥塞等级，专用广播总线，固定 30 拍。同格还有 S1T 与 S15。</a:t>
             </a:r>
           </a:p>
         </p:txBody>
@@ -17306,7 +18385,7 @@
                 </a:solidFill>
                 <a:latin typeface="Microsoft YaHei"/>
               </a:rPr>
-              <a:t>八类里原本没有代表方案的类数</a:t>
+              <a:t>二维表里原本空着的格子数</a:t>
             </a:r>
           </a:p>
           <a:p>
@@ -19612,8 +20691,8 @@
         </p:blipFill>
         <p:spPr>
           <a:xfrm>
-            <a:off x="566928" y="1673215"/>
-            <a:ext cx="7452360" cy="3566433"/>
+            <a:off x="566928" y="1609250"/>
+            <a:ext cx="7452360" cy="3694362"/>
           </a:xfrm>
           <a:prstGeom prst="rect">
             <a:avLst/>
@@ -19628,7 +20707,7 @@
         </p:nvSpPr>
         <p:spPr>
           <a:xfrm>
-            <a:off x="566928" y="5349376"/>
+            <a:off x="566928" y="5413341"/>
             <a:ext cx="7452360" cy="384048"/>
           </a:xfrm>
           <a:prstGeom prst="rect">
@@ -19654,7 +20733,7 @@
                 </a:solidFill>
                 <a:latin typeface="Microsoft YaHei"/>
               </a:rPr>
-              <a:t>红线 = 每个公平目标下的理论最高带宽；点 = 官方 K = 20000 实测。其中 I-tag 点只是 S0 的 t_inj / hold 调参，不是独立机制。</a:t>
+              <a:t>红线 = 每个公平目标下的理论最高带宽；13 个点 = 官方 K = 20000 全部实测方案（含 S26–S29）。I-tag 只是 S0 的 t_inj / hold 调参，不是独立机制。</a:t>
             </a:r>
           </a:p>
         </p:txBody>
@@ -19707,7 +20786,7 @@
         <p:spPr>
           <a:xfrm>
             <a:off x="8403336" y="1408176"/>
-            <a:ext cx="3221431" cy="1473060"/>
+            <a:ext cx="3221431" cy="2125856"/>
           </a:xfrm>
           <a:prstGeom prst="rect">
             <a:avLst/>
@@ -19752,7 +20831,7 @@
         </p:nvSpPr>
         <p:spPr>
           <a:xfrm>
-            <a:off x="8586215" y="1591056"/>
+            <a:off x="8586215" y="1689654"/>
             <a:ext cx="2855671" cy="259080"/>
           </a:xfrm>
           <a:prstGeom prst="rect">
@@ -19791,8 +20870,8 @@
         </p:nvSpPr>
         <p:spPr>
           <a:xfrm>
-            <a:off x="8586215" y="1932432"/>
-            <a:ext cx="2855671" cy="1172992"/>
+            <a:off x="8586215" y="2031030"/>
+            <a:ext cx="2855671" cy="1258100"/>
           </a:xfrm>
           <a:prstGeom prst="rect">
             <a:avLst/>
@@ -19811,7 +20890,7 @@
               </a:lnSpc>
             </a:pPr>
             <a:r>
-              <a:rPr sz="800" b="1">
+              <a:rPr sz="1050" b="1">
                 <a:solidFill>
                   <a:srgbClr val="20242C"/>
                 </a:solidFill>
@@ -19820,13 +20899,13 @@
               <a:t>λc</a:t>
             </a:r>
             <a:r>
-              <a:rPr sz="800" b="0">
-                <a:solidFill>
-                  <a:srgbClr val="20242C"/>
-                </a:solidFill>
-                <a:latin typeface="Microsoft YaHei"/>
-              </a:rPr>
-              <a:t>：第 c 个核的事务速率；十个核就是十个待选择的速率。</a:t>
+              <a:rPr sz="1050" b="0">
+                <a:solidFill>
+                  <a:srgbClr val="20242C"/>
+                </a:solidFill>
+                <a:latin typeface="Microsoft YaHei"/>
+              </a:rPr>
+              <a:t>：第 c 个核的事务速率。</a:t>
             </a:r>
           </a:p>
           <a:p>
@@ -19839,22 +20918,22 @@
               </a:spcBef>
             </a:pPr>
             <a:r>
-              <a:rPr sz="800" b="1">
-                <a:solidFill>
-                  <a:srgbClr val="20242C"/>
-                </a:solidFill>
-                <a:latin typeface="Microsoft YaHei"/>
-              </a:rPr>
-              <a:t>链路占用表</a:t>
-            </a:r>
-            <a:r>
-              <a:rPr sz="800" b="0">
-                <a:solidFill>
-                  <a:srgbClr val="20242C"/>
-                </a:solidFill>
-                <a:latin typeface="Microsoft YaHei"/>
-              </a:rPr>
-              <a:t>：每个核发一笔事务，会占哪些链路、各占几拍。路由和握手固定后，这张表也是固定的。</a:t>
+              <a:rPr sz="1050" b="1">
+                <a:solidFill>
+                  <a:srgbClr val="20242C"/>
+                </a:solidFill>
+                <a:latin typeface="Microsoft YaHei"/>
+              </a:rPr>
+              <a:t>占用表</a:t>
+            </a:r>
+            <a:r>
+              <a:rPr sz="1050" b="0">
+                <a:solidFill>
+                  <a:srgbClr val="20242C"/>
+                </a:solidFill>
+                <a:latin typeface="Microsoft YaHei"/>
+              </a:rPr>
+              <a:t>：每笔事务占哪些链路、各几拍；路由固定后这张表就固定。</a:t>
             </a:r>
           </a:p>
           <a:p>
@@ -19867,7 +20946,7 @@
               </a:spcBef>
             </a:pPr>
             <a:r>
-              <a:rPr sz="800" b="1">
+              <a:rPr sz="1050" b="1">
                 <a:solidFill>
                   <a:srgbClr val="20242C"/>
                 </a:solidFill>
@@ -19876,13 +20955,13 @@
               <a:t>J</a:t>
             </a:r>
             <a:r>
-              <a:rPr sz="800" b="0">
-                <a:solidFill>
-                  <a:srgbClr val="20242C"/>
-                </a:solidFill>
-                <a:latin typeface="Microsoft YaHei"/>
-              </a:rPr>
-              <a:t>：本次要求的最低 Jain 公平度，例如 0.95。</a:t>
+              <a:rPr sz="1050" b="0">
+                <a:solidFill>
+                  <a:srgbClr val="20242C"/>
+                </a:solidFill>
+                <a:latin typeface="Microsoft YaHei"/>
+              </a:rPr>
+              <a:t>：要求的最低 100 拍 Jain。</a:t>
             </a:r>
           </a:p>
           <a:p>
@@ -19895,7 +20974,7 @@
               </a:spcBef>
             </a:pPr>
             <a:r>
-              <a:rPr sz="800" b="1">
+              <a:rPr sz="1050" b="1">
                 <a:solidFill>
                   <a:srgbClr val="20242C"/>
                 </a:solidFill>
@@ -19904,13 +20983,13 @@
               <a:t>R(J)</a:t>
             </a:r>
             <a:r>
-              <a:rPr sz="800" b="0">
-                <a:solidFill>
-                  <a:srgbClr val="20242C"/>
-                </a:solidFill>
-                <a:latin typeface="Microsoft YaHei"/>
-              </a:rPr>
-              <a:t>：在公平度不低于 J 的前提下，所有核合计最多能跑多快。</a:t>
+              <a:rPr sz="1050" b="0">
+                <a:solidFill>
+                  <a:srgbClr val="20242C"/>
+                </a:solidFill>
+                <a:latin typeface="Microsoft YaHei"/>
+              </a:rPr>
+              <a:t>：公平度 ≥ J 时的最高总带宽。</a:t>
             </a:r>
           </a:p>
         </p:txBody>
@@ -19923,8 +21002,8 @@
         </p:nvSpPr>
         <p:spPr>
           <a:xfrm>
-            <a:off x="8403336" y="3027540"/>
-            <a:ext cx="3221431" cy="1043418"/>
+            <a:off x="8403336" y="3680336"/>
+            <a:ext cx="3221431" cy="1375554"/>
           </a:xfrm>
           <a:prstGeom prst="rect">
             <a:avLst/>
@@ -19967,8 +21046,8 @@
         </p:nvSpPr>
         <p:spPr>
           <a:xfrm>
-            <a:off x="8714232" y="3118980"/>
-            <a:ext cx="2599639" cy="860538"/>
+            <a:off x="8714232" y="3771776"/>
+            <a:ext cx="2599639" cy="1192674"/>
           </a:xfrm>
           <a:prstGeom prst="rect">
             <a:avLst/>
@@ -19987,13 +21066,13 @@
               </a:lnSpc>
             </a:pPr>
             <a:r>
-              <a:rPr sz="1100" b="0">
+              <a:rPr sz="1200" b="0">
                 <a:solidFill>
                   <a:srgbClr val="FFFFFF"/>
                 </a:solidFill>
                 <a:latin typeface="Microsoft YaHei"/>
               </a:rPr>
-              <a:t>一个红线点怎么来：先固定 J，再尝试十个核的所有速率组合；任何链路都不能超过每拍 1 flit，最后保留总带宽最高的组合。</a:t>
+              <a:t>红线点：固定 J，枚举十个核的速率组合，链路每拍 ≤ 1 flit，取总带宽最高的那个。J 从低到高逐点重算即得整条红线（凸优化全局上界，不是对仿真点拟合）。</a:t>
             </a:r>
           </a:p>
         </p:txBody>
@@ -20006,8 +21085,8 @@
         </p:nvSpPr>
         <p:spPr>
           <a:xfrm>
-            <a:off x="8403336" y="4217262"/>
-            <a:ext cx="3221431" cy="941122"/>
+            <a:off x="8403336" y="5202194"/>
+            <a:ext cx="3221431" cy="1125453"/>
           </a:xfrm>
           <a:prstGeom prst="rect">
             <a:avLst/>
@@ -20050,8 +21129,8 @@
         </p:nvSpPr>
         <p:spPr>
           <a:xfrm>
-            <a:off x="8714232" y="4308702"/>
-            <a:ext cx="2599639" cy="758242"/>
+            <a:off x="8714232" y="5293634"/>
+            <a:ext cx="2599639" cy="942573"/>
           </a:xfrm>
           <a:prstGeom prst="rect">
             <a:avLst/>
@@ -20070,103 +21149,20 @@
               </a:lnSpc>
             </a:pPr>
             <a:r>
-              <a:rPr sz="1150" b="0">
+              <a:rPr sz="1200" b="0">
                 <a:solidFill>
                   <a:srgbClr val="FFFFFF"/>
                 </a:solidFill>
                 <a:latin typeface="Microsoft YaHei"/>
               </a:rPr>
-              <a:t>把 J 从低到高逐点重算，就得到整条红线。这是标准凸优化的全局上界（只有数值求解误差），不是对仿真点做拟合。</a:t>
-            </a:r>
-          </a:p>
-        </p:txBody>
-      </p:sp>
-      <p:sp>
-        <p:nvSpPr>
-          <p:cNvPr id="18" name="Rectangle 17"/>
-          <p:cNvSpPr/>
-          <p:nvPr/>
-        </p:nvSpPr>
-        <p:spPr>
-          <a:xfrm>
-            <a:off x="8403336" y="5304689"/>
-            <a:ext cx="3221431" cy="1022958"/>
-          </a:xfrm>
-          <a:prstGeom prst="rect">
-            <a:avLst/>
-          </a:prstGeom>
-          <a:solidFill>
-            <a:srgbClr val="D20A2E"/>
-          </a:solidFill>
-          <a:ln>
-            <a:noFill/>
-          </a:ln>
-          <a:effectLst/>
-        </p:spPr>
-        <p:style>
-          <a:lnRef idx="1">
-            <a:schemeClr val="accent1"/>
-          </a:lnRef>
-          <a:fillRef idx="3">
-            <a:schemeClr val="accent1"/>
-          </a:fillRef>
-          <a:effectRef idx="2">
-            <a:schemeClr val="accent1"/>
-          </a:effectRef>
-          <a:fontRef idx="minor">
-            <a:schemeClr val="lt1"/>
-          </a:fontRef>
-        </p:style>
-        <p:txBody>
-          <a:bodyPr rtlCol="0" anchor="ctr" wrap="square"/>
-          <a:lstStyle/>
-          <a:p>
-            <a:pPr algn="ctr"/>
-          </a:p>
-        </p:txBody>
-      </p:sp>
-      <p:sp>
-        <p:nvSpPr>
-          <p:cNvPr id="19" name="TextBox 18"/>
-          <p:cNvSpPr txBox="1"/>
-          <p:nvPr/>
-        </p:nvSpPr>
-        <p:spPr>
-          <a:xfrm>
-            <a:off x="8714232" y="5396129"/>
-            <a:ext cx="2599639" cy="840078"/>
-          </a:xfrm>
-          <a:prstGeom prst="rect">
-            <a:avLst/>
-          </a:prstGeom>
-          <a:noFill/>
-        </p:spPr>
-        <p:txBody>
-          <a:bodyPr wrap="square" anchor="ctr" lIns="0" rIns="0" tIns="0" bIns="0">
-            <a:spAutoFit/>
-          </a:bodyPr>
-          <a:lstStyle/>
-          <a:p>
-            <a:pPr algn="l">
-              <a:lnSpc>
-                <a:spcPct val="104000"/>
-              </a:lnSpc>
-            </a:pPr>
-            <a:r>
-              <a:rPr sz="1050" b="0">
-                <a:solidFill>
-                  <a:srgbClr val="FFFFFF"/>
-                </a:solidFill>
-                <a:latin typeface="Microsoft YaHei"/>
-              </a:rPr>
-              <a:t>读图：红线上 = 该公平度下理论能做到的最好结果；红线下 = 实际机制损失；红线上方 = 资源容量不允许。J = 1 的最右端就是等速率上限 R* = 5.7143。</a:t>
-            </a:r>
-          </a:p>
-        </p:txBody>
-      </p:sp>
-      <p:sp>
-        <p:nvSpPr>
-          <p:cNvPr id="20" name="TextBox 19"/>
+              <a:t>红线上 = 该公平度下理论最好；红线下 = 机制损失；红线上方不可能。最右端 J=1 即 R* = 5.7143。</a:t>
+            </a:r>
+          </a:p>
+        </p:txBody>
+      </p:sp>
+      <p:sp>
+        <p:nvSpPr>
+          <p:cNvPr id="18" name="TextBox 17"/>
           <p:cNvSpPr txBox="1"/>
           <p:nvPr/>
         </p:nvSpPr>
@@ -33636,7 +34632,7 @@
         </p:nvSpPr>
         <p:spPr>
           <a:xfrm>
-            <a:off x="9226067" y="2453396"/>
+            <a:off x="9226067" y="2566873"/>
             <a:ext cx="2197531" cy="314705"/>
           </a:xfrm>
           <a:prstGeom prst="rect">
@@ -33675,8 +34671,8 @@
         </p:nvSpPr>
         <p:spPr>
           <a:xfrm>
-            <a:off x="9226067" y="2850398"/>
-            <a:ext cx="2197531" cy="2194285"/>
+            <a:off x="9226067" y="2963875"/>
+            <a:ext cx="2197531" cy="1967331"/>
           </a:xfrm>
           <a:prstGeom prst="rect">
             <a:avLst/>
@@ -33695,7 +34691,7 @@
               </a:lnSpc>
             </a:pPr>
             <a:r>
-              <a:rPr sz="850" b="0">
+              <a:rPr sz="900" b="0">
                 <a:solidFill>
                   <a:srgbClr val="20242C"/>
                 </a:solidFill>
@@ -33714,13 +34710,13 @@
               </a:spcBef>
             </a:pPr>
             <a:r>
-              <a:rPr sz="850" b="0">
-                <a:solidFill>
-                  <a:srgbClr val="20242C"/>
-                </a:solidFill>
-                <a:latin typeface="Microsoft YaHei"/>
-              </a:rPr>
-              <a:t>八类分类里原本空着的四类已全部实现并实测：自适应路由（S26）与逐跳背压（S27）结构性失效，显式速率要么不动公平（S28）要么用 40% 带宽换公平（S28S），只有预约调度（S29，复用让位执行器）三条轴全面优于 S1。</a:t>
+              <a:rPr sz="900" b="0">
+                <a:solidFill>
+                  <a:srgbClr val="20242C"/>
+                </a:solidFill>
+                <a:latin typeface="Microsoft YaHei"/>
+              </a:rPr>
+              <a:t>第 19 页空着的四格已实测：S26 / S27 结构性失效，S28 不动公平，S28S 用 40% 带宽换公平，只有 S29 三条轴优于 S1。</a:t>
             </a:r>
           </a:p>
           <a:p>
@@ -33733,7 +34729,7 @@
               </a:spcBef>
             </a:pPr>
             <a:r>
-              <a:rPr sz="850" b="0">
+              <a:rPr sz="900" b="0">
                 <a:solidFill>
                   <a:srgbClr val="20242C"/>
                 </a:solidFill>
@@ -33752,7 +34748,7 @@
               </a:spcBef>
             </a:pPr>
             <a:r>
-              <a:rPr sz="850" b="1">
+              <a:rPr sz="900" b="1">
                 <a:solidFill>
                   <a:srgbClr val="D20A2E"/>
                 </a:solidFill>
